--- a/docs/ppt/위례_공급가능용량_최종발표_v2.pptx
+++ b/docs/ppt/위례_공급가능용량_최종발표_v2.pptx
@@ -20,9 +20,10 @@
     <p:sldId id="268" r:id="rId14"/>
     <p:sldId id="269" r:id="rId15"/>
     <p:sldId id="270" r:id="rId16"/>
+    <p:sldId id="271" r:id="rId17"/>
   </p:sldIdLst>
   <p:notesMasterIdLst>
-    <p:notesMasterId r:id="rId17"/>
+    <p:notesMasterId r:id="rId18"/>
   </p:notesMasterIdLst>
   <p:sldSz cx="12191695" cy="6858000"/>
   <p:notesSz cx="6858000" cy="12191695"/>
@@ -1068,6 +1069,94 @@
             <a:fld id="{F7021451-1387-4CA6-816F-3879F97B5CBC}" type="slidenum">
               <a:rPr lang="en-US"/>
               <a:t>15</a:t>
+            </a:fld>
+            <a:endParaRPr lang="en-US"/>
+          </a:p>
+        </p:txBody>
+      </p:sp>
+    </p:spTree>
+    <p:extLst>
+      <p:ext uri="{BB962C8B-B14F-4D97-AF65-F5344CB8AC3E}">
+        <p14:creationId xmlns:p14="http://schemas.microsoft.com/office/powerpoint/2010/main" val="1024086991"/>
+      </p:ext>
+    </p:extLst>
+  </p:cSld>
+  <p:clrMapOvr>
+    <a:masterClrMapping/>
+  </p:clrMapOvr>
+</p:notes>
+</file>
+
+<file path=ppt/notesSlides/notesSlide16.xml><?xml version="1.0" encoding="utf-8"?>
+<p:notes xmlns:a="http://schemas.openxmlformats.org/drawingml/2006/main" xmlns:r="http://schemas.openxmlformats.org/officeDocument/2006/relationships" xmlns:p="http://schemas.openxmlformats.org/presentationml/2006/main">
+  <p:cSld>
+    <p:spTree>
+      <p:nvGrpSpPr>
+        <p:cNvPr id="1" name=""/>
+        <p:cNvGrpSpPr/>
+        <p:nvPr/>
+      </p:nvGrpSpPr>
+      <p:grpSpPr>
+        <a:xfrm>
+          <a:off x="0" y="0"/>
+          <a:ext cx="0" cy="0"/>
+          <a:chOff x="0" y="0"/>
+          <a:chExt cx="0" cy="0"/>
+        </a:xfrm>
+      </p:grpSpPr>
+      <p:sp>
+        <p:nvSpPr>
+          <p:cNvPr id="2" name="Slide Image Placeholder 1"/>
+          <p:cNvSpPr>
+            <a:spLocks noGrp="1" noRot="1" noChangeAspect="1"/>
+          </p:cNvSpPr>
+          <p:nvPr>
+            <p:ph type="sldImg"/>
+          </p:nvPr>
+        </p:nvSpPr>
+        <p:spPr/>
+      </p:sp>
+      <p:sp>
+        <p:nvSpPr>
+          <p:cNvPr id="3" name="Notes Placeholder 2"/>
+          <p:cNvSpPr>
+            <a:spLocks noGrp="1"/>
+          </p:cNvSpPr>
+          <p:nvPr>
+            <p:ph type="body" idx="1"/>
+          </p:nvPr>
+        </p:nvSpPr>
+        <p:spPr/>
+        <p:txBody>
+          <a:bodyPr/>
+          <a:lstStyle/>
+          <a:p>
+            <a:r>
+              <a:rPr lang="en-US" dirty="0"/>
+              <a:t/>
+            </a:r>
+            <a:endParaRPr lang="en-US" dirty="0"/>
+          </a:p>
+        </p:txBody>
+      </p:sp>
+      <p:sp>
+        <p:nvSpPr>
+          <p:cNvPr id="4" name="Slide Number Placeholder 3"/>
+          <p:cNvSpPr>
+            <a:spLocks noGrp="1"/>
+          </p:cNvSpPr>
+          <p:nvPr>
+            <p:ph type="sldNum" sz="quarter" idx="10"/>
+          </p:nvPr>
+        </p:nvSpPr>
+        <p:spPr/>
+        <p:txBody>
+          <a:bodyPr/>
+          <a:lstStyle/>
+          <a:p>
+            <a:fld id="{F7021451-1387-4CA6-816F-3879F97B5CBC}" type="slidenum">
+              <a:rPr lang="en-US"/>
+              <a:t>16</a:t>
             </a:fld>
             <a:endParaRPr lang="en-US"/>
           </a:p>
@@ -14921,7 +15010,7 @@
                 <a:ea typeface="Malgun Gothic" pitchFamily="34" charset="-122"/>
                 <a:cs typeface="Malgun Gothic" pitchFamily="34" charset="-120"/>
               </a:rPr>
-              <a:t>Tool 시연</a:t>
+              <a:t>Tool 기능</a:t>
             </a:r>
             <a:endParaRPr lang="en-US" sz="1125" dirty="0"/>
           </a:p>
@@ -14959,7 +15048,7 @@
         <p:spPr>
           <a:xfrm>
             <a:off x="685800" y="914400"/>
-            <a:ext cx="10287000" cy="444056"/>
+            <a:ext cx="10287000" cy="888111"/>
           </a:xfrm>
           <a:prstGeom prst="rect">
             <a:avLst/>
@@ -14986,8 +15075,11 @@
                 <a:ea typeface="Malgun Gothic" pitchFamily="34" charset="-122"/>
                 <a:cs typeface="Malgun Gothic" pitchFamily="34" charset="-120"/>
               </a:rPr>
-              <a:t>실제로 </a:t>
-            </a:r>
+              <a:t>엑셀 4개가 하던 일이,</a:t>
+            </a:r>
+            <a:endParaRPr lang="en-US" sz="2775" dirty="0"/>
+          </a:p>
+          <a:p>
             <a:pPr algn="l" indent="0" marL="0">
               <a:lnSpc>
                 <a:spcPts val="3496"/>
@@ -15003,7 +15095,24 @@
                 <a:ea typeface="Malgun Gothic" pitchFamily="34" charset="-122"/>
                 <a:cs typeface="Malgun Gothic" pitchFamily="34" charset="-120"/>
               </a:rPr>
-              <a:t>돌려 보겠습니다</a:t>
+              <a:t>이 한 화면</a:t>
+            </a:r>
+            <a:pPr algn="l" indent="0" marL="0">
+              <a:lnSpc>
+                <a:spcPts val="3496"/>
+              </a:lnSpc>
+              <a:buNone/>
+            </a:pPr>
+            <a:r>
+              <a:rPr lang="en-US" sz="2775" b="1" dirty="0">
+                <a:solidFill>
+                  <a:srgbClr val="EAE7E0"/>
+                </a:solidFill>
+                <a:latin typeface="Malgun Gothic" pitchFamily="34" charset="0"/>
+                <a:ea typeface="Malgun Gothic" pitchFamily="34" charset="-122"/>
+                <a:cs typeface="Malgun Gothic" pitchFamily="34" charset="-120"/>
+              </a:rPr>
+              <a:t>에 들어왔습니다</a:t>
             </a:r>
             <a:endParaRPr lang="en-US" sz="2775" dirty="0"/>
           </a:p>
@@ -15017,7 +15126,7 @@
         </p:nvSpPr>
         <p:spPr>
           <a:xfrm>
-            <a:off x="685800" y="1504950"/>
+            <a:off x="685800" y="2000250"/>
             <a:ext cx="10287000" cy="284607"/>
           </a:xfrm>
           <a:prstGeom prst="rect">
@@ -15045,7 +15154,7 @@
                 <a:ea typeface="Malgun Gothic" pitchFamily="34" charset="-122"/>
                 <a:cs typeface="Malgun Gothic" pitchFamily="34" charset="-120"/>
               </a:rPr>
-              <a:t>3~4분입니다. </a:t>
+              <a:t>탭 6개입니다. 날짜·시각을 넣고 실행하면 </a:t>
             </a:r>
             <a:pPr algn="l" indent="0" marL="0">
               <a:lnSpc>
@@ -15062,7 +15171,7 @@
                 <a:ea typeface="Malgun Gothic" pitchFamily="34" charset="-122"/>
                 <a:cs typeface="Malgun Gothic" pitchFamily="34" charset="-120"/>
               </a:rPr>
-              <a:t>네 단계</a:t>
+              <a:t>−20 ~ 40℃ 61행 신고값 표</a:t>
             </a:r>
             <a:pPr algn="l" indent="0" marL="0">
               <a:lnSpc>
@@ -15079,1050 +15188,50 @@
                 <a:ea typeface="Malgun Gothic" pitchFamily="34" charset="-122"/>
                 <a:cs typeface="Malgun Gothic" pitchFamily="34" charset="-120"/>
               </a:rPr>
-              <a:t> 만 보시면 됩니다.</a:t>
+              <a:t> 가 그대로 나옵니다.</a:t>
             </a:r>
             <a:endParaRPr lang="en-US" sz="1350" dirty="0"/>
           </a:p>
         </p:txBody>
       </p:sp>
-      <p:sp>
-        <p:nvSpPr>
-          <p:cNvPr id="6" name="Shape 4"/>
-          <p:cNvSpPr/>
-          <p:nvPr/>
-        </p:nvSpPr>
-        <p:spPr>
-          <a:xfrm>
-            <a:off x="685800" y="2286000"/>
-            <a:ext cx="10820400" cy="2057400"/>
-          </a:xfrm>
-          <a:prstGeom prst="rect">
-            <a:avLst/>
-          </a:prstGeom>
-          <a:solidFill>
-            <a:srgbClr val="0A1320"/>
-          </a:solidFill>
-          <a:ln w="12700">
-            <a:solidFill>
-              <a:srgbClr val="182838"/>
-            </a:solidFill>
-            <a:prstDash val="solid"/>
-          </a:ln>
-        </p:spPr>
-      </p:sp>
-      <p:sp>
-        <p:nvSpPr>
-          <p:cNvPr id="7" name="Text 5"/>
-          <p:cNvSpPr txBox="1"/>
-          <p:nvPr/>
-        </p:nvSpPr>
-        <p:spPr>
-          <a:xfrm>
-            <a:off x="914400" y="2514600"/>
-            <a:ext cx="419100" cy="420053"/>
-          </a:xfrm>
-          <a:prstGeom prst="rect">
-            <a:avLst/>
-          </a:prstGeom>
-          <a:noFill/>
-          <a:ln/>
-        </p:spPr>
-        <p:txBody>
-          <a:bodyPr wrap="square" lIns="0" tIns="0" rIns="0" bIns="0" rtlCol="0" anchor="t"/>
-          <a:lstStyle/>
-          <a:p>
-            <a:pPr algn="l" indent="0" marL="0">
-              <a:lnSpc>
-                <a:spcPts val="3308"/>
-              </a:lnSpc>
-              <a:buNone/>
-            </a:pPr>
-            <a:r>
-              <a:rPr lang="en-US" sz="3150" b="1" dirty="0">
-                <a:solidFill>
-                  <a:srgbClr val="8A6620"/>
-                </a:solidFill>
-                <a:latin typeface="Consolas" pitchFamily="34" charset="0"/>
-                <a:ea typeface="Consolas" pitchFamily="34" charset="-122"/>
-                <a:cs typeface="Consolas" pitchFamily="34" charset="-120"/>
-              </a:rPr>
-              <a:t>1</a:t>
-            </a:r>
-            <a:endParaRPr lang="en-US" sz="3150" dirty="0"/>
-          </a:p>
-        </p:txBody>
-      </p:sp>
-      <p:sp>
-        <p:nvSpPr>
-          <p:cNvPr id="8" name="Text 6"/>
-          <p:cNvSpPr txBox="1"/>
-          <p:nvPr/>
-        </p:nvSpPr>
-        <p:spPr>
-          <a:xfrm>
-            <a:off x="1390650" y="2552700"/>
-            <a:ext cx="1866900" cy="284036"/>
-          </a:xfrm>
-          <a:prstGeom prst="rect">
-            <a:avLst/>
-          </a:prstGeom>
-          <a:noFill/>
-          <a:ln/>
-        </p:spPr>
-        <p:txBody>
-          <a:bodyPr wrap="square" lIns="0" tIns="0" rIns="0" bIns="0" rtlCol="0" anchor="t"/>
-          <a:lstStyle/>
-          <a:p>
-            <a:pPr algn="l" indent="0" marL="0">
-              <a:lnSpc>
-                <a:spcPts val="2237"/>
-              </a:lnSpc>
-              <a:buNone/>
-            </a:pPr>
-            <a:r>
-              <a:rPr lang="en-US" sz="1575" b="1" dirty="0">
-                <a:solidFill>
-                  <a:srgbClr val="EAE7E0"/>
-                </a:solidFill>
-                <a:latin typeface="Malgun Gothic" pitchFamily="34" charset="0"/>
-                <a:ea typeface="Malgun Gothic" pitchFamily="34" charset="-122"/>
-                <a:cs typeface="Malgun Gothic" pitchFamily="34" charset="-120"/>
-              </a:rPr>
-              <a:t>데이터 취득</a:t>
-            </a:r>
-            <a:endParaRPr lang="en-US" sz="1575" dirty="0"/>
-          </a:p>
-        </p:txBody>
-      </p:sp>
-      <p:sp>
-        <p:nvSpPr>
-          <p:cNvPr id="9" name="Text 7"/>
-          <p:cNvSpPr txBox="1"/>
-          <p:nvPr/>
-        </p:nvSpPr>
-        <p:spPr>
-          <a:xfrm>
-            <a:off x="1390650" y="2933700"/>
-            <a:ext cx="1866900" cy="960120"/>
-          </a:xfrm>
-          <a:prstGeom prst="rect">
-            <a:avLst/>
-          </a:prstGeom>
-          <a:noFill/>
-          <a:ln/>
-        </p:spPr>
-        <p:txBody>
-          <a:bodyPr wrap="square" lIns="0" tIns="0" rIns="0" bIns="0" rtlCol="0" anchor="t"/>
-          <a:lstStyle/>
-          <a:p>
-            <a:pPr algn="l" indent="0" marL="0">
-              <a:lnSpc>
-                <a:spcPts val="1890"/>
-              </a:lnSpc>
-              <a:buNone/>
-            </a:pPr>
-            <a:r>
-              <a:rPr lang="en-US" sz="1125" dirty="0">
-                <a:solidFill>
-                  <a:srgbClr val="CFCBC2"/>
-                </a:solidFill>
-                <a:latin typeface="Malgun Gothic" pitchFamily="34" charset="0"/>
-                <a:ea typeface="Malgun Gothic" pitchFamily="34" charset="-122"/>
-                <a:cs typeface="Malgun Gothic" pitchFamily="34" charset="-120"/>
-              </a:rPr>
-              <a:t>설비에서 값을 그대로 읽어옵니다. 사람이 옮겨 적는 칸이 없습니다.</a:t>
-            </a:r>
-            <a:endParaRPr lang="en-US" sz="1125" dirty="0"/>
-          </a:p>
-        </p:txBody>
-      </p:sp>
-      <p:sp>
-        <p:nvSpPr>
-          <p:cNvPr id="10" name="Shape 8"/>
-          <p:cNvSpPr/>
-          <p:nvPr/>
-        </p:nvSpPr>
-        <p:spPr>
-          <a:xfrm>
-            <a:off x="3352800" y="2514600"/>
-            <a:ext cx="0" cy="1524000"/>
-          </a:xfrm>
-          <a:prstGeom prst="line">
-            <a:avLst/>
-          </a:prstGeom>
-          <a:noFill/>
-          <a:ln w="12700">
-            <a:solidFill>
-              <a:srgbClr val="182838"/>
-            </a:solidFill>
-            <a:prstDash val="solid"/>
-          </a:ln>
-        </p:spPr>
-      </p:sp>
-      <p:sp>
-        <p:nvSpPr>
-          <p:cNvPr id="11" name="Text 9"/>
-          <p:cNvSpPr txBox="1"/>
-          <p:nvPr/>
-        </p:nvSpPr>
-        <p:spPr>
-          <a:xfrm>
-            <a:off x="3505200" y="2514600"/>
-            <a:ext cx="419100" cy="420053"/>
-          </a:xfrm>
-          <a:prstGeom prst="rect">
-            <a:avLst/>
-          </a:prstGeom>
-          <a:noFill/>
-          <a:ln/>
-        </p:spPr>
-        <p:txBody>
-          <a:bodyPr wrap="square" lIns="0" tIns="0" rIns="0" bIns="0" rtlCol="0" anchor="t"/>
-          <a:lstStyle/>
-          <a:p>
-            <a:pPr algn="l" indent="0" marL="0">
-              <a:lnSpc>
-                <a:spcPts val="3308"/>
-              </a:lnSpc>
-              <a:buNone/>
-            </a:pPr>
-            <a:r>
-              <a:rPr lang="en-US" sz="3150" b="1" dirty="0">
-                <a:solidFill>
-                  <a:srgbClr val="8A6620"/>
-                </a:solidFill>
-                <a:latin typeface="Consolas" pitchFamily="34" charset="0"/>
-                <a:ea typeface="Consolas" pitchFamily="34" charset="-122"/>
-                <a:cs typeface="Consolas" pitchFamily="34" charset="-120"/>
-              </a:rPr>
-              <a:t>2</a:t>
-            </a:r>
-            <a:endParaRPr lang="en-US" sz="3150" dirty="0"/>
-          </a:p>
-        </p:txBody>
-      </p:sp>
-      <p:sp>
-        <p:nvSpPr>
-          <p:cNvPr id="12" name="Text 10"/>
-          <p:cNvSpPr txBox="1"/>
-          <p:nvPr/>
-        </p:nvSpPr>
-        <p:spPr>
-          <a:xfrm>
-            <a:off x="3981450" y="2552700"/>
-            <a:ext cx="1866900" cy="284036"/>
-          </a:xfrm>
-          <a:prstGeom prst="rect">
-            <a:avLst/>
-          </a:prstGeom>
-          <a:noFill/>
-          <a:ln/>
-        </p:spPr>
-        <p:txBody>
-          <a:bodyPr wrap="square" lIns="0" tIns="0" rIns="0" bIns="0" rtlCol="0" anchor="t"/>
-          <a:lstStyle/>
-          <a:p>
-            <a:pPr algn="l" indent="0" marL="0">
-              <a:lnSpc>
-                <a:spcPts val="2237"/>
-              </a:lnSpc>
-              <a:buNone/>
-            </a:pPr>
-            <a:r>
-              <a:rPr lang="en-US" sz="1575" b="1" dirty="0">
-                <a:solidFill>
-                  <a:srgbClr val="EAE7E0"/>
-                </a:solidFill>
-                <a:latin typeface="Malgun Gothic" pitchFamily="34" charset="0"/>
-                <a:ea typeface="Malgun Gothic" pitchFamily="34" charset="-122"/>
-                <a:cs typeface="Malgun Gothic" pitchFamily="34" charset="-120"/>
-              </a:rPr>
-              <a:t>출력 시뮬레이션</a:t>
-            </a:r>
-            <a:endParaRPr lang="en-US" sz="1575" dirty="0"/>
-          </a:p>
-        </p:txBody>
-      </p:sp>
-      <p:sp>
-        <p:nvSpPr>
-          <p:cNvPr id="13" name="Text 11"/>
-          <p:cNvSpPr txBox="1"/>
-          <p:nvPr/>
-        </p:nvSpPr>
-        <p:spPr>
-          <a:xfrm>
-            <a:off x="3981450" y="2933700"/>
-            <a:ext cx="1866900" cy="960120"/>
-          </a:xfrm>
-          <a:prstGeom prst="rect">
-            <a:avLst/>
-          </a:prstGeom>
-          <a:noFill/>
-          <a:ln/>
-        </p:spPr>
-        <p:txBody>
-          <a:bodyPr wrap="square" lIns="0" tIns="0" rIns="0" bIns="0" rtlCol="0" anchor="t"/>
-          <a:lstStyle/>
-          <a:p>
-            <a:pPr algn="l" indent="0" marL="0">
-              <a:lnSpc>
-                <a:spcPts val="1890"/>
-              </a:lnSpc>
-              <a:buNone/>
-            </a:pPr>
-            <a:r>
-              <a:rPr lang="en-US" sz="1125" dirty="0">
-                <a:solidFill>
-                  <a:srgbClr val="CFCBC2"/>
-                </a:solidFill>
-                <a:latin typeface="Malgun Gothic" pitchFamily="34" charset="0"/>
-                <a:ea typeface="Malgun Gothic" pitchFamily="34" charset="-122"/>
-                <a:cs typeface="Malgun Gothic" pitchFamily="34" charset="-120"/>
-              </a:rPr>
-              <a:t>온도를 넣으면 이론값이 나옵니다. 손대지 않는 부분입니다.</a:t>
-            </a:r>
-            <a:endParaRPr lang="en-US" sz="1125" dirty="0"/>
-          </a:p>
-        </p:txBody>
-      </p:sp>
-      <p:sp>
-        <p:nvSpPr>
-          <p:cNvPr id="14" name="Shape 12"/>
-          <p:cNvSpPr/>
-          <p:nvPr/>
-        </p:nvSpPr>
-        <p:spPr>
-          <a:xfrm>
-            <a:off x="5943600" y="2514600"/>
-            <a:ext cx="0" cy="1524000"/>
-          </a:xfrm>
-          <a:prstGeom prst="line">
-            <a:avLst/>
-          </a:prstGeom>
-          <a:noFill/>
-          <a:ln w="12700">
-            <a:solidFill>
-              <a:srgbClr val="182838"/>
-            </a:solidFill>
-            <a:prstDash val="solid"/>
-          </a:ln>
-        </p:spPr>
-      </p:sp>
-      <p:sp>
-        <p:nvSpPr>
-          <p:cNvPr id="15" name="Text 13"/>
-          <p:cNvSpPr txBox="1"/>
-          <p:nvPr/>
-        </p:nvSpPr>
-        <p:spPr>
-          <a:xfrm>
-            <a:off x="6096000" y="2514600"/>
-            <a:ext cx="419100" cy="420053"/>
-          </a:xfrm>
-          <a:prstGeom prst="rect">
-            <a:avLst/>
-          </a:prstGeom>
-          <a:noFill/>
-          <a:ln/>
-        </p:spPr>
-        <p:txBody>
-          <a:bodyPr wrap="square" lIns="0" tIns="0" rIns="0" bIns="0" rtlCol="0" anchor="t"/>
-          <a:lstStyle/>
-          <a:p>
-            <a:pPr algn="l" indent="0" marL="0">
-              <a:lnSpc>
-                <a:spcPts val="3308"/>
-              </a:lnSpc>
-              <a:buNone/>
-            </a:pPr>
-            <a:r>
-              <a:rPr lang="en-US" sz="3150" b="1" dirty="0">
-                <a:solidFill>
-                  <a:srgbClr val="8A6620"/>
-                </a:solidFill>
-                <a:latin typeface="Consolas" pitchFamily="34" charset="0"/>
-                <a:ea typeface="Consolas" pitchFamily="34" charset="-122"/>
-                <a:cs typeface="Consolas" pitchFamily="34" charset="-120"/>
-              </a:rPr>
-              <a:t>3</a:t>
-            </a:r>
-            <a:endParaRPr lang="en-US" sz="3150" dirty="0"/>
-          </a:p>
-        </p:txBody>
-      </p:sp>
-      <p:sp>
-        <p:nvSpPr>
-          <p:cNvPr id="16" name="Text 14"/>
-          <p:cNvSpPr txBox="1"/>
-          <p:nvPr/>
-        </p:nvSpPr>
-        <p:spPr>
-          <a:xfrm>
-            <a:off x="6572250" y="2552700"/>
-            <a:ext cx="1866900" cy="284036"/>
-          </a:xfrm>
-          <a:prstGeom prst="rect">
-            <a:avLst/>
-          </a:prstGeom>
-          <a:noFill/>
-          <a:ln/>
-        </p:spPr>
-        <p:txBody>
-          <a:bodyPr wrap="square" lIns="0" tIns="0" rIns="0" bIns="0" rtlCol="0" anchor="t"/>
-          <a:lstStyle/>
-          <a:p>
-            <a:pPr algn="l" indent="0" marL="0">
-              <a:lnSpc>
-                <a:spcPts val="2237"/>
-              </a:lnSpc>
-              <a:buNone/>
-            </a:pPr>
-            <a:r>
-              <a:rPr lang="en-US" sz="1575" b="1" dirty="0">
-                <a:solidFill>
-                  <a:srgbClr val="EAE7E0"/>
-                </a:solidFill>
-                <a:latin typeface="Malgun Gothic" pitchFamily="34" charset="0"/>
-                <a:ea typeface="Malgun Gothic" pitchFamily="34" charset="-122"/>
-                <a:cs typeface="Malgun Gothic" pitchFamily="34" charset="-120"/>
-              </a:rPr>
-              <a:t>곡선 비교</a:t>
-            </a:r>
-            <a:endParaRPr lang="en-US" sz="1575" dirty="0"/>
-          </a:p>
-        </p:txBody>
-      </p:sp>
-      <p:sp>
-        <p:nvSpPr>
-          <p:cNvPr id="17" name="Text 15"/>
-          <p:cNvSpPr txBox="1"/>
-          <p:nvPr/>
-        </p:nvSpPr>
-        <p:spPr>
-          <a:xfrm>
-            <a:off x="6572250" y="2933700"/>
-            <a:ext cx="1866900" cy="960120"/>
-          </a:xfrm>
-          <a:prstGeom prst="rect">
-            <a:avLst/>
-          </a:prstGeom>
-          <a:noFill/>
-          <a:ln/>
-        </p:spPr>
-        <p:txBody>
-          <a:bodyPr wrap="square" lIns="0" tIns="0" rIns="0" bIns="0" rtlCol="0" anchor="t"/>
-          <a:lstStyle/>
-          <a:p>
-            <a:pPr algn="l" indent="0" marL="0">
-              <a:lnSpc>
-                <a:spcPts val="1890"/>
-              </a:lnSpc>
-              <a:buNone/>
-            </a:pPr>
-            <a:r>
-              <a:rPr lang="en-US" sz="1125" dirty="0">
-                <a:solidFill>
-                  <a:srgbClr val="CFCBC2"/>
-                </a:solidFill>
-                <a:latin typeface="Malgun Gothic" pitchFamily="34" charset="0"/>
-                <a:ea typeface="Malgun Gothic" pitchFamily="34" charset="-122"/>
-                <a:cs typeface="Malgun Gothic" pitchFamily="34" charset="-120"/>
-              </a:rPr>
-              <a:t>이론값 곡선과 모델 곡선을 겹쳐 봅니다. 차이가 눈에 보입니다.</a:t>
-            </a:r>
-            <a:endParaRPr lang="en-US" sz="1125" dirty="0"/>
-          </a:p>
-        </p:txBody>
-      </p:sp>
-      <p:sp>
-        <p:nvSpPr>
-          <p:cNvPr id="18" name="Shape 16"/>
-          <p:cNvSpPr/>
-          <p:nvPr/>
-        </p:nvSpPr>
-        <p:spPr>
-          <a:xfrm>
-            <a:off x="8534400" y="2514600"/>
-            <a:ext cx="0" cy="1524000"/>
-          </a:xfrm>
-          <a:prstGeom prst="line">
-            <a:avLst/>
-          </a:prstGeom>
-          <a:noFill/>
-          <a:ln w="12700">
-            <a:solidFill>
-              <a:srgbClr val="182838"/>
-            </a:solidFill>
-            <a:prstDash val="solid"/>
-          </a:ln>
-        </p:spPr>
-      </p:sp>
-      <p:sp>
-        <p:nvSpPr>
-          <p:cNvPr id="19" name="Text 17"/>
-          <p:cNvSpPr txBox="1"/>
-          <p:nvPr/>
-        </p:nvSpPr>
-        <p:spPr>
-          <a:xfrm>
-            <a:off x="8686800" y="2514600"/>
-            <a:ext cx="419100" cy="420053"/>
-          </a:xfrm>
-          <a:prstGeom prst="rect">
-            <a:avLst/>
-          </a:prstGeom>
-          <a:noFill/>
-          <a:ln/>
-        </p:spPr>
-        <p:txBody>
-          <a:bodyPr wrap="square" lIns="0" tIns="0" rIns="0" bIns="0" rtlCol="0" anchor="t"/>
-          <a:lstStyle/>
-          <a:p>
-            <a:pPr algn="l" indent="0" marL="0">
-              <a:lnSpc>
-                <a:spcPts val="3308"/>
-              </a:lnSpc>
-              <a:buNone/>
-            </a:pPr>
-            <a:r>
-              <a:rPr lang="en-US" sz="3150" b="1" dirty="0">
-                <a:solidFill>
-                  <a:srgbClr val="8A6620"/>
-                </a:solidFill>
-                <a:latin typeface="Consolas" pitchFamily="34" charset="0"/>
-                <a:ea typeface="Consolas" pitchFamily="34" charset="-122"/>
-                <a:cs typeface="Consolas" pitchFamily="34" charset="-120"/>
-              </a:rPr>
-              <a:t>4</a:t>
-            </a:r>
-            <a:endParaRPr lang="en-US" sz="3150" dirty="0"/>
-          </a:p>
-        </p:txBody>
-      </p:sp>
-      <p:sp>
-        <p:nvSpPr>
-          <p:cNvPr id="20" name="Text 18"/>
-          <p:cNvSpPr txBox="1"/>
-          <p:nvPr/>
-        </p:nvSpPr>
-        <p:spPr>
-          <a:xfrm>
-            <a:off x="9163050" y="2552700"/>
-            <a:ext cx="1866900" cy="284036"/>
-          </a:xfrm>
-          <a:prstGeom prst="rect">
-            <a:avLst/>
-          </a:prstGeom>
-          <a:noFill/>
-          <a:ln/>
-        </p:spPr>
-        <p:txBody>
-          <a:bodyPr wrap="square" lIns="0" tIns="0" rIns="0" bIns="0" rtlCol="0" anchor="t"/>
-          <a:lstStyle/>
-          <a:p>
-            <a:pPr algn="l" indent="0" marL="0">
-              <a:lnSpc>
-                <a:spcPts val="2237"/>
-              </a:lnSpc>
-              <a:buNone/>
-            </a:pPr>
-            <a:r>
-              <a:rPr lang="en-US" sz="1575" b="1" dirty="0">
-                <a:solidFill>
-                  <a:srgbClr val="EAE7E0"/>
-                </a:solidFill>
-                <a:latin typeface="Malgun Gothic" pitchFamily="34" charset="0"/>
-                <a:ea typeface="Malgun Gothic" pitchFamily="34" charset="-122"/>
-                <a:cs typeface="Malgun Gothic" pitchFamily="34" charset="-120"/>
-              </a:rPr>
-              <a:t>프로파일 생성</a:t>
-            </a:r>
-            <a:endParaRPr lang="en-US" sz="1575" dirty="0"/>
-          </a:p>
-        </p:txBody>
-      </p:sp>
-      <p:sp>
-        <p:nvSpPr>
-          <p:cNvPr id="21" name="Text 19"/>
-          <p:cNvSpPr txBox="1"/>
-          <p:nvPr/>
-        </p:nvSpPr>
-        <p:spPr>
-          <a:xfrm>
-            <a:off x="9163050" y="2933700"/>
-            <a:ext cx="1866900" cy="960120"/>
-          </a:xfrm>
-          <a:prstGeom prst="rect">
-            <a:avLst/>
-          </a:prstGeom>
-          <a:noFill/>
-          <a:ln/>
-        </p:spPr>
-        <p:txBody>
-          <a:bodyPr wrap="square" lIns="0" tIns="0" rIns="0" bIns="0" rtlCol="0" anchor="t"/>
-          <a:lstStyle/>
-          <a:p>
-            <a:pPr algn="l" indent="0" marL="0">
-              <a:lnSpc>
-                <a:spcPts val="1890"/>
-              </a:lnSpc>
-              <a:buNone/>
-            </a:pPr>
-            <a:r>
-              <a:rPr lang="en-US" sz="1125" dirty="0">
-                <a:solidFill>
-                  <a:srgbClr val="CFCBC2"/>
-                </a:solidFill>
-                <a:latin typeface="Malgun Gothic" pitchFamily="34" charset="0"/>
-                <a:ea typeface="Malgun Gothic" pitchFamily="34" charset="-122"/>
-                <a:cs typeface="Malgun Gothic" pitchFamily="34" charset="-120"/>
-              </a:rPr>
-              <a:t>온도별 신고값 표가 파일로 바로 나옵니다.</a:t>
-            </a:r>
-            <a:endParaRPr lang="en-US" sz="1125" dirty="0"/>
-          </a:p>
-        </p:txBody>
-      </p:sp>
-      <p:sp>
-        <p:nvSpPr>
-          <p:cNvPr id="22" name="Shape 20"/>
-          <p:cNvSpPr/>
-          <p:nvPr/>
-        </p:nvSpPr>
-        <p:spPr>
-          <a:xfrm>
-            <a:off x="685800" y="4572000"/>
-            <a:ext cx="10820400" cy="1371600"/>
-          </a:xfrm>
-          <a:prstGeom prst="rect">
-            <a:avLst/>
-          </a:prstGeom>
-          <a:solidFill>
-            <a:srgbClr val="0A1320"/>
-          </a:solidFill>
-          <a:ln w="12700">
-            <a:solidFill>
-              <a:srgbClr val="182838"/>
-            </a:solidFill>
-            <a:prstDash val="solid"/>
-          </a:ln>
-        </p:spPr>
-      </p:sp>
-      <p:sp>
-        <p:nvSpPr>
-          <p:cNvPr id="23" name="Text 21"/>
-          <p:cNvSpPr txBox="1"/>
-          <p:nvPr/>
-        </p:nvSpPr>
-        <p:spPr>
-          <a:xfrm>
-            <a:off x="914400" y="4705350"/>
-            <a:ext cx="2857500" cy="125016"/>
-          </a:xfrm>
-          <a:prstGeom prst="rect">
-            <a:avLst/>
-          </a:prstGeom>
-          <a:noFill/>
-          <a:ln/>
-        </p:spPr>
-        <p:txBody>
-          <a:bodyPr wrap="square" lIns="0" tIns="0" rIns="0" bIns="0" rtlCol="0" anchor="t"/>
-          <a:lstStyle/>
-          <a:p>
-            <a:pPr algn="l" indent="0" marL="0">
-              <a:lnSpc>
-                <a:spcPts val="984"/>
-              </a:lnSpc>
-              <a:buNone/>
-            </a:pPr>
-            <a:r>
-              <a:rPr lang="en-US" sz="788" b="1" spc="150" kern="0" dirty="0">
-                <a:solidFill>
-                  <a:srgbClr val="8A8880"/>
-                </a:solidFill>
-                <a:latin typeface="Consolas" pitchFamily="34" charset="0"/>
-                <a:ea typeface="Consolas" pitchFamily="34" charset="-122"/>
-                <a:cs typeface="Consolas" pitchFamily="34" charset="-120"/>
-              </a:rPr>
-              <a:t>보실 지점</a:t>
-            </a:r>
-            <a:endParaRPr lang="en-US" sz="788" dirty="0"/>
-          </a:p>
-        </p:txBody>
-      </p:sp>
-      <p:sp>
-        <p:nvSpPr>
-          <p:cNvPr id="24" name="Shape 22"/>
-          <p:cNvSpPr/>
-          <p:nvPr/>
-        </p:nvSpPr>
-        <p:spPr>
-          <a:xfrm>
-            <a:off x="914400" y="4972050"/>
-            <a:ext cx="381000" cy="19050"/>
-          </a:xfrm>
-          <a:prstGeom prst="rect">
-            <a:avLst/>
-          </a:prstGeom>
-          <a:solidFill>
-            <a:srgbClr val="EFB13C"/>
-          </a:solidFill>
-          <a:ln/>
-        </p:spPr>
-      </p:sp>
-      <p:sp>
-        <p:nvSpPr>
-          <p:cNvPr id="25" name="Text 23"/>
-          <p:cNvSpPr txBox="1"/>
-          <p:nvPr/>
-        </p:nvSpPr>
-        <p:spPr>
-          <a:xfrm>
-            <a:off x="914400" y="5086350"/>
-            <a:ext cx="3238500" cy="210503"/>
-          </a:xfrm>
-          <a:prstGeom prst="rect">
-            <a:avLst/>
-          </a:prstGeom>
-          <a:noFill/>
-          <a:ln/>
-        </p:spPr>
-        <p:txBody>
-          <a:bodyPr wrap="square" lIns="0" tIns="0" rIns="0" bIns="0" rtlCol="0" anchor="t"/>
-          <a:lstStyle/>
-          <a:p>
-            <a:pPr algn="l" indent="0" marL="0">
-              <a:lnSpc>
-                <a:spcPts val="1658"/>
-              </a:lnSpc>
-              <a:buNone/>
-            </a:pPr>
-            <a:r>
-              <a:rPr lang="en-US" sz="1275" b="1" dirty="0">
-                <a:solidFill>
-                  <a:srgbClr val="EAE7E0"/>
-                </a:solidFill>
-                <a:latin typeface="Malgun Gothic" pitchFamily="34" charset="0"/>
-                <a:ea typeface="Malgun Gothic" pitchFamily="34" charset="-122"/>
-                <a:cs typeface="Malgun Gothic" pitchFamily="34" charset="-120"/>
-              </a:rPr>
-              <a:t>손으로 옮길 값이 없다</a:t>
-            </a:r>
-            <a:endParaRPr lang="en-US" sz="1275" dirty="0"/>
-          </a:p>
-        </p:txBody>
-      </p:sp>
-      <p:sp>
-        <p:nvSpPr>
-          <p:cNvPr id="26" name="Text 24"/>
-          <p:cNvSpPr txBox="1"/>
-          <p:nvPr/>
-        </p:nvSpPr>
-        <p:spPr>
-          <a:xfrm>
-            <a:off x="914400" y="5353050"/>
-            <a:ext cx="3238500" cy="480060"/>
-          </a:xfrm>
-          <a:prstGeom prst="rect">
-            <a:avLst/>
-          </a:prstGeom>
-          <a:noFill/>
-          <a:ln/>
-        </p:spPr>
-        <p:txBody>
-          <a:bodyPr wrap="square" lIns="0" tIns="0" rIns="0" bIns="0" rtlCol="0" anchor="t"/>
-          <a:lstStyle/>
-          <a:p>
-            <a:pPr algn="l" indent="0" marL="0">
-              <a:lnSpc>
-                <a:spcPts val="1890"/>
-              </a:lnSpc>
-              <a:buNone/>
-            </a:pPr>
-            <a:r>
-              <a:rPr lang="en-US" sz="1125" dirty="0">
-                <a:solidFill>
-                  <a:srgbClr val="CFCBC2"/>
-                </a:solidFill>
-                <a:latin typeface="Malgun Gothic" pitchFamily="34" charset="0"/>
-                <a:ea typeface="Malgun Gothic" pitchFamily="34" charset="-122"/>
-                <a:cs typeface="Malgun Gothic" pitchFamily="34" charset="-120"/>
-              </a:rPr>
-              <a:t>날짜·시각만 넣으면 나머지는 도구가 채웁니다</a:t>
-            </a:r>
-            <a:endParaRPr lang="en-US" sz="1125" dirty="0"/>
-          </a:p>
-        </p:txBody>
-      </p:sp>
-      <p:sp>
-        <p:nvSpPr>
-          <p:cNvPr id="27" name="Shape 25"/>
-          <p:cNvSpPr/>
-          <p:nvPr/>
-        </p:nvSpPr>
-        <p:spPr>
-          <a:xfrm>
-            <a:off x="4267200" y="4953000"/>
-            <a:ext cx="0" cy="800100"/>
-          </a:xfrm>
-          <a:prstGeom prst="line">
-            <a:avLst/>
-          </a:prstGeom>
-          <a:noFill/>
-          <a:ln w="12700">
-            <a:solidFill>
-              <a:srgbClr val="182838"/>
-            </a:solidFill>
-            <a:prstDash val="solid"/>
-          </a:ln>
-        </p:spPr>
-      </p:sp>
-      <p:sp>
-        <p:nvSpPr>
-          <p:cNvPr id="28" name="Shape 26"/>
-          <p:cNvSpPr/>
-          <p:nvPr/>
-        </p:nvSpPr>
-        <p:spPr>
-          <a:xfrm>
-            <a:off x="4495800" y="4972050"/>
-            <a:ext cx="381000" cy="19050"/>
-          </a:xfrm>
-          <a:prstGeom prst="rect">
-            <a:avLst/>
-          </a:prstGeom>
-          <a:solidFill>
-            <a:srgbClr val="EFB13C"/>
-          </a:solidFill>
-          <a:ln/>
-        </p:spPr>
-      </p:sp>
-      <p:sp>
-        <p:nvSpPr>
-          <p:cNvPr id="29" name="Text 27"/>
-          <p:cNvSpPr txBox="1"/>
-          <p:nvPr/>
-        </p:nvSpPr>
-        <p:spPr>
-          <a:xfrm>
-            <a:off x="4495800" y="5086350"/>
-            <a:ext cx="3238500" cy="210503"/>
-          </a:xfrm>
-          <a:prstGeom prst="rect">
-            <a:avLst/>
-          </a:prstGeom>
-          <a:noFill/>
-          <a:ln/>
-        </p:spPr>
-        <p:txBody>
-          <a:bodyPr wrap="square" lIns="0" tIns="0" rIns="0" bIns="0" rtlCol="0" anchor="t"/>
-          <a:lstStyle/>
-          <a:p>
-            <a:pPr algn="l" indent="0" marL="0">
-              <a:lnSpc>
-                <a:spcPts val="1658"/>
-              </a:lnSpc>
-              <a:buNone/>
-            </a:pPr>
-            <a:r>
-              <a:rPr lang="en-US" sz="1275" b="1" dirty="0">
-                <a:solidFill>
-                  <a:srgbClr val="EAE7E0"/>
-                </a:solidFill>
-                <a:latin typeface="Malgun Gothic" pitchFamily="34" charset="0"/>
-                <a:ea typeface="Malgun Gothic" pitchFamily="34" charset="-122"/>
-                <a:cs typeface="Malgun Gothic" pitchFamily="34" charset="-120"/>
-              </a:rPr>
-              <a:t>숫자 옆에 근거</a:t>
-            </a:r>
-            <a:endParaRPr lang="en-US" sz="1275" dirty="0"/>
-          </a:p>
-        </p:txBody>
-      </p:sp>
-      <p:sp>
-        <p:nvSpPr>
-          <p:cNvPr id="30" name="Text 28"/>
-          <p:cNvSpPr txBox="1"/>
-          <p:nvPr/>
-        </p:nvSpPr>
-        <p:spPr>
-          <a:xfrm>
-            <a:off x="4495800" y="5353050"/>
-            <a:ext cx="3238500" cy="480060"/>
-          </a:xfrm>
-          <a:prstGeom prst="rect">
-            <a:avLst/>
-          </a:prstGeom>
-          <a:noFill/>
-          <a:ln/>
-        </p:spPr>
-        <p:txBody>
-          <a:bodyPr wrap="square" lIns="0" tIns="0" rIns="0" bIns="0" rtlCol="0" anchor="t"/>
-          <a:lstStyle/>
-          <a:p>
-            <a:pPr algn="l" indent="0" marL="0">
-              <a:lnSpc>
-                <a:spcPts val="1890"/>
-              </a:lnSpc>
-              <a:buNone/>
-            </a:pPr>
-            <a:r>
-              <a:rPr lang="en-US" sz="1125" dirty="0">
-                <a:solidFill>
-                  <a:srgbClr val="CFCBC2"/>
-                </a:solidFill>
-                <a:latin typeface="Malgun Gothic" pitchFamily="34" charset="0"/>
-                <a:ea typeface="Malgun Gothic" pitchFamily="34" charset="-122"/>
-                <a:cs typeface="Malgun Gothic" pitchFamily="34" charset="-120"/>
-              </a:rPr>
-              <a:t>몇 회로 배운 값인지 화면에 함께 나옵니다</a:t>
-            </a:r>
-            <a:endParaRPr lang="en-US" sz="1125" dirty="0"/>
-          </a:p>
-        </p:txBody>
-      </p:sp>
-      <p:sp>
-        <p:nvSpPr>
-          <p:cNvPr id="31" name="Shape 29"/>
-          <p:cNvSpPr/>
-          <p:nvPr/>
-        </p:nvSpPr>
-        <p:spPr>
-          <a:xfrm>
-            <a:off x="7848600" y="4953000"/>
-            <a:ext cx="0" cy="800100"/>
-          </a:xfrm>
-          <a:prstGeom prst="line">
-            <a:avLst/>
-          </a:prstGeom>
-          <a:noFill/>
-          <a:ln w="12700">
-            <a:solidFill>
-              <a:srgbClr val="182838"/>
-            </a:solidFill>
-            <a:prstDash val="solid"/>
-          </a:ln>
-        </p:spPr>
-      </p:sp>
-      <p:sp>
-        <p:nvSpPr>
-          <p:cNvPr id="32" name="Shape 30"/>
-          <p:cNvSpPr/>
-          <p:nvPr/>
-        </p:nvSpPr>
-        <p:spPr>
-          <a:xfrm>
-            <a:off x="8077200" y="4972050"/>
-            <a:ext cx="381000" cy="19050"/>
-          </a:xfrm>
-          <a:prstGeom prst="rect">
-            <a:avLst/>
-          </a:prstGeom>
-          <a:solidFill>
-            <a:srgbClr val="EFB13C"/>
-          </a:solidFill>
-          <a:ln/>
-        </p:spPr>
-      </p:sp>
-      <p:sp>
-        <p:nvSpPr>
-          <p:cNvPr id="33" name="Text 31"/>
-          <p:cNvSpPr txBox="1"/>
-          <p:nvPr/>
-        </p:nvSpPr>
-        <p:spPr>
-          <a:xfrm>
-            <a:off x="8077200" y="5086350"/>
-            <a:ext cx="3238500" cy="210503"/>
-          </a:xfrm>
-          <a:prstGeom prst="rect">
-            <a:avLst/>
-          </a:prstGeom>
-          <a:noFill/>
-          <a:ln/>
-        </p:spPr>
-        <p:txBody>
-          <a:bodyPr wrap="square" lIns="0" tIns="0" rIns="0" bIns="0" rtlCol="0" anchor="t"/>
-          <a:lstStyle/>
-          <a:p>
-            <a:pPr algn="l" indent="0" marL="0">
-              <a:lnSpc>
-                <a:spcPts val="1658"/>
-              </a:lnSpc>
-              <a:buNone/>
-            </a:pPr>
-            <a:r>
-              <a:rPr lang="en-US" sz="1275" b="1" dirty="0">
-                <a:solidFill>
-                  <a:srgbClr val="EAE7E0"/>
-                </a:solidFill>
-                <a:latin typeface="Malgun Gothic" pitchFamily="34" charset="0"/>
-                <a:ea typeface="Malgun Gothic" pitchFamily="34" charset="-122"/>
-                <a:cs typeface="Malgun Gothic" pitchFamily="34" charset="-120"/>
-              </a:rPr>
-              <a:t>결과를 넣으면 즉시</a:t>
-            </a:r>
-            <a:endParaRPr lang="en-US" sz="1275" dirty="0"/>
-          </a:p>
-        </p:txBody>
-      </p:sp>
-      <p:sp>
-        <p:nvSpPr>
-          <p:cNvPr id="34" name="Text 32"/>
-          <p:cNvSpPr txBox="1"/>
-          <p:nvPr/>
-        </p:nvSpPr>
-        <p:spPr>
-          <a:xfrm>
-            <a:off x="8077200" y="5353050"/>
-            <a:ext cx="3238500" cy="480060"/>
-          </a:xfrm>
-          <a:prstGeom prst="rect">
-            <a:avLst/>
-          </a:prstGeom>
-          <a:noFill/>
-          <a:ln/>
-        </p:spPr>
-        <p:txBody>
-          <a:bodyPr wrap="square" lIns="0" tIns="0" rIns="0" bIns="0" rtlCol="0" anchor="t"/>
-          <a:lstStyle/>
-          <a:p>
-            <a:pPr algn="l" indent="0" marL="0">
-              <a:lnSpc>
-                <a:spcPts val="1890"/>
-              </a:lnSpc>
-              <a:buNone/>
-            </a:pPr>
-            <a:r>
-              <a:rPr lang="en-US" sz="1125" dirty="0">
-                <a:solidFill>
-                  <a:srgbClr val="CFCBC2"/>
-                </a:solidFill>
-                <a:latin typeface="Malgun Gothic" pitchFamily="34" charset="0"/>
-                <a:ea typeface="Malgun Gothic" pitchFamily="34" charset="-122"/>
-                <a:cs typeface="Malgun Gothic" pitchFamily="34" charset="-120"/>
-              </a:rPr>
-              <a:t>다시 채점하고 다시 고르는 일이 그 자리에서</a:t>
-            </a:r>
-            <a:endParaRPr lang="en-US" sz="1125" dirty="0"/>
-          </a:p>
-        </p:txBody>
-      </p:sp>
-      <p:sp>
-        <p:nvSpPr>
-          <p:cNvPr id="35" name="Shape 33"/>
-          <p:cNvSpPr/>
-          <p:nvPr/>
-        </p:nvSpPr>
-        <p:spPr>
-          <a:xfrm>
-            <a:off x="685800" y="6057900"/>
-            <a:ext cx="10820400" cy="0"/>
-          </a:xfrm>
-          <a:prstGeom prst="line">
-            <a:avLst/>
-          </a:prstGeom>
-          <a:noFill/>
+      <p:pic>
+        <p:nvPicPr>
+          <p:cNvPr id="6" name="Image 0" descr="/home/user/Narae-AI/docs/ppt/assets/tool_window.png">    </p:cNvPr>
+          <p:cNvPicPr>
+            <a:picLocks noChangeAspect="1"/>
+          </p:cNvPicPr>
+          <p:nvPr/>
+        </p:nvPicPr>
+        <p:blipFill>
+          <a:blip r:embed="rId1"/>
+          <a:stretch>
+            <a:fillRect/>
+          </a:stretch>
+        </p:blipFill>
+        <p:spPr>
+          <a:xfrm>
+            <a:off x="685800" y="2343150"/>
+            <a:ext cx="4533900" cy="3048000"/>
+          </a:xfrm>
+          <a:prstGeom prst="rect">
+            <a:avLst/>
+          </a:prstGeom>
+        </p:spPr>
+      </p:pic>
+      <p:sp>
+        <p:nvSpPr>
+          <p:cNvPr id="7" name="Shape 4"/>
+          <p:cNvSpPr/>
+          <p:nvPr/>
+        </p:nvSpPr>
+        <p:spPr>
+          <a:xfrm>
+            <a:off x="676275" y="2333625"/>
+            <a:ext cx="4552950" cy="3067050"/>
+          </a:xfrm>
+          <a:prstGeom prst="rect">
+            <a:avLst/>
+          </a:prstGeom>
           <a:ln w="12700">
             <a:solidFill>
               <a:srgbClr val="22354A"/>
@@ -16131,35 +15240,81 @@
           </a:ln>
         </p:spPr>
       </p:sp>
-      <p:sp>
-        <p:nvSpPr>
-          <p:cNvPr id="36" name="Text 34"/>
-          <p:cNvSpPr txBox="1"/>
-          <p:nvPr/>
-        </p:nvSpPr>
-        <p:spPr>
-          <a:xfrm>
-            <a:off x="685800" y="6267450"/>
-            <a:ext cx="476250" cy="120015"/>
-          </a:xfrm>
-          <a:prstGeom prst="rect">
-            <a:avLst/>
-          </a:prstGeom>
-          <a:noFill/>
-          <a:ln/>
-        </p:spPr>
-        <p:txBody>
-          <a:bodyPr wrap="square" lIns="0" tIns="0" rIns="0" bIns="0" rtlCol="0" anchor="t"/>
-          <a:lstStyle/>
-          <a:p>
-            <a:pPr algn="l" indent="0" marL="0">
-              <a:lnSpc>
-                <a:spcPts val="945"/>
-              </a:lnSpc>
-              <a:buNone/>
-            </a:pPr>
-            <a:r>
-              <a:rPr lang="en-US" sz="788" b="1" spc="180" kern="0" dirty="0">
+      <p:pic>
+        <p:nvPicPr>
+          <p:cNvPr id="8" name="Image 1" descr="/home/user/Narae-AI/docs/ppt/assets/tool_curve.png">    </p:cNvPr>
+          <p:cNvPicPr>
+            <a:picLocks noChangeAspect="1"/>
+          </p:cNvPicPr>
+          <p:nvPr/>
+        </p:nvPicPr>
+        <p:blipFill>
+          <a:blip r:embed="rId2"/>
+          <a:stretch>
+            <a:fillRect/>
+          </a:stretch>
+        </p:blipFill>
+        <p:spPr>
+          <a:xfrm>
+            <a:off x="5600700" y="2343150"/>
+            <a:ext cx="5876925" cy="3048000"/>
+          </a:xfrm>
+          <a:prstGeom prst="rect">
+            <a:avLst/>
+          </a:prstGeom>
+        </p:spPr>
+      </p:pic>
+      <p:sp>
+        <p:nvSpPr>
+          <p:cNvPr id="9" name="Shape 5"/>
+          <p:cNvSpPr/>
+          <p:nvPr/>
+        </p:nvSpPr>
+        <p:spPr>
+          <a:xfrm>
+            <a:off x="5591175" y="2333625"/>
+            <a:ext cx="5895975" cy="3067050"/>
+          </a:xfrm>
+          <a:prstGeom prst="rect">
+            <a:avLst/>
+          </a:prstGeom>
+          <a:ln w="12700">
+            <a:solidFill>
+              <a:srgbClr val="22354A"/>
+            </a:solidFill>
+            <a:prstDash val="solid"/>
+          </a:ln>
+        </p:spPr>
+      </p:sp>
+      <p:sp>
+        <p:nvSpPr>
+          <p:cNvPr id="10" name="Text 6"/>
+          <p:cNvSpPr txBox="1"/>
+          <p:nvPr/>
+        </p:nvSpPr>
+        <p:spPr>
+          <a:xfrm>
+            <a:off x="685800" y="5486400"/>
+            <a:ext cx="4533900" cy="125016"/>
+          </a:xfrm>
+          <a:prstGeom prst="rect">
+            <a:avLst/>
+          </a:prstGeom>
+          <a:noFill/>
+          <a:ln/>
+        </p:spPr>
+        <p:txBody>
+          <a:bodyPr wrap="square" lIns="0" tIns="0" rIns="0" bIns="0" rtlCol="0" anchor="t"/>
+          <a:lstStyle/>
+          <a:p>
+            <a:pPr algn="l" indent="0" marL="0">
+              <a:lnSpc>
+                <a:spcPts val="984"/>
+              </a:lnSpc>
+              <a:buNone/>
+            </a:pPr>
+            <a:r>
+              <a:rPr lang="en-US" sz="788" b="1" spc="150" kern="0" dirty="0">
                 <a:solidFill>
                   <a:srgbClr val="EFB13C"/>
                 </a:solidFill>
@@ -16167,6 +15322,282 @@
                 <a:ea typeface="Consolas" pitchFamily="34" charset="-122"/>
                 <a:cs typeface="Consolas" pitchFamily="34" charset="-120"/>
               </a:rPr>
+              <a:t>무엇을 넣고 무엇이 나오나</a:t>
+            </a:r>
+            <a:endParaRPr lang="en-US" sz="788" dirty="0"/>
+          </a:p>
+        </p:txBody>
+      </p:sp>
+      <p:sp>
+        <p:nvSpPr>
+          <p:cNvPr id="11" name="Text 7"/>
+          <p:cNvSpPr txBox="1"/>
+          <p:nvPr/>
+        </p:nvSpPr>
+        <p:spPr>
+          <a:xfrm>
+            <a:off x="685800" y="5638800"/>
+            <a:ext cx="4533900" cy="167164"/>
+          </a:xfrm>
+          <a:prstGeom prst="rect">
+            <a:avLst/>
+          </a:prstGeom>
+          <a:noFill/>
+          <a:ln/>
+        </p:spPr>
+        <p:txBody>
+          <a:bodyPr wrap="square" lIns="0" tIns="0" rIns="0" bIns="0" rtlCol="0" anchor="t"/>
+          <a:lstStyle/>
+          <a:p>
+            <a:pPr algn="l" indent="0" marL="0">
+              <a:lnSpc>
+                <a:spcPts val="1316"/>
+              </a:lnSpc>
+              <a:buNone/>
+            </a:pPr>
+            <a:r>
+              <a:rPr lang="en-US" sz="975" dirty="0">
+                <a:solidFill>
+                  <a:srgbClr val="CFCBC2"/>
+                </a:solidFill>
+                <a:latin typeface="Malgun Gothic" pitchFamily="34" charset="0"/>
+                <a:ea typeface="Malgun Gothic" pitchFamily="34" charset="-122"/>
+                <a:cs typeface="Malgun Gothic" pitchFamily="34" charset="-120"/>
+              </a:rPr>
+              <a:t>입력은 </a:t>
+            </a:r>
+            <a:pPr algn="l" indent="0" marL="0">
+              <a:lnSpc>
+                <a:spcPts val="1316"/>
+              </a:lnSpc>
+              <a:buNone/>
+            </a:pPr>
+            <a:r>
+              <a:rPr lang="en-US" sz="975" b="1" dirty="0">
+                <a:solidFill>
+                  <a:srgbClr val="EFB13C"/>
+                </a:solidFill>
+                <a:latin typeface="Malgun Gothic" pitchFamily="34" charset="0"/>
+                <a:ea typeface="Malgun Gothic" pitchFamily="34" charset="-122"/>
+                <a:cs typeface="Malgun Gothic" pitchFamily="34" charset="-120"/>
+              </a:rPr>
+              <a:t>날짜·시각</a:t>
+            </a:r>
+            <a:pPr algn="l" indent="0" marL="0">
+              <a:lnSpc>
+                <a:spcPts val="1316"/>
+              </a:lnSpc>
+              <a:buNone/>
+            </a:pPr>
+            <a:r>
+              <a:rPr lang="en-US" sz="975" dirty="0">
+                <a:solidFill>
+                  <a:srgbClr val="CFCBC2"/>
+                </a:solidFill>
+                <a:latin typeface="Malgun Gothic" pitchFamily="34" charset="0"/>
+                <a:ea typeface="Malgun Gothic" pitchFamily="34" charset="-122"/>
+                <a:cs typeface="Malgun Gothic" pitchFamily="34" charset="-120"/>
+              </a:rPr>
+              <a:t> 4칸 → 아래에 61행 신고값 표</a:t>
+            </a:r>
+            <a:endParaRPr lang="en-US" sz="975" dirty="0"/>
+          </a:p>
+        </p:txBody>
+      </p:sp>
+      <p:sp>
+        <p:nvSpPr>
+          <p:cNvPr id="12" name="Text 8"/>
+          <p:cNvSpPr txBox="1"/>
+          <p:nvPr/>
+        </p:nvSpPr>
+        <p:spPr>
+          <a:xfrm>
+            <a:off x="5600700" y="5486400"/>
+            <a:ext cx="5876925" cy="125016"/>
+          </a:xfrm>
+          <a:prstGeom prst="rect">
+            <a:avLst/>
+          </a:prstGeom>
+          <a:noFill/>
+          <a:ln/>
+        </p:spPr>
+        <p:txBody>
+          <a:bodyPr wrap="square" lIns="0" tIns="0" rIns="0" bIns="0" rtlCol="0" anchor="t"/>
+          <a:lstStyle/>
+          <a:p>
+            <a:pPr algn="l" indent="0" marL="0">
+              <a:lnSpc>
+                <a:spcPts val="984"/>
+              </a:lnSpc>
+              <a:buNone/>
+            </a:pPr>
+            <a:r>
+              <a:rPr lang="en-US" sz="788" b="1" spc="150" kern="0" dirty="0">
+                <a:solidFill>
+                  <a:srgbClr val="EFB13C"/>
+                </a:solidFill>
+                <a:latin typeface="Consolas" pitchFamily="34" charset="0"/>
+                <a:ea typeface="Consolas" pitchFamily="34" charset="-122"/>
+                <a:cs typeface="Consolas" pitchFamily="34" charset="-120"/>
+              </a:rPr>
+              <a:t>무엇을 보고 판단하나</a:t>
+            </a:r>
+            <a:endParaRPr lang="en-US" sz="788" dirty="0"/>
+          </a:p>
+        </p:txBody>
+      </p:sp>
+      <p:sp>
+        <p:nvSpPr>
+          <p:cNvPr id="13" name="Text 9"/>
+          <p:cNvSpPr txBox="1"/>
+          <p:nvPr/>
+        </p:nvSpPr>
+        <p:spPr>
+          <a:xfrm>
+            <a:off x="5600700" y="5638800"/>
+            <a:ext cx="5876925" cy="167164"/>
+          </a:xfrm>
+          <a:prstGeom prst="rect">
+            <a:avLst/>
+          </a:prstGeom>
+          <a:noFill/>
+          <a:ln/>
+        </p:spPr>
+        <p:txBody>
+          <a:bodyPr wrap="square" lIns="0" tIns="0" rIns="0" bIns="0" rtlCol="0" anchor="t"/>
+          <a:lstStyle/>
+          <a:p>
+            <a:pPr algn="l" indent="0" marL="0">
+              <a:lnSpc>
+                <a:spcPts val="1316"/>
+              </a:lnSpc>
+              <a:buNone/>
+            </a:pPr>
+            <a:r>
+              <a:rPr lang="en-US" sz="975" dirty="0">
+                <a:solidFill>
+                  <a:srgbClr val="718BA6"/>
+                </a:solidFill>
+                <a:latin typeface="Malgun Gothic" pitchFamily="34" charset="0"/>
+                <a:ea typeface="Malgun Gothic" pitchFamily="34" charset="-122"/>
+                <a:cs typeface="Malgun Gothic" pitchFamily="34" charset="-120"/>
+              </a:rPr>
+              <a:t>이론값</a:t>
+            </a:r>
+            <a:pPr algn="l" indent="0" marL="0">
+              <a:lnSpc>
+                <a:spcPts val="1316"/>
+              </a:lnSpc>
+              <a:buNone/>
+            </a:pPr>
+            <a:r>
+              <a:rPr lang="en-US" sz="975" dirty="0">
+                <a:solidFill>
+                  <a:srgbClr val="CFCBC2"/>
+                </a:solidFill>
+                <a:latin typeface="Malgun Gothic" pitchFamily="34" charset="0"/>
+                <a:ea typeface="Malgun Gothic" pitchFamily="34" charset="-122"/>
+                <a:cs typeface="Malgun Gothic" pitchFamily="34" charset="-120"/>
+              </a:rPr>
+              <a:t> 곡선과 </a:t>
+            </a:r>
+            <a:pPr algn="l" indent="0" marL="0">
+              <a:lnSpc>
+                <a:spcPts val="1316"/>
+              </a:lnSpc>
+              <a:buNone/>
+            </a:pPr>
+            <a:r>
+              <a:rPr lang="en-US" sz="975" b="1" dirty="0">
+                <a:solidFill>
+                  <a:srgbClr val="EFB13C"/>
+                </a:solidFill>
+                <a:latin typeface="Malgun Gothic" pitchFamily="34" charset="0"/>
+                <a:ea typeface="Malgun Gothic" pitchFamily="34" charset="-122"/>
+                <a:cs typeface="Malgun Gothic" pitchFamily="34" charset="-120"/>
+              </a:rPr>
+              <a:t>모델</a:t>
+            </a:r>
+            <a:pPr algn="l" indent="0" marL="0">
+              <a:lnSpc>
+                <a:spcPts val="1316"/>
+              </a:lnSpc>
+              <a:buNone/>
+            </a:pPr>
+            <a:r>
+              <a:rPr lang="en-US" sz="975" dirty="0">
+                <a:solidFill>
+                  <a:srgbClr val="CFCBC2"/>
+                </a:solidFill>
+                <a:latin typeface="Malgun Gothic" pitchFamily="34" charset="0"/>
+                <a:ea typeface="Malgun Gothic" pitchFamily="34" charset="-122"/>
+                <a:cs typeface="Malgun Gothic" pitchFamily="34" charset="-120"/>
+              </a:rPr>
+              <a:t> 곡선, 그리고 실측점 40회를 겹쳐 봅니다</a:t>
+            </a:r>
+            <a:endParaRPr lang="en-US" sz="975" dirty="0"/>
+          </a:p>
+        </p:txBody>
+      </p:sp>
+      <p:sp>
+        <p:nvSpPr>
+          <p:cNvPr id="14" name="Shape 10"/>
+          <p:cNvSpPr/>
+          <p:nvPr/>
+        </p:nvSpPr>
+        <p:spPr>
+          <a:xfrm>
+            <a:off x="685800" y="6057900"/>
+            <a:ext cx="10820400" cy="0"/>
+          </a:xfrm>
+          <a:prstGeom prst="line">
+            <a:avLst/>
+          </a:prstGeom>
+          <a:noFill/>
+          <a:ln w="12700">
+            <a:solidFill>
+              <a:srgbClr val="22354A"/>
+            </a:solidFill>
+            <a:prstDash val="solid"/>
+          </a:ln>
+        </p:spPr>
+      </p:sp>
+      <p:sp>
+        <p:nvSpPr>
+          <p:cNvPr id="15" name="Text 11"/>
+          <p:cNvSpPr txBox="1"/>
+          <p:nvPr/>
+        </p:nvSpPr>
+        <p:spPr>
+          <a:xfrm>
+            <a:off x="685800" y="6267450"/>
+            <a:ext cx="476250" cy="120015"/>
+          </a:xfrm>
+          <a:prstGeom prst="rect">
+            <a:avLst/>
+          </a:prstGeom>
+          <a:noFill/>
+          <a:ln/>
+        </p:spPr>
+        <p:txBody>
+          <a:bodyPr wrap="square" lIns="0" tIns="0" rIns="0" bIns="0" rtlCol="0" anchor="t"/>
+          <a:lstStyle/>
+          <a:p>
+            <a:pPr algn="l" indent="0" marL="0">
+              <a:lnSpc>
+                <a:spcPts val="945"/>
+              </a:lnSpc>
+              <a:buNone/>
+            </a:pPr>
+            <a:r>
+              <a:rPr lang="en-US" sz="788" b="1" spc="180" kern="0" dirty="0">
+                <a:solidFill>
+                  <a:srgbClr val="EFB13C"/>
+                </a:solidFill>
+                <a:latin typeface="Consolas" pitchFamily="34" charset="0"/>
+                <a:ea typeface="Consolas" pitchFamily="34" charset="-122"/>
+                <a:cs typeface="Consolas" pitchFamily="34" charset="-120"/>
+              </a:rPr>
               <a:t>결론</a:t>
             </a:r>
             <a:endParaRPr lang="en-US" sz="788" dirty="0"/>
@@ -16175,7 +15606,7 @@
       </p:sp>
       <p:sp>
         <p:nvSpPr>
-          <p:cNvPr id="37" name="Text 35"/>
+          <p:cNvPr id="16" name="Text 12"/>
           <p:cNvSpPr txBox="1"/>
           <p:nvPr/>
         </p:nvSpPr>
@@ -16209,7 +15640,7 @@
                 <a:ea typeface="Malgun Gothic" pitchFamily="34" charset="-122"/>
                 <a:cs typeface="Malgun Gothic" pitchFamily="34" charset="-120"/>
               </a:rPr>
-              <a:t>입력하는 칸이 아니라, </a:t>
+              <a:t>목업이 아니라 </a:t>
             </a:r>
             <a:pPr algn="l" indent="0" marL="0">
               <a:lnSpc>
@@ -16226,7 +15657,7 @@
                 <a:ea typeface="Malgun Gothic" pitchFamily="34" charset="-122"/>
                 <a:cs typeface="Malgun Gothic" pitchFamily="34" charset="-120"/>
               </a:rPr>
-              <a:t>근거가 붙은 숫자</a:t>
+              <a:t>실제 화면</a:t>
             </a:r>
             <a:pPr algn="l" indent="0" marL="0">
               <a:lnSpc>
@@ -16243,7 +15674,7 @@
                 <a:ea typeface="Malgun Gothic" pitchFamily="34" charset="-122"/>
                 <a:cs typeface="Malgun Gothic" pitchFamily="34" charset="-120"/>
               </a:rPr>
-              <a:t>를 보십시오.</a:t>
+              <a:t>입니다 — 다음 장에서 직접 띄우겠습니다.</a:t>
             </a:r>
             <a:endParaRPr lang="en-US" sz="1238" dirty="0"/>
           </a:p>
@@ -16260,6 +15691,1141 @@
 <file path=ppt/slides/slide15.xml><?xml version="1.0" encoding="utf-8"?>
 <p:sld xmlns:a="http://schemas.openxmlformats.org/drawingml/2006/main" xmlns:r="http://schemas.openxmlformats.org/officeDocument/2006/relationships" xmlns:p="http://schemas.openxmlformats.org/presentationml/2006/main">
   <p:cSld name="Slide 15">
+    <p:bg>
+      <p:bgPr>
+        <a:solidFill>
+          <a:srgbClr val="0F1A28"/>
+        </a:solidFill>
+      </p:bgPr>
+    </p:bg>
+    <p:spTree>
+      <p:nvGrpSpPr>
+        <p:cNvPr id="1" name=""/>
+        <p:cNvGrpSpPr/>
+        <p:nvPr/>
+      </p:nvGrpSpPr>
+      <p:grpSpPr>
+        <a:xfrm>
+          <a:off x="0" y="0"/>
+          <a:ext cx="0" cy="0"/>
+          <a:chOff x="0" y="0"/>
+          <a:chExt cx="0" cy="0"/>
+        </a:xfrm>
+      </p:grpSpPr>
+      <p:sp>
+        <p:nvSpPr>
+          <p:cNvPr id="2" name="Text 0"/>
+          <p:cNvSpPr txBox="1"/>
+          <p:nvPr/>
+        </p:nvSpPr>
+        <p:spPr>
+          <a:xfrm>
+            <a:off x="685800" y="419100"/>
+            <a:ext cx="7620000" cy="182880"/>
+          </a:xfrm>
+          <a:prstGeom prst="rect">
+            <a:avLst/>
+          </a:prstGeom>
+          <a:noFill/>
+          <a:ln/>
+        </p:spPr>
+        <p:txBody>
+          <a:bodyPr wrap="square" lIns="0" tIns="0" rIns="0" bIns="0" rtlCol="0" anchor="t"/>
+          <a:lstStyle/>
+          <a:p>
+            <a:pPr algn="l" indent="0" marL="0">
+              <a:lnSpc>
+                <a:spcPts val="1440"/>
+              </a:lnSpc>
+              <a:buNone/>
+            </a:pPr>
+            <a:r>
+              <a:rPr lang="en-US" sz="1125" b="1" spc="60" kern="0" dirty="0">
+                <a:solidFill>
+                  <a:srgbClr val="EAE7E0"/>
+                </a:solidFill>
+                <a:latin typeface="Malgun Gothic" pitchFamily="34" charset="0"/>
+                <a:ea typeface="Malgun Gothic" pitchFamily="34" charset="-122"/>
+                <a:cs typeface="Malgun Gothic" pitchFamily="34" charset="-120"/>
+              </a:rPr>
+              <a:t>Tool 시연</a:t>
+            </a:r>
+            <a:endParaRPr lang="en-US" sz="1125" dirty="0"/>
+          </a:p>
+        </p:txBody>
+      </p:sp>
+      <p:sp>
+        <p:nvSpPr>
+          <p:cNvPr id="3" name="Shape 1"/>
+          <p:cNvSpPr/>
+          <p:nvPr/>
+        </p:nvSpPr>
+        <p:spPr>
+          <a:xfrm>
+            <a:off x="685800" y="685800"/>
+            <a:ext cx="10820400" cy="0"/>
+          </a:xfrm>
+          <a:prstGeom prst="line">
+            <a:avLst/>
+          </a:prstGeom>
+          <a:noFill/>
+          <a:ln w="12700">
+            <a:solidFill>
+              <a:srgbClr val="22354A"/>
+            </a:solidFill>
+            <a:prstDash val="solid"/>
+          </a:ln>
+        </p:spPr>
+      </p:sp>
+      <p:sp>
+        <p:nvSpPr>
+          <p:cNvPr id="4" name="Text 2"/>
+          <p:cNvSpPr txBox="1"/>
+          <p:nvPr/>
+        </p:nvSpPr>
+        <p:spPr>
+          <a:xfrm>
+            <a:off x="685800" y="914400"/>
+            <a:ext cx="10287000" cy="444056"/>
+          </a:xfrm>
+          <a:prstGeom prst="rect">
+            <a:avLst/>
+          </a:prstGeom>
+          <a:noFill/>
+          <a:ln/>
+        </p:spPr>
+        <p:txBody>
+          <a:bodyPr wrap="square" lIns="0" tIns="0" rIns="0" bIns="0" rtlCol="0" anchor="t"/>
+          <a:lstStyle/>
+          <a:p>
+            <a:pPr algn="l" indent="0" marL="0">
+              <a:lnSpc>
+                <a:spcPts val="3496"/>
+              </a:lnSpc>
+              <a:buNone/>
+            </a:pPr>
+            <a:r>
+              <a:rPr lang="en-US" sz="2775" b="1" dirty="0">
+                <a:solidFill>
+                  <a:srgbClr val="EAE7E0"/>
+                </a:solidFill>
+                <a:latin typeface="Malgun Gothic" pitchFamily="34" charset="0"/>
+                <a:ea typeface="Malgun Gothic" pitchFamily="34" charset="-122"/>
+                <a:cs typeface="Malgun Gothic" pitchFamily="34" charset="-120"/>
+              </a:rPr>
+              <a:t>실제로 </a:t>
+            </a:r>
+            <a:pPr algn="l" indent="0" marL="0">
+              <a:lnSpc>
+                <a:spcPts val="3496"/>
+              </a:lnSpc>
+              <a:buNone/>
+            </a:pPr>
+            <a:r>
+              <a:rPr lang="en-US" sz="2775" b="1" dirty="0">
+                <a:solidFill>
+                  <a:srgbClr val="EFB13C"/>
+                </a:solidFill>
+                <a:latin typeface="Malgun Gothic" pitchFamily="34" charset="0"/>
+                <a:ea typeface="Malgun Gothic" pitchFamily="34" charset="-122"/>
+                <a:cs typeface="Malgun Gothic" pitchFamily="34" charset="-120"/>
+              </a:rPr>
+              <a:t>돌려 보겠습니다</a:t>
+            </a:r>
+            <a:endParaRPr lang="en-US" sz="2775" dirty="0"/>
+          </a:p>
+        </p:txBody>
+      </p:sp>
+      <p:sp>
+        <p:nvSpPr>
+          <p:cNvPr id="5" name="Text 3"/>
+          <p:cNvSpPr txBox="1"/>
+          <p:nvPr/>
+        </p:nvSpPr>
+        <p:spPr>
+          <a:xfrm>
+            <a:off x="685800" y="1447800"/>
+            <a:ext cx="10287000" cy="284607"/>
+          </a:xfrm>
+          <a:prstGeom prst="rect">
+            <a:avLst/>
+          </a:prstGeom>
+          <a:noFill/>
+          <a:ln/>
+        </p:spPr>
+        <p:txBody>
+          <a:bodyPr wrap="square" lIns="0" tIns="0" rIns="0" bIns="0" rtlCol="0" anchor="t"/>
+          <a:lstStyle/>
+          <a:p>
+            <a:pPr algn="l" indent="0" marL="0">
+              <a:lnSpc>
+                <a:spcPts val="2241"/>
+              </a:lnSpc>
+              <a:buNone/>
+            </a:pPr>
+            <a:r>
+              <a:rPr lang="en-US" sz="1350" dirty="0">
+                <a:solidFill>
+                  <a:srgbClr val="CFCBC2"/>
+                </a:solidFill>
+                <a:latin typeface="Malgun Gothic" pitchFamily="34" charset="0"/>
+                <a:ea typeface="Malgun Gothic" pitchFamily="34" charset="-122"/>
+                <a:cs typeface="Malgun Gothic" pitchFamily="34" charset="-120"/>
+              </a:rPr>
+              <a:t>3~4분입니다. </a:t>
+            </a:r>
+            <a:pPr algn="l" indent="0" marL="0">
+              <a:lnSpc>
+                <a:spcPts val="2241"/>
+              </a:lnSpc>
+              <a:buNone/>
+            </a:pPr>
+            <a:r>
+              <a:rPr lang="en-US" sz="1350" b="1" dirty="0">
+                <a:solidFill>
+                  <a:srgbClr val="EAE7E0"/>
+                </a:solidFill>
+                <a:latin typeface="Malgun Gothic" pitchFamily="34" charset="0"/>
+                <a:ea typeface="Malgun Gothic" pitchFamily="34" charset="-122"/>
+                <a:cs typeface="Malgun Gothic" pitchFamily="34" charset="-120"/>
+              </a:rPr>
+              <a:t>네 단계</a:t>
+            </a:r>
+            <a:pPr algn="l" indent="0" marL="0">
+              <a:lnSpc>
+                <a:spcPts val="2241"/>
+              </a:lnSpc>
+              <a:buNone/>
+            </a:pPr>
+            <a:r>
+              <a:rPr lang="en-US" sz="1350" dirty="0">
+                <a:solidFill>
+                  <a:srgbClr val="CFCBC2"/>
+                </a:solidFill>
+                <a:latin typeface="Malgun Gothic" pitchFamily="34" charset="0"/>
+                <a:ea typeface="Malgun Gothic" pitchFamily="34" charset="-122"/>
+                <a:cs typeface="Malgun Gothic" pitchFamily="34" charset="-120"/>
+              </a:rPr>
+              <a:t> 만 보시면 됩니다.</a:t>
+            </a:r>
+            <a:endParaRPr lang="en-US" sz="1350" dirty="0"/>
+          </a:p>
+        </p:txBody>
+      </p:sp>
+      <p:sp>
+        <p:nvSpPr>
+          <p:cNvPr id="6" name="Shape 4"/>
+          <p:cNvSpPr/>
+          <p:nvPr/>
+        </p:nvSpPr>
+        <p:spPr>
+          <a:xfrm>
+            <a:off x="685800" y="2057400"/>
+            <a:ext cx="10820400" cy="1447800"/>
+          </a:xfrm>
+          <a:prstGeom prst="rect">
+            <a:avLst/>
+          </a:prstGeom>
+          <a:solidFill>
+            <a:srgbClr val="0A1320"/>
+          </a:solidFill>
+          <a:ln w="12700">
+            <a:solidFill>
+              <a:srgbClr val="182838"/>
+            </a:solidFill>
+            <a:prstDash val="solid"/>
+          </a:ln>
+        </p:spPr>
+      </p:sp>
+      <p:sp>
+        <p:nvSpPr>
+          <p:cNvPr id="7" name="Text 5"/>
+          <p:cNvSpPr txBox="1"/>
+          <p:nvPr/>
+        </p:nvSpPr>
+        <p:spPr>
+          <a:xfrm>
+            <a:off x="914400" y="2228850"/>
+            <a:ext cx="323850" cy="320040"/>
+          </a:xfrm>
+          <a:prstGeom prst="rect">
+            <a:avLst/>
+          </a:prstGeom>
+          <a:noFill/>
+          <a:ln/>
+        </p:spPr>
+        <p:txBody>
+          <a:bodyPr wrap="square" lIns="0" tIns="0" rIns="0" bIns="0" rtlCol="0" anchor="t"/>
+          <a:lstStyle/>
+          <a:p>
+            <a:pPr algn="l" indent="0" marL="0">
+              <a:lnSpc>
+                <a:spcPts val="2520"/>
+              </a:lnSpc>
+              <a:buNone/>
+            </a:pPr>
+            <a:r>
+              <a:rPr lang="en-US" sz="2400" b="1" dirty="0">
+                <a:solidFill>
+                  <a:srgbClr val="8A6620"/>
+                </a:solidFill>
+                <a:latin typeface="Consolas" pitchFamily="34" charset="0"/>
+                <a:ea typeface="Consolas" pitchFamily="34" charset="-122"/>
+                <a:cs typeface="Consolas" pitchFamily="34" charset="-120"/>
+              </a:rPr>
+              <a:t>1</a:t>
+            </a:r>
+            <a:endParaRPr lang="en-US" sz="2400" dirty="0"/>
+          </a:p>
+        </p:txBody>
+      </p:sp>
+      <p:sp>
+        <p:nvSpPr>
+          <p:cNvPr id="8" name="Text 6"/>
+          <p:cNvSpPr txBox="1"/>
+          <p:nvPr/>
+        </p:nvSpPr>
+        <p:spPr>
+          <a:xfrm>
+            <a:off x="1314450" y="2209800"/>
+            <a:ext cx="1943100" cy="284036"/>
+          </a:xfrm>
+          <a:prstGeom prst="rect">
+            <a:avLst/>
+          </a:prstGeom>
+          <a:noFill/>
+          <a:ln/>
+        </p:spPr>
+        <p:txBody>
+          <a:bodyPr wrap="square" lIns="0" tIns="0" rIns="0" bIns="0" rtlCol="0" anchor="t"/>
+          <a:lstStyle/>
+          <a:p>
+            <a:pPr algn="l" indent="0" marL="0">
+              <a:lnSpc>
+                <a:spcPts val="2237"/>
+              </a:lnSpc>
+              <a:buNone/>
+            </a:pPr>
+            <a:r>
+              <a:rPr lang="en-US" sz="1575" b="1" dirty="0">
+                <a:solidFill>
+                  <a:srgbClr val="EAE7E0"/>
+                </a:solidFill>
+                <a:latin typeface="Malgun Gothic" pitchFamily="34" charset="0"/>
+                <a:ea typeface="Malgun Gothic" pitchFamily="34" charset="-122"/>
+                <a:cs typeface="Malgun Gothic" pitchFamily="34" charset="-120"/>
+              </a:rPr>
+              <a:t>데이터 취득</a:t>
+            </a:r>
+            <a:endParaRPr lang="en-US" sz="1575" dirty="0"/>
+          </a:p>
+        </p:txBody>
+      </p:sp>
+      <p:sp>
+        <p:nvSpPr>
+          <p:cNvPr id="9" name="Text 7"/>
+          <p:cNvSpPr txBox="1"/>
+          <p:nvPr/>
+        </p:nvSpPr>
+        <p:spPr>
+          <a:xfrm>
+            <a:off x="1314450" y="2552700"/>
+            <a:ext cx="1943100" cy="720090"/>
+          </a:xfrm>
+          <a:prstGeom prst="rect">
+            <a:avLst/>
+          </a:prstGeom>
+          <a:noFill/>
+          <a:ln/>
+        </p:spPr>
+        <p:txBody>
+          <a:bodyPr wrap="square" lIns="0" tIns="0" rIns="0" bIns="0" rtlCol="0" anchor="t"/>
+          <a:lstStyle/>
+          <a:p>
+            <a:pPr algn="l" indent="0" marL="0">
+              <a:lnSpc>
+                <a:spcPts val="1890"/>
+              </a:lnSpc>
+              <a:buNone/>
+            </a:pPr>
+            <a:r>
+              <a:rPr lang="en-US" sz="1125" dirty="0">
+                <a:solidFill>
+                  <a:srgbClr val="CFCBC2"/>
+                </a:solidFill>
+                <a:latin typeface="Malgun Gothic" pitchFamily="34" charset="0"/>
+                <a:ea typeface="Malgun Gothic" pitchFamily="34" charset="-122"/>
+                <a:cs typeface="Malgun Gothic" pitchFamily="34" charset="-120"/>
+              </a:rPr>
+              <a:t>설비에서 값을 그대로 읽어옵니다. 옮겨 적는 칸이 없습니다.</a:t>
+            </a:r>
+            <a:endParaRPr lang="en-US" sz="1125" dirty="0"/>
+          </a:p>
+        </p:txBody>
+      </p:sp>
+      <p:sp>
+        <p:nvSpPr>
+          <p:cNvPr id="10" name="Shape 8"/>
+          <p:cNvSpPr/>
+          <p:nvPr/>
+        </p:nvSpPr>
+        <p:spPr>
+          <a:xfrm>
+            <a:off x="3352800" y="2209800"/>
+            <a:ext cx="0" cy="1047750"/>
+          </a:xfrm>
+          <a:prstGeom prst="line">
+            <a:avLst/>
+          </a:prstGeom>
+          <a:noFill/>
+          <a:ln w="12700">
+            <a:solidFill>
+              <a:srgbClr val="182838"/>
+            </a:solidFill>
+            <a:prstDash val="solid"/>
+          </a:ln>
+        </p:spPr>
+      </p:sp>
+      <p:sp>
+        <p:nvSpPr>
+          <p:cNvPr id="11" name="Text 9"/>
+          <p:cNvSpPr txBox="1"/>
+          <p:nvPr/>
+        </p:nvSpPr>
+        <p:spPr>
+          <a:xfrm>
+            <a:off x="3505200" y="2228850"/>
+            <a:ext cx="323850" cy="320040"/>
+          </a:xfrm>
+          <a:prstGeom prst="rect">
+            <a:avLst/>
+          </a:prstGeom>
+          <a:noFill/>
+          <a:ln/>
+        </p:spPr>
+        <p:txBody>
+          <a:bodyPr wrap="square" lIns="0" tIns="0" rIns="0" bIns="0" rtlCol="0" anchor="t"/>
+          <a:lstStyle/>
+          <a:p>
+            <a:pPr algn="l" indent="0" marL="0">
+              <a:lnSpc>
+                <a:spcPts val="2520"/>
+              </a:lnSpc>
+              <a:buNone/>
+            </a:pPr>
+            <a:r>
+              <a:rPr lang="en-US" sz="2400" b="1" dirty="0">
+                <a:solidFill>
+                  <a:srgbClr val="8A6620"/>
+                </a:solidFill>
+                <a:latin typeface="Consolas" pitchFamily="34" charset="0"/>
+                <a:ea typeface="Consolas" pitchFamily="34" charset="-122"/>
+                <a:cs typeface="Consolas" pitchFamily="34" charset="-120"/>
+              </a:rPr>
+              <a:t>2</a:t>
+            </a:r>
+            <a:endParaRPr lang="en-US" sz="2400" dirty="0"/>
+          </a:p>
+        </p:txBody>
+      </p:sp>
+      <p:sp>
+        <p:nvSpPr>
+          <p:cNvPr id="12" name="Text 10"/>
+          <p:cNvSpPr txBox="1"/>
+          <p:nvPr/>
+        </p:nvSpPr>
+        <p:spPr>
+          <a:xfrm>
+            <a:off x="3905250" y="2209800"/>
+            <a:ext cx="1943100" cy="284036"/>
+          </a:xfrm>
+          <a:prstGeom prst="rect">
+            <a:avLst/>
+          </a:prstGeom>
+          <a:noFill/>
+          <a:ln/>
+        </p:spPr>
+        <p:txBody>
+          <a:bodyPr wrap="square" lIns="0" tIns="0" rIns="0" bIns="0" rtlCol="0" anchor="t"/>
+          <a:lstStyle/>
+          <a:p>
+            <a:pPr algn="l" indent="0" marL="0">
+              <a:lnSpc>
+                <a:spcPts val="2237"/>
+              </a:lnSpc>
+              <a:buNone/>
+            </a:pPr>
+            <a:r>
+              <a:rPr lang="en-US" sz="1575" b="1" dirty="0">
+                <a:solidFill>
+                  <a:srgbClr val="EAE7E0"/>
+                </a:solidFill>
+                <a:latin typeface="Malgun Gothic" pitchFamily="34" charset="0"/>
+                <a:ea typeface="Malgun Gothic" pitchFamily="34" charset="-122"/>
+                <a:cs typeface="Malgun Gothic" pitchFamily="34" charset="-120"/>
+              </a:rPr>
+              <a:t>출력 시뮬레이션</a:t>
+            </a:r>
+            <a:endParaRPr lang="en-US" sz="1575" dirty="0"/>
+          </a:p>
+        </p:txBody>
+      </p:sp>
+      <p:sp>
+        <p:nvSpPr>
+          <p:cNvPr id="13" name="Text 11"/>
+          <p:cNvSpPr txBox="1"/>
+          <p:nvPr/>
+        </p:nvSpPr>
+        <p:spPr>
+          <a:xfrm>
+            <a:off x="3905250" y="2552700"/>
+            <a:ext cx="1943100" cy="720090"/>
+          </a:xfrm>
+          <a:prstGeom prst="rect">
+            <a:avLst/>
+          </a:prstGeom>
+          <a:noFill/>
+          <a:ln/>
+        </p:spPr>
+        <p:txBody>
+          <a:bodyPr wrap="square" lIns="0" tIns="0" rIns="0" bIns="0" rtlCol="0" anchor="t"/>
+          <a:lstStyle/>
+          <a:p>
+            <a:pPr algn="l" indent="0" marL="0">
+              <a:lnSpc>
+                <a:spcPts val="1890"/>
+              </a:lnSpc>
+              <a:buNone/>
+            </a:pPr>
+            <a:r>
+              <a:rPr lang="en-US" sz="1125" dirty="0">
+                <a:solidFill>
+                  <a:srgbClr val="CFCBC2"/>
+                </a:solidFill>
+                <a:latin typeface="Malgun Gothic" pitchFamily="34" charset="0"/>
+                <a:ea typeface="Malgun Gothic" pitchFamily="34" charset="-122"/>
+                <a:cs typeface="Malgun Gothic" pitchFamily="34" charset="-120"/>
+              </a:rPr>
+              <a:t>온도를 넣으면 이론값이 나옵니다. 손대지 않는 부분입니다.</a:t>
+            </a:r>
+            <a:endParaRPr lang="en-US" sz="1125" dirty="0"/>
+          </a:p>
+        </p:txBody>
+      </p:sp>
+      <p:sp>
+        <p:nvSpPr>
+          <p:cNvPr id="14" name="Shape 12"/>
+          <p:cNvSpPr/>
+          <p:nvPr/>
+        </p:nvSpPr>
+        <p:spPr>
+          <a:xfrm>
+            <a:off x="5943600" y="2209800"/>
+            <a:ext cx="0" cy="1047750"/>
+          </a:xfrm>
+          <a:prstGeom prst="line">
+            <a:avLst/>
+          </a:prstGeom>
+          <a:noFill/>
+          <a:ln w="12700">
+            <a:solidFill>
+              <a:srgbClr val="182838"/>
+            </a:solidFill>
+            <a:prstDash val="solid"/>
+          </a:ln>
+        </p:spPr>
+      </p:sp>
+      <p:sp>
+        <p:nvSpPr>
+          <p:cNvPr id="15" name="Text 13"/>
+          <p:cNvSpPr txBox="1"/>
+          <p:nvPr/>
+        </p:nvSpPr>
+        <p:spPr>
+          <a:xfrm>
+            <a:off x="6096000" y="2228850"/>
+            <a:ext cx="323850" cy="320040"/>
+          </a:xfrm>
+          <a:prstGeom prst="rect">
+            <a:avLst/>
+          </a:prstGeom>
+          <a:noFill/>
+          <a:ln/>
+        </p:spPr>
+        <p:txBody>
+          <a:bodyPr wrap="square" lIns="0" tIns="0" rIns="0" bIns="0" rtlCol="0" anchor="t"/>
+          <a:lstStyle/>
+          <a:p>
+            <a:pPr algn="l" indent="0" marL="0">
+              <a:lnSpc>
+                <a:spcPts val="2520"/>
+              </a:lnSpc>
+              <a:buNone/>
+            </a:pPr>
+            <a:r>
+              <a:rPr lang="en-US" sz="2400" b="1" dirty="0">
+                <a:solidFill>
+                  <a:srgbClr val="8A6620"/>
+                </a:solidFill>
+                <a:latin typeface="Consolas" pitchFamily="34" charset="0"/>
+                <a:ea typeface="Consolas" pitchFamily="34" charset="-122"/>
+                <a:cs typeface="Consolas" pitchFamily="34" charset="-120"/>
+              </a:rPr>
+              <a:t>3</a:t>
+            </a:r>
+            <a:endParaRPr lang="en-US" sz="2400" dirty="0"/>
+          </a:p>
+        </p:txBody>
+      </p:sp>
+      <p:sp>
+        <p:nvSpPr>
+          <p:cNvPr id="16" name="Text 14"/>
+          <p:cNvSpPr txBox="1"/>
+          <p:nvPr/>
+        </p:nvSpPr>
+        <p:spPr>
+          <a:xfrm>
+            <a:off x="6496050" y="2209800"/>
+            <a:ext cx="1943100" cy="284036"/>
+          </a:xfrm>
+          <a:prstGeom prst="rect">
+            <a:avLst/>
+          </a:prstGeom>
+          <a:noFill/>
+          <a:ln/>
+        </p:spPr>
+        <p:txBody>
+          <a:bodyPr wrap="square" lIns="0" tIns="0" rIns="0" bIns="0" rtlCol="0" anchor="t"/>
+          <a:lstStyle/>
+          <a:p>
+            <a:pPr algn="l" indent="0" marL="0">
+              <a:lnSpc>
+                <a:spcPts val="2237"/>
+              </a:lnSpc>
+              <a:buNone/>
+            </a:pPr>
+            <a:r>
+              <a:rPr lang="en-US" sz="1575" b="1" dirty="0">
+                <a:solidFill>
+                  <a:srgbClr val="EAE7E0"/>
+                </a:solidFill>
+                <a:latin typeface="Malgun Gothic" pitchFamily="34" charset="0"/>
+                <a:ea typeface="Malgun Gothic" pitchFamily="34" charset="-122"/>
+                <a:cs typeface="Malgun Gothic" pitchFamily="34" charset="-120"/>
+              </a:rPr>
+              <a:t>곡선 비교</a:t>
+            </a:r>
+            <a:endParaRPr lang="en-US" sz="1575" dirty="0"/>
+          </a:p>
+        </p:txBody>
+      </p:sp>
+      <p:sp>
+        <p:nvSpPr>
+          <p:cNvPr id="17" name="Text 15"/>
+          <p:cNvSpPr txBox="1"/>
+          <p:nvPr/>
+        </p:nvSpPr>
+        <p:spPr>
+          <a:xfrm>
+            <a:off x="6496050" y="2552700"/>
+            <a:ext cx="1943100" cy="720090"/>
+          </a:xfrm>
+          <a:prstGeom prst="rect">
+            <a:avLst/>
+          </a:prstGeom>
+          <a:noFill/>
+          <a:ln/>
+        </p:spPr>
+        <p:txBody>
+          <a:bodyPr wrap="square" lIns="0" tIns="0" rIns="0" bIns="0" rtlCol="0" anchor="t"/>
+          <a:lstStyle/>
+          <a:p>
+            <a:pPr algn="l" indent="0" marL="0">
+              <a:lnSpc>
+                <a:spcPts val="1890"/>
+              </a:lnSpc>
+              <a:buNone/>
+            </a:pPr>
+            <a:r>
+              <a:rPr lang="en-US" sz="1125" dirty="0">
+                <a:solidFill>
+                  <a:srgbClr val="CFCBC2"/>
+                </a:solidFill>
+                <a:latin typeface="Malgun Gothic" pitchFamily="34" charset="0"/>
+                <a:ea typeface="Malgun Gothic" pitchFamily="34" charset="-122"/>
+                <a:cs typeface="Malgun Gothic" pitchFamily="34" charset="-120"/>
+              </a:rPr>
+              <a:t>이론값 곡선과 모델 곡선을 겹쳐 봅니다. 차이가 보입니다.</a:t>
+            </a:r>
+            <a:endParaRPr lang="en-US" sz="1125" dirty="0"/>
+          </a:p>
+        </p:txBody>
+      </p:sp>
+      <p:sp>
+        <p:nvSpPr>
+          <p:cNvPr id="18" name="Shape 16"/>
+          <p:cNvSpPr/>
+          <p:nvPr/>
+        </p:nvSpPr>
+        <p:spPr>
+          <a:xfrm>
+            <a:off x="8534400" y="2209800"/>
+            <a:ext cx="0" cy="1047750"/>
+          </a:xfrm>
+          <a:prstGeom prst="line">
+            <a:avLst/>
+          </a:prstGeom>
+          <a:noFill/>
+          <a:ln w="12700">
+            <a:solidFill>
+              <a:srgbClr val="182838"/>
+            </a:solidFill>
+            <a:prstDash val="solid"/>
+          </a:ln>
+        </p:spPr>
+      </p:sp>
+      <p:sp>
+        <p:nvSpPr>
+          <p:cNvPr id="19" name="Text 17"/>
+          <p:cNvSpPr txBox="1"/>
+          <p:nvPr/>
+        </p:nvSpPr>
+        <p:spPr>
+          <a:xfrm>
+            <a:off x="8686800" y="2228850"/>
+            <a:ext cx="323850" cy="320040"/>
+          </a:xfrm>
+          <a:prstGeom prst="rect">
+            <a:avLst/>
+          </a:prstGeom>
+          <a:noFill/>
+          <a:ln/>
+        </p:spPr>
+        <p:txBody>
+          <a:bodyPr wrap="square" lIns="0" tIns="0" rIns="0" bIns="0" rtlCol="0" anchor="t"/>
+          <a:lstStyle/>
+          <a:p>
+            <a:pPr algn="l" indent="0" marL="0">
+              <a:lnSpc>
+                <a:spcPts val="2520"/>
+              </a:lnSpc>
+              <a:buNone/>
+            </a:pPr>
+            <a:r>
+              <a:rPr lang="en-US" sz="2400" b="1" dirty="0">
+                <a:solidFill>
+                  <a:srgbClr val="8A6620"/>
+                </a:solidFill>
+                <a:latin typeface="Consolas" pitchFamily="34" charset="0"/>
+                <a:ea typeface="Consolas" pitchFamily="34" charset="-122"/>
+                <a:cs typeface="Consolas" pitchFamily="34" charset="-120"/>
+              </a:rPr>
+              <a:t>4</a:t>
+            </a:r>
+            <a:endParaRPr lang="en-US" sz="2400" dirty="0"/>
+          </a:p>
+        </p:txBody>
+      </p:sp>
+      <p:sp>
+        <p:nvSpPr>
+          <p:cNvPr id="20" name="Text 18"/>
+          <p:cNvSpPr txBox="1"/>
+          <p:nvPr/>
+        </p:nvSpPr>
+        <p:spPr>
+          <a:xfrm>
+            <a:off x="9086850" y="2209800"/>
+            <a:ext cx="1943100" cy="284036"/>
+          </a:xfrm>
+          <a:prstGeom prst="rect">
+            <a:avLst/>
+          </a:prstGeom>
+          <a:noFill/>
+          <a:ln/>
+        </p:spPr>
+        <p:txBody>
+          <a:bodyPr wrap="square" lIns="0" tIns="0" rIns="0" bIns="0" rtlCol="0" anchor="t"/>
+          <a:lstStyle/>
+          <a:p>
+            <a:pPr algn="l" indent="0" marL="0">
+              <a:lnSpc>
+                <a:spcPts val="2237"/>
+              </a:lnSpc>
+              <a:buNone/>
+            </a:pPr>
+            <a:r>
+              <a:rPr lang="en-US" sz="1575" b="1" dirty="0">
+                <a:solidFill>
+                  <a:srgbClr val="EAE7E0"/>
+                </a:solidFill>
+                <a:latin typeface="Malgun Gothic" pitchFamily="34" charset="0"/>
+                <a:ea typeface="Malgun Gothic" pitchFamily="34" charset="-122"/>
+                <a:cs typeface="Malgun Gothic" pitchFamily="34" charset="-120"/>
+              </a:rPr>
+              <a:t>프로파일 생성</a:t>
+            </a:r>
+            <a:endParaRPr lang="en-US" sz="1575" dirty="0"/>
+          </a:p>
+        </p:txBody>
+      </p:sp>
+      <p:sp>
+        <p:nvSpPr>
+          <p:cNvPr id="21" name="Text 19"/>
+          <p:cNvSpPr txBox="1"/>
+          <p:nvPr/>
+        </p:nvSpPr>
+        <p:spPr>
+          <a:xfrm>
+            <a:off x="9086850" y="2552700"/>
+            <a:ext cx="1943100" cy="720090"/>
+          </a:xfrm>
+          <a:prstGeom prst="rect">
+            <a:avLst/>
+          </a:prstGeom>
+          <a:noFill/>
+          <a:ln/>
+        </p:spPr>
+        <p:txBody>
+          <a:bodyPr wrap="square" lIns="0" tIns="0" rIns="0" bIns="0" rtlCol="0" anchor="t"/>
+          <a:lstStyle/>
+          <a:p>
+            <a:pPr algn="l" indent="0" marL="0">
+              <a:lnSpc>
+                <a:spcPts val="1890"/>
+              </a:lnSpc>
+              <a:buNone/>
+            </a:pPr>
+            <a:r>
+              <a:rPr lang="en-US" sz="1125" dirty="0">
+                <a:solidFill>
+                  <a:srgbClr val="CFCBC2"/>
+                </a:solidFill>
+                <a:latin typeface="Malgun Gothic" pitchFamily="34" charset="0"/>
+                <a:ea typeface="Malgun Gothic" pitchFamily="34" charset="-122"/>
+                <a:cs typeface="Malgun Gothic" pitchFamily="34" charset="-120"/>
+              </a:rPr>
+              <a:t>신고할 표가 파일로 바로 나옵니다.</a:t>
+            </a:r>
+            <a:endParaRPr lang="en-US" sz="1125" dirty="0"/>
+          </a:p>
+        </p:txBody>
+      </p:sp>
+      <p:sp>
+        <p:nvSpPr>
+          <p:cNvPr id="22" name="Text 20"/>
+          <p:cNvSpPr txBox="1"/>
+          <p:nvPr/>
+        </p:nvSpPr>
+        <p:spPr>
+          <a:xfrm>
+            <a:off x="2286000" y="3695700"/>
+            <a:ext cx="6667500" cy="125016"/>
+          </a:xfrm>
+          <a:prstGeom prst="rect">
+            <a:avLst/>
+          </a:prstGeom>
+          <a:noFill/>
+          <a:ln/>
+        </p:spPr>
+        <p:txBody>
+          <a:bodyPr wrap="square" lIns="0" tIns="0" rIns="0" bIns="0" rtlCol="0" anchor="t"/>
+          <a:lstStyle/>
+          <a:p>
+            <a:pPr algn="l" indent="0" marL="0">
+              <a:lnSpc>
+                <a:spcPts val="984"/>
+              </a:lnSpc>
+              <a:buNone/>
+            </a:pPr>
+            <a:r>
+              <a:rPr lang="en-US" sz="788" b="1" spc="150" kern="0" dirty="0">
+                <a:solidFill>
+                  <a:srgbClr val="8A8880"/>
+                </a:solidFill>
+                <a:latin typeface="Consolas" pitchFamily="34" charset="0"/>
+                <a:ea typeface="Consolas" pitchFamily="34" charset="-122"/>
+                <a:cs typeface="Consolas" pitchFamily="34" charset="-120"/>
+              </a:rPr>
+              <a:t>④ 의 결과  ·  온도별 신고값 표  ·  −20 ~ 40℃ 61행  ·  실제 화면</a:t>
+            </a:r>
+            <a:endParaRPr lang="en-US" sz="788" dirty="0"/>
+          </a:p>
+        </p:txBody>
+      </p:sp>
+      <p:pic>
+        <p:nvPicPr>
+          <p:cNvPr id="23" name="Image 0" descr="/home/user/Narae-AI/docs/ppt/assets/tool_profile.png">    </p:cNvPr>
+          <p:cNvPicPr>
+            <a:picLocks noChangeAspect="1"/>
+          </p:cNvPicPr>
+          <p:nvPr/>
+        </p:nvPicPr>
+        <p:blipFill>
+          <a:blip r:embed="rId1"/>
+          <a:stretch>
+            <a:fillRect/>
+          </a:stretch>
+        </p:blipFill>
+        <p:spPr>
+          <a:xfrm>
+            <a:off x="2286000" y="3867150"/>
+            <a:ext cx="7620000" cy="2057400"/>
+          </a:xfrm>
+          <a:prstGeom prst="rect">
+            <a:avLst/>
+          </a:prstGeom>
+        </p:spPr>
+      </p:pic>
+      <p:sp>
+        <p:nvSpPr>
+          <p:cNvPr id="24" name="Shape 21"/>
+          <p:cNvSpPr/>
+          <p:nvPr/>
+        </p:nvSpPr>
+        <p:spPr>
+          <a:xfrm>
+            <a:off x="2276475" y="3857625"/>
+            <a:ext cx="7639050" cy="2076450"/>
+          </a:xfrm>
+          <a:prstGeom prst="rect">
+            <a:avLst/>
+          </a:prstGeom>
+          <a:ln w="12700">
+            <a:solidFill>
+              <a:srgbClr val="22354A"/>
+            </a:solidFill>
+            <a:prstDash val="solid"/>
+          </a:ln>
+        </p:spPr>
+      </p:sp>
+      <p:sp>
+        <p:nvSpPr>
+          <p:cNvPr id="25" name="Text 22"/>
+          <p:cNvSpPr txBox="1"/>
+          <p:nvPr/>
+        </p:nvSpPr>
+        <p:spPr>
+          <a:xfrm>
+            <a:off x="2286000" y="6000750"/>
+            <a:ext cx="7620000" cy="167164"/>
+          </a:xfrm>
+          <a:prstGeom prst="rect">
+            <a:avLst/>
+          </a:prstGeom>
+          <a:noFill/>
+          <a:ln/>
+        </p:spPr>
+        <p:txBody>
+          <a:bodyPr wrap="square" lIns="0" tIns="0" rIns="0" bIns="0" rtlCol="0" anchor="t"/>
+          <a:lstStyle/>
+          <a:p>
+            <a:pPr algn="r" indent="0" marL="0">
+              <a:lnSpc>
+                <a:spcPts val="1316"/>
+              </a:lnSpc>
+              <a:buNone/>
+            </a:pPr>
+            <a:r>
+              <a:rPr lang="en-US" sz="975" dirty="0">
+                <a:solidFill>
+                  <a:srgbClr val="A9A79F"/>
+                </a:solidFill>
+                <a:latin typeface="Malgun Gothic" pitchFamily="34" charset="0"/>
+                <a:ea typeface="Malgun Gothic" pitchFamily="34" charset="-122"/>
+                <a:cs typeface="Malgun Gothic" pitchFamily="34" charset="-120"/>
+              </a:rPr>
+              <a:t>이 표가 그대로 </a:t>
+            </a:r>
+            <a:pPr algn="r" indent="0" marL="0">
+              <a:lnSpc>
+                <a:spcPts val="1316"/>
+              </a:lnSpc>
+              <a:buNone/>
+            </a:pPr>
+            <a:r>
+              <a:rPr lang="en-US" sz="975" b="1" dirty="0">
+                <a:solidFill>
+                  <a:srgbClr val="EFB13C"/>
+                </a:solidFill>
+                <a:latin typeface="Malgun Gothic" pitchFamily="34" charset="0"/>
+                <a:ea typeface="Malgun Gothic" pitchFamily="34" charset="-122"/>
+                <a:cs typeface="Malgun Gothic" pitchFamily="34" charset="-120"/>
+              </a:rPr>
+              <a:t>주간 입찰값</a:t>
+            </a:r>
+            <a:pPr algn="r" indent="0" marL="0">
+              <a:lnSpc>
+                <a:spcPts val="1316"/>
+              </a:lnSpc>
+              <a:buNone/>
+            </a:pPr>
+            <a:r>
+              <a:rPr lang="en-US" sz="975" dirty="0">
+                <a:solidFill>
+                  <a:srgbClr val="A9A79F"/>
+                </a:solidFill>
+                <a:latin typeface="Malgun Gothic" pitchFamily="34" charset="0"/>
+                <a:ea typeface="Malgun Gothic" pitchFamily="34" charset="-122"/>
+                <a:cs typeface="Malgun Gothic" pitchFamily="34" charset="-120"/>
+              </a:rPr>
+              <a:t>이 됩니다</a:t>
+            </a:r>
+            <a:endParaRPr lang="en-US" sz="975" dirty="0"/>
+          </a:p>
+        </p:txBody>
+      </p:sp>
+      <p:sp>
+        <p:nvSpPr>
+          <p:cNvPr id="26" name="Shape 23"/>
+          <p:cNvSpPr/>
+          <p:nvPr/>
+        </p:nvSpPr>
+        <p:spPr>
+          <a:xfrm>
+            <a:off x="685800" y="6057900"/>
+            <a:ext cx="10820400" cy="0"/>
+          </a:xfrm>
+          <a:prstGeom prst="line">
+            <a:avLst/>
+          </a:prstGeom>
+          <a:noFill/>
+          <a:ln w="12700">
+            <a:solidFill>
+              <a:srgbClr val="22354A"/>
+            </a:solidFill>
+            <a:prstDash val="solid"/>
+          </a:ln>
+        </p:spPr>
+      </p:sp>
+      <p:sp>
+        <p:nvSpPr>
+          <p:cNvPr id="27" name="Text 24"/>
+          <p:cNvSpPr txBox="1"/>
+          <p:nvPr/>
+        </p:nvSpPr>
+        <p:spPr>
+          <a:xfrm>
+            <a:off x="685800" y="6267450"/>
+            <a:ext cx="476250" cy="120015"/>
+          </a:xfrm>
+          <a:prstGeom prst="rect">
+            <a:avLst/>
+          </a:prstGeom>
+          <a:noFill/>
+          <a:ln/>
+        </p:spPr>
+        <p:txBody>
+          <a:bodyPr wrap="square" lIns="0" tIns="0" rIns="0" bIns="0" rtlCol="0" anchor="t"/>
+          <a:lstStyle/>
+          <a:p>
+            <a:pPr algn="l" indent="0" marL="0">
+              <a:lnSpc>
+                <a:spcPts val="945"/>
+              </a:lnSpc>
+              <a:buNone/>
+            </a:pPr>
+            <a:r>
+              <a:rPr lang="en-US" sz="788" b="1" spc="180" kern="0" dirty="0">
+                <a:solidFill>
+                  <a:srgbClr val="EFB13C"/>
+                </a:solidFill>
+                <a:latin typeface="Consolas" pitchFamily="34" charset="0"/>
+                <a:ea typeface="Consolas" pitchFamily="34" charset="-122"/>
+                <a:cs typeface="Consolas" pitchFamily="34" charset="-120"/>
+              </a:rPr>
+              <a:t>결론</a:t>
+            </a:r>
+            <a:endParaRPr lang="en-US" sz="788" dirty="0"/>
+          </a:p>
+        </p:txBody>
+      </p:sp>
+      <p:sp>
+        <p:nvSpPr>
+          <p:cNvPr id="28" name="Text 25"/>
+          <p:cNvSpPr txBox="1"/>
+          <p:nvPr/>
+        </p:nvSpPr>
+        <p:spPr>
+          <a:xfrm>
+            <a:off x="1219200" y="6229350"/>
+            <a:ext cx="10287000" cy="220027"/>
+          </a:xfrm>
+          <a:prstGeom prst="rect">
+            <a:avLst/>
+          </a:prstGeom>
+          <a:noFill/>
+          <a:ln/>
+        </p:spPr>
+        <p:txBody>
+          <a:bodyPr wrap="square" lIns="0" tIns="0" rIns="0" bIns="0" rtlCol="0" anchor="t"/>
+          <a:lstStyle/>
+          <a:p>
+            <a:pPr algn="l" indent="0" marL="0">
+              <a:lnSpc>
+                <a:spcPts val="1733"/>
+              </a:lnSpc>
+              <a:buNone/>
+            </a:pPr>
+            <a:r>
+              <a:rPr lang="en-US" sz="1238" dirty="0">
+                <a:solidFill>
+                  <a:srgbClr val="CFCBC2"/>
+                </a:solidFill>
+                <a:latin typeface="Malgun Gothic" pitchFamily="34" charset="0"/>
+                <a:ea typeface="Malgun Gothic" pitchFamily="34" charset="-122"/>
+                <a:cs typeface="Malgun Gothic" pitchFamily="34" charset="-120"/>
+              </a:rPr>
+              <a:t>입력하는 칸이 아니라, </a:t>
+            </a:r>
+            <a:pPr algn="l" indent="0" marL="0">
+              <a:lnSpc>
+                <a:spcPts val="1733"/>
+              </a:lnSpc>
+              <a:buNone/>
+            </a:pPr>
+            <a:r>
+              <a:rPr lang="en-US" sz="1238" b="1" dirty="0">
+                <a:solidFill>
+                  <a:srgbClr val="EFB13C"/>
+                </a:solidFill>
+                <a:latin typeface="Malgun Gothic" pitchFamily="34" charset="0"/>
+                <a:ea typeface="Malgun Gothic" pitchFamily="34" charset="-122"/>
+                <a:cs typeface="Malgun Gothic" pitchFamily="34" charset="-120"/>
+              </a:rPr>
+              <a:t>근거가 붙은 숫자</a:t>
+            </a:r>
+            <a:pPr algn="l" indent="0" marL="0">
+              <a:lnSpc>
+                <a:spcPts val="1733"/>
+              </a:lnSpc>
+              <a:buNone/>
+            </a:pPr>
+            <a:r>
+              <a:rPr lang="en-US" sz="1238" dirty="0">
+                <a:solidFill>
+                  <a:srgbClr val="CFCBC2"/>
+                </a:solidFill>
+                <a:latin typeface="Malgun Gothic" pitchFamily="34" charset="0"/>
+                <a:ea typeface="Malgun Gothic" pitchFamily="34" charset="-122"/>
+                <a:cs typeface="Malgun Gothic" pitchFamily="34" charset="-120"/>
+              </a:rPr>
+              <a:t>를 보십시오.</a:t>
+            </a:r>
+            <a:endParaRPr lang="en-US" sz="1238" dirty="0"/>
+          </a:p>
+        </p:txBody>
+      </p:sp>
+    </p:spTree>
+  </p:cSld>
+  <p:clrMapOvr>
+    <a:masterClrMapping/>
+  </p:clrMapOvr>
+</p:sld>
+</file>
+
+<file path=ppt/slides/slide16.xml><?xml version="1.0" encoding="utf-8"?>
+<p:sld xmlns:a="http://schemas.openxmlformats.org/drawingml/2006/main" xmlns:r="http://schemas.openxmlformats.org/officeDocument/2006/relationships" xmlns:p="http://schemas.openxmlformats.org/presentationml/2006/main">
+  <p:cSld name="Slide 16">
     <p:bg>
       <p:bgPr>
         <a:solidFill>

--- a/docs/ppt/위례_공급가능용량_최종발표_v2.pptx
+++ b/docs/ppt/위례_공급가능용량_최종발표_v2.pptx
@@ -2330,7 +2330,7 @@
                 <a:ea typeface="Malgun Gothic" pitchFamily="34" charset="-122"/>
                 <a:cs typeface="Malgun Gothic" pitchFamily="34" charset="-120"/>
               </a:rPr>
-              <a:t>감으로 정한 값을 </a:t>
+              <a:t>하나로 정하던 값을 </a:t>
             </a:r>
             <a:pPr algn="l" indent="0" marL="0">
               <a:lnSpc>
@@ -3249,7 +3249,7 @@
                 <a:ea typeface="Malgun Gothic" pitchFamily="34" charset="-122"/>
                 <a:cs typeface="Malgun Gothic" pitchFamily="34" charset="-120"/>
               </a:rPr>
-              <a:t>0℃ 에서 5.0 MW 모자라고,  30℃ 에서 4.7 MW 넘칩니다</a:t>
+              <a:t>0℃ 에서 5.0 MW 모자라고,  28℃ 에서 5.1 MW 넘칩니다</a:t>
             </a:r>
             <a:endParaRPr lang="en-US" sz="1013" dirty="0"/>
           </a:p>
@@ -3398,7 +3398,7 @@
                 <a:ea typeface="Consolas" pitchFamily="34" charset="-122"/>
                 <a:cs typeface="Consolas" pitchFamily="34" charset="-120"/>
               </a:rPr>
-              <a:t>66%↓</a:t>
+              <a:t>67%↓</a:t>
             </a:r>
             <a:endParaRPr lang="en-US" sz="4050" dirty="0"/>
           </a:p>
@@ -3440,7 +3440,7 @@
                 <a:ea typeface="Consolas" pitchFamily="34" charset="-122"/>
                 <a:cs typeface="Consolas" pitchFamily="34" charset="-120"/>
               </a:rPr>
-              <a:t>3.80 → 1.29 MW</a:t>
+              <a:t>3.90 → 1.30 MW</a:t>
             </a:r>
             <a:endParaRPr lang="en-US" sz="1200" dirty="0"/>
           </a:p>
@@ -5660,7 +5660,7 @@
                 <a:ea typeface="Consolas" pitchFamily="34" charset="-122"/>
                 <a:cs typeface="Consolas" pitchFamily="34" charset="-120"/>
               </a:rPr>
-              <a:t>예측을 미리 적어 둔다</a:t>
+              <a:t>뒤를 보지 않고 예측한다</a:t>
             </a:r>
             <a:endParaRPr lang="en-US" sz="788" dirty="0"/>
           </a:p>
@@ -5786,7 +5786,7 @@
                 <a:ea typeface="Malgun Gothic" pitchFamily="34" charset="-122"/>
                 <a:cs typeface="Malgun Gothic" pitchFamily="34" charset="-120"/>
               </a:rPr>
-              <a:t>실측하기 </a:t>
+              <a:t>각 회차를 </a:t>
             </a:r>
             <a:pPr algn="l" indent="0" marL="0">
               <a:lnSpc>
@@ -5803,7 +5803,7 @@
                 <a:ea typeface="Malgun Gothic" pitchFamily="34" charset="-122"/>
                 <a:cs typeface="Malgun Gothic" pitchFamily="34" charset="-120"/>
               </a:rPr>
-              <a:t>전에</a:t>
+              <a:t>그 앞의 데이터만으로</a:t>
             </a:r>
             <a:pPr algn="l" indent="0" marL="0">
               <a:lnSpc>
@@ -5820,7 +5820,7 @@
                 <a:ea typeface="Malgun Gothic" pitchFamily="34" charset="-122"/>
                 <a:cs typeface="Malgun Gothic" pitchFamily="34" charset="-120"/>
               </a:rPr>
-              <a:t> 예측을 기록했습니다. 나중에 맞추는 것을 막습니다.</a:t>
+              <a:t> 예측했습니다. 뒤 회차를 미리 보지 않습니다.</a:t>
             </a:r>
             <a:endParaRPr lang="en-US" sz="1125" dirty="0"/>
           </a:p>
@@ -5961,7 +5961,7 @@
                 <a:ea typeface="Malgun Gothic" pitchFamily="34" charset="-122"/>
                 <a:cs typeface="Malgun Gothic" pitchFamily="34" charset="-120"/>
               </a:rPr>
-              <a:t>.</a:t>
+              <a:t>. 앞으로는 실측 전에 예측을 남기는 기능도 씁니다.</a:t>
             </a:r>
             <a:endParaRPr lang="en-US" sz="1238" dirty="0"/>
           </a:p>
@@ -6761,7 +6761,7 @@
                 <a:ea typeface="Consolas" pitchFamily="34" charset="-122"/>
                 <a:cs typeface="Consolas" pitchFamily="34" charset="-120"/>
               </a:rPr>
-              <a:t>66%</a:t>
+              <a:t>67%</a:t>
             </a:r>
             <a:endParaRPr lang="en-US" sz="3300" dirty="0"/>
           </a:p>
@@ -6845,7 +6845,7 @@
                 <a:ea typeface="Consolas" pitchFamily="34" charset="-122"/>
                 <a:cs typeface="Consolas" pitchFamily="34" charset="-120"/>
               </a:rPr>
-              <a:t>평균 3.80 → 1.29 MW</a:t>
+              <a:t>평균 3.90 → 1.30 MW</a:t>
             </a:r>
             <a:endParaRPr lang="en-US" sz="1125" dirty="0"/>
           </a:p>
@@ -6978,7 +6978,7 @@
         <p:spPr>
           <a:xfrm>
             <a:off x="914400" y="4476750"/>
-            <a:ext cx="6477000" cy="125016"/>
+            <a:ext cx="6667500" cy="125016"/>
           </a:xfrm>
           <a:prstGeom prst="rect">
             <a:avLst/>
@@ -7005,7 +7005,7 @@
                 <a:ea typeface="Consolas" pitchFamily="34" charset="-122"/>
                 <a:cs typeface="Consolas" pitchFamily="34" charset="-120"/>
               </a:rPr>
-              <a:t>시운전 9회  ·  실측 전에 적어 둔 예측과 대조  ·  세로 = 실제 − 예측 MW</a:t>
+              <a:t>시운전 9회  ·  그 회차 앞의 데이터만으로 예측(walk-forward)  ·  세로 = 실제 − 예측 MW</a:t>
             </a:r>
             <a:endParaRPr lang="en-US" sz="788" dirty="0"/>
           </a:p>
@@ -7019,8 +7019,8 @@
         </p:nvSpPr>
         <p:spPr>
           <a:xfrm>
-            <a:off x="7524750" y="4457700"/>
-            <a:ext cx="3752850" cy="154781"/>
+            <a:off x="7810500" y="4457700"/>
+            <a:ext cx="3467100" cy="154781"/>
           </a:xfrm>
           <a:prstGeom prst="rect">
             <a:avLst/>
@@ -7047,7 +7047,7 @@
                 <a:ea typeface="Consolas" pitchFamily="34" charset="-122"/>
                 <a:cs typeface="Consolas" pitchFamily="34" charset="-120"/>
               </a:rPr>
-              <a:t>편차 −0.044  ·  오차 1.234  ·  개선율 +91%</a:t>
+              <a:t>편차 −0.044  ·  오차 1.234  ·  종전 대비 +91%</a:t>
             </a:r>
             <a:endParaRPr lang="en-US" sz="938" dirty="0"/>
           </a:p>
@@ -15116,7 +15116,7 @@
                 <a:ea typeface="Consolas" pitchFamily="34" charset="-122"/>
                 <a:cs typeface="Consolas" pitchFamily="34" charset="-120"/>
               </a:rPr>
-              <a:t>07 ~ 08</a:t>
+              <a:t>07 ~ 09</a:t>
             </a:r>
             <a:endParaRPr lang="en-US" sz="1050" dirty="0"/>
           </a:p>
@@ -15265,7 +15265,7 @@
                 <a:ea typeface="Consolas" pitchFamily="34" charset="-122"/>
                 <a:cs typeface="Consolas" pitchFamily="34" charset="-120"/>
               </a:rPr>
-              <a:t>09</a:t>
+              <a:t>10</a:t>
             </a:r>
             <a:endParaRPr lang="en-US" sz="1050" dirty="0"/>
           </a:p>
@@ -15414,7 +15414,7 @@
                 <a:ea typeface="Consolas" pitchFamily="34" charset="-122"/>
                 <a:cs typeface="Consolas" pitchFamily="34" charset="-120"/>
               </a:rPr>
-              <a:t>10</a:t>
+              <a:t>11</a:t>
             </a:r>
             <a:endParaRPr lang="en-US" sz="1050" dirty="0"/>
           </a:p>
@@ -15563,7 +15563,7 @@
                 <a:ea typeface="Consolas" pitchFamily="34" charset="-122"/>
                 <a:cs typeface="Consolas" pitchFamily="34" charset="-120"/>
               </a:rPr>
-              <a:t>11</a:t>
+              <a:t>12</a:t>
             </a:r>
             <a:endParaRPr lang="en-US" sz="1050" dirty="0"/>
           </a:p>
@@ -15863,7 +15863,7 @@
                 <a:ea typeface="Malgun Gothic" pitchFamily="34" charset="-122"/>
                 <a:cs typeface="Malgun Gothic" pitchFamily="34" charset="-120"/>
               </a:rPr>
-              <a:t>감으로 정한 값을 </a:t>
+              <a:t>하나로 정하던 값을 </a:t>
             </a:r>
             <a:pPr algn="l" indent="0" marL="0">
               <a:lnSpc>
@@ -16094,7 +16094,7 @@
                 <a:ea typeface="Consolas" pitchFamily="34" charset="-122"/>
                 <a:cs typeface="Consolas" pitchFamily="34" charset="-120"/>
               </a:rPr>
-              <a:t>1.29</a:t>
+              <a:t>1.30</a:t>
             </a:r>
             <a:endParaRPr lang="en-US" sz="4500" dirty="0"/>
           </a:p>
@@ -16178,7 +16178,7 @@
                 <a:ea typeface="Consolas" pitchFamily="34" charset="-122"/>
                 <a:cs typeface="Consolas" pitchFamily="34" charset="-120"/>
               </a:rPr>
-              <a:t>← 3.80</a:t>
+              <a:t>← 3.90</a:t>
             </a:r>
             <a:endParaRPr lang="en-US" sz="1575" dirty="0"/>
           </a:p>
@@ -16450,7 +16450,7 @@
                 <a:ea typeface="Malgun Gothic" pitchFamily="34" charset="-122"/>
                 <a:cs typeface="Malgun Gothic" pitchFamily="34" charset="-120"/>
               </a:rPr>
-              <a:t>실제 출력이 신고값에 못 미친 횟수입니다. 40회 중 몇 번이었나.</a:t>
+              <a:t>실제 출력이 신고값에 못 미친 횟수입니다. 벌점이 붙는 회차입니다.</a:t>
             </a:r>
             <a:endParaRPr lang="en-US" sz="938" dirty="0"/>
           </a:p>
@@ -16909,7 +16909,7 @@
                 <a:ea typeface="Malgun Gothic" pitchFamily="34" charset="-122"/>
                 <a:cs typeface="Malgun Gothic" pitchFamily="34" charset="-120"/>
               </a:rPr>
-              <a:t>온도와 무관한 값 </a:t>
+              <a:t>온도와 무관한 </a:t>
             </a:r>
             <a:pPr algn="l" indent="0" marL="0">
               <a:lnSpc>
@@ -16926,7 +16926,7 @@
                 <a:ea typeface="Malgun Gothic" pitchFamily="34" charset="-122"/>
                 <a:cs typeface="Malgun Gothic" pitchFamily="34" charset="-120"/>
               </a:rPr>
-              <a:t>1개</a:t>
+              <a:t>하나의 값</a:t>
             </a:r>
             <a:pPr algn="l" indent="0" marL="0">
               <a:lnSpc>
@@ -16943,7 +16943,7 @@
                 <a:ea typeface="Malgun Gothic" pitchFamily="34" charset="-122"/>
                 <a:cs typeface="Malgun Gothic" pitchFamily="34" charset="-120"/>
               </a:rPr>
-              <a:t> 를 손으로</a:t>
+              <a:t> 으로</a:t>
             </a:r>
             <a:endParaRPr lang="en-US" sz="1575" dirty="0"/>
           </a:p>
@@ -17170,7 +17170,7 @@
                 <a:ea typeface="Malgun Gothic" pitchFamily="34" charset="-122"/>
                 <a:cs typeface="Malgun Gothic" pitchFamily="34" charset="-120"/>
               </a:rPr>
-              <a:t>※ 누적 40회 실적에 종전 방식과 현재 도구를 각각 적용해 채점한 재현값입니다 (한 회를 가리고 나머지로 예측 · LOOCV, 미달은 ±0.5% 밴드). 실제 신고 이력이 아닙니다.</a:t>
+              <a:t>※ 누적 40회 실적에 종전 방식과 현재 도구를 각각 적용해 채점한 재현값입니다 (한 회를 가리고 나머지로 예측 · LOOCV 39회, 미달은 ±0.5% 밴드). 실제 신고 이력이 아닙니다.</a:t>
             </a:r>
             <a:endParaRPr lang="en-US" sz="825" dirty="0"/>
           </a:p>
@@ -20471,6 +20471,71 @@
         </p:nvSpPr>
         <p:spPr>
           <a:xfrm>
+            <a:off x="7524750" y="3143250"/>
+            <a:ext cx="0" cy="1409700"/>
+          </a:xfrm>
+          <a:prstGeom prst="line">
+            <a:avLst/>
+          </a:prstGeom>
+          <a:noFill/>
+          <a:ln w="12700">
+            <a:solidFill>
+              <a:srgbClr val="8A8880"/>
+            </a:solidFill>
+            <a:prstDash val="dash"/>
+          </a:ln>
+        </p:spPr>
+      </p:sp>
+      <p:sp>
+        <p:nvSpPr>
+          <p:cNvPr id="120" name="Text 118"/>
+          <p:cNvSpPr txBox="1"/>
+          <p:nvPr/>
+        </p:nvSpPr>
+        <p:spPr>
+          <a:xfrm>
+            <a:off x="7600950" y="3162300"/>
+            <a:ext cx="2095500" cy="131445"/>
+          </a:xfrm>
+          <a:prstGeom prst="rect">
+            <a:avLst/>
+          </a:prstGeom>
+          <a:noFill/>
+          <a:ln/>
+        </p:spPr>
+        <p:txBody>
+          <a:bodyPr wrap="square" lIns="0" tIns="0" rIns="0" bIns="0" rtlCol="0" anchor="t"/>
+          <a:lstStyle/>
+          <a:p>
+            <a:pPr algn="l" indent="0" marL="0">
+              <a:lnSpc>
+                <a:spcPts val="1035"/>
+              </a:lnSpc>
+              <a:buNone/>
+            </a:pPr>
+            <a:r>
+              <a:rPr lang="en-US" sz="863" dirty="0">
+                <a:solidFill>
+                  <a:srgbClr val="A9A79F"/>
+                </a:solidFill>
+                <a:latin typeface="Malgun Gothic" pitchFamily="34" charset="0"/>
+                <a:ea typeface="Malgun Gothic" pitchFamily="34" charset="-122"/>
+                <a:cs typeface="Malgun Gothic" pitchFamily="34" charset="-120"/>
+              </a:rPr>
+              <a:t>여기서 방향이 바뀝니다 (22℃)</a:t>
+            </a:r>
+            <a:endParaRPr lang="en-US" sz="863" dirty="0"/>
+          </a:p>
+        </p:txBody>
+      </p:sp>
+      <p:sp>
+        <p:nvSpPr>
+          <p:cNvPr id="121" name="Shape 119"/>
+          <p:cNvSpPr/>
+          <p:nvPr/>
+        </p:nvSpPr>
+        <p:spPr>
+          <a:xfrm>
             <a:off x="1428750" y="3028950"/>
             <a:ext cx="247650" cy="0"/>
           </a:xfrm>
@@ -20488,7 +20553,7 @@
       </p:sp>
       <p:sp>
         <p:nvSpPr>
-          <p:cNvPr id="120" name="Text 118"/>
+          <p:cNvPr id="122" name="Text 120"/>
           <p:cNvSpPr txBox="1"/>
           <p:nvPr/>
         </p:nvSpPr>
@@ -20530,7 +20595,7 @@
       </p:sp>
       <p:sp>
         <p:nvSpPr>
-          <p:cNvPr id="121" name="Shape 119"/>
+          <p:cNvPr id="123" name="Shape 121"/>
           <p:cNvSpPr/>
           <p:nvPr/>
         </p:nvSpPr>
@@ -20553,7 +20618,7 @@
       </p:sp>
       <p:sp>
         <p:nvSpPr>
-          <p:cNvPr id="122" name="Text 120"/>
+          <p:cNvPr id="124" name="Text 122"/>
           <p:cNvSpPr txBox="1"/>
           <p:nvPr/>
         </p:nvSpPr>
@@ -20595,7 +20660,7 @@
       </p:sp>
       <p:sp>
         <p:nvSpPr>
-          <p:cNvPr id="123" name="Shape 121"/>
+          <p:cNvPr id="125" name="Shape 123"/>
           <p:cNvSpPr/>
           <p:nvPr/>
         </p:nvSpPr>
@@ -20620,7 +20685,7 @@
       </p:sp>
       <p:sp>
         <p:nvSpPr>
-          <p:cNvPr id="124" name="Shape 122"/>
+          <p:cNvPr id="126" name="Shape 124"/>
           <p:cNvSpPr/>
           <p:nvPr/>
         </p:nvSpPr>
@@ -20643,7 +20708,7 @@
       </p:sp>
       <p:sp>
         <p:nvSpPr>
-          <p:cNvPr id="125" name="Text 123"/>
+          <p:cNvPr id="127" name="Text 125"/>
           <p:cNvSpPr txBox="1"/>
           <p:nvPr/>
         </p:nvSpPr>
@@ -20685,7 +20750,7 @@
       </p:sp>
       <p:sp>
         <p:nvSpPr>
-          <p:cNvPr id="126" name="Text 124"/>
+          <p:cNvPr id="128" name="Text 126"/>
           <p:cNvSpPr txBox="1"/>
           <p:nvPr/>
         </p:nvSpPr>
@@ -20719,7 +20784,7 @@
                 <a:ea typeface="Consolas" pitchFamily="34" charset="-122"/>
                 <a:cs typeface="Consolas" pitchFamily="34" charset="-120"/>
               </a:rPr>
-              <a:t>75.5</a:t>
+              <a:t>75.3</a:t>
             </a:r>
             <a:endParaRPr lang="en-US" sz="3000" dirty="0"/>
           </a:p>
@@ -20727,7 +20792,7 @@
       </p:sp>
       <p:sp>
         <p:nvSpPr>
-          <p:cNvPr id="127" name="Text 125"/>
+          <p:cNvPr id="129" name="Text 127"/>
           <p:cNvSpPr txBox="1"/>
           <p:nvPr/>
         </p:nvSpPr>
@@ -20769,7 +20834,7 @@
       </p:sp>
       <p:sp>
         <p:nvSpPr>
-          <p:cNvPr id="128" name="Text 126"/>
+          <p:cNvPr id="130" name="Text 128"/>
           <p:cNvSpPr txBox="1"/>
           <p:nvPr/>
         </p:nvSpPr>
@@ -20811,7 +20876,7 @@
       </p:sp>
       <p:sp>
         <p:nvSpPr>
-          <p:cNvPr id="129" name="Text 127"/>
+          <p:cNvPr id="131" name="Text 129"/>
           <p:cNvSpPr txBox="1"/>
           <p:nvPr/>
         </p:nvSpPr>
@@ -20853,7 +20918,7 @@
       </p:sp>
       <p:sp>
         <p:nvSpPr>
-          <p:cNvPr id="130" name="Text 128"/>
+          <p:cNvPr id="132" name="Text 130"/>
           <p:cNvSpPr txBox="1"/>
           <p:nvPr/>
         </p:nvSpPr>
@@ -20895,7 +20960,7 @@
       </p:sp>
       <p:sp>
         <p:nvSpPr>
-          <p:cNvPr id="131" name="Text 129"/>
+          <p:cNvPr id="133" name="Text 131"/>
           <p:cNvSpPr txBox="1"/>
           <p:nvPr/>
         </p:nvSpPr>
@@ -20937,7 +21002,7 @@
       </p:sp>
       <p:sp>
         <p:nvSpPr>
-          <p:cNvPr id="132" name="Text 130"/>
+          <p:cNvPr id="134" name="Text 132"/>
           <p:cNvSpPr txBox="1"/>
           <p:nvPr/>
         </p:nvSpPr>
@@ -20979,7 +21044,7 @@
       </p:sp>
       <p:sp>
         <p:nvSpPr>
-          <p:cNvPr id="133" name="Shape 131"/>
+          <p:cNvPr id="135" name="Shape 133"/>
           <p:cNvSpPr/>
           <p:nvPr/>
         </p:nvSpPr>
@@ -21002,7 +21067,7 @@
       </p:sp>
       <p:sp>
         <p:nvSpPr>
-          <p:cNvPr id="134" name="Text 132"/>
+          <p:cNvPr id="136" name="Text 134"/>
           <p:cNvSpPr txBox="1"/>
           <p:nvPr/>
         </p:nvSpPr>
@@ -21044,7 +21109,7 @@
       </p:sp>
       <p:sp>
         <p:nvSpPr>
-          <p:cNvPr id="135" name="Text 133"/>
+          <p:cNvPr id="137" name="Text 135"/>
           <p:cNvSpPr txBox="1"/>
           <p:nvPr/>
         </p:nvSpPr>
@@ -21095,7 +21160,7 @@
                 <a:ea typeface="Malgun Gothic" pitchFamily="34" charset="-122"/>
                 <a:cs typeface="Malgun Gothic" pitchFamily="34" charset="-120"/>
               </a:rPr>
-              <a:t>정확도가 곧 수익</a:t>
+              <a:t>정확도가 곧 손익</a:t>
             </a:r>
             <a:pPr algn="l" indent="0" marL="0">
               <a:lnSpc>
@@ -21445,7 +21510,7 @@
                 <a:ea typeface="Malgun Gothic" pitchFamily="34" charset="-122"/>
                 <a:cs typeface="Malgun Gothic" pitchFamily="34" charset="-120"/>
               </a:rPr>
-              <a:t>겨울엔 </a:t>
+              <a:t>보정값이 회차마다 </a:t>
             </a:r>
             <a:pPr algn="l" indent="0" marL="0">
               <a:lnSpc>
@@ -21462,7 +21527,7 @@
                 <a:ea typeface="Malgun Gothic" pitchFamily="34" charset="-122"/>
                 <a:cs typeface="Malgun Gothic" pitchFamily="34" charset="-120"/>
               </a:rPr>
-              <a:t>13 MW 더</a:t>
+              <a:t>+13 ~ −5 MW</a:t>
             </a:r>
             <a:pPr algn="l" indent="0" marL="0">
               <a:lnSpc>
@@ -21479,33 +21544,58 @@
                 <a:ea typeface="Malgun Gothic" pitchFamily="34" charset="-122"/>
                 <a:cs typeface="Malgun Gothic" pitchFamily="34" charset="-120"/>
               </a:rPr>
-              <a:t>, 여름엔 </a:t>
-            </a:r>
-            <a:pPr algn="l" indent="0" marL="0">
-              <a:lnSpc>
-                <a:spcPts val="3496"/>
-              </a:lnSpc>
-              <a:buNone/>
-            </a:pPr>
-            <a:r>
-              <a:rPr lang="en-US" sz="2775" b="1" dirty="0">
-                <a:solidFill>
-                  <a:srgbClr val="EFB13C"/>
+              <a:t> 로 갈립니다</a:t>
+            </a:r>
+            <a:endParaRPr lang="en-US" sz="2775" dirty="0"/>
+          </a:p>
+        </p:txBody>
+      </p:sp>
+      <p:sp>
+        <p:nvSpPr>
+          <p:cNvPr id="12" name="Text 10"/>
+          <p:cNvSpPr txBox="1"/>
+          <p:nvPr/>
+        </p:nvSpPr>
+        <p:spPr>
+          <a:xfrm>
+            <a:off x="685800" y="2000250"/>
+            <a:ext cx="10287000" cy="284607"/>
+          </a:xfrm>
+          <a:prstGeom prst="rect">
+            <a:avLst/>
+          </a:prstGeom>
+          <a:noFill/>
+          <a:ln/>
+        </p:spPr>
+        <p:txBody>
+          <a:bodyPr wrap="square" lIns="0" tIns="0" rIns="0" bIns="0" rtlCol="0" anchor="t"/>
+          <a:lstStyle/>
+          <a:p>
+            <a:pPr algn="l" indent="0" marL="0">
+              <a:lnSpc>
+                <a:spcPts val="2241"/>
+              </a:lnSpc>
+              <a:buNone/>
+            </a:pPr>
+            <a:r>
+              <a:rPr lang="en-US" sz="1350" dirty="0">
+                <a:solidFill>
+                  <a:srgbClr val="CFCBC2"/>
                 </a:solidFill>
                 <a:latin typeface="Malgun Gothic" pitchFamily="34" charset="0"/>
                 <a:ea typeface="Malgun Gothic" pitchFamily="34" charset="-122"/>
                 <a:cs typeface="Malgun Gothic" pitchFamily="34" charset="-120"/>
               </a:rPr>
-              <a:t>5 MW 덜</a:t>
-            </a:r>
-            <a:pPr algn="l" indent="0" marL="0">
-              <a:lnSpc>
-                <a:spcPts val="3496"/>
-              </a:lnSpc>
-              <a:buNone/>
-            </a:pPr>
-            <a:r>
-              <a:rPr lang="en-US" sz="2775" b="1" dirty="0">
+              <a:t>보정값은 </a:t>
+            </a:r>
+            <a:pPr algn="l" indent="0" marL="0">
+              <a:lnSpc>
+                <a:spcPts val="2241"/>
+              </a:lnSpc>
+              <a:buNone/>
+            </a:pPr>
+            <a:r>
+              <a:rPr lang="en-US" sz="1350" b="1" dirty="0">
                 <a:solidFill>
                   <a:srgbClr val="EAE7E0"/>
                 </a:solidFill>
@@ -21513,33 +21603,8 @@
                 <a:ea typeface="Malgun Gothic" pitchFamily="34" charset="-122"/>
                 <a:cs typeface="Malgun Gothic" pitchFamily="34" charset="-120"/>
               </a:rPr>
-              <a:t> 나옵니다</a:t>
-            </a:r>
-            <a:endParaRPr lang="en-US" sz="2775" dirty="0"/>
-          </a:p>
-        </p:txBody>
-      </p:sp>
-      <p:sp>
-        <p:nvSpPr>
-          <p:cNvPr id="12" name="Text 10"/>
-          <p:cNvSpPr txBox="1"/>
-          <p:nvPr/>
-        </p:nvSpPr>
-        <p:spPr>
-          <a:xfrm>
-            <a:off x="685800" y="2000250"/>
-            <a:ext cx="10287000" cy="284607"/>
-          </a:xfrm>
-          <a:prstGeom prst="rect">
-            <a:avLst/>
-          </a:prstGeom>
-          <a:noFill/>
-          <a:ln/>
-        </p:spPr>
-        <p:txBody>
-          <a:bodyPr wrap="square" lIns="0" tIns="0" rIns="0" bIns="0" rtlCol="0" anchor="t"/>
-          <a:lstStyle/>
-          <a:p>
+              <a:t>실제 − 이론값 − W(IGV)</a:t>
+            </a:r>
             <a:pPr algn="l" indent="0" marL="0">
               <a:lnSpc>
                 <a:spcPts val="2241"/>
@@ -21555,41 +21620,7 @@
                 <a:ea typeface="Malgun Gothic" pitchFamily="34" charset="-122"/>
                 <a:cs typeface="Malgun Gothic" pitchFamily="34" charset="-120"/>
               </a:rPr>
-              <a:t>이론값과 실제의 차이를 온도 축에 찍으면, 흩어진 게 아니라 </a:t>
-            </a:r>
-            <a:pPr algn="l" indent="0" marL="0">
-              <a:lnSpc>
-                <a:spcPts val="2241"/>
-              </a:lnSpc>
-              <a:buNone/>
-            </a:pPr>
-            <a:r>
-              <a:rPr lang="en-US" sz="1350" b="1" dirty="0">
-                <a:solidFill>
-                  <a:srgbClr val="EAE7E0"/>
-                </a:solidFill>
-                <a:latin typeface="Malgun Gothic" pitchFamily="34" charset="0"/>
-                <a:ea typeface="Malgun Gothic" pitchFamily="34" charset="-122"/>
-                <a:cs typeface="Malgun Gothic" pitchFamily="34" charset="-120"/>
-              </a:rPr>
-              <a:t>온도를 따라 줄줄이 내려갑니다</a:t>
-            </a:r>
-            <a:pPr algn="l" indent="0" marL="0">
-              <a:lnSpc>
-                <a:spcPts val="2241"/>
-              </a:lnSpc>
-              <a:buNone/>
-            </a:pPr>
-            <a:r>
-              <a:rPr lang="en-US" sz="1350" dirty="0">
-                <a:solidFill>
-                  <a:srgbClr val="CFCBC2"/>
-                </a:solidFill>
-                <a:latin typeface="Malgun Gothic" pitchFamily="34" charset="0"/>
-                <a:ea typeface="Malgun Gothic" pitchFamily="34" charset="-122"/>
-                <a:cs typeface="Malgun Gothic" pitchFamily="34" charset="-120"/>
-              </a:rPr>
-              <a:t>.</a:t>
+              <a:t> 입니다. 온도 축에 찍으면 흩어진 게 아니라 온도를 따라 줄줄이 내려갑니다.</a:t>
             </a:r>
             <a:endParaRPr lang="en-US" sz="1350" dirty="0"/>
           </a:p>
@@ -21629,7 +21660,7 @@
         <p:spPr>
           <a:xfrm>
             <a:off x="914400" y="2838450"/>
-            <a:ext cx="7239000" cy="125016"/>
+            <a:ext cx="7620000" cy="125016"/>
           </a:xfrm>
           <a:prstGeom prst="rect">
             <a:avLst/>
@@ -21656,7 +21687,7 @@
                 <a:ea typeface="Consolas" pitchFamily="34" charset="-122"/>
                 <a:cs typeface="Consolas" pitchFamily="34" charset="-120"/>
               </a:rPr>
-              <a:t>점 하나가 테스트 1회  ·  누적 40회  ·  가로 외기온도 ℃ / 세로 = 실제 − 이론값 (MW)</a:t>
+              <a:t>점 하나가 테스트 1회  ·  누적 40회  ·  가로 외기온도 ℃ / 세로 = 보정값 = 실제 − 이론값 − W(IGV)  MW</a:t>
             </a:r>
             <a:endParaRPr lang="en-US" sz="788" dirty="0"/>
           </a:p>
@@ -23171,7 +23202,7 @@
                 <a:ea typeface="Malgun Gothic" pitchFamily="34" charset="-122"/>
                 <a:cs typeface="Malgun Gothic" pitchFamily="34" charset="-120"/>
               </a:rPr>
-              <a:t>추울수록 실제가 더 나오고</a:t>
+              <a:t>추울수록 더 더해야 하고</a:t>
             </a:r>
             <a:endParaRPr lang="en-US" sz="1050" dirty="0"/>
           </a:p>
@@ -23213,7 +23244,7 @@
                 <a:ea typeface="Malgun Gothic" pitchFamily="34" charset="-122"/>
                 <a:cs typeface="Malgun Gothic" pitchFamily="34" charset="-120"/>
               </a:rPr>
-              <a:t>더울수록 실제가 덜 나옵니다</a:t>
+              <a:t>더울수록 빼야 합니다</a:t>
             </a:r>
             <a:endParaRPr lang="en-US" sz="1050" dirty="0"/>
           </a:p>
@@ -23227,36 +23258,61 @@
         </p:nvSpPr>
         <p:spPr>
           <a:xfrm>
-            <a:off x="914400" y="5200650"/>
-            <a:ext cx="10363200" cy="166688"/>
-          </a:xfrm>
-          <a:prstGeom prst="rect">
-            <a:avLst/>
-          </a:prstGeom>
-          <a:noFill/>
-          <a:ln/>
-        </p:spPr>
-        <p:txBody>
-          <a:bodyPr wrap="square" lIns="0" tIns="0" rIns="0" bIns="0" rtlCol="0" anchor="t"/>
-          <a:lstStyle/>
-          <a:p>
-            <a:pPr algn="l" indent="0" marL="0">
-              <a:lnSpc>
-                <a:spcPts val="1313"/>
-              </a:lnSpc>
-              <a:buNone/>
-            </a:pPr>
-            <a:r>
-              <a:rPr lang="en-US" sz="938" dirty="0">
-                <a:solidFill>
-                  <a:srgbClr val="A9A79F"/>
+            <a:off x="6667500" y="3276600"/>
+            <a:ext cx="4572000" cy="142399"/>
+          </a:xfrm>
+          <a:prstGeom prst="rect">
+            <a:avLst/>
+          </a:prstGeom>
+          <a:noFill/>
+          <a:ln/>
+        </p:spPr>
+        <p:txBody>
+          <a:bodyPr wrap="square" lIns="0" tIns="0" rIns="0" bIns="0" rtlCol="0" anchor="t"/>
+          <a:lstStyle/>
+          <a:p>
+            <a:pPr algn="r" indent="0" marL="0">
+              <a:lnSpc>
+                <a:spcPts val="1121"/>
+              </a:lnSpc>
+              <a:buNone/>
+            </a:pPr>
+            <a:r>
+              <a:rPr lang="en-US" sz="863" dirty="0">
+                <a:solidFill>
+                  <a:srgbClr val="8A8880"/>
                 </a:solidFill>
                 <a:latin typeface="Malgun Gothic" pitchFamily="34" charset="0"/>
                 <a:ea typeface="Malgun Gothic" pitchFamily="34" charset="-122"/>
                 <a:cs typeface="Malgun Gothic" pitchFamily="34" charset="-120"/>
               </a:rPr>
-              <a:t>이론값은 </a:t>
-            </a:r>
+              <a:t>+13 은 -1.9℃ 한 회차, −5 는 여름 한 회차 — 가장 큰 값입니다</a:t>
+            </a:r>
+            <a:endParaRPr lang="en-US" sz="863" dirty="0"/>
+          </a:p>
+        </p:txBody>
+      </p:sp>
+      <p:sp>
+        <p:nvSpPr>
+          <p:cNvPr id="79" name="Text 77"/>
+          <p:cNvSpPr txBox="1"/>
+          <p:nvPr/>
+        </p:nvSpPr>
+        <p:spPr>
+          <a:xfrm>
+            <a:off x="914400" y="5200650"/>
+            <a:ext cx="10363200" cy="166688"/>
+          </a:xfrm>
+          <a:prstGeom prst="rect">
+            <a:avLst/>
+          </a:prstGeom>
+          <a:noFill/>
+          <a:ln/>
+        </p:spPr>
+        <p:txBody>
+          <a:bodyPr wrap="square" lIns="0" tIns="0" rIns="0" bIns="0" rtlCol="0" anchor="t"/>
+          <a:lstStyle/>
+          <a:p>
             <a:pPr algn="l" indent="0" marL="0">
               <a:lnSpc>
                 <a:spcPts val="1313"/>
@@ -23264,15 +23320,15 @@
               <a:buNone/>
             </a:pPr>
             <a:r>
-              <a:rPr lang="en-US" sz="938" b="1" dirty="0">
-                <a:solidFill>
-                  <a:srgbClr val="EFB13C"/>
+              <a:rPr lang="en-US" sz="938" dirty="0">
+                <a:solidFill>
+                  <a:srgbClr val="A9A79F"/>
                 </a:solidFill>
                 <a:latin typeface="Malgun Gothic" pitchFamily="34" charset="0"/>
                 <a:ea typeface="Malgun Gothic" pitchFamily="34" charset="-122"/>
                 <a:cs typeface="Malgun Gothic" pitchFamily="34" charset="-120"/>
               </a:rPr>
-              <a:t>제작사 표준 성능 곡선</a:t>
+              <a:t>이론값은 </a:t>
             </a:r>
             <a:pPr algn="l" indent="0" marL="0">
               <a:lnSpc>
@@ -23281,14 +23337,31 @@
               <a:buNone/>
             </a:pPr>
             <a:r>
-              <a:rPr lang="en-US" sz="938" dirty="0">
-                <a:solidFill>
-                  <a:srgbClr val="A9A79F"/>
+              <a:rPr lang="en-US" sz="938" b="1" dirty="0">
+                <a:solidFill>
+                  <a:srgbClr val="EFB13C"/>
                 </a:solidFill>
                 <a:latin typeface="Malgun Gothic" pitchFamily="34" charset="0"/>
                 <a:ea typeface="Malgun Gothic" pitchFamily="34" charset="-122"/>
                 <a:cs typeface="Malgun Gothic" pitchFamily="34" charset="-120"/>
               </a:rPr>
+              <a:t>제작사 표준 성능 곡선</a:t>
+            </a:r>
+            <a:pPr algn="l" indent="0" marL="0">
+              <a:lnSpc>
+                <a:spcPts val="1313"/>
+              </a:lnSpc>
+              <a:buNone/>
+            </a:pPr>
+            <a:r>
+              <a:rPr lang="en-US" sz="938" dirty="0">
+                <a:solidFill>
+                  <a:srgbClr val="A9A79F"/>
+                </a:solidFill>
+                <a:latin typeface="Malgun Gothic" pitchFamily="34" charset="0"/>
+                <a:ea typeface="Malgun Gothic" pitchFamily="34" charset="-122"/>
+                <a:cs typeface="Malgun Gothic" pitchFamily="34" charset="-120"/>
+              </a:rPr>
               <a:t>입니다. 우리 설비의 실제 특성과 온도에 따라 어긋나고, 그 차이가 저온 (+) · 고온 (−) 로 남습니다.</a:t>
             </a:r>
             <a:endParaRPr lang="en-US" sz="938" dirty="0"/>
@@ -23297,7 +23370,7 @@
       </p:sp>
       <p:sp>
         <p:nvSpPr>
-          <p:cNvPr id="79" name="Shape 77"/>
+          <p:cNvPr id="80" name="Shape 78"/>
           <p:cNvSpPr/>
           <p:nvPr/>
         </p:nvSpPr>
@@ -23322,7 +23395,7 @@
       </p:sp>
       <p:sp>
         <p:nvSpPr>
-          <p:cNvPr id="80" name="Text 78"/>
+          <p:cNvPr id="81" name="Text 79"/>
           <p:cNvSpPr txBox="1"/>
           <p:nvPr/>
         </p:nvSpPr>
@@ -23356,7 +23429,7 @@
                 <a:ea typeface="Consolas" pitchFamily="34" charset="-122"/>
                 <a:cs typeface="Consolas" pitchFamily="34" charset="-120"/>
               </a:rPr>
-              <a:t>종전 · 담당자가 손으로 정한 값 16회  ·  전부 정수 하나</a:t>
+              <a:t>종전 · 실제 적용한 값 16회  ·  회차순  ·  전부 정수 하나</a:t>
             </a:r>
             <a:endParaRPr lang="en-US" sz="788" dirty="0"/>
           </a:p>
@@ -23364,7 +23437,7 @@
       </p:sp>
       <p:sp>
         <p:nvSpPr>
-          <p:cNvPr id="81" name="Text 79"/>
+          <p:cNvPr id="82" name="Text 80"/>
           <p:cNvSpPr txBox="1"/>
           <p:nvPr/>
         </p:nvSpPr>
@@ -23406,7 +23479,7 @@
       </p:sp>
       <p:sp>
         <p:nvSpPr>
-          <p:cNvPr id="82" name="Text 80"/>
+          <p:cNvPr id="83" name="Text 81"/>
           <p:cNvSpPr txBox="1"/>
           <p:nvPr/>
         </p:nvSpPr>
@@ -23448,7 +23521,7 @@
       </p:sp>
       <p:sp>
         <p:nvSpPr>
-          <p:cNvPr id="83" name="Text 81"/>
+          <p:cNvPr id="84" name="Text 82"/>
           <p:cNvSpPr txBox="1"/>
           <p:nvPr/>
         </p:nvSpPr>
@@ -23490,7 +23563,7 @@
       </p:sp>
       <p:sp>
         <p:nvSpPr>
-          <p:cNvPr id="84" name="Text 82"/>
+          <p:cNvPr id="85" name="Text 83"/>
           <p:cNvSpPr txBox="1"/>
           <p:nvPr/>
         </p:nvSpPr>
@@ -23532,7 +23605,7 @@
       </p:sp>
       <p:sp>
         <p:nvSpPr>
-          <p:cNvPr id="85" name="Text 83"/>
+          <p:cNvPr id="86" name="Text 84"/>
           <p:cNvSpPr txBox="1"/>
           <p:nvPr/>
         </p:nvSpPr>
@@ -23574,7 +23647,7 @@
       </p:sp>
       <p:sp>
         <p:nvSpPr>
-          <p:cNvPr id="86" name="Text 84"/>
+          <p:cNvPr id="87" name="Text 85"/>
           <p:cNvSpPr txBox="1"/>
           <p:nvPr/>
         </p:nvSpPr>
@@ -23616,7 +23689,7 @@
       </p:sp>
       <p:sp>
         <p:nvSpPr>
-          <p:cNvPr id="87" name="Text 85"/>
+          <p:cNvPr id="88" name="Text 86"/>
           <p:cNvSpPr txBox="1"/>
           <p:nvPr/>
         </p:nvSpPr>
@@ -23658,7 +23731,7 @@
       </p:sp>
       <p:sp>
         <p:nvSpPr>
-          <p:cNvPr id="88" name="Text 86"/>
+          <p:cNvPr id="89" name="Text 87"/>
           <p:cNvSpPr txBox="1"/>
           <p:nvPr/>
         </p:nvSpPr>
@@ -23700,7 +23773,7 @@
       </p:sp>
       <p:sp>
         <p:nvSpPr>
-          <p:cNvPr id="89" name="Text 87"/>
+          <p:cNvPr id="90" name="Text 88"/>
           <p:cNvSpPr txBox="1"/>
           <p:nvPr/>
         </p:nvSpPr>
@@ -23742,7 +23815,7 @@
       </p:sp>
       <p:sp>
         <p:nvSpPr>
-          <p:cNvPr id="90" name="Text 88"/>
+          <p:cNvPr id="91" name="Text 89"/>
           <p:cNvSpPr txBox="1"/>
           <p:nvPr/>
         </p:nvSpPr>
@@ -23784,7 +23857,7 @@
       </p:sp>
       <p:sp>
         <p:nvSpPr>
-          <p:cNvPr id="91" name="Text 89"/>
+          <p:cNvPr id="92" name="Text 90"/>
           <p:cNvSpPr txBox="1"/>
           <p:nvPr/>
         </p:nvSpPr>
@@ -23826,7 +23899,7 @@
       </p:sp>
       <p:sp>
         <p:nvSpPr>
-          <p:cNvPr id="92" name="Text 90"/>
+          <p:cNvPr id="93" name="Text 91"/>
           <p:cNvSpPr txBox="1"/>
           <p:nvPr/>
         </p:nvSpPr>
@@ -23868,7 +23941,7 @@
       </p:sp>
       <p:sp>
         <p:nvSpPr>
-          <p:cNvPr id="93" name="Text 91"/>
+          <p:cNvPr id="94" name="Text 92"/>
           <p:cNvSpPr txBox="1"/>
           <p:nvPr/>
         </p:nvSpPr>
@@ -23910,7 +23983,7 @@
       </p:sp>
       <p:sp>
         <p:nvSpPr>
-          <p:cNvPr id="94" name="Text 92"/>
+          <p:cNvPr id="95" name="Text 93"/>
           <p:cNvSpPr txBox="1"/>
           <p:nvPr/>
         </p:nvSpPr>
@@ -23952,7 +24025,7 @@
       </p:sp>
       <p:sp>
         <p:nvSpPr>
-          <p:cNvPr id="95" name="Text 93"/>
+          <p:cNvPr id="96" name="Text 94"/>
           <p:cNvSpPr txBox="1"/>
           <p:nvPr/>
         </p:nvSpPr>
@@ -23994,7 +24067,7 @@
       </p:sp>
       <p:sp>
         <p:nvSpPr>
-          <p:cNvPr id="96" name="Text 94"/>
+          <p:cNvPr id="97" name="Text 95"/>
           <p:cNvSpPr txBox="1"/>
           <p:nvPr/>
         </p:nvSpPr>
@@ -24036,7 +24109,7 @@
       </p:sp>
       <p:sp>
         <p:nvSpPr>
-          <p:cNvPr id="97" name="Text 95"/>
+          <p:cNvPr id="98" name="Text 96"/>
           <p:cNvSpPr txBox="1"/>
           <p:nvPr/>
         </p:nvSpPr>
@@ -24078,7 +24151,7 @@
       </p:sp>
       <p:sp>
         <p:nvSpPr>
-          <p:cNvPr id="98" name="Text 96"/>
+          <p:cNvPr id="99" name="Text 97"/>
           <p:cNvSpPr txBox="1"/>
           <p:nvPr/>
         </p:nvSpPr>
@@ -24120,7 +24193,7 @@
       </p:sp>
       <p:sp>
         <p:nvSpPr>
-          <p:cNvPr id="99" name="Text 97"/>
+          <p:cNvPr id="100" name="Text 98"/>
           <p:cNvSpPr txBox="1"/>
           <p:nvPr/>
         </p:nvSpPr>
@@ -24162,7 +24235,7 @@
       </p:sp>
       <p:sp>
         <p:nvSpPr>
-          <p:cNvPr id="100" name="Text 98"/>
+          <p:cNvPr id="101" name="Text 99"/>
           <p:cNvSpPr txBox="1"/>
           <p:nvPr/>
         </p:nvSpPr>
@@ -24204,7 +24277,7 @@
       </p:sp>
       <p:sp>
         <p:nvSpPr>
-          <p:cNvPr id="101" name="Text 99"/>
+          <p:cNvPr id="102" name="Text 100"/>
           <p:cNvSpPr txBox="1"/>
           <p:nvPr/>
         </p:nvSpPr>
@@ -24246,7 +24319,7 @@
       </p:sp>
       <p:sp>
         <p:nvSpPr>
-          <p:cNvPr id="102" name="Text 100"/>
+          <p:cNvPr id="103" name="Text 101"/>
           <p:cNvSpPr txBox="1"/>
           <p:nvPr/>
         </p:nvSpPr>
@@ -24288,7 +24361,7 @@
       </p:sp>
       <p:sp>
         <p:nvSpPr>
-          <p:cNvPr id="103" name="Text 101"/>
+          <p:cNvPr id="104" name="Text 102"/>
           <p:cNvSpPr txBox="1"/>
           <p:nvPr/>
         </p:nvSpPr>
@@ -24330,7 +24403,7 @@
       </p:sp>
       <p:sp>
         <p:nvSpPr>
-          <p:cNvPr id="104" name="Text 102"/>
+          <p:cNvPr id="105" name="Text 103"/>
           <p:cNvSpPr txBox="1"/>
           <p:nvPr/>
         </p:nvSpPr>
@@ -24372,7 +24445,7 @@
       </p:sp>
       <p:sp>
         <p:nvSpPr>
-          <p:cNvPr id="105" name="Text 103"/>
+          <p:cNvPr id="106" name="Text 104"/>
           <p:cNvSpPr txBox="1"/>
           <p:nvPr/>
         </p:nvSpPr>
@@ -24414,7 +24487,7 @@
       </p:sp>
       <p:sp>
         <p:nvSpPr>
-          <p:cNvPr id="106" name="Text 104"/>
+          <p:cNvPr id="107" name="Text 105"/>
           <p:cNvSpPr txBox="1"/>
           <p:nvPr/>
         </p:nvSpPr>
@@ -24456,7 +24529,7 @@
       </p:sp>
       <p:sp>
         <p:nvSpPr>
-          <p:cNvPr id="107" name="Text 105"/>
+          <p:cNvPr id="108" name="Text 106"/>
           <p:cNvSpPr txBox="1"/>
           <p:nvPr/>
         </p:nvSpPr>
@@ -24498,7 +24571,7 @@
       </p:sp>
       <p:sp>
         <p:nvSpPr>
-          <p:cNvPr id="108" name="Text 106"/>
+          <p:cNvPr id="109" name="Text 107"/>
           <p:cNvSpPr txBox="1"/>
           <p:nvPr/>
         </p:nvSpPr>
@@ -24540,7 +24613,7 @@
       </p:sp>
       <p:sp>
         <p:nvSpPr>
-          <p:cNvPr id="109" name="Text 107"/>
+          <p:cNvPr id="110" name="Text 108"/>
           <p:cNvSpPr txBox="1"/>
           <p:nvPr/>
         </p:nvSpPr>
@@ -24582,7 +24655,7 @@
       </p:sp>
       <p:sp>
         <p:nvSpPr>
-          <p:cNvPr id="110" name="Text 108"/>
+          <p:cNvPr id="111" name="Text 109"/>
           <p:cNvSpPr txBox="1"/>
           <p:nvPr/>
         </p:nvSpPr>
@@ -24624,7 +24697,7 @@
       </p:sp>
       <p:sp>
         <p:nvSpPr>
-          <p:cNvPr id="111" name="Text 109"/>
+          <p:cNvPr id="112" name="Text 110"/>
           <p:cNvSpPr txBox="1"/>
           <p:nvPr/>
         </p:nvSpPr>
@@ -24666,7 +24739,7 @@
       </p:sp>
       <p:sp>
         <p:nvSpPr>
-          <p:cNvPr id="112" name="Text 110"/>
+          <p:cNvPr id="113" name="Text 111"/>
           <p:cNvSpPr txBox="1"/>
           <p:nvPr/>
         </p:nvSpPr>
@@ -24708,7 +24781,7 @@
       </p:sp>
       <p:sp>
         <p:nvSpPr>
-          <p:cNvPr id="113" name="Text 111"/>
+          <p:cNvPr id="114" name="Text 112"/>
           <p:cNvSpPr txBox="1"/>
           <p:nvPr/>
         </p:nvSpPr>
@@ -24750,7 +24823,7 @@
       </p:sp>
       <p:sp>
         <p:nvSpPr>
-          <p:cNvPr id="114" name="Shape 112"/>
+          <p:cNvPr id="115" name="Shape 113"/>
           <p:cNvSpPr/>
           <p:nvPr/>
         </p:nvSpPr>
@@ -24773,7 +24846,7 @@
       </p:sp>
       <p:sp>
         <p:nvSpPr>
-          <p:cNvPr id="115" name="Text 113"/>
+          <p:cNvPr id="116" name="Text 114"/>
           <p:cNvSpPr txBox="1"/>
           <p:nvPr/>
         </p:nvSpPr>
@@ -24815,7 +24888,7 @@
       </p:sp>
       <p:sp>
         <p:nvSpPr>
-          <p:cNvPr id="116" name="Text 114"/>
+          <p:cNvPr id="117" name="Text 115"/>
           <p:cNvSpPr txBox="1"/>
           <p:nvPr/>
         </p:nvSpPr>
@@ -25626,7 +25699,49 @@
       </p:sp>
       <p:sp>
         <p:nvSpPr>
-          <p:cNvPr id="21" name="Shape 19"/>
+          <p:cNvPr id="21" name="Text 19"/>
+          <p:cNvSpPr txBox="1"/>
+          <p:nvPr/>
+        </p:nvSpPr>
+        <p:spPr>
+          <a:xfrm>
+            <a:off x="914400" y="4724400"/>
+            <a:ext cx="6667500" cy="125730"/>
+          </a:xfrm>
+          <a:prstGeom prst="rect">
+            <a:avLst/>
+          </a:prstGeom>
+          <a:noFill/>
+          <a:ln/>
+        </p:spPr>
+        <p:txBody>
+          <a:bodyPr wrap="square" lIns="0" tIns="0" rIns="0" bIns="0" rtlCol="0" anchor="t"/>
+          <a:lstStyle/>
+          <a:p>
+            <a:pPr algn="l" indent="0" marL="0">
+              <a:lnSpc>
+                <a:spcPts val="990"/>
+              </a:lnSpc>
+              <a:buNone/>
+            </a:pPr>
+            <a:r>
+              <a:rPr lang="en-US" sz="825" dirty="0">
+                <a:solidFill>
+                  <a:srgbClr val="8A8880"/>
+                </a:solidFill>
+                <a:latin typeface="Malgun Gothic" pitchFamily="34" charset="0"/>
+                <a:ea typeface="Malgun Gothic" pitchFamily="34" charset="-122"/>
+                <a:cs typeface="Malgun Gothic" pitchFamily="34" charset="-120"/>
+              </a:rPr>
+              <a:t>※ '뺀다' = 온도로 설명되는 몫을 먼저 걷어내고, 남은 것끼리 다시 재는 것</a:t>
+            </a:r>
+            <a:endParaRPr lang="en-US" sz="825" dirty="0"/>
+          </a:p>
+        </p:txBody>
+      </p:sp>
+      <p:sp>
+        <p:nvSpPr>
+          <p:cNvPr id="22" name="Shape 20"/>
           <p:cNvSpPr/>
           <p:nvPr/>
         </p:nvSpPr>
@@ -25649,7 +25764,7 @@
       </p:sp>
       <p:sp>
         <p:nvSpPr>
-          <p:cNvPr id="22" name="Shape 20"/>
+          <p:cNvPr id="23" name="Shape 21"/>
           <p:cNvSpPr/>
           <p:nvPr/>
         </p:nvSpPr>
@@ -25672,7 +25787,7 @@
       </p:sp>
       <p:sp>
         <p:nvSpPr>
-          <p:cNvPr id="23" name="Text 21"/>
+          <p:cNvPr id="24" name="Text 22"/>
           <p:cNvSpPr txBox="1"/>
           <p:nvPr/>
         </p:nvSpPr>
@@ -25714,7 +25829,7 @@
       </p:sp>
       <p:sp>
         <p:nvSpPr>
-          <p:cNvPr id="24" name="Shape 22"/>
+          <p:cNvPr id="25" name="Shape 23"/>
           <p:cNvSpPr/>
           <p:nvPr/>
         </p:nvSpPr>
@@ -25734,7 +25849,7 @@
       </p:sp>
       <p:sp>
         <p:nvSpPr>
-          <p:cNvPr id="25" name="Text 23"/>
+          <p:cNvPr id="26" name="Text 24"/>
           <p:cNvSpPr txBox="1"/>
           <p:nvPr/>
         </p:nvSpPr>
@@ -25776,7 +25891,7 @@
       </p:sp>
       <p:sp>
         <p:nvSpPr>
-          <p:cNvPr id="26" name="Text 24"/>
+          <p:cNvPr id="27" name="Text 25"/>
           <p:cNvSpPr txBox="1"/>
           <p:nvPr/>
         </p:nvSpPr>
@@ -25818,7 +25933,7 @@
       </p:sp>
       <p:sp>
         <p:nvSpPr>
-          <p:cNvPr id="27" name="Shape 25"/>
+          <p:cNvPr id="28" name="Shape 26"/>
           <p:cNvSpPr/>
           <p:nvPr/>
         </p:nvSpPr>
@@ -25841,7 +25956,7 @@
       </p:sp>
       <p:sp>
         <p:nvSpPr>
-          <p:cNvPr id="28" name="Text 26"/>
+          <p:cNvPr id="29" name="Text 27"/>
           <p:cNvSpPr txBox="1"/>
           <p:nvPr/>
         </p:nvSpPr>
@@ -25883,7 +25998,7 @@
       </p:sp>
       <p:sp>
         <p:nvSpPr>
-          <p:cNvPr id="29" name="Shape 27"/>
+          <p:cNvPr id="30" name="Shape 28"/>
           <p:cNvSpPr/>
           <p:nvPr/>
         </p:nvSpPr>
@@ -25903,7 +26018,7 @@
       </p:sp>
       <p:sp>
         <p:nvSpPr>
-          <p:cNvPr id="30" name="Text 28"/>
+          <p:cNvPr id="31" name="Text 29"/>
           <p:cNvSpPr txBox="1"/>
           <p:nvPr/>
         </p:nvSpPr>
@@ -25945,7 +26060,7 @@
       </p:sp>
       <p:sp>
         <p:nvSpPr>
-          <p:cNvPr id="31" name="Shape 29"/>
+          <p:cNvPr id="32" name="Shape 30"/>
           <p:cNvSpPr/>
           <p:nvPr/>
         </p:nvSpPr>
@@ -25965,7 +26080,7 @@
       </p:sp>
       <p:sp>
         <p:nvSpPr>
-          <p:cNvPr id="32" name="Text 30"/>
+          <p:cNvPr id="33" name="Text 31"/>
           <p:cNvSpPr txBox="1"/>
           <p:nvPr/>
         </p:nvSpPr>
@@ -26007,7 +26122,7 @@
       </p:sp>
       <p:sp>
         <p:nvSpPr>
-          <p:cNvPr id="33" name="Text 31"/>
+          <p:cNvPr id="34" name="Text 32"/>
           <p:cNvSpPr txBox="1"/>
           <p:nvPr/>
         </p:nvSpPr>
@@ -26049,7 +26164,7 @@
       </p:sp>
       <p:sp>
         <p:nvSpPr>
-          <p:cNvPr id="34" name="Text 32"/>
+          <p:cNvPr id="35" name="Text 33"/>
           <p:cNvSpPr txBox="1"/>
           <p:nvPr/>
         </p:nvSpPr>
@@ -26091,7 +26206,7 @@
       </p:sp>
       <p:sp>
         <p:nvSpPr>
-          <p:cNvPr id="35" name="Shape 33"/>
+          <p:cNvPr id="36" name="Shape 34"/>
           <p:cNvSpPr/>
           <p:nvPr/>
         </p:nvSpPr>
@@ -26111,7 +26226,7 @@
       </p:sp>
       <p:sp>
         <p:nvSpPr>
-          <p:cNvPr id="36" name="Text 34"/>
+          <p:cNvPr id="37" name="Text 35"/>
           <p:cNvSpPr txBox="1"/>
           <p:nvPr/>
         </p:nvSpPr>
@@ -26153,7 +26268,7 @@
       </p:sp>
       <p:sp>
         <p:nvSpPr>
-          <p:cNvPr id="37" name="Shape 35"/>
+          <p:cNvPr id="38" name="Shape 36"/>
           <p:cNvSpPr/>
           <p:nvPr/>
         </p:nvSpPr>
@@ -26173,7 +26288,7 @@
       </p:sp>
       <p:sp>
         <p:nvSpPr>
-          <p:cNvPr id="38" name="Text 36"/>
+          <p:cNvPr id="39" name="Text 37"/>
           <p:cNvSpPr txBox="1"/>
           <p:nvPr/>
         </p:nvSpPr>
@@ -26215,7 +26330,7 @@
       </p:sp>
       <p:sp>
         <p:nvSpPr>
-          <p:cNvPr id="39" name="Text 37"/>
+          <p:cNvPr id="40" name="Text 38"/>
           <p:cNvSpPr txBox="1"/>
           <p:nvPr/>
         </p:nvSpPr>
@@ -26257,7 +26372,7 @@
       </p:sp>
       <p:sp>
         <p:nvSpPr>
-          <p:cNvPr id="40" name="Text 38"/>
+          <p:cNvPr id="41" name="Text 39"/>
           <p:cNvSpPr txBox="1"/>
           <p:nvPr/>
         </p:nvSpPr>
@@ -26299,7 +26414,7 @@
       </p:sp>
       <p:sp>
         <p:nvSpPr>
-          <p:cNvPr id="41" name="Shape 39"/>
+          <p:cNvPr id="42" name="Shape 40"/>
           <p:cNvSpPr/>
           <p:nvPr/>
         </p:nvSpPr>
@@ -26319,7 +26434,7 @@
       </p:sp>
       <p:sp>
         <p:nvSpPr>
-          <p:cNvPr id="42" name="Text 40"/>
+          <p:cNvPr id="43" name="Text 41"/>
           <p:cNvSpPr txBox="1"/>
           <p:nvPr/>
         </p:nvSpPr>
@@ -26361,7 +26476,7 @@
       </p:sp>
       <p:sp>
         <p:nvSpPr>
-          <p:cNvPr id="43" name="Shape 41"/>
+          <p:cNvPr id="44" name="Shape 42"/>
           <p:cNvSpPr/>
           <p:nvPr/>
         </p:nvSpPr>
@@ -26381,7 +26496,7 @@
       </p:sp>
       <p:sp>
         <p:nvSpPr>
-          <p:cNvPr id="44" name="Text 42"/>
+          <p:cNvPr id="45" name="Text 43"/>
           <p:cNvSpPr txBox="1"/>
           <p:nvPr/>
         </p:nvSpPr>
@@ -26423,7 +26538,7 @@
       </p:sp>
       <p:sp>
         <p:nvSpPr>
-          <p:cNvPr id="45" name="Text 43"/>
+          <p:cNvPr id="46" name="Text 44"/>
           <p:cNvSpPr txBox="1"/>
           <p:nvPr/>
         </p:nvSpPr>
@@ -26465,7 +26580,7 @@
       </p:sp>
       <p:sp>
         <p:nvSpPr>
-          <p:cNvPr id="46" name="Text 44"/>
+          <p:cNvPr id="47" name="Text 45"/>
           <p:cNvSpPr txBox="1"/>
           <p:nvPr/>
         </p:nvSpPr>
@@ -26499,7 +26614,7 @@
                 <a:ea typeface="Consolas" pitchFamily="34" charset="-122"/>
                 <a:cs typeface="Consolas" pitchFamily="34" charset="-120"/>
               </a:rPr>
-              <a:t>온도와의 r  진공도 +0.95   ·   대기압 −0.83   ·   대습도 +0.67  — 후보들이 서로 온도에 묶여 있다</a:t>
+              <a:t>온도와의 r  진공도 +0.95   ·   대기압 −0.83   ·   습도 +0.67  — 후보들이 서로 온도에 묶여 있다</a:t>
             </a:r>
             <a:endParaRPr lang="en-US" sz="863" dirty="0"/>
           </a:p>
@@ -26507,7 +26622,7 @@
       </p:sp>
       <p:sp>
         <p:nvSpPr>
-          <p:cNvPr id="47" name="Shape 45"/>
+          <p:cNvPr id="48" name="Shape 46"/>
           <p:cNvSpPr/>
           <p:nvPr/>
         </p:nvSpPr>
@@ -26532,7 +26647,7 @@
       </p:sp>
       <p:sp>
         <p:nvSpPr>
-          <p:cNvPr id="48" name="Text 46"/>
+          <p:cNvPr id="49" name="Text 47"/>
           <p:cNvSpPr txBox="1"/>
           <p:nvPr/>
         </p:nvSpPr>
@@ -26574,7 +26689,7 @@
       </p:sp>
       <p:sp>
         <p:nvSpPr>
-          <p:cNvPr id="49" name="Shape 47"/>
+          <p:cNvPr id="50" name="Shape 48"/>
           <p:cNvSpPr/>
           <p:nvPr/>
         </p:nvSpPr>
@@ -26594,7 +26709,7 @@
       </p:sp>
       <p:sp>
         <p:nvSpPr>
-          <p:cNvPr id="50" name="Text 48"/>
+          <p:cNvPr id="51" name="Text 49"/>
           <p:cNvSpPr txBox="1"/>
           <p:nvPr/>
         </p:nvSpPr>
@@ -26636,7 +26751,7 @@
       </p:sp>
       <p:sp>
         <p:nvSpPr>
-          <p:cNvPr id="51" name="Text 49"/>
+          <p:cNvPr id="52" name="Text 50"/>
           <p:cNvSpPr txBox="1"/>
           <p:nvPr/>
         </p:nvSpPr>
@@ -26678,7 +26793,7 @@
       </p:sp>
       <p:sp>
         <p:nvSpPr>
-          <p:cNvPr id="52" name="Shape 50"/>
+          <p:cNvPr id="53" name="Shape 51"/>
           <p:cNvSpPr/>
           <p:nvPr/>
         </p:nvSpPr>
@@ -26698,7 +26813,7 @@
       </p:sp>
       <p:sp>
         <p:nvSpPr>
-          <p:cNvPr id="53" name="Text 51"/>
+          <p:cNvPr id="54" name="Text 52"/>
           <p:cNvSpPr txBox="1"/>
           <p:nvPr/>
         </p:nvSpPr>
@@ -26740,7 +26855,7 @@
       </p:sp>
       <p:sp>
         <p:nvSpPr>
-          <p:cNvPr id="54" name="Text 52"/>
+          <p:cNvPr id="55" name="Text 53"/>
           <p:cNvSpPr txBox="1"/>
           <p:nvPr/>
         </p:nvSpPr>
@@ -26850,7 +26965,7 @@
       </p:sp>
       <p:sp>
         <p:nvSpPr>
-          <p:cNvPr id="55" name="Shape 53"/>
+          <p:cNvPr id="56" name="Shape 54"/>
           <p:cNvSpPr/>
           <p:nvPr/>
         </p:nvSpPr>
@@ -26870,7 +26985,7 @@
       </p:sp>
       <p:sp>
         <p:nvSpPr>
-          <p:cNvPr id="56" name="Text 54"/>
+          <p:cNvPr id="57" name="Text 55"/>
           <p:cNvSpPr txBox="1"/>
           <p:nvPr/>
         </p:nvSpPr>
@@ -26912,7 +27027,7 @@
       </p:sp>
       <p:sp>
         <p:nvSpPr>
-          <p:cNvPr id="57" name="Text 55"/>
+          <p:cNvPr id="58" name="Text 56"/>
           <p:cNvSpPr txBox="1"/>
           <p:nvPr/>
         </p:nvSpPr>
@@ -26954,7 +27069,7 @@
       </p:sp>
       <p:sp>
         <p:nvSpPr>
-          <p:cNvPr id="58" name="Shape 56"/>
+          <p:cNvPr id="59" name="Shape 57"/>
           <p:cNvSpPr/>
           <p:nvPr/>
         </p:nvSpPr>
@@ -26977,7 +27092,7 @@
       </p:sp>
       <p:sp>
         <p:nvSpPr>
-          <p:cNvPr id="59" name="Text 57"/>
+          <p:cNvPr id="60" name="Text 58"/>
           <p:cNvSpPr txBox="1"/>
           <p:nvPr/>
         </p:nvSpPr>
@@ -27019,7 +27134,7 @@
       </p:sp>
       <p:sp>
         <p:nvSpPr>
-          <p:cNvPr id="60" name="Text 58"/>
+          <p:cNvPr id="61" name="Text 59"/>
           <p:cNvSpPr txBox="1"/>
           <p:nvPr/>
         </p:nvSpPr>
@@ -27596,7 +27711,7 @@
         <p:spPr>
           <a:xfrm>
             <a:off x="685800" y="2705100"/>
-            <a:ext cx="10820400" cy="1181100"/>
+            <a:ext cx="10820400" cy="1314450"/>
           </a:xfrm>
           <a:prstGeom prst="rect">
             <a:avLst/>
@@ -27759,7 +27874,7 @@
         <p:spPr>
           <a:xfrm>
             <a:off x="914400" y="3467100"/>
-            <a:ext cx="9525000" cy="240030"/>
+            <a:ext cx="9525000" cy="480060"/>
           </a:xfrm>
           <a:prstGeom prst="rect">
             <a:avLst/>
@@ -27786,90 +27901,124 @@
                 <a:ea typeface="Malgun Gothic" pitchFamily="34" charset="-122"/>
                 <a:cs typeface="Malgun Gothic" pitchFamily="34" charset="-120"/>
               </a:rPr>
-              <a:t>제작사 성능 곡선과 사내 검증을 거친 이론식입니다. 데이터가 쌓여도 바뀌지 않습니다.</a:t>
-            </a:r>
-            <a:endParaRPr lang="en-US" sz="1125" dirty="0"/>
-          </a:p>
-        </p:txBody>
-      </p:sp>
-      <p:sp>
-        <p:nvSpPr>
-          <p:cNvPr id="18" name="Text 16"/>
-          <p:cNvSpPr txBox="1"/>
-          <p:nvPr/>
-        </p:nvSpPr>
-        <p:spPr>
-          <a:xfrm>
-            <a:off x="914400" y="3924300"/>
-            <a:ext cx="285750" cy="228600"/>
-          </a:xfrm>
-          <a:prstGeom prst="rect">
-            <a:avLst/>
-          </a:prstGeom>
-          <a:noFill/>
-          <a:ln/>
-        </p:spPr>
-        <p:txBody>
-          <a:bodyPr wrap="square" lIns="0" tIns="0" rIns="0" bIns="0" rtlCol="0" anchor="t"/>
-          <a:lstStyle/>
-          <a:p>
-            <a:pPr algn="l" indent="0" marL="0">
-              <a:lnSpc>
-                <a:spcPts val="1800"/>
-              </a:lnSpc>
-              <a:buNone/>
-            </a:pPr>
-            <a:r>
-              <a:rPr lang="en-US" sz="1500" dirty="0">
-                <a:solidFill>
-                  <a:srgbClr val="EFB13C"/>
+              <a:t>제작사 성능 곡선과 사내 검증을 거친 이론식입니다. 데이터가 쌓여도 바뀌지 않습니다.  — 진공도는 여기서 이미 반영합니다. 6장에서 기각한 것은 </a:t>
+            </a:r>
+            <a:pPr algn="l" indent="0" marL="0">
+              <a:lnSpc>
+                <a:spcPts val="1890"/>
+              </a:lnSpc>
+              <a:buNone/>
+            </a:pPr>
+            <a:r>
+              <a:rPr lang="en-US" sz="1125" b="1" dirty="0">
+                <a:solidFill>
+                  <a:srgbClr val="EAE7E0"/>
                 </a:solidFill>
                 <a:latin typeface="Malgun Gothic" pitchFamily="34" charset="0"/>
                 <a:ea typeface="Malgun Gothic" pitchFamily="34" charset="-122"/>
                 <a:cs typeface="Malgun Gothic" pitchFamily="34" charset="-120"/>
               </a:rPr>
-              <a:t>↓</a:t>
-            </a:r>
-            <a:endParaRPr lang="en-US" sz="1500" dirty="0"/>
-          </a:p>
-        </p:txBody>
-      </p:sp>
-      <p:sp>
-        <p:nvSpPr>
-          <p:cNvPr id="19" name="Text 17"/>
-          <p:cNvSpPr txBox="1"/>
-          <p:nvPr/>
-        </p:nvSpPr>
-        <p:spPr>
-          <a:xfrm>
-            <a:off x="1276350" y="3971925"/>
-            <a:ext cx="3810000" cy="167164"/>
-          </a:xfrm>
-          <a:prstGeom prst="rect">
-            <a:avLst/>
-          </a:prstGeom>
-          <a:noFill/>
-          <a:ln/>
-        </p:spPr>
-        <p:txBody>
-          <a:bodyPr wrap="square" lIns="0" tIns="0" rIns="0" bIns="0" rtlCol="0" anchor="t"/>
-          <a:lstStyle/>
-          <a:p>
-            <a:pPr algn="l" indent="0" marL="0">
-              <a:lnSpc>
-                <a:spcPts val="1316"/>
-              </a:lnSpc>
-              <a:buNone/>
-            </a:pPr>
-            <a:r>
-              <a:rPr lang="en-US" sz="1013" dirty="0">
-                <a:solidFill>
-                  <a:srgbClr val="A9A79F"/>
+              <a:t>그러고도 남는 차이</a:t>
+            </a:r>
+            <a:pPr algn="l" indent="0" marL="0">
+              <a:lnSpc>
+                <a:spcPts val="1890"/>
+              </a:lnSpc>
+              <a:buNone/>
+            </a:pPr>
+            <a:r>
+              <a:rPr lang="en-US" sz="1125" dirty="0">
+                <a:solidFill>
+                  <a:srgbClr val="CFCBC2"/>
                 </a:solidFill>
                 <a:latin typeface="Malgun Gothic" pitchFamily="34" charset="0"/>
                 <a:ea typeface="Malgun Gothic" pitchFamily="34" charset="-122"/>
                 <a:cs typeface="Malgun Gothic" pitchFamily="34" charset="-120"/>
               </a:rPr>
+              <a:t> 를 진공도로 더 설명할 수 있느냐였습니다.</a:t>
+            </a:r>
+            <a:endParaRPr lang="en-US" sz="1125" dirty="0"/>
+          </a:p>
+        </p:txBody>
+      </p:sp>
+      <p:sp>
+        <p:nvSpPr>
+          <p:cNvPr id="18" name="Text 16"/>
+          <p:cNvSpPr txBox="1"/>
+          <p:nvPr/>
+        </p:nvSpPr>
+        <p:spPr>
+          <a:xfrm>
+            <a:off x="914400" y="4076700"/>
+            <a:ext cx="285750" cy="228600"/>
+          </a:xfrm>
+          <a:prstGeom prst="rect">
+            <a:avLst/>
+          </a:prstGeom>
+          <a:noFill/>
+          <a:ln/>
+        </p:spPr>
+        <p:txBody>
+          <a:bodyPr wrap="square" lIns="0" tIns="0" rIns="0" bIns="0" rtlCol="0" anchor="t"/>
+          <a:lstStyle/>
+          <a:p>
+            <a:pPr algn="l" indent="0" marL="0">
+              <a:lnSpc>
+                <a:spcPts val="1800"/>
+              </a:lnSpc>
+              <a:buNone/>
+            </a:pPr>
+            <a:r>
+              <a:rPr lang="en-US" sz="1500" dirty="0">
+                <a:solidFill>
+                  <a:srgbClr val="EFB13C"/>
+                </a:solidFill>
+                <a:latin typeface="Malgun Gothic" pitchFamily="34" charset="0"/>
+                <a:ea typeface="Malgun Gothic" pitchFamily="34" charset="-122"/>
+                <a:cs typeface="Malgun Gothic" pitchFamily="34" charset="-120"/>
+              </a:rPr>
+              <a:t>↓</a:t>
+            </a:r>
+            <a:endParaRPr lang="en-US" sz="1500" dirty="0"/>
+          </a:p>
+        </p:txBody>
+      </p:sp>
+      <p:sp>
+        <p:nvSpPr>
+          <p:cNvPr id="19" name="Text 17"/>
+          <p:cNvSpPr txBox="1"/>
+          <p:nvPr/>
+        </p:nvSpPr>
+        <p:spPr>
+          <a:xfrm>
+            <a:off x="1276350" y="4124325"/>
+            <a:ext cx="3810000" cy="167164"/>
+          </a:xfrm>
+          <a:prstGeom prst="rect">
+            <a:avLst/>
+          </a:prstGeom>
+          <a:noFill/>
+          <a:ln/>
+        </p:spPr>
+        <p:txBody>
+          <a:bodyPr wrap="square" lIns="0" tIns="0" rIns="0" bIns="0" rtlCol="0" anchor="t"/>
+          <a:lstStyle/>
+          <a:p>
+            <a:pPr algn="l" indent="0" marL="0">
+              <a:lnSpc>
+                <a:spcPts val="1316"/>
+              </a:lnSpc>
+              <a:buNone/>
+            </a:pPr>
+            <a:r>
+              <a:rPr lang="en-US" sz="1013" dirty="0">
+                <a:solidFill>
+                  <a:srgbClr val="A9A79F"/>
+                </a:solidFill>
+                <a:latin typeface="Malgun Gothic" pitchFamily="34" charset="0"/>
+                <a:ea typeface="Malgun Gothic" pitchFamily="34" charset="-122"/>
+                <a:cs typeface="Malgun Gothic" pitchFamily="34" charset="-120"/>
+              </a:rPr>
               <a:t>이론값과 실제의 차이만 넘깁니다</a:t>
             </a:r>
             <a:endParaRPr lang="en-US" sz="1013" dirty="0"/>
@@ -27884,8 +28033,8 @@
         </p:nvSpPr>
         <p:spPr>
           <a:xfrm>
-            <a:off x="685800" y="4267200"/>
-            <a:ext cx="10820400" cy="1181100"/>
+            <a:off x="685800" y="4400550"/>
+            <a:ext cx="10820400" cy="1047750"/>
           </a:xfrm>
           <a:prstGeom prst="rect">
             <a:avLst/>
@@ -27909,7 +28058,7 @@
         </p:nvSpPr>
         <p:spPr>
           <a:xfrm>
-            <a:off x="685800" y="4267200"/>
+            <a:off x="685800" y="4400550"/>
             <a:ext cx="10820400" cy="19050"/>
           </a:xfrm>
           <a:prstGeom prst="rect">
@@ -27929,7 +28078,7 @@
         </p:nvSpPr>
         <p:spPr>
           <a:xfrm>
-            <a:off x="914400" y="4419600"/>
+            <a:off x="914400" y="4533900"/>
             <a:ext cx="4762500" cy="125016"/>
           </a:xfrm>
           <a:prstGeom prst="rect">
@@ -27971,7 +28120,7 @@
         </p:nvSpPr>
         <p:spPr>
           <a:xfrm>
-            <a:off x="914400" y="4629150"/>
+            <a:off x="914400" y="4724400"/>
             <a:ext cx="9525000" cy="284036"/>
           </a:xfrm>
           <a:prstGeom prst="rect">
@@ -28030,7 +28179,7 @@
         </p:nvSpPr>
         <p:spPr>
           <a:xfrm>
-            <a:off x="914400" y="5029200"/>
+            <a:off x="914400" y="5124450"/>
             <a:ext cx="9525000" cy="240030"/>
           </a:xfrm>
           <a:prstGeom prst="rect">
@@ -28647,7 +28796,7 @@
                 <a:ea typeface="Malgun Gothic" pitchFamily="34" charset="-122"/>
                 <a:cs typeface="Malgun Gothic" pitchFamily="34" charset="-120"/>
               </a:rPr>
-              <a:t>점을 그대로 잇지 않았습니다 —</a:t>
+              <a:t>눈대중으로 고르지 않았습니다 —</a:t>
             </a:r>
             <a:endParaRPr lang="en-US" sz="2775" dirty="0"/>
           </a:p>
@@ -28743,7 +28892,7 @@
                 <a:ea typeface="Malgun Gothic" pitchFamily="34" charset="-122"/>
                 <a:cs typeface="Malgun Gothic" pitchFamily="34" charset="-120"/>
               </a:rPr>
-              <a:t>한 회를 가리고 나머지로 맞혀보는 방식(LOOCV)으로 40번 채점했습니다. 세 지표 모두 </a:t>
+              <a:t>한 회를 가리고 나머지로 맞혀보는 방식(LOOCV)으로 채점했습니다. 세 지표 모두 </a:t>
             </a:r>
             <a:pPr algn="l" indent="0" marL="0">
               <a:lnSpc>
@@ -28817,7 +28966,7 @@
         <p:spPr>
           <a:xfrm>
             <a:off x="914400" y="2819400"/>
-            <a:ext cx="6096000" cy="125016"/>
+            <a:ext cx="7429500" cy="125016"/>
           </a:xfrm>
           <a:prstGeom prst="rect">
             <a:avLst/>
@@ -28844,7 +28993,7 @@
                 <a:ea typeface="Consolas" pitchFamily="34" charset="-122"/>
                 <a:cs typeface="Consolas" pitchFamily="34" charset="-120"/>
               </a:rPr>
-              <a:t>LOOCV 채점 결과  ·  종전(온도 구분 없이 하나의 값)은 MAE 3.80 MW 였습니다</a:t>
+              <a:t>LOOCV 채점 결과  ·  7가지가 모두 예측 가능한 39회 공통 집합  ·  종전(하나의 값)은 MAE 3.90 MW</a:t>
             </a:r>
             <a:endParaRPr lang="en-US" sz="788" dirty="0"/>
           </a:p>
@@ -28858,8 +29007,8 @@
         </p:nvSpPr>
         <p:spPr>
           <a:xfrm>
-            <a:off x="7143750" y="2800350"/>
-            <a:ext cx="4133850" cy="131445"/>
+            <a:off x="8477250" y="2800350"/>
+            <a:ext cx="2800350" cy="131445"/>
           </a:xfrm>
           <a:prstGeom prst="rect">
             <a:avLst/>
@@ -28886,7 +29035,7 @@
                 <a:ea typeface="Malgun Gothic" pitchFamily="34" charset="-122"/>
                 <a:cs typeface="Malgun Gothic" pitchFamily="34" charset="-120"/>
               </a:rPr>
-              <a:t>MAE·RMSE 는 작을수록,  R² 는 1 에 가까울수록 좋습니다</a:t>
+              <a:t>작을수록 좋음 · R² 는 1 에 가까울수록</a:t>
             </a:r>
             <a:endParaRPr lang="en-US" sz="863" dirty="0"/>
           </a:p>
@@ -33864,7 +34013,7 @@
                 <a:ea typeface="Malgun Gothic" pitchFamily="34" charset="-122"/>
                 <a:cs typeface="Malgun Gothic" pitchFamily="34" charset="-120"/>
               </a:rPr>
-              <a:t>이론값 (보정 없음)</a:t>
+              <a:t>이론 출력 (IGV 포함 · 보정 없음)</a:t>
             </a:r>
             <a:endParaRPr lang="en-US" sz="900" dirty="0"/>
           </a:p>
@@ -33943,8 +34092,8 @@
         </p:nvSpPr>
         <p:spPr>
           <a:xfrm>
-            <a:off x="6096000" y="3810000"/>
-            <a:ext cx="3810000" cy="148590"/>
+            <a:off x="5334000" y="3810000"/>
+            <a:ext cx="4572000" cy="148590"/>
           </a:xfrm>
           <a:prstGeom prst="rect">
             <a:avLst/>
@@ -33971,7 +34120,7 @@
                 <a:ea typeface="Malgun Gothic" pitchFamily="34" charset="-122"/>
                 <a:cs typeface="Malgun Gothic" pitchFamily="34" charset="-120"/>
               </a:rPr>
-              <a:t>두 곡선이 거의 붙어 보입니다 →  확대해 보겠습니다</a:t>
+              <a:t>두 곡선이 거의 붙어 보입니다 — 아래는 그 차이만 확대한 것입니다</a:t>
             </a:r>
             <a:endParaRPr lang="en-US" sz="900" dirty="0"/>
           </a:p>
@@ -34724,7 +34873,7 @@
         <p:spPr>
           <a:xfrm>
             <a:off x="1428750" y="4200525"/>
-            <a:ext cx="2190750" cy="131445"/>
+            <a:ext cx="2476500" cy="131445"/>
           </a:xfrm>
           <a:prstGeom prst="rect">
             <a:avLst/>
@@ -34751,7 +34900,7 @@
                 <a:ea typeface="Malgun Gothic" pitchFamily="34" charset="-122"/>
                 <a:cs typeface="Malgun Gothic" pitchFamily="34" charset="-120"/>
               </a:rPr>
-              <a:t>차이 = 실제 − 이론값 (MW)</a:t>
+              <a:t>차이 = 보정값 (실제 − 이론값 − W)</a:t>
             </a:r>
             <a:endParaRPr lang="en-US" sz="863" dirty="0"/>
           </a:p>
@@ -36385,7 +36534,7 @@
                 <a:ea typeface="Malgun Gothic" pitchFamily="34" charset="-122"/>
                 <a:cs typeface="Malgun Gothic" pitchFamily="34" charset="-120"/>
               </a:rPr>
-              <a:t>이론값보다 </a:t>
+              <a:t>이론 출력보다 </a:t>
             </a:r>
             <a:pPr algn="ctr" indent="0" marL="0">
               <a:lnSpc>

--- a/docs/ppt/위례_공급가능용량_최종발표_v2.pptx
+++ b/docs/ppt/위례_공급가능용량_최종발표_v2.pptx
@@ -2040,7 +2040,93 @@
         </p:nvSpPr>
         <p:spPr>
           <a:xfrm>
-            <a:off x="685800" y="685800"/>
+            <a:off x="685800" y="533400"/>
+            <a:ext cx="2133600" cy="600075"/>
+          </a:xfrm>
+          <a:prstGeom prst="rect">
+            <a:avLst/>
+          </a:prstGeom>
+          <a:solidFill>
+            <a:srgbClr val="FFFFFF"/>
+          </a:solidFill>
+          <a:ln/>
+        </p:spPr>
+      </p:sp>
+      <p:pic>
+        <p:nvPicPr>
+          <p:cNvPr id="3" name="Image 0" descr="/home/user/Narae-AI/docs/ppt/assets/ci_narae.png">    </p:cNvPr>
+          <p:cNvPicPr>
+            <a:picLocks noChangeAspect="1"/>
+          </p:cNvPicPr>
+          <p:nvPr/>
+        </p:nvPicPr>
+        <p:blipFill>
+          <a:blip r:embed="rId1"/>
+          <a:stretch>
+            <a:fillRect/>
+          </a:stretch>
+        </p:blipFill>
+        <p:spPr>
+          <a:xfrm>
+            <a:off x="819150" y="657225"/>
+            <a:ext cx="1866900" cy="352425"/>
+          </a:xfrm>
+          <a:prstGeom prst="rect">
+            <a:avLst/>
+          </a:prstGeom>
+        </p:spPr>
+      </p:pic>
+      <p:sp>
+        <p:nvSpPr>
+          <p:cNvPr id="4" name="Text 1"/>
+          <p:cNvSpPr txBox="1"/>
+          <p:nvPr/>
+        </p:nvSpPr>
+        <p:spPr>
+          <a:xfrm>
+            <a:off x="7696200" y="704850"/>
+            <a:ext cx="3810000" cy="148828"/>
+          </a:xfrm>
+          <a:prstGeom prst="rect">
+            <a:avLst/>
+          </a:prstGeom>
+          <a:noFill/>
+          <a:ln/>
+        </p:spPr>
+        <p:txBody>
+          <a:bodyPr wrap="square" lIns="0" tIns="0" rIns="0" bIns="0" rtlCol="0" anchor="t"/>
+          <a:lstStyle/>
+          <a:p>
+            <a:pPr algn="r" indent="0" marL="0">
+              <a:lnSpc>
+                <a:spcPts val="1172"/>
+              </a:lnSpc>
+              <a:buNone/>
+            </a:pPr>
+            <a:r>
+              <a:rPr lang="en-US" sz="938" spc="200" kern="0" dirty="0">
+                <a:solidFill>
+                  <a:srgbClr val="A9A79F"/>
+                </a:solidFill>
+                <a:latin typeface="Consolas" pitchFamily="34" charset="0"/>
+                <a:ea typeface="Consolas" pitchFamily="34" charset="-122"/>
+                <a:cs typeface="Consolas" pitchFamily="34" charset="-120"/>
+              </a:rPr>
+              <a:t>개선과제 최종 보고</a:t>
+            </a:r>
+            <a:endParaRPr lang="en-US" sz="938" dirty="0"/>
+          </a:p>
+        </p:txBody>
+      </p:sp>
+      <p:sp>
+        <p:nvSpPr>
+          <p:cNvPr id="5" name="Shape 2"/>
+          <p:cNvSpPr/>
+          <p:nvPr/>
+        </p:nvSpPr>
+        <p:spPr>
+          <a:xfrm>
+            <a:off x="685800" y="1428750"/>
             <a:ext cx="10820400" cy="0"/>
           </a:xfrm>
           <a:prstGeom prst="line">
@@ -2057,112 +2143,48 @@
       </p:sp>
       <p:sp>
         <p:nvSpPr>
-          <p:cNvPr id="3" name="Text 1"/>
-          <p:cNvSpPr txBox="1"/>
-          <p:nvPr/>
-        </p:nvSpPr>
-        <p:spPr>
-          <a:xfrm>
-            <a:off x="685800" y="419100"/>
-            <a:ext cx="5715000" cy="142875"/>
-          </a:xfrm>
-          <a:prstGeom prst="rect">
-            <a:avLst/>
-          </a:prstGeom>
-          <a:noFill/>
-          <a:ln/>
-        </p:spPr>
-        <p:txBody>
-          <a:bodyPr wrap="square" lIns="0" tIns="0" rIns="0" bIns="0" rtlCol="0" anchor="t"/>
-          <a:lstStyle/>
-          <a:p>
-            <a:pPr algn="l" indent="0" marL="0">
-              <a:lnSpc>
-                <a:spcPts val="1125"/>
-              </a:lnSpc>
-              <a:buNone/>
-            </a:pPr>
-            <a:r>
-              <a:rPr lang="en-US" sz="900" spc="180" kern="0" dirty="0">
-                <a:solidFill>
-                  <a:srgbClr val="8A8880"/>
-                </a:solidFill>
-                <a:latin typeface="Consolas" pitchFamily="34" charset="0"/>
-                <a:ea typeface="Consolas" pitchFamily="34" charset="-122"/>
-                <a:cs typeface="Consolas" pitchFamily="34" charset="-120"/>
-              </a:rPr>
-              <a:t>나래에너지서비스 · 위례열병합발전소</a:t>
-            </a:r>
-            <a:endParaRPr lang="en-US" sz="900" dirty="0"/>
-          </a:p>
-        </p:txBody>
-      </p:sp>
-      <p:sp>
-        <p:nvSpPr>
-          <p:cNvPr id="4" name="Text 2"/>
-          <p:cNvSpPr txBox="1"/>
-          <p:nvPr/>
-        </p:nvSpPr>
-        <p:spPr>
-          <a:xfrm>
-            <a:off x="9601200" y="419100"/>
-            <a:ext cx="1905000" cy="142875"/>
-          </a:xfrm>
-          <a:prstGeom prst="rect">
-            <a:avLst/>
-          </a:prstGeom>
-          <a:noFill/>
-          <a:ln/>
-        </p:spPr>
-        <p:txBody>
-          <a:bodyPr wrap="square" lIns="0" tIns="0" rIns="0" bIns="0" rtlCol="0" anchor="t"/>
-          <a:lstStyle/>
-          <a:p>
-            <a:pPr algn="r" indent="0" marL="0">
-              <a:lnSpc>
-                <a:spcPts val="1125"/>
-              </a:lnSpc>
-              <a:buNone/>
-            </a:pPr>
-            <a:r>
-              <a:rPr lang="en-US" sz="900" spc="180" kern="0" dirty="0">
-                <a:solidFill>
-                  <a:srgbClr val="8A8880"/>
-                </a:solidFill>
-                <a:latin typeface="Consolas" pitchFamily="34" charset="0"/>
-                <a:ea typeface="Consolas" pitchFamily="34" charset="-122"/>
-                <a:cs typeface="Consolas" pitchFamily="34" charset="-120"/>
-              </a:rPr>
-              <a:t>2026. 09.</a:t>
-            </a:r>
-            <a:endParaRPr lang="en-US" sz="900" dirty="0"/>
-          </a:p>
-        </p:txBody>
-      </p:sp>
-      <p:sp>
-        <p:nvSpPr>
-          <p:cNvPr id="5" name="Text 3"/>
-          <p:cNvSpPr txBox="1"/>
-          <p:nvPr/>
-        </p:nvSpPr>
-        <p:spPr>
-          <a:xfrm>
-            <a:off x="685800" y="1066800"/>
-            <a:ext cx="5619750" cy="1056132"/>
-          </a:xfrm>
-          <a:prstGeom prst="rect">
-            <a:avLst/>
-          </a:prstGeom>
-          <a:noFill/>
-          <a:ln/>
-        </p:spPr>
-        <p:txBody>
-          <a:bodyPr wrap="square" lIns="0" tIns="0" rIns="0" bIns="0" rtlCol="0" anchor="t"/>
-          <a:lstStyle/>
-          <a:p>
-            <a:pPr algn="l" indent="0" marL="0">
-              <a:lnSpc>
-                <a:spcPts val="4158"/>
+          <p:cNvPr id="6" name="Shape 3"/>
+          <p:cNvSpPr/>
+          <p:nvPr/>
+        </p:nvSpPr>
+        <p:spPr>
+          <a:xfrm>
+            <a:off x="685800" y="2247900"/>
+            <a:ext cx="438150" cy="28575"/>
+          </a:xfrm>
+          <a:prstGeom prst="rect">
+            <a:avLst/>
+          </a:prstGeom>
+          <a:solidFill>
+            <a:srgbClr val="EFB13C"/>
+          </a:solidFill>
+          <a:ln/>
+        </p:spPr>
+      </p:sp>
+      <p:sp>
+        <p:nvSpPr>
+          <p:cNvPr id="7" name="Text 4"/>
+          <p:cNvSpPr txBox="1"/>
+          <p:nvPr/>
+        </p:nvSpPr>
+        <p:spPr>
+          <a:xfrm>
+            <a:off x="685800" y="2514600"/>
+            <a:ext cx="9525000" cy="536448"/>
+          </a:xfrm>
+          <a:prstGeom prst="rect">
+            <a:avLst/>
+          </a:prstGeom>
+          <a:noFill/>
+          <a:ln/>
+        </p:spPr>
+        <p:txBody>
+          <a:bodyPr wrap="square" lIns="0" tIns="0" rIns="0" bIns="0" rtlCol="0" anchor="t"/>
+          <a:lstStyle/>
+          <a:p>
+            <a:pPr algn="l" indent="0" marL="0">
+              <a:lnSpc>
+                <a:spcPts val="4224"/>
               </a:lnSpc>
               <a:buNone/>
             </a:pPr>
@@ -2175,14 +2197,36 @@
                 <a:ea typeface="Malgun Gothic" pitchFamily="34" charset="-122"/>
                 <a:cs typeface="Malgun Gothic" pitchFamily="34" charset="-120"/>
               </a:rPr>
-              <a:t>공급가능용량 산정,</a:t>
+              <a:t>공급가능용량 산정 자동화 및</a:t>
             </a:r>
             <a:endParaRPr lang="en-US" sz="3300" dirty="0"/>
           </a:p>
-          <a:p>
-            <a:pPr algn="l" indent="0" marL="0">
-              <a:lnSpc>
-                <a:spcPts val="4158"/>
+        </p:txBody>
+      </p:sp>
+      <p:sp>
+        <p:nvSpPr>
+          <p:cNvPr id="8" name="Text 5"/>
+          <p:cNvSpPr txBox="1"/>
+          <p:nvPr/>
+        </p:nvSpPr>
+        <p:spPr>
+          <a:xfrm>
+            <a:off x="685800" y="3048000"/>
+            <a:ext cx="9525000" cy="536448"/>
+          </a:xfrm>
+          <a:prstGeom prst="rect">
+            <a:avLst/>
+          </a:prstGeom>
+          <a:noFill/>
+          <a:ln/>
+        </p:spPr>
+        <p:txBody>
+          <a:bodyPr wrap="square" lIns="0" tIns="0" rIns="0" bIns="0" rtlCol="0" anchor="t"/>
+          <a:lstStyle/>
+          <a:p>
+            <a:pPr algn="l" indent="0" marL="0">
+              <a:lnSpc>
+                <a:spcPts val="4224"/>
               </a:lnSpc>
               <a:buNone/>
             </a:pPr>
@@ -2195,281 +2239,64 @@
                 <a:ea typeface="Malgun Gothic" pitchFamily="34" charset="-122"/>
                 <a:cs typeface="Malgun Gothic" pitchFamily="34" charset="-120"/>
               </a:rPr>
-              <a:t>사람의 판단에서 </a:t>
-            </a:r>
-            <a:pPr algn="l" indent="0" marL="0">
-              <a:lnSpc>
-                <a:spcPts val="4158"/>
-              </a:lnSpc>
-              <a:buNone/>
-            </a:pPr>
-            <a:r>
-              <a:rPr lang="en-US" sz="3300" b="1" dirty="0">
-                <a:solidFill>
-                  <a:srgbClr val="EFB13C"/>
+              <a:t>온도별 보정 모델 개발</a:t>
+            </a:r>
+            <a:endParaRPr lang="en-US" sz="3300" dirty="0"/>
+          </a:p>
+        </p:txBody>
+      </p:sp>
+      <p:sp>
+        <p:nvSpPr>
+          <p:cNvPr id="9" name="Text 6"/>
+          <p:cNvSpPr txBox="1"/>
+          <p:nvPr/>
+        </p:nvSpPr>
+        <p:spPr>
+          <a:xfrm>
+            <a:off x="685800" y="3733800"/>
+            <a:ext cx="9525000" cy="242888"/>
+          </a:xfrm>
+          <a:prstGeom prst="rect">
+            <a:avLst/>
+          </a:prstGeom>
+          <a:noFill/>
+          <a:ln/>
+        </p:spPr>
+        <p:txBody>
+          <a:bodyPr wrap="square" lIns="0" tIns="0" rIns="0" bIns="0" rtlCol="0" anchor="t"/>
+          <a:lstStyle/>
+          <a:p>
+            <a:pPr algn="l" indent="0" marL="0">
+              <a:lnSpc>
+                <a:spcPts val="1913"/>
+              </a:lnSpc>
+              <a:buNone/>
+            </a:pPr>
+            <a:r>
+              <a:rPr lang="en-US" sz="1275" dirty="0">
+                <a:solidFill>
+                  <a:srgbClr val="CFCBC2"/>
                 </a:solidFill>
                 <a:latin typeface="Malgun Gothic" pitchFamily="34" charset="0"/>
                 <a:ea typeface="Malgun Gothic" pitchFamily="34" charset="-122"/>
                 <a:cs typeface="Malgun Gothic" pitchFamily="34" charset="-120"/>
               </a:rPr>
-              <a:t>데이터로</a:t>
-            </a:r>
-            <a:endParaRPr lang="en-US" sz="3300" dirty="0"/>
-          </a:p>
-        </p:txBody>
-      </p:sp>
-      <p:sp>
-        <p:nvSpPr>
-          <p:cNvPr id="6" name="Text 4"/>
-          <p:cNvSpPr txBox="1"/>
-          <p:nvPr/>
-        </p:nvSpPr>
-        <p:spPr>
-          <a:xfrm>
-            <a:off x="685800" y="2552700"/>
-            <a:ext cx="5619750" cy="284036"/>
-          </a:xfrm>
-          <a:prstGeom prst="rect">
-            <a:avLst/>
-          </a:prstGeom>
-          <a:noFill/>
-          <a:ln/>
-        </p:spPr>
-        <p:txBody>
-          <a:bodyPr wrap="square" lIns="0" tIns="0" rIns="0" bIns="0" rtlCol="0" anchor="t"/>
-          <a:lstStyle/>
-          <a:p>
-            <a:pPr algn="l" indent="0" marL="0">
-              <a:lnSpc>
-                <a:spcPts val="2237"/>
-              </a:lnSpc>
-              <a:buNone/>
-            </a:pPr>
-            <a:r>
-              <a:rPr lang="en-US" sz="1575" b="1" dirty="0">
-                <a:solidFill>
-                  <a:srgbClr val="EAE7E0"/>
-                </a:solidFill>
-                <a:latin typeface="Malgun Gothic" pitchFamily="34" charset="0"/>
-                <a:ea typeface="Malgun Gothic" pitchFamily="34" charset="-122"/>
-                <a:cs typeface="Malgun Gothic" pitchFamily="34" charset="-120"/>
-              </a:rPr>
-              <a:t>엑셀 4개로 하던 일을 </a:t>
-            </a:r>
-            <a:pPr algn="l" indent="0" marL="0">
-              <a:lnSpc>
-                <a:spcPts val="2237"/>
-              </a:lnSpc>
-              <a:buNone/>
-            </a:pPr>
-            <a:r>
-              <a:rPr lang="en-US" sz="1575" b="1" dirty="0">
-                <a:solidFill>
-                  <a:srgbClr val="EFB13C"/>
-                </a:solidFill>
-                <a:latin typeface="Malgun Gothic" pitchFamily="34" charset="0"/>
-                <a:ea typeface="Malgun Gothic" pitchFamily="34" charset="-122"/>
-                <a:cs typeface="Malgun Gothic" pitchFamily="34" charset="-120"/>
-              </a:rPr>
-              <a:t>도구 하나</a:t>
-            </a:r>
-            <a:pPr algn="l" indent="0" marL="0">
-              <a:lnSpc>
-                <a:spcPts val="2237"/>
-              </a:lnSpc>
-              <a:buNone/>
-            </a:pPr>
-            <a:r>
-              <a:rPr lang="en-US" sz="1575" b="1" dirty="0">
-                <a:solidFill>
-                  <a:srgbClr val="EAE7E0"/>
-                </a:solidFill>
-                <a:latin typeface="Malgun Gothic" pitchFamily="34" charset="0"/>
-                <a:ea typeface="Malgun Gothic" pitchFamily="34" charset="-122"/>
-                <a:cs typeface="Malgun Gothic" pitchFamily="34" charset="-120"/>
-              </a:rPr>
-              <a:t>로,</a:t>
-            </a:r>
-            <a:endParaRPr lang="en-US" sz="1575" dirty="0"/>
-          </a:p>
-        </p:txBody>
-      </p:sp>
-      <p:sp>
-        <p:nvSpPr>
-          <p:cNvPr id="7" name="Text 5"/>
-          <p:cNvSpPr txBox="1"/>
-          <p:nvPr/>
-        </p:nvSpPr>
-        <p:spPr>
-          <a:xfrm>
-            <a:off x="685800" y="2876550"/>
-            <a:ext cx="5619750" cy="284036"/>
-          </a:xfrm>
-          <a:prstGeom prst="rect">
-            <a:avLst/>
-          </a:prstGeom>
-          <a:noFill/>
-          <a:ln/>
-        </p:spPr>
-        <p:txBody>
-          <a:bodyPr wrap="square" lIns="0" tIns="0" rIns="0" bIns="0" rtlCol="0" anchor="t"/>
-          <a:lstStyle/>
-          <a:p>
-            <a:pPr algn="l" indent="0" marL="0">
-              <a:lnSpc>
-                <a:spcPts val="2237"/>
-              </a:lnSpc>
-              <a:buNone/>
-            </a:pPr>
-            <a:r>
-              <a:rPr lang="en-US" sz="1575" b="1" dirty="0">
-                <a:solidFill>
-                  <a:srgbClr val="EAE7E0"/>
-                </a:solidFill>
-                <a:latin typeface="Malgun Gothic" pitchFamily="34" charset="0"/>
-                <a:ea typeface="Malgun Gothic" pitchFamily="34" charset="-122"/>
-                <a:cs typeface="Malgun Gothic" pitchFamily="34" charset="-120"/>
-              </a:rPr>
-              <a:t>하나로 정하던 값을 </a:t>
-            </a:r>
-            <a:pPr algn="l" indent="0" marL="0">
-              <a:lnSpc>
-                <a:spcPts val="2237"/>
-              </a:lnSpc>
-              <a:buNone/>
-            </a:pPr>
-            <a:r>
-              <a:rPr lang="en-US" sz="1575" b="1" dirty="0">
-                <a:solidFill>
-                  <a:srgbClr val="EFB13C"/>
-                </a:solidFill>
-                <a:latin typeface="Malgun Gothic" pitchFamily="34" charset="0"/>
-                <a:ea typeface="Malgun Gothic" pitchFamily="34" charset="-122"/>
-                <a:cs typeface="Malgun Gothic" pitchFamily="34" charset="-120"/>
-              </a:rPr>
-              <a:t>온도별 학습</a:t>
-            </a:r>
-            <a:pPr algn="l" indent="0" marL="0">
-              <a:lnSpc>
-                <a:spcPts val="2237"/>
-              </a:lnSpc>
-              <a:buNone/>
-            </a:pPr>
-            <a:r>
-              <a:rPr lang="en-US" sz="1575" b="1" dirty="0">
-                <a:solidFill>
-                  <a:srgbClr val="EAE7E0"/>
-                </a:solidFill>
-                <a:latin typeface="Malgun Gothic" pitchFamily="34" charset="0"/>
-                <a:ea typeface="Malgun Gothic" pitchFamily="34" charset="-122"/>
-                <a:cs typeface="Malgun Gothic" pitchFamily="34" charset="-120"/>
-              </a:rPr>
-              <a:t>으로.</a:t>
-            </a:r>
-            <a:endParaRPr lang="en-US" sz="1575" dirty="0"/>
-          </a:p>
-        </p:txBody>
-      </p:sp>
-      <p:sp>
-        <p:nvSpPr>
-          <p:cNvPr id="8" name="Shape 6"/>
-          <p:cNvSpPr/>
-          <p:nvPr/>
-        </p:nvSpPr>
-        <p:spPr>
-          <a:xfrm>
-            <a:off x="6362700" y="1066800"/>
-            <a:ext cx="5143500" cy="3028950"/>
-          </a:xfrm>
-          <a:prstGeom prst="rect">
-            <a:avLst/>
-          </a:prstGeom>
-          <a:solidFill>
-            <a:srgbClr val="0A1320"/>
-          </a:solidFill>
-          <a:ln w="12700">
-            <a:solidFill>
-              <a:srgbClr val="182838"/>
-            </a:solidFill>
-            <a:prstDash val="solid"/>
-          </a:ln>
-        </p:spPr>
-      </p:sp>
-      <p:sp>
-        <p:nvSpPr>
-          <p:cNvPr id="9" name="Text 7"/>
-          <p:cNvSpPr txBox="1"/>
-          <p:nvPr/>
-        </p:nvSpPr>
-        <p:spPr>
-          <a:xfrm>
-            <a:off x="6515100" y="1200150"/>
-            <a:ext cx="4572000" cy="125016"/>
-          </a:xfrm>
-          <a:prstGeom prst="rect">
-            <a:avLst/>
-          </a:prstGeom>
-          <a:noFill/>
-          <a:ln/>
-        </p:spPr>
-        <p:txBody>
-          <a:bodyPr wrap="square" lIns="0" tIns="0" rIns="0" bIns="0" rtlCol="0" anchor="t"/>
-          <a:lstStyle/>
-          <a:p>
-            <a:pPr algn="l" indent="0" marL="0">
-              <a:lnSpc>
-                <a:spcPts val="984"/>
-              </a:lnSpc>
-              <a:buNone/>
-            </a:pPr>
-            <a:r>
-              <a:rPr lang="en-US" sz="788" b="1" spc="150" kern="0" dirty="0">
-                <a:solidFill>
-                  <a:srgbClr val="8A8880"/>
-                </a:solidFill>
-                <a:latin typeface="Consolas" pitchFamily="34" charset="0"/>
-                <a:ea typeface="Consolas" pitchFamily="34" charset="-122"/>
-                <a:cs typeface="Consolas" pitchFamily="34" charset="-120"/>
-              </a:rPr>
-              <a:t>보정값 · MW · 외기온도 0 ~ 30℃</a:t>
-            </a:r>
-            <a:endParaRPr lang="en-US" sz="788" dirty="0"/>
-          </a:p>
-        </p:txBody>
-      </p:sp>
-      <p:sp>
-        <p:nvSpPr>
-          <p:cNvPr id="10" name="Shape 8"/>
-          <p:cNvSpPr/>
-          <p:nvPr/>
-        </p:nvSpPr>
-        <p:spPr>
-          <a:xfrm>
-            <a:off x="6896100" y="1638300"/>
-            <a:ext cx="4286250" cy="0"/>
-          </a:xfrm>
-          <a:prstGeom prst="line">
-            <a:avLst/>
-          </a:prstGeom>
-          <a:noFill/>
-          <a:ln w="12700">
-            <a:solidFill>
-              <a:srgbClr val="182838"/>
-            </a:solidFill>
-            <a:prstDash val="solid"/>
-          </a:ln>
-        </p:spPr>
-      </p:sp>
-      <p:sp>
-        <p:nvSpPr>
-          <p:cNvPr id="11" name="Shape 9"/>
-          <p:cNvSpPr/>
-          <p:nvPr/>
-        </p:nvSpPr>
-        <p:spPr>
-          <a:xfrm>
-            <a:off x="6896100" y="2628900"/>
-            <a:ext cx="4286250" cy="0"/>
+              <a:t>온도 프로파일 생성 절차 통합과 누적 40회 실적 기반 보정 곡선 적용</a:t>
+            </a:r>
+            <a:endParaRPr lang="en-US" sz="1275" dirty="0"/>
+          </a:p>
+        </p:txBody>
+      </p:sp>
+      <p:sp>
+        <p:nvSpPr>
+          <p:cNvPr id="10" name="Shape 7"/>
+          <p:cNvSpPr/>
+          <p:nvPr/>
+        </p:nvSpPr>
+        <p:spPr>
+          <a:xfrm>
+            <a:off x="685800" y="4305300"/>
+            <a:ext cx="10820400" cy="0"/>
           </a:xfrm>
           <a:prstGeom prst="line">
             <a:avLst/>
@@ -2485,37 +2312,56 @@
       </p:sp>
       <p:sp>
         <p:nvSpPr>
-          <p:cNvPr id="12" name="Shape 10"/>
-          <p:cNvSpPr/>
-          <p:nvPr/>
-        </p:nvSpPr>
-        <p:spPr>
-          <a:xfrm>
-            <a:off x="6896100" y="3124200"/>
-            <a:ext cx="4286250" cy="0"/>
-          </a:xfrm>
-          <a:prstGeom prst="line">
-            <a:avLst/>
-          </a:prstGeom>
-          <a:noFill/>
-          <a:ln w="12700">
-            <a:solidFill>
-              <a:srgbClr val="182838"/>
-            </a:solidFill>
-            <a:prstDash val="solid"/>
-          </a:ln>
-        </p:spPr>
-      </p:sp>
-      <p:sp>
-        <p:nvSpPr>
-          <p:cNvPr id="13" name="Shape 11"/>
-          <p:cNvSpPr/>
-          <p:nvPr/>
-        </p:nvSpPr>
-        <p:spPr>
-          <a:xfrm>
-            <a:off x="6896100" y="1638300"/>
-            <a:ext cx="0" cy="1485900"/>
+          <p:cNvPr id="11" name="Text 8"/>
+          <p:cNvSpPr txBox="1"/>
+          <p:nvPr/>
+        </p:nvSpPr>
+        <p:spPr>
+          <a:xfrm>
+            <a:off x="685800" y="4648200"/>
+            <a:ext cx="762000" cy="136922"/>
+          </a:xfrm>
+          <a:prstGeom prst="rect">
+            <a:avLst/>
+          </a:prstGeom>
+          <a:noFill/>
+          <a:ln/>
+        </p:spPr>
+        <p:txBody>
+          <a:bodyPr wrap="square" lIns="0" tIns="0" rIns="0" bIns="0" rtlCol="0" anchor="t"/>
+          <a:lstStyle/>
+          <a:p>
+            <a:pPr algn="l" indent="0" marL="0">
+              <a:lnSpc>
+                <a:spcPts val="1078"/>
+              </a:lnSpc>
+              <a:buNone/>
+            </a:pPr>
+            <a:r>
+              <a:rPr lang="en-US" sz="863" spc="140" kern="0" dirty="0">
+                <a:solidFill>
+                  <a:srgbClr val="8A8880"/>
+                </a:solidFill>
+                <a:latin typeface="Consolas" pitchFamily="34" charset="0"/>
+                <a:ea typeface="Consolas" pitchFamily="34" charset="-122"/>
+                <a:cs typeface="Consolas" pitchFamily="34" charset="-120"/>
+              </a:rPr>
+              <a:t>소  속</a:t>
+            </a:r>
+            <a:endParaRPr lang="en-US" sz="863" dirty="0"/>
+          </a:p>
+        </p:txBody>
+      </p:sp>
+      <p:sp>
+        <p:nvSpPr>
+          <p:cNvPr id="12" name="Shape 9"/>
+          <p:cNvSpPr/>
+          <p:nvPr/>
+        </p:nvSpPr>
+        <p:spPr>
+          <a:xfrm>
+            <a:off x="1600200" y="4629150"/>
+            <a:ext cx="0" cy="190500"/>
           </a:xfrm>
           <a:prstGeom prst="line">
             <a:avLst/>
@@ -2531,33 +2377,75 @@
       </p:sp>
       <p:sp>
         <p:nvSpPr>
-          <p:cNvPr id="14" name="Text 12"/>
-          <p:cNvSpPr txBox="1"/>
-          <p:nvPr/>
-        </p:nvSpPr>
-        <p:spPr>
-          <a:xfrm>
-            <a:off x="6515100" y="1600200"/>
-            <a:ext cx="323850" cy="123825"/>
-          </a:xfrm>
-          <a:prstGeom prst="rect">
-            <a:avLst/>
-          </a:prstGeom>
-          <a:noFill/>
-          <a:ln/>
-        </p:spPr>
-        <p:txBody>
-          <a:bodyPr wrap="square" lIns="0" tIns="0" rIns="0" bIns="0" rtlCol="0" anchor="t"/>
-          <a:lstStyle/>
-          <a:p>
-            <a:pPr algn="l" indent="0" marL="0">
-              <a:lnSpc>
-                <a:spcPts val="975"/>
-              </a:lnSpc>
-              <a:buNone/>
-            </a:pPr>
-            <a:r>
-              <a:rPr lang="en-US" sz="750" dirty="0">
+          <p:cNvPr id="13" name="Text 10"/>
+          <p:cNvSpPr txBox="1"/>
+          <p:nvPr/>
+        </p:nvSpPr>
+        <p:spPr>
+          <a:xfrm>
+            <a:off x="1809750" y="4629150"/>
+            <a:ext cx="6667500" cy="205740"/>
+          </a:xfrm>
+          <a:prstGeom prst="rect">
+            <a:avLst/>
+          </a:prstGeom>
+          <a:noFill/>
+          <a:ln/>
+        </p:spPr>
+        <p:txBody>
+          <a:bodyPr wrap="square" lIns="0" tIns="0" rIns="0" bIns="0" rtlCol="0" anchor="t"/>
+          <a:lstStyle/>
+          <a:p>
+            <a:pPr algn="l" indent="0" marL="0">
+              <a:lnSpc>
+                <a:spcPts val="1620"/>
+              </a:lnSpc>
+              <a:buNone/>
+            </a:pPr>
+            <a:r>
+              <a:rPr lang="en-US" sz="1200" dirty="0">
+                <a:solidFill>
+                  <a:srgbClr val="EAE7E0"/>
+                </a:solidFill>
+                <a:latin typeface="Malgun Gothic" pitchFamily="34" charset="0"/>
+                <a:ea typeface="Malgun Gothic" pitchFamily="34" charset="-122"/>
+                <a:cs typeface="Malgun Gothic" pitchFamily="34" charset="-120"/>
+              </a:rPr>
+              <a:t>나래에너지서비스 위례사업소</a:t>
+            </a:r>
+            <a:endParaRPr lang="en-US" sz="1200" dirty="0"/>
+          </a:p>
+        </p:txBody>
+      </p:sp>
+      <p:sp>
+        <p:nvSpPr>
+          <p:cNvPr id="14" name="Text 11"/>
+          <p:cNvSpPr txBox="1"/>
+          <p:nvPr/>
+        </p:nvSpPr>
+        <p:spPr>
+          <a:xfrm>
+            <a:off x="685800" y="5010150"/>
+            <a:ext cx="762000" cy="136922"/>
+          </a:xfrm>
+          <a:prstGeom prst="rect">
+            <a:avLst/>
+          </a:prstGeom>
+          <a:noFill/>
+          <a:ln/>
+        </p:spPr>
+        <p:txBody>
+          <a:bodyPr wrap="square" lIns="0" tIns="0" rIns="0" bIns="0" rtlCol="0" anchor="t"/>
+          <a:lstStyle/>
+          <a:p>
+            <a:pPr algn="l" indent="0" marL="0">
+              <a:lnSpc>
+                <a:spcPts val="1078"/>
+              </a:lnSpc>
+              <a:buNone/>
+            </a:pPr>
+            <a:r>
+              <a:rPr lang="en-US" sz="863" spc="140" kern="0" dirty="0">
                 <a:solidFill>
                   <a:srgbClr val="8A8880"/>
                 </a:solidFill>
@@ -2565,748 +2453,22 @@
                 <a:ea typeface="Consolas" pitchFamily="34" charset="-122"/>
                 <a:cs typeface="Consolas" pitchFamily="34" charset="-120"/>
               </a:rPr>
-              <a:t>+8</a:t>
-            </a:r>
-            <a:endParaRPr lang="en-US" sz="750" dirty="0"/>
-          </a:p>
-        </p:txBody>
-      </p:sp>
-      <p:sp>
-        <p:nvSpPr>
-          <p:cNvPr id="15" name="Text 13"/>
-          <p:cNvSpPr txBox="1"/>
-          <p:nvPr/>
-        </p:nvSpPr>
-        <p:spPr>
-          <a:xfrm>
-            <a:off x="6515100" y="2590800"/>
-            <a:ext cx="323850" cy="123825"/>
-          </a:xfrm>
-          <a:prstGeom prst="rect">
-            <a:avLst/>
-          </a:prstGeom>
-          <a:noFill/>
-          <a:ln/>
-        </p:spPr>
-        <p:txBody>
-          <a:bodyPr wrap="square" lIns="0" tIns="0" rIns="0" bIns="0" rtlCol="0" anchor="t"/>
-          <a:lstStyle/>
-          <a:p>
-            <a:pPr algn="l" indent="0" marL="0">
-              <a:lnSpc>
-                <a:spcPts val="975"/>
-              </a:lnSpc>
-              <a:buNone/>
-            </a:pPr>
-            <a:r>
-              <a:rPr lang="en-US" sz="750" dirty="0">
-                <a:solidFill>
-                  <a:srgbClr val="8A8880"/>
-                </a:solidFill>
-                <a:latin typeface="Consolas" pitchFamily="34" charset="0"/>
-                <a:ea typeface="Consolas" pitchFamily="34" charset="-122"/>
-                <a:cs typeface="Consolas" pitchFamily="34" charset="-120"/>
-              </a:rPr>
-              <a:t>0</a:t>
-            </a:r>
-            <a:endParaRPr lang="en-US" sz="750" dirty="0"/>
-          </a:p>
-        </p:txBody>
-      </p:sp>
-      <p:sp>
-        <p:nvSpPr>
-          <p:cNvPr id="16" name="Text 14"/>
-          <p:cNvSpPr txBox="1"/>
-          <p:nvPr/>
-        </p:nvSpPr>
-        <p:spPr>
-          <a:xfrm>
-            <a:off x="6515100" y="3086100"/>
-            <a:ext cx="323850" cy="123825"/>
-          </a:xfrm>
-          <a:prstGeom prst="rect">
-            <a:avLst/>
-          </a:prstGeom>
-          <a:noFill/>
-          <a:ln/>
-        </p:spPr>
-        <p:txBody>
-          <a:bodyPr wrap="square" lIns="0" tIns="0" rIns="0" bIns="0" rtlCol="0" anchor="t"/>
-          <a:lstStyle/>
-          <a:p>
-            <a:pPr algn="l" indent="0" marL="0">
-              <a:lnSpc>
-                <a:spcPts val="975"/>
-              </a:lnSpc>
-              <a:buNone/>
-            </a:pPr>
-            <a:r>
-              <a:rPr lang="en-US" sz="750" dirty="0">
-                <a:solidFill>
-                  <a:srgbClr val="8A8880"/>
-                </a:solidFill>
-                <a:latin typeface="Consolas" pitchFamily="34" charset="0"/>
-                <a:ea typeface="Consolas" pitchFamily="34" charset="-122"/>
-                <a:cs typeface="Consolas" pitchFamily="34" charset="-120"/>
-              </a:rPr>
-              <a:t>−4</a:t>
-            </a:r>
-            <a:endParaRPr lang="en-US" sz="750" dirty="0"/>
-          </a:p>
-        </p:txBody>
-      </p:sp>
-      <p:sp>
-        <p:nvSpPr>
-          <p:cNvPr id="17" name="Shape 15"/>
-          <p:cNvSpPr/>
-          <p:nvPr/>
-        </p:nvSpPr>
-        <p:spPr>
-          <a:xfrm>
-            <a:off x="6972300" y="3124200"/>
-            <a:ext cx="0" cy="47625"/>
-          </a:xfrm>
-          <a:prstGeom prst="line">
-            <a:avLst/>
-          </a:prstGeom>
-          <a:noFill/>
-          <a:ln w="12700">
-            <a:solidFill>
-              <a:srgbClr val="8A8880"/>
-            </a:solidFill>
-            <a:prstDash val="solid"/>
-          </a:ln>
-        </p:spPr>
-      </p:sp>
-      <p:sp>
-        <p:nvSpPr>
-          <p:cNvPr id="18" name="Text 16"/>
-          <p:cNvSpPr txBox="1"/>
-          <p:nvPr/>
-        </p:nvSpPr>
-        <p:spPr>
-          <a:xfrm>
-            <a:off x="6743700" y="3238500"/>
-            <a:ext cx="457200" cy="123825"/>
-          </a:xfrm>
-          <a:prstGeom prst="rect">
-            <a:avLst/>
-          </a:prstGeom>
-          <a:noFill/>
-          <a:ln/>
-        </p:spPr>
-        <p:txBody>
-          <a:bodyPr wrap="square" lIns="0" tIns="0" rIns="0" bIns="0" rtlCol="0" anchor="t"/>
-          <a:lstStyle/>
-          <a:p>
-            <a:pPr algn="ctr" indent="0" marL="0">
-              <a:lnSpc>
-                <a:spcPts val="975"/>
-              </a:lnSpc>
-              <a:buNone/>
-            </a:pPr>
-            <a:r>
-              <a:rPr lang="en-US" sz="750" dirty="0">
-                <a:solidFill>
-                  <a:srgbClr val="8A8880"/>
-                </a:solidFill>
-                <a:latin typeface="Consolas" pitchFamily="34" charset="0"/>
-                <a:ea typeface="Consolas" pitchFamily="34" charset="-122"/>
-                <a:cs typeface="Consolas" pitchFamily="34" charset="-120"/>
-              </a:rPr>
-              <a:t>0℃</a:t>
-            </a:r>
-            <a:endParaRPr lang="en-US" sz="750" dirty="0"/>
-          </a:p>
-        </p:txBody>
-      </p:sp>
-      <p:sp>
-        <p:nvSpPr>
-          <p:cNvPr id="19" name="Shape 17"/>
-          <p:cNvSpPr/>
-          <p:nvPr/>
-        </p:nvSpPr>
-        <p:spPr>
-          <a:xfrm>
-            <a:off x="8324850" y="3124200"/>
-            <a:ext cx="0" cy="47625"/>
-          </a:xfrm>
-          <a:prstGeom prst="line">
-            <a:avLst/>
-          </a:prstGeom>
-          <a:noFill/>
-          <a:ln w="12700">
-            <a:solidFill>
-              <a:srgbClr val="8A8880"/>
-            </a:solidFill>
-            <a:prstDash val="solid"/>
-          </a:ln>
-        </p:spPr>
-      </p:sp>
-      <p:sp>
-        <p:nvSpPr>
-          <p:cNvPr id="20" name="Text 18"/>
-          <p:cNvSpPr txBox="1"/>
-          <p:nvPr/>
-        </p:nvSpPr>
-        <p:spPr>
-          <a:xfrm>
-            <a:off x="8096250" y="3238500"/>
-            <a:ext cx="457200" cy="123825"/>
-          </a:xfrm>
-          <a:prstGeom prst="rect">
-            <a:avLst/>
-          </a:prstGeom>
-          <a:noFill/>
-          <a:ln/>
-        </p:spPr>
-        <p:txBody>
-          <a:bodyPr wrap="square" lIns="0" tIns="0" rIns="0" bIns="0" rtlCol="0" anchor="t"/>
-          <a:lstStyle/>
-          <a:p>
-            <a:pPr algn="ctr" indent="0" marL="0">
-              <a:lnSpc>
-                <a:spcPts val="975"/>
-              </a:lnSpc>
-              <a:buNone/>
-            </a:pPr>
-            <a:r>
-              <a:rPr lang="en-US" sz="750" dirty="0">
-                <a:solidFill>
-                  <a:srgbClr val="8A8880"/>
-                </a:solidFill>
-                <a:latin typeface="Consolas" pitchFamily="34" charset="0"/>
-                <a:ea typeface="Consolas" pitchFamily="34" charset="-122"/>
-                <a:cs typeface="Consolas" pitchFamily="34" charset="-120"/>
-              </a:rPr>
-              <a:t>10</a:t>
-            </a:r>
-            <a:endParaRPr lang="en-US" sz="750" dirty="0"/>
-          </a:p>
-        </p:txBody>
-      </p:sp>
-      <p:sp>
-        <p:nvSpPr>
-          <p:cNvPr id="21" name="Shape 19"/>
-          <p:cNvSpPr/>
-          <p:nvPr/>
-        </p:nvSpPr>
-        <p:spPr>
-          <a:xfrm>
-            <a:off x="9677400" y="3124200"/>
-            <a:ext cx="0" cy="47625"/>
-          </a:xfrm>
-          <a:prstGeom prst="line">
-            <a:avLst/>
-          </a:prstGeom>
-          <a:noFill/>
-          <a:ln w="12700">
-            <a:solidFill>
-              <a:srgbClr val="8A8880"/>
-            </a:solidFill>
-            <a:prstDash val="solid"/>
-          </a:ln>
-        </p:spPr>
-      </p:sp>
-      <p:sp>
-        <p:nvSpPr>
-          <p:cNvPr id="22" name="Text 20"/>
-          <p:cNvSpPr txBox="1"/>
-          <p:nvPr/>
-        </p:nvSpPr>
-        <p:spPr>
-          <a:xfrm>
-            <a:off x="9448800" y="3238500"/>
-            <a:ext cx="457200" cy="123825"/>
-          </a:xfrm>
-          <a:prstGeom prst="rect">
-            <a:avLst/>
-          </a:prstGeom>
-          <a:noFill/>
-          <a:ln/>
-        </p:spPr>
-        <p:txBody>
-          <a:bodyPr wrap="square" lIns="0" tIns="0" rIns="0" bIns="0" rtlCol="0" anchor="t"/>
-          <a:lstStyle/>
-          <a:p>
-            <a:pPr algn="ctr" indent="0" marL="0">
-              <a:lnSpc>
-                <a:spcPts val="975"/>
-              </a:lnSpc>
-              <a:buNone/>
-            </a:pPr>
-            <a:r>
-              <a:rPr lang="en-US" sz="750" dirty="0">
-                <a:solidFill>
-                  <a:srgbClr val="8A8880"/>
-                </a:solidFill>
-                <a:latin typeface="Consolas" pitchFamily="34" charset="0"/>
-                <a:ea typeface="Consolas" pitchFamily="34" charset="-122"/>
-                <a:cs typeface="Consolas" pitchFamily="34" charset="-120"/>
-              </a:rPr>
-              <a:t>20</a:t>
-            </a:r>
-            <a:endParaRPr lang="en-US" sz="750" dirty="0"/>
-          </a:p>
-        </p:txBody>
-      </p:sp>
-      <p:sp>
-        <p:nvSpPr>
-          <p:cNvPr id="23" name="Shape 21"/>
-          <p:cNvSpPr/>
-          <p:nvPr/>
-        </p:nvSpPr>
-        <p:spPr>
-          <a:xfrm>
-            <a:off x="11029950" y="3124200"/>
-            <a:ext cx="0" cy="47625"/>
-          </a:xfrm>
-          <a:prstGeom prst="line">
-            <a:avLst/>
-          </a:prstGeom>
-          <a:noFill/>
-          <a:ln w="12700">
-            <a:solidFill>
-              <a:srgbClr val="8A8880"/>
-            </a:solidFill>
-            <a:prstDash val="solid"/>
-          </a:ln>
-        </p:spPr>
-      </p:sp>
-      <p:sp>
-        <p:nvSpPr>
-          <p:cNvPr id="24" name="Text 22"/>
-          <p:cNvSpPr txBox="1"/>
-          <p:nvPr/>
-        </p:nvSpPr>
-        <p:spPr>
-          <a:xfrm>
-            <a:off x="10801350" y="3238500"/>
-            <a:ext cx="457200" cy="123825"/>
-          </a:xfrm>
-          <a:prstGeom prst="rect">
-            <a:avLst/>
-          </a:prstGeom>
-          <a:noFill/>
-          <a:ln/>
-        </p:spPr>
-        <p:txBody>
-          <a:bodyPr wrap="square" lIns="0" tIns="0" rIns="0" bIns="0" rtlCol="0" anchor="t"/>
-          <a:lstStyle/>
-          <a:p>
-            <a:pPr algn="ctr" indent="0" marL="0">
-              <a:lnSpc>
-                <a:spcPts val="975"/>
-              </a:lnSpc>
-              <a:buNone/>
-            </a:pPr>
-            <a:r>
-              <a:rPr lang="en-US" sz="750" dirty="0">
-                <a:solidFill>
-                  <a:srgbClr val="8A8880"/>
-                </a:solidFill>
-                <a:latin typeface="Consolas" pitchFamily="34" charset="0"/>
-                <a:ea typeface="Consolas" pitchFamily="34" charset="-122"/>
-                <a:cs typeface="Consolas" pitchFamily="34" charset="-120"/>
-              </a:rPr>
-              <a:t>30</a:t>
-            </a:r>
-            <a:endParaRPr lang="en-US" sz="750" dirty="0"/>
-          </a:p>
-        </p:txBody>
-      </p:sp>
-      <p:sp>
-        <p:nvSpPr>
-          <p:cNvPr id="25" name="Shape 23"/>
-          <p:cNvSpPr/>
-          <p:nvPr/>
-        </p:nvSpPr>
-        <p:spPr>
-          <a:xfrm>
-            <a:off x="6896100" y="2324910"/>
-            <a:ext cx="4286250" cy="0"/>
-          </a:xfrm>
-          <a:prstGeom prst="line">
-            <a:avLst/>
-          </a:prstGeom>
-          <a:noFill/>
-          <a:ln w="33020">
-            <a:solidFill>
-              <a:srgbClr val="A8BCD1"/>
-            </a:solidFill>
-            <a:prstDash val="dash"/>
-          </a:ln>
-        </p:spPr>
-      </p:sp>
-      <p:sp>
-        <p:nvSpPr>
-          <p:cNvPr id="26" name="Text 24"/>
-          <p:cNvSpPr txBox="1"/>
-          <p:nvPr/>
-        </p:nvSpPr>
-        <p:spPr>
-          <a:xfrm>
-            <a:off x="6972300" y="2138220"/>
-            <a:ext cx="2286000" cy="148590"/>
-          </a:xfrm>
-          <a:prstGeom prst="rect">
-            <a:avLst/>
-          </a:prstGeom>
-          <a:noFill/>
-          <a:ln/>
-        </p:spPr>
-        <p:txBody>
-          <a:bodyPr wrap="square" lIns="0" tIns="0" rIns="0" bIns="0" rtlCol="0" anchor="t"/>
-          <a:lstStyle/>
-          <a:p>
-            <a:pPr algn="l" indent="0" marL="0">
-              <a:lnSpc>
-                <a:spcPts val="1170"/>
-              </a:lnSpc>
-              <a:buNone/>
-            </a:pPr>
-            <a:r>
-              <a:rPr lang="en-US" sz="900" dirty="0">
-                <a:solidFill>
-                  <a:srgbClr val="A8BCD1"/>
-                </a:solidFill>
-                <a:latin typeface="Consolas" pitchFamily="34" charset="0"/>
-                <a:ea typeface="Consolas" pitchFamily="34" charset="-122"/>
-                <a:cs typeface="Consolas" pitchFamily="34" charset="-120"/>
-              </a:rPr>
-              <a:t>종전 · 온도 구분 없이 +2.5 MW</a:t>
-            </a:r>
-            <a:endParaRPr lang="en-US" sz="900" dirty="0"/>
-          </a:p>
-        </p:txBody>
-      </p:sp>
-      <p:sp>
-        <p:nvSpPr>
-          <p:cNvPr id="27" name="Shape 25"/>
-          <p:cNvSpPr/>
-          <p:nvPr/>
-        </p:nvSpPr>
-        <p:spPr>
-          <a:xfrm>
-            <a:off x="6972300" y="1702689"/>
-            <a:ext cx="1352550" cy="286036"/>
-          </a:xfrm>
-          <a:prstGeom prst="line">
-            <a:avLst/>
-          </a:prstGeom>
-          <a:noFill/>
-          <a:ln w="35560">
-            <a:solidFill>
-              <a:srgbClr val="EFB13C"/>
-            </a:solidFill>
-            <a:prstDash val="solid"/>
-          </a:ln>
-        </p:spPr>
-      </p:sp>
-      <p:sp>
-        <p:nvSpPr>
-          <p:cNvPr id="28" name="Shape 26"/>
-          <p:cNvSpPr/>
-          <p:nvPr/>
-        </p:nvSpPr>
-        <p:spPr>
-          <a:xfrm>
-            <a:off x="8324850" y="1988725"/>
-            <a:ext cx="1352550" cy="215455"/>
-          </a:xfrm>
-          <a:prstGeom prst="line">
-            <a:avLst/>
-          </a:prstGeom>
-          <a:noFill/>
-          <a:ln w="35560">
-            <a:solidFill>
-              <a:srgbClr val="EFB13C"/>
-            </a:solidFill>
-            <a:prstDash val="solid"/>
-          </a:ln>
-        </p:spPr>
-      </p:sp>
-      <p:sp>
-        <p:nvSpPr>
-          <p:cNvPr id="29" name="Shape 27"/>
-          <p:cNvSpPr/>
-          <p:nvPr/>
-        </p:nvSpPr>
-        <p:spPr>
-          <a:xfrm>
-            <a:off x="9677400" y="2204180"/>
-            <a:ext cx="1352550" cy="708279"/>
-          </a:xfrm>
-          <a:prstGeom prst="line">
-            <a:avLst/>
-          </a:prstGeom>
-          <a:noFill/>
-          <a:ln w="35560">
-            <a:solidFill>
-              <a:srgbClr val="EFB13C"/>
-            </a:solidFill>
-            <a:prstDash val="solid"/>
-          </a:ln>
-        </p:spPr>
-      </p:sp>
-      <p:sp>
-        <p:nvSpPr>
-          <p:cNvPr id="30" name="Shape 28"/>
-          <p:cNvSpPr/>
-          <p:nvPr/>
-        </p:nvSpPr>
-        <p:spPr>
-          <a:xfrm>
-            <a:off x="6934200" y="1664589"/>
-            <a:ext cx="76200" cy="76200"/>
-          </a:xfrm>
-          <a:prstGeom prst="rect">
-            <a:avLst/>
-          </a:prstGeom>
-          <a:solidFill>
-            <a:srgbClr val="EFB13C"/>
-          </a:solidFill>
-          <a:ln/>
-        </p:spPr>
-      </p:sp>
-      <p:sp>
-        <p:nvSpPr>
-          <p:cNvPr id="31" name="Shape 29"/>
-          <p:cNvSpPr/>
-          <p:nvPr/>
-        </p:nvSpPr>
-        <p:spPr>
-          <a:xfrm>
-            <a:off x="8286750" y="1950625"/>
-            <a:ext cx="76200" cy="76200"/>
-          </a:xfrm>
-          <a:prstGeom prst="rect">
-            <a:avLst/>
-          </a:prstGeom>
-          <a:solidFill>
-            <a:srgbClr val="EFB13C"/>
-          </a:solidFill>
-          <a:ln/>
-        </p:spPr>
-      </p:sp>
-      <p:sp>
-        <p:nvSpPr>
-          <p:cNvPr id="32" name="Shape 30"/>
-          <p:cNvSpPr/>
-          <p:nvPr/>
-        </p:nvSpPr>
-        <p:spPr>
-          <a:xfrm>
-            <a:off x="9639300" y="2166080"/>
-            <a:ext cx="76200" cy="76200"/>
-          </a:xfrm>
-          <a:prstGeom prst="rect">
-            <a:avLst/>
-          </a:prstGeom>
-          <a:solidFill>
-            <a:srgbClr val="EFB13C"/>
-          </a:solidFill>
-          <a:ln/>
-        </p:spPr>
-      </p:sp>
-      <p:sp>
-        <p:nvSpPr>
-          <p:cNvPr id="33" name="Shape 31"/>
-          <p:cNvSpPr/>
-          <p:nvPr/>
-        </p:nvSpPr>
-        <p:spPr>
-          <a:xfrm>
-            <a:off x="10991850" y="2874359"/>
-            <a:ext cx="76200" cy="76200"/>
-          </a:xfrm>
-          <a:prstGeom prst="rect">
-            <a:avLst/>
-          </a:prstGeom>
-          <a:solidFill>
-            <a:srgbClr val="EFB13C"/>
-          </a:solidFill>
-          <a:ln/>
-        </p:spPr>
-      </p:sp>
-      <p:sp>
-        <p:nvSpPr>
-          <p:cNvPr id="34" name="Text 32"/>
-          <p:cNvSpPr txBox="1"/>
-          <p:nvPr/>
-        </p:nvSpPr>
-        <p:spPr>
-          <a:xfrm>
-            <a:off x="7067550" y="1807464"/>
-            <a:ext cx="571500" cy="154781"/>
-          </a:xfrm>
-          <a:prstGeom prst="rect">
-            <a:avLst/>
-          </a:prstGeom>
-          <a:noFill/>
-          <a:ln/>
-        </p:spPr>
-        <p:txBody>
-          <a:bodyPr wrap="square" lIns="0" tIns="0" rIns="0" bIns="0" rtlCol="0" anchor="t"/>
-          <a:lstStyle/>
-          <a:p>
-            <a:pPr algn="l" indent="0" marL="0">
-              <a:lnSpc>
-                <a:spcPts val="1219"/>
-              </a:lnSpc>
-              <a:buNone/>
-            </a:pPr>
-            <a:r>
-              <a:rPr lang="en-US" sz="938" dirty="0">
-                <a:solidFill>
-                  <a:srgbClr val="EFB13C"/>
-                </a:solidFill>
-                <a:latin typeface="Consolas" pitchFamily="34" charset="0"/>
-                <a:ea typeface="Consolas" pitchFamily="34" charset="-122"/>
-                <a:cs typeface="Consolas" pitchFamily="34" charset="-120"/>
-              </a:rPr>
-              <a:t>+7.5</a:t>
-            </a:r>
-            <a:endParaRPr lang="en-US" sz="938" dirty="0"/>
-          </a:p>
-        </p:txBody>
-      </p:sp>
-      <p:sp>
-        <p:nvSpPr>
-          <p:cNvPr id="35" name="Text 33"/>
-          <p:cNvSpPr txBox="1"/>
-          <p:nvPr/>
-        </p:nvSpPr>
-        <p:spPr>
-          <a:xfrm>
-            <a:off x="10306050" y="2960084"/>
-            <a:ext cx="628650" cy="154781"/>
-          </a:xfrm>
-          <a:prstGeom prst="rect">
-            <a:avLst/>
-          </a:prstGeom>
-          <a:noFill/>
-          <a:ln/>
-        </p:spPr>
-        <p:txBody>
-          <a:bodyPr wrap="square" lIns="0" tIns="0" rIns="0" bIns="0" rtlCol="0" anchor="t"/>
-          <a:lstStyle/>
-          <a:p>
-            <a:pPr algn="r" indent="0" marL="0">
-              <a:lnSpc>
-                <a:spcPts val="1219"/>
-              </a:lnSpc>
-              <a:buNone/>
-            </a:pPr>
-            <a:r>
-              <a:rPr lang="en-US" sz="938" dirty="0">
-                <a:solidFill>
-                  <a:srgbClr val="EFB13C"/>
-                </a:solidFill>
-                <a:latin typeface="Consolas" pitchFamily="34" charset="0"/>
-                <a:ea typeface="Consolas" pitchFamily="34" charset="-122"/>
-                <a:cs typeface="Consolas" pitchFamily="34" charset="-120"/>
-              </a:rPr>
-              <a:t>−2.3</a:t>
-            </a:r>
-            <a:endParaRPr lang="en-US" sz="938" dirty="0"/>
-          </a:p>
-        </p:txBody>
-      </p:sp>
-      <p:sp>
-        <p:nvSpPr>
-          <p:cNvPr id="36" name="Text 34"/>
-          <p:cNvSpPr txBox="1"/>
-          <p:nvPr/>
-        </p:nvSpPr>
-        <p:spPr>
-          <a:xfrm>
-            <a:off x="6515100" y="3695700"/>
-            <a:ext cx="4762500" cy="180023"/>
-          </a:xfrm>
-          <a:prstGeom prst="rect">
-            <a:avLst/>
-          </a:prstGeom>
-          <a:noFill/>
-          <a:ln/>
-        </p:spPr>
-        <p:txBody>
-          <a:bodyPr wrap="square" lIns="0" tIns="0" rIns="0" bIns="0" rtlCol="0" anchor="t"/>
-          <a:lstStyle/>
-          <a:p>
-            <a:pPr algn="l" indent="0" marL="0">
-              <a:lnSpc>
-                <a:spcPts val="1418"/>
-              </a:lnSpc>
-              <a:buNone/>
-            </a:pPr>
-            <a:r>
-              <a:rPr lang="en-US" sz="1013" dirty="0">
-                <a:solidFill>
-                  <a:srgbClr val="FF4D63"/>
-                </a:solidFill>
-                <a:latin typeface="Malgun Gothic" pitchFamily="34" charset="0"/>
-                <a:ea typeface="Malgun Gothic" pitchFamily="34" charset="-122"/>
-                <a:cs typeface="Malgun Gothic" pitchFamily="34" charset="-120"/>
-              </a:rPr>
-              <a:t>0℃ 에서 5.0 MW 모자라고,  28℃ 에서 5.1 MW 넘칩니다</a:t>
-            </a:r>
-            <a:endParaRPr lang="en-US" sz="1013" dirty="0"/>
-          </a:p>
-        </p:txBody>
-      </p:sp>
-      <p:sp>
-        <p:nvSpPr>
-          <p:cNvPr id="37" name="Text 35"/>
-          <p:cNvSpPr txBox="1"/>
-          <p:nvPr/>
-        </p:nvSpPr>
-        <p:spPr>
-          <a:xfrm>
-            <a:off x="6515100" y="3905250"/>
-            <a:ext cx="4838700" cy="130016"/>
-          </a:xfrm>
-          <a:prstGeom prst="rect">
-            <a:avLst/>
-          </a:prstGeom>
-          <a:noFill/>
-          <a:ln/>
-        </p:spPr>
-        <p:txBody>
-          <a:bodyPr wrap="square" lIns="0" tIns="0" rIns="0" bIns="0" rtlCol="0" anchor="t"/>
-          <a:lstStyle/>
-          <a:p>
-            <a:pPr algn="l" indent="0" marL="0">
-              <a:lnSpc>
-                <a:spcPts val="1024"/>
-              </a:lnSpc>
-              <a:buNone/>
-            </a:pPr>
-            <a:r>
-              <a:rPr lang="en-US" sz="788" dirty="0">
-                <a:solidFill>
-                  <a:srgbClr val="8A8880"/>
-                </a:solidFill>
-                <a:latin typeface="Malgun Gothic" pitchFamily="34" charset="0"/>
-                <a:ea typeface="Malgun Gothic" pitchFamily="34" charset="-122"/>
-                <a:cs typeface="Malgun Gothic" pitchFamily="34" charset="-120"/>
-              </a:rPr>
-              <a:t>기준선 +2.5 MW = 누적 40회 보정값의 평균 (온도를 안 보고 하나로 맞출 때 오차 최소)</a:t>
-            </a:r>
-            <a:endParaRPr lang="en-US" sz="788" dirty="0"/>
-          </a:p>
-        </p:txBody>
-      </p:sp>
-      <p:sp>
-        <p:nvSpPr>
-          <p:cNvPr id="38" name="Shape 36"/>
-          <p:cNvSpPr/>
-          <p:nvPr/>
-        </p:nvSpPr>
-        <p:spPr>
-          <a:xfrm>
-            <a:off x="685800" y="4572000"/>
-            <a:ext cx="10820400" cy="0"/>
+              <a:t>부  서</a:t>
+            </a:r>
+            <a:endParaRPr lang="en-US" sz="863" dirty="0"/>
+          </a:p>
+        </p:txBody>
+      </p:sp>
+      <p:sp>
+        <p:nvSpPr>
+          <p:cNvPr id="15" name="Shape 12"/>
+          <p:cNvSpPr/>
+          <p:nvPr/>
+        </p:nvSpPr>
+        <p:spPr>
+          <a:xfrm>
+            <a:off x="1600200" y="4991100"/>
+            <a:ext cx="0" cy="190500"/>
           </a:xfrm>
           <a:prstGeom prst="line">
             <a:avLst/>
@@ -3322,33 +2484,75 @@
       </p:sp>
       <p:sp>
         <p:nvSpPr>
-          <p:cNvPr id="39" name="Text 37"/>
-          <p:cNvSpPr txBox="1"/>
-          <p:nvPr/>
-        </p:nvSpPr>
-        <p:spPr>
-          <a:xfrm>
-            <a:off x="685800" y="4781550"/>
-            <a:ext cx="3238500" cy="125016"/>
-          </a:xfrm>
-          <a:prstGeom prst="rect">
-            <a:avLst/>
-          </a:prstGeom>
-          <a:noFill/>
-          <a:ln/>
-        </p:spPr>
-        <p:txBody>
-          <a:bodyPr wrap="square" lIns="0" tIns="0" rIns="0" bIns="0" rtlCol="0" anchor="t"/>
-          <a:lstStyle/>
-          <a:p>
-            <a:pPr algn="l" indent="0" marL="0">
-              <a:lnSpc>
-                <a:spcPts val="984"/>
-              </a:lnSpc>
-              <a:buNone/>
-            </a:pPr>
-            <a:r>
-              <a:rPr lang="en-US" sz="788" b="1" spc="150" kern="0" dirty="0">
+          <p:cNvPr id="16" name="Text 13"/>
+          <p:cNvSpPr txBox="1"/>
+          <p:nvPr/>
+        </p:nvSpPr>
+        <p:spPr>
+          <a:xfrm>
+            <a:off x="1809750" y="4991100"/>
+            <a:ext cx="6667500" cy="205740"/>
+          </a:xfrm>
+          <a:prstGeom prst="rect">
+            <a:avLst/>
+          </a:prstGeom>
+          <a:noFill/>
+          <a:ln/>
+        </p:spPr>
+        <p:txBody>
+          <a:bodyPr wrap="square" lIns="0" tIns="0" rIns="0" bIns="0" rtlCol="0" anchor="t"/>
+          <a:lstStyle/>
+          <a:p>
+            <a:pPr algn="l" indent="0" marL="0">
+              <a:lnSpc>
+                <a:spcPts val="1620"/>
+              </a:lnSpc>
+              <a:buNone/>
+            </a:pPr>
+            <a:r>
+              <a:rPr lang="en-US" sz="1200" dirty="0">
+                <a:solidFill>
+                  <a:srgbClr val="EAE7E0"/>
+                </a:solidFill>
+                <a:latin typeface="Malgun Gothic" pitchFamily="34" charset="0"/>
+                <a:ea typeface="Malgun Gothic" pitchFamily="34" charset="-122"/>
+                <a:cs typeface="Malgun Gothic" pitchFamily="34" charset="-120"/>
+              </a:rPr>
+              <a:t>정비기술팀</a:t>
+            </a:r>
+            <a:endParaRPr lang="en-US" sz="1200" dirty="0"/>
+          </a:p>
+        </p:txBody>
+      </p:sp>
+      <p:sp>
+        <p:nvSpPr>
+          <p:cNvPr id="17" name="Text 14"/>
+          <p:cNvSpPr txBox="1"/>
+          <p:nvPr/>
+        </p:nvSpPr>
+        <p:spPr>
+          <a:xfrm>
+            <a:off x="685800" y="5372100"/>
+            <a:ext cx="762000" cy="136922"/>
+          </a:xfrm>
+          <a:prstGeom prst="rect">
+            <a:avLst/>
+          </a:prstGeom>
+          <a:noFill/>
+          <a:ln/>
+        </p:spPr>
+        <p:txBody>
+          <a:bodyPr wrap="square" lIns="0" tIns="0" rIns="0" bIns="0" rtlCol="0" anchor="t"/>
+          <a:lstStyle/>
+          <a:p>
+            <a:pPr algn="l" indent="0" marL="0">
+              <a:lnSpc>
+                <a:spcPts val="1078"/>
+              </a:lnSpc>
+              <a:buNone/>
+            </a:pPr>
+            <a:r>
+              <a:rPr lang="en-US" sz="863" spc="140" kern="0" dirty="0">
                 <a:solidFill>
                   <a:srgbClr val="8A8880"/>
                 </a:solidFill>
@@ -3356,358 +2560,22 @@
                 <a:ea typeface="Consolas" pitchFamily="34" charset="-122"/>
                 <a:cs typeface="Consolas" pitchFamily="34" charset="-120"/>
               </a:rPr>
-              <a:t>예측 오차 (MAE · 평균 몇 MW 틀렸나)</a:t>
-            </a:r>
-            <a:endParaRPr lang="en-US" sz="788" dirty="0"/>
-          </a:p>
-        </p:txBody>
-      </p:sp>
-      <p:sp>
-        <p:nvSpPr>
-          <p:cNvPr id="40" name="Text 38"/>
-          <p:cNvSpPr txBox="1"/>
-          <p:nvPr/>
-        </p:nvSpPr>
-        <p:spPr>
-          <a:xfrm>
-            <a:off x="685800" y="5010150"/>
-            <a:ext cx="2095500" cy="540068"/>
-          </a:xfrm>
-          <a:prstGeom prst="rect">
-            <a:avLst/>
-          </a:prstGeom>
-          <a:noFill/>
-          <a:ln/>
-        </p:spPr>
-        <p:txBody>
-          <a:bodyPr wrap="square" lIns="0" tIns="0" rIns="0" bIns="0" rtlCol="0" anchor="t"/>
-          <a:lstStyle/>
-          <a:p>
-            <a:pPr algn="l" indent="0" marL="0">
-              <a:lnSpc>
-                <a:spcPts val="4253"/>
-              </a:lnSpc>
-              <a:buNone/>
-            </a:pPr>
-            <a:r>
-              <a:rPr lang="en-US" sz="4050" b="1" dirty="0">
-                <a:solidFill>
-                  <a:srgbClr val="EFB13C"/>
-                </a:solidFill>
-                <a:latin typeface="Consolas" pitchFamily="34" charset="0"/>
-                <a:ea typeface="Consolas" pitchFamily="34" charset="-122"/>
-                <a:cs typeface="Consolas" pitchFamily="34" charset="-120"/>
-              </a:rPr>
-              <a:t>67%↓</a:t>
-            </a:r>
-            <a:endParaRPr lang="en-US" sz="4050" dirty="0"/>
-          </a:p>
-        </p:txBody>
-      </p:sp>
-      <p:sp>
-        <p:nvSpPr>
-          <p:cNvPr id="41" name="Text 39"/>
-          <p:cNvSpPr txBox="1"/>
-          <p:nvPr/>
-        </p:nvSpPr>
-        <p:spPr>
-          <a:xfrm>
-            <a:off x="685800" y="5676900"/>
-            <a:ext cx="2857500" cy="213360"/>
-          </a:xfrm>
-          <a:prstGeom prst="rect">
-            <a:avLst/>
-          </a:prstGeom>
-          <a:noFill/>
-          <a:ln/>
-        </p:spPr>
-        <p:txBody>
-          <a:bodyPr wrap="square" lIns="0" tIns="0" rIns="0" bIns="0" rtlCol="0" anchor="t"/>
-          <a:lstStyle/>
-          <a:p>
-            <a:pPr algn="l" indent="0" marL="0">
-              <a:lnSpc>
-                <a:spcPts val="1680"/>
-              </a:lnSpc>
-              <a:buNone/>
-            </a:pPr>
-            <a:r>
-              <a:rPr lang="en-US" sz="1200" dirty="0">
-                <a:solidFill>
-                  <a:srgbClr val="EAE7E0"/>
-                </a:solidFill>
-                <a:latin typeface="Consolas" pitchFamily="34" charset="0"/>
-                <a:ea typeface="Consolas" pitchFamily="34" charset="-122"/>
-                <a:cs typeface="Consolas" pitchFamily="34" charset="-120"/>
-              </a:rPr>
-              <a:t>3.90 → 1.30 MW</a:t>
-            </a:r>
-            <a:endParaRPr lang="en-US" sz="1200" dirty="0"/>
-          </a:p>
-        </p:txBody>
-      </p:sp>
-      <p:sp>
-        <p:nvSpPr>
-          <p:cNvPr id="42" name="Text 40"/>
-          <p:cNvSpPr txBox="1"/>
-          <p:nvPr/>
-        </p:nvSpPr>
-        <p:spPr>
-          <a:xfrm>
-            <a:off x="4000500" y="4781550"/>
-            <a:ext cx="3238500" cy="125016"/>
-          </a:xfrm>
-          <a:prstGeom prst="rect">
-            <a:avLst/>
-          </a:prstGeom>
-          <a:noFill/>
-          <a:ln/>
-        </p:spPr>
-        <p:txBody>
-          <a:bodyPr wrap="square" lIns="0" tIns="0" rIns="0" bIns="0" rtlCol="0" anchor="t"/>
-          <a:lstStyle/>
-          <a:p>
-            <a:pPr algn="l" indent="0" marL="0">
-              <a:lnSpc>
-                <a:spcPts val="984"/>
-              </a:lnSpc>
-              <a:buNone/>
-            </a:pPr>
-            <a:r>
-              <a:rPr lang="en-US" sz="788" b="1" spc="150" kern="0" dirty="0">
-                <a:solidFill>
-                  <a:srgbClr val="8A8880"/>
-                </a:solidFill>
-                <a:latin typeface="Consolas" pitchFamily="34" charset="0"/>
-                <a:ea typeface="Consolas" pitchFamily="34" charset="-122"/>
-                <a:cs typeface="Consolas" pitchFamily="34" charset="-120"/>
-              </a:rPr>
-              <a:t>기준 미달 회차 (실제 &lt; 신고값)</a:t>
-            </a:r>
-            <a:endParaRPr lang="en-US" sz="788" dirty="0"/>
-          </a:p>
-        </p:txBody>
-      </p:sp>
-      <p:sp>
-        <p:nvSpPr>
-          <p:cNvPr id="43" name="Text 41"/>
-          <p:cNvSpPr txBox="1"/>
-          <p:nvPr/>
-        </p:nvSpPr>
-        <p:spPr>
-          <a:xfrm>
-            <a:off x="4000500" y="5010150"/>
-            <a:ext cx="2095500" cy="540068"/>
-          </a:xfrm>
-          <a:prstGeom prst="rect">
-            <a:avLst/>
-          </a:prstGeom>
-          <a:noFill/>
-          <a:ln/>
-        </p:spPr>
-        <p:txBody>
-          <a:bodyPr wrap="square" lIns="0" tIns="0" rIns="0" bIns="0" rtlCol="0" anchor="t"/>
-          <a:lstStyle/>
-          <a:p>
-            <a:pPr algn="l" indent="0" marL="0">
-              <a:lnSpc>
-                <a:spcPts val="4253"/>
-              </a:lnSpc>
-              <a:buNone/>
-            </a:pPr>
-            <a:r>
-              <a:rPr lang="en-US" sz="4050" b="1" dirty="0">
-                <a:solidFill>
-                  <a:srgbClr val="EFB13C"/>
-                </a:solidFill>
-                <a:latin typeface="Consolas" pitchFamily="34" charset="0"/>
-                <a:ea typeface="Consolas" pitchFamily="34" charset="-122"/>
-                <a:cs typeface="Consolas" pitchFamily="34" charset="-120"/>
-              </a:rPr>
-              <a:t>73%↓</a:t>
-            </a:r>
-            <a:endParaRPr lang="en-US" sz="4050" dirty="0"/>
-          </a:p>
-        </p:txBody>
-      </p:sp>
-      <p:sp>
-        <p:nvSpPr>
-          <p:cNvPr id="44" name="Text 42"/>
-          <p:cNvSpPr txBox="1"/>
-          <p:nvPr/>
-        </p:nvSpPr>
-        <p:spPr>
-          <a:xfrm>
-            <a:off x="4000500" y="5676900"/>
-            <a:ext cx="2857500" cy="213360"/>
-          </a:xfrm>
-          <a:prstGeom prst="rect">
-            <a:avLst/>
-          </a:prstGeom>
-          <a:noFill/>
-          <a:ln/>
-        </p:spPr>
-        <p:txBody>
-          <a:bodyPr wrap="square" lIns="0" tIns="0" rIns="0" bIns="0" rtlCol="0" anchor="t"/>
-          <a:lstStyle/>
-          <a:p>
-            <a:pPr algn="l" indent="0" marL="0">
-              <a:lnSpc>
-                <a:spcPts val="1680"/>
-              </a:lnSpc>
-              <a:buNone/>
-            </a:pPr>
-            <a:r>
-              <a:rPr lang="en-US" sz="1200" dirty="0">
-                <a:solidFill>
-                  <a:srgbClr val="EAE7E0"/>
-                </a:solidFill>
-                <a:latin typeface="Consolas" pitchFamily="34" charset="0"/>
-                <a:ea typeface="Consolas" pitchFamily="34" charset="-122"/>
-                <a:cs typeface="Consolas" pitchFamily="34" charset="-120"/>
-              </a:rPr>
-              <a:t>15 → 4 회</a:t>
-            </a:r>
-            <a:endParaRPr lang="en-US" sz="1200" dirty="0"/>
-          </a:p>
-        </p:txBody>
-      </p:sp>
-      <p:sp>
-        <p:nvSpPr>
-          <p:cNvPr id="45" name="Text 43"/>
-          <p:cNvSpPr txBox="1"/>
-          <p:nvPr/>
-        </p:nvSpPr>
-        <p:spPr>
-          <a:xfrm>
-            <a:off x="7315200" y="4781550"/>
-            <a:ext cx="3238500" cy="125016"/>
-          </a:xfrm>
-          <a:prstGeom prst="rect">
-            <a:avLst/>
-          </a:prstGeom>
-          <a:noFill/>
-          <a:ln/>
-        </p:spPr>
-        <p:txBody>
-          <a:bodyPr wrap="square" lIns="0" tIns="0" rIns="0" bIns="0" rtlCol="0" anchor="t"/>
-          <a:lstStyle/>
-          <a:p>
-            <a:pPr algn="l" indent="0" marL="0">
-              <a:lnSpc>
-                <a:spcPts val="984"/>
-              </a:lnSpc>
-              <a:buNone/>
-            </a:pPr>
-            <a:r>
-              <a:rPr lang="en-US" sz="788" b="1" spc="150" kern="0" dirty="0">
-                <a:solidFill>
-                  <a:srgbClr val="8A8880"/>
-                </a:solidFill>
-                <a:latin typeface="Consolas" pitchFamily="34" charset="0"/>
-                <a:ea typeface="Consolas" pitchFamily="34" charset="-122"/>
-                <a:cs typeface="Consolas" pitchFamily="34" charset="-120"/>
-              </a:rPr>
-              <a:t>과대 신고 누계 (높게 신고한 양)</a:t>
-            </a:r>
-            <a:endParaRPr lang="en-US" sz="788" dirty="0"/>
-          </a:p>
-        </p:txBody>
-      </p:sp>
-      <p:sp>
-        <p:nvSpPr>
-          <p:cNvPr id="46" name="Text 44"/>
-          <p:cNvSpPr txBox="1"/>
-          <p:nvPr/>
-        </p:nvSpPr>
-        <p:spPr>
-          <a:xfrm>
-            <a:off x="7315200" y="5010150"/>
-            <a:ext cx="2095500" cy="540068"/>
-          </a:xfrm>
-          <a:prstGeom prst="rect">
-            <a:avLst/>
-          </a:prstGeom>
-          <a:noFill/>
-          <a:ln/>
-        </p:spPr>
-        <p:txBody>
-          <a:bodyPr wrap="square" lIns="0" tIns="0" rIns="0" bIns="0" rtlCol="0" anchor="t"/>
-          <a:lstStyle/>
-          <a:p>
-            <a:pPr algn="l" indent="0" marL="0">
-              <a:lnSpc>
-                <a:spcPts val="4253"/>
-              </a:lnSpc>
-              <a:buNone/>
-            </a:pPr>
-            <a:r>
-              <a:rPr lang="en-US" sz="4050" b="1" dirty="0">
-                <a:solidFill>
-                  <a:srgbClr val="EFB13C"/>
-                </a:solidFill>
-                <a:latin typeface="Consolas" pitchFamily="34" charset="0"/>
-                <a:ea typeface="Consolas" pitchFamily="34" charset="-122"/>
-                <a:cs typeface="Consolas" pitchFamily="34" charset="-120"/>
-              </a:rPr>
-              <a:t>87%↓</a:t>
-            </a:r>
-            <a:endParaRPr lang="en-US" sz="4050" dirty="0"/>
-          </a:p>
-        </p:txBody>
-      </p:sp>
-      <p:sp>
-        <p:nvSpPr>
-          <p:cNvPr id="47" name="Text 45"/>
-          <p:cNvSpPr txBox="1"/>
-          <p:nvPr/>
-        </p:nvSpPr>
-        <p:spPr>
-          <a:xfrm>
-            <a:off x="7315200" y="5676900"/>
-            <a:ext cx="2857500" cy="213360"/>
-          </a:xfrm>
-          <a:prstGeom prst="rect">
-            <a:avLst/>
-          </a:prstGeom>
-          <a:noFill/>
-          <a:ln/>
-        </p:spPr>
-        <p:txBody>
-          <a:bodyPr wrap="square" lIns="0" tIns="0" rIns="0" bIns="0" rtlCol="0" anchor="t"/>
-          <a:lstStyle/>
-          <a:p>
-            <a:pPr algn="l" indent="0" marL="0">
-              <a:lnSpc>
-                <a:spcPts val="1680"/>
-              </a:lnSpc>
-              <a:buNone/>
-            </a:pPr>
-            <a:r>
-              <a:rPr lang="en-US" sz="1200" dirty="0">
-                <a:solidFill>
-                  <a:srgbClr val="EAE7E0"/>
-                </a:solidFill>
-                <a:latin typeface="Consolas" pitchFamily="34" charset="0"/>
-                <a:ea typeface="Consolas" pitchFamily="34" charset="-122"/>
-                <a:cs typeface="Consolas" pitchFamily="34" charset="-120"/>
-              </a:rPr>
-              <a:t>69.5 → 9.3 MW</a:t>
-            </a:r>
-            <a:endParaRPr lang="en-US" sz="1200" dirty="0"/>
-          </a:p>
-        </p:txBody>
-      </p:sp>
-      <p:sp>
-        <p:nvSpPr>
-          <p:cNvPr id="48" name="Shape 46"/>
-          <p:cNvSpPr/>
-          <p:nvPr/>
-        </p:nvSpPr>
-        <p:spPr>
-          <a:xfrm>
-            <a:off x="3771900" y="4781550"/>
-            <a:ext cx="0" cy="1104900"/>
+              <a:t>작 성 자</a:t>
+            </a:r>
+            <a:endParaRPr lang="en-US" sz="863" dirty="0"/>
+          </a:p>
+        </p:txBody>
+      </p:sp>
+      <p:sp>
+        <p:nvSpPr>
+          <p:cNvPr id="18" name="Shape 15"/>
+          <p:cNvSpPr/>
+          <p:nvPr/>
+        </p:nvSpPr>
+        <p:spPr>
+          <a:xfrm>
+            <a:off x="1600200" y="5353050"/>
+            <a:ext cx="0" cy="190500"/>
           </a:xfrm>
           <a:prstGeom prst="line">
             <a:avLst/>
@@ -3723,14 +2591,98 @@
       </p:sp>
       <p:sp>
         <p:nvSpPr>
-          <p:cNvPr id="49" name="Shape 47"/>
-          <p:cNvSpPr/>
-          <p:nvPr/>
-        </p:nvSpPr>
-        <p:spPr>
-          <a:xfrm>
-            <a:off x="7086600" y="4781550"/>
-            <a:ext cx="0" cy="1104900"/>
+          <p:cNvPr id="19" name="Text 16"/>
+          <p:cNvSpPr txBox="1"/>
+          <p:nvPr/>
+        </p:nvSpPr>
+        <p:spPr>
+          <a:xfrm>
+            <a:off x="1809750" y="5353050"/>
+            <a:ext cx="6667500" cy="205740"/>
+          </a:xfrm>
+          <a:prstGeom prst="rect">
+            <a:avLst/>
+          </a:prstGeom>
+          <a:noFill/>
+          <a:ln/>
+        </p:spPr>
+        <p:txBody>
+          <a:bodyPr wrap="square" lIns="0" tIns="0" rIns="0" bIns="0" rtlCol="0" anchor="t"/>
+          <a:lstStyle/>
+          <a:p>
+            <a:pPr algn="l" indent="0" marL="0">
+              <a:lnSpc>
+                <a:spcPts val="1620"/>
+              </a:lnSpc>
+              <a:buNone/>
+            </a:pPr>
+            <a:r>
+              <a:rPr lang="en-US" sz="1200" dirty="0">
+                <a:solidFill>
+                  <a:srgbClr val="EAE7E0"/>
+                </a:solidFill>
+                <a:latin typeface="Malgun Gothic" pitchFamily="34" charset="0"/>
+                <a:ea typeface="Malgun Gothic" pitchFamily="34" charset="-122"/>
+                <a:cs typeface="Malgun Gothic" pitchFamily="34" charset="-120"/>
+              </a:rPr>
+              <a:t>주현M  ·  정상우M</a:t>
+            </a:r>
+            <a:endParaRPr lang="en-US" sz="1200" dirty="0"/>
+          </a:p>
+        </p:txBody>
+      </p:sp>
+      <p:sp>
+        <p:nvSpPr>
+          <p:cNvPr id="20" name="Text 17"/>
+          <p:cNvSpPr txBox="1"/>
+          <p:nvPr/>
+        </p:nvSpPr>
+        <p:spPr>
+          <a:xfrm>
+            <a:off x="685800" y="5734050"/>
+            <a:ext cx="762000" cy="136922"/>
+          </a:xfrm>
+          <a:prstGeom prst="rect">
+            <a:avLst/>
+          </a:prstGeom>
+          <a:noFill/>
+          <a:ln/>
+        </p:spPr>
+        <p:txBody>
+          <a:bodyPr wrap="square" lIns="0" tIns="0" rIns="0" bIns="0" rtlCol="0" anchor="t"/>
+          <a:lstStyle/>
+          <a:p>
+            <a:pPr algn="l" indent="0" marL="0">
+              <a:lnSpc>
+                <a:spcPts val="1078"/>
+              </a:lnSpc>
+              <a:buNone/>
+            </a:pPr>
+            <a:r>
+              <a:rPr lang="en-US" sz="863" spc="140" kern="0" dirty="0">
+                <a:solidFill>
+                  <a:srgbClr val="8A8880"/>
+                </a:solidFill>
+                <a:latin typeface="Consolas" pitchFamily="34" charset="0"/>
+                <a:ea typeface="Consolas" pitchFamily="34" charset="-122"/>
+                <a:cs typeface="Consolas" pitchFamily="34" charset="-120"/>
+              </a:rPr>
+              <a:t>작성일자</a:t>
+            </a:r>
+            <a:endParaRPr lang="en-US" sz="863" dirty="0"/>
+          </a:p>
+        </p:txBody>
+      </p:sp>
+      <p:sp>
+        <p:nvSpPr>
+          <p:cNvPr id="21" name="Shape 18"/>
+          <p:cNvSpPr/>
+          <p:nvPr/>
+        </p:nvSpPr>
+        <p:spPr>
+          <a:xfrm>
+            <a:off x="1600200" y="5715000"/>
+            <a:ext cx="0" cy="190500"/>
           </a:xfrm>
           <a:prstGeom prst="line">
             <a:avLst/>
@@ -3746,7 +2698,49 @@
       </p:sp>
       <p:sp>
         <p:nvSpPr>
-          <p:cNvPr id="50" name="Shape 48"/>
+          <p:cNvPr id="22" name="Text 19"/>
+          <p:cNvSpPr txBox="1"/>
+          <p:nvPr/>
+        </p:nvSpPr>
+        <p:spPr>
+          <a:xfrm>
+            <a:off x="1809750" y="5715000"/>
+            <a:ext cx="6667500" cy="205740"/>
+          </a:xfrm>
+          <a:prstGeom prst="rect">
+            <a:avLst/>
+          </a:prstGeom>
+          <a:noFill/>
+          <a:ln/>
+        </p:spPr>
+        <p:txBody>
+          <a:bodyPr wrap="square" lIns="0" tIns="0" rIns="0" bIns="0" rtlCol="0" anchor="t"/>
+          <a:lstStyle/>
+          <a:p>
+            <a:pPr algn="l" indent="0" marL="0">
+              <a:lnSpc>
+                <a:spcPts val="1620"/>
+              </a:lnSpc>
+              <a:buNone/>
+            </a:pPr>
+            <a:r>
+              <a:rPr lang="en-US" sz="1200" dirty="0">
+                <a:solidFill>
+                  <a:srgbClr val="EAE7E0"/>
+                </a:solidFill>
+                <a:latin typeface="Malgun Gothic" pitchFamily="34" charset="0"/>
+                <a:ea typeface="Malgun Gothic" pitchFamily="34" charset="-122"/>
+                <a:cs typeface="Malgun Gothic" pitchFamily="34" charset="-120"/>
+              </a:rPr>
+              <a:t>2026. 09.</a:t>
+            </a:r>
+            <a:endParaRPr lang="en-US" sz="1200" dirty="0"/>
+          </a:p>
+        </p:txBody>
+      </p:sp>
+      <p:sp>
+        <p:nvSpPr>
+          <p:cNvPr id="23" name="Shape 20"/>
           <p:cNvSpPr/>
           <p:nvPr/>
         </p:nvSpPr>
@@ -3769,14 +2763,14 @@
       </p:sp>
       <p:sp>
         <p:nvSpPr>
-          <p:cNvPr id="51" name="Text 49"/>
+          <p:cNvPr id="24" name="Text 21"/>
           <p:cNvSpPr txBox="1"/>
           <p:nvPr/>
         </p:nvSpPr>
         <p:spPr>
           <a:xfrm>
             <a:off x="685800" y="6229350"/>
-            <a:ext cx="5715000" cy="160020"/>
+            <a:ext cx="7620000" cy="160020"/>
           </a:xfrm>
           <a:prstGeom prst="rect">
             <a:avLst/>
@@ -3797,55 +2791,13 @@
             <a:r>
               <a:rPr lang="en-US" sz="900" spc="160" kern="0" dirty="0">
                 <a:solidFill>
-                  <a:srgbClr val="A9A79F"/>
+                  <a:srgbClr val="8A8880"/>
                 </a:solidFill>
                 <a:latin typeface="Consolas" pitchFamily="34" charset="0"/>
                 <a:ea typeface="Consolas" pitchFamily="34" charset="-122"/>
                 <a:cs typeface="Consolas" pitchFamily="34" charset="-120"/>
               </a:rPr>
-              <a:t>위례 정비기술팀  ·  주현M · 정상우M</a:t>
-            </a:r>
-            <a:endParaRPr lang="en-US" sz="900" dirty="0"/>
-          </a:p>
-        </p:txBody>
-      </p:sp>
-      <p:sp>
-        <p:nvSpPr>
-          <p:cNvPr id="52" name="Text 50"/>
-          <p:cNvSpPr txBox="1"/>
-          <p:nvPr/>
-        </p:nvSpPr>
-        <p:spPr>
-          <a:xfrm>
-            <a:off x="7696200" y="6229350"/>
-            <a:ext cx="3810000" cy="160020"/>
-          </a:xfrm>
-          <a:prstGeom prst="rect">
-            <a:avLst/>
-          </a:prstGeom>
-          <a:noFill/>
-          <a:ln/>
-        </p:spPr>
-        <p:txBody>
-          <a:bodyPr wrap="square" lIns="0" tIns="0" rIns="0" bIns="0" rtlCol="0" anchor="t"/>
-          <a:lstStyle/>
-          <a:p>
-            <a:pPr algn="r" indent="0" marL="0">
-              <a:lnSpc>
-                <a:spcPts val="1260"/>
-              </a:lnSpc>
-              <a:buNone/>
-            </a:pPr>
-            <a:r>
-              <a:rPr lang="en-US" sz="900" spc="160" kern="0" dirty="0">
-                <a:solidFill>
-                  <a:srgbClr val="8A8880"/>
-                </a:solidFill>
-                <a:latin typeface="Consolas" pitchFamily="34" charset="0"/>
-                <a:ea typeface="Consolas" pitchFamily="34" charset="-122"/>
-                <a:cs typeface="Consolas" pitchFamily="34" charset="-120"/>
-              </a:rPr>
-              <a:t>발표 10분  ·  Tool 시연 4분</a:t>
+              <a:t>위례열병합발전소  ·  공급가능용량 입찰 산정 Tool</a:t>
             </a:r>
             <a:endParaRPr lang="en-US" sz="900" dirty="0"/>
           </a:p>
@@ -10885,7 +9837,7 @@
                 <a:ea typeface="Consolas" pitchFamily="34" charset="-122"/>
                 <a:cs typeface="Consolas" pitchFamily="34" charset="-120"/>
               </a:rPr>
-              <a:t>나래에너지서비스 · 위례열병합발전소</a:t>
+              <a:t>나래에너지서비스 위례사업소</a:t>
             </a:r>
             <a:endParaRPr lang="en-US" sz="900" dirty="0"/>
           </a:p>
@@ -14294,7 +13246,7 @@
                 <a:ea typeface="Consolas" pitchFamily="34" charset="-122"/>
                 <a:cs typeface="Consolas" pitchFamily="34" charset="-120"/>
               </a:rPr>
-              <a:t>위례 정비기술팀  ·  주현M · 정상우M</a:t>
+              <a:t>정비기술팀  ·  주현M · 정상우M</a:t>
             </a:r>
             <a:endParaRPr lang="en-US" sz="900" dirty="0"/>
           </a:p>
@@ -17658,7 +16610,7 @@
                 <a:ea typeface="Malgun Gothic" pitchFamily="34" charset="-122"/>
                 <a:cs typeface="Malgun Gothic" pitchFamily="34" charset="-120"/>
               </a:rPr>
-              <a:t>매주 신고하는 숫자입니다,</a:t>
+              <a:t>테스트는 하루 한 점,</a:t>
             </a:r>
             <a:endParaRPr lang="en-US" sz="2775" dirty="0"/>
           </a:p>
@@ -17678,7 +16630,7 @@
                 <a:ea typeface="Malgun Gothic" pitchFamily="34" charset="-122"/>
                 <a:cs typeface="Malgun Gothic" pitchFamily="34" charset="-120"/>
               </a:rPr>
-              <a:t>틀리면 </a:t>
+              <a:t>신고는 </a:t>
             </a:r>
             <a:pPr algn="l" indent="0" marL="0">
               <a:lnSpc>
@@ -17695,7 +16647,7 @@
                 <a:ea typeface="Malgun Gothic" pitchFamily="34" charset="-122"/>
                 <a:cs typeface="Malgun Gothic" pitchFamily="34" charset="-120"/>
               </a:rPr>
-              <a:t>양쪽으로</a:t>
+              <a:t>61개 온도</a:t>
             </a:r>
             <a:pPr algn="l" indent="0" marL="0">
               <a:lnSpc>
@@ -17712,7 +16664,7 @@
                 <a:ea typeface="Malgun Gothic" pitchFamily="34" charset="-122"/>
                 <a:cs typeface="Malgun Gothic" pitchFamily="34" charset="-120"/>
               </a:rPr>
-              <a:t> 손실입니다</a:t>
+              <a:t> 전부입니다</a:t>
             </a:r>
             <a:endParaRPr lang="en-US" sz="2775" dirty="0"/>
           </a:p>
@@ -17754,7 +16706,7 @@
                 <a:ea typeface="Malgun Gothic" pitchFamily="34" charset="-122"/>
                 <a:cs typeface="Malgun Gothic" pitchFamily="34" charset="-120"/>
               </a:rPr>
-              <a:t>온도 구분 없이 하나의 값으로 신고하면, </a:t>
+              <a:t>그 사이를 메우려고 차이 하나를 61개에 똑같이 얹었습니다 — </a:t>
             </a:r>
             <a:pPr algn="l" indent="0" marL="0">
               <a:lnSpc>
@@ -17771,7 +16723,7 @@
                 <a:ea typeface="Malgun Gothic" pitchFamily="34" charset="-122"/>
                 <a:cs typeface="Malgun Gothic" pitchFamily="34" charset="-120"/>
               </a:rPr>
-              <a:t>같은 방식인데도 계절에 따라</a:t>
+              <a:t>일괄 보정</a:t>
             </a:r>
             <a:pPr algn="l" indent="0" marL="0">
               <a:lnSpc>
@@ -17788,7 +16740,7 @@
                 <a:ea typeface="Malgun Gothic" pitchFamily="34" charset="-122"/>
                 <a:cs typeface="Malgun Gothic" pitchFamily="34" charset="-120"/>
               </a:rPr>
-              <a:t> 어느 쪽으로든 어긋납니다.</a:t>
+              <a:t> 입니다.</a:t>
             </a:r>
             <a:endParaRPr lang="en-US" sz="1350" dirty="0"/>
           </a:p>
@@ -17802,8 +16754,8 @@
         </p:nvSpPr>
         <p:spPr>
           <a:xfrm>
-            <a:off x="685800" y="2705100"/>
-            <a:ext cx="10820400" cy="2133600"/>
+            <a:off x="685800" y="2552700"/>
+            <a:ext cx="10820400" cy="1085850"/>
           </a:xfrm>
           <a:prstGeom prst="rect">
             <a:avLst/>
@@ -17827,8 +16779,8 @@
         </p:nvSpPr>
         <p:spPr>
           <a:xfrm>
-            <a:off x="914400" y="2800350"/>
-            <a:ext cx="6667500" cy="125016"/>
+            <a:off x="914400" y="2647950"/>
+            <a:ext cx="4762500" cy="125016"/>
           </a:xfrm>
           <a:prstGeom prst="rect">
             <a:avLst/>
@@ -17849,13 +16801,13 @@
             <a:r>
               <a:rPr lang="en-US" sz="788" b="1" spc="150" kern="0" dirty="0">
                 <a:solidFill>
-                  <a:srgbClr val="8A8880"/>
+                  <a:srgbClr val="718BA6"/>
                 </a:solidFill>
                 <a:latin typeface="Consolas" pitchFamily="34" charset="0"/>
                 <a:ea typeface="Consolas" pitchFamily="34" charset="-122"/>
                 <a:cs typeface="Consolas" pitchFamily="34" charset="-120"/>
               </a:rPr>
-              <a:t>외기온도별 출력  ·  단위 MW  ·  종전 신고(이론값 + 2.5 하나로) vs 실제 능력</a:t>
+              <a:t>종전 절차  ·  엑셀 4개를 순서대로</a:t>
             </a:r>
             <a:endParaRPr lang="en-US" sz="788" dirty="0"/>
           </a:p>
@@ -17869,468 +16821,15 @@
         </p:nvSpPr>
         <p:spPr>
           <a:xfrm>
-            <a:off x="1428750" y="4494335"/>
-            <a:ext cx="9525000" cy="0"/>
-          </a:xfrm>
-          <a:prstGeom prst="line">
-            <a:avLst/>
-          </a:prstGeom>
-          <a:noFill/>
-          <a:ln w="12700">
-            <a:solidFill>
-              <a:srgbClr val="182838"/>
-            </a:solidFill>
-            <a:prstDash val="solid"/>
-          </a:ln>
-        </p:spPr>
-      </p:sp>
-      <p:sp>
-        <p:nvSpPr>
-          <p:cNvPr id="16" name="Text 14"/>
-          <p:cNvSpPr txBox="1"/>
-          <p:nvPr/>
-        </p:nvSpPr>
-        <p:spPr>
-          <a:xfrm>
-            <a:off x="914400" y="4427660"/>
-            <a:ext cx="438150" cy="123825"/>
-          </a:xfrm>
-          <a:prstGeom prst="rect">
-            <a:avLst/>
-          </a:prstGeom>
-          <a:noFill/>
-          <a:ln/>
-        </p:spPr>
-        <p:txBody>
-          <a:bodyPr wrap="square" lIns="0" tIns="0" rIns="0" bIns="0" rtlCol="0" anchor="t"/>
-          <a:lstStyle/>
-          <a:p>
-            <a:pPr algn="r" indent="0" marL="0">
-              <a:lnSpc>
-                <a:spcPts val="975"/>
-              </a:lnSpc>
-              <a:buNone/>
-            </a:pPr>
-            <a:r>
-              <a:rPr lang="en-US" sz="750" dirty="0">
-                <a:solidFill>
-                  <a:srgbClr val="8A8880"/>
-                </a:solidFill>
-                <a:latin typeface="Consolas" pitchFamily="34" charset="0"/>
-                <a:ea typeface="Consolas" pitchFamily="34" charset="-122"/>
-                <a:cs typeface="Consolas" pitchFamily="34" charset="-120"/>
-              </a:rPr>
-              <a:t>360</a:t>
-            </a:r>
-            <a:endParaRPr lang="en-US" sz="750" dirty="0"/>
-          </a:p>
-        </p:txBody>
-      </p:sp>
-      <p:sp>
-        <p:nvSpPr>
-          <p:cNvPr id="17" name="Shape 15"/>
-          <p:cNvSpPr/>
-          <p:nvPr/>
-        </p:nvSpPr>
-        <p:spPr>
-          <a:xfrm>
-            <a:off x="1428750" y="4259873"/>
-            <a:ext cx="9525000" cy="0"/>
-          </a:xfrm>
-          <a:prstGeom prst="line">
-            <a:avLst/>
-          </a:prstGeom>
-          <a:noFill/>
-          <a:ln w="12700">
-            <a:solidFill>
-              <a:srgbClr val="182838"/>
-            </a:solidFill>
-            <a:prstDash val="solid"/>
-          </a:ln>
-        </p:spPr>
-      </p:sp>
-      <p:sp>
-        <p:nvSpPr>
-          <p:cNvPr id="18" name="Text 16"/>
-          <p:cNvSpPr txBox="1"/>
-          <p:nvPr/>
-        </p:nvSpPr>
-        <p:spPr>
-          <a:xfrm>
-            <a:off x="914400" y="4193198"/>
-            <a:ext cx="438150" cy="123825"/>
-          </a:xfrm>
-          <a:prstGeom prst="rect">
-            <a:avLst/>
-          </a:prstGeom>
-          <a:noFill/>
-          <a:ln/>
-        </p:spPr>
-        <p:txBody>
-          <a:bodyPr wrap="square" lIns="0" tIns="0" rIns="0" bIns="0" rtlCol="0" anchor="t"/>
-          <a:lstStyle/>
-          <a:p>
-            <a:pPr algn="r" indent="0" marL="0">
-              <a:lnSpc>
-                <a:spcPts val="975"/>
-              </a:lnSpc>
-              <a:buNone/>
-            </a:pPr>
-            <a:r>
-              <a:rPr lang="en-US" sz="750" dirty="0">
-                <a:solidFill>
-                  <a:srgbClr val="8A8880"/>
-                </a:solidFill>
-                <a:latin typeface="Consolas" pitchFamily="34" charset="0"/>
-                <a:ea typeface="Consolas" pitchFamily="34" charset="-122"/>
-                <a:cs typeface="Consolas" pitchFamily="34" charset="-120"/>
-              </a:rPr>
-              <a:t>380</a:t>
-            </a:r>
-            <a:endParaRPr lang="en-US" sz="750" dirty="0"/>
-          </a:p>
-        </p:txBody>
-      </p:sp>
-      <p:sp>
-        <p:nvSpPr>
-          <p:cNvPr id="19" name="Shape 17"/>
-          <p:cNvSpPr/>
-          <p:nvPr/>
-        </p:nvSpPr>
-        <p:spPr>
-          <a:xfrm>
-            <a:off x="1428750" y="4025412"/>
-            <a:ext cx="9525000" cy="0"/>
-          </a:xfrm>
-          <a:prstGeom prst="line">
-            <a:avLst/>
-          </a:prstGeom>
-          <a:noFill/>
-          <a:ln w="12700">
-            <a:solidFill>
-              <a:srgbClr val="182838"/>
-            </a:solidFill>
-            <a:prstDash val="solid"/>
-          </a:ln>
-        </p:spPr>
-      </p:sp>
-      <p:sp>
-        <p:nvSpPr>
-          <p:cNvPr id="20" name="Text 18"/>
-          <p:cNvSpPr txBox="1"/>
-          <p:nvPr/>
-        </p:nvSpPr>
-        <p:spPr>
-          <a:xfrm>
-            <a:off x="914400" y="3958737"/>
-            <a:ext cx="438150" cy="123825"/>
-          </a:xfrm>
-          <a:prstGeom prst="rect">
-            <a:avLst/>
-          </a:prstGeom>
-          <a:noFill/>
-          <a:ln/>
-        </p:spPr>
-        <p:txBody>
-          <a:bodyPr wrap="square" lIns="0" tIns="0" rIns="0" bIns="0" rtlCol="0" anchor="t"/>
-          <a:lstStyle/>
-          <a:p>
-            <a:pPr algn="r" indent="0" marL="0">
-              <a:lnSpc>
-                <a:spcPts val="975"/>
-              </a:lnSpc>
-              <a:buNone/>
-            </a:pPr>
-            <a:r>
-              <a:rPr lang="en-US" sz="750" dirty="0">
-                <a:solidFill>
-                  <a:srgbClr val="8A8880"/>
-                </a:solidFill>
-                <a:latin typeface="Consolas" pitchFamily="34" charset="0"/>
-                <a:ea typeface="Consolas" pitchFamily="34" charset="-122"/>
-                <a:cs typeface="Consolas" pitchFamily="34" charset="-120"/>
-              </a:rPr>
-              <a:t>400</a:t>
-            </a:r>
-            <a:endParaRPr lang="en-US" sz="750" dirty="0"/>
-          </a:p>
-        </p:txBody>
-      </p:sp>
-      <p:sp>
-        <p:nvSpPr>
-          <p:cNvPr id="21" name="Shape 19"/>
-          <p:cNvSpPr/>
-          <p:nvPr/>
-        </p:nvSpPr>
-        <p:spPr>
-          <a:xfrm>
-            <a:off x="1428750" y="3790950"/>
-            <a:ext cx="9525000" cy="0"/>
-          </a:xfrm>
-          <a:prstGeom prst="line">
-            <a:avLst/>
-          </a:prstGeom>
-          <a:noFill/>
-          <a:ln w="12700">
-            <a:solidFill>
-              <a:srgbClr val="182838"/>
-            </a:solidFill>
-            <a:prstDash val="solid"/>
-          </a:ln>
-        </p:spPr>
-      </p:sp>
-      <p:sp>
-        <p:nvSpPr>
-          <p:cNvPr id="22" name="Text 20"/>
-          <p:cNvSpPr txBox="1"/>
-          <p:nvPr/>
-        </p:nvSpPr>
-        <p:spPr>
-          <a:xfrm>
-            <a:off x="914400" y="3724275"/>
-            <a:ext cx="438150" cy="123825"/>
-          </a:xfrm>
-          <a:prstGeom prst="rect">
-            <a:avLst/>
-          </a:prstGeom>
-          <a:noFill/>
-          <a:ln/>
-        </p:spPr>
-        <p:txBody>
-          <a:bodyPr wrap="square" lIns="0" tIns="0" rIns="0" bIns="0" rtlCol="0" anchor="t"/>
-          <a:lstStyle/>
-          <a:p>
-            <a:pPr algn="r" indent="0" marL="0">
-              <a:lnSpc>
-                <a:spcPts val="975"/>
-              </a:lnSpc>
-              <a:buNone/>
-            </a:pPr>
-            <a:r>
-              <a:rPr lang="en-US" sz="750" dirty="0">
-                <a:solidFill>
-                  <a:srgbClr val="8A8880"/>
-                </a:solidFill>
-                <a:latin typeface="Consolas" pitchFamily="34" charset="0"/>
-                <a:ea typeface="Consolas" pitchFamily="34" charset="-122"/>
-                <a:cs typeface="Consolas" pitchFamily="34" charset="-120"/>
-              </a:rPr>
-              <a:t>420</a:t>
-            </a:r>
-            <a:endParaRPr lang="en-US" sz="750" dirty="0"/>
-          </a:p>
-        </p:txBody>
-      </p:sp>
-      <p:sp>
-        <p:nvSpPr>
-          <p:cNvPr id="23" name="Shape 21"/>
-          <p:cNvSpPr/>
-          <p:nvPr/>
-        </p:nvSpPr>
-        <p:spPr>
-          <a:xfrm>
-            <a:off x="1428750" y="3556488"/>
-            <a:ext cx="9525000" cy="0"/>
-          </a:xfrm>
-          <a:prstGeom prst="line">
-            <a:avLst/>
-          </a:prstGeom>
-          <a:noFill/>
-          <a:ln w="12700">
-            <a:solidFill>
-              <a:srgbClr val="182838"/>
-            </a:solidFill>
-            <a:prstDash val="solid"/>
-          </a:ln>
-        </p:spPr>
-      </p:sp>
-      <p:sp>
-        <p:nvSpPr>
-          <p:cNvPr id="24" name="Text 22"/>
-          <p:cNvSpPr txBox="1"/>
-          <p:nvPr/>
-        </p:nvSpPr>
-        <p:spPr>
-          <a:xfrm>
-            <a:off x="914400" y="3489813"/>
-            <a:ext cx="438150" cy="123825"/>
-          </a:xfrm>
-          <a:prstGeom prst="rect">
-            <a:avLst/>
-          </a:prstGeom>
-          <a:noFill/>
-          <a:ln/>
-        </p:spPr>
-        <p:txBody>
-          <a:bodyPr wrap="square" lIns="0" tIns="0" rIns="0" bIns="0" rtlCol="0" anchor="t"/>
-          <a:lstStyle/>
-          <a:p>
-            <a:pPr algn="r" indent="0" marL="0">
-              <a:lnSpc>
-                <a:spcPts val="975"/>
-              </a:lnSpc>
-              <a:buNone/>
-            </a:pPr>
-            <a:r>
-              <a:rPr lang="en-US" sz="750" dirty="0">
-                <a:solidFill>
-                  <a:srgbClr val="8A8880"/>
-                </a:solidFill>
-                <a:latin typeface="Consolas" pitchFamily="34" charset="0"/>
-                <a:ea typeface="Consolas" pitchFamily="34" charset="-122"/>
-                <a:cs typeface="Consolas" pitchFamily="34" charset="-120"/>
-              </a:rPr>
-              <a:t>440</a:t>
-            </a:r>
-            <a:endParaRPr lang="en-US" sz="750" dirty="0"/>
-          </a:p>
-        </p:txBody>
-      </p:sp>
-      <p:sp>
-        <p:nvSpPr>
-          <p:cNvPr id="25" name="Shape 23"/>
-          <p:cNvSpPr/>
-          <p:nvPr/>
-        </p:nvSpPr>
-        <p:spPr>
-          <a:xfrm>
-            <a:off x="1428750" y="3322027"/>
-            <a:ext cx="9525000" cy="0"/>
-          </a:xfrm>
-          <a:prstGeom prst="line">
-            <a:avLst/>
-          </a:prstGeom>
-          <a:noFill/>
-          <a:ln w="12700">
-            <a:solidFill>
-              <a:srgbClr val="182838"/>
-            </a:solidFill>
-            <a:prstDash val="solid"/>
-          </a:ln>
-        </p:spPr>
-      </p:sp>
-      <p:sp>
-        <p:nvSpPr>
-          <p:cNvPr id="26" name="Text 24"/>
-          <p:cNvSpPr txBox="1"/>
-          <p:nvPr/>
-        </p:nvSpPr>
-        <p:spPr>
-          <a:xfrm>
-            <a:off x="914400" y="3255352"/>
-            <a:ext cx="438150" cy="123825"/>
-          </a:xfrm>
-          <a:prstGeom prst="rect">
-            <a:avLst/>
-          </a:prstGeom>
-          <a:noFill/>
-          <a:ln/>
-        </p:spPr>
-        <p:txBody>
-          <a:bodyPr wrap="square" lIns="0" tIns="0" rIns="0" bIns="0" rtlCol="0" anchor="t"/>
-          <a:lstStyle/>
-          <a:p>
-            <a:pPr algn="r" indent="0" marL="0">
-              <a:lnSpc>
-                <a:spcPts val="975"/>
-              </a:lnSpc>
-              <a:buNone/>
-            </a:pPr>
-            <a:r>
-              <a:rPr lang="en-US" sz="750" dirty="0">
-                <a:solidFill>
-                  <a:srgbClr val="8A8880"/>
-                </a:solidFill>
-                <a:latin typeface="Consolas" pitchFamily="34" charset="0"/>
-                <a:ea typeface="Consolas" pitchFamily="34" charset="-122"/>
-                <a:cs typeface="Consolas" pitchFamily="34" charset="-120"/>
-              </a:rPr>
-              <a:t>460</a:t>
-            </a:r>
-            <a:endParaRPr lang="en-US" sz="750" dirty="0"/>
-          </a:p>
-        </p:txBody>
-      </p:sp>
-      <p:sp>
-        <p:nvSpPr>
-          <p:cNvPr id="27" name="Shape 25"/>
-          <p:cNvSpPr/>
-          <p:nvPr/>
-        </p:nvSpPr>
-        <p:spPr>
-          <a:xfrm>
-            <a:off x="1428750" y="3087565"/>
-            <a:ext cx="9525000" cy="0"/>
-          </a:xfrm>
-          <a:prstGeom prst="line">
-            <a:avLst/>
-          </a:prstGeom>
-          <a:noFill/>
-          <a:ln w="12700">
-            <a:solidFill>
-              <a:srgbClr val="182838"/>
-            </a:solidFill>
-            <a:prstDash val="solid"/>
-          </a:ln>
-        </p:spPr>
-      </p:sp>
-      <p:sp>
-        <p:nvSpPr>
-          <p:cNvPr id="28" name="Text 26"/>
-          <p:cNvSpPr txBox="1"/>
-          <p:nvPr/>
-        </p:nvSpPr>
-        <p:spPr>
-          <a:xfrm>
-            <a:off x="914400" y="3020890"/>
-            <a:ext cx="438150" cy="123825"/>
-          </a:xfrm>
-          <a:prstGeom prst="rect">
-            <a:avLst/>
-          </a:prstGeom>
-          <a:noFill/>
-          <a:ln/>
-        </p:spPr>
-        <p:txBody>
-          <a:bodyPr wrap="square" lIns="0" tIns="0" rIns="0" bIns="0" rtlCol="0" anchor="t"/>
-          <a:lstStyle/>
-          <a:p>
-            <a:pPr algn="r" indent="0" marL="0">
-              <a:lnSpc>
-                <a:spcPts val="975"/>
-              </a:lnSpc>
-              <a:buNone/>
-            </a:pPr>
-            <a:r>
-              <a:rPr lang="en-US" sz="750" dirty="0">
-                <a:solidFill>
-                  <a:srgbClr val="8A8880"/>
-                </a:solidFill>
-                <a:latin typeface="Consolas" pitchFamily="34" charset="0"/>
-                <a:ea typeface="Consolas" pitchFamily="34" charset="-122"/>
-                <a:cs typeface="Consolas" pitchFamily="34" charset="-120"/>
-              </a:rPr>
-              <a:t>480</a:t>
-            </a:r>
-            <a:endParaRPr lang="en-US" sz="750" dirty="0"/>
-          </a:p>
-        </p:txBody>
-      </p:sp>
-      <p:sp>
-        <p:nvSpPr>
-          <p:cNvPr id="29" name="Shape 27"/>
-          <p:cNvSpPr/>
-          <p:nvPr/>
-        </p:nvSpPr>
-        <p:spPr>
-          <a:xfrm>
-            <a:off x="1428750" y="4552950"/>
-            <a:ext cx="9525000" cy="0"/>
-          </a:xfrm>
-          <a:prstGeom prst="line">
-            <a:avLst/>
-          </a:prstGeom>
-          <a:noFill/>
+            <a:off x="914400" y="2838450"/>
+            <a:ext cx="1866900" cy="419100"/>
+          </a:xfrm>
+          <a:prstGeom prst="rect">
+            <a:avLst/>
+          </a:prstGeom>
+          <a:solidFill>
+            <a:srgbClr val="0F1A28"/>
+          </a:solidFill>
           <a:ln w="12700">
             <a:solidFill>
               <a:srgbClr val="22354A"/>
@@ -18341,22 +16840,150 @@
       </p:sp>
       <p:sp>
         <p:nvSpPr>
-          <p:cNvPr id="30" name="Shape 28"/>
-          <p:cNvSpPr/>
-          <p:nvPr/>
-        </p:nvSpPr>
-        <p:spPr>
-          <a:xfrm>
-            <a:off x="1428750" y="4552950"/>
-            <a:ext cx="0" cy="47625"/>
-          </a:xfrm>
-          <a:prstGeom prst="line">
-            <a:avLst/>
-          </a:prstGeom>
-          <a:noFill/>
+          <p:cNvPr id="16" name="Text 14"/>
+          <p:cNvSpPr txBox="1"/>
+          <p:nvPr/>
+        </p:nvSpPr>
+        <p:spPr>
+          <a:xfrm>
+            <a:off x="1028700" y="2895600"/>
+            <a:ext cx="1638300" cy="154305"/>
+          </a:xfrm>
+          <a:prstGeom prst="rect">
+            <a:avLst/>
+          </a:prstGeom>
+          <a:noFill/>
+          <a:ln/>
+        </p:spPr>
+        <p:txBody>
+          <a:bodyPr wrap="square" lIns="0" tIns="0" rIns="0" bIns="0" rtlCol="0" anchor="t"/>
+          <a:lstStyle/>
+          <a:p>
+            <a:pPr algn="l" indent="0" marL="0">
+              <a:lnSpc>
+                <a:spcPts val="1215"/>
+              </a:lnSpc>
+              <a:buNone/>
+            </a:pPr>
+            <a:r>
+              <a:rPr lang="en-US" sz="1013" b="1" dirty="0">
+                <a:solidFill>
+                  <a:srgbClr val="EAE7E0"/>
+                </a:solidFill>
+                <a:latin typeface="Malgun Gothic" pitchFamily="34" charset="0"/>
+                <a:ea typeface="Malgun Gothic" pitchFamily="34" charset="-122"/>
+                <a:cs typeface="Malgun Gothic" pitchFamily="34" charset="-120"/>
+              </a:rPr>
+              <a:t>테스트 1회</a:t>
+            </a:r>
+            <a:endParaRPr lang="en-US" sz="1013" dirty="0"/>
+          </a:p>
+        </p:txBody>
+      </p:sp>
+      <p:sp>
+        <p:nvSpPr>
+          <p:cNvPr id="17" name="Text 15"/>
+          <p:cNvSpPr txBox="1"/>
+          <p:nvPr/>
+        </p:nvSpPr>
+        <p:spPr>
+          <a:xfrm>
+            <a:off x="1028700" y="3076575"/>
+            <a:ext cx="1638300" cy="114300"/>
+          </a:xfrm>
+          <a:prstGeom prst="rect">
+            <a:avLst/>
+          </a:prstGeom>
+          <a:noFill/>
+          <a:ln/>
+        </p:spPr>
+        <p:txBody>
+          <a:bodyPr wrap="square" lIns="0" tIns="0" rIns="0" bIns="0" rtlCol="0" anchor="t"/>
+          <a:lstStyle/>
+          <a:p>
+            <a:pPr algn="l" indent="0" marL="0">
+              <a:lnSpc>
+                <a:spcPts val="900"/>
+              </a:lnSpc>
+              <a:buNone/>
+            </a:pPr>
+            <a:r>
+              <a:rPr lang="en-US" sz="750" dirty="0">
+                <a:solidFill>
+                  <a:srgbClr val="8A8880"/>
+                </a:solidFill>
+                <a:latin typeface="Malgun Gothic" pitchFamily="34" charset="0"/>
+                <a:ea typeface="Malgun Gothic" pitchFamily="34" charset="-122"/>
+                <a:cs typeface="Malgun Gothic" pitchFamily="34" charset="-120"/>
+              </a:rPr>
+              <a:t>엑셀 ① 날짜·시각 → RiMS</a:t>
+            </a:r>
+            <a:endParaRPr lang="en-US" sz="750" dirty="0"/>
+          </a:p>
+        </p:txBody>
+      </p:sp>
+      <p:sp>
+        <p:nvSpPr>
+          <p:cNvPr id="18" name="Text 16"/>
+          <p:cNvSpPr txBox="1"/>
+          <p:nvPr/>
+        </p:nvSpPr>
+        <p:spPr>
+          <a:xfrm>
+            <a:off x="2781300" y="2971800"/>
+            <a:ext cx="190500" cy="160020"/>
+          </a:xfrm>
+          <a:prstGeom prst="rect">
+            <a:avLst/>
+          </a:prstGeom>
+          <a:noFill/>
+          <a:ln/>
+        </p:spPr>
+        <p:txBody>
+          <a:bodyPr wrap="square" lIns="0" tIns="0" rIns="0" bIns="0" rtlCol="0" anchor="t"/>
+          <a:lstStyle/>
+          <a:p>
+            <a:pPr algn="ctr" indent="0" marL="0">
+              <a:lnSpc>
+                <a:spcPts val="1260"/>
+              </a:lnSpc>
+              <a:buNone/>
+            </a:pPr>
+            <a:r>
+              <a:rPr lang="en-US" sz="1050" dirty="0">
+                <a:solidFill>
+                  <a:srgbClr val="8A8880"/>
+                </a:solidFill>
+                <a:latin typeface="Malgun Gothic" pitchFamily="34" charset="0"/>
+                <a:ea typeface="Malgun Gothic" pitchFamily="34" charset="-122"/>
+                <a:cs typeface="Malgun Gothic" pitchFamily="34" charset="-120"/>
+              </a:rPr>
+              <a:t>→</a:t>
+            </a:r>
+            <a:endParaRPr lang="en-US" sz="1050" dirty="0"/>
+          </a:p>
+        </p:txBody>
+      </p:sp>
+      <p:sp>
+        <p:nvSpPr>
+          <p:cNvPr id="19" name="Shape 17"/>
+          <p:cNvSpPr/>
+          <p:nvPr/>
+        </p:nvSpPr>
+        <p:spPr>
+          <a:xfrm>
+            <a:off x="2971800" y="2838450"/>
+            <a:ext cx="1866900" cy="419100"/>
+          </a:xfrm>
+          <a:prstGeom prst="rect">
+            <a:avLst/>
+          </a:prstGeom>
+          <a:solidFill>
+            <a:srgbClr val="0F1A28"/>
+          </a:solidFill>
           <a:ln w="12700">
             <a:solidFill>
-              <a:srgbClr val="8A8880"/>
+              <a:srgbClr val="22354A"/>
             </a:solidFill>
             <a:prstDash val="solid"/>
           </a:ln>
@@ -18364,14 +16991,98 @@
       </p:sp>
       <p:sp>
         <p:nvSpPr>
-          <p:cNvPr id="31" name="Text 29"/>
-          <p:cNvSpPr txBox="1"/>
-          <p:nvPr/>
-        </p:nvSpPr>
-        <p:spPr>
-          <a:xfrm>
-            <a:off x="1200150" y="4629150"/>
-            <a:ext cx="457200" cy="123825"/>
+          <p:cNvPr id="20" name="Text 18"/>
+          <p:cNvSpPr txBox="1"/>
+          <p:nvPr/>
+        </p:nvSpPr>
+        <p:spPr>
+          <a:xfrm>
+            <a:off x="3086100" y="2895600"/>
+            <a:ext cx="1638300" cy="154305"/>
+          </a:xfrm>
+          <a:prstGeom prst="rect">
+            <a:avLst/>
+          </a:prstGeom>
+          <a:noFill/>
+          <a:ln/>
+        </p:spPr>
+        <p:txBody>
+          <a:bodyPr wrap="square" lIns="0" tIns="0" rIns="0" bIns="0" rtlCol="0" anchor="t"/>
+          <a:lstStyle/>
+          <a:p>
+            <a:pPr algn="l" indent="0" marL="0">
+              <a:lnSpc>
+                <a:spcPts val="1215"/>
+              </a:lnSpc>
+              <a:buNone/>
+            </a:pPr>
+            <a:r>
+              <a:rPr lang="en-US" sz="1013" b="1" dirty="0">
+                <a:solidFill>
+                  <a:srgbClr val="EAE7E0"/>
+                </a:solidFill>
+                <a:latin typeface="Malgun Gothic" pitchFamily="34" charset="0"/>
+                <a:ea typeface="Malgun Gothic" pitchFamily="34" charset="-122"/>
+                <a:cs typeface="Malgun Gothic" pitchFamily="34" charset="-120"/>
+              </a:rPr>
+              <a:t>온도별 계산</a:t>
+            </a:r>
+            <a:endParaRPr lang="en-US" sz="1013" dirty="0"/>
+          </a:p>
+        </p:txBody>
+      </p:sp>
+      <p:sp>
+        <p:nvSpPr>
+          <p:cNvPr id="21" name="Text 19"/>
+          <p:cNvSpPr txBox="1"/>
+          <p:nvPr/>
+        </p:nvSpPr>
+        <p:spPr>
+          <a:xfrm>
+            <a:off x="3086100" y="3076575"/>
+            <a:ext cx="1638300" cy="114300"/>
+          </a:xfrm>
+          <a:prstGeom prst="rect">
+            <a:avLst/>
+          </a:prstGeom>
+          <a:noFill/>
+          <a:ln/>
+        </p:spPr>
+        <p:txBody>
+          <a:bodyPr wrap="square" lIns="0" tIns="0" rIns="0" bIns="0" rtlCol="0" anchor="t"/>
+          <a:lstStyle/>
+          <a:p>
+            <a:pPr algn="l" indent="0" marL="0">
+              <a:lnSpc>
+                <a:spcPts val="900"/>
+              </a:lnSpc>
+              <a:buNone/>
+            </a:pPr>
+            <a:r>
+              <a:rPr lang="en-US" sz="750" dirty="0">
+                <a:solidFill>
+                  <a:srgbClr val="8A8880"/>
+                </a:solidFill>
+                <a:latin typeface="Malgun Gothic" pitchFamily="34" charset="0"/>
+                <a:ea typeface="Malgun Gothic" pitchFamily="34" charset="-122"/>
+                <a:cs typeface="Malgun Gothic" pitchFamily="34" charset="-120"/>
+              </a:rPr>
+              <a:t>엑셀 ② 대기압 → 61개 값</a:t>
+            </a:r>
+            <a:endParaRPr lang="en-US" sz="750" dirty="0"/>
+          </a:p>
+        </p:txBody>
+      </p:sp>
+      <p:sp>
+        <p:nvSpPr>
+          <p:cNvPr id="22" name="Text 20"/>
+          <p:cNvSpPr txBox="1"/>
+          <p:nvPr/>
+        </p:nvSpPr>
+        <p:spPr>
+          <a:xfrm>
+            <a:off x="4838700" y="2971800"/>
+            <a:ext cx="190500" cy="160020"/>
           </a:xfrm>
           <a:prstGeom prst="rect">
             <a:avLst/>
@@ -18385,43 +17096,45 @@
           <a:p>
             <a:pPr algn="ctr" indent="0" marL="0">
               <a:lnSpc>
-                <a:spcPts val="975"/>
-              </a:lnSpc>
-              <a:buNone/>
-            </a:pPr>
-            <a:r>
-              <a:rPr lang="en-US" sz="750" dirty="0">
+                <a:spcPts val="1260"/>
+              </a:lnSpc>
+              <a:buNone/>
+            </a:pPr>
+            <a:r>
+              <a:rPr lang="en-US" sz="1050" dirty="0">
                 <a:solidFill>
                   <a:srgbClr val="8A8880"/>
                 </a:solidFill>
-                <a:latin typeface="Consolas" pitchFamily="34" charset="0"/>
-                <a:ea typeface="Consolas" pitchFamily="34" charset="-122"/>
-                <a:cs typeface="Consolas" pitchFamily="34" charset="-120"/>
-              </a:rPr>
-              <a:t>-10℃</a:t>
-            </a:r>
-            <a:endParaRPr lang="en-US" sz="750" dirty="0"/>
-          </a:p>
-        </p:txBody>
-      </p:sp>
-      <p:sp>
-        <p:nvSpPr>
-          <p:cNvPr id="32" name="Shape 30"/>
-          <p:cNvSpPr/>
-          <p:nvPr/>
-        </p:nvSpPr>
-        <p:spPr>
-          <a:xfrm>
-            <a:off x="3333750" y="4552950"/>
-            <a:ext cx="0" cy="47625"/>
-          </a:xfrm>
-          <a:prstGeom prst="line">
-            <a:avLst/>
-          </a:prstGeom>
-          <a:noFill/>
+                <a:latin typeface="Malgun Gothic" pitchFamily="34" charset="0"/>
+                <a:ea typeface="Malgun Gothic" pitchFamily="34" charset="-122"/>
+                <a:cs typeface="Malgun Gothic" pitchFamily="34" charset="-120"/>
+              </a:rPr>
+              <a:t>→</a:t>
+            </a:r>
+            <a:endParaRPr lang="en-US" sz="1050" dirty="0"/>
+          </a:p>
+        </p:txBody>
+      </p:sp>
+      <p:sp>
+        <p:nvSpPr>
+          <p:cNvPr id="23" name="Shape 21"/>
+          <p:cNvSpPr/>
+          <p:nvPr/>
+        </p:nvSpPr>
+        <p:spPr>
+          <a:xfrm>
+            <a:off x="5029200" y="2838450"/>
+            <a:ext cx="1866900" cy="419100"/>
+          </a:xfrm>
+          <a:prstGeom prst="rect">
+            <a:avLst/>
+          </a:prstGeom>
+          <a:solidFill>
+            <a:srgbClr val="0F1A28"/>
+          </a:solidFill>
           <a:ln w="12700">
             <a:solidFill>
-              <a:srgbClr val="8A8880"/>
+              <a:srgbClr val="22354A"/>
             </a:solidFill>
             <a:prstDash val="solid"/>
           </a:ln>
@@ -18429,14 +17142,98 @@
       </p:sp>
       <p:sp>
         <p:nvSpPr>
-          <p:cNvPr id="33" name="Text 31"/>
-          <p:cNvSpPr txBox="1"/>
-          <p:nvPr/>
-        </p:nvSpPr>
-        <p:spPr>
-          <a:xfrm>
-            <a:off x="3105150" y="4629150"/>
-            <a:ext cx="457200" cy="123825"/>
+          <p:cNvPr id="24" name="Text 22"/>
+          <p:cNvSpPr txBox="1"/>
+          <p:nvPr/>
+        </p:nvSpPr>
+        <p:spPr>
+          <a:xfrm>
+            <a:off x="5143500" y="2895600"/>
+            <a:ext cx="1638300" cy="154305"/>
+          </a:xfrm>
+          <a:prstGeom prst="rect">
+            <a:avLst/>
+          </a:prstGeom>
+          <a:noFill/>
+          <a:ln/>
+        </p:spPr>
+        <p:txBody>
+          <a:bodyPr wrap="square" lIns="0" tIns="0" rIns="0" bIns="0" rtlCol="0" anchor="t"/>
+          <a:lstStyle/>
+          <a:p>
+            <a:pPr algn="l" indent="0" marL="0">
+              <a:lnSpc>
+                <a:spcPts val="1215"/>
+              </a:lnSpc>
+              <a:buNone/>
+            </a:pPr>
+            <a:r>
+              <a:rPr lang="en-US" sz="1013" b="1" dirty="0">
+                <a:solidFill>
+                  <a:srgbClr val="EAE7E0"/>
+                </a:solidFill>
+                <a:latin typeface="Malgun Gothic" pitchFamily="34" charset="0"/>
+                <a:ea typeface="Malgun Gothic" pitchFamily="34" charset="-122"/>
+                <a:cs typeface="Malgun Gothic" pitchFamily="34" charset="-120"/>
+              </a:rPr>
+              <a:t>차이 1개</a:t>
+            </a:r>
+            <a:endParaRPr lang="en-US" sz="1013" dirty="0"/>
+          </a:p>
+        </p:txBody>
+      </p:sp>
+      <p:sp>
+        <p:nvSpPr>
+          <p:cNvPr id="25" name="Text 23"/>
+          <p:cNvSpPr txBox="1"/>
+          <p:nvPr/>
+        </p:nvSpPr>
+        <p:spPr>
+          <a:xfrm>
+            <a:off x="5143500" y="3076575"/>
+            <a:ext cx="1638300" cy="114300"/>
+          </a:xfrm>
+          <a:prstGeom prst="rect">
+            <a:avLst/>
+          </a:prstGeom>
+          <a:noFill/>
+          <a:ln/>
+        </p:spPr>
+        <p:txBody>
+          <a:bodyPr wrap="square" lIns="0" tIns="0" rIns="0" bIns="0" rtlCol="0" anchor="t"/>
+          <a:lstStyle/>
+          <a:p>
+            <a:pPr algn="l" indent="0" marL="0">
+              <a:lnSpc>
+                <a:spcPts val="900"/>
+              </a:lnSpc>
+              <a:buNone/>
+            </a:pPr>
+            <a:r>
+              <a:rPr lang="en-US" sz="750" dirty="0">
+                <a:solidFill>
+                  <a:srgbClr val="8A8880"/>
+                </a:solidFill>
+                <a:latin typeface="Malgun Gothic" pitchFamily="34" charset="0"/>
+                <a:ea typeface="Malgun Gothic" pitchFamily="34" charset="-122"/>
+                <a:cs typeface="Malgun Gothic" pitchFamily="34" charset="-120"/>
+              </a:rPr>
+              <a:t>그날 온도에서 실측 − 계산</a:t>
+            </a:r>
+            <a:endParaRPr lang="en-US" sz="750" dirty="0"/>
+          </a:p>
+        </p:txBody>
+      </p:sp>
+      <p:sp>
+        <p:nvSpPr>
+          <p:cNvPr id="26" name="Text 24"/>
+          <p:cNvSpPr txBox="1"/>
+          <p:nvPr/>
+        </p:nvSpPr>
+        <p:spPr>
+          <a:xfrm>
+            <a:off x="6896100" y="2971800"/>
+            <a:ext cx="190500" cy="160020"/>
           </a:xfrm>
           <a:prstGeom prst="rect">
             <a:avLst/>
@@ -18450,43 +17247,45 @@
           <a:p>
             <a:pPr algn="ctr" indent="0" marL="0">
               <a:lnSpc>
-                <a:spcPts val="975"/>
-              </a:lnSpc>
-              <a:buNone/>
-            </a:pPr>
-            <a:r>
-              <a:rPr lang="en-US" sz="750" dirty="0">
+                <a:spcPts val="1260"/>
+              </a:lnSpc>
+              <a:buNone/>
+            </a:pPr>
+            <a:r>
+              <a:rPr lang="en-US" sz="1050" dirty="0">
                 <a:solidFill>
                   <a:srgbClr val="8A8880"/>
                 </a:solidFill>
-                <a:latin typeface="Consolas" pitchFamily="34" charset="0"/>
-                <a:ea typeface="Consolas" pitchFamily="34" charset="-122"/>
-                <a:cs typeface="Consolas" pitchFamily="34" charset="-120"/>
-              </a:rPr>
-              <a:t>0</a:t>
-            </a:r>
-            <a:endParaRPr lang="en-US" sz="750" dirty="0"/>
-          </a:p>
-        </p:txBody>
-      </p:sp>
-      <p:sp>
-        <p:nvSpPr>
-          <p:cNvPr id="34" name="Shape 32"/>
-          <p:cNvSpPr/>
-          <p:nvPr/>
-        </p:nvSpPr>
-        <p:spPr>
-          <a:xfrm>
-            <a:off x="5238750" y="4552950"/>
-            <a:ext cx="0" cy="47625"/>
-          </a:xfrm>
-          <a:prstGeom prst="line">
-            <a:avLst/>
-          </a:prstGeom>
-          <a:noFill/>
-          <a:ln w="12700">
+                <a:latin typeface="Malgun Gothic" pitchFamily="34" charset="0"/>
+                <a:ea typeface="Malgun Gothic" pitchFamily="34" charset="-122"/>
+                <a:cs typeface="Malgun Gothic" pitchFamily="34" charset="-120"/>
+              </a:rPr>
+              <a:t>→</a:t>
+            </a:r>
+            <a:endParaRPr lang="en-US" sz="1050" dirty="0"/>
+          </a:p>
+        </p:txBody>
+      </p:sp>
+      <p:sp>
+        <p:nvSpPr>
+          <p:cNvPr id="27" name="Shape 25"/>
+          <p:cNvSpPr/>
+          <p:nvPr/>
+        </p:nvSpPr>
+        <p:spPr>
+          <a:xfrm>
+            <a:off x="7086600" y="2838450"/>
+            <a:ext cx="1866900" cy="419100"/>
+          </a:xfrm>
+          <a:prstGeom prst="rect">
+            <a:avLst/>
+          </a:prstGeom>
+          <a:solidFill>
+            <a:srgbClr val="0F1A28"/>
+          </a:solidFill>
+          <a:ln w="17780">
             <a:solidFill>
-              <a:srgbClr val="8A8880"/>
+              <a:srgbClr val="6B5220"/>
             </a:solidFill>
             <a:prstDash val="solid"/>
           </a:ln>
@@ -18494,14 +17293,98 @@
       </p:sp>
       <p:sp>
         <p:nvSpPr>
-          <p:cNvPr id="35" name="Text 33"/>
-          <p:cNvSpPr txBox="1"/>
-          <p:nvPr/>
-        </p:nvSpPr>
-        <p:spPr>
-          <a:xfrm>
-            <a:off x="5010150" y="4629150"/>
-            <a:ext cx="457200" cy="123825"/>
+          <p:cNvPr id="28" name="Text 26"/>
+          <p:cNvSpPr txBox="1"/>
+          <p:nvPr/>
+        </p:nvSpPr>
+        <p:spPr>
+          <a:xfrm>
+            <a:off x="7200900" y="2895600"/>
+            <a:ext cx="1638300" cy="154305"/>
+          </a:xfrm>
+          <a:prstGeom prst="rect">
+            <a:avLst/>
+          </a:prstGeom>
+          <a:noFill/>
+          <a:ln/>
+        </p:spPr>
+        <p:txBody>
+          <a:bodyPr wrap="square" lIns="0" tIns="0" rIns="0" bIns="0" rtlCol="0" anchor="t"/>
+          <a:lstStyle/>
+          <a:p>
+            <a:pPr algn="l" indent="0" marL="0">
+              <a:lnSpc>
+                <a:spcPts val="1215"/>
+              </a:lnSpc>
+              <a:buNone/>
+            </a:pPr>
+            <a:r>
+              <a:rPr lang="en-US" sz="1013" b="1" dirty="0">
+                <a:solidFill>
+                  <a:srgbClr val="EFB13C"/>
+                </a:solidFill>
+                <a:latin typeface="Malgun Gothic" pitchFamily="34" charset="0"/>
+                <a:ea typeface="Malgun Gothic" pitchFamily="34" charset="-122"/>
+                <a:cs typeface="Malgun Gothic" pitchFamily="34" charset="-120"/>
+              </a:rPr>
+              <a:t>61개에 똑같이</a:t>
+            </a:r>
+            <a:endParaRPr lang="en-US" sz="1013" dirty="0"/>
+          </a:p>
+        </p:txBody>
+      </p:sp>
+      <p:sp>
+        <p:nvSpPr>
+          <p:cNvPr id="29" name="Text 27"/>
+          <p:cNvSpPr txBox="1"/>
+          <p:nvPr/>
+        </p:nvSpPr>
+        <p:spPr>
+          <a:xfrm>
+            <a:off x="7200900" y="3076575"/>
+            <a:ext cx="1638300" cy="114300"/>
+          </a:xfrm>
+          <a:prstGeom prst="rect">
+            <a:avLst/>
+          </a:prstGeom>
+          <a:noFill/>
+          <a:ln/>
+        </p:spPr>
+        <p:txBody>
+          <a:bodyPr wrap="square" lIns="0" tIns="0" rIns="0" bIns="0" rtlCol="0" anchor="t"/>
+          <a:lstStyle/>
+          <a:p>
+            <a:pPr algn="l" indent="0" marL="0">
+              <a:lnSpc>
+                <a:spcPts val="900"/>
+              </a:lnSpc>
+              <a:buNone/>
+            </a:pPr>
+            <a:r>
+              <a:rPr lang="en-US" sz="750" dirty="0">
+                <a:solidFill>
+                  <a:srgbClr val="8A8880"/>
+                </a:solidFill>
+                <a:latin typeface="Malgun Gothic" pitchFamily="34" charset="0"/>
+                <a:ea typeface="Malgun Gothic" pitchFamily="34" charset="-122"/>
+                <a:cs typeface="Malgun Gothic" pitchFamily="34" charset="-120"/>
+              </a:rPr>
+              <a:t>엑셀 ④ 일괄 보정</a:t>
+            </a:r>
+            <a:endParaRPr lang="en-US" sz="750" dirty="0"/>
+          </a:p>
+        </p:txBody>
+      </p:sp>
+      <p:sp>
+        <p:nvSpPr>
+          <p:cNvPr id="30" name="Text 28"/>
+          <p:cNvSpPr txBox="1"/>
+          <p:nvPr/>
+        </p:nvSpPr>
+        <p:spPr>
+          <a:xfrm>
+            <a:off x="8953500" y="2971800"/>
+            <a:ext cx="190500" cy="160020"/>
           </a:xfrm>
           <a:prstGeom prst="rect">
             <a:avLst/>
@@ -18515,43 +17398,45 @@
           <a:p>
             <a:pPr algn="ctr" indent="0" marL="0">
               <a:lnSpc>
-                <a:spcPts val="975"/>
-              </a:lnSpc>
-              <a:buNone/>
-            </a:pPr>
-            <a:r>
-              <a:rPr lang="en-US" sz="750" dirty="0">
+                <a:spcPts val="1260"/>
+              </a:lnSpc>
+              <a:buNone/>
+            </a:pPr>
+            <a:r>
+              <a:rPr lang="en-US" sz="1050" dirty="0">
                 <a:solidFill>
                   <a:srgbClr val="8A8880"/>
                 </a:solidFill>
-                <a:latin typeface="Consolas" pitchFamily="34" charset="0"/>
-                <a:ea typeface="Consolas" pitchFamily="34" charset="-122"/>
-                <a:cs typeface="Consolas" pitchFamily="34" charset="-120"/>
-              </a:rPr>
-              <a:t>10</a:t>
-            </a:r>
-            <a:endParaRPr lang="en-US" sz="750" dirty="0"/>
-          </a:p>
-        </p:txBody>
-      </p:sp>
-      <p:sp>
-        <p:nvSpPr>
-          <p:cNvPr id="36" name="Shape 34"/>
-          <p:cNvSpPr/>
-          <p:nvPr/>
-        </p:nvSpPr>
-        <p:spPr>
-          <a:xfrm>
-            <a:off x="7143750" y="4552950"/>
-            <a:ext cx="0" cy="47625"/>
-          </a:xfrm>
-          <a:prstGeom prst="line">
-            <a:avLst/>
-          </a:prstGeom>
-          <a:noFill/>
+                <a:latin typeface="Malgun Gothic" pitchFamily="34" charset="0"/>
+                <a:ea typeface="Malgun Gothic" pitchFamily="34" charset="-122"/>
+                <a:cs typeface="Malgun Gothic" pitchFamily="34" charset="-120"/>
+              </a:rPr>
+              <a:t>→</a:t>
+            </a:r>
+            <a:endParaRPr lang="en-US" sz="1050" dirty="0"/>
+          </a:p>
+        </p:txBody>
+      </p:sp>
+      <p:sp>
+        <p:nvSpPr>
+          <p:cNvPr id="31" name="Shape 29"/>
+          <p:cNvSpPr/>
+          <p:nvPr/>
+        </p:nvSpPr>
+        <p:spPr>
+          <a:xfrm>
+            <a:off x="9144000" y="2838450"/>
+            <a:ext cx="1866900" cy="419100"/>
+          </a:xfrm>
+          <a:prstGeom prst="rect">
+            <a:avLst/>
+          </a:prstGeom>
+          <a:solidFill>
+            <a:srgbClr val="0F1A28"/>
+          </a:solidFill>
           <a:ln w="12700">
             <a:solidFill>
-              <a:srgbClr val="8A8880"/>
+              <a:srgbClr val="22354A"/>
             </a:solidFill>
             <a:prstDash val="solid"/>
           </a:ln>
@@ -18559,1962 +17444,117 @@
       </p:sp>
       <p:sp>
         <p:nvSpPr>
-          <p:cNvPr id="37" name="Text 35"/>
-          <p:cNvSpPr txBox="1"/>
-          <p:nvPr/>
-        </p:nvSpPr>
-        <p:spPr>
-          <a:xfrm>
-            <a:off x="6915150" y="4629150"/>
-            <a:ext cx="457200" cy="123825"/>
-          </a:xfrm>
-          <a:prstGeom prst="rect">
-            <a:avLst/>
-          </a:prstGeom>
-          <a:noFill/>
-          <a:ln/>
-        </p:spPr>
-        <p:txBody>
-          <a:bodyPr wrap="square" lIns="0" tIns="0" rIns="0" bIns="0" rtlCol="0" anchor="t"/>
-          <a:lstStyle/>
-          <a:p>
-            <a:pPr algn="ctr" indent="0" marL="0">
-              <a:lnSpc>
-                <a:spcPts val="975"/>
-              </a:lnSpc>
-              <a:buNone/>
-            </a:pPr>
-            <a:r>
-              <a:rPr lang="en-US" sz="750" dirty="0">
-                <a:solidFill>
-                  <a:srgbClr val="8A8880"/>
-                </a:solidFill>
-                <a:latin typeface="Consolas" pitchFamily="34" charset="0"/>
-                <a:ea typeface="Consolas" pitchFamily="34" charset="-122"/>
-                <a:cs typeface="Consolas" pitchFamily="34" charset="-120"/>
-              </a:rPr>
-              <a:t>20</a:t>
-            </a:r>
-            <a:endParaRPr lang="en-US" sz="750" dirty="0"/>
-          </a:p>
-        </p:txBody>
-      </p:sp>
-      <p:sp>
-        <p:nvSpPr>
-          <p:cNvPr id="38" name="Shape 36"/>
-          <p:cNvSpPr/>
-          <p:nvPr/>
-        </p:nvSpPr>
-        <p:spPr>
-          <a:xfrm>
-            <a:off x="9048750" y="4552950"/>
-            <a:ext cx="0" cy="47625"/>
-          </a:xfrm>
-          <a:prstGeom prst="line">
-            <a:avLst/>
-          </a:prstGeom>
-          <a:noFill/>
-          <a:ln w="12700">
-            <a:solidFill>
-              <a:srgbClr val="8A8880"/>
-            </a:solidFill>
-            <a:prstDash val="solid"/>
-          </a:ln>
-        </p:spPr>
-      </p:sp>
-      <p:sp>
-        <p:nvSpPr>
-          <p:cNvPr id="39" name="Text 37"/>
-          <p:cNvSpPr txBox="1"/>
-          <p:nvPr/>
-        </p:nvSpPr>
-        <p:spPr>
-          <a:xfrm>
-            <a:off x="8820150" y="4629150"/>
-            <a:ext cx="457200" cy="123825"/>
-          </a:xfrm>
-          <a:prstGeom prst="rect">
-            <a:avLst/>
-          </a:prstGeom>
-          <a:noFill/>
-          <a:ln/>
-        </p:spPr>
-        <p:txBody>
-          <a:bodyPr wrap="square" lIns="0" tIns="0" rIns="0" bIns="0" rtlCol="0" anchor="t"/>
-          <a:lstStyle/>
-          <a:p>
-            <a:pPr algn="ctr" indent="0" marL="0">
-              <a:lnSpc>
-                <a:spcPts val="975"/>
-              </a:lnSpc>
-              <a:buNone/>
-            </a:pPr>
-            <a:r>
-              <a:rPr lang="en-US" sz="750" dirty="0">
-                <a:solidFill>
-                  <a:srgbClr val="8A8880"/>
-                </a:solidFill>
-                <a:latin typeface="Consolas" pitchFamily="34" charset="0"/>
-                <a:ea typeface="Consolas" pitchFamily="34" charset="-122"/>
-                <a:cs typeface="Consolas" pitchFamily="34" charset="-120"/>
-              </a:rPr>
-              <a:t>30</a:t>
-            </a:r>
-            <a:endParaRPr lang="en-US" sz="750" dirty="0"/>
-          </a:p>
-        </p:txBody>
-      </p:sp>
-      <p:sp>
-        <p:nvSpPr>
-          <p:cNvPr id="40" name="Shape 38"/>
-          <p:cNvSpPr/>
-          <p:nvPr/>
-        </p:nvSpPr>
-        <p:spPr>
-          <a:xfrm>
-            <a:off x="10953750" y="4552950"/>
-            <a:ext cx="0" cy="47625"/>
-          </a:xfrm>
-          <a:prstGeom prst="line">
-            <a:avLst/>
-          </a:prstGeom>
-          <a:noFill/>
-          <a:ln w="12700">
-            <a:solidFill>
-              <a:srgbClr val="8A8880"/>
-            </a:solidFill>
-            <a:prstDash val="solid"/>
-          </a:ln>
-        </p:spPr>
-      </p:sp>
-      <p:sp>
-        <p:nvSpPr>
-          <p:cNvPr id="41" name="Text 39"/>
-          <p:cNvSpPr txBox="1"/>
-          <p:nvPr/>
-        </p:nvSpPr>
-        <p:spPr>
-          <a:xfrm>
-            <a:off x="10725150" y="4629150"/>
-            <a:ext cx="457200" cy="123825"/>
-          </a:xfrm>
-          <a:prstGeom prst="rect">
-            <a:avLst/>
-          </a:prstGeom>
-          <a:noFill/>
-          <a:ln/>
-        </p:spPr>
-        <p:txBody>
-          <a:bodyPr wrap="square" lIns="0" tIns="0" rIns="0" bIns="0" rtlCol="0" anchor="t"/>
-          <a:lstStyle/>
-          <a:p>
-            <a:pPr algn="ctr" indent="0" marL="0">
-              <a:lnSpc>
-                <a:spcPts val="975"/>
-              </a:lnSpc>
-              <a:buNone/>
-            </a:pPr>
-            <a:r>
-              <a:rPr lang="en-US" sz="750" dirty="0">
-                <a:solidFill>
-                  <a:srgbClr val="8A8880"/>
-                </a:solidFill>
-                <a:latin typeface="Consolas" pitchFamily="34" charset="0"/>
-                <a:ea typeface="Consolas" pitchFamily="34" charset="-122"/>
-                <a:cs typeface="Consolas" pitchFamily="34" charset="-120"/>
-              </a:rPr>
-              <a:t>40</a:t>
-            </a:r>
-            <a:endParaRPr lang="en-US" sz="750" dirty="0"/>
-          </a:p>
-        </p:txBody>
-      </p:sp>
-      <p:sp>
-        <p:nvSpPr>
-          <p:cNvPr id="42" name="Shape 40"/>
-          <p:cNvSpPr/>
-          <p:nvPr/>
-        </p:nvSpPr>
-        <p:spPr>
-          <a:xfrm>
-            <a:off x="1428750" y="3293071"/>
-            <a:ext cx="386715" cy="74148"/>
-          </a:xfrm>
-          <a:prstGeom prst="rect">
-            <a:avLst/>
-          </a:prstGeom>
-          <a:solidFill>
-            <a:srgbClr val="55708A"/>
-          </a:solidFill>
-          <a:ln/>
-        </p:spPr>
-      </p:sp>
-      <p:sp>
-        <p:nvSpPr>
-          <p:cNvPr id="43" name="Shape 41"/>
-          <p:cNvSpPr/>
-          <p:nvPr/>
-        </p:nvSpPr>
-        <p:spPr>
-          <a:xfrm>
-            <a:off x="1809750" y="3280117"/>
-            <a:ext cx="386715" cy="74148"/>
-          </a:xfrm>
-          <a:prstGeom prst="rect">
-            <a:avLst/>
-          </a:prstGeom>
-          <a:solidFill>
-            <a:srgbClr val="55708A"/>
-          </a:solidFill>
-          <a:ln/>
-        </p:spPr>
-      </p:sp>
-      <p:sp>
-        <p:nvSpPr>
-          <p:cNvPr id="44" name="Shape 42"/>
-          <p:cNvSpPr/>
-          <p:nvPr/>
-        </p:nvSpPr>
-        <p:spPr>
-          <a:xfrm>
-            <a:off x="2190750" y="3270563"/>
-            <a:ext cx="386715" cy="74148"/>
-          </a:xfrm>
-          <a:prstGeom prst="rect">
-            <a:avLst/>
-          </a:prstGeom>
-          <a:solidFill>
-            <a:srgbClr val="55708A"/>
-          </a:solidFill>
-          <a:ln/>
-        </p:spPr>
-      </p:sp>
-      <p:sp>
-        <p:nvSpPr>
-          <p:cNvPr id="45" name="Shape 43"/>
-          <p:cNvSpPr/>
-          <p:nvPr/>
-        </p:nvSpPr>
-        <p:spPr>
-          <a:xfrm>
-            <a:off x="2571750" y="3254854"/>
-            <a:ext cx="386715" cy="74148"/>
-          </a:xfrm>
-          <a:prstGeom prst="rect">
-            <a:avLst/>
-          </a:prstGeom>
-          <a:solidFill>
-            <a:srgbClr val="55708A"/>
-          </a:solidFill>
-          <a:ln/>
-        </p:spPr>
-      </p:sp>
-      <p:sp>
-        <p:nvSpPr>
-          <p:cNvPr id="46" name="Shape 44"/>
-          <p:cNvSpPr/>
-          <p:nvPr/>
-        </p:nvSpPr>
-        <p:spPr>
-          <a:xfrm>
-            <a:off x="2952750" y="3236390"/>
-            <a:ext cx="386715" cy="66528"/>
-          </a:xfrm>
-          <a:prstGeom prst="rect">
-            <a:avLst/>
-          </a:prstGeom>
-          <a:solidFill>
-            <a:srgbClr val="55708A"/>
-          </a:solidFill>
-          <a:ln/>
-        </p:spPr>
-      </p:sp>
-      <p:sp>
-        <p:nvSpPr>
-          <p:cNvPr id="47" name="Shape 45"/>
-          <p:cNvSpPr/>
-          <p:nvPr/>
-        </p:nvSpPr>
-        <p:spPr>
-          <a:xfrm>
-            <a:off x="3333750" y="3239965"/>
-            <a:ext cx="386715" cy="58557"/>
-          </a:xfrm>
-          <a:prstGeom prst="rect">
-            <a:avLst/>
-          </a:prstGeom>
-          <a:solidFill>
-            <a:srgbClr val="55708A"/>
-          </a:solidFill>
-          <a:ln/>
-        </p:spPr>
-      </p:sp>
-      <p:sp>
-        <p:nvSpPr>
-          <p:cNvPr id="48" name="Shape 46"/>
-          <p:cNvSpPr/>
-          <p:nvPr/>
-        </p:nvSpPr>
-        <p:spPr>
-          <a:xfrm>
-            <a:off x="3714750" y="3267339"/>
-            <a:ext cx="386715" cy="51757"/>
-          </a:xfrm>
-          <a:prstGeom prst="rect">
-            <a:avLst/>
-          </a:prstGeom>
-          <a:solidFill>
-            <a:srgbClr val="55708A"/>
-          </a:solidFill>
-          <a:ln/>
-        </p:spPr>
-      </p:sp>
-      <p:sp>
-        <p:nvSpPr>
-          <p:cNvPr id="49" name="Shape 47"/>
-          <p:cNvSpPr/>
-          <p:nvPr/>
-        </p:nvSpPr>
-        <p:spPr>
-          <a:xfrm>
-            <a:off x="4095750" y="3301746"/>
-            <a:ext cx="386715" cy="40093"/>
-          </a:xfrm>
-          <a:prstGeom prst="rect">
-            <a:avLst/>
-          </a:prstGeom>
-          <a:solidFill>
-            <a:srgbClr val="55708A"/>
-          </a:solidFill>
-          <a:ln/>
-        </p:spPr>
-      </p:sp>
-      <p:sp>
-        <p:nvSpPr>
-          <p:cNvPr id="50" name="Shape 48"/>
-          <p:cNvSpPr/>
-          <p:nvPr/>
-        </p:nvSpPr>
-        <p:spPr>
-          <a:xfrm>
-            <a:off x="4476750" y="3334981"/>
-            <a:ext cx="386715" cy="32532"/>
-          </a:xfrm>
-          <a:prstGeom prst="rect">
-            <a:avLst/>
-          </a:prstGeom>
-          <a:solidFill>
-            <a:srgbClr val="55708A"/>
-          </a:solidFill>
-          <a:ln/>
-        </p:spPr>
-      </p:sp>
-      <p:sp>
-        <p:nvSpPr>
-          <p:cNvPr id="51" name="Shape 49"/>
-          <p:cNvSpPr/>
-          <p:nvPr/>
-        </p:nvSpPr>
-        <p:spPr>
-          <a:xfrm>
-            <a:off x="4857750" y="3365168"/>
-            <a:ext cx="386715" cy="31008"/>
-          </a:xfrm>
-          <a:prstGeom prst="rect">
-            <a:avLst/>
-          </a:prstGeom>
-          <a:solidFill>
-            <a:srgbClr val="55708A"/>
-          </a:solidFill>
-          <a:ln/>
-        </p:spPr>
-      </p:sp>
-      <p:sp>
-        <p:nvSpPr>
-          <p:cNvPr id="52" name="Shape 50"/>
-          <p:cNvSpPr/>
-          <p:nvPr/>
-        </p:nvSpPr>
-        <p:spPr>
-          <a:xfrm>
-            <a:off x="5238750" y="3393186"/>
-            <a:ext cx="386715" cy="34583"/>
-          </a:xfrm>
-          <a:prstGeom prst="rect">
-            <a:avLst/>
-          </a:prstGeom>
-          <a:solidFill>
-            <a:srgbClr val="55708A"/>
-          </a:solidFill>
-          <a:ln/>
-        </p:spPr>
-      </p:sp>
-      <p:sp>
-        <p:nvSpPr>
-          <p:cNvPr id="53" name="Shape 51"/>
-          <p:cNvSpPr/>
-          <p:nvPr/>
-        </p:nvSpPr>
-        <p:spPr>
-          <a:xfrm>
-            <a:off x="5619750" y="3427007"/>
-            <a:ext cx="386715" cy="39624"/>
-          </a:xfrm>
-          <a:prstGeom prst="rect">
-            <a:avLst/>
-          </a:prstGeom>
-          <a:solidFill>
-            <a:srgbClr val="55708A"/>
-          </a:solidFill>
-          <a:ln/>
-        </p:spPr>
-      </p:sp>
-      <p:sp>
-        <p:nvSpPr>
-          <p:cNvPr id="54" name="Shape 52"/>
-          <p:cNvSpPr/>
-          <p:nvPr/>
-        </p:nvSpPr>
-        <p:spPr>
-          <a:xfrm>
-            <a:off x="6000750" y="3471906"/>
-            <a:ext cx="386715" cy="41324"/>
-          </a:xfrm>
-          <a:prstGeom prst="rect">
-            <a:avLst/>
-          </a:prstGeom>
-          <a:solidFill>
-            <a:srgbClr val="55708A"/>
-          </a:solidFill>
-          <a:ln/>
-        </p:spPr>
-      </p:sp>
-      <p:sp>
-        <p:nvSpPr>
-          <p:cNvPr id="55" name="Shape 53"/>
-          <p:cNvSpPr/>
-          <p:nvPr/>
-        </p:nvSpPr>
-        <p:spPr>
-          <a:xfrm>
-            <a:off x="6381750" y="3527532"/>
-            <a:ext cx="386715" cy="35638"/>
-          </a:xfrm>
-          <a:prstGeom prst="rect">
-            <a:avLst/>
-          </a:prstGeom>
-          <a:solidFill>
-            <a:srgbClr val="55708A"/>
-          </a:solidFill>
-          <a:ln/>
-        </p:spPr>
-      </p:sp>
-      <p:sp>
-        <p:nvSpPr>
-          <p:cNvPr id="56" name="Shape 54"/>
-          <p:cNvSpPr/>
-          <p:nvPr/>
-        </p:nvSpPr>
-        <p:spPr>
-          <a:xfrm>
-            <a:off x="6762750" y="3595702"/>
-            <a:ext cx="386715" cy="20984"/>
-          </a:xfrm>
-          <a:prstGeom prst="rect">
-            <a:avLst/>
-          </a:prstGeom>
-          <a:solidFill>
-            <a:srgbClr val="55708A"/>
-          </a:solidFill>
-          <a:ln/>
-        </p:spPr>
-      </p:sp>
-      <p:sp>
-        <p:nvSpPr>
-          <p:cNvPr id="57" name="Shape 55"/>
-          <p:cNvSpPr/>
-          <p:nvPr/>
-        </p:nvSpPr>
-        <p:spPr>
-          <a:xfrm>
-            <a:off x="7143750" y="3674950"/>
-            <a:ext cx="386715" cy="5715"/>
-          </a:xfrm>
-          <a:prstGeom prst="rect">
-            <a:avLst/>
-          </a:prstGeom>
-          <a:solidFill>
-            <a:srgbClr val="55708A"/>
-          </a:solidFill>
-          <a:ln/>
-        </p:spPr>
-      </p:sp>
-      <p:sp>
-        <p:nvSpPr>
-          <p:cNvPr id="58" name="Shape 56"/>
-          <p:cNvSpPr/>
-          <p:nvPr/>
-        </p:nvSpPr>
-        <p:spPr>
-          <a:xfrm>
-            <a:off x="7524750" y="3738079"/>
-            <a:ext cx="386715" cy="24560"/>
-          </a:xfrm>
-          <a:prstGeom prst="rect">
-            <a:avLst/>
-          </a:prstGeom>
-          <a:solidFill>
-            <a:srgbClr val="7E2333"/>
-          </a:solidFill>
-          <a:ln/>
-        </p:spPr>
-      </p:sp>
-      <p:sp>
-        <p:nvSpPr>
-          <p:cNvPr id="59" name="Shape 57"/>
-          <p:cNvSpPr/>
-          <p:nvPr/>
-        </p:nvSpPr>
-        <p:spPr>
-          <a:xfrm>
-            <a:off x="7905750" y="3797280"/>
-            <a:ext cx="386715" cy="44899"/>
-          </a:xfrm>
-          <a:prstGeom prst="rect">
-            <a:avLst/>
-          </a:prstGeom>
-          <a:solidFill>
-            <a:srgbClr val="7E2333"/>
-          </a:solidFill>
-          <a:ln/>
-        </p:spPr>
-      </p:sp>
-      <p:sp>
-        <p:nvSpPr>
-          <p:cNvPr id="60" name="Shape 58"/>
-          <p:cNvSpPr/>
-          <p:nvPr/>
-        </p:nvSpPr>
-        <p:spPr>
-          <a:xfrm>
-            <a:off x="8286750" y="3860585"/>
-            <a:ext cx="386715" cy="56681"/>
-          </a:xfrm>
-          <a:prstGeom prst="rect">
-            <a:avLst/>
-          </a:prstGeom>
-          <a:solidFill>
-            <a:srgbClr val="7E2333"/>
-          </a:solidFill>
-          <a:ln/>
-        </p:spPr>
-      </p:sp>
-      <p:sp>
-        <p:nvSpPr>
-          <p:cNvPr id="61" name="Shape 59"/>
-          <p:cNvSpPr/>
-          <p:nvPr/>
-        </p:nvSpPr>
-        <p:spPr>
-          <a:xfrm>
-            <a:off x="8667750" y="3937313"/>
-            <a:ext cx="386715" cy="57795"/>
-          </a:xfrm>
-          <a:prstGeom prst="rect">
-            <a:avLst/>
-          </a:prstGeom>
-          <a:solidFill>
-            <a:srgbClr val="7E2333"/>
-          </a:solidFill>
-          <a:ln/>
-        </p:spPr>
-      </p:sp>
-      <p:sp>
-        <p:nvSpPr>
-          <p:cNvPr id="62" name="Shape 60"/>
-          <p:cNvSpPr/>
-          <p:nvPr/>
-        </p:nvSpPr>
-        <p:spPr>
-          <a:xfrm>
-            <a:off x="9048750" y="4021191"/>
-            <a:ext cx="386715" cy="49471"/>
-          </a:xfrm>
-          <a:prstGeom prst="rect">
-            <a:avLst/>
-          </a:prstGeom>
-          <a:solidFill>
-            <a:srgbClr val="7E2333"/>
-          </a:solidFill>
-          <a:ln/>
-        </p:spPr>
-      </p:sp>
-      <p:sp>
-        <p:nvSpPr>
-          <p:cNvPr id="63" name="Shape 61"/>
-          <p:cNvSpPr/>
-          <p:nvPr/>
-        </p:nvSpPr>
-        <p:spPr>
-          <a:xfrm>
-            <a:off x="9429750" y="4112748"/>
-            <a:ext cx="386715" cy="35462"/>
-          </a:xfrm>
-          <a:prstGeom prst="rect">
-            <a:avLst/>
-          </a:prstGeom>
-          <a:solidFill>
-            <a:srgbClr val="7E2333"/>
-          </a:solidFill>
-          <a:ln/>
-        </p:spPr>
-      </p:sp>
-      <p:sp>
-        <p:nvSpPr>
-          <p:cNvPr id="64" name="Shape 62"/>
-          <p:cNvSpPr/>
-          <p:nvPr/>
-        </p:nvSpPr>
-        <p:spPr>
-          <a:xfrm>
-            <a:off x="9810750" y="4210050"/>
-            <a:ext cx="386715" cy="20398"/>
-          </a:xfrm>
-          <a:prstGeom prst="rect">
-            <a:avLst/>
-          </a:prstGeom>
-          <a:solidFill>
-            <a:srgbClr val="7E2333"/>
-          </a:solidFill>
-          <a:ln/>
-        </p:spPr>
-      </p:sp>
-      <p:sp>
-        <p:nvSpPr>
-          <p:cNvPr id="65" name="Shape 63"/>
-          <p:cNvSpPr/>
-          <p:nvPr/>
-        </p:nvSpPr>
-        <p:spPr>
-          <a:xfrm>
-            <a:off x="10191750" y="4310458"/>
-            <a:ext cx="386715" cy="8675"/>
-          </a:xfrm>
-          <a:prstGeom prst="rect">
-            <a:avLst/>
-          </a:prstGeom>
-          <a:solidFill>
-            <a:srgbClr val="7E2333"/>
-          </a:solidFill>
-          <a:ln/>
-        </p:spPr>
-      </p:sp>
-      <p:sp>
-        <p:nvSpPr>
-          <p:cNvPr id="66" name="Shape 64"/>
-          <p:cNvSpPr/>
-          <p:nvPr/>
-        </p:nvSpPr>
-        <p:spPr>
-          <a:xfrm>
-            <a:off x="10572750" y="4416728"/>
-            <a:ext cx="386715" cy="5715"/>
-          </a:xfrm>
-          <a:prstGeom prst="rect">
-            <a:avLst/>
-          </a:prstGeom>
-          <a:solidFill>
-            <a:srgbClr val="7E2333"/>
-          </a:solidFill>
-          <a:ln/>
-        </p:spPr>
-      </p:sp>
-      <p:sp>
-        <p:nvSpPr>
-          <p:cNvPr id="67" name="Shape 65"/>
-          <p:cNvSpPr/>
-          <p:nvPr/>
-        </p:nvSpPr>
-        <p:spPr>
-          <a:xfrm flipV="1">
-            <a:off x="1428750" y="3359951"/>
-            <a:ext cx="381000" cy="14537"/>
-          </a:xfrm>
-          <a:prstGeom prst="line">
-            <a:avLst/>
-          </a:prstGeom>
-          <a:noFill/>
-          <a:ln w="27940">
-            <a:solidFill>
-              <a:srgbClr val="A8BCD1"/>
-            </a:solidFill>
-            <a:prstDash val="dash"/>
-          </a:ln>
-        </p:spPr>
-      </p:sp>
-      <p:sp>
-        <p:nvSpPr>
-          <p:cNvPr id="68" name="Shape 66"/>
-          <p:cNvSpPr/>
-          <p:nvPr/>
-        </p:nvSpPr>
-        <p:spPr>
-          <a:xfrm flipV="1">
-            <a:off x="1809750" y="3348580"/>
-            <a:ext cx="381000" cy="11371"/>
-          </a:xfrm>
-          <a:prstGeom prst="line">
-            <a:avLst/>
-          </a:prstGeom>
-          <a:noFill/>
-          <a:ln w="27940">
-            <a:solidFill>
-              <a:srgbClr val="A8BCD1"/>
-            </a:solidFill>
-            <a:prstDash val="dash"/>
-          </a:ln>
-        </p:spPr>
-      </p:sp>
-      <p:sp>
-        <p:nvSpPr>
-          <p:cNvPr id="69" name="Shape 67"/>
-          <p:cNvSpPr/>
-          <p:nvPr/>
-        </p:nvSpPr>
-        <p:spPr>
-          <a:xfrm flipV="1">
-            <a:off x="2190750" y="3340842"/>
-            <a:ext cx="381000" cy="7737"/>
-          </a:xfrm>
-          <a:prstGeom prst="line">
-            <a:avLst/>
-          </a:prstGeom>
-          <a:noFill/>
-          <a:ln w="27940">
-            <a:solidFill>
-              <a:srgbClr val="A8BCD1"/>
-            </a:solidFill>
-            <a:prstDash val="dash"/>
-          </a:ln>
-        </p:spPr>
-      </p:sp>
-      <p:sp>
-        <p:nvSpPr>
-          <p:cNvPr id="70" name="Shape 68"/>
-          <p:cNvSpPr/>
-          <p:nvPr/>
-        </p:nvSpPr>
-        <p:spPr>
-          <a:xfrm flipV="1">
-            <a:off x="2571750" y="3317162"/>
-            <a:ext cx="381000" cy="23681"/>
-          </a:xfrm>
-          <a:prstGeom prst="line">
-            <a:avLst/>
-          </a:prstGeom>
-          <a:noFill/>
-          <a:ln w="27940">
-            <a:solidFill>
-              <a:srgbClr val="A8BCD1"/>
-            </a:solidFill>
-            <a:prstDash val="dash"/>
-          </a:ln>
-        </p:spPr>
-      </p:sp>
-      <p:sp>
-        <p:nvSpPr>
-          <p:cNvPr id="71" name="Shape 69"/>
-          <p:cNvSpPr/>
-          <p:nvPr/>
-        </p:nvSpPr>
-        <p:spPr>
-          <a:xfrm flipV="1">
-            <a:off x="2952750" y="3288675"/>
-            <a:ext cx="381000" cy="28487"/>
-          </a:xfrm>
-          <a:prstGeom prst="line">
-            <a:avLst/>
-          </a:prstGeom>
-          <a:noFill/>
-          <a:ln w="27940">
-            <a:solidFill>
-              <a:srgbClr val="A8BCD1"/>
-            </a:solidFill>
-            <a:prstDash val="dash"/>
-          </a:ln>
-        </p:spPr>
-      </p:sp>
-      <p:sp>
-        <p:nvSpPr>
-          <p:cNvPr id="72" name="Shape 70"/>
-          <p:cNvSpPr/>
-          <p:nvPr/>
-        </p:nvSpPr>
-        <p:spPr>
-          <a:xfrm>
-            <a:off x="3333750" y="3288675"/>
-            <a:ext cx="381000" cy="19695"/>
-          </a:xfrm>
-          <a:prstGeom prst="line">
-            <a:avLst/>
-          </a:prstGeom>
-          <a:noFill/>
-          <a:ln w="27940">
-            <a:solidFill>
-              <a:srgbClr val="A8BCD1"/>
-            </a:solidFill>
-            <a:prstDash val="dash"/>
-          </a:ln>
-        </p:spPr>
-      </p:sp>
-      <p:sp>
-        <p:nvSpPr>
-          <p:cNvPr id="73" name="Shape 71"/>
-          <p:cNvSpPr/>
-          <p:nvPr/>
-        </p:nvSpPr>
-        <p:spPr>
-          <a:xfrm>
-            <a:off x="3714750" y="3308370"/>
-            <a:ext cx="381000" cy="21453"/>
-          </a:xfrm>
-          <a:prstGeom prst="line">
-            <a:avLst/>
-          </a:prstGeom>
-          <a:noFill/>
-          <a:ln w="27940">
-            <a:solidFill>
-              <a:srgbClr val="A8BCD1"/>
-            </a:solidFill>
-            <a:prstDash val="dash"/>
-          </a:ln>
-        </p:spPr>
-      </p:sp>
-      <p:sp>
-        <p:nvSpPr>
-          <p:cNvPr id="74" name="Shape 72"/>
-          <p:cNvSpPr/>
-          <p:nvPr/>
-        </p:nvSpPr>
-        <p:spPr>
-          <a:xfrm>
-            <a:off x="4095750" y="3329823"/>
-            <a:ext cx="381000" cy="24032"/>
-          </a:xfrm>
-          <a:prstGeom prst="line">
-            <a:avLst/>
-          </a:prstGeom>
-          <a:noFill/>
-          <a:ln w="27940">
-            <a:solidFill>
-              <a:srgbClr val="A8BCD1"/>
-            </a:solidFill>
-            <a:prstDash val="dash"/>
-          </a:ln>
-        </p:spPr>
-      </p:sp>
-      <p:sp>
-        <p:nvSpPr>
-          <p:cNvPr id="75" name="Shape 73"/>
-          <p:cNvSpPr/>
-          <p:nvPr/>
-        </p:nvSpPr>
-        <p:spPr>
-          <a:xfrm>
-            <a:off x="4476750" y="3353855"/>
-            <a:ext cx="381000" cy="27315"/>
-          </a:xfrm>
-          <a:prstGeom prst="line">
-            <a:avLst/>
-          </a:prstGeom>
-          <a:noFill/>
-          <a:ln w="27940">
-            <a:solidFill>
-              <a:srgbClr val="A8BCD1"/>
-            </a:solidFill>
-            <a:prstDash val="dash"/>
-          </a:ln>
-        </p:spPr>
-      </p:sp>
-      <p:sp>
-        <p:nvSpPr>
-          <p:cNvPr id="76" name="Shape 74"/>
-          <p:cNvSpPr/>
-          <p:nvPr/>
-        </p:nvSpPr>
-        <p:spPr>
-          <a:xfrm>
-            <a:off x="4857750" y="3381170"/>
-            <a:ext cx="381000" cy="30011"/>
-          </a:xfrm>
-          <a:prstGeom prst="line">
-            <a:avLst/>
-          </a:prstGeom>
-          <a:noFill/>
-          <a:ln w="27940">
-            <a:solidFill>
-              <a:srgbClr val="A8BCD1"/>
-            </a:solidFill>
-            <a:prstDash val="dash"/>
-          </a:ln>
-        </p:spPr>
-      </p:sp>
-      <p:sp>
-        <p:nvSpPr>
-          <p:cNvPr id="77" name="Shape 75"/>
-          <p:cNvSpPr/>
-          <p:nvPr/>
-        </p:nvSpPr>
-        <p:spPr>
-          <a:xfrm>
-            <a:off x="5238750" y="3411181"/>
-            <a:ext cx="381000" cy="33176"/>
-          </a:xfrm>
-          <a:prstGeom prst="line">
-            <a:avLst/>
-          </a:prstGeom>
-          <a:noFill/>
-          <a:ln w="27940">
-            <a:solidFill>
-              <a:srgbClr val="A8BCD1"/>
-            </a:solidFill>
-            <a:prstDash val="dash"/>
-          </a:ln>
-        </p:spPr>
-      </p:sp>
-      <p:sp>
-        <p:nvSpPr>
-          <p:cNvPr id="78" name="Shape 76"/>
-          <p:cNvSpPr/>
-          <p:nvPr/>
-        </p:nvSpPr>
-        <p:spPr>
-          <a:xfrm>
-            <a:off x="5619750" y="3444357"/>
-            <a:ext cx="381000" cy="44548"/>
-          </a:xfrm>
-          <a:prstGeom prst="line">
-            <a:avLst/>
-          </a:prstGeom>
-          <a:noFill/>
-          <a:ln w="27940">
-            <a:solidFill>
-              <a:srgbClr val="A8BCD1"/>
-            </a:solidFill>
-            <a:prstDash val="dash"/>
-          </a:ln>
-        </p:spPr>
-      </p:sp>
-      <p:sp>
-        <p:nvSpPr>
-          <p:cNvPr id="79" name="Shape 77"/>
-          <p:cNvSpPr/>
-          <p:nvPr/>
-        </p:nvSpPr>
-        <p:spPr>
-          <a:xfrm>
-            <a:off x="6000750" y="3488905"/>
-            <a:ext cx="381000" cy="48651"/>
-          </a:xfrm>
-          <a:prstGeom prst="line">
-            <a:avLst/>
-          </a:prstGeom>
-          <a:noFill/>
-          <a:ln w="27940">
-            <a:solidFill>
-              <a:srgbClr val="A8BCD1"/>
-            </a:solidFill>
-            <a:prstDash val="dash"/>
-          </a:ln>
-        </p:spPr>
-      </p:sp>
-      <p:sp>
-        <p:nvSpPr>
-          <p:cNvPr id="80" name="Shape 78"/>
-          <p:cNvSpPr/>
-          <p:nvPr/>
-        </p:nvSpPr>
-        <p:spPr>
-          <a:xfrm>
-            <a:off x="6381750" y="3537556"/>
-            <a:ext cx="381000" cy="51230"/>
-          </a:xfrm>
-          <a:prstGeom prst="line">
-            <a:avLst/>
-          </a:prstGeom>
-          <a:noFill/>
-          <a:ln w="27940">
-            <a:solidFill>
-              <a:srgbClr val="A8BCD1"/>
-            </a:solidFill>
-            <a:prstDash val="dash"/>
-          </a:ln>
-        </p:spPr>
-      </p:sp>
-      <p:sp>
-        <p:nvSpPr>
-          <p:cNvPr id="81" name="Shape 79"/>
-          <p:cNvSpPr/>
-          <p:nvPr/>
-        </p:nvSpPr>
-        <p:spPr>
-          <a:xfrm>
-            <a:off x="6762750" y="3588786"/>
-            <a:ext cx="381000" cy="55802"/>
-          </a:xfrm>
-          <a:prstGeom prst="line">
-            <a:avLst/>
-          </a:prstGeom>
-          <a:noFill/>
-          <a:ln w="27940">
-            <a:solidFill>
-              <a:srgbClr val="A8BCD1"/>
-            </a:solidFill>
-            <a:prstDash val="dash"/>
-          </a:ln>
-        </p:spPr>
-      </p:sp>
-      <p:sp>
-        <p:nvSpPr>
-          <p:cNvPr id="82" name="Shape 80"/>
-          <p:cNvSpPr/>
-          <p:nvPr/>
-        </p:nvSpPr>
-        <p:spPr>
-          <a:xfrm>
-            <a:off x="7143750" y="3644587"/>
-            <a:ext cx="381000" cy="60726"/>
-          </a:xfrm>
-          <a:prstGeom prst="line">
-            <a:avLst/>
-          </a:prstGeom>
-          <a:noFill/>
-          <a:ln w="27940">
-            <a:solidFill>
-              <a:srgbClr val="A8BCD1"/>
-            </a:solidFill>
-            <a:prstDash val="dash"/>
-          </a:ln>
-        </p:spPr>
-      </p:sp>
-      <p:sp>
-        <p:nvSpPr>
-          <p:cNvPr id="83" name="Shape 81"/>
-          <p:cNvSpPr/>
-          <p:nvPr/>
-        </p:nvSpPr>
-        <p:spPr>
-          <a:xfrm>
-            <a:off x="7524750" y="3705313"/>
-            <a:ext cx="381000" cy="65532"/>
-          </a:xfrm>
-          <a:prstGeom prst="line">
-            <a:avLst/>
-          </a:prstGeom>
-          <a:noFill/>
-          <a:ln w="27940">
-            <a:solidFill>
-              <a:srgbClr val="A8BCD1"/>
-            </a:solidFill>
-            <a:prstDash val="dash"/>
-          </a:ln>
-        </p:spPr>
-      </p:sp>
-      <p:sp>
-        <p:nvSpPr>
-          <p:cNvPr id="84" name="Shape 82"/>
-          <p:cNvSpPr/>
-          <p:nvPr/>
-        </p:nvSpPr>
-        <p:spPr>
-          <a:xfrm>
-            <a:off x="7905750" y="3770845"/>
-            <a:ext cx="381000" cy="52871"/>
-          </a:xfrm>
-          <a:prstGeom prst="line">
-            <a:avLst/>
-          </a:prstGeom>
-          <a:noFill/>
-          <a:ln w="27940">
-            <a:solidFill>
-              <a:srgbClr val="A8BCD1"/>
-            </a:solidFill>
-            <a:prstDash val="dash"/>
-          </a:ln>
-        </p:spPr>
-      </p:sp>
-      <p:sp>
-        <p:nvSpPr>
-          <p:cNvPr id="85" name="Shape 83"/>
-          <p:cNvSpPr/>
-          <p:nvPr/>
-        </p:nvSpPr>
-        <p:spPr>
-          <a:xfrm>
-            <a:off x="8286750" y="3823716"/>
-            <a:ext cx="381000" cy="73738"/>
-          </a:xfrm>
-          <a:prstGeom prst="line">
-            <a:avLst/>
-          </a:prstGeom>
-          <a:noFill/>
-          <a:ln w="27940">
-            <a:solidFill>
-              <a:srgbClr val="A8BCD1"/>
-            </a:solidFill>
-            <a:prstDash val="dash"/>
-          </a:ln>
-        </p:spPr>
-      </p:sp>
-      <p:sp>
-        <p:nvSpPr>
-          <p:cNvPr id="86" name="Shape 84"/>
-          <p:cNvSpPr/>
-          <p:nvPr/>
-        </p:nvSpPr>
-        <p:spPr>
-          <a:xfrm>
-            <a:off x="8667750" y="3897454"/>
-            <a:ext cx="381000" cy="79717"/>
-          </a:xfrm>
-          <a:prstGeom prst="line">
-            <a:avLst/>
-          </a:prstGeom>
-          <a:noFill/>
-          <a:ln w="27940">
-            <a:solidFill>
-              <a:srgbClr val="A8BCD1"/>
-            </a:solidFill>
-            <a:prstDash val="dash"/>
-          </a:ln>
-        </p:spPr>
-      </p:sp>
-      <p:sp>
-        <p:nvSpPr>
-          <p:cNvPr id="87" name="Shape 85"/>
-          <p:cNvSpPr/>
-          <p:nvPr/>
-        </p:nvSpPr>
-        <p:spPr>
-          <a:xfrm>
-            <a:off x="9048750" y="3977171"/>
-            <a:ext cx="381000" cy="88040"/>
-          </a:xfrm>
-          <a:prstGeom prst="line">
-            <a:avLst/>
-          </a:prstGeom>
-          <a:noFill/>
-          <a:ln w="27940">
-            <a:solidFill>
-              <a:srgbClr val="A8BCD1"/>
-            </a:solidFill>
-            <a:prstDash val="dash"/>
-          </a:ln>
-        </p:spPr>
-      </p:sp>
-      <p:sp>
-        <p:nvSpPr>
-          <p:cNvPr id="88" name="Shape 86"/>
-          <p:cNvSpPr/>
-          <p:nvPr/>
-        </p:nvSpPr>
-        <p:spPr>
-          <a:xfrm>
-            <a:off x="9429750" y="4065211"/>
-            <a:ext cx="381000" cy="95074"/>
-          </a:xfrm>
-          <a:prstGeom prst="line">
-            <a:avLst/>
-          </a:prstGeom>
-          <a:noFill/>
-          <a:ln w="27940">
-            <a:solidFill>
-              <a:srgbClr val="A8BCD1"/>
-            </a:solidFill>
-            <a:prstDash val="dash"/>
-          </a:ln>
-        </p:spPr>
-      </p:sp>
-      <p:sp>
-        <p:nvSpPr>
-          <p:cNvPr id="89" name="Shape 87"/>
-          <p:cNvSpPr/>
-          <p:nvPr/>
-        </p:nvSpPr>
-        <p:spPr>
-          <a:xfrm>
-            <a:off x="9810750" y="4160286"/>
-            <a:ext cx="381000" cy="99529"/>
-          </a:xfrm>
-          <a:prstGeom prst="line">
-            <a:avLst/>
-          </a:prstGeom>
-          <a:noFill/>
-          <a:ln w="27940">
-            <a:solidFill>
-              <a:srgbClr val="A8BCD1"/>
-            </a:solidFill>
-            <a:prstDash val="dash"/>
-          </a:ln>
-        </p:spPr>
-      </p:sp>
-      <p:sp>
-        <p:nvSpPr>
-          <p:cNvPr id="90" name="Shape 88"/>
-          <p:cNvSpPr/>
-          <p:nvPr/>
-        </p:nvSpPr>
-        <p:spPr>
-          <a:xfrm>
-            <a:off x="10191750" y="4259814"/>
-            <a:ext cx="381000" cy="101287"/>
-          </a:xfrm>
-          <a:prstGeom prst="line">
-            <a:avLst/>
-          </a:prstGeom>
-          <a:noFill/>
-          <a:ln w="27940">
-            <a:solidFill>
-              <a:srgbClr val="A8BCD1"/>
-            </a:solidFill>
-            <a:prstDash val="dash"/>
-          </a:ln>
-        </p:spPr>
-      </p:sp>
-      <p:sp>
-        <p:nvSpPr>
-          <p:cNvPr id="91" name="Shape 89"/>
-          <p:cNvSpPr/>
-          <p:nvPr/>
-        </p:nvSpPr>
-        <p:spPr>
-          <a:xfrm>
-            <a:off x="10572750" y="4361102"/>
-            <a:ext cx="381000" cy="111252"/>
-          </a:xfrm>
-          <a:prstGeom prst="line">
-            <a:avLst/>
-          </a:prstGeom>
-          <a:noFill/>
-          <a:ln w="27940">
-            <a:solidFill>
-              <a:srgbClr val="A8BCD1"/>
-            </a:solidFill>
-            <a:prstDash val="dash"/>
-          </a:ln>
-        </p:spPr>
-      </p:sp>
-      <p:sp>
-        <p:nvSpPr>
-          <p:cNvPr id="92" name="Shape 90"/>
-          <p:cNvSpPr/>
-          <p:nvPr/>
-        </p:nvSpPr>
-        <p:spPr>
-          <a:xfrm flipV="1">
-            <a:off x="1428750" y="3285803"/>
-            <a:ext cx="381000" cy="14537"/>
-          </a:xfrm>
-          <a:prstGeom prst="line">
-            <a:avLst/>
-          </a:prstGeom>
-          <a:noFill/>
-          <a:ln w="33020">
-            <a:solidFill>
-              <a:srgbClr val="EFB13C"/>
-            </a:solidFill>
-            <a:prstDash val="solid"/>
-          </a:ln>
-        </p:spPr>
-      </p:sp>
-      <p:sp>
-        <p:nvSpPr>
-          <p:cNvPr id="93" name="Shape 91"/>
-          <p:cNvSpPr/>
-          <p:nvPr/>
-        </p:nvSpPr>
-        <p:spPr>
-          <a:xfrm flipV="1">
-            <a:off x="1809750" y="3274431"/>
-            <a:ext cx="381000" cy="11371"/>
-          </a:xfrm>
-          <a:prstGeom prst="line">
-            <a:avLst/>
-          </a:prstGeom>
-          <a:noFill/>
-          <a:ln w="33020">
-            <a:solidFill>
-              <a:srgbClr val="EFB13C"/>
-            </a:solidFill>
-            <a:prstDash val="solid"/>
-          </a:ln>
-        </p:spPr>
-      </p:sp>
-      <p:sp>
-        <p:nvSpPr>
-          <p:cNvPr id="94" name="Shape 92"/>
-          <p:cNvSpPr/>
-          <p:nvPr/>
-        </p:nvSpPr>
-        <p:spPr>
-          <a:xfrm flipV="1">
-            <a:off x="2190750" y="3266694"/>
-            <a:ext cx="381000" cy="7737"/>
-          </a:xfrm>
-          <a:prstGeom prst="line">
-            <a:avLst/>
-          </a:prstGeom>
-          <a:noFill/>
-          <a:ln w="33020">
-            <a:solidFill>
-              <a:srgbClr val="EFB13C"/>
-            </a:solidFill>
-            <a:prstDash val="solid"/>
-          </a:ln>
-        </p:spPr>
-      </p:sp>
-      <p:sp>
-        <p:nvSpPr>
-          <p:cNvPr id="95" name="Shape 93"/>
-          <p:cNvSpPr/>
-          <p:nvPr/>
-        </p:nvSpPr>
-        <p:spPr>
-          <a:xfrm flipV="1">
-            <a:off x="2571750" y="3243013"/>
-            <a:ext cx="381000" cy="23681"/>
-          </a:xfrm>
-          <a:prstGeom prst="line">
-            <a:avLst/>
-          </a:prstGeom>
-          <a:noFill/>
-          <a:ln w="33020">
-            <a:solidFill>
-              <a:srgbClr val="EFB13C"/>
-            </a:solidFill>
-            <a:prstDash val="solid"/>
-          </a:ln>
-        </p:spPr>
-      </p:sp>
-      <p:sp>
-        <p:nvSpPr>
-          <p:cNvPr id="96" name="Shape 94"/>
-          <p:cNvSpPr/>
-          <p:nvPr/>
-        </p:nvSpPr>
-        <p:spPr>
-          <a:xfrm flipV="1">
-            <a:off x="2952750" y="3229766"/>
-            <a:ext cx="381000" cy="13247"/>
-          </a:xfrm>
-          <a:prstGeom prst="line">
-            <a:avLst/>
-          </a:prstGeom>
-          <a:noFill/>
-          <a:ln w="33020">
-            <a:solidFill>
-              <a:srgbClr val="EFB13C"/>
-            </a:solidFill>
-            <a:prstDash val="solid"/>
-          </a:ln>
-        </p:spPr>
-      </p:sp>
-      <p:sp>
-        <p:nvSpPr>
-          <p:cNvPr id="97" name="Shape 95"/>
-          <p:cNvSpPr/>
-          <p:nvPr/>
-        </p:nvSpPr>
-        <p:spPr>
-          <a:xfrm>
-            <a:off x="3333750" y="3229766"/>
-            <a:ext cx="381000" cy="20398"/>
-          </a:xfrm>
-          <a:prstGeom prst="line">
-            <a:avLst/>
-          </a:prstGeom>
-          <a:noFill/>
-          <a:ln w="33020">
-            <a:solidFill>
-              <a:srgbClr val="EFB13C"/>
-            </a:solidFill>
-            <a:prstDash val="solid"/>
-          </a:ln>
-        </p:spPr>
-      </p:sp>
-      <p:sp>
-        <p:nvSpPr>
-          <p:cNvPr id="98" name="Shape 96"/>
-          <p:cNvSpPr/>
-          <p:nvPr/>
-        </p:nvSpPr>
-        <p:spPr>
-          <a:xfrm>
-            <a:off x="3714750" y="3250164"/>
-            <a:ext cx="381000" cy="34349"/>
-          </a:xfrm>
-          <a:prstGeom prst="line">
-            <a:avLst/>
-          </a:prstGeom>
-          <a:noFill/>
-          <a:ln w="33020">
-            <a:solidFill>
-              <a:srgbClr val="EFB13C"/>
-            </a:solidFill>
-            <a:prstDash val="solid"/>
-          </a:ln>
-        </p:spPr>
-      </p:sp>
-      <p:sp>
-        <p:nvSpPr>
-          <p:cNvPr id="99" name="Shape 97"/>
-          <p:cNvSpPr/>
-          <p:nvPr/>
-        </p:nvSpPr>
-        <p:spPr>
-          <a:xfrm>
-            <a:off x="4095750" y="3284513"/>
-            <a:ext cx="381000" cy="34466"/>
-          </a:xfrm>
-          <a:prstGeom prst="line">
-            <a:avLst/>
-          </a:prstGeom>
-          <a:noFill/>
-          <a:ln w="33020">
-            <a:solidFill>
-              <a:srgbClr val="EFB13C"/>
-            </a:solidFill>
-            <a:prstDash val="solid"/>
-          </a:ln>
-        </p:spPr>
-      </p:sp>
-      <p:sp>
-        <p:nvSpPr>
-          <p:cNvPr id="100" name="Shape 98"/>
-          <p:cNvSpPr/>
-          <p:nvPr/>
-        </p:nvSpPr>
-        <p:spPr>
-          <a:xfrm>
-            <a:off x="4476750" y="3318979"/>
-            <a:ext cx="381000" cy="32004"/>
-          </a:xfrm>
-          <a:prstGeom prst="line">
-            <a:avLst/>
-          </a:prstGeom>
-          <a:noFill/>
-          <a:ln w="33020">
-            <a:solidFill>
-              <a:srgbClr val="EFB13C"/>
-            </a:solidFill>
-            <a:prstDash val="solid"/>
-          </a:ln>
-        </p:spPr>
-      </p:sp>
-      <p:sp>
-        <p:nvSpPr>
-          <p:cNvPr id="101" name="Shape 99"/>
-          <p:cNvSpPr/>
-          <p:nvPr/>
-        </p:nvSpPr>
-        <p:spPr>
-          <a:xfrm>
-            <a:off x="4857750" y="3350983"/>
-            <a:ext cx="381000" cy="28370"/>
-          </a:xfrm>
-          <a:prstGeom prst="line">
-            <a:avLst/>
-          </a:prstGeom>
-          <a:noFill/>
-          <a:ln w="33020">
-            <a:solidFill>
-              <a:srgbClr val="EFB13C"/>
-            </a:solidFill>
-            <a:prstDash val="solid"/>
-          </a:ln>
-        </p:spPr>
-      </p:sp>
-      <p:sp>
-        <p:nvSpPr>
-          <p:cNvPr id="102" name="Shape 100"/>
-          <p:cNvSpPr/>
-          <p:nvPr/>
-        </p:nvSpPr>
-        <p:spPr>
-          <a:xfrm>
-            <a:off x="5238750" y="3379353"/>
-            <a:ext cx="381000" cy="27666"/>
-          </a:xfrm>
-          <a:prstGeom prst="line">
-            <a:avLst/>
-          </a:prstGeom>
-          <a:noFill/>
-          <a:ln w="33020">
-            <a:solidFill>
-              <a:srgbClr val="EFB13C"/>
-            </a:solidFill>
-            <a:prstDash val="solid"/>
-          </a:ln>
-        </p:spPr>
-      </p:sp>
-      <p:sp>
-        <p:nvSpPr>
-          <p:cNvPr id="103" name="Shape 101"/>
-          <p:cNvSpPr/>
-          <p:nvPr/>
-        </p:nvSpPr>
-        <p:spPr>
-          <a:xfrm>
-            <a:off x="5619750" y="3407019"/>
-            <a:ext cx="381000" cy="39976"/>
-          </a:xfrm>
-          <a:prstGeom prst="line">
-            <a:avLst/>
-          </a:prstGeom>
-          <a:noFill/>
-          <a:ln w="33020">
-            <a:solidFill>
-              <a:srgbClr val="EFB13C"/>
-            </a:solidFill>
-            <a:prstDash val="solid"/>
-          </a:ln>
-        </p:spPr>
-      </p:sp>
-      <p:sp>
-        <p:nvSpPr>
-          <p:cNvPr id="104" name="Shape 102"/>
-          <p:cNvSpPr/>
-          <p:nvPr/>
-        </p:nvSpPr>
-        <p:spPr>
-          <a:xfrm>
-            <a:off x="6000750" y="3446995"/>
-            <a:ext cx="381000" cy="49823"/>
-          </a:xfrm>
-          <a:prstGeom prst="line">
-            <a:avLst/>
-          </a:prstGeom>
-          <a:noFill/>
-          <a:ln w="33020">
-            <a:solidFill>
-              <a:srgbClr val="EFB13C"/>
-            </a:solidFill>
-            <a:prstDash val="solid"/>
-          </a:ln>
-        </p:spPr>
-      </p:sp>
-      <p:sp>
-        <p:nvSpPr>
-          <p:cNvPr id="105" name="Shape 103"/>
-          <p:cNvSpPr/>
-          <p:nvPr/>
-        </p:nvSpPr>
-        <p:spPr>
-          <a:xfrm>
-            <a:off x="6381750" y="3496818"/>
-            <a:ext cx="381000" cy="61429"/>
-          </a:xfrm>
-          <a:prstGeom prst="line">
-            <a:avLst/>
-          </a:prstGeom>
-          <a:noFill/>
-          <a:ln w="33020">
-            <a:solidFill>
-              <a:srgbClr val="EFB13C"/>
-            </a:solidFill>
-            <a:prstDash val="solid"/>
-          </a:ln>
-        </p:spPr>
-      </p:sp>
-      <p:sp>
-        <p:nvSpPr>
-          <p:cNvPr id="106" name="Shape 104"/>
-          <p:cNvSpPr/>
-          <p:nvPr/>
-        </p:nvSpPr>
-        <p:spPr>
-          <a:xfrm>
-            <a:off x="6762750" y="3558247"/>
-            <a:ext cx="381000" cy="74910"/>
-          </a:xfrm>
-          <a:prstGeom prst="line">
-            <a:avLst/>
-          </a:prstGeom>
-          <a:noFill/>
-          <a:ln w="33020">
-            <a:solidFill>
-              <a:srgbClr val="EFB13C"/>
-            </a:solidFill>
-            <a:prstDash val="solid"/>
-          </a:ln>
-        </p:spPr>
-      </p:sp>
-      <p:sp>
-        <p:nvSpPr>
-          <p:cNvPr id="107" name="Shape 105"/>
-          <p:cNvSpPr/>
-          <p:nvPr/>
-        </p:nvSpPr>
-        <p:spPr>
-          <a:xfrm>
-            <a:off x="7143750" y="3633157"/>
-            <a:ext cx="381000" cy="84875"/>
-          </a:xfrm>
-          <a:prstGeom prst="line">
-            <a:avLst/>
-          </a:prstGeom>
-          <a:noFill/>
-          <a:ln w="33020">
-            <a:solidFill>
-              <a:srgbClr val="EFB13C"/>
-            </a:solidFill>
-            <a:prstDash val="solid"/>
-          </a:ln>
-        </p:spPr>
-      </p:sp>
-      <p:sp>
-        <p:nvSpPr>
-          <p:cNvPr id="108" name="Shape 106"/>
-          <p:cNvSpPr/>
-          <p:nvPr/>
-        </p:nvSpPr>
-        <p:spPr>
-          <a:xfrm>
-            <a:off x="7524750" y="3718032"/>
-            <a:ext cx="381000" cy="89213"/>
-          </a:xfrm>
-          <a:prstGeom prst="line">
-            <a:avLst/>
-          </a:prstGeom>
-          <a:noFill/>
-          <a:ln w="33020">
-            <a:solidFill>
-              <a:srgbClr val="EFB13C"/>
-            </a:solidFill>
-            <a:prstDash val="solid"/>
-          </a:ln>
-        </p:spPr>
-      </p:sp>
-      <p:sp>
-        <p:nvSpPr>
-          <p:cNvPr id="109" name="Shape 107"/>
-          <p:cNvSpPr/>
-          <p:nvPr/>
-        </p:nvSpPr>
-        <p:spPr>
-          <a:xfrm>
-            <a:off x="7905750" y="3807245"/>
-            <a:ext cx="381000" cy="69870"/>
-          </a:xfrm>
-          <a:prstGeom prst="line">
-            <a:avLst/>
-          </a:prstGeom>
-          <a:noFill/>
-          <a:ln w="33020">
-            <a:solidFill>
-              <a:srgbClr val="EFB13C"/>
-            </a:solidFill>
-            <a:prstDash val="solid"/>
-          </a:ln>
-        </p:spPr>
-      </p:sp>
-      <p:sp>
-        <p:nvSpPr>
-          <p:cNvPr id="110" name="Shape 108"/>
-          <p:cNvSpPr/>
-          <p:nvPr/>
-        </p:nvSpPr>
-        <p:spPr>
-          <a:xfrm>
-            <a:off x="8286750" y="3877115"/>
-            <a:ext cx="381000" cy="80303"/>
-          </a:xfrm>
-          <a:prstGeom prst="line">
-            <a:avLst/>
-          </a:prstGeom>
-          <a:noFill/>
-          <a:ln w="33020">
-            <a:solidFill>
-              <a:srgbClr val="EFB13C"/>
-            </a:solidFill>
-            <a:prstDash val="solid"/>
-          </a:ln>
-        </p:spPr>
-      </p:sp>
-      <p:sp>
-        <p:nvSpPr>
-          <p:cNvPr id="111" name="Shape 109"/>
-          <p:cNvSpPr/>
-          <p:nvPr/>
-        </p:nvSpPr>
-        <p:spPr>
-          <a:xfrm>
-            <a:off x="8667750" y="3957418"/>
-            <a:ext cx="381000" cy="75379"/>
-          </a:xfrm>
-          <a:prstGeom prst="line">
-            <a:avLst/>
-          </a:prstGeom>
-          <a:noFill/>
-          <a:ln w="33020">
-            <a:solidFill>
-              <a:srgbClr val="EFB13C"/>
-            </a:solidFill>
-            <a:prstDash val="solid"/>
-          </a:ln>
-        </p:spPr>
-      </p:sp>
-      <p:sp>
-        <p:nvSpPr>
-          <p:cNvPr id="112" name="Shape 110"/>
-          <p:cNvSpPr/>
-          <p:nvPr/>
-        </p:nvSpPr>
-        <p:spPr>
-          <a:xfrm>
-            <a:off x="9048750" y="4032797"/>
-            <a:ext cx="381000" cy="75731"/>
-          </a:xfrm>
-          <a:prstGeom prst="line">
-            <a:avLst/>
-          </a:prstGeom>
-          <a:noFill/>
-          <a:ln w="33020">
-            <a:solidFill>
-              <a:srgbClr val="EFB13C"/>
-            </a:solidFill>
-            <a:prstDash val="solid"/>
-          </a:ln>
-        </p:spPr>
-      </p:sp>
-      <p:sp>
-        <p:nvSpPr>
-          <p:cNvPr id="113" name="Shape 111"/>
-          <p:cNvSpPr/>
-          <p:nvPr/>
-        </p:nvSpPr>
-        <p:spPr>
-          <a:xfrm>
-            <a:off x="9429750" y="4108528"/>
-            <a:ext cx="381000" cy="79365"/>
-          </a:xfrm>
-          <a:prstGeom prst="line">
-            <a:avLst/>
-          </a:prstGeom>
-          <a:noFill/>
-          <a:ln w="33020">
-            <a:solidFill>
-              <a:srgbClr val="EFB13C"/>
-            </a:solidFill>
-            <a:prstDash val="solid"/>
-          </a:ln>
-        </p:spPr>
-      </p:sp>
-      <p:sp>
-        <p:nvSpPr>
-          <p:cNvPr id="114" name="Shape 112"/>
-          <p:cNvSpPr/>
-          <p:nvPr/>
-        </p:nvSpPr>
-        <p:spPr>
-          <a:xfrm>
-            <a:off x="9810750" y="4187893"/>
-            <a:ext cx="381000" cy="85110"/>
-          </a:xfrm>
-          <a:prstGeom prst="line">
-            <a:avLst/>
-          </a:prstGeom>
-          <a:noFill/>
-          <a:ln w="33020">
-            <a:solidFill>
-              <a:srgbClr val="EFB13C"/>
-            </a:solidFill>
-            <a:prstDash val="solid"/>
-          </a:ln>
-        </p:spPr>
-      </p:sp>
-      <p:sp>
-        <p:nvSpPr>
-          <p:cNvPr id="115" name="Shape 113"/>
-          <p:cNvSpPr/>
-          <p:nvPr/>
-        </p:nvSpPr>
-        <p:spPr>
-          <a:xfrm>
-            <a:off x="10191750" y="4273003"/>
-            <a:ext cx="381000" cy="92261"/>
-          </a:xfrm>
-          <a:prstGeom prst="line">
-            <a:avLst/>
-          </a:prstGeom>
-          <a:noFill/>
-          <a:ln w="33020">
-            <a:solidFill>
-              <a:srgbClr val="EFB13C"/>
-            </a:solidFill>
-            <a:prstDash val="solid"/>
-          </a:ln>
-        </p:spPr>
-      </p:sp>
-      <p:sp>
-        <p:nvSpPr>
-          <p:cNvPr id="116" name="Shape 114"/>
-          <p:cNvSpPr/>
-          <p:nvPr/>
-        </p:nvSpPr>
-        <p:spPr>
-          <a:xfrm>
-            <a:off x="10572750" y="4365264"/>
-            <a:ext cx="381000" cy="111135"/>
-          </a:xfrm>
-          <a:prstGeom prst="line">
-            <a:avLst/>
-          </a:prstGeom>
-          <a:noFill/>
-          <a:ln w="33020">
-            <a:solidFill>
-              <a:srgbClr val="EFB13C"/>
-            </a:solidFill>
-            <a:prstDash val="solid"/>
-          </a:ln>
-        </p:spPr>
-      </p:sp>
-      <p:sp>
-        <p:nvSpPr>
-          <p:cNvPr id="117" name="Text 115"/>
-          <p:cNvSpPr txBox="1"/>
-          <p:nvPr/>
-        </p:nvSpPr>
-        <p:spPr>
-          <a:xfrm>
-            <a:off x="3467100" y="3183021"/>
-            <a:ext cx="2476500" cy="142875"/>
-          </a:xfrm>
-          <a:prstGeom prst="rect">
-            <a:avLst/>
-          </a:prstGeom>
-          <a:noFill/>
-          <a:ln/>
-        </p:spPr>
-        <p:txBody>
-          <a:bodyPr wrap="square" lIns="0" tIns="0" rIns="0" bIns="0" rtlCol="0" anchor="t"/>
-          <a:lstStyle/>
-          <a:p>
-            <a:pPr algn="l" indent="0" marL="0">
-              <a:lnSpc>
-                <a:spcPts val="1125"/>
-              </a:lnSpc>
-              <a:buNone/>
-            </a:pPr>
-            <a:r>
-              <a:rPr lang="en-US" sz="938" b="1" dirty="0">
-                <a:solidFill>
-                  <a:srgbClr val="A8BCD1"/>
+          <p:cNvPr id="32" name="Text 30"/>
+          <p:cNvSpPr txBox="1"/>
+          <p:nvPr/>
+        </p:nvSpPr>
+        <p:spPr>
+          <a:xfrm>
+            <a:off x="9258300" y="2895600"/>
+            <a:ext cx="1638300" cy="154305"/>
+          </a:xfrm>
+          <a:prstGeom prst="rect">
+            <a:avLst/>
+          </a:prstGeom>
+          <a:noFill/>
+          <a:ln/>
+        </p:spPr>
+        <p:txBody>
+          <a:bodyPr wrap="square" lIns="0" tIns="0" rIns="0" bIns="0" rtlCol="0" anchor="t"/>
+          <a:lstStyle/>
+          <a:p>
+            <a:pPr algn="l" indent="0" marL="0">
+              <a:lnSpc>
+                <a:spcPts val="1215"/>
+              </a:lnSpc>
+              <a:buNone/>
+            </a:pPr>
+            <a:r>
+              <a:rPr lang="en-US" sz="1013" b="1" dirty="0">
+                <a:solidFill>
+                  <a:srgbClr val="EAE7E0"/>
                 </a:solidFill>
                 <a:latin typeface="Malgun Gothic" pitchFamily="34" charset="0"/>
                 <a:ea typeface="Malgun Gothic" pitchFamily="34" charset="-122"/>
                 <a:cs typeface="Malgun Gothic" pitchFamily="34" charset="-120"/>
               </a:rPr>
-              <a:t>낮게 신고 — 0℃ 에서 5.0 MW 못 팜</a:t>
-            </a:r>
-            <a:endParaRPr lang="en-US" sz="938" dirty="0"/>
-          </a:p>
-        </p:txBody>
-      </p:sp>
-      <p:sp>
-        <p:nvSpPr>
-          <p:cNvPr id="118" name="Text 116"/>
-          <p:cNvSpPr txBox="1"/>
-          <p:nvPr/>
-        </p:nvSpPr>
-        <p:spPr>
-          <a:xfrm>
-            <a:off x="6057900" y="3851236"/>
-            <a:ext cx="2476500" cy="142875"/>
-          </a:xfrm>
-          <a:prstGeom prst="rect">
-            <a:avLst/>
-          </a:prstGeom>
-          <a:noFill/>
-          <a:ln/>
-        </p:spPr>
-        <p:txBody>
-          <a:bodyPr wrap="square" lIns="0" tIns="0" rIns="0" bIns="0" rtlCol="0" anchor="t"/>
-          <a:lstStyle/>
-          <a:p>
-            <a:pPr algn="r" indent="0" marL="0">
-              <a:lnSpc>
-                <a:spcPts val="1125"/>
-              </a:lnSpc>
-              <a:buNone/>
-            </a:pPr>
-            <a:r>
-              <a:rPr lang="en-US" sz="938" b="1" dirty="0">
-                <a:solidFill>
-                  <a:srgbClr val="FF4D63"/>
+              <a:t>프로파일 완성</a:t>
+            </a:r>
+            <a:endParaRPr lang="en-US" sz="1013" dirty="0"/>
+          </a:p>
+        </p:txBody>
+      </p:sp>
+      <p:sp>
+        <p:nvSpPr>
+          <p:cNvPr id="33" name="Text 31"/>
+          <p:cNvSpPr txBox="1"/>
+          <p:nvPr/>
+        </p:nvSpPr>
+        <p:spPr>
+          <a:xfrm>
+            <a:off x="9258300" y="3076575"/>
+            <a:ext cx="1638300" cy="114300"/>
+          </a:xfrm>
+          <a:prstGeom prst="rect">
+            <a:avLst/>
+          </a:prstGeom>
+          <a:noFill/>
+          <a:ln/>
+        </p:spPr>
+        <p:txBody>
+          <a:bodyPr wrap="square" lIns="0" tIns="0" rIns="0" bIns="0" rtlCol="0" anchor="t"/>
+          <a:lstStyle/>
+          <a:p>
+            <a:pPr algn="l" indent="0" marL="0">
+              <a:lnSpc>
+                <a:spcPts val="900"/>
+              </a:lnSpc>
+              <a:buNone/>
+            </a:pPr>
+            <a:r>
+              <a:rPr lang="en-US" sz="750" dirty="0">
+                <a:solidFill>
+                  <a:srgbClr val="8A8880"/>
                 </a:solidFill>
                 <a:latin typeface="Malgun Gothic" pitchFamily="34" charset="0"/>
                 <a:ea typeface="Malgun Gothic" pitchFamily="34" charset="-122"/>
                 <a:cs typeface="Malgun Gothic" pitchFamily="34" charset="-120"/>
               </a:rPr>
-              <a:t>높게 신고 — 28℃ 에서 5.1 MW 미달</a:t>
-            </a:r>
-            <a:endParaRPr lang="en-US" sz="938" dirty="0"/>
-          </a:p>
-        </p:txBody>
-      </p:sp>
-      <p:sp>
-        <p:nvSpPr>
-          <p:cNvPr id="119" name="Shape 117"/>
-          <p:cNvSpPr/>
-          <p:nvPr/>
-        </p:nvSpPr>
-        <p:spPr>
-          <a:xfrm>
-            <a:off x="7524750" y="3143250"/>
-            <a:ext cx="0" cy="1409700"/>
-          </a:xfrm>
-          <a:prstGeom prst="line">
-            <a:avLst/>
-          </a:prstGeom>
-          <a:noFill/>
-          <a:ln w="12700">
-            <a:solidFill>
-              <a:srgbClr val="8A8880"/>
-            </a:solidFill>
-            <a:prstDash val="dash"/>
-          </a:ln>
-        </p:spPr>
-      </p:sp>
-      <p:sp>
-        <p:nvSpPr>
-          <p:cNvPr id="120" name="Text 118"/>
-          <p:cNvSpPr txBox="1"/>
-          <p:nvPr/>
-        </p:nvSpPr>
-        <p:spPr>
-          <a:xfrm>
-            <a:off x="7600950" y="3162300"/>
-            <a:ext cx="2095500" cy="131445"/>
-          </a:xfrm>
-          <a:prstGeom prst="rect">
-            <a:avLst/>
-          </a:prstGeom>
-          <a:noFill/>
-          <a:ln/>
-        </p:spPr>
-        <p:txBody>
-          <a:bodyPr wrap="square" lIns="0" tIns="0" rIns="0" bIns="0" rtlCol="0" anchor="t"/>
-          <a:lstStyle/>
-          <a:p>
-            <a:pPr algn="l" indent="0" marL="0">
-              <a:lnSpc>
-                <a:spcPts val="1035"/>
-              </a:lnSpc>
-              <a:buNone/>
-            </a:pPr>
-            <a:r>
-              <a:rPr lang="en-US" sz="863" dirty="0">
+              <a:t>엑셀 ③ 붙여넣기 → 신고</a:t>
+            </a:r>
+            <a:endParaRPr lang="en-US" sz="750" dirty="0"/>
+          </a:p>
+        </p:txBody>
+      </p:sp>
+      <p:sp>
+        <p:nvSpPr>
+          <p:cNvPr id="34" name="Text 32"/>
+          <p:cNvSpPr txBox="1"/>
+          <p:nvPr/>
+        </p:nvSpPr>
+        <p:spPr>
+          <a:xfrm>
+            <a:off x="914400" y="3352800"/>
+            <a:ext cx="10363200" cy="166688"/>
+          </a:xfrm>
+          <a:prstGeom prst="rect">
+            <a:avLst/>
+          </a:prstGeom>
+          <a:noFill/>
+          <a:ln/>
+        </p:spPr>
+        <p:txBody>
+          <a:bodyPr wrap="square" lIns="0" tIns="0" rIns="0" bIns="0" rtlCol="0" anchor="t"/>
+          <a:lstStyle/>
+          <a:p>
+            <a:pPr algn="l" indent="0" marL="0">
+              <a:lnSpc>
+                <a:spcPts val="1313"/>
+              </a:lnSpc>
+              <a:buNone/>
+            </a:pPr>
+            <a:r>
+              <a:rPr lang="en-US" sz="938" dirty="0">
                 <a:solidFill>
                   <a:srgbClr val="A9A79F"/>
                 </a:solidFill>
@@ -20522,152 +17562,90 @@
                 <a:ea typeface="Malgun Gothic" pitchFamily="34" charset="-122"/>
                 <a:cs typeface="Malgun Gothic" pitchFamily="34" charset="-120"/>
               </a:rPr>
-              <a:t>여기서 방향이 바뀝니다 (22℃)</a:t>
-            </a:r>
-            <a:endParaRPr lang="en-US" sz="863" dirty="0"/>
-          </a:p>
-        </p:txBody>
-      </p:sp>
-      <p:sp>
-        <p:nvSpPr>
-          <p:cNvPr id="121" name="Shape 119"/>
-          <p:cNvSpPr/>
-          <p:nvPr/>
-        </p:nvSpPr>
-        <p:spPr>
-          <a:xfrm>
-            <a:off x="1428750" y="3028950"/>
-            <a:ext cx="247650" cy="0"/>
-          </a:xfrm>
-          <a:prstGeom prst="line">
-            <a:avLst/>
-          </a:prstGeom>
-          <a:noFill/>
-          <a:ln w="27940">
-            <a:solidFill>
-              <a:srgbClr val="A8BCD1"/>
-            </a:solidFill>
-            <a:prstDash val="dash"/>
-          </a:ln>
-        </p:spPr>
-      </p:sp>
-      <p:sp>
-        <p:nvSpPr>
-          <p:cNvPr id="122" name="Text 120"/>
-          <p:cNvSpPr txBox="1"/>
-          <p:nvPr/>
-        </p:nvSpPr>
-        <p:spPr>
-          <a:xfrm>
-            <a:off x="1752600" y="2962275"/>
-            <a:ext cx="2286000" cy="148590"/>
-          </a:xfrm>
-          <a:prstGeom prst="rect">
-            <a:avLst/>
-          </a:prstGeom>
-          <a:noFill/>
-          <a:ln/>
-        </p:spPr>
-        <p:txBody>
-          <a:bodyPr wrap="square" lIns="0" tIns="0" rIns="0" bIns="0" rtlCol="0" anchor="t"/>
-          <a:lstStyle/>
-          <a:p>
-            <a:pPr algn="l" indent="0" marL="0">
-              <a:lnSpc>
-                <a:spcPts val="1170"/>
-              </a:lnSpc>
-              <a:buNone/>
-            </a:pPr>
-            <a:r>
-              <a:rPr lang="en-US" sz="900" dirty="0">
-                <a:solidFill>
-                  <a:srgbClr val="A8BCD1"/>
+              <a:t>테스트는 </a:t>
+            </a:r>
+            <a:pPr algn="l" indent="0" marL="0">
+              <a:lnSpc>
+                <a:spcPts val="1313"/>
+              </a:lnSpc>
+              <a:buNone/>
+            </a:pPr>
+            <a:r>
+              <a:rPr lang="en-US" sz="938" b="1" dirty="0">
+                <a:solidFill>
+                  <a:srgbClr val="EFB13C"/>
                 </a:solidFill>
                 <a:latin typeface="Malgun Gothic" pitchFamily="34" charset="0"/>
                 <a:ea typeface="Malgun Gothic" pitchFamily="34" charset="-122"/>
                 <a:cs typeface="Malgun Gothic" pitchFamily="34" charset="-120"/>
               </a:rPr>
-              <a:t>종전 신고 (하나의 값)</a:t>
-            </a:r>
-            <a:endParaRPr lang="en-US" sz="900" dirty="0"/>
-          </a:p>
-        </p:txBody>
-      </p:sp>
-      <p:sp>
-        <p:nvSpPr>
-          <p:cNvPr id="123" name="Shape 121"/>
-          <p:cNvSpPr/>
-          <p:nvPr/>
-        </p:nvSpPr>
-        <p:spPr>
-          <a:xfrm>
-            <a:off x="4000500" y="3028950"/>
-            <a:ext cx="247650" cy="0"/>
-          </a:xfrm>
-          <a:prstGeom prst="line">
-            <a:avLst/>
-          </a:prstGeom>
-          <a:noFill/>
-          <a:ln w="33020">
-            <a:solidFill>
-              <a:srgbClr val="EFB13C"/>
-            </a:solidFill>
-            <a:prstDash val="solid"/>
-          </a:ln>
-        </p:spPr>
-      </p:sp>
-      <p:sp>
-        <p:nvSpPr>
-          <p:cNvPr id="124" name="Text 122"/>
-          <p:cNvSpPr txBox="1"/>
-          <p:nvPr/>
-        </p:nvSpPr>
-        <p:spPr>
-          <a:xfrm>
-            <a:off x="4324350" y="2962275"/>
-            <a:ext cx="2286000" cy="148590"/>
-          </a:xfrm>
-          <a:prstGeom prst="rect">
-            <a:avLst/>
-          </a:prstGeom>
-          <a:noFill/>
-          <a:ln/>
-        </p:spPr>
-        <p:txBody>
-          <a:bodyPr wrap="square" lIns="0" tIns="0" rIns="0" bIns="0" rtlCol="0" anchor="t"/>
-          <a:lstStyle/>
-          <a:p>
-            <a:pPr algn="l" indent="0" marL="0">
-              <a:lnSpc>
-                <a:spcPts val="1170"/>
-              </a:lnSpc>
-              <a:buNone/>
-            </a:pPr>
-            <a:r>
-              <a:rPr lang="en-US" sz="900" dirty="0">
-                <a:solidFill>
-                  <a:srgbClr val="EFB13C"/>
+              <a:t>그날의 온도 한 점</a:t>
+            </a:r>
+            <a:pPr algn="l" indent="0" marL="0">
+              <a:lnSpc>
+                <a:spcPts val="1313"/>
+              </a:lnSpc>
+              <a:buNone/>
+            </a:pPr>
+            <a:r>
+              <a:rPr lang="en-US" sz="938" dirty="0">
+                <a:solidFill>
+                  <a:srgbClr val="A9A79F"/>
                 </a:solidFill>
                 <a:latin typeface="Malgun Gothic" pitchFamily="34" charset="0"/>
                 <a:ea typeface="Malgun Gothic" pitchFamily="34" charset="-122"/>
                 <a:cs typeface="Malgun Gothic" pitchFamily="34" charset="-120"/>
               </a:rPr>
-              <a:t>실제 능력</a:t>
-            </a:r>
-            <a:endParaRPr lang="en-US" sz="900" dirty="0"/>
-          </a:p>
-        </p:txBody>
-      </p:sp>
-      <p:sp>
-        <p:nvSpPr>
-          <p:cNvPr id="125" name="Shape 123"/>
-          <p:cNvSpPr/>
-          <p:nvPr/>
-        </p:nvSpPr>
-        <p:spPr>
-          <a:xfrm>
-            <a:off x="685800" y="4953000"/>
-            <a:ext cx="10820400" cy="990600"/>
+              <a:t>에서만 합니다. 나머지 60개 온도의 차이는 알 수 없으니, 같은 값을 얹는 것이 </a:t>
+            </a:r>
+            <a:pPr algn="l" indent="0" marL="0">
+              <a:lnSpc>
+                <a:spcPts val="1313"/>
+              </a:lnSpc>
+              <a:buNone/>
+            </a:pPr>
+            <a:r>
+              <a:rPr lang="en-US" sz="938" b="1" dirty="0">
+                <a:solidFill>
+                  <a:srgbClr val="EAE7E0"/>
+                </a:solidFill>
+                <a:latin typeface="Malgun Gothic" pitchFamily="34" charset="0"/>
+                <a:ea typeface="Malgun Gothic" pitchFamily="34" charset="-122"/>
+                <a:cs typeface="Malgun Gothic" pitchFamily="34" charset="-120"/>
+              </a:rPr>
+              <a:t>그때로서는 가장 안전한</a:t>
+            </a:r>
+            <a:pPr algn="l" indent="0" marL="0">
+              <a:lnSpc>
+                <a:spcPts val="1313"/>
+              </a:lnSpc>
+              <a:buNone/>
+            </a:pPr>
+            <a:r>
+              <a:rPr lang="en-US" sz="938" dirty="0">
+                <a:solidFill>
+                  <a:srgbClr val="A9A79F"/>
+                </a:solidFill>
+                <a:latin typeface="Malgun Gothic" pitchFamily="34" charset="0"/>
+                <a:ea typeface="Malgun Gothic" pitchFamily="34" charset="-122"/>
+                <a:cs typeface="Malgun Gothic" pitchFamily="34" charset="-120"/>
+              </a:rPr>
+              <a:t> 선택이었습니다.</a:t>
+            </a:r>
+            <a:endParaRPr lang="en-US" sz="938" dirty="0"/>
+          </a:p>
+        </p:txBody>
+      </p:sp>
+      <p:sp>
+        <p:nvSpPr>
+          <p:cNvPr id="35" name="Shape 33"/>
+          <p:cNvSpPr/>
+          <p:nvPr/>
+        </p:nvSpPr>
+        <p:spPr>
+          <a:xfrm>
+            <a:off x="685800" y="3752850"/>
+            <a:ext cx="10820400" cy="2190750"/>
           </a:xfrm>
           <a:prstGeom prst="rect">
             <a:avLst/>
@@ -20685,14 +17663,511 @@
       </p:sp>
       <p:sp>
         <p:nvSpPr>
-          <p:cNvPr id="126" name="Shape 124"/>
-          <p:cNvSpPr/>
-          <p:nvPr/>
-        </p:nvSpPr>
-        <p:spPr>
-          <a:xfrm>
-            <a:off x="6096000" y="5143500"/>
-            <a:ext cx="0" cy="609600"/>
+          <p:cNvPr id="36" name="Text 34"/>
+          <p:cNvSpPr txBox="1"/>
+          <p:nvPr/>
+        </p:nvSpPr>
+        <p:spPr>
+          <a:xfrm>
+            <a:off x="914400" y="3848100"/>
+            <a:ext cx="6667500" cy="125016"/>
+          </a:xfrm>
+          <a:prstGeom prst="rect">
+            <a:avLst/>
+          </a:prstGeom>
+          <a:noFill/>
+          <a:ln/>
+        </p:spPr>
+        <p:txBody>
+          <a:bodyPr wrap="square" lIns="0" tIns="0" rIns="0" bIns="0" rtlCol="0" anchor="t"/>
+          <a:lstStyle/>
+          <a:p>
+            <a:pPr algn="l" indent="0" marL="0">
+              <a:lnSpc>
+                <a:spcPts val="984"/>
+              </a:lnSpc>
+              <a:buNone/>
+            </a:pPr>
+            <a:r>
+              <a:rPr lang="en-US" sz="788" b="1" spc="150" kern="0" dirty="0">
+                <a:solidFill>
+                  <a:srgbClr val="8A8880"/>
+                </a:solidFill>
+                <a:latin typeface="Consolas" pitchFamily="34" charset="0"/>
+                <a:ea typeface="Consolas" pitchFamily="34" charset="-122"/>
+                <a:cs typeface="Consolas" pitchFamily="34" charset="-120"/>
+              </a:rPr>
+              <a:t>외기온도별 출력  ·  단위 MW  ·  종전 신고(이론값 + 2.5 하나로) vs 실제 능력</a:t>
+            </a:r>
+            <a:endParaRPr lang="en-US" sz="788" dirty="0"/>
+          </a:p>
+        </p:txBody>
+      </p:sp>
+      <p:sp>
+        <p:nvSpPr>
+          <p:cNvPr id="37" name="Shape 35"/>
+          <p:cNvSpPr/>
+          <p:nvPr/>
+        </p:nvSpPr>
+        <p:spPr>
+          <a:xfrm>
+            <a:off x="1428750" y="5396279"/>
+            <a:ext cx="9525000" cy="0"/>
+          </a:xfrm>
+          <a:prstGeom prst="line">
+            <a:avLst/>
+          </a:prstGeom>
+          <a:noFill/>
+          <a:ln w="12700">
+            <a:solidFill>
+              <a:srgbClr val="182838"/>
+            </a:solidFill>
+            <a:prstDash val="solid"/>
+          </a:ln>
+        </p:spPr>
+      </p:sp>
+      <p:sp>
+        <p:nvSpPr>
+          <p:cNvPr id="38" name="Text 36"/>
+          <p:cNvSpPr txBox="1"/>
+          <p:nvPr/>
+        </p:nvSpPr>
+        <p:spPr>
+          <a:xfrm>
+            <a:off x="914400" y="5329604"/>
+            <a:ext cx="438150" cy="123825"/>
+          </a:xfrm>
+          <a:prstGeom prst="rect">
+            <a:avLst/>
+          </a:prstGeom>
+          <a:noFill/>
+          <a:ln/>
+        </p:spPr>
+        <p:txBody>
+          <a:bodyPr wrap="square" lIns="0" tIns="0" rIns="0" bIns="0" rtlCol="0" anchor="t"/>
+          <a:lstStyle/>
+          <a:p>
+            <a:pPr algn="r" indent="0" marL="0">
+              <a:lnSpc>
+                <a:spcPts val="975"/>
+              </a:lnSpc>
+              <a:buNone/>
+            </a:pPr>
+            <a:r>
+              <a:rPr lang="en-US" sz="750" dirty="0">
+                <a:solidFill>
+                  <a:srgbClr val="8A8880"/>
+                </a:solidFill>
+                <a:latin typeface="Consolas" pitchFamily="34" charset="0"/>
+                <a:ea typeface="Consolas" pitchFamily="34" charset="-122"/>
+                <a:cs typeface="Consolas" pitchFamily="34" charset="-120"/>
+              </a:rPr>
+              <a:t>360</a:t>
+            </a:r>
+            <a:endParaRPr lang="en-US" sz="750" dirty="0"/>
+          </a:p>
+        </p:txBody>
+      </p:sp>
+      <p:sp>
+        <p:nvSpPr>
+          <p:cNvPr id="39" name="Shape 37"/>
+          <p:cNvSpPr/>
+          <p:nvPr/>
+        </p:nvSpPr>
+        <p:spPr>
+          <a:xfrm>
+            <a:off x="1428750" y="5188194"/>
+            <a:ext cx="9525000" cy="0"/>
+          </a:xfrm>
+          <a:prstGeom prst="line">
+            <a:avLst/>
+          </a:prstGeom>
+          <a:noFill/>
+          <a:ln w="12700">
+            <a:solidFill>
+              <a:srgbClr val="182838"/>
+            </a:solidFill>
+            <a:prstDash val="solid"/>
+          </a:ln>
+        </p:spPr>
+      </p:sp>
+      <p:sp>
+        <p:nvSpPr>
+          <p:cNvPr id="40" name="Text 38"/>
+          <p:cNvSpPr txBox="1"/>
+          <p:nvPr/>
+        </p:nvSpPr>
+        <p:spPr>
+          <a:xfrm>
+            <a:off x="914400" y="5121519"/>
+            <a:ext cx="438150" cy="123825"/>
+          </a:xfrm>
+          <a:prstGeom prst="rect">
+            <a:avLst/>
+          </a:prstGeom>
+          <a:noFill/>
+          <a:ln/>
+        </p:spPr>
+        <p:txBody>
+          <a:bodyPr wrap="square" lIns="0" tIns="0" rIns="0" bIns="0" rtlCol="0" anchor="t"/>
+          <a:lstStyle/>
+          <a:p>
+            <a:pPr algn="r" indent="0" marL="0">
+              <a:lnSpc>
+                <a:spcPts val="975"/>
+              </a:lnSpc>
+              <a:buNone/>
+            </a:pPr>
+            <a:r>
+              <a:rPr lang="en-US" sz="750" dirty="0">
+                <a:solidFill>
+                  <a:srgbClr val="8A8880"/>
+                </a:solidFill>
+                <a:latin typeface="Consolas" pitchFamily="34" charset="0"/>
+                <a:ea typeface="Consolas" pitchFamily="34" charset="-122"/>
+                <a:cs typeface="Consolas" pitchFamily="34" charset="-120"/>
+              </a:rPr>
+              <a:t>380</a:t>
+            </a:r>
+            <a:endParaRPr lang="en-US" sz="750" dirty="0"/>
+          </a:p>
+        </p:txBody>
+      </p:sp>
+      <p:sp>
+        <p:nvSpPr>
+          <p:cNvPr id="41" name="Shape 39"/>
+          <p:cNvSpPr/>
+          <p:nvPr/>
+        </p:nvSpPr>
+        <p:spPr>
+          <a:xfrm>
+            <a:off x="1428750" y="4980110"/>
+            <a:ext cx="9525000" cy="0"/>
+          </a:xfrm>
+          <a:prstGeom prst="line">
+            <a:avLst/>
+          </a:prstGeom>
+          <a:noFill/>
+          <a:ln w="12700">
+            <a:solidFill>
+              <a:srgbClr val="182838"/>
+            </a:solidFill>
+            <a:prstDash val="solid"/>
+          </a:ln>
+        </p:spPr>
+      </p:sp>
+      <p:sp>
+        <p:nvSpPr>
+          <p:cNvPr id="42" name="Text 40"/>
+          <p:cNvSpPr txBox="1"/>
+          <p:nvPr/>
+        </p:nvSpPr>
+        <p:spPr>
+          <a:xfrm>
+            <a:off x="914400" y="4913435"/>
+            <a:ext cx="438150" cy="123825"/>
+          </a:xfrm>
+          <a:prstGeom prst="rect">
+            <a:avLst/>
+          </a:prstGeom>
+          <a:noFill/>
+          <a:ln/>
+        </p:spPr>
+        <p:txBody>
+          <a:bodyPr wrap="square" lIns="0" tIns="0" rIns="0" bIns="0" rtlCol="0" anchor="t"/>
+          <a:lstStyle/>
+          <a:p>
+            <a:pPr algn="r" indent="0" marL="0">
+              <a:lnSpc>
+                <a:spcPts val="975"/>
+              </a:lnSpc>
+              <a:buNone/>
+            </a:pPr>
+            <a:r>
+              <a:rPr lang="en-US" sz="750" dirty="0">
+                <a:solidFill>
+                  <a:srgbClr val="8A8880"/>
+                </a:solidFill>
+                <a:latin typeface="Consolas" pitchFamily="34" charset="0"/>
+                <a:ea typeface="Consolas" pitchFamily="34" charset="-122"/>
+                <a:cs typeface="Consolas" pitchFamily="34" charset="-120"/>
+              </a:rPr>
+              <a:t>400</a:t>
+            </a:r>
+            <a:endParaRPr lang="en-US" sz="750" dirty="0"/>
+          </a:p>
+        </p:txBody>
+      </p:sp>
+      <p:sp>
+        <p:nvSpPr>
+          <p:cNvPr id="43" name="Shape 41"/>
+          <p:cNvSpPr/>
+          <p:nvPr/>
+        </p:nvSpPr>
+        <p:spPr>
+          <a:xfrm>
+            <a:off x="1428750" y="4772025"/>
+            <a:ext cx="9525000" cy="0"/>
+          </a:xfrm>
+          <a:prstGeom prst="line">
+            <a:avLst/>
+          </a:prstGeom>
+          <a:noFill/>
+          <a:ln w="12700">
+            <a:solidFill>
+              <a:srgbClr val="182838"/>
+            </a:solidFill>
+            <a:prstDash val="solid"/>
+          </a:ln>
+        </p:spPr>
+      </p:sp>
+      <p:sp>
+        <p:nvSpPr>
+          <p:cNvPr id="44" name="Text 42"/>
+          <p:cNvSpPr txBox="1"/>
+          <p:nvPr/>
+        </p:nvSpPr>
+        <p:spPr>
+          <a:xfrm>
+            <a:off x="914400" y="4705350"/>
+            <a:ext cx="438150" cy="123825"/>
+          </a:xfrm>
+          <a:prstGeom prst="rect">
+            <a:avLst/>
+          </a:prstGeom>
+          <a:noFill/>
+          <a:ln/>
+        </p:spPr>
+        <p:txBody>
+          <a:bodyPr wrap="square" lIns="0" tIns="0" rIns="0" bIns="0" rtlCol="0" anchor="t"/>
+          <a:lstStyle/>
+          <a:p>
+            <a:pPr algn="r" indent="0" marL="0">
+              <a:lnSpc>
+                <a:spcPts val="975"/>
+              </a:lnSpc>
+              <a:buNone/>
+            </a:pPr>
+            <a:r>
+              <a:rPr lang="en-US" sz="750" dirty="0">
+                <a:solidFill>
+                  <a:srgbClr val="8A8880"/>
+                </a:solidFill>
+                <a:latin typeface="Consolas" pitchFamily="34" charset="0"/>
+                <a:ea typeface="Consolas" pitchFamily="34" charset="-122"/>
+                <a:cs typeface="Consolas" pitchFamily="34" charset="-120"/>
+              </a:rPr>
+              <a:t>420</a:t>
+            </a:r>
+            <a:endParaRPr lang="en-US" sz="750" dirty="0"/>
+          </a:p>
+        </p:txBody>
+      </p:sp>
+      <p:sp>
+        <p:nvSpPr>
+          <p:cNvPr id="45" name="Shape 43"/>
+          <p:cNvSpPr/>
+          <p:nvPr/>
+        </p:nvSpPr>
+        <p:spPr>
+          <a:xfrm>
+            <a:off x="1428750" y="4563940"/>
+            <a:ext cx="9525000" cy="0"/>
+          </a:xfrm>
+          <a:prstGeom prst="line">
+            <a:avLst/>
+          </a:prstGeom>
+          <a:noFill/>
+          <a:ln w="12700">
+            <a:solidFill>
+              <a:srgbClr val="182838"/>
+            </a:solidFill>
+            <a:prstDash val="solid"/>
+          </a:ln>
+        </p:spPr>
+      </p:sp>
+      <p:sp>
+        <p:nvSpPr>
+          <p:cNvPr id="46" name="Text 44"/>
+          <p:cNvSpPr txBox="1"/>
+          <p:nvPr/>
+        </p:nvSpPr>
+        <p:spPr>
+          <a:xfrm>
+            <a:off x="914400" y="4497265"/>
+            <a:ext cx="438150" cy="123825"/>
+          </a:xfrm>
+          <a:prstGeom prst="rect">
+            <a:avLst/>
+          </a:prstGeom>
+          <a:noFill/>
+          <a:ln/>
+        </p:spPr>
+        <p:txBody>
+          <a:bodyPr wrap="square" lIns="0" tIns="0" rIns="0" bIns="0" rtlCol="0" anchor="t"/>
+          <a:lstStyle/>
+          <a:p>
+            <a:pPr algn="r" indent="0" marL="0">
+              <a:lnSpc>
+                <a:spcPts val="975"/>
+              </a:lnSpc>
+              <a:buNone/>
+            </a:pPr>
+            <a:r>
+              <a:rPr lang="en-US" sz="750" dirty="0">
+                <a:solidFill>
+                  <a:srgbClr val="8A8880"/>
+                </a:solidFill>
+                <a:latin typeface="Consolas" pitchFamily="34" charset="0"/>
+                <a:ea typeface="Consolas" pitchFamily="34" charset="-122"/>
+                <a:cs typeface="Consolas" pitchFamily="34" charset="-120"/>
+              </a:rPr>
+              <a:t>440</a:t>
+            </a:r>
+            <a:endParaRPr lang="en-US" sz="750" dirty="0"/>
+          </a:p>
+        </p:txBody>
+      </p:sp>
+      <p:sp>
+        <p:nvSpPr>
+          <p:cNvPr id="47" name="Shape 45"/>
+          <p:cNvSpPr/>
+          <p:nvPr/>
+        </p:nvSpPr>
+        <p:spPr>
+          <a:xfrm>
+            <a:off x="1428750" y="4355856"/>
+            <a:ext cx="9525000" cy="0"/>
+          </a:xfrm>
+          <a:prstGeom prst="line">
+            <a:avLst/>
+          </a:prstGeom>
+          <a:noFill/>
+          <a:ln w="12700">
+            <a:solidFill>
+              <a:srgbClr val="182838"/>
+            </a:solidFill>
+            <a:prstDash val="solid"/>
+          </a:ln>
+        </p:spPr>
+      </p:sp>
+      <p:sp>
+        <p:nvSpPr>
+          <p:cNvPr id="48" name="Text 46"/>
+          <p:cNvSpPr txBox="1"/>
+          <p:nvPr/>
+        </p:nvSpPr>
+        <p:spPr>
+          <a:xfrm>
+            <a:off x="914400" y="4289181"/>
+            <a:ext cx="438150" cy="123825"/>
+          </a:xfrm>
+          <a:prstGeom prst="rect">
+            <a:avLst/>
+          </a:prstGeom>
+          <a:noFill/>
+          <a:ln/>
+        </p:spPr>
+        <p:txBody>
+          <a:bodyPr wrap="square" lIns="0" tIns="0" rIns="0" bIns="0" rtlCol="0" anchor="t"/>
+          <a:lstStyle/>
+          <a:p>
+            <a:pPr algn="r" indent="0" marL="0">
+              <a:lnSpc>
+                <a:spcPts val="975"/>
+              </a:lnSpc>
+              <a:buNone/>
+            </a:pPr>
+            <a:r>
+              <a:rPr lang="en-US" sz="750" dirty="0">
+                <a:solidFill>
+                  <a:srgbClr val="8A8880"/>
+                </a:solidFill>
+                <a:latin typeface="Consolas" pitchFamily="34" charset="0"/>
+                <a:ea typeface="Consolas" pitchFamily="34" charset="-122"/>
+                <a:cs typeface="Consolas" pitchFamily="34" charset="-120"/>
+              </a:rPr>
+              <a:t>460</a:t>
+            </a:r>
+            <a:endParaRPr lang="en-US" sz="750" dirty="0"/>
+          </a:p>
+        </p:txBody>
+      </p:sp>
+      <p:sp>
+        <p:nvSpPr>
+          <p:cNvPr id="49" name="Shape 47"/>
+          <p:cNvSpPr/>
+          <p:nvPr/>
+        </p:nvSpPr>
+        <p:spPr>
+          <a:xfrm>
+            <a:off x="1428750" y="4147771"/>
+            <a:ext cx="9525000" cy="0"/>
+          </a:xfrm>
+          <a:prstGeom prst="line">
+            <a:avLst/>
+          </a:prstGeom>
+          <a:noFill/>
+          <a:ln w="12700">
+            <a:solidFill>
+              <a:srgbClr val="182838"/>
+            </a:solidFill>
+            <a:prstDash val="solid"/>
+          </a:ln>
+        </p:spPr>
+      </p:sp>
+      <p:sp>
+        <p:nvSpPr>
+          <p:cNvPr id="50" name="Text 48"/>
+          <p:cNvSpPr txBox="1"/>
+          <p:nvPr/>
+        </p:nvSpPr>
+        <p:spPr>
+          <a:xfrm>
+            <a:off x="914400" y="4081096"/>
+            <a:ext cx="438150" cy="123825"/>
+          </a:xfrm>
+          <a:prstGeom prst="rect">
+            <a:avLst/>
+          </a:prstGeom>
+          <a:noFill/>
+          <a:ln/>
+        </p:spPr>
+        <p:txBody>
+          <a:bodyPr wrap="square" lIns="0" tIns="0" rIns="0" bIns="0" rtlCol="0" anchor="t"/>
+          <a:lstStyle/>
+          <a:p>
+            <a:pPr algn="r" indent="0" marL="0">
+              <a:lnSpc>
+                <a:spcPts val="975"/>
+              </a:lnSpc>
+              <a:buNone/>
+            </a:pPr>
+            <a:r>
+              <a:rPr lang="en-US" sz="750" dirty="0">
+                <a:solidFill>
+                  <a:srgbClr val="8A8880"/>
+                </a:solidFill>
+                <a:latin typeface="Consolas" pitchFamily="34" charset="0"/>
+                <a:ea typeface="Consolas" pitchFamily="34" charset="-122"/>
+                <a:cs typeface="Consolas" pitchFamily="34" charset="-120"/>
+              </a:rPr>
+              <a:t>480</a:t>
+            </a:r>
+            <a:endParaRPr lang="en-US" sz="750" dirty="0"/>
+          </a:p>
+        </p:txBody>
+      </p:sp>
+      <p:sp>
+        <p:nvSpPr>
+          <p:cNvPr id="51" name="Shape 49"/>
+          <p:cNvSpPr/>
+          <p:nvPr/>
+        </p:nvSpPr>
+        <p:spPr>
+          <a:xfrm>
+            <a:off x="1428750" y="5448300"/>
+            <a:ext cx="9525000" cy="0"/>
           </a:xfrm>
           <a:prstGeom prst="line">
             <a:avLst/>
@@ -20708,117 +18183,2096 @@
       </p:sp>
       <p:sp>
         <p:nvSpPr>
-          <p:cNvPr id="127" name="Text 125"/>
-          <p:cNvSpPr txBox="1"/>
-          <p:nvPr/>
-        </p:nvSpPr>
-        <p:spPr>
-          <a:xfrm>
-            <a:off x="914400" y="5067300"/>
-            <a:ext cx="4762500" cy="125016"/>
-          </a:xfrm>
-          <a:prstGeom prst="rect">
-            <a:avLst/>
-          </a:prstGeom>
-          <a:noFill/>
-          <a:ln/>
-        </p:spPr>
-        <p:txBody>
-          <a:bodyPr wrap="square" lIns="0" tIns="0" rIns="0" bIns="0" rtlCol="0" anchor="t"/>
-          <a:lstStyle/>
-          <a:p>
-            <a:pPr algn="l" indent="0" marL="0">
-              <a:lnSpc>
-                <a:spcPts val="984"/>
-              </a:lnSpc>
-              <a:buNone/>
-            </a:pPr>
-            <a:r>
-              <a:rPr lang="en-US" sz="788" b="1" spc="150" kern="0" dirty="0">
-                <a:solidFill>
-                  <a:srgbClr val="A8BCD1"/>
+          <p:cNvPr id="52" name="Shape 50"/>
+          <p:cNvSpPr/>
+          <p:nvPr/>
+        </p:nvSpPr>
+        <p:spPr>
+          <a:xfrm>
+            <a:off x="1428750" y="5448300"/>
+            <a:ext cx="0" cy="47625"/>
+          </a:xfrm>
+          <a:prstGeom prst="line">
+            <a:avLst/>
+          </a:prstGeom>
+          <a:noFill/>
+          <a:ln w="12700">
+            <a:solidFill>
+              <a:srgbClr val="8A8880"/>
+            </a:solidFill>
+            <a:prstDash val="solid"/>
+          </a:ln>
+        </p:spPr>
+      </p:sp>
+      <p:sp>
+        <p:nvSpPr>
+          <p:cNvPr id="53" name="Text 51"/>
+          <p:cNvSpPr txBox="1"/>
+          <p:nvPr/>
+        </p:nvSpPr>
+        <p:spPr>
+          <a:xfrm>
+            <a:off x="1200150" y="5505450"/>
+            <a:ext cx="457200" cy="123825"/>
+          </a:xfrm>
+          <a:prstGeom prst="rect">
+            <a:avLst/>
+          </a:prstGeom>
+          <a:noFill/>
+          <a:ln/>
+        </p:spPr>
+        <p:txBody>
+          <a:bodyPr wrap="square" lIns="0" tIns="0" rIns="0" bIns="0" rtlCol="0" anchor="t"/>
+          <a:lstStyle/>
+          <a:p>
+            <a:pPr algn="ctr" indent="0" marL="0">
+              <a:lnSpc>
+                <a:spcPts val="975"/>
+              </a:lnSpc>
+              <a:buNone/>
+            </a:pPr>
+            <a:r>
+              <a:rPr lang="en-US" sz="750" dirty="0">
+                <a:solidFill>
+                  <a:srgbClr val="8A8880"/>
                 </a:solidFill>
                 <a:latin typeface="Consolas" pitchFamily="34" charset="0"/>
                 <a:ea typeface="Consolas" pitchFamily="34" charset="-122"/>
                 <a:cs typeface="Consolas" pitchFamily="34" charset="-120"/>
               </a:rPr>
-              <a:t>낮게 신고한 양 누계</a:t>
-            </a:r>
-            <a:endParaRPr lang="en-US" sz="788" dirty="0"/>
-          </a:p>
-        </p:txBody>
-      </p:sp>
-      <p:sp>
-        <p:nvSpPr>
-          <p:cNvPr id="128" name="Text 126"/>
-          <p:cNvSpPr txBox="1"/>
-          <p:nvPr/>
-        </p:nvSpPr>
-        <p:spPr>
-          <a:xfrm>
-            <a:off x="914400" y="5238750"/>
-            <a:ext cx="941070" cy="400050"/>
-          </a:xfrm>
-          <a:prstGeom prst="rect">
-            <a:avLst/>
-          </a:prstGeom>
-          <a:noFill/>
-          <a:ln/>
-        </p:spPr>
-        <p:txBody>
-          <a:bodyPr wrap="square" lIns="0" tIns="0" rIns="0" bIns="0" rtlCol="0" anchor="t"/>
-          <a:lstStyle/>
-          <a:p>
-            <a:pPr algn="l" indent="0" marL="0">
-              <a:lnSpc>
-                <a:spcPts val="3150"/>
-              </a:lnSpc>
-              <a:buNone/>
-            </a:pPr>
-            <a:r>
-              <a:rPr lang="en-US" sz="3000" b="1" dirty="0">
-                <a:solidFill>
-                  <a:srgbClr val="EFB13C"/>
+              <a:t>-10℃</a:t>
+            </a:r>
+            <a:endParaRPr lang="en-US" sz="750" dirty="0"/>
+          </a:p>
+        </p:txBody>
+      </p:sp>
+      <p:sp>
+        <p:nvSpPr>
+          <p:cNvPr id="54" name="Shape 52"/>
+          <p:cNvSpPr/>
+          <p:nvPr/>
+        </p:nvSpPr>
+        <p:spPr>
+          <a:xfrm>
+            <a:off x="3333750" y="5448300"/>
+            <a:ext cx="0" cy="47625"/>
+          </a:xfrm>
+          <a:prstGeom prst="line">
+            <a:avLst/>
+          </a:prstGeom>
+          <a:noFill/>
+          <a:ln w="12700">
+            <a:solidFill>
+              <a:srgbClr val="8A8880"/>
+            </a:solidFill>
+            <a:prstDash val="solid"/>
+          </a:ln>
+        </p:spPr>
+      </p:sp>
+      <p:sp>
+        <p:nvSpPr>
+          <p:cNvPr id="55" name="Text 53"/>
+          <p:cNvSpPr txBox="1"/>
+          <p:nvPr/>
+        </p:nvSpPr>
+        <p:spPr>
+          <a:xfrm>
+            <a:off x="3105150" y="5505450"/>
+            <a:ext cx="457200" cy="123825"/>
+          </a:xfrm>
+          <a:prstGeom prst="rect">
+            <a:avLst/>
+          </a:prstGeom>
+          <a:noFill/>
+          <a:ln/>
+        </p:spPr>
+        <p:txBody>
+          <a:bodyPr wrap="square" lIns="0" tIns="0" rIns="0" bIns="0" rtlCol="0" anchor="t"/>
+          <a:lstStyle/>
+          <a:p>
+            <a:pPr algn="ctr" indent="0" marL="0">
+              <a:lnSpc>
+                <a:spcPts val="975"/>
+              </a:lnSpc>
+              <a:buNone/>
+            </a:pPr>
+            <a:r>
+              <a:rPr lang="en-US" sz="750" dirty="0">
+                <a:solidFill>
+                  <a:srgbClr val="8A8880"/>
                 </a:solidFill>
                 <a:latin typeface="Consolas" pitchFamily="34" charset="0"/>
                 <a:ea typeface="Consolas" pitchFamily="34" charset="-122"/>
                 <a:cs typeface="Consolas" pitchFamily="34" charset="-120"/>
               </a:rPr>
-              <a:t>75.3</a:t>
-            </a:r>
-            <a:endParaRPr lang="en-US" sz="3000" dirty="0"/>
-          </a:p>
-        </p:txBody>
-      </p:sp>
-      <p:sp>
-        <p:nvSpPr>
-          <p:cNvPr id="129" name="Text 127"/>
-          <p:cNvSpPr txBox="1"/>
-          <p:nvPr/>
-        </p:nvSpPr>
-        <p:spPr>
-          <a:xfrm>
-            <a:off x="1912620" y="5429250"/>
-            <a:ext cx="400050" cy="171450"/>
-          </a:xfrm>
-          <a:prstGeom prst="rect">
-            <a:avLst/>
-          </a:prstGeom>
-          <a:noFill/>
-          <a:ln/>
-        </p:spPr>
-        <p:txBody>
-          <a:bodyPr wrap="square" lIns="0" tIns="0" rIns="0" bIns="0" rtlCol="0" anchor="t"/>
-          <a:lstStyle/>
-          <a:p>
-            <a:pPr algn="l" indent="0" marL="0">
-              <a:lnSpc>
-                <a:spcPts val="1350"/>
-              </a:lnSpc>
-              <a:buNone/>
-            </a:pPr>
-            <a:r>
-              <a:rPr lang="en-US" sz="1125" dirty="0">
+              <a:t>0</a:t>
+            </a:r>
+            <a:endParaRPr lang="en-US" sz="750" dirty="0"/>
+          </a:p>
+        </p:txBody>
+      </p:sp>
+      <p:sp>
+        <p:nvSpPr>
+          <p:cNvPr id="56" name="Shape 54"/>
+          <p:cNvSpPr/>
+          <p:nvPr/>
+        </p:nvSpPr>
+        <p:spPr>
+          <a:xfrm>
+            <a:off x="5238750" y="5448300"/>
+            <a:ext cx="0" cy="47625"/>
+          </a:xfrm>
+          <a:prstGeom prst="line">
+            <a:avLst/>
+          </a:prstGeom>
+          <a:noFill/>
+          <a:ln w="12700">
+            <a:solidFill>
+              <a:srgbClr val="8A8880"/>
+            </a:solidFill>
+            <a:prstDash val="solid"/>
+          </a:ln>
+        </p:spPr>
+      </p:sp>
+      <p:sp>
+        <p:nvSpPr>
+          <p:cNvPr id="57" name="Text 55"/>
+          <p:cNvSpPr txBox="1"/>
+          <p:nvPr/>
+        </p:nvSpPr>
+        <p:spPr>
+          <a:xfrm>
+            <a:off x="5010150" y="5505450"/>
+            <a:ext cx="457200" cy="123825"/>
+          </a:xfrm>
+          <a:prstGeom prst="rect">
+            <a:avLst/>
+          </a:prstGeom>
+          <a:noFill/>
+          <a:ln/>
+        </p:spPr>
+        <p:txBody>
+          <a:bodyPr wrap="square" lIns="0" tIns="0" rIns="0" bIns="0" rtlCol="0" anchor="t"/>
+          <a:lstStyle/>
+          <a:p>
+            <a:pPr algn="ctr" indent="0" marL="0">
+              <a:lnSpc>
+                <a:spcPts val="975"/>
+              </a:lnSpc>
+              <a:buNone/>
+            </a:pPr>
+            <a:r>
+              <a:rPr lang="en-US" sz="750" dirty="0">
+                <a:solidFill>
+                  <a:srgbClr val="8A8880"/>
+                </a:solidFill>
+                <a:latin typeface="Consolas" pitchFamily="34" charset="0"/>
+                <a:ea typeface="Consolas" pitchFamily="34" charset="-122"/>
+                <a:cs typeface="Consolas" pitchFamily="34" charset="-120"/>
+              </a:rPr>
+              <a:t>10</a:t>
+            </a:r>
+            <a:endParaRPr lang="en-US" sz="750" dirty="0"/>
+          </a:p>
+        </p:txBody>
+      </p:sp>
+      <p:sp>
+        <p:nvSpPr>
+          <p:cNvPr id="58" name="Shape 56"/>
+          <p:cNvSpPr/>
+          <p:nvPr/>
+        </p:nvSpPr>
+        <p:spPr>
+          <a:xfrm>
+            <a:off x="7143750" y="5448300"/>
+            <a:ext cx="0" cy="47625"/>
+          </a:xfrm>
+          <a:prstGeom prst="line">
+            <a:avLst/>
+          </a:prstGeom>
+          <a:noFill/>
+          <a:ln w="12700">
+            <a:solidFill>
+              <a:srgbClr val="8A8880"/>
+            </a:solidFill>
+            <a:prstDash val="solid"/>
+          </a:ln>
+        </p:spPr>
+      </p:sp>
+      <p:sp>
+        <p:nvSpPr>
+          <p:cNvPr id="59" name="Text 57"/>
+          <p:cNvSpPr txBox="1"/>
+          <p:nvPr/>
+        </p:nvSpPr>
+        <p:spPr>
+          <a:xfrm>
+            <a:off x="6915150" y="5505450"/>
+            <a:ext cx="457200" cy="123825"/>
+          </a:xfrm>
+          <a:prstGeom prst="rect">
+            <a:avLst/>
+          </a:prstGeom>
+          <a:noFill/>
+          <a:ln/>
+        </p:spPr>
+        <p:txBody>
+          <a:bodyPr wrap="square" lIns="0" tIns="0" rIns="0" bIns="0" rtlCol="0" anchor="t"/>
+          <a:lstStyle/>
+          <a:p>
+            <a:pPr algn="ctr" indent="0" marL="0">
+              <a:lnSpc>
+                <a:spcPts val="975"/>
+              </a:lnSpc>
+              <a:buNone/>
+            </a:pPr>
+            <a:r>
+              <a:rPr lang="en-US" sz="750" dirty="0">
+                <a:solidFill>
+                  <a:srgbClr val="8A8880"/>
+                </a:solidFill>
+                <a:latin typeface="Consolas" pitchFamily="34" charset="0"/>
+                <a:ea typeface="Consolas" pitchFamily="34" charset="-122"/>
+                <a:cs typeface="Consolas" pitchFamily="34" charset="-120"/>
+              </a:rPr>
+              <a:t>20</a:t>
+            </a:r>
+            <a:endParaRPr lang="en-US" sz="750" dirty="0"/>
+          </a:p>
+        </p:txBody>
+      </p:sp>
+      <p:sp>
+        <p:nvSpPr>
+          <p:cNvPr id="60" name="Shape 58"/>
+          <p:cNvSpPr/>
+          <p:nvPr/>
+        </p:nvSpPr>
+        <p:spPr>
+          <a:xfrm>
+            <a:off x="9048750" y="5448300"/>
+            <a:ext cx="0" cy="47625"/>
+          </a:xfrm>
+          <a:prstGeom prst="line">
+            <a:avLst/>
+          </a:prstGeom>
+          <a:noFill/>
+          <a:ln w="12700">
+            <a:solidFill>
+              <a:srgbClr val="8A8880"/>
+            </a:solidFill>
+            <a:prstDash val="solid"/>
+          </a:ln>
+        </p:spPr>
+      </p:sp>
+      <p:sp>
+        <p:nvSpPr>
+          <p:cNvPr id="61" name="Text 59"/>
+          <p:cNvSpPr txBox="1"/>
+          <p:nvPr/>
+        </p:nvSpPr>
+        <p:spPr>
+          <a:xfrm>
+            <a:off x="8820150" y="5505450"/>
+            <a:ext cx="457200" cy="123825"/>
+          </a:xfrm>
+          <a:prstGeom prst="rect">
+            <a:avLst/>
+          </a:prstGeom>
+          <a:noFill/>
+          <a:ln/>
+        </p:spPr>
+        <p:txBody>
+          <a:bodyPr wrap="square" lIns="0" tIns="0" rIns="0" bIns="0" rtlCol="0" anchor="t"/>
+          <a:lstStyle/>
+          <a:p>
+            <a:pPr algn="ctr" indent="0" marL="0">
+              <a:lnSpc>
+                <a:spcPts val="975"/>
+              </a:lnSpc>
+              <a:buNone/>
+            </a:pPr>
+            <a:r>
+              <a:rPr lang="en-US" sz="750" dirty="0">
+                <a:solidFill>
+                  <a:srgbClr val="8A8880"/>
+                </a:solidFill>
+                <a:latin typeface="Consolas" pitchFamily="34" charset="0"/>
+                <a:ea typeface="Consolas" pitchFamily="34" charset="-122"/>
+                <a:cs typeface="Consolas" pitchFamily="34" charset="-120"/>
+              </a:rPr>
+              <a:t>30</a:t>
+            </a:r>
+            <a:endParaRPr lang="en-US" sz="750" dirty="0"/>
+          </a:p>
+        </p:txBody>
+      </p:sp>
+      <p:sp>
+        <p:nvSpPr>
+          <p:cNvPr id="62" name="Shape 60"/>
+          <p:cNvSpPr/>
+          <p:nvPr/>
+        </p:nvSpPr>
+        <p:spPr>
+          <a:xfrm>
+            <a:off x="10953750" y="5448300"/>
+            <a:ext cx="0" cy="47625"/>
+          </a:xfrm>
+          <a:prstGeom prst="line">
+            <a:avLst/>
+          </a:prstGeom>
+          <a:noFill/>
+          <a:ln w="12700">
+            <a:solidFill>
+              <a:srgbClr val="8A8880"/>
+            </a:solidFill>
+            <a:prstDash val="solid"/>
+          </a:ln>
+        </p:spPr>
+      </p:sp>
+      <p:sp>
+        <p:nvSpPr>
+          <p:cNvPr id="63" name="Text 61"/>
+          <p:cNvSpPr txBox="1"/>
+          <p:nvPr/>
+        </p:nvSpPr>
+        <p:spPr>
+          <a:xfrm>
+            <a:off x="10725150" y="5505450"/>
+            <a:ext cx="457200" cy="123825"/>
+          </a:xfrm>
+          <a:prstGeom prst="rect">
+            <a:avLst/>
+          </a:prstGeom>
+          <a:noFill/>
+          <a:ln/>
+        </p:spPr>
+        <p:txBody>
+          <a:bodyPr wrap="square" lIns="0" tIns="0" rIns="0" bIns="0" rtlCol="0" anchor="t"/>
+          <a:lstStyle/>
+          <a:p>
+            <a:pPr algn="ctr" indent="0" marL="0">
+              <a:lnSpc>
+                <a:spcPts val="975"/>
+              </a:lnSpc>
+              <a:buNone/>
+            </a:pPr>
+            <a:r>
+              <a:rPr lang="en-US" sz="750" dirty="0">
+                <a:solidFill>
+                  <a:srgbClr val="8A8880"/>
+                </a:solidFill>
+                <a:latin typeface="Consolas" pitchFamily="34" charset="0"/>
+                <a:ea typeface="Consolas" pitchFamily="34" charset="-122"/>
+                <a:cs typeface="Consolas" pitchFamily="34" charset="-120"/>
+              </a:rPr>
+              <a:t>40</a:t>
+            </a:r>
+            <a:endParaRPr lang="en-US" sz="750" dirty="0"/>
+          </a:p>
+        </p:txBody>
+      </p:sp>
+      <p:sp>
+        <p:nvSpPr>
+          <p:cNvPr id="64" name="Shape 62"/>
+          <p:cNvSpPr/>
+          <p:nvPr/>
+        </p:nvSpPr>
+        <p:spPr>
+          <a:xfrm>
+            <a:off x="1428750" y="4330157"/>
+            <a:ext cx="386715" cy="65807"/>
+          </a:xfrm>
+          <a:prstGeom prst="rect">
+            <a:avLst/>
+          </a:prstGeom>
+          <a:solidFill>
+            <a:srgbClr val="55708A"/>
+          </a:solidFill>
+          <a:ln/>
+        </p:spPr>
+      </p:sp>
+      <p:sp>
+        <p:nvSpPr>
+          <p:cNvPr id="65" name="Shape 63"/>
+          <p:cNvSpPr/>
+          <p:nvPr/>
+        </p:nvSpPr>
+        <p:spPr>
+          <a:xfrm>
+            <a:off x="1809750" y="4318661"/>
+            <a:ext cx="386715" cy="65807"/>
+          </a:xfrm>
+          <a:prstGeom prst="rect">
+            <a:avLst/>
+          </a:prstGeom>
+          <a:solidFill>
+            <a:srgbClr val="55708A"/>
+          </a:solidFill>
+          <a:ln/>
+        </p:spPr>
+      </p:sp>
+      <p:sp>
+        <p:nvSpPr>
+          <p:cNvPr id="66" name="Shape 64"/>
+          <p:cNvSpPr/>
+          <p:nvPr/>
+        </p:nvSpPr>
+        <p:spPr>
+          <a:xfrm>
+            <a:off x="2190750" y="4310181"/>
+            <a:ext cx="386715" cy="65807"/>
+          </a:xfrm>
+          <a:prstGeom prst="rect">
+            <a:avLst/>
+          </a:prstGeom>
+          <a:solidFill>
+            <a:srgbClr val="55708A"/>
+          </a:solidFill>
+          <a:ln/>
+        </p:spPr>
+      </p:sp>
+      <p:sp>
+        <p:nvSpPr>
+          <p:cNvPr id="67" name="Shape 65"/>
+          <p:cNvSpPr/>
+          <p:nvPr/>
+        </p:nvSpPr>
+        <p:spPr>
+          <a:xfrm>
+            <a:off x="2571750" y="4296240"/>
+            <a:ext cx="386715" cy="65807"/>
+          </a:xfrm>
+          <a:prstGeom prst="rect">
+            <a:avLst/>
+          </a:prstGeom>
+          <a:solidFill>
+            <a:srgbClr val="55708A"/>
+          </a:solidFill>
+          <a:ln/>
+        </p:spPr>
+      </p:sp>
+      <p:sp>
+        <p:nvSpPr>
+          <p:cNvPr id="68" name="Shape 66"/>
+          <p:cNvSpPr/>
+          <p:nvPr/>
+        </p:nvSpPr>
+        <p:spPr>
+          <a:xfrm>
+            <a:off x="2952750" y="4279853"/>
+            <a:ext cx="386715" cy="59044"/>
+          </a:xfrm>
+          <a:prstGeom prst="rect">
+            <a:avLst/>
+          </a:prstGeom>
+          <a:solidFill>
+            <a:srgbClr val="55708A"/>
+          </a:solidFill>
+          <a:ln/>
+        </p:spPr>
+      </p:sp>
+      <p:sp>
+        <p:nvSpPr>
+          <p:cNvPr id="69" name="Shape 67"/>
+          <p:cNvSpPr/>
+          <p:nvPr/>
+        </p:nvSpPr>
+        <p:spPr>
+          <a:xfrm>
+            <a:off x="3333750" y="4283026"/>
+            <a:ext cx="386715" cy="51969"/>
+          </a:xfrm>
+          <a:prstGeom prst="rect">
+            <a:avLst/>
+          </a:prstGeom>
+          <a:solidFill>
+            <a:srgbClr val="55708A"/>
+          </a:solidFill>
+          <a:ln/>
+        </p:spPr>
+      </p:sp>
+      <p:sp>
+        <p:nvSpPr>
+          <p:cNvPr id="70" name="Shape 68"/>
+          <p:cNvSpPr/>
+          <p:nvPr/>
+        </p:nvSpPr>
+        <p:spPr>
+          <a:xfrm>
+            <a:off x="3714750" y="4307320"/>
+            <a:ext cx="386715" cy="45935"/>
+          </a:xfrm>
+          <a:prstGeom prst="rect">
+            <a:avLst/>
+          </a:prstGeom>
+          <a:solidFill>
+            <a:srgbClr val="55708A"/>
+          </a:solidFill>
+          <a:ln/>
+        </p:spPr>
+      </p:sp>
+      <p:sp>
+        <p:nvSpPr>
+          <p:cNvPr id="71" name="Shape 69"/>
+          <p:cNvSpPr/>
+          <p:nvPr/>
+        </p:nvSpPr>
+        <p:spPr>
+          <a:xfrm>
+            <a:off x="4095750" y="4337856"/>
+            <a:ext cx="386715" cy="35582"/>
+          </a:xfrm>
+          <a:prstGeom prst="rect">
+            <a:avLst/>
+          </a:prstGeom>
+          <a:solidFill>
+            <a:srgbClr val="55708A"/>
+          </a:solidFill>
+          <a:ln/>
+        </p:spPr>
+      </p:sp>
+      <p:sp>
+        <p:nvSpPr>
+          <p:cNvPr id="72" name="Shape 70"/>
+          <p:cNvSpPr/>
+          <p:nvPr/>
+        </p:nvSpPr>
+        <p:spPr>
+          <a:xfrm>
+            <a:off x="4476750" y="4367352"/>
+            <a:ext cx="386715" cy="28872"/>
+          </a:xfrm>
+          <a:prstGeom prst="rect">
+            <a:avLst/>
+          </a:prstGeom>
+          <a:solidFill>
+            <a:srgbClr val="55708A"/>
+          </a:solidFill>
+          <a:ln/>
+        </p:spPr>
+      </p:sp>
+      <p:sp>
+        <p:nvSpPr>
+          <p:cNvPr id="73" name="Shape 71"/>
+          <p:cNvSpPr/>
+          <p:nvPr/>
+        </p:nvSpPr>
+        <p:spPr>
+          <a:xfrm>
+            <a:off x="4857750" y="4394143"/>
+            <a:ext cx="386715" cy="27519"/>
+          </a:xfrm>
+          <a:prstGeom prst="rect">
+            <a:avLst/>
+          </a:prstGeom>
+          <a:solidFill>
+            <a:srgbClr val="55708A"/>
+          </a:solidFill>
+          <a:ln/>
+        </p:spPr>
+      </p:sp>
+      <p:sp>
+        <p:nvSpPr>
+          <p:cNvPr id="74" name="Shape 72"/>
+          <p:cNvSpPr/>
+          <p:nvPr/>
+        </p:nvSpPr>
+        <p:spPr>
+          <a:xfrm>
+            <a:off x="5238750" y="4419009"/>
+            <a:ext cx="386715" cy="30692"/>
+          </a:xfrm>
+          <a:prstGeom prst="rect">
+            <a:avLst/>
+          </a:prstGeom>
+          <a:solidFill>
+            <a:srgbClr val="55708A"/>
+          </a:solidFill>
+          <a:ln/>
+        </p:spPr>
+      </p:sp>
+      <p:sp>
+        <p:nvSpPr>
+          <p:cNvPr id="75" name="Shape 73"/>
+          <p:cNvSpPr/>
+          <p:nvPr/>
+        </p:nvSpPr>
+        <p:spPr>
+          <a:xfrm>
+            <a:off x="5619750" y="4449026"/>
+            <a:ext cx="386715" cy="35166"/>
+          </a:xfrm>
+          <a:prstGeom prst="rect">
+            <a:avLst/>
+          </a:prstGeom>
+          <a:solidFill>
+            <a:srgbClr val="55708A"/>
+          </a:solidFill>
+          <a:ln/>
+        </p:spPr>
+      </p:sp>
+      <p:sp>
+        <p:nvSpPr>
+          <p:cNvPr id="76" name="Shape 74"/>
+          <p:cNvSpPr/>
+          <p:nvPr/>
+        </p:nvSpPr>
+        <p:spPr>
+          <a:xfrm>
+            <a:off x="6000750" y="4488874"/>
+            <a:ext cx="386715" cy="36675"/>
+          </a:xfrm>
+          <a:prstGeom prst="rect">
+            <a:avLst/>
+          </a:prstGeom>
+          <a:solidFill>
+            <a:srgbClr val="55708A"/>
+          </a:solidFill>
+          <a:ln/>
+        </p:spPr>
+      </p:sp>
+      <p:sp>
+        <p:nvSpPr>
+          <p:cNvPr id="77" name="Shape 75"/>
+          <p:cNvSpPr/>
+          <p:nvPr/>
+        </p:nvSpPr>
+        <p:spPr>
+          <a:xfrm>
+            <a:off x="6381750" y="4538242"/>
+            <a:ext cx="386715" cy="31629"/>
+          </a:xfrm>
+          <a:prstGeom prst="rect">
+            <a:avLst/>
+          </a:prstGeom>
+          <a:solidFill>
+            <a:srgbClr val="55708A"/>
+          </a:solidFill>
+          <a:ln/>
+        </p:spPr>
+      </p:sp>
+      <p:sp>
+        <p:nvSpPr>
+          <p:cNvPr id="78" name="Shape 76"/>
+          <p:cNvSpPr/>
+          <p:nvPr/>
+        </p:nvSpPr>
+        <p:spPr>
+          <a:xfrm>
+            <a:off x="6762750" y="4598743"/>
+            <a:ext cx="386715" cy="18624"/>
+          </a:xfrm>
+          <a:prstGeom prst="rect">
+            <a:avLst/>
+          </a:prstGeom>
+          <a:solidFill>
+            <a:srgbClr val="55708A"/>
+          </a:solidFill>
+          <a:ln/>
+        </p:spPr>
+      </p:sp>
+      <p:sp>
+        <p:nvSpPr>
+          <p:cNvPr id="79" name="Shape 77"/>
+          <p:cNvSpPr/>
+          <p:nvPr/>
+        </p:nvSpPr>
+        <p:spPr>
+          <a:xfrm>
+            <a:off x="7143750" y="4669075"/>
+            <a:ext cx="386715" cy="5715"/>
+          </a:xfrm>
+          <a:prstGeom prst="rect">
+            <a:avLst/>
+          </a:prstGeom>
+          <a:solidFill>
+            <a:srgbClr val="55708A"/>
+          </a:solidFill>
+          <a:ln/>
+        </p:spPr>
+      </p:sp>
+      <p:sp>
+        <p:nvSpPr>
+          <p:cNvPr id="80" name="Shape 78"/>
+          <p:cNvSpPr/>
+          <p:nvPr/>
+        </p:nvSpPr>
+        <p:spPr>
+          <a:xfrm>
+            <a:off x="7524750" y="4725102"/>
+            <a:ext cx="386715" cy="21797"/>
+          </a:xfrm>
+          <a:prstGeom prst="rect">
+            <a:avLst/>
+          </a:prstGeom>
+          <a:solidFill>
+            <a:srgbClr val="7E2333"/>
+          </a:solidFill>
+          <a:ln/>
+        </p:spPr>
+      </p:sp>
+      <p:sp>
+        <p:nvSpPr>
+          <p:cNvPr id="81" name="Shape 79"/>
+          <p:cNvSpPr/>
+          <p:nvPr/>
+        </p:nvSpPr>
+        <p:spPr>
+          <a:xfrm>
+            <a:off x="7905750" y="4777643"/>
+            <a:ext cx="386715" cy="39848"/>
+          </a:xfrm>
+          <a:prstGeom prst="rect">
+            <a:avLst/>
+          </a:prstGeom>
+          <a:solidFill>
+            <a:srgbClr val="7E2333"/>
+          </a:solidFill>
+          <a:ln/>
+        </p:spPr>
+      </p:sp>
+      <p:sp>
+        <p:nvSpPr>
+          <p:cNvPr id="82" name="Shape 80"/>
+          <p:cNvSpPr/>
+          <p:nvPr/>
+        </p:nvSpPr>
+        <p:spPr>
+          <a:xfrm>
+            <a:off x="8286750" y="4833826"/>
+            <a:ext cx="386715" cy="50304"/>
+          </a:xfrm>
+          <a:prstGeom prst="rect">
+            <a:avLst/>
+          </a:prstGeom>
+          <a:solidFill>
+            <a:srgbClr val="7E2333"/>
+          </a:solidFill>
+          <a:ln/>
+        </p:spPr>
+      </p:sp>
+      <p:sp>
+        <p:nvSpPr>
+          <p:cNvPr id="83" name="Shape 81"/>
+          <p:cNvSpPr/>
+          <p:nvPr/>
+        </p:nvSpPr>
+        <p:spPr>
+          <a:xfrm>
+            <a:off x="8667750" y="4901922"/>
+            <a:ext cx="386715" cy="51293"/>
+          </a:xfrm>
+          <a:prstGeom prst="rect">
+            <a:avLst/>
+          </a:prstGeom>
+          <a:solidFill>
+            <a:srgbClr val="7E2333"/>
+          </a:solidFill>
+          <a:ln/>
+        </p:spPr>
+      </p:sp>
+      <p:sp>
+        <p:nvSpPr>
+          <p:cNvPr id="84" name="Shape 82"/>
+          <p:cNvSpPr/>
+          <p:nvPr/>
+        </p:nvSpPr>
+        <p:spPr>
+          <a:xfrm>
+            <a:off x="9048750" y="4976364"/>
+            <a:ext cx="386715" cy="43906"/>
+          </a:xfrm>
+          <a:prstGeom prst="rect">
+            <a:avLst/>
+          </a:prstGeom>
+          <a:solidFill>
+            <a:srgbClr val="7E2333"/>
+          </a:solidFill>
+          <a:ln/>
+        </p:spPr>
+      </p:sp>
+      <p:sp>
+        <p:nvSpPr>
+          <p:cNvPr id="85" name="Shape 83"/>
+          <p:cNvSpPr/>
+          <p:nvPr/>
+        </p:nvSpPr>
+        <p:spPr>
+          <a:xfrm>
+            <a:off x="9429750" y="5057621"/>
+            <a:ext cx="386715" cy="31473"/>
+          </a:xfrm>
+          <a:prstGeom prst="rect">
+            <a:avLst/>
+          </a:prstGeom>
+          <a:solidFill>
+            <a:srgbClr val="7E2333"/>
+          </a:solidFill>
+          <a:ln/>
+        </p:spPr>
+      </p:sp>
+      <p:sp>
+        <p:nvSpPr>
+          <p:cNvPr id="86" name="Shape 84"/>
+          <p:cNvSpPr/>
+          <p:nvPr/>
+        </p:nvSpPr>
+        <p:spPr>
+          <a:xfrm>
+            <a:off x="9810750" y="5143976"/>
+            <a:ext cx="386715" cy="18103"/>
+          </a:xfrm>
+          <a:prstGeom prst="rect">
+            <a:avLst/>
+          </a:prstGeom>
+          <a:solidFill>
+            <a:srgbClr val="7E2333"/>
+          </a:solidFill>
+          <a:ln/>
+        </p:spPr>
+      </p:sp>
+      <p:sp>
+        <p:nvSpPr>
+          <p:cNvPr id="87" name="Shape 85"/>
+          <p:cNvSpPr/>
+          <p:nvPr/>
+        </p:nvSpPr>
+        <p:spPr>
+          <a:xfrm>
+            <a:off x="10191750" y="5233088"/>
+            <a:ext cx="386715" cy="7699"/>
+          </a:xfrm>
+          <a:prstGeom prst="rect">
+            <a:avLst/>
+          </a:prstGeom>
+          <a:solidFill>
+            <a:srgbClr val="7E2333"/>
+          </a:solidFill>
+          <a:ln/>
+        </p:spPr>
+      </p:sp>
+      <p:sp>
+        <p:nvSpPr>
+          <p:cNvPr id="88" name="Shape 86"/>
+          <p:cNvSpPr/>
+          <p:nvPr/>
+        </p:nvSpPr>
+        <p:spPr>
+          <a:xfrm>
+            <a:off x="10572750" y="5327403"/>
+            <a:ext cx="386715" cy="5715"/>
+          </a:xfrm>
+          <a:prstGeom prst="rect">
+            <a:avLst/>
+          </a:prstGeom>
+          <a:solidFill>
+            <a:srgbClr val="7E2333"/>
+          </a:solidFill>
+          <a:ln/>
+        </p:spPr>
+      </p:sp>
+      <p:sp>
+        <p:nvSpPr>
+          <p:cNvPr id="89" name="Shape 87"/>
+          <p:cNvSpPr/>
+          <p:nvPr/>
+        </p:nvSpPr>
+        <p:spPr>
+          <a:xfrm flipV="1">
+            <a:off x="1428750" y="4389513"/>
+            <a:ext cx="381000" cy="12901"/>
+          </a:xfrm>
+          <a:prstGeom prst="line">
+            <a:avLst/>
+          </a:prstGeom>
+          <a:noFill/>
+          <a:ln w="25400">
+            <a:solidFill>
+              <a:srgbClr val="A8BCD1"/>
+            </a:solidFill>
+            <a:prstDash val="dash"/>
+          </a:ln>
+        </p:spPr>
+      </p:sp>
+      <p:sp>
+        <p:nvSpPr>
+          <p:cNvPr id="90" name="Shape 88"/>
+          <p:cNvSpPr/>
+          <p:nvPr/>
+        </p:nvSpPr>
+        <p:spPr>
+          <a:xfrm flipV="1">
+            <a:off x="1809750" y="4379421"/>
+            <a:ext cx="381000" cy="10092"/>
+          </a:xfrm>
+          <a:prstGeom prst="line">
+            <a:avLst/>
+          </a:prstGeom>
+          <a:noFill/>
+          <a:ln w="25400">
+            <a:solidFill>
+              <a:srgbClr val="A8BCD1"/>
+            </a:solidFill>
+            <a:prstDash val="dash"/>
+          </a:ln>
+        </p:spPr>
+      </p:sp>
+      <p:sp>
+        <p:nvSpPr>
+          <p:cNvPr id="91" name="Shape 89"/>
+          <p:cNvSpPr/>
+          <p:nvPr/>
+        </p:nvSpPr>
+        <p:spPr>
+          <a:xfrm flipV="1">
+            <a:off x="2190750" y="4372555"/>
+            <a:ext cx="381000" cy="6867"/>
+          </a:xfrm>
+          <a:prstGeom prst="line">
+            <a:avLst/>
+          </a:prstGeom>
+          <a:noFill/>
+          <a:ln w="25400">
+            <a:solidFill>
+              <a:srgbClr val="A8BCD1"/>
+            </a:solidFill>
+            <a:prstDash val="dash"/>
+          </a:ln>
+        </p:spPr>
+      </p:sp>
+      <p:sp>
+        <p:nvSpPr>
+          <p:cNvPr id="92" name="Shape 90"/>
+          <p:cNvSpPr/>
+          <p:nvPr/>
+        </p:nvSpPr>
+        <p:spPr>
+          <a:xfrm flipV="1">
+            <a:off x="2571750" y="4351538"/>
+            <a:ext cx="381000" cy="21017"/>
+          </a:xfrm>
+          <a:prstGeom prst="line">
+            <a:avLst/>
+          </a:prstGeom>
+          <a:noFill/>
+          <a:ln w="25400">
+            <a:solidFill>
+              <a:srgbClr val="A8BCD1"/>
+            </a:solidFill>
+            <a:prstDash val="dash"/>
+          </a:ln>
+        </p:spPr>
+      </p:sp>
+      <p:sp>
+        <p:nvSpPr>
+          <p:cNvPr id="93" name="Shape 91"/>
+          <p:cNvSpPr/>
+          <p:nvPr/>
+        </p:nvSpPr>
+        <p:spPr>
+          <a:xfrm flipV="1">
+            <a:off x="2952750" y="4326256"/>
+            <a:ext cx="381000" cy="25282"/>
+          </a:xfrm>
+          <a:prstGeom prst="line">
+            <a:avLst/>
+          </a:prstGeom>
+          <a:noFill/>
+          <a:ln w="25400">
+            <a:solidFill>
+              <a:srgbClr val="A8BCD1"/>
+            </a:solidFill>
+            <a:prstDash val="dash"/>
+          </a:ln>
+        </p:spPr>
+      </p:sp>
+      <p:sp>
+        <p:nvSpPr>
+          <p:cNvPr id="94" name="Shape 92"/>
+          <p:cNvSpPr/>
+          <p:nvPr/>
+        </p:nvSpPr>
+        <p:spPr>
+          <a:xfrm>
+            <a:off x="3333750" y="4326256"/>
+            <a:ext cx="381000" cy="17479"/>
+          </a:xfrm>
+          <a:prstGeom prst="line">
+            <a:avLst/>
+          </a:prstGeom>
+          <a:noFill/>
+          <a:ln w="25400">
+            <a:solidFill>
+              <a:srgbClr val="A8BCD1"/>
+            </a:solidFill>
+            <a:prstDash val="dash"/>
+          </a:ln>
+        </p:spPr>
+      </p:sp>
+      <p:sp>
+        <p:nvSpPr>
+          <p:cNvPr id="95" name="Shape 93"/>
+          <p:cNvSpPr/>
+          <p:nvPr/>
+        </p:nvSpPr>
+        <p:spPr>
+          <a:xfrm>
+            <a:off x="3714750" y="4343735"/>
+            <a:ext cx="381000" cy="19040"/>
+          </a:xfrm>
+          <a:prstGeom prst="line">
+            <a:avLst/>
+          </a:prstGeom>
+          <a:noFill/>
+          <a:ln w="25400">
+            <a:solidFill>
+              <a:srgbClr val="A8BCD1"/>
+            </a:solidFill>
+            <a:prstDash val="dash"/>
+          </a:ln>
+        </p:spPr>
+      </p:sp>
+      <p:sp>
+        <p:nvSpPr>
+          <p:cNvPr id="96" name="Shape 94"/>
+          <p:cNvSpPr/>
+          <p:nvPr/>
+        </p:nvSpPr>
+        <p:spPr>
+          <a:xfrm>
+            <a:off x="4095750" y="4362775"/>
+            <a:ext cx="381000" cy="21329"/>
+          </a:xfrm>
+          <a:prstGeom prst="line">
+            <a:avLst/>
+          </a:prstGeom>
+          <a:noFill/>
+          <a:ln w="25400">
+            <a:solidFill>
+              <a:srgbClr val="A8BCD1"/>
+            </a:solidFill>
+            <a:prstDash val="dash"/>
+          </a:ln>
+        </p:spPr>
+      </p:sp>
+      <p:sp>
+        <p:nvSpPr>
+          <p:cNvPr id="97" name="Shape 95"/>
+          <p:cNvSpPr/>
+          <p:nvPr/>
+        </p:nvSpPr>
+        <p:spPr>
+          <a:xfrm>
+            <a:off x="4476750" y="4384103"/>
+            <a:ext cx="381000" cy="24242"/>
+          </a:xfrm>
+          <a:prstGeom prst="line">
+            <a:avLst/>
+          </a:prstGeom>
+          <a:noFill/>
+          <a:ln w="25400">
+            <a:solidFill>
+              <a:srgbClr val="A8BCD1"/>
+            </a:solidFill>
+            <a:prstDash val="dash"/>
+          </a:ln>
+        </p:spPr>
+      </p:sp>
+      <p:sp>
+        <p:nvSpPr>
+          <p:cNvPr id="98" name="Shape 96"/>
+          <p:cNvSpPr/>
+          <p:nvPr/>
+        </p:nvSpPr>
+        <p:spPr>
+          <a:xfrm>
+            <a:off x="4857750" y="4408345"/>
+            <a:ext cx="381000" cy="26635"/>
+          </a:xfrm>
+          <a:prstGeom prst="line">
+            <a:avLst/>
+          </a:prstGeom>
+          <a:noFill/>
+          <a:ln w="25400">
+            <a:solidFill>
+              <a:srgbClr val="A8BCD1"/>
+            </a:solidFill>
+            <a:prstDash val="dash"/>
+          </a:ln>
+        </p:spPr>
+      </p:sp>
+      <p:sp>
+        <p:nvSpPr>
+          <p:cNvPr id="99" name="Shape 97"/>
+          <p:cNvSpPr/>
+          <p:nvPr/>
+        </p:nvSpPr>
+        <p:spPr>
+          <a:xfrm>
+            <a:off x="5238750" y="4434980"/>
+            <a:ext cx="381000" cy="29444"/>
+          </a:xfrm>
+          <a:prstGeom prst="line">
+            <a:avLst/>
+          </a:prstGeom>
+          <a:noFill/>
+          <a:ln w="25400">
+            <a:solidFill>
+              <a:srgbClr val="A8BCD1"/>
+            </a:solidFill>
+            <a:prstDash val="dash"/>
+          </a:ln>
+        </p:spPr>
+      </p:sp>
+      <p:sp>
+        <p:nvSpPr>
+          <p:cNvPr id="100" name="Shape 98"/>
+          <p:cNvSpPr/>
+          <p:nvPr/>
+        </p:nvSpPr>
+        <p:spPr>
+          <a:xfrm>
+            <a:off x="5619750" y="4464424"/>
+            <a:ext cx="381000" cy="39536"/>
+          </a:xfrm>
+          <a:prstGeom prst="line">
+            <a:avLst/>
+          </a:prstGeom>
+          <a:noFill/>
+          <a:ln w="25400">
+            <a:solidFill>
+              <a:srgbClr val="A8BCD1"/>
+            </a:solidFill>
+            <a:prstDash val="dash"/>
+          </a:ln>
+        </p:spPr>
+      </p:sp>
+      <p:sp>
+        <p:nvSpPr>
+          <p:cNvPr id="101" name="Shape 99"/>
+          <p:cNvSpPr/>
+          <p:nvPr/>
+        </p:nvSpPr>
+        <p:spPr>
+          <a:xfrm>
+            <a:off x="6000750" y="4503960"/>
+            <a:ext cx="381000" cy="43178"/>
+          </a:xfrm>
+          <a:prstGeom prst="line">
+            <a:avLst/>
+          </a:prstGeom>
+          <a:noFill/>
+          <a:ln w="25400">
+            <a:solidFill>
+              <a:srgbClr val="A8BCD1"/>
+            </a:solidFill>
+            <a:prstDash val="dash"/>
+          </a:ln>
+        </p:spPr>
+      </p:sp>
+      <p:sp>
+        <p:nvSpPr>
+          <p:cNvPr id="102" name="Shape 100"/>
+          <p:cNvSpPr/>
+          <p:nvPr/>
+        </p:nvSpPr>
+        <p:spPr>
+          <a:xfrm>
+            <a:off x="6381750" y="4547138"/>
+            <a:ext cx="381000" cy="45466"/>
+          </a:xfrm>
+          <a:prstGeom prst="line">
+            <a:avLst/>
+          </a:prstGeom>
+          <a:noFill/>
+          <a:ln w="25400">
+            <a:solidFill>
+              <a:srgbClr val="A8BCD1"/>
+            </a:solidFill>
+            <a:prstDash val="dash"/>
+          </a:ln>
+        </p:spPr>
+      </p:sp>
+      <p:sp>
+        <p:nvSpPr>
+          <p:cNvPr id="103" name="Shape 101"/>
+          <p:cNvSpPr/>
+          <p:nvPr/>
+        </p:nvSpPr>
+        <p:spPr>
+          <a:xfrm>
+            <a:off x="6762750" y="4592604"/>
+            <a:ext cx="381000" cy="49524"/>
+          </a:xfrm>
+          <a:prstGeom prst="line">
+            <a:avLst/>
+          </a:prstGeom>
+          <a:noFill/>
+          <a:ln w="25400">
+            <a:solidFill>
+              <a:srgbClr val="A8BCD1"/>
+            </a:solidFill>
+            <a:prstDash val="dash"/>
+          </a:ln>
+        </p:spPr>
+      </p:sp>
+      <p:sp>
+        <p:nvSpPr>
+          <p:cNvPr id="104" name="Shape 102"/>
+          <p:cNvSpPr/>
+          <p:nvPr/>
+        </p:nvSpPr>
+        <p:spPr>
+          <a:xfrm>
+            <a:off x="7143750" y="4642128"/>
+            <a:ext cx="381000" cy="53894"/>
+          </a:xfrm>
+          <a:prstGeom prst="line">
+            <a:avLst/>
+          </a:prstGeom>
+          <a:noFill/>
+          <a:ln w="25400">
+            <a:solidFill>
+              <a:srgbClr val="A8BCD1"/>
+            </a:solidFill>
+            <a:prstDash val="dash"/>
+          </a:ln>
+        </p:spPr>
+      </p:sp>
+      <p:sp>
+        <p:nvSpPr>
+          <p:cNvPr id="105" name="Shape 103"/>
+          <p:cNvSpPr/>
+          <p:nvPr/>
+        </p:nvSpPr>
+        <p:spPr>
+          <a:xfrm>
+            <a:off x="7524750" y="4696022"/>
+            <a:ext cx="381000" cy="58160"/>
+          </a:xfrm>
+          <a:prstGeom prst="line">
+            <a:avLst/>
+          </a:prstGeom>
+          <a:noFill/>
+          <a:ln w="25400">
+            <a:solidFill>
+              <a:srgbClr val="A8BCD1"/>
+            </a:solidFill>
+            <a:prstDash val="dash"/>
+          </a:ln>
+        </p:spPr>
+      </p:sp>
+      <p:sp>
+        <p:nvSpPr>
+          <p:cNvPr id="106" name="Shape 104"/>
+          <p:cNvSpPr/>
+          <p:nvPr/>
+        </p:nvSpPr>
+        <p:spPr>
+          <a:xfrm>
+            <a:off x="7905750" y="4754182"/>
+            <a:ext cx="381000" cy="46923"/>
+          </a:xfrm>
+          <a:prstGeom prst="line">
+            <a:avLst/>
+          </a:prstGeom>
+          <a:noFill/>
+          <a:ln w="25400">
+            <a:solidFill>
+              <a:srgbClr val="A8BCD1"/>
+            </a:solidFill>
+            <a:prstDash val="dash"/>
+          </a:ln>
+        </p:spPr>
+      </p:sp>
+      <p:sp>
+        <p:nvSpPr>
+          <p:cNvPr id="107" name="Shape 105"/>
+          <p:cNvSpPr/>
+          <p:nvPr/>
+        </p:nvSpPr>
+        <p:spPr>
+          <a:xfrm>
+            <a:off x="8286750" y="4801105"/>
+            <a:ext cx="381000" cy="65443"/>
+          </a:xfrm>
+          <a:prstGeom prst="line">
+            <a:avLst/>
+          </a:prstGeom>
+          <a:noFill/>
+          <a:ln w="25400">
+            <a:solidFill>
+              <a:srgbClr val="A8BCD1"/>
+            </a:solidFill>
+            <a:prstDash val="dash"/>
+          </a:ln>
+        </p:spPr>
+      </p:sp>
+      <p:sp>
+        <p:nvSpPr>
+          <p:cNvPr id="108" name="Shape 106"/>
+          <p:cNvSpPr/>
+          <p:nvPr/>
+        </p:nvSpPr>
+        <p:spPr>
+          <a:xfrm>
+            <a:off x="8667750" y="4866547"/>
+            <a:ext cx="381000" cy="70749"/>
+          </a:xfrm>
+          <a:prstGeom prst="line">
+            <a:avLst/>
+          </a:prstGeom>
+          <a:noFill/>
+          <a:ln w="25400">
+            <a:solidFill>
+              <a:srgbClr val="A8BCD1"/>
+            </a:solidFill>
+            <a:prstDash val="dash"/>
+          </a:ln>
+        </p:spPr>
+      </p:sp>
+      <p:sp>
+        <p:nvSpPr>
+          <p:cNvPr id="109" name="Shape 107"/>
+          <p:cNvSpPr/>
+          <p:nvPr/>
+        </p:nvSpPr>
+        <p:spPr>
+          <a:xfrm>
+            <a:off x="9048750" y="4937296"/>
+            <a:ext cx="381000" cy="78136"/>
+          </a:xfrm>
+          <a:prstGeom prst="line">
+            <a:avLst/>
+          </a:prstGeom>
+          <a:noFill/>
+          <a:ln w="25400">
+            <a:solidFill>
+              <a:srgbClr val="A8BCD1"/>
+            </a:solidFill>
+            <a:prstDash val="dash"/>
+          </a:ln>
+        </p:spPr>
+      </p:sp>
+      <p:sp>
+        <p:nvSpPr>
+          <p:cNvPr id="110" name="Shape 108"/>
+          <p:cNvSpPr/>
+          <p:nvPr/>
+        </p:nvSpPr>
+        <p:spPr>
+          <a:xfrm>
+            <a:off x="9429750" y="5015432"/>
+            <a:ext cx="381000" cy="84378"/>
+          </a:xfrm>
+          <a:prstGeom prst="line">
+            <a:avLst/>
+          </a:prstGeom>
+          <a:noFill/>
+          <a:ln w="25400">
+            <a:solidFill>
+              <a:srgbClr val="A8BCD1"/>
+            </a:solidFill>
+            <a:prstDash val="dash"/>
+          </a:ln>
+        </p:spPr>
+      </p:sp>
+      <p:sp>
+        <p:nvSpPr>
+          <p:cNvPr id="111" name="Shape 109"/>
+          <p:cNvSpPr/>
+          <p:nvPr/>
+        </p:nvSpPr>
+        <p:spPr>
+          <a:xfrm>
+            <a:off x="9810750" y="5099810"/>
+            <a:ext cx="381000" cy="88332"/>
+          </a:xfrm>
+          <a:prstGeom prst="line">
+            <a:avLst/>
+          </a:prstGeom>
+          <a:noFill/>
+          <a:ln w="25400">
+            <a:solidFill>
+              <a:srgbClr val="A8BCD1"/>
+            </a:solidFill>
+            <a:prstDash val="dash"/>
+          </a:ln>
+        </p:spPr>
+      </p:sp>
+      <p:sp>
+        <p:nvSpPr>
+          <p:cNvPr id="112" name="Shape 110"/>
+          <p:cNvSpPr/>
+          <p:nvPr/>
+        </p:nvSpPr>
+        <p:spPr>
+          <a:xfrm>
+            <a:off x="10191750" y="5188142"/>
+            <a:ext cx="381000" cy="89893"/>
+          </a:xfrm>
+          <a:prstGeom prst="line">
+            <a:avLst/>
+          </a:prstGeom>
+          <a:noFill/>
+          <a:ln w="25400">
+            <a:solidFill>
+              <a:srgbClr val="A8BCD1"/>
+            </a:solidFill>
+            <a:prstDash val="dash"/>
+          </a:ln>
+        </p:spPr>
+      </p:sp>
+      <p:sp>
+        <p:nvSpPr>
+          <p:cNvPr id="113" name="Shape 111"/>
+          <p:cNvSpPr/>
+          <p:nvPr/>
+        </p:nvSpPr>
+        <p:spPr>
+          <a:xfrm>
+            <a:off x="10572750" y="5278035"/>
+            <a:ext cx="381000" cy="98736"/>
+          </a:xfrm>
+          <a:prstGeom prst="line">
+            <a:avLst/>
+          </a:prstGeom>
+          <a:noFill/>
+          <a:ln w="25400">
+            <a:solidFill>
+              <a:srgbClr val="A8BCD1"/>
+            </a:solidFill>
+            <a:prstDash val="dash"/>
+          </a:ln>
+        </p:spPr>
+      </p:sp>
+      <p:sp>
+        <p:nvSpPr>
+          <p:cNvPr id="114" name="Shape 112"/>
+          <p:cNvSpPr/>
+          <p:nvPr/>
+        </p:nvSpPr>
+        <p:spPr>
+          <a:xfrm flipV="1">
+            <a:off x="1428750" y="4323707"/>
+            <a:ext cx="381000" cy="12901"/>
+          </a:xfrm>
+          <a:prstGeom prst="line">
+            <a:avLst/>
+          </a:prstGeom>
+          <a:noFill/>
+          <a:ln w="30480">
+            <a:solidFill>
+              <a:srgbClr val="EFB13C"/>
+            </a:solidFill>
+            <a:prstDash val="solid"/>
+          </a:ln>
+        </p:spPr>
+      </p:sp>
+      <p:sp>
+        <p:nvSpPr>
+          <p:cNvPr id="115" name="Shape 113"/>
+          <p:cNvSpPr/>
+          <p:nvPr/>
+        </p:nvSpPr>
+        <p:spPr>
+          <a:xfrm flipV="1">
+            <a:off x="1809750" y="4313615"/>
+            <a:ext cx="381000" cy="10092"/>
+          </a:xfrm>
+          <a:prstGeom prst="line">
+            <a:avLst/>
+          </a:prstGeom>
+          <a:noFill/>
+          <a:ln w="30480">
+            <a:solidFill>
+              <a:srgbClr val="EFB13C"/>
+            </a:solidFill>
+            <a:prstDash val="solid"/>
+          </a:ln>
+        </p:spPr>
+      </p:sp>
+      <p:sp>
+        <p:nvSpPr>
+          <p:cNvPr id="116" name="Shape 114"/>
+          <p:cNvSpPr/>
+          <p:nvPr/>
+        </p:nvSpPr>
+        <p:spPr>
+          <a:xfrm flipV="1">
+            <a:off x="2190750" y="4306748"/>
+            <a:ext cx="381000" cy="6867"/>
+          </a:xfrm>
+          <a:prstGeom prst="line">
+            <a:avLst/>
+          </a:prstGeom>
+          <a:noFill/>
+          <a:ln w="30480">
+            <a:solidFill>
+              <a:srgbClr val="EFB13C"/>
+            </a:solidFill>
+            <a:prstDash val="solid"/>
+          </a:ln>
+        </p:spPr>
+      </p:sp>
+      <p:sp>
+        <p:nvSpPr>
+          <p:cNvPr id="117" name="Shape 115"/>
+          <p:cNvSpPr/>
+          <p:nvPr/>
+        </p:nvSpPr>
+        <p:spPr>
+          <a:xfrm flipV="1">
+            <a:off x="2571750" y="4285731"/>
+            <a:ext cx="381000" cy="21017"/>
+          </a:xfrm>
+          <a:prstGeom prst="line">
+            <a:avLst/>
+          </a:prstGeom>
+          <a:noFill/>
+          <a:ln w="30480">
+            <a:solidFill>
+              <a:srgbClr val="EFB13C"/>
+            </a:solidFill>
+            <a:prstDash val="solid"/>
+          </a:ln>
+        </p:spPr>
+      </p:sp>
+      <p:sp>
+        <p:nvSpPr>
+          <p:cNvPr id="118" name="Shape 116"/>
+          <p:cNvSpPr/>
+          <p:nvPr/>
+        </p:nvSpPr>
+        <p:spPr>
+          <a:xfrm flipV="1">
+            <a:off x="2952750" y="4273974"/>
+            <a:ext cx="381000" cy="11757"/>
+          </a:xfrm>
+          <a:prstGeom prst="line">
+            <a:avLst/>
+          </a:prstGeom>
+          <a:noFill/>
+          <a:ln w="30480">
+            <a:solidFill>
+              <a:srgbClr val="EFB13C"/>
+            </a:solidFill>
+            <a:prstDash val="solid"/>
+          </a:ln>
+        </p:spPr>
+      </p:sp>
+      <p:sp>
+        <p:nvSpPr>
+          <p:cNvPr id="119" name="Shape 117"/>
+          <p:cNvSpPr/>
+          <p:nvPr/>
+        </p:nvSpPr>
+        <p:spPr>
+          <a:xfrm>
+            <a:off x="3333750" y="4273974"/>
+            <a:ext cx="381000" cy="18103"/>
+          </a:xfrm>
+          <a:prstGeom prst="line">
+            <a:avLst/>
+          </a:prstGeom>
+          <a:noFill/>
+          <a:ln w="30480">
+            <a:solidFill>
+              <a:srgbClr val="EFB13C"/>
+            </a:solidFill>
+            <a:prstDash val="solid"/>
+          </a:ln>
+        </p:spPr>
+      </p:sp>
+      <p:sp>
+        <p:nvSpPr>
+          <p:cNvPr id="120" name="Shape 118"/>
+          <p:cNvSpPr/>
+          <p:nvPr/>
+        </p:nvSpPr>
+        <p:spPr>
+          <a:xfrm>
+            <a:off x="3714750" y="4292078"/>
+            <a:ext cx="381000" cy="30484"/>
+          </a:xfrm>
+          <a:prstGeom prst="line">
+            <a:avLst/>
+          </a:prstGeom>
+          <a:noFill/>
+          <a:ln w="30480">
+            <a:solidFill>
+              <a:srgbClr val="EFB13C"/>
+            </a:solidFill>
+            <a:prstDash val="solid"/>
+          </a:ln>
+        </p:spPr>
+      </p:sp>
+      <p:sp>
+        <p:nvSpPr>
+          <p:cNvPr id="121" name="Shape 119"/>
+          <p:cNvSpPr/>
+          <p:nvPr/>
+        </p:nvSpPr>
+        <p:spPr>
+          <a:xfrm>
+            <a:off x="4095750" y="4322562"/>
+            <a:ext cx="381000" cy="30588"/>
+          </a:xfrm>
+          <a:prstGeom prst="line">
+            <a:avLst/>
+          </a:prstGeom>
+          <a:noFill/>
+          <a:ln w="30480">
+            <a:solidFill>
+              <a:srgbClr val="EFB13C"/>
+            </a:solidFill>
+            <a:prstDash val="solid"/>
+          </a:ln>
+        </p:spPr>
+      </p:sp>
+      <p:sp>
+        <p:nvSpPr>
+          <p:cNvPr id="122" name="Shape 120"/>
+          <p:cNvSpPr/>
+          <p:nvPr/>
+        </p:nvSpPr>
+        <p:spPr>
+          <a:xfrm>
+            <a:off x="4476750" y="4353151"/>
+            <a:ext cx="381000" cy="28404"/>
+          </a:xfrm>
+          <a:prstGeom prst="line">
+            <a:avLst/>
+          </a:prstGeom>
+          <a:noFill/>
+          <a:ln w="30480">
+            <a:solidFill>
+              <a:srgbClr val="EFB13C"/>
+            </a:solidFill>
+            <a:prstDash val="solid"/>
+          </a:ln>
+        </p:spPr>
+      </p:sp>
+      <p:sp>
+        <p:nvSpPr>
+          <p:cNvPr id="123" name="Shape 121"/>
+          <p:cNvSpPr/>
+          <p:nvPr/>
+        </p:nvSpPr>
+        <p:spPr>
+          <a:xfrm>
+            <a:off x="4857750" y="4381554"/>
+            <a:ext cx="381000" cy="25178"/>
+          </a:xfrm>
+          <a:prstGeom prst="line">
+            <a:avLst/>
+          </a:prstGeom>
+          <a:noFill/>
+          <a:ln w="30480">
+            <a:solidFill>
+              <a:srgbClr val="EFB13C"/>
+            </a:solidFill>
+            <a:prstDash val="solid"/>
+          </a:ln>
+        </p:spPr>
+      </p:sp>
+      <p:sp>
+        <p:nvSpPr>
+          <p:cNvPr id="124" name="Shape 122"/>
+          <p:cNvSpPr/>
+          <p:nvPr/>
+        </p:nvSpPr>
+        <p:spPr>
+          <a:xfrm>
+            <a:off x="5238750" y="4406732"/>
+            <a:ext cx="381000" cy="24554"/>
+          </a:xfrm>
+          <a:prstGeom prst="line">
+            <a:avLst/>
+          </a:prstGeom>
+          <a:noFill/>
+          <a:ln w="30480">
+            <a:solidFill>
+              <a:srgbClr val="EFB13C"/>
+            </a:solidFill>
+            <a:prstDash val="solid"/>
+          </a:ln>
+        </p:spPr>
+      </p:sp>
+      <p:sp>
+        <p:nvSpPr>
+          <p:cNvPr id="125" name="Shape 123"/>
+          <p:cNvSpPr/>
+          <p:nvPr/>
+        </p:nvSpPr>
+        <p:spPr>
+          <a:xfrm>
+            <a:off x="5619750" y="4431286"/>
+            <a:ext cx="381000" cy="35478"/>
+          </a:xfrm>
+          <a:prstGeom prst="line">
+            <a:avLst/>
+          </a:prstGeom>
+          <a:noFill/>
+          <a:ln w="30480">
+            <a:solidFill>
+              <a:srgbClr val="EFB13C"/>
+            </a:solidFill>
+            <a:prstDash val="solid"/>
+          </a:ln>
+        </p:spPr>
+      </p:sp>
+      <p:sp>
+        <p:nvSpPr>
+          <p:cNvPr id="126" name="Shape 124"/>
+          <p:cNvSpPr/>
+          <p:nvPr/>
+        </p:nvSpPr>
+        <p:spPr>
+          <a:xfrm>
+            <a:off x="6000750" y="4466765"/>
+            <a:ext cx="381000" cy="44218"/>
+          </a:xfrm>
+          <a:prstGeom prst="line">
+            <a:avLst/>
+          </a:prstGeom>
+          <a:noFill/>
+          <a:ln w="30480">
+            <a:solidFill>
+              <a:srgbClr val="EFB13C"/>
+            </a:solidFill>
+            <a:prstDash val="solid"/>
+          </a:ln>
+        </p:spPr>
+      </p:sp>
+      <p:sp>
+        <p:nvSpPr>
+          <p:cNvPr id="127" name="Shape 125"/>
+          <p:cNvSpPr/>
+          <p:nvPr/>
+        </p:nvSpPr>
+        <p:spPr>
+          <a:xfrm>
+            <a:off x="6381750" y="4510983"/>
+            <a:ext cx="381000" cy="54518"/>
+          </a:xfrm>
+          <a:prstGeom prst="line">
+            <a:avLst/>
+          </a:prstGeom>
+          <a:noFill/>
+          <a:ln w="30480">
+            <a:solidFill>
+              <a:srgbClr val="EFB13C"/>
+            </a:solidFill>
+            <a:prstDash val="solid"/>
+          </a:ln>
+        </p:spPr>
+      </p:sp>
+      <p:sp>
+        <p:nvSpPr>
+          <p:cNvPr id="128" name="Shape 126"/>
+          <p:cNvSpPr/>
+          <p:nvPr/>
+        </p:nvSpPr>
+        <p:spPr>
+          <a:xfrm>
+            <a:off x="6762750" y="4565501"/>
+            <a:ext cx="381000" cy="66483"/>
+          </a:xfrm>
+          <a:prstGeom prst="line">
+            <a:avLst/>
+          </a:prstGeom>
+          <a:noFill/>
+          <a:ln w="30480">
+            <a:solidFill>
+              <a:srgbClr val="EFB13C"/>
+            </a:solidFill>
+            <a:prstDash val="solid"/>
+          </a:ln>
+        </p:spPr>
+      </p:sp>
+      <p:sp>
+        <p:nvSpPr>
+          <p:cNvPr id="129" name="Shape 127"/>
+          <p:cNvSpPr/>
+          <p:nvPr/>
+        </p:nvSpPr>
+        <p:spPr>
+          <a:xfrm>
+            <a:off x="7143750" y="4631984"/>
+            <a:ext cx="381000" cy="75327"/>
+          </a:xfrm>
+          <a:prstGeom prst="line">
+            <a:avLst/>
+          </a:prstGeom>
+          <a:noFill/>
+          <a:ln w="30480">
+            <a:solidFill>
+              <a:srgbClr val="EFB13C"/>
+            </a:solidFill>
+            <a:prstDash val="solid"/>
+          </a:ln>
+        </p:spPr>
+      </p:sp>
+      <p:sp>
+        <p:nvSpPr>
+          <p:cNvPr id="130" name="Shape 128"/>
+          <p:cNvSpPr/>
+          <p:nvPr/>
+        </p:nvSpPr>
+        <p:spPr>
+          <a:xfrm>
+            <a:off x="7524750" y="4707311"/>
+            <a:ext cx="381000" cy="79176"/>
+          </a:xfrm>
+          <a:prstGeom prst="line">
+            <a:avLst/>
+          </a:prstGeom>
+          <a:noFill/>
+          <a:ln w="30480">
+            <a:solidFill>
+              <a:srgbClr val="EFB13C"/>
+            </a:solidFill>
+            <a:prstDash val="solid"/>
+          </a:ln>
+        </p:spPr>
+      </p:sp>
+      <p:sp>
+        <p:nvSpPr>
+          <p:cNvPr id="131" name="Shape 129"/>
+          <p:cNvSpPr/>
+          <p:nvPr/>
+        </p:nvSpPr>
+        <p:spPr>
+          <a:xfrm>
+            <a:off x="7905750" y="4786487"/>
+            <a:ext cx="381000" cy="62009"/>
+          </a:xfrm>
+          <a:prstGeom prst="line">
+            <a:avLst/>
+          </a:prstGeom>
+          <a:noFill/>
+          <a:ln w="30480">
+            <a:solidFill>
+              <a:srgbClr val="EFB13C"/>
+            </a:solidFill>
+            <a:prstDash val="solid"/>
+          </a:ln>
+        </p:spPr>
+      </p:sp>
+      <p:sp>
+        <p:nvSpPr>
+          <p:cNvPr id="132" name="Shape 130"/>
+          <p:cNvSpPr/>
+          <p:nvPr/>
+        </p:nvSpPr>
+        <p:spPr>
+          <a:xfrm>
+            <a:off x="8286750" y="4848496"/>
+            <a:ext cx="381000" cy="71269"/>
+          </a:xfrm>
+          <a:prstGeom prst="line">
+            <a:avLst/>
+          </a:prstGeom>
+          <a:noFill/>
+          <a:ln w="30480">
+            <a:solidFill>
+              <a:srgbClr val="EFB13C"/>
+            </a:solidFill>
+            <a:prstDash val="solid"/>
+          </a:ln>
+        </p:spPr>
+      </p:sp>
+      <p:sp>
+        <p:nvSpPr>
+          <p:cNvPr id="133" name="Shape 131"/>
+          <p:cNvSpPr/>
+          <p:nvPr/>
+        </p:nvSpPr>
+        <p:spPr>
+          <a:xfrm>
+            <a:off x="8667750" y="4919765"/>
+            <a:ext cx="381000" cy="66899"/>
+          </a:xfrm>
+          <a:prstGeom prst="line">
+            <a:avLst/>
+          </a:prstGeom>
+          <a:noFill/>
+          <a:ln w="30480">
+            <a:solidFill>
+              <a:srgbClr val="EFB13C"/>
+            </a:solidFill>
+            <a:prstDash val="solid"/>
+          </a:ln>
+        </p:spPr>
+      </p:sp>
+      <p:sp>
+        <p:nvSpPr>
+          <p:cNvPr id="134" name="Shape 132"/>
+          <p:cNvSpPr/>
+          <p:nvPr/>
+        </p:nvSpPr>
+        <p:spPr>
+          <a:xfrm>
+            <a:off x="9048750" y="4986664"/>
+            <a:ext cx="381000" cy="67211"/>
+          </a:xfrm>
+          <a:prstGeom prst="line">
+            <a:avLst/>
+          </a:prstGeom>
+          <a:noFill/>
+          <a:ln w="30480">
+            <a:solidFill>
+              <a:srgbClr val="EFB13C"/>
+            </a:solidFill>
+            <a:prstDash val="solid"/>
+          </a:ln>
+        </p:spPr>
+      </p:sp>
+      <p:sp>
+        <p:nvSpPr>
+          <p:cNvPr id="135" name="Shape 133"/>
+          <p:cNvSpPr/>
+          <p:nvPr/>
+        </p:nvSpPr>
+        <p:spPr>
+          <a:xfrm>
+            <a:off x="9429750" y="5053876"/>
+            <a:ext cx="381000" cy="70437"/>
+          </a:xfrm>
+          <a:prstGeom prst="line">
+            <a:avLst/>
+          </a:prstGeom>
+          <a:noFill/>
+          <a:ln w="30480">
+            <a:solidFill>
+              <a:srgbClr val="EFB13C"/>
+            </a:solidFill>
+            <a:prstDash val="solid"/>
+          </a:ln>
+        </p:spPr>
+      </p:sp>
+      <p:sp>
+        <p:nvSpPr>
+          <p:cNvPr id="136" name="Shape 134"/>
+          <p:cNvSpPr/>
+          <p:nvPr/>
+        </p:nvSpPr>
+        <p:spPr>
+          <a:xfrm>
+            <a:off x="9810750" y="5124312"/>
+            <a:ext cx="381000" cy="75535"/>
+          </a:xfrm>
+          <a:prstGeom prst="line">
+            <a:avLst/>
+          </a:prstGeom>
+          <a:noFill/>
+          <a:ln w="30480">
+            <a:solidFill>
+              <a:srgbClr val="EFB13C"/>
+            </a:solidFill>
+            <a:prstDash val="solid"/>
+          </a:ln>
+        </p:spPr>
+      </p:sp>
+      <p:sp>
+        <p:nvSpPr>
+          <p:cNvPr id="137" name="Shape 135"/>
+          <p:cNvSpPr/>
+          <p:nvPr/>
+        </p:nvSpPr>
+        <p:spPr>
+          <a:xfrm>
+            <a:off x="10191750" y="5199847"/>
+            <a:ext cx="381000" cy="81881"/>
+          </a:xfrm>
+          <a:prstGeom prst="line">
+            <a:avLst/>
+          </a:prstGeom>
+          <a:noFill/>
+          <a:ln w="30480">
+            <a:solidFill>
+              <a:srgbClr val="EFB13C"/>
+            </a:solidFill>
+            <a:prstDash val="solid"/>
+          </a:ln>
+        </p:spPr>
+      </p:sp>
+      <p:sp>
+        <p:nvSpPr>
+          <p:cNvPr id="138" name="Shape 136"/>
+          <p:cNvSpPr/>
+          <p:nvPr/>
+        </p:nvSpPr>
+        <p:spPr>
+          <a:xfrm>
+            <a:off x="10572750" y="5281728"/>
+            <a:ext cx="381000" cy="98632"/>
+          </a:xfrm>
+          <a:prstGeom prst="line">
+            <a:avLst/>
+          </a:prstGeom>
+          <a:noFill/>
+          <a:ln w="30480">
+            <a:solidFill>
+              <a:srgbClr val="EFB13C"/>
+            </a:solidFill>
+            <a:prstDash val="solid"/>
+          </a:ln>
+        </p:spPr>
+      </p:sp>
+      <p:sp>
+        <p:nvSpPr>
+          <p:cNvPr id="139" name="Shape 137"/>
+          <p:cNvSpPr/>
+          <p:nvPr/>
+        </p:nvSpPr>
+        <p:spPr>
+          <a:xfrm>
+            <a:off x="7524750" y="4095750"/>
+            <a:ext cx="0" cy="1352550"/>
+          </a:xfrm>
+          <a:prstGeom prst="line">
+            <a:avLst/>
+          </a:prstGeom>
+          <a:noFill/>
+          <a:ln w="12700">
+            <a:solidFill>
+              <a:srgbClr val="8A8880"/>
+            </a:solidFill>
+            <a:prstDash val="dash"/>
+          </a:ln>
+        </p:spPr>
+      </p:sp>
+      <p:sp>
+        <p:nvSpPr>
+          <p:cNvPr id="140" name="Text 138"/>
+          <p:cNvSpPr txBox="1"/>
+          <p:nvPr/>
+        </p:nvSpPr>
+        <p:spPr>
+          <a:xfrm>
+            <a:off x="7600950" y="4114800"/>
+            <a:ext cx="2095500" cy="131445"/>
+          </a:xfrm>
+          <a:prstGeom prst="rect">
+            <a:avLst/>
+          </a:prstGeom>
+          <a:noFill/>
+          <a:ln/>
+        </p:spPr>
+        <p:txBody>
+          <a:bodyPr wrap="square" lIns="0" tIns="0" rIns="0" bIns="0" rtlCol="0" anchor="t"/>
+          <a:lstStyle/>
+          <a:p>
+            <a:pPr algn="l" indent="0" marL="0">
+              <a:lnSpc>
+                <a:spcPts val="1035"/>
+              </a:lnSpc>
+              <a:buNone/>
+            </a:pPr>
+            <a:r>
+              <a:rPr lang="en-US" sz="863" dirty="0">
                 <a:solidFill>
                   <a:srgbClr val="A9A79F"/>
                 </a:solidFill>
@@ -20826,225 +20280,339 @@
                 <a:ea typeface="Malgun Gothic" pitchFamily="34" charset="-122"/>
                 <a:cs typeface="Malgun Gothic" pitchFamily="34" charset="-120"/>
               </a:rPr>
-              <a:t>MW</a:t>
-            </a:r>
-            <a:endParaRPr lang="en-US" sz="1125" dirty="0"/>
-          </a:p>
-        </p:txBody>
-      </p:sp>
-      <p:sp>
-        <p:nvSpPr>
-          <p:cNvPr id="130" name="Text 128"/>
-          <p:cNvSpPr txBox="1"/>
-          <p:nvPr/>
-        </p:nvSpPr>
-        <p:spPr>
-          <a:xfrm>
-            <a:off x="914400" y="5715000"/>
-            <a:ext cx="4762500" cy="240030"/>
-          </a:xfrm>
-          <a:prstGeom prst="rect">
-            <a:avLst/>
-          </a:prstGeom>
-          <a:noFill/>
-          <a:ln/>
-        </p:spPr>
-        <p:txBody>
-          <a:bodyPr wrap="square" lIns="0" tIns="0" rIns="0" bIns="0" rtlCol="0" anchor="t"/>
-          <a:lstStyle/>
-          <a:p>
-            <a:pPr algn="l" indent="0" marL="0">
-              <a:lnSpc>
-                <a:spcPts val="1890"/>
-              </a:lnSpc>
-              <a:buNone/>
-            </a:pPr>
-            <a:r>
-              <a:rPr lang="en-US" sz="1125" dirty="0">
-                <a:solidFill>
-                  <a:srgbClr val="CFCBC2"/>
+              <a:t>여기서 방향이 바뀝니다 (22℃)</a:t>
+            </a:r>
+            <a:endParaRPr lang="en-US" sz="863" dirty="0"/>
+          </a:p>
+        </p:txBody>
+      </p:sp>
+      <p:sp>
+        <p:nvSpPr>
+          <p:cNvPr id="141" name="Text 139"/>
+          <p:cNvSpPr txBox="1"/>
+          <p:nvPr/>
+        </p:nvSpPr>
+        <p:spPr>
+          <a:xfrm>
+            <a:off x="3467100" y="4223915"/>
+            <a:ext cx="2381250" cy="137160"/>
+          </a:xfrm>
+          <a:prstGeom prst="rect">
+            <a:avLst/>
+          </a:prstGeom>
+          <a:noFill/>
+          <a:ln/>
+        </p:spPr>
+        <p:txBody>
+          <a:bodyPr wrap="square" lIns="0" tIns="0" rIns="0" bIns="0" rtlCol="0" anchor="t"/>
+          <a:lstStyle/>
+          <a:p>
+            <a:pPr algn="l" indent="0" marL="0">
+              <a:lnSpc>
+                <a:spcPts val="1080"/>
+              </a:lnSpc>
+              <a:buNone/>
+            </a:pPr>
+            <a:r>
+              <a:rPr lang="en-US" sz="900" b="1" dirty="0">
+                <a:solidFill>
+                  <a:srgbClr val="A8BCD1"/>
                 </a:solidFill>
                 <a:latin typeface="Malgun Gothic" pitchFamily="34" charset="0"/>
                 <a:ea typeface="Malgun Gothic" pitchFamily="34" charset="-122"/>
                 <a:cs typeface="Malgun Gothic" pitchFamily="34" charset="-120"/>
               </a:rPr>
-              <a:t>팔 수 있었는데 못 판 양 — 겨울에 몰립니다</a:t>
-            </a:r>
-            <a:endParaRPr lang="en-US" sz="1125" dirty="0"/>
-          </a:p>
-        </p:txBody>
-      </p:sp>
-      <p:sp>
-        <p:nvSpPr>
-          <p:cNvPr id="131" name="Text 129"/>
-          <p:cNvSpPr txBox="1"/>
-          <p:nvPr/>
-        </p:nvSpPr>
-        <p:spPr>
-          <a:xfrm>
-            <a:off x="6324600" y="5067300"/>
-            <a:ext cx="4762500" cy="125016"/>
-          </a:xfrm>
-          <a:prstGeom prst="rect">
-            <a:avLst/>
-          </a:prstGeom>
-          <a:noFill/>
-          <a:ln/>
-        </p:spPr>
-        <p:txBody>
-          <a:bodyPr wrap="square" lIns="0" tIns="0" rIns="0" bIns="0" rtlCol="0" anchor="t"/>
-          <a:lstStyle/>
-          <a:p>
-            <a:pPr algn="l" indent="0" marL="0">
-              <a:lnSpc>
-                <a:spcPts val="984"/>
-              </a:lnSpc>
-              <a:buNone/>
-            </a:pPr>
-            <a:r>
-              <a:rPr lang="en-US" sz="788" b="1" spc="150" kern="0" dirty="0">
+              <a:t>낮게 신고 — 0℃ 에서 5.0 MW 못 팜</a:t>
+            </a:r>
+            <a:endParaRPr lang="en-US" sz="900" dirty="0"/>
+          </a:p>
+        </p:txBody>
+      </p:sp>
+      <p:sp>
+        <p:nvSpPr>
+          <p:cNvPr id="142" name="Text 140"/>
+          <p:cNvSpPr txBox="1"/>
+          <p:nvPr/>
+        </p:nvSpPr>
+        <p:spPr>
+          <a:xfrm>
+            <a:off x="6153150" y="4816956"/>
+            <a:ext cx="2381250" cy="137160"/>
+          </a:xfrm>
+          <a:prstGeom prst="rect">
+            <a:avLst/>
+          </a:prstGeom>
+          <a:noFill/>
+          <a:ln/>
+        </p:spPr>
+        <p:txBody>
+          <a:bodyPr wrap="square" lIns="0" tIns="0" rIns="0" bIns="0" rtlCol="0" anchor="t"/>
+          <a:lstStyle/>
+          <a:p>
+            <a:pPr algn="r" indent="0" marL="0">
+              <a:lnSpc>
+                <a:spcPts val="1080"/>
+              </a:lnSpc>
+              <a:buNone/>
+            </a:pPr>
+            <a:r>
+              <a:rPr lang="en-US" sz="900" b="1" dirty="0">
                 <a:solidFill>
                   <a:srgbClr val="FF4D63"/>
-                </a:solidFill>
-                <a:latin typeface="Consolas" pitchFamily="34" charset="0"/>
-                <a:ea typeface="Consolas" pitchFamily="34" charset="-122"/>
-                <a:cs typeface="Consolas" pitchFamily="34" charset="-120"/>
-              </a:rPr>
-              <a:t>기준 미달 회차</a:t>
-            </a:r>
-            <a:endParaRPr lang="en-US" sz="788" dirty="0"/>
-          </a:p>
-        </p:txBody>
-      </p:sp>
-      <p:sp>
-        <p:nvSpPr>
-          <p:cNvPr id="132" name="Text 130"/>
-          <p:cNvSpPr txBox="1"/>
-          <p:nvPr/>
-        </p:nvSpPr>
-        <p:spPr>
-          <a:xfrm>
-            <a:off x="6324600" y="5238750"/>
-            <a:ext cx="480060" cy="400050"/>
-          </a:xfrm>
-          <a:prstGeom prst="rect">
-            <a:avLst/>
-          </a:prstGeom>
-          <a:noFill/>
-          <a:ln/>
-        </p:spPr>
-        <p:txBody>
-          <a:bodyPr wrap="square" lIns="0" tIns="0" rIns="0" bIns="0" rtlCol="0" anchor="t"/>
-          <a:lstStyle/>
-          <a:p>
-            <a:pPr algn="l" indent="0" marL="0">
-              <a:lnSpc>
-                <a:spcPts val="3150"/>
-              </a:lnSpc>
-              <a:buNone/>
-            </a:pPr>
-            <a:r>
-              <a:rPr lang="en-US" sz="3000" b="1" dirty="0">
-                <a:solidFill>
-                  <a:srgbClr val="EFB13C"/>
-                </a:solidFill>
-                <a:latin typeface="Consolas" pitchFamily="34" charset="0"/>
-                <a:ea typeface="Consolas" pitchFamily="34" charset="-122"/>
-                <a:cs typeface="Consolas" pitchFamily="34" charset="-120"/>
-              </a:rPr>
-              <a:t>15</a:t>
-            </a:r>
-            <a:endParaRPr lang="en-US" sz="3000" dirty="0"/>
-          </a:p>
-        </p:txBody>
-      </p:sp>
-      <p:sp>
-        <p:nvSpPr>
-          <p:cNvPr id="133" name="Text 131"/>
-          <p:cNvSpPr txBox="1"/>
-          <p:nvPr/>
-        </p:nvSpPr>
-        <p:spPr>
-          <a:xfrm>
-            <a:off x="6861810" y="5429250"/>
-            <a:ext cx="400050" cy="171450"/>
-          </a:xfrm>
-          <a:prstGeom prst="rect">
-            <a:avLst/>
-          </a:prstGeom>
-          <a:noFill/>
-          <a:ln/>
-        </p:spPr>
-        <p:txBody>
-          <a:bodyPr wrap="square" lIns="0" tIns="0" rIns="0" bIns="0" rtlCol="0" anchor="t"/>
-          <a:lstStyle/>
-          <a:p>
-            <a:pPr algn="l" indent="0" marL="0">
-              <a:lnSpc>
-                <a:spcPts val="1350"/>
-              </a:lnSpc>
-              <a:buNone/>
-            </a:pPr>
-            <a:r>
-              <a:rPr lang="en-US" sz="1125" dirty="0">
-                <a:solidFill>
-                  <a:srgbClr val="A9A79F"/>
                 </a:solidFill>
                 <a:latin typeface="Malgun Gothic" pitchFamily="34" charset="0"/>
                 <a:ea typeface="Malgun Gothic" pitchFamily="34" charset="-122"/>
                 <a:cs typeface="Malgun Gothic" pitchFamily="34" charset="-120"/>
               </a:rPr>
-              <a:t>회</a:t>
-            </a:r>
-            <a:endParaRPr lang="en-US" sz="1125" dirty="0"/>
-          </a:p>
-        </p:txBody>
-      </p:sp>
-      <p:sp>
-        <p:nvSpPr>
-          <p:cNvPr id="134" name="Text 132"/>
-          <p:cNvSpPr txBox="1"/>
-          <p:nvPr/>
-        </p:nvSpPr>
-        <p:spPr>
-          <a:xfrm>
-            <a:off x="6324600" y="5715000"/>
-            <a:ext cx="4762500" cy="240030"/>
-          </a:xfrm>
-          <a:prstGeom prst="rect">
-            <a:avLst/>
-          </a:prstGeom>
-          <a:noFill/>
-          <a:ln/>
-        </p:spPr>
-        <p:txBody>
-          <a:bodyPr wrap="square" lIns="0" tIns="0" rIns="0" bIns="0" rtlCol="0" anchor="t"/>
-          <a:lstStyle/>
-          <a:p>
-            <a:pPr algn="l" indent="0" marL="0">
-              <a:lnSpc>
-                <a:spcPts val="1890"/>
-              </a:lnSpc>
-              <a:buNone/>
-            </a:pPr>
-            <a:r>
-              <a:rPr lang="en-US" sz="1125" dirty="0">
-                <a:solidFill>
-                  <a:srgbClr val="CFCBC2"/>
+              <a:t>높게 신고 — 28℃ 에서 5.1 MW 미달</a:t>
+            </a:r>
+            <a:endParaRPr lang="en-US" sz="900" dirty="0"/>
+          </a:p>
+        </p:txBody>
+      </p:sp>
+      <p:sp>
+        <p:nvSpPr>
+          <p:cNvPr id="143" name="Shape 141"/>
+          <p:cNvSpPr/>
+          <p:nvPr/>
+        </p:nvSpPr>
+        <p:spPr>
+          <a:xfrm>
+            <a:off x="1428750" y="4076700"/>
+            <a:ext cx="247650" cy="0"/>
+          </a:xfrm>
+          <a:prstGeom prst="line">
+            <a:avLst/>
+          </a:prstGeom>
+          <a:noFill/>
+          <a:ln w="25400">
+            <a:solidFill>
+              <a:srgbClr val="A8BCD1"/>
+            </a:solidFill>
+            <a:prstDash val="dash"/>
+          </a:ln>
+        </p:spPr>
+      </p:sp>
+      <p:sp>
+        <p:nvSpPr>
+          <p:cNvPr id="144" name="Text 142"/>
+          <p:cNvSpPr txBox="1"/>
+          <p:nvPr/>
+        </p:nvSpPr>
+        <p:spPr>
+          <a:xfrm>
+            <a:off x="1752600" y="4010025"/>
+            <a:ext cx="2286000" cy="148590"/>
+          </a:xfrm>
+          <a:prstGeom prst="rect">
+            <a:avLst/>
+          </a:prstGeom>
+          <a:noFill/>
+          <a:ln/>
+        </p:spPr>
+        <p:txBody>
+          <a:bodyPr wrap="square" lIns="0" tIns="0" rIns="0" bIns="0" rtlCol="0" anchor="t"/>
+          <a:lstStyle/>
+          <a:p>
+            <a:pPr algn="l" indent="0" marL="0">
+              <a:lnSpc>
+                <a:spcPts val="1170"/>
+              </a:lnSpc>
+              <a:buNone/>
+            </a:pPr>
+            <a:r>
+              <a:rPr lang="en-US" sz="900" dirty="0">
+                <a:solidFill>
+                  <a:srgbClr val="A8BCD1"/>
                 </a:solidFill>
                 <a:latin typeface="Malgun Gothic" pitchFamily="34" charset="0"/>
                 <a:ea typeface="Malgun Gothic" pitchFamily="34" charset="-122"/>
                 <a:cs typeface="Malgun Gothic" pitchFamily="34" charset="-120"/>
               </a:rPr>
-              <a:t>누적 40회 중  ·  과대 신고 69.5 MW</a:t>
-            </a:r>
-            <a:endParaRPr lang="en-US" sz="1125" dirty="0"/>
-          </a:p>
-        </p:txBody>
-      </p:sp>
-      <p:sp>
-        <p:nvSpPr>
-          <p:cNvPr id="135" name="Shape 133"/>
+              <a:t>종전 신고 (하나의 값)</a:t>
+            </a:r>
+            <a:endParaRPr lang="en-US" sz="900" dirty="0"/>
+          </a:p>
+        </p:txBody>
+      </p:sp>
+      <p:sp>
+        <p:nvSpPr>
+          <p:cNvPr id="145" name="Shape 143"/>
+          <p:cNvSpPr/>
+          <p:nvPr/>
+        </p:nvSpPr>
+        <p:spPr>
+          <a:xfrm>
+            <a:off x="4000500" y="4076700"/>
+            <a:ext cx="247650" cy="0"/>
+          </a:xfrm>
+          <a:prstGeom prst="line">
+            <a:avLst/>
+          </a:prstGeom>
+          <a:noFill/>
+          <a:ln w="30480">
+            <a:solidFill>
+              <a:srgbClr val="EFB13C"/>
+            </a:solidFill>
+            <a:prstDash val="solid"/>
+          </a:ln>
+        </p:spPr>
+      </p:sp>
+      <p:sp>
+        <p:nvSpPr>
+          <p:cNvPr id="146" name="Text 144"/>
+          <p:cNvSpPr txBox="1"/>
+          <p:nvPr/>
+        </p:nvSpPr>
+        <p:spPr>
+          <a:xfrm>
+            <a:off x="4324350" y="4010025"/>
+            <a:ext cx="2286000" cy="148590"/>
+          </a:xfrm>
+          <a:prstGeom prst="rect">
+            <a:avLst/>
+          </a:prstGeom>
+          <a:noFill/>
+          <a:ln/>
+        </p:spPr>
+        <p:txBody>
+          <a:bodyPr wrap="square" lIns="0" tIns="0" rIns="0" bIns="0" rtlCol="0" anchor="t"/>
+          <a:lstStyle/>
+          <a:p>
+            <a:pPr algn="l" indent="0" marL="0">
+              <a:lnSpc>
+                <a:spcPts val="1170"/>
+              </a:lnSpc>
+              <a:buNone/>
+            </a:pPr>
+            <a:r>
+              <a:rPr lang="en-US" sz="900" dirty="0">
+                <a:solidFill>
+                  <a:srgbClr val="EFB13C"/>
+                </a:solidFill>
+                <a:latin typeface="Malgun Gothic" pitchFamily="34" charset="0"/>
+                <a:ea typeface="Malgun Gothic" pitchFamily="34" charset="-122"/>
+                <a:cs typeface="Malgun Gothic" pitchFamily="34" charset="-120"/>
+              </a:rPr>
+              <a:t>실제 능력</a:t>
+            </a:r>
+            <a:endParaRPr lang="en-US" sz="900" dirty="0"/>
+          </a:p>
+        </p:txBody>
+      </p:sp>
+      <p:sp>
+        <p:nvSpPr>
+          <p:cNvPr id="147" name="Text 145"/>
+          <p:cNvSpPr txBox="1"/>
+          <p:nvPr/>
+        </p:nvSpPr>
+        <p:spPr>
+          <a:xfrm>
+            <a:off x="914400" y="5695950"/>
+            <a:ext cx="10363200" cy="167164"/>
+          </a:xfrm>
+          <a:prstGeom prst="rect">
+            <a:avLst/>
+          </a:prstGeom>
+          <a:noFill/>
+          <a:ln/>
+        </p:spPr>
+        <p:txBody>
+          <a:bodyPr wrap="square" lIns="0" tIns="0" rIns="0" bIns="0" rtlCol="0" anchor="t"/>
+          <a:lstStyle/>
+          <a:p>
+            <a:pPr algn="ctr" indent="0" marL="0">
+              <a:lnSpc>
+                <a:spcPts val="1316"/>
+              </a:lnSpc>
+              <a:buNone/>
+            </a:pPr>
+            <a:r>
+              <a:rPr lang="en-US" sz="1013" dirty="0">
+                <a:solidFill>
+                  <a:srgbClr val="CFCBC2"/>
+                </a:solidFill>
+                <a:latin typeface="Malgun Gothic" pitchFamily="34" charset="0"/>
+                <a:ea typeface="Malgun Gothic" pitchFamily="34" charset="-122"/>
+                <a:cs typeface="Malgun Gothic" pitchFamily="34" charset="-120"/>
+              </a:rPr>
+              <a:t>종전 누계 — 낮게 신고해 못 판 양 </a:t>
+            </a:r>
+            <a:pPr algn="ctr" indent="0" marL="0">
+              <a:lnSpc>
+                <a:spcPts val="1316"/>
+              </a:lnSpc>
+              <a:buNone/>
+            </a:pPr>
+            <a:r>
+              <a:rPr lang="en-US" sz="1013" b="1" dirty="0">
+                <a:solidFill>
+                  <a:srgbClr val="EFB13C"/>
+                </a:solidFill>
+                <a:latin typeface="Malgun Gothic" pitchFamily="34" charset="0"/>
+                <a:ea typeface="Malgun Gothic" pitchFamily="34" charset="-122"/>
+                <a:cs typeface="Malgun Gothic" pitchFamily="34" charset="-120"/>
+              </a:rPr>
+              <a:t>75.3 MW</a:t>
+            </a:r>
+            <a:pPr algn="ctr" indent="0" marL="0">
+              <a:lnSpc>
+                <a:spcPts val="1316"/>
+              </a:lnSpc>
+              <a:buNone/>
+            </a:pPr>
+            <a:r>
+              <a:rPr lang="en-US" sz="1013" dirty="0">
+                <a:solidFill>
+                  <a:srgbClr val="CFCBC2"/>
+                </a:solidFill>
+                <a:latin typeface="Malgun Gothic" pitchFamily="34" charset="0"/>
+                <a:ea typeface="Malgun Gothic" pitchFamily="34" charset="-122"/>
+                <a:cs typeface="Malgun Gothic" pitchFamily="34" charset="-120"/>
+              </a:rPr>
+              <a:t>   ·   기준 미달 </a:t>
+            </a:r>
+            <a:pPr algn="ctr" indent="0" marL="0">
+              <a:lnSpc>
+                <a:spcPts val="1316"/>
+              </a:lnSpc>
+              <a:buNone/>
+            </a:pPr>
+            <a:r>
+              <a:rPr lang="en-US" sz="1013" b="1" dirty="0">
+                <a:solidFill>
+                  <a:srgbClr val="EFB13C"/>
+                </a:solidFill>
+                <a:latin typeface="Malgun Gothic" pitchFamily="34" charset="0"/>
+                <a:ea typeface="Malgun Gothic" pitchFamily="34" charset="-122"/>
+                <a:cs typeface="Malgun Gothic" pitchFamily="34" charset="-120"/>
+              </a:rPr>
+              <a:t>15회</a:t>
+            </a:r>
+            <a:pPr algn="ctr" indent="0" marL="0">
+              <a:lnSpc>
+                <a:spcPts val="1316"/>
+              </a:lnSpc>
+              <a:buNone/>
+            </a:pPr>
+            <a:r>
+              <a:rPr lang="en-US" sz="1013" dirty="0">
+                <a:solidFill>
+                  <a:srgbClr val="CFCBC2"/>
+                </a:solidFill>
+                <a:latin typeface="Malgun Gothic" pitchFamily="34" charset="0"/>
+                <a:ea typeface="Malgun Gothic" pitchFamily="34" charset="-122"/>
+                <a:cs typeface="Malgun Gothic" pitchFamily="34" charset="-120"/>
+              </a:rPr>
+              <a:t> (과대 신고 69.5 MW)</a:t>
+            </a:r>
+            <a:endParaRPr lang="en-US" sz="1013" dirty="0"/>
+          </a:p>
+        </p:txBody>
+      </p:sp>
+      <p:sp>
+        <p:nvSpPr>
+          <p:cNvPr id="148" name="Shape 146"/>
           <p:cNvSpPr/>
           <p:nvPr/>
         </p:nvSpPr>
@@ -21067,7 +20635,7 @@
       </p:sp>
       <p:sp>
         <p:nvSpPr>
-          <p:cNvPr id="136" name="Text 134"/>
+          <p:cNvPr id="149" name="Text 147"/>
           <p:cNvSpPr txBox="1"/>
           <p:nvPr/>
         </p:nvSpPr>
@@ -21109,7 +20677,7 @@
       </p:sp>
       <p:sp>
         <p:nvSpPr>
-          <p:cNvPr id="137" name="Text 135"/>
+          <p:cNvPr id="150" name="Text 148"/>
           <p:cNvSpPr txBox="1"/>
           <p:nvPr/>
         </p:nvSpPr>
@@ -21143,7 +20711,7 @@
                 <a:ea typeface="Malgun Gothic" pitchFamily="34" charset="-122"/>
                 <a:cs typeface="Malgun Gothic" pitchFamily="34" charset="-120"/>
               </a:rPr>
-              <a:t>어느 쪽으로 틀려도 손실입니다 — </a:t>
+              <a:t>그때는 최선이었습니다 — 이제 </a:t>
             </a:r>
             <a:pPr algn="l" indent="0" marL="0">
               <a:lnSpc>
@@ -21160,7 +20728,7 @@
                 <a:ea typeface="Malgun Gothic" pitchFamily="34" charset="-122"/>
                 <a:cs typeface="Malgun Gothic" pitchFamily="34" charset="-120"/>
               </a:rPr>
-              <a:t>정확도가 곧 손익</a:t>
+              <a:t>온도별로 알 수 있는</a:t>
             </a:r>
             <a:pPr algn="l" indent="0" marL="0">
               <a:lnSpc>
@@ -21177,7 +20745,7 @@
                 <a:ea typeface="Malgun Gothic" pitchFamily="34" charset="-122"/>
                 <a:cs typeface="Malgun Gothic" pitchFamily="34" charset="-120"/>
               </a:rPr>
-              <a:t>입니다.</a:t>
+              <a:t> 데이터가 쌓였습니다.</a:t>
             </a:r>
             <a:endParaRPr lang="en-US" sz="1238" dirty="0"/>
           </a:p>

--- a/docs/ppt/위례_공급가능용량_최종발표_v2.pptx
+++ b/docs/ppt/위례_공급가능용량_최종발표_v2.pptx
@@ -5839,7 +5839,7 @@
                 <a:ea typeface="Malgun Gothic" pitchFamily="34" charset="-122"/>
                 <a:cs typeface="Malgun Gothic" pitchFamily="34" charset="-120"/>
               </a:rPr>
-              <a:t>실제가 못 미친 횟수 </a:t>
+              <a:t>신고값을 못 채운 횟수 </a:t>
             </a:r>
             <a:pPr algn="l" indent="0" marL="0">
               <a:lnSpc>
@@ -7584,7 +7584,7 @@
                 <a:ea typeface="Malgun Gothic" pitchFamily="34" charset="-122"/>
                 <a:cs typeface="Malgun Gothic" pitchFamily="34" charset="-120"/>
               </a:rPr>
-              <a:t>구조를 둘로 나눈 덕분에,</a:t>
+              <a:t>테스트는 계속 쌓입니다,</a:t>
             </a:r>
             <a:endParaRPr lang="en-US" sz="2775" dirty="0"/>
           </a:p>
@@ -7598,13 +7598,13 @@
             <a:r>
               <a:rPr lang="en-US" sz="2775" b="1" dirty="0">
                 <a:solidFill>
-                  <a:srgbClr val="EFB13C"/>
+                  <a:srgbClr val="EAE7E0"/>
                 </a:solidFill>
                 <a:latin typeface="Malgun Gothic" pitchFamily="34" charset="0"/>
                 <a:ea typeface="Malgun Gothic" pitchFamily="34" charset="-122"/>
                 <a:cs typeface="Malgun Gothic" pitchFamily="34" charset="-120"/>
               </a:rPr>
-              <a:t>이론식만 갈아끼우면</a:t>
+              <a:t>쌓일수록 </a:t>
             </a:r>
             <a:pPr algn="l" indent="0" marL="0">
               <a:lnSpc>
@@ -7615,13 +7615,13 @@
             <a:r>
               <a:rPr lang="en-US" sz="2775" b="1" dirty="0">
                 <a:solidFill>
-                  <a:srgbClr val="EAE7E0"/>
+                  <a:srgbClr val="EFB13C"/>
                 </a:solidFill>
                 <a:latin typeface="Malgun Gothic" pitchFamily="34" charset="0"/>
                 <a:ea typeface="Malgun Gothic" pitchFamily="34" charset="-122"/>
                 <a:cs typeface="Malgun Gothic" pitchFamily="34" charset="-120"/>
               </a:rPr>
-              <a:t> 옮겨집니다</a:t>
+              <a:t>예측이 정확해집니다</a:t>
             </a:r>
             <a:endParaRPr lang="en-US" sz="2775" dirty="0"/>
           </a:p>
@@ -7636,7 +7636,7 @@
         <p:spPr>
           <a:xfrm>
             <a:off x="685800" y="2000250"/>
-            <a:ext cx="10287000" cy="284607"/>
+            <a:ext cx="10287000" cy="569214"/>
           </a:xfrm>
           <a:prstGeom prst="rect">
             <a:avLst/>
@@ -7663,7 +7663,7 @@
                 <a:ea typeface="Malgun Gothic" pitchFamily="34" charset="-122"/>
                 <a:cs typeface="Malgun Gothic" pitchFamily="34" charset="-120"/>
               </a:rPr>
-              <a:t>배우는 부분은 설비 종류와 상관이 없습니다. 사업소마다 다른 것은 </a:t>
+              <a:t>공급가능용량 테스트는 앞으로도 주기적으로 합니다. 회차가 들어올 때마다 </a:t>
             </a:r>
             <a:pPr algn="l" indent="0" marL="0">
               <a:lnSpc>
@@ -7680,7 +7680,7 @@
                 <a:ea typeface="Malgun Gothic" pitchFamily="34" charset="-122"/>
                 <a:cs typeface="Malgun Gothic" pitchFamily="34" charset="-120"/>
               </a:rPr>
-              <a:t>이론식</a:t>
+              <a:t>다시 학습</a:t>
             </a:r>
             <a:pPr algn="l" indent="0" marL="0">
               <a:lnSpc>
@@ -7697,7 +7697,7 @@
                 <a:ea typeface="Malgun Gothic" pitchFamily="34" charset="-122"/>
                 <a:cs typeface="Malgun Gothic" pitchFamily="34" charset="-120"/>
               </a:rPr>
-              <a:t> 하나입니다.</a:t>
+              <a:t> 하므로, 데이터가 쌓이는 것 자체가 개선입니다.</a:t>
             </a:r>
             <a:endParaRPr lang="en-US" sz="1350" dirty="0"/>
           </a:p>
@@ -7712,7 +7712,7 @@
         <p:spPr>
           <a:xfrm>
             <a:off x="685800" y="2705100"/>
-            <a:ext cx="10820400" cy="1409700"/>
+            <a:ext cx="10820400" cy="1771650"/>
           </a:xfrm>
           <a:prstGeom prst="rect">
             <a:avLst/>
@@ -7730,14 +7730,115 @@
       </p:sp>
       <p:sp>
         <p:nvSpPr>
-          <p:cNvPr id="14" name="Shape 12"/>
-          <p:cNvSpPr/>
-          <p:nvPr/>
-        </p:nvSpPr>
-        <p:spPr>
-          <a:xfrm>
-            <a:off x="6096000" y="2914650"/>
-            <a:ext cx="0" cy="990600"/>
+          <p:cNvPr id="14" name="Text 12"/>
+          <p:cNvSpPr txBox="1"/>
+          <p:nvPr/>
+        </p:nvSpPr>
+        <p:spPr>
+          <a:xfrm>
+            <a:off x="914400" y="2781300"/>
+            <a:ext cx="8572500" cy="125016"/>
+          </a:xfrm>
+          <a:prstGeom prst="rect">
+            <a:avLst/>
+          </a:prstGeom>
+          <a:noFill/>
+          <a:ln/>
+        </p:spPr>
+        <p:txBody>
+          <a:bodyPr wrap="square" lIns="0" tIns="0" rIns="0" bIns="0" rtlCol="0" anchor="t"/>
+          <a:lstStyle/>
+          <a:p>
+            <a:pPr algn="l" indent="0" marL="0">
+              <a:lnSpc>
+                <a:spcPts val="984"/>
+              </a:lnSpc>
+              <a:buNone/>
+            </a:pPr>
+            <a:r>
+              <a:rPr lang="en-US" sz="788" b="1" spc="150" kern="0" dirty="0">
+                <a:solidFill>
+                  <a:srgbClr val="8A8880"/>
+                </a:solidFill>
+                <a:latin typeface="Consolas" pitchFamily="34" charset="0"/>
+                <a:ea typeface="Consolas" pitchFamily="34" charset="-122"/>
+                <a:cs typeface="Consolas" pitchFamily="34" charset="-120"/>
+              </a:rPr>
+              <a:t>회차 구간별 예측 오차  ·  단위 MW  ·  각 회차를 그 앞의 회차만으로 예측(walk-forward)  ·  낮을수록 좋음</a:t>
+            </a:r>
+            <a:endParaRPr lang="en-US" sz="788" dirty="0"/>
+          </a:p>
+        </p:txBody>
+      </p:sp>
+      <p:sp>
+        <p:nvSpPr>
+          <p:cNvPr id="15" name="Text 13"/>
+          <p:cNvSpPr txBox="1"/>
+          <p:nvPr/>
+        </p:nvSpPr>
+        <p:spPr>
+          <a:xfrm>
+            <a:off x="914400" y="2952750"/>
+            <a:ext cx="10363200" cy="160973"/>
+          </a:xfrm>
+          <a:prstGeom prst="rect">
+            <a:avLst/>
+          </a:prstGeom>
+          <a:noFill/>
+          <a:ln/>
+        </p:spPr>
+        <p:txBody>
+          <a:bodyPr wrap="square" lIns="0" tIns="0" rIns="0" bIns="0" rtlCol="0" anchor="t"/>
+          <a:lstStyle/>
+          <a:p>
+            <a:pPr algn="l" indent="0" marL="0">
+              <a:lnSpc>
+                <a:spcPts val="1268"/>
+              </a:lnSpc>
+              <a:buNone/>
+            </a:pPr>
+            <a:r>
+              <a:rPr lang="en-US" sz="975" b="1" dirty="0">
+                <a:solidFill>
+                  <a:srgbClr val="EFB13C"/>
+                </a:solidFill>
+                <a:latin typeface="Malgun Gothic" pitchFamily="34" charset="0"/>
+                <a:ea typeface="Malgun Gothic" pitchFamily="34" charset="-122"/>
+                <a:cs typeface="Malgun Gothic" pitchFamily="34" charset="-120"/>
+              </a:rPr>
+              <a:t>2.26 → 1.19 MW</a:t>
+            </a:r>
+            <a:pPr algn="l" indent="0" marL="0">
+              <a:lnSpc>
+                <a:spcPts val="1268"/>
+              </a:lnSpc>
+              <a:buNone/>
+            </a:pPr>
+            <a:r>
+              <a:rPr lang="en-US" sz="975" dirty="0">
+                <a:solidFill>
+                  <a:srgbClr val="CFCBC2"/>
+                </a:solidFill>
+                <a:latin typeface="Malgun Gothic" pitchFamily="34" charset="0"/>
+                <a:ea typeface="Malgun Gothic" pitchFamily="34" charset="-122"/>
+                <a:cs typeface="Malgun Gothic" pitchFamily="34" charset="-120"/>
+              </a:rPr>
+              <a:t>  ·  47% 줄었습니다. 구간마다 오르내림은 있습니다 — 어려운 회차가 몰리면 올라갑니다.</a:t>
+            </a:r>
+            <a:endParaRPr lang="en-US" sz="975" dirty="0"/>
+          </a:p>
+        </p:txBody>
+      </p:sp>
+      <p:sp>
+        <p:nvSpPr>
+          <p:cNvPr id="16" name="Shape 14"/>
+          <p:cNvSpPr/>
+          <p:nvPr/>
+        </p:nvSpPr>
+        <p:spPr>
+          <a:xfrm>
+            <a:off x="1428750" y="4210050"/>
+            <a:ext cx="9525000" cy="0"/>
           </a:xfrm>
           <a:prstGeom prst="line">
             <a:avLst/>
@@ -7753,14 +7854,452 @@
       </p:sp>
       <p:sp>
         <p:nvSpPr>
-          <p:cNvPr id="15" name="Shape 13"/>
-          <p:cNvSpPr/>
-          <p:nvPr/>
-        </p:nvSpPr>
-        <p:spPr>
-          <a:xfrm>
-            <a:off x="685800" y="2705100"/>
-            <a:ext cx="5410200" cy="19050"/>
+          <p:cNvPr id="17" name="Shape 15"/>
+          <p:cNvSpPr/>
+          <p:nvPr/>
+        </p:nvSpPr>
+        <p:spPr>
+          <a:xfrm>
+            <a:off x="2000250" y="3333750"/>
+            <a:ext cx="914400" cy="876300"/>
+          </a:xfrm>
+          <a:prstGeom prst="rect">
+            <a:avLst/>
+          </a:prstGeom>
+          <a:solidFill>
+            <a:srgbClr val="8A6620"/>
+          </a:solidFill>
+          <a:ln/>
+        </p:spPr>
+      </p:sp>
+      <p:sp>
+        <p:nvSpPr>
+          <p:cNvPr id="18" name="Text 16"/>
+          <p:cNvSpPr txBox="1"/>
+          <p:nvPr/>
+        </p:nvSpPr>
+        <p:spPr>
+          <a:xfrm>
+            <a:off x="1714500" y="3143250"/>
+            <a:ext cx="1485900" cy="182880"/>
+          </a:xfrm>
+          <a:prstGeom prst="rect">
+            <a:avLst/>
+          </a:prstGeom>
+          <a:noFill/>
+          <a:ln/>
+        </p:spPr>
+        <p:txBody>
+          <a:bodyPr wrap="square" lIns="0" tIns="0" rIns="0" bIns="0" rtlCol="0" anchor="t"/>
+          <a:lstStyle/>
+          <a:p>
+            <a:pPr algn="ctr" indent="0" marL="0">
+              <a:lnSpc>
+                <a:spcPts val="1440"/>
+              </a:lnSpc>
+              <a:buNone/>
+            </a:pPr>
+            <a:r>
+              <a:rPr lang="en-US" sz="1200" b="1" dirty="0">
+                <a:solidFill>
+                  <a:srgbClr val="A9A79F"/>
+                </a:solidFill>
+                <a:latin typeface="Consolas" pitchFamily="34" charset="0"/>
+                <a:ea typeface="Consolas" pitchFamily="34" charset="-122"/>
+                <a:cs typeface="Consolas" pitchFamily="34" charset="-120"/>
+              </a:rPr>
+              <a:t>2.26</a:t>
+            </a:r>
+            <a:endParaRPr lang="en-US" sz="1200" dirty="0"/>
+          </a:p>
+        </p:txBody>
+      </p:sp>
+      <p:sp>
+        <p:nvSpPr>
+          <p:cNvPr id="19" name="Text 17"/>
+          <p:cNvSpPr txBox="1"/>
+          <p:nvPr/>
+        </p:nvSpPr>
+        <p:spPr>
+          <a:xfrm>
+            <a:off x="1714500" y="4295775"/>
+            <a:ext cx="1485900" cy="131445"/>
+          </a:xfrm>
+          <a:prstGeom prst="rect">
+            <a:avLst/>
+          </a:prstGeom>
+          <a:noFill/>
+          <a:ln/>
+        </p:spPr>
+        <p:txBody>
+          <a:bodyPr wrap="square" lIns="0" tIns="0" rIns="0" bIns="0" rtlCol="0" anchor="t"/>
+          <a:lstStyle/>
+          <a:p>
+            <a:pPr algn="ctr" indent="0" marL="0">
+              <a:lnSpc>
+                <a:spcPts val="1035"/>
+              </a:lnSpc>
+              <a:buNone/>
+            </a:pPr>
+            <a:r>
+              <a:rPr lang="en-US" sz="863" dirty="0">
+                <a:solidFill>
+                  <a:srgbClr val="8A8880"/>
+                </a:solidFill>
+                <a:latin typeface="Malgun Gothic" pitchFamily="34" charset="0"/>
+                <a:ea typeface="Malgun Gothic" pitchFamily="34" charset="-122"/>
+                <a:cs typeface="Malgun Gothic" pitchFamily="34" charset="-120"/>
+              </a:rPr>
+              <a:t>13 ~ 19회차</a:t>
+            </a:r>
+            <a:endParaRPr lang="en-US" sz="863" dirty="0"/>
+          </a:p>
+        </p:txBody>
+      </p:sp>
+      <p:sp>
+        <p:nvSpPr>
+          <p:cNvPr id="20" name="Text 18"/>
+          <p:cNvSpPr txBox="1"/>
+          <p:nvPr/>
+        </p:nvSpPr>
+        <p:spPr>
+          <a:xfrm>
+            <a:off x="3219450" y="4000500"/>
+            <a:ext cx="571500" cy="171450"/>
+          </a:xfrm>
+          <a:prstGeom prst="rect">
+            <a:avLst/>
+          </a:prstGeom>
+          <a:noFill/>
+          <a:ln/>
+        </p:spPr>
+        <p:txBody>
+          <a:bodyPr wrap="square" lIns="0" tIns="0" rIns="0" bIns="0" rtlCol="0" anchor="t"/>
+          <a:lstStyle/>
+          <a:p>
+            <a:pPr algn="ctr" indent="0" marL="0">
+              <a:lnSpc>
+                <a:spcPts val="1350"/>
+              </a:lnSpc>
+              <a:buNone/>
+            </a:pPr>
+            <a:r>
+              <a:rPr lang="en-US" sz="1125" dirty="0">
+                <a:solidFill>
+                  <a:srgbClr val="8A8880"/>
+                </a:solidFill>
+                <a:latin typeface="Malgun Gothic" pitchFamily="34" charset="0"/>
+                <a:ea typeface="Malgun Gothic" pitchFamily="34" charset="-122"/>
+                <a:cs typeface="Malgun Gothic" pitchFamily="34" charset="-120"/>
+              </a:rPr>
+              <a:t>→</a:t>
+            </a:r>
+            <a:endParaRPr lang="en-US" sz="1125" dirty="0"/>
+          </a:p>
+        </p:txBody>
+      </p:sp>
+      <p:sp>
+        <p:nvSpPr>
+          <p:cNvPr id="21" name="Shape 19"/>
+          <p:cNvSpPr/>
+          <p:nvPr/>
+        </p:nvSpPr>
+        <p:spPr>
+          <a:xfrm>
+            <a:off x="4095750" y="3335685"/>
+            <a:ext cx="914400" cy="874365"/>
+          </a:xfrm>
+          <a:prstGeom prst="rect">
+            <a:avLst/>
+          </a:prstGeom>
+          <a:solidFill>
+            <a:srgbClr val="8A6620"/>
+          </a:solidFill>
+          <a:ln/>
+        </p:spPr>
+      </p:sp>
+      <p:sp>
+        <p:nvSpPr>
+          <p:cNvPr id="22" name="Text 20"/>
+          <p:cNvSpPr txBox="1"/>
+          <p:nvPr/>
+        </p:nvSpPr>
+        <p:spPr>
+          <a:xfrm>
+            <a:off x="3810000" y="3145185"/>
+            <a:ext cx="1485900" cy="182880"/>
+          </a:xfrm>
+          <a:prstGeom prst="rect">
+            <a:avLst/>
+          </a:prstGeom>
+          <a:noFill/>
+          <a:ln/>
+        </p:spPr>
+        <p:txBody>
+          <a:bodyPr wrap="square" lIns="0" tIns="0" rIns="0" bIns="0" rtlCol="0" anchor="t"/>
+          <a:lstStyle/>
+          <a:p>
+            <a:pPr algn="ctr" indent="0" marL="0">
+              <a:lnSpc>
+                <a:spcPts val="1440"/>
+              </a:lnSpc>
+              <a:buNone/>
+            </a:pPr>
+            <a:r>
+              <a:rPr lang="en-US" sz="1200" b="1" dirty="0">
+                <a:solidFill>
+                  <a:srgbClr val="A9A79F"/>
+                </a:solidFill>
+                <a:latin typeface="Consolas" pitchFamily="34" charset="0"/>
+                <a:ea typeface="Consolas" pitchFamily="34" charset="-122"/>
+                <a:cs typeface="Consolas" pitchFamily="34" charset="-120"/>
+              </a:rPr>
+              <a:t>2.26</a:t>
+            </a:r>
+            <a:endParaRPr lang="en-US" sz="1200" dirty="0"/>
+          </a:p>
+        </p:txBody>
+      </p:sp>
+      <p:sp>
+        <p:nvSpPr>
+          <p:cNvPr id="23" name="Text 21"/>
+          <p:cNvSpPr txBox="1"/>
+          <p:nvPr/>
+        </p:nvSpPr>
+        <p:spPr>
+          <a:xfrm>
+            <a:off x="3810000" y="4295775"/>
+            <a:ext cx="1485900" cy="131445"/>
+          </a:xfrm>
+          <a:prstGeom prst="rect">
+            <a:avLst/>
+          </a:prstGeom>
+          <a:noFill/>
+          <a:ln/>
+        </p:spPr>
+        <p:txBody>
+          <a:bodyPr wrap="square" lIns="0" tIns="0" rIns="0" bIns="0" rtlCol="0" anchor="t"/>
+          <a:lstStyle/>
+          <a:p>
+            <a:pPr algn="ctr" indent="0" marL="0">
+              <a:lnSpc>
+                <a:spcPts val="1035"/>
+              </a:lnSpc>
+              <a:buNone/>
+            </a:pPr>
+            <a:r>
+              <a:rPr lang="en-US" sz="863" dirty="0">
+                <a:solidFill>
+                  <a:srgbClr val="8A8880"/>
+                </a:solidFill>
+                <a:latin typeface="Malgun Gothic" pitchFamily="34" charset="0"/>
+                <a:ea typeface="Malgun Gothic" pitchFamily="34" charset="-122"/>
+                <a:cs typeface="Malgun Gothic" pitchFamily="34" charset="-120"/>
+              </a:rPr>
+              <a:t>20 ~ 26회차</a:t>
+            </a:r>
+            <a:endParaRPr lang="en-US" sz="863" dirty="0"/>
+          </a:p>
+        </p:txBody>
+      </p:sp>
+      <p:sp>
+        <p:nvSpPr>
+          <p:cNvPr id="24" name="Text 22"/>
+          <p:cNvSpPr txBox="1"/>
+          <p:nvPr/>
+        </p:nvSpPr>
+        <p:spPr>
+          <a:xfrm>
+            <a:off x="5314950" y="4000500"/>
+            <a:ext cx="571500" cy="171450"/>
+          </a:xfrm>
+          <a:prstGeom prst="rect">
+            <a:avLst/>
+          </a:prstGeom>
+          <a:noFill/>
+          <a:ln/>
+        </p:spPr>
+        <p:txBody>
+          <a:bodyPr wrap="square" lIns="0" tIns="0" rIns="0" bIns="0" rtlCol="0" anchor="t"/>
+          <a:lstStyle/>
+          <a:p>
+            <a:pPr algn="ctr" indent="0" marL="0">
+              <a:lnSpc>
+                <a:spcPts val="1350"/>
+              </a:lnSpc>
+              <a:buNone/>
+            </a:pPr>
+            <a:r>
+              <a:rPr lang="en-US" sz="1125" dirty="0">
+                <a:solidFill>
+                  <a:srgbClr val="8A8880"/>
+                </a:solidFill>
+                <a:latin typeface="Malgun Gothic" pitchFamily="34" charset="0"/>
+                <a:ea typeface="Malgun Gothic" pitchFamily="34" charset="-122"/>
+                <a:cs typeface="Malgun Gothic" pitchFamily="34" charset="-120"/>
+              </a:rPr>
+              <a:t>→</a:t>
+            </a:r>
+            <a:endParaRPr lang="en-US" sz="1125" dirty="0"/>
+          </a:p>
+        </p:txBody>
+      </p:sp>
+      <p:sp>
+        <p:nvSpPr>
+          <p:cNvPr id="25" name="Shape 23"/>
+          <p:cNvSpPr/>
+          <p:nvPr/>
+        </p:nvSpPr>
+        <p:spPr>
+          <a:xfrm>
+            <a:off x="6191250" y="3859762"/>
+            <a:ext cx="914400" cy="350288"/>
+          </a:xfrm>
+          <a:prstGeom prst="rect">
+            <a:avLst/>
+          </a:prstGeom>
+          <a:solidFill>
+            <a:srgbClr val="8A6620"/>
+          </a:solidFill>
+          <a:ln/>
+        </p:spPr>
+      </p:sp>
+      <p:sp>
+        <p:nvSpPr>
+          <p:cNvPr id="26" name="Text 24"/>
+          <p:cNvSpPr txBox="1"/>
+          <p:nvPr/>
+        </p:nvSpPr>
+        <p:spPr>
+          <a:xfrm>
+            <a:off x="5905500" y="3669262"/>
+            <a:ext cx="1485900" cy="182880"/>
+          </a:xfrm>
+          <a:prstGeom prst="rect">
+            <a:avLst/>
+          </a:prstGeom>
+          <a:noFill/>
+          <a:ln/>
+        </p:spPr>
+        <p:txBody>
+          <a:bodyPr wrap="square" lIns="0" tIns="0" rIns="0" bIns="0" rtlCol="0" anchor="t"/>
+          <a:lstStyle/>
+          <a:p>
+            <a:pPr algn="ctr" indent="0" marL="0">
+              <a:lnSpc>
+                <a:spcPts val="1440"/>
+              </a:lnSpc>
+              <a:buNone/>
+            </a:pPr>
+            <a:r>
+              <a:rPr lang="en-US" sz="1200" b="1" dirty="0">
+                <a:solidFill>
+                  <a:srgbClr val="A9A79F"/>
+                </a:solidFill>
+                <a:latin typeface="Consolas" pitchFamily="34" charset="0"/>
+                <a:ea typeface="Consolas" pitchFamily="34" charset="-122"/>
+                <a:cs typeface="Consolas" pitchFamily="34" charset="-120"/>
+              </a:rPr>
+              <a:t>0.91</a:t>
+            </a:r>
+            <a:endParaRPr lang="en-US" sz="1200" dirty="0"/>
+          </a:p>
+        </p:txBody>
+      </p:sp>
+      <p:sp>
+        <p:nvSpPr>
+          <p:cNvPr id="27" name="Text 25"/>
+          <p:cNvSpPr txBox="1"/>
+          <p:nvPr/>
+        </p:nvSpPr>
+        <p:spPr>
+          <a:xfrm>
+            <a:off x="5905500" y="4295775"/>
+            <a:ext cx="1485900" cy="131445"/>
+          </a:xfrm>
+          <a:prstGeom prst="rect">
+            <a:avLst/>
+          </a:prstGeom>
+          <a:noFill/>
+          <a:ln/>
+        </p:spPr>
+        <p:txBody>
+          <a:bodyPr wrap="square" lIns="0" tIns="0" rIns="0" bIns="0" rtlCol="0" anchor="t"/>
+          <a:lstStyle/>
+          <a:p>
+            <a:pPr algn="ctr" indent="0" marL="0">
+              <a:lnSpc>
+                <a:spcPts val="1035"/>
+              </a:lnSpc>
+              <a:buNone/>
+            </a:pPr>
+            <a:r>
+              <a:rPr lang="en-US" sz="863" dirty="0">
+                <a:solidFill>
+                  <a:srgbClr val="8A8880"/>
+                </a:solidFill>
+                <a:latin typeface="Malgun Gothic" pitchFamily="34" charset="0"/>
+                <a:ea typeface="Malgun Gothic" pitchFamily="34" charset="-122"/>
+                <a:cs typeface="Malgun Gothic" pitchFamily="34" charset="-120"/>
+              </a:rPr>
+              <a:t>27 ~ 33회차</a:t>
+            </a:r>
+            <a:endParaRPr lang="en-US" sz="863" dirty="0"/>
+          </a:p>
+        </p:txBody>
+      </p:sp>
+      <p:sp>
+        <p:nvSpPr>
+          <p:cNvPr id="28" name="Text 26"/>
+          <p:cNvSpPr txBox="1"/>
+          <p:nvPr/>
+        </p:nvSpPr>
+        <p:spPr>
+          <a:xfrm>
+            <a:off x="7410450" y="4000500"/>
+            <a:ext cx="571500" cy="171450"/>
+          </a:xfrm>
+          <a:prstGeom prst="rect">
+            <a:avLst/>
+          </a:prstGeom>
+          <a:noFill/>
+          <a:ln/>
+        </p:spPr>
+        <p:txBody>
+          <a:bodyPr wrap="square" lIns="0" tIns="0" rIns="0" bIns="0" rtlCol="0" anchor="t"/>
+          <a:lstStyle/>
+          <a:p>
+            <a:pPr algn="ctr" indent="0" marL="0">
+              <a:lnSpc>
+                <a:spcPts val="1350"/>
+              </a:lnSpc>
+              <a:buNone/>
+            </a:pPr>
+            <a:r>
+              <a:rPr lang="en-US" sz="1125" dirty="0">
+                <a:solidFill>
+                  <a:srgbClr val="8A8880"/>
+                </a:solidFill>
+                <a:latin typeface="Malgun Gothic" pitchFamily="34" charset="0"/>
+                <a:ea typeface="Malgun Gothic" pitchFamily="34" charset="-122"/>
+                <a:cs typeface="Malgun Gothic" pitchFamily="34" charset="-120"/>
+              </a:rPr>
+              <a:t>→</a:t>
+            </a:r>
+            <a:endParaRPr lang="en-US" sz="1125" dirty="0"/>
+          </a:p>
+        </p:txBody>
+      </p:sp>
+      <p:sp>
+        <p:nvSpPr>
+          <p:cNvPr id="29" name="Shape 27"/>
+          <p:cNvSpPr/>
+          <p:nvPr/>
+        </p:nvSpPr>
+        <p:spPr>
+          <a:xfrm>
+            <a:off x="8286750" y="3749838"/>
+            <a:ext cx="914400" cy="460212"/>
           </a:xfrm>
           <a:prstGeom prst="rect">
             <a:avLst/>
@@ -7773,53 +8312,33 @@
       </p:sp>
       <p:sp>
         <p:nvSpPr>
-          <p:cNvPr id="16" name="Shape 14"/>
-          <p:cNvSpPr/>
-          <p:nvPr/>
-        </p:nvSpPr>
-        <p:spPr>
-          <a:xfrm>
-            <a:off x="6096000" y="2705100"/>
-            <a:ext cx="5410200" cy="19050"/>
-          </a:xfrm>
-          <a:prstGeom prst="rect">
-            <a:avLst/>
-          </a:prstGeom>
-          <a:solidFill>
-            <a:srgbClr val="718BA6"/>
-          </a:solidFill>
-          <a:ln/>
-        </p:spPr>
-      </p:sp>
-      <p:sp>
-        <p:nvSpPr>
-          <p:cNvPr id="17" name="Text 15"/>
-          <p:cNvSpPr txBox="1"/>
-          <p:nvPr/>
-        </p:nvSpPr>
-        <p:spPr>
-          <a:xfrm>
-            <a:off x="914400" y="2857500"/>
-            <a:ext cx="4762500" cy="125016"/>
-          </a:xfrm>
-          <a:prstGeom prst="rect">
-            <a:avLst/>
-          </a:prstGeom>
-          <a:noFill/>
-          <a:ln/>
-        </p:spPr>
-        <p:txBody>
-          <a:bodyPr wrap="square" lIns="0" tIns="0" rIns="0" bIns="0" rtlCol="0" anchor="t"/>
-          <a:lstStyle/>
-          <a:p>
-            <a:pPr algn="l" indent="0" marL="0">
-              <a:lnSpc>
-                <a:spcPts val="984"/>
-              </a:lnSpc>
-              <a:buNone/>
-            </a:pPr>
-            <a:r>
-              <a:rPr lang="en-US" sz="788" b="1" spc="150" kern="0" dirty="0">
+          <p:cNvPr id="30" name="Text 28"/>
+          <p:cNvSpPr txBox="1"/>
+          <p:nvPr/>
+        </p:nvSpPr>
+        <p:spPr>
+          <a:xfrm>
+            <a:off x="8001000" y="3559338"/>
+            <a:ext cx="1485900" cy="182880"/>
+          </a:xfrm>
+          <a:prstGeom prst="rect">
+            <a:avLst/>
+          </a:prstGeom>
+          <a:noFill/>
+          <a:ln/>
+        </p:spPr>
+        <p:txBody>
+          <a:bodyPr wrap="square" lIns="0" tIns="0" rIns="0" bIns="0" rtlCol="0" anchor="t"/>
+          <a:lstStyle/>
+          <a:p>
+            <a:pPr algn="ctr" indent="0" marL="0">
+              <a:lnSpc>
+                <a:spcPts val="1440"/>
+              </a:lnSpc>
+              <a:buNone/>
+            </a:pPr>
+            <a:r>
+              <a:rPr lang="en-US" sz="1200" b="1" dirty="0">
                 <a:solidFill>
                   <a:srgbClr val="EFB13C"/>
                 </a:solidFill>
@@ -7827,301 +8346,49 @@
                 <a:ea typeface="Consolas" pitchFamily="34" charset="-122"/>
                 <a:cs typeface="Consolas" pitchFamily="34" charset="-120"/>
               </a:rPr>
-              <a:t>그대로 가져가는 것</a:t>
-            </a:r>
-            <a:endParaRPr lang="en-US" sz="788" dirty="0"/>
-          </a:p>
-        </p:txBody>
-      </p:sp>
-      <p:sp>
-        <p:nvSpPr>
-          <p:cNvPr id="18" name="Text 16"/>
-          <p:cNvSpPr txBox="1"/>
-          <p:nvPr/>
-        </p:nvSpPr>
-        <p:spPr>
-          <a:xfrm>
-            <a:off x="6324600" y="2857500"/>
-            <a:ext cx="4762500" cy="125016"/>
-          </a:xfrm>
-          <a:prstGeom prst="rect">
-            <a:avLst/>
-          </a:prstGeom>
-          <a:noFill/>
-          <a:ln/>
-        </p:spPr>
-        <p:txBody>
-          <a:bodyPr wrap="square" lIns="0" tIns="0" rIns="0" bIns="0" rtlCol="0" anchor="t"/>
-          <a:lstStyle/>
-          <a:p>
-            <a:pPr algn="l" indent="0" marL="0">
-              <a:lnSpc>
-                <a:spcPts val="984"/>
-              </a:lnSpc>
-              <a:buNone/>
-            </a:pPr>
-            <a:r>
-              <a:rPr lang="en-US" sz="788" b="1" spc="150" kern="0" dirty="0">
-                <a:solidFill>
-                  <a:srgbClr val="718BA6"/>
-                </a:solidFill>
-                <a:latin typeface="Consolas" pitchFamily="34" charset="0"/>
-                <a:ea typeface="Consolas" pitchFamily="34" charset="-122"/>
-                <a:cs typeface="Consolas" pitchFamily="34" charset="-120"/>
-              </a:rPr>
-              <a:t>사업소마다 갈아끼우는 것</a:t>
-            </a:r>
-            <a:endParaRPr lang="en-US" sz="788" dirty="0"/>
-          </a:p>
-        </p:txBody>
-      </p:sp>
-      <p:sp>
-        <p:nvSpPr>
-          <p:cNvPr id="19" name="Text 17"/>
-          <p:cNvSpPr txBox="1"/>
-          <p:nvPr/>
-        </p:nvSpPr>
-        <p:spPr>
-          <a:xfrm>
-            <a:off x="914400" y="3105150"/>
-            <a:ext cx="4762500" cy="199311"/>
-          </a:xfrm>
-          <a:prstGeom prst="rect">
-            <a:avLst/>
-          </a:prstGeom>
-          <a:noFill/>
-          <a:ln/>
-        </p:spPr>
-        <p:txBody>
-          <a:bodyPr wrap="square" lIns="0" tIns="0" rIns="0" bIns="0" rtlCol="0" anchor="t"/>
-          <a:lstStyle/>
-          <a:p>
-            <a:pPr algn="l" indent="0" marL="0">
-              <a:lnSpc>
-                <a:spcPts val="1569"/>
-              </a:lnSpc>
-              <a:buNone/>
-            </a:pPr>
-            <a:r>
-              <a:rPr lang="en-US" sz="1163" b="1" dirty="0">
-                <a:solidFill>
-                  <a:srgbClr val="EAE7E0"/>
+              <a:t>1.19</a:t>
+            </a:r>
+            <a:endParaRPr lang="en-US" sz="1200" dirty="0"/>
+          </a:p>
+        </p:txBody>
+      </p:sp>
+      <p:sp>
+        <p:nvSpPr>
+          <p:cNvPr id="31" name="Text 29"/>
+          <p:cNvSpPr txBox="1"/>
+          <p:nvPr/>
+        </p:nvSpPr>
+        <p:spPr>
+          <a:xfrm>
+            <a:off x="8001000" y="4295775"/>
+            <a:ext cx="1485900" cy="131445"/>
+          </a:xfrm>
+          <a:prstGeom prst="rect">
+            <a:avLst/>
+          </a:prstGeom>
+          <a:noFill/>
+          <a:ln/>
+        </p:spPr>
+        <p:txBody>
+          <a:bodyPr wrap="square" lIns="0" tIns="0" rIns="0" bIns="0" rtlCol="0" anchor="t"/>
+          <a:lstStyle/>
+          <a:p>
+            <a:pPr algn="ctr" indent="0" marL="0">
+              <a:lnSpc>
+                <a:spcPts val="1035"/>
+              </a:lnSpc>
+              <a:buNone/>
+            </a:pPr>
+            <a:r>
+              <a:rPr lang="en-US" sz="863" dirty="0">
+                <a:solidFill>
+                  <a:srgbClr val="8A8880"/>
                 </a:solidFill>
                 <a:latin typeface="Malgun Gothic" pitchFamily="34" charset="0"/>
                 <a:ea typeface="Malgun Gothic" pitchFamily="34" charset="-122"/>
                 <a:cs typeface="Malgun Gothic" pitchFamily="34" charset="-120"/>
               </a:rPr>
-              <a:t>·  차이를 배우고 방식을 고르는 부분</a:t>
-            </a:r>
-            <a:endParaRPr lang="en-US" sz="1163" dirty="0"/>
-          </a:p>
-        </p:txBody>
-      </p:sp>
-      <p:sp>
-        <p:nvSpPr>
-          <p:cNvPr id="20" name="Text 18"/>
-          <p:cNvSpPr txBox="1"/>
-          <p:nvPr/>
-        </p:nvSpPr>
-        <p:spPr>
-          <a:xfrm>
-            <a:off x="914400" y="3390900"/>
-            <a:ext cx="4762500" cy="199311"/>
-          </a:xfrm>
-          <a:prstGeom prst="rect">
-            <a:avLst/>
-          </a:prstGeom>
-          <a:noFill/>
-          <a:ln/>
-        </p:spPr>
-        <p:txBody>
-          <a:bodyPr wrap="square" lIns="0" tIns="0" rIns="0" bIns="0" rtlCol="0" anchor="t"/>
-          <a:lstStyle/>
-          <a:p>
-            <a:pPr algn="l" indent="0" marL="0">
-              <a:lnSpc>
-                <a:spcPts val="1569"/>
-              </a:lnSpc>
-              <a:buNone/>
-            </a:pPr>
-            <a:r>
-              <a:rPr lang="en-US" sz="1163" b="1" dirty="0">
-                <a:solidFill>
-                  <a:srgbClr val="EAE7E0"/>
-                </a:solidFill>
-                <a:latin typeface="Malgun Gothic" pitchFamily="34" charset="0"/>
-                <a:ea typeface="Malgun Gothic" pitchFamily="34" charset="-122"/>
-                <a:cs typeface="Malgun Gothic" pitchFamily="34" charset="-120"/>
-              </a:rPr>
-              <a:t>·  의심하고 걸러내는 절차</a:t>
-            </a:r>
-            <a:endParaRPr lang="en-US" sz="1163" dirty="0"/>
-          </a:p>
-        </p:txBody>
-      </p:sp>
-      <p:sp>
-        <p:nvSpPr>
-          <p:cNvPr id="21" name="Text 19"/>
-          <p:cNvSpPr txBox="1"/>
-          <p:nvPr/>
-        </p:nvSpPr>
-        <p:spPr>
-          <a:xfrm>
-            <a:off x="914400" y="3676650"/>
-            <a:ext cx="4762500" cy="199311"/>
-          </a:xfrm>
-          <a:prstGeom prst="rect">
-            <a:avLst/>
-          </a:prstGeom>
-          <a:noFill/>
-          <a:ln/>
-        </p:spPr>
-        <p:txBody>
-          <a:bodyPr wrap="square" lIns="0" tIns="0" rIns="0" bIns="0" rtlCol="0" anchor="t"/>
-          <a:lstStyle/>
-          <a:p>
-            <a:pPr algn="l" indent="0" marL="0">
-              <a:lnSpc>
-                <a:spcPts val="1569"/>
-              </a:lnSpc>
-              <a:buNone/>
-            </a:pPr>
-            <a:r>
-              <a:rPr lang="en-US" sz="1163" b="1" dirty="0">
-                <a:solidFill>
-                  <a:srgbClr val="EAE7E0"/>
-                </a:solidFill>
-                <a:latin typeface="Malgun Gothic" pitchFamily="34" charset="0"/>
-                <a:ea typeface="Malgun Gothic" pitchFamily="34" charset="-122"/>
-                <a:cs typeface="Malgun Gothic" pitchFamily="34" charset="-120"/>
-              </a:rPr>
-              <a:t>·  프로파일 생성과 화면</a:t>
-            </a:r>
-            <a:endParaRPr lang="en-US" sz="1163" dirty="0"/>
-          </a:p>
-        </p:txBody>
-      </p:sp>
-      <p:sp>
-        <p:nvSpPr>
-          <p:cNvPr id="22" name="Text 20"/>
-          <p:cNvSpPr txBox="1"/>
-          <p:nvPr/>
-        </p:nvSpPr>
-        <p:spPr>
-          <a:xfrm>
-            <a:off x="6324600" y="3105150"/>
-            <a:ext cx="4762500" cy="199311"/>
-          </a:xfrm>
-          <a:prstGeom prst="rect">
-            <a:avLst/>
-          </a:prstGeom>
-          <a:noFill/>
-          <a:ln/>
-        </p:spPr>
-        <p:txBody>
-          <a:bodyPr wrap="square" lIns="0" tIns="0" rIns="0" bIns="0" rtlCol="0" anchor="t"/>
-          <a:lstStyle/>
-          <a:p>
-            <a:pPr algn="l" indent="0" marL="0">
-              <a:lnSpc>
-                <a:spcPts val="1569"/>
-              </a:lnSpc>
-              <a:buNone/>
-            </a:pPr>
-            <a:r>
-              <a:rPr lang="en-US" sz="1163" b="1" dirty="0">
-                <a:solidFill>
-                  <a:srgbClr val="A8BCD1"/>
-                </a:solidFill>
-                <a:latin typeface="Malgun Gothic" pitchFamily="34" charset="0"/>
-                <a:ea typeface="Malgun Gothic" pitchFamily="34" charset="-122"/>
-                <a:cs typeface="Malgun Gothic" pitchFamily="34" charset="-120"/>
-              </a:rPr>
-              <a:t>·  설비별 이론식 (성능 곡선)</a:t>
-            </a:r>
-            <a:endParaRPr lang="en-US" sz="1163" dirty="0"/>
-          </a:p>
-        </p:txBody>
-      </p:sp>
-      <p:sp>
-        <p:nvSpPr>
-          <p:cNvPr id="23" name="Text 21"/>
-          <p:cNvSpPr txBox="1"/>
-          <p:nvPr/>
-        </p:nvSpPr>
-        <p:spPr>
-          <a:xfrm>
-            <a:off x="6324600" y="3390900"/>
-            <a:ext cx="4762500" cy="199311"/>
-          </a:xfrm>
-          <a:prstGeom prst="rect">
-            <a:avLst/>
-          </a:prstGeom>
-          <a:noFill/>
-          <a:ln/>
-        </p:spPr>
-        <p:txBody>
-          <a:bodyPr wrap="square" lIns="0" tIns="0" rIns="0" bIns="0" rtlCol="0" anchor="t"/>
-          <a:lstStyle/>
-          <a:p>
-            <a:pPr algn="l" indent="0" marL="0">
-              <a:lnSpc>
-                <a:spcPts val="1569"/>
-              </a:lnSpc>
-              <a:buNone/>
-            </a:pPr>
-            <a:r>
-              <a:rPr lang="en-US" sz="1163" b="1" dirty="0">
-                <a:solidFill>
-                  <a:srgbClr val="A8BCD1"/>
-                </a:solidFill>
-                <a:latin typeface="Malgun Gothic" pitchFamily="34" charset="0"/>
-                <a:ea typeface="Malgun Gothic" pitchFamily="34" charset="-122"/>
-                <a:cs typeface="Malgun Gothic" pitchFamily="34" charset="-120"/>
-              </a:rPr>
-              <a:t>·  설비 상수</a:t>
-            </a:r>
-            <a:endParaRPr lang="en-US" sz="1163" dirty="0"/>
-          </a:p>
-        </p:txBody>
-      </p:sp>
-      <p:sp>
-        <p:nvSpPr>
-          <p:cNvPr id="24" name="Text 22"/>
-          <p:cNvSpPr txBox="1"/>
-          <p:nvPr/>
-        </p:nvSpPr>
-        <p:spPr>
-          <a:xfrm>
-            <a:off x="914400" y="3962400"/>
-            <a:ext cx="4762500" cy="131445"/>
-          </a:xfrm>
-          <a:prstGeom prst="rect">
-            <a:avLst/>
-          </a:prstGeom>
-          <a:noFill/>
-          <a:ln/>
-        </p:spPr>
-        <p:txBody>
-          <a:bodyPr wrap="square" lIns="0" tIns="0" rIns="0" bIns="0" rtlCol="0" anchor="t"/>
-          <a:lstStyle/>
-          <a:p>
-            <a:pPr algn="l" indent="0" marL="0">
-              <a:lnSpc>
-                <a:spcPts val="1035"/>
-              </a:lnSpc>
-              <a:buNone/>
-            </a:pPr>
-            <a:r>
-              <a:rPr lang="en-US" sz="863" dirty="0">
-                <a:solidFill>
-                  <a:srgbClr val="A9A79F"/>
-                </a:solidFill>
-                <a:latin typeface="Malgun Gothic" pitchFamily="34" charset="0"/>
-                <a:ea typeface="Malgun Gothic" pitchFamily="34" charset="-122"/>
-                <a:cs typeface="Malgun Gothic" pitchFamily="34" charset="-120"/>
-              </a:rPr>
-              <a:t>총 3 덩어리</a:t>
+              <a:t>34 ~ 40회차</a:t>
             </a:r>
             <a:endParaRPr lang="en-US" sz="863" dirty="0"/>
           </a:p>
@@ -8129,56 +8396,14 @@
       </p:sp>
       <p:sp>
         <p:nvSpPr>
-          <p:cNvPr id="25" name="Text 23"/>
-          <p:cNvSpPr txBox="1"/>
-          <p:nvPr/>
-        </p:nvSpPr>
-        <p:spPr>
-          <a:xfrm>
-            <a:off x="6324600" y="3962400"/>
-            <a:ext cx="4762500" cy="131445"/>
-          </a:xfrm>
-          <a:prstGeom prst="rect">
-            <a:avLst/>
-          </a:prstGeom>
-          <a:noFill/>
-          <a:ln/>
-        </p:spPr>
-        <p:txBody>
-          <a:bodyPr wrap="square" lIns="0" tIns="0" rIns="0" bIns="0" rtlCol="0" anchor="t"/>
-          <a:lstStyle/>
-          <a:p>
-            <a:pPr algn="l" indent="0" marL="0">
-              <a:lnSpc>
-                <a:spcPts val="1035"/>
-              </a:lnSpc>
-              <a:buNone/>
-            </a:pPr>
-            <a:r>
-              <a:rPr lang="en-US" sz="863" dirty="0">
-                <a:solidFill>
-                  <a:srgbClr val="A9A79F"/>
-                </a:solidFill>
-                <a:latin typeface="Malgun Gothic" pitchFamily="34" charset="0"/>
-                <a:ea typeface="Malgun Gothic" pitchFamily="34" charset="-122"/>
-                <a:cs typeface="Malgun Gothic" pitchFamily="34" charset="-120"/>
-              </a:rPr>
-              <a:t>바꿀 것은 2 덩어리뿐</a:t>
-            </a:r>
-            <a:endParaRPr lang="en-US" sz="863" dirty="0"/>
-          </a:p>
-        </p:txBody>
-      </p:sp>
-      <p:sp>
-        <p:nvSpPr>
-          <p:cNvPr id="26" name="Shape 24"/>
-          <p:cNvSpPr/>
-          <p:nvPr/>
-        </p:nvSpPr>
-        <p:spPr>
-          <a:xfrm>
-            <a:off x="685800" y="4362450"/>
-            <a:ext cx="10820400" cy="1581150"/>
+          <p:cNvPr id="32" name="Shape 30"/>
+          <p:cNvSpPr/>
+          <p:nvPr/>
+        </p:nvSpPr>
+        <p:spPr>
+          <a:xfrm>
+            <a:off x="685800" y="4591050"/>
+            <a:ext cx="10820400" cy="1352550"/>
           </a:xfrm>
           <a:prstGeom prst="rect">
             <a:avLst/>
@@ -8196,13 +8421,13 @@
       </p:sp>
       <p:sp>
         <p:nvSpPr>
-          <p:cNvPr id="27" name="Text 25"/>
-          <p:cNvSpPr txBox="1"/>
-          <p:nvPr/>
-        </p:nvSpPr>
-        <p:spPr>
-          <a:xfrm>
-            <a:off x="914400" y="4495800"/>
+          <p:cNvPr id="33" name="Text 31"/>
+          <p:cNvSpPr txBox="1"/>
+          <p:nvPr/>
+        </p:nvSpPr>
+        <p:spPr>
+          <a:xfrm>
+            <a:off x="914400" y="4686300"/>
             <a:ext cx="2857500" cy="125016"/>
           </a:xfrm>
           <a:prstGeom prst="rect">
@@ -8238,13 +8463,13 @@
       </p:sp>
       <p:sp>
         <p:nvSpPr>
-          <p:cNvPr id="28" name="Shape 26"/>
-          <p:cNvSpPr/>
-          <p:nvPr/>
-        </p:nvSpPr>
-        <p:spPr>
-          <a:xfrm>
-            <a:off x="1428750" y="5162550"/>
+          <p:cNvPr id="34" name="Shape 32"/>
+          <p:cNvSpPr/>
+          <p:nvPr/>
+        </p:nvSpPr>
+        <p:spPr>
+          <a:xfrm>
+            <a:off x="1428750" y="5295900"/>
             <a:ext cx="9239250" cy="0"/>
           </a:xfrm>
           <a:prstGeom prst="line">
@@ -8261,14 +8486,14 @@
       </p:sp>
       <p:sp>
         <p:nvSpPr>
-          <p:cNvPr id="29" name="Text 27"/>
-          <p:cNvSpPr txBox="1"/>
-          <p:nvPr/>
-        </p:nvSpPr>
-        <p:spPr>
-          <a:xfrm>
-            <a:off x="762000" y="4762500"/>
-            <a:ext cx="2286000" cy="131445"/>
+          <p:cNvPr id="35" name="Text 33"/>
+          <p:cNvSpPr txBox="1"/>
+          <p:nvPr/>
+        </p:nvSpPr>
+        <p:spPr>
+          <a:xfrm>
+            <a:off x="723900" y="4914900"/>
+            <a:ext cx="2362200" cy="131445"/>
           </a:xfrm>
           <a:prstGeom prst="rect">
             <a:avLst/>
@@ -8303,14 +8528,14 @@
       </p:sp>
       <p:sp>
         <p:nvSpPr>
-          <p:cNvPr id="30" name="Shape 28"/>
-          <p:cNvSpPr/>
-          <p:nvPr/>
-        </p:nvSpPr>
-        <p:spPr>
-          <a:xfrm>
-            <a:off x="1838325" y="5095875"/>
-            <a:ext cx="133350" cy="133350"/>
+          <p:cNvPr id="36" name="Shape 34"/>
+          <p:cNvSpPr/>
+          <p:nvPr/>
+        </p:nvSpPr>
+        <p:spPr>
+          <a:xfrm>
+            <a:off x="1843088" y="5233988"/>
+            <a:ext cx="123825" cy="123825"/>
           </a:xfrm>
           <a:prstGeom prst="ellipse">
             <a:avLst/>
@@ -8323,14 +8548,14 @@
       </p:sp>
       <p:sp>
         <p:nvSpPr>
-          <p:cNvPr id="31" name="Text 29"/>
-          <p:cNvSpPr txBox="1"/>
-          <p:nvPr/>
-        </p:nvSpPr>
-        <p:spPr>
-          <a:xfrm>
-            <a:off x="762000" y="5314950"/>
-            <a:ext cx="2286000" cy="204311"/>
+          <p:cNvPr id="37" name="Text 35"/>
+          <p:cNvSpPr txBox="1"/>
+          <p:nvPr/>
+        </p:nvSpPr>
+        <p:spPr>
+          <a:xfrm>
+            <a:off x="723900" y="5429250"/>
+            <a:ext cx="2362200" cy="191929"/>
           </a:xfrm>
           <a:prstGeom prst="rect">
             <a:avLst/>
@@ -8344,12 +8569,12 @@
           <a:p>
             <a:pPr algn="ctr" indent="0" marL="0">
               <a:lnSpc>
-                <a:spcPts val="1609"/>
-              </a:lnSpc>
-              <a:buNone/>
-            </a:pPr>
-            <a:r>
-              <a:rPr lang="en-US" sz="1238" b="1" dirty="0">
+                <a:spcPts val="1511"/>
+              </a:lnSpc>
+              <a:buNone/>
+            </a:pPr>
+            <a:r>
+              <a:rPr lang="en-US" sz="1163" b="1" dirty="0">
                 <a:solidFill>
                   <a:srgbClr val="EFB13C"/>
                 </a:solidFill>
@@ -8359,20 +8584,20 @@
               </a:rPr>
               <a:t>위례 정착</a:t>
             </a:r>
-            <a:endParaRPr lang="en-US" sz="1238" dirty="0"/>
-          </a:p>
-        </p:txBody>
-      </p:sp>
-      <p:sp>
-        <p:nvSpPr>
-          <p:cNvPr id="32" name="Text 30"/>
-          <p:cNvSpPr txBox="1"/>
-          <p:nvPr/>
-        </p:nvSpPr>
-        <p:spPr>
-          <a:xfrm>
-            <a:off x="723900" y="5562600"/>
-            <a:ext cx="2362200" cy="160734"/>
+            <a:endParaRPr lang="en-US" sz="1163" dirty="0"/>
+          </a:p>
+        </p:txBody>
+      </p:sp>
+      <p:sp>
+        <p:nvSpPr>
+          <p:cNvPr id="38" name="Text 36"/>
+          <p:cNvSpPr txBox="1"/>
+          <p:nvPr/>
+        </p:nvSpPr>
+        <p:spPr>
+          <a:xfrm>
+            <a:off x="723900" y="5638800"/>
+            <a:ext cx="2362200" cy="284798"/>
           </a:xfrm>
           <a:prstGeom prst="rect">
             <a:avLst/>
@@ -8386,12 +8611,12 @@
           <a:p>
             <a:pPr algn="ctr" indent="0" marL="0">
               <a:lnSpc>
-                <a:spcPts val="1266"/>
-              </a:lnSpc>
-              <a:buNone/>
-            </a:pPr>
-            <a:r>
-              <a:rPr lang="en-US" sz="938" dirty="0">
+                <a:spcPts val="1121"/>
+              </a:lnSpc>
+              <a:buNone/>
+            </a:pPr>
+            <a:r>
+              <a:rPr lang="en-US" sz="863" dirty="0">
                 <a:solidFill>
                   <a:srgbClr val="A9A79F"/>
                 </a:solidFill>
@@ -8401,20 +8626,20 @@
               </a:rPr>
               <a:t>누적 회차로 운영 중</a:t>
             </a:r>
-            <a:endParaRPr lang="en-US" sz="938" dirty="0"/>
-          </a:p>
-        </p:txBody>
-      </p:sp>
-      <p:sp>
-        <p:nvSpPr>
-          <p:cNvPr id="33" name="Text 31"/>
-          <p:cNvSpPr txBox="1"/>
-          <p:nvPr/>
-        </p:nvSpPr>
-        <p:spPr>
-          <a:xfrm>
-            <a:off x="3362325" y="4762500"/>
-            <a:ext cx="2286000" cy="131445"/>
+            <a:endParaRPr lang="en-US" sz="863" dirty="0"/>
+          </a:p>
+        </p:txBody>
+      </p:sp>
+      <p:sp>
+        <p:nvSpPr>
+          <p:cNvPr id="39" name="Text 37"/>
+          <p:cNvSpPr txBox="1"/>
+          <p:nvPr/>
+        </p:nvSpPr>
+        <p:spPr>
+          <a:xfrm>
+            <a:off x="3324225" y="4914900"/>
+            <a:ext cx="2362200" cy="131445"/>
           </a:xfrm>
           <a:prstGeom prst="rect">
             <a:avLst/>
@@ -8435,13 +8660,13 @@
             <a:r>
               <a:rPr lang="en-US" sz="863" b="1" dirty="0">
                 <a:solidFill>
-                  <a:srgbClr val="8A8880"/>
+                  <a:srgbClr val="EFB13C"/>
                 </a:solidFill>
                 <a:latin typeface="Consolas" pitchFamily="34" charset="0"/>
                 <a:ea typeface="Consolas" pitchFamily="34" charset="-122"/>
                 <a:cs typeface="Consolas" pitchFamily="34" charset="-120"/>
               </a:rPr>
-              <a:t>2026.10~12</a:t>
+              <a:t>2026.10 ~</a:t>
             </a:r>
             <a:endParaRPr lang="en-US" sz="863" dirty="0"/>
           </a:p>
@@ -8449,14 +8674,160 @@
       </p:sp>
       <p:sp>
         <p:nvSpPr>
-          <p:cNvPr id="34" name="Shape 32"/>
-          <p:cNvSpPr/>
-          <p:nvPr/>
-        </p:nvSpPr>
-        <p:spPr>
-          <a:xfrm>
-            <a:off x="4452938" y="5110163"/>
-            <a:ext cx="104775" cy="104775"/>
+          <p:cNvPr id="40" name="Shape 38"/>
+          <p:cNvSpPr/>
+          <p:nvPr/>
+        </p:nvSpPr>
+        <p:spPr>
+          <a:xfrm>
+            <a:off x="4443413" y="5233988"/>
+            <a:ext cx="123825" cy="123825"/>
+          </a:xfrm>
+          <a:prstGeom prst="ellipse">
+            <a:avLst/>
+          </a:prstGeom>
+          <a:solidFill>
+            <a:srgbClr val="EFB13C"/>
+          </a:solidFill>
+          <a:ln/>
+        </p:spPr>
+      </p:sp>
+      <p:sp>
+        <p:nvSpPr>
+          <p:cNvPr id="41" name="Text 39"/>
+          <p:cNvSpPr txBox="1"/>
+          <p:nvPr/>
+        </p:nvSpPr>
+        <p:spPr>
+          <a:xfrm>
+            <a:off x="3324225" y="5429250"/>
+            <a:ext cx="2362200" cy="191929"/>
+          </a:xfrm>
+          <a:prstGeom prst="rect">
+            <a:avLst/>
+          </a:prstGeom>
+          <a:noFill/>
+          <a:ln/>
+        </p:spPr>
+        <p:txBody>
+          <a:bodyPr wrap="square" lIns="0" tIns="0" rIns="0" bIns="0" rtlCol="0" anchor="t"/>
+          <a:lstStyle/>
+          <a:p>
+            <a:pPr algn="ctr" indent="0" marL="0">
+              <a:lnSpc>
+                <a:spcPts val="1511"/>
+              </a:lnSpc>
+              <a:buNone/>
+            </a:pPr>
+            <a:r>
+              <a:rPr lang="en-US" sz="1163" b="1" dirty="0">
+                <a:solidFill>
+                  <a:srgbClr val="EFB13C"/>
+                </a:solidFill>
+                <a:latin typeface="Malgun Gothic" pitchFamily="34" charset="0"/>
+                <a:ea typeface="Malgun Gothic" pitchFamily="34" charset="-122"/>
+                <a:cs typeface="Malgun Gothic" pitchFamily="34" charset="-120"/>
+              </a:rPr>
+              <a:t>테스트 누적 · 고도화</a:t>
+            </a:r>
+            <a:endParaRPr lang="en-US" sz="1163" dirty="0"/>
+          </a:p>
+        </p:txBody>
+      </p:sp>
+      <p:sp>
+        <p:nvSpPr>
+          <p:cNvPr id="42" name="Text 40"/>
+          <p:cNvSpPr txBox="1"/>
+          <p:nvPr/>
+        </p:nvSpPr>
+        <p:spPr>
+          <a:xfrm>
+            <a:off x="3324225" y="5638800"/>
+            <a:ext cx="2362200" cy="284798"/>
+          </a:xfrm>
+          <a:prstGeom prst="rect">
+            <a:avLst/>
+          </a:prstGeom>
+          <a:noFill/>
+          <a:ln/>
+        </p:spPr>
+        <p:txBody>
+          <a:bodyPr wrap="square" lIns="0" tIns="0" rIns="0" bIns="0" rtlCol="0" anchor="t"/>
+          <a:lstStyle/>
+          <a:p>
+            <a:pPr algn="ctr" indent="0" marL="0">
+              <a:lnSpc>
+                <a:spcPts val="1121"/>
+              </a:lnSpc>
+              <a:buNone/>
+            </a:pPr>
+            <a:r>
+              <a:rPr lang="en-US" sz="863" dirty="0">
+                <a:solidFill>
+                  <a:srgbClr val="A9A79F"/>
+                </a:solidFill>
+                <a:latin typeface="Malgun Gothic" pitchFamily="34" charset="0"/>
+                <a:ea typeface="Malgun Gothic" pitchFamily="34" charset="-122"/>
+                <a:cs typeface="Malgun Gothic" pitchFamily="34" charset="-120"/>
+              </a:rPr>
+              <a:t>회차마다 다시 학습 — 쌓을수록 오차가 줄어듭니다</a:t>
+            </a:r>
+            <a:endParaRPr lang="en-US" sz="863" dirty="0"/>
+          </a:p>
+        </p:txBody>
+      </p:sp>
+      <p:sp>
+        <p:nvSpPr>
+          <p:cNvPr id="43" name="Text 41"/>
+          <p:cNvSpPr txBox="1"/>
+          <p:nvPr/>
+        </p:nvSpPr>
+        <p:spPr>
+          <a:xfrm>
+            <a:off x="5924550" y="4914900"/>
+            <a:ext cx="2362200" cy="131445"/>
+          </a:xfrm>
+          <a:prstGeom prst="rect">
+            <a:avLst/>
+          </a:prstGeom>
+          <a:noFill/>
+          <a:ln/>
+        </p:spPr>
+        <p:txBody>
+          <a:bodyPr wrap="square" lIns="0" tIns="0" rIns="0" bIns="0" rtlCol="0" anchor="t"/>
+          <a:lstStyle/>
+          <a:p>
+            <a:pPr algn="ctr" indent="0" marL="0">
+              <a:lnSpc>
+                <a:spcPts val="1035"/>
+              </a:lnSpc>
+              <a:buNone/>
+            </a:pPr>
+            <a:r>
+              <a:rPr lang="en-US" sz="863" b="1" dirty="0">
+                <a:solidFill>
+                  <a:srgbClr val="8A8880"/>
+                </a:solidFill>
+                <a:latin typeface="Consolas" pitchFamily="34" charset="0"/>
+                <a:ea typeface="Consolas" pitchFamily="34" charset="-122"/>
+                <a:cs typeface="Consolas" pitchFamily="34" charset="-120"/>
+              </a:rPr>
+              <a:t>2027 상반기</a:t>
+            </a:r>
+            <a:endParaRPr lang="en-US" sz="863" dirty="0"/>
+          </a:p>
+        </p:txBody>
+      </p:sp>
+      <p:sp>
+        <p:nvSpPr>
+          <p:cNvPr id="44" name="Shape 42"/>
+          <p:cNvSpPr/>
+          <p:nvPr/>
+        </p:nvSpPr>
+        <p:spPr>
+          <a:xfrm>
+            <a:off x="7058025" y="5248275"/>
+            <a:ext cx="95250" cy="95250"/>
           </a:xfrm>
           <a:prstGeom prst="ellipse">
             <a:avLst/>
@@ -8469,14 +8840,14 @@
       </p:sp>
       <p:sp>
         <p:nvSpPr>
-          <p:cNvPr id="35" name="Text 33"/>
-          <p:cNvSpPr txBox="1"/>
-          <p:nvPr/>
-        </p:nvSpPr>
-        <p:spPr>
-          <a:xfrm>
-            <a:off x="3362325" y="5314950"/>
-            <a:ext cx="2286000" cy="204311"/>
+          <p:cNvPr id="45" name="Text 43"/>
+          <p:cNvSpPr txBox="1"/>
+          <p:nvPr/>
+        </p:nvSpPr>
+        <p:spPr>
+          <a:xfrm>
+            <a:off x="5924550" y="5429250"/>
+            <a:ext cx="2362200" cy="191929"/>
           </a:xfrm>
           <a:prstGeom prst="rect">
             <a:avLst/>
@@ -8490,12 +8861,12 @@
           <a:p>
             <a:pPr algn="ctr" indent="0" marL="0">
               <a:lnSpc>
-                <a:spcPts val="1609"/>
-              </a:lnSpc>
-              <a:buNone/>
-            </a:pPr>
-            <a:r>
-              <a:rPr lang="en-US" sz="1238" b="1" dirty="0">
+                <a:spcPts val="1511"/>
+              </a:lnSpc>
+              <a:buNone/>
+            </a:pPr>
+            <a:r>
+              <a:rPr lang="en-US" sz="1163" b="1" dirty="0">
                 <a:solidFill>
                   <a:srgbClr val="EAE7E0"/>
                 </a:solidFill>
@@ -8503,22 +8874,22 @@
                 <a:ea typeface="Malgun Gothic" pitchFamily="34" charset="-122"/>
                 <a:cs typeface="Malgun Gothic" pitchFamily="34" charset="-120"/>
               </a:rPr>
-              <a:t>절차 문서화</a:t>
-            </a:r>
-            <a:endParaRPr lang="en-US" sz="1238" dirty="0"/>
-          </a:p>
-        </p:txBody>
-      </p:sp>
-      <p:sp>
-        <p:nvSpPr>
-          <p:cNvPr id="36" name="Text 34"/>
-          <p:cNvSpPr txBox="1"/>
-          <p:nvPr/>
-        </p:nvSpPr>
-        <p:spPr>
-          <a:xfrm>
-            <a:off x="3324225" y="5562600"/>
-            <a:ext cx="2362200" cy="160734"/>
+              <a:t>같은 구조 1곳 시범</a:t>
+            </a:r>
+            <a:endParaRPr lang="en-US" sz="1163" dirty="0"/>
+          </a:p>
+        </p:txBody>
+      </p:sp>
+      <p:sp>
+        <p:nvSpPr>
+          <p:cNvPr id="46" name="Text 44"/>
+          <p:cNvSpPr txBox="1"/>
+          <p:nvPr/>
+        </p:nvSpPr>
+        <p:spPr>
+          <a:xfrm>
+            <a:off x="5924550" y="5638800"/>
+            <a:ext cx="2362200" cy="284798"/>
           </a:xfrm>
           <a:prstGeom prst="rect">
             <a:avLst/>
@@ -8532,12 +8903,12 @@
           <a:p>
             <a:pPr algn="ctr" indent="0" marL="0">
               <a:lnSpc>
-                <a:spcPts val="1266"/>
-              </a:lnSpc>
-              <a:buNone/>
-            </a:pPr>
-            <a:r>
-              <a:rPr lang="en-US" sz="938" dirty="0">
+                <a:spcPts val="1121"/>
+              </a:lnSpc>
+              <a:buNone/>
+            </a:pPr>
+            <a:r>
+              <a:rPr lang="en-US" sz="863" dirty="0">
                 <a:solidFill>
                   <a:srgbClr val="A9A79F"/>
                 </a:solidFill>
@@ -8545,22 +8916,22 @@
                 <a:ea typeface="Malgun Gothic" pitchFamily="34" charset="-122"/>
                 <a:cs typeface="Malgun Gothic" pitchFamily="34" charset="-120"/>
               </a:rPr>
-              <a:t>검증·가드 기준을 사내 문서로</a:t>
-            </a:r>
-            <a:endParaRPr lang="en-US" sz="938" dirty="0"/>
-          </a:p>
-        </p:txBody>
-      </p:sp>
-      <p:sp>
-        <p:nvSpPr>
-          <p:cNvPr id="37" name="Text 35"/>
-          <p:cNvSpPr txBox="1"/>
-          <p:nvPr/>
-        </p:nvSpPr>
-        <p:spPr>
-          <a:xfrm>
-            <a:off x="5962650" y="4762500"/>
-            <a:ext cx="2286000" cy="131445"/>
+              <a:t>이론식만 바꿔 나란히 운전</a:t>
+            </a:r>
+            <a:endParaRPr lang="en-US" sz="863" dirty="0"/>
+          </a:p>
+        </p:txBody>
+      </p:sp>
+      <p:sp>
+        <p:nvSpPr>
+          <p:cNvPr id="47" name="Text 45"/>
+          <p:cNvSpPr txBox="1"/>
+          <p:nvPr/>
+        </p:nvSpPr>
+        <p:spPr>
+          <a:xfrm>
+            <a:off x="8524875" y="4914900"/>
+            <a:ext cx="2362200" cy="131445"/>
           </a:xfrm>
           <a:prstGeom prst="rect">
             <a:avLst/>
@@ -8587,7 +8958,7 @@
                 <a:ea typeface="Consolas" pitchFamily="34" charset="-122"/>
                 <a:cs typeface="Consolas" pitchFamily="34" charset="-120"/>
               </a:rPr>
-              <a:t>2027 상반기</a:t>
+              <a:t>2027 하반기</a:t>
             </a:r>
             <a:endParaRPr lang="en-US" sz="863" dirty="0"/>
           </a:p>
@@ -8595,14 +8966,14 @@
       </p:sp>
       <p:sp>
         <p:nvSpPr>
-          <p:cNvPr id="38" name="Shape 36"/>
-          <p:cNvSpPr/>
-          <p:nvPr/>
-        </p:nvSpPr>
-        <p:spPr>
-          <a:xfrm>
-            <a:off x="7053263" y="5110163"/>
-            <a:ext cx="104775" cy="104775"/>
+          <p:cNvPr id="48" name="Shape 46"/>
+          <p:cNvSpPr/>
+          <p:nvPr/>
+        </p:nvSpPr>
+        <p:spPr>
+          <a:xfrm>
+            <a:off x="9658350" y="5248275"/>
+            <a:ext cx="95250" cy="95250"/>
           </a:xfrm>
           <a:prstGeom prst="ellipse">
             <a:avLst/>
@@ -8615,14 +8986,14 @@
       </p:sp>
       <p:sp>
         <p:nvSpPr>
-          <p:cNvPr id="39" name="Text 37"/>
-          <p:cNvSpPr txBox="1"/>
-          <p:nvPr/>
-        </p:nvSpPr>
-        <p:spPr>
-          <a:xfrm>
-            <a:off x="5962650" y="5314950"/>
-            <a:ext cx="2286000" cy="204311"/>
+          <p:cNvPr id="49" name="Text 47"/>
+          <p:cNvSpPr txBox="1"/>
+          <p:nvPr/>
+        </p:nvSpPr>
+        <p:spPr>
+          <a:xfrm>
+            <a:off x="8524875" y="5429250"/>
+            <a:ext cx="2362200" cy="191929"/>
           </a:xfrm>
           <a:prstGeom prst="rect">
             <a:avLst/>
@@ -8636,12 +9007,12 @@
           <a:p>
             <a:pPr algn="ctr" indent="0" marL="0">
               <a:lnSpc>
-                <a:spcPts val="1609"/>
-              </a:lnSpc>
-              <a:buNone/>
-            </a:pPr>
-            <a:r>
-              <a:rPr lang="en-US" sz="1238" b="1" dirty="0">
+                <a:spcPts val="1511"/>
+              </a:lnSpc>
+              <a:buNone/>
+            </a:pPr>
+            <a:r>
+              <a:rPr lang="en-US" sz="1163" b="1" dirty="0">
                 <a:solidFill>
                   <a:srgbClr val="EAE7E0"/>
                 </a:solidFill>
@@ -8649,22 +9020,22 @@
                 <a:ea typeface="Malgun Gothic" pitchFamily="34" charset="-122"/>
                 <a:cs typeface="Malgun Gothic" pitchFamily="34" charset="-120"/>
               </a:rPr>
-              <a:t>같은 구조 1곳 시범</a:t>
-            </a:r>
-            <a:endParaRPr lang="en-US" sz="1238" dirty="0"/>
-          </a:p>
-        </p:txBody>
-      </p:sp>
-      <p:sp>
-        <p:nvSpPr>
-          <p:cNvPr id="40" name="Text 38"/>
-          <p:cNvSpPr txBox="1"/>
-          <p:nvPr/>
-        </p:nvSpPr>
-        <p:spPr>
-          <a:xfrm>
-            <a:off x="5924550" y="5562600"/>
-            <a:ext cx="2362200" cy="160734"/>
+              <a:t>수평 전개</a:t>
+            </a:r>
+            <a:endParaRPr lang="en-US" sz="1163" dirty="0"/>
+          </a:p>
+        </p:txBody>
+      </p:sp>
+      <p:sp>
+        <p:nvSpPr>
+          <p:cNvPr id="50" name="Text 48"/>
+          <p:cNvSpPr txBox="1"/>
+          <p:nvPr/>
+        </p:nvSpPr>
+        <p:spPr>
+          <a:xfrm>
+            <a:off x="8524875" y="5638800"/>
+            <a:ext cx="2362200" cy="284798"/>
           </a:xfrm>
           <a:prstGeom prst="rect">
             <a:avLst/>
@@ -8678,12 +9049,12 @@
           <a:p>
             <a:pPr algn="ctr" indent="0" marL="0">
               <a:lnSpc>
-                <a:spcPts val="1266"/>
-              </a:lnSpc>
-              <a:buNone/>
-            </a:pPr>
-            <a:r>
-              <a:rPr lang="en-US" sz="938" dirty="0">
+                <a:spcPts val="1121"/>
+              </a:lnSpc>
+              <a:buNone/>
+            </a:pPr>
+            <a:r>
+              <a:rPr lang="en-US" sz="863" dirty="0">
                 <a:solidFill>
                   <a:srgbClr val="A9A79F"/>
                 </a:solidFill>
@@ -8691,49 +9062,7 @@
                 <a:ea typeface="Malgun Gothic" pitchFamily="34" charset="-122"/>
                 <a:cs typeface="Malgun Gothic" pitchFamily="34" charset="-120"/>
               </a:rPr>
-              <a:t>이론식만 바꿔 나란히 운전</a:t>
-            </a:r>
-            <a:endParaRPr lang="en-US" sz="938" dirty="0"/>
-          </a:p>
-        </p:txBody>
-      </p:sp>
-      <p:sp>
-        <p:nvSpPr>
-          <p:cNvPr id="41" name="Text 39"/>
-          <p:cNvSpPr txBox="1"/>
-          <p:nvPr/>
-        </p:nvSpPr>
-        <p:spPr>
-          <a:xfrm>
-            <a:off x="8562975" y="4762500"/>
-            <a:ext cx="2286000" cy="131445"/>
-          </a:xfrm>
-          <a:prstGeom prst="rect">
-            <a:avLst/>
-          </a:prstGeom>
-          <a:noFill/>
-          <a:ln/>
-        </p:spPr>
-        <p:txBody>
-          <a:bodyPr wrap="square" lIns="0" tIns="0" rIns="0" bIns="0" rtlCol="0" anchor="t"/>
-          <a:lstStyle/>
-          <a:p>
-            <a:pPr algn="ctr" indent="0" marL="0">
-              <a:lnSpc>
-                <a:spcPts val="1035"/>
-              </a:lnSpc>
-              <a:buNone/>
-            </a:pPr>
-            <a:r>
-              <a:rPr lang="en-US" sz="863" b="1" dirty="0">
-                <a:solidFill>
-                  <a:srgbClr val="8A8880"/>
-                </a:solidFill>
-                <a:latin typeface="Consolas" pitchFamily="34" charset="0"/>
-                <a:ea typeface="Consolas" pitchFamily="34" charset="-122"/>
-                <a:cs typeface="Consolas" pitchFamily="34" charset="-120"/>
-              </a:rPr>
-              <a:t>2027 하반기</a:t>
+              <a:t>이론식 부분을 분리한 뒤 확대</a:t>
             </a:r>
             <a:endParaRPr lang="en-US" sz="863" dirty="0"/>
           </a:p>
@@ -8741,111 +9070,7 @@
       </p:sp>
       <p:sp>
         <p:nvSpPr>
-          <p:cNvPr id="42" name="Shape 40"/>
-          <p:cNvSpPr/>
-          <p:nvPr/>
-        </p:nvSpPr>
-        <p:spPr>
-          <a:xfrm>
-            <a:off x="9653588" y="5110163"/>
-            <a:ext cx="104775" cy="104775"/>
-          </a:xfrm>
-          <a:prstGeom prst="ellipse">
-            <a:avLst/>
-          </a:prstGeom>
-          <a:solidFill>
-            <a:srgbClr val="55708A"/>
-          </a:solidFill>
-          <a:ln/>
-        </p:spPr>
-      </p:sp>
-      <p:sp>
-        <p:nvSpPr>
-          <p:cNvPr id="43" name="Text 41"/>
-          <p:cNvSpPr txBox="1"/>
-          <p:nvPr/>
-        </p:nvSpPr>
-        <p:spPr>
-          <a:xfrm>
-            <a:off x="8562975" y="5314950"/>
-            <a:ext cx="2286000" cy="204311"/>
-          </a:xfrm>
-          <a:prstGeom prst="rect">
-            <a:avLst/>
-          </a:prstGeom>
-          <a:noFill/>
-          <a:ln/>
-        </p:spPr>
-        <p:txBody>
-          <a:bodyPr wrap="square" lIns="0" tIns="0" rIns="0" bIns="0" rtlCol="0" anchor="t"/>
-          <a:lstStyle/>
-          <a:p>
-            <a:pPr algn="ctr" indent="0" marL="0">
-              <a:lnSpc>
-                <a:spcPts val="1609"/>
-              </a:lnSpc>
-              <a:buNone/>
-            </a:pPr>
-            <a:r>
-              <a:rPr lang="en-US" sz="1238" b="1" dirty="0">
-                <a:solidFill>
-                  <a:srgbClr val="EAE7E0"/>
-                </a:solidFill>
-                <a:latin typeface="Malgun Gothic" pitchFamily="34" charset="0"/>
-                <a:ea typeface="Malgun Gothic" pitchFamily="34" charset="-122"/>
-                <a:cs typeface="Malgun Gothic" pitchFamily="34" charset="-120"/>
-              </a:rPr>
-              <a:t>수평 전개</a:t>
-            </a:r>
-            <a:endParaRPr lang="en-US" sz="1238" dirty="0"/>
-          </a:p>
-        </p:txBody>
-      </p:sp>
-      <p:sp>
-        <p:nvSpPr>
-          <p:cNvPr id="44" name="Text 42"/>
-          <p:cNvSpPr txBox="1"/>
-          <p:nvPr/>
-        </p:nvSpPr>
-        <p:spPr>
-          <a:xfrm>
-            <a:off x="8524875" y="5562600"/>
-            <a:ext cx="2362200" cy="160734"/>
-          </a:xfrm>
-          <a:prstGeom prst="rect">
-            <a:avLst/>
-          </a:prstGeom>
-          <a:noFill/>
-          <a:ln/>
-        </p:spPr>
-        <p:txBody>
-          <a:bodyPr wrap="square" lIns="0" tIns="0" rIns="0" bIns="0" rtlCol="0" anchor="t"/>
-          <a:lstStyle/>
-          <a:p>
-            <a:pPr algn="ctr" indent="0" marL="0">
-              <a:lnSpc>
-                <a:spcPts val="1266"/>
-              </a:lnSpc>
-              <a:buNone/>
-            </a:pPr>
-            <a:r>
-              <a:rPr lang="en-US" sz="938" dirty="0">
-                <a:solidFill>
-                  <a:srgbClr val="A9A79F"/>
-                </a:solidFill>
-                <a:latin typeface="Malgun Gothic" pitchFamily="34" charset="0"/>
-                <a:ea typeface="Malgun Gothic" pitchFamily="34" charset="-122"/>
-                <a:cs typeface="Malgun Gothic" pitchFamily="34" charset="-120"/>
-              </a:rPr>
-              <a:t>이론식 부분을 분리한 뒤 확대</a:t>
-            </a:r>
-            <a:endParaRPr lang="en-US" sz="938" dirty="0"/>
-          </a:p>
-        </p:txBody>
-      </p:sp>
-      <p:sp>
-        <p:nvSpPr>
-          <p:cNvPr id="45" name="Shape 43"/>
+          <p:cNvPr id="51" name="Shape 49"/>
           <p:cNvSpPr/>
           <p:nvPr/>
         </p:nvSpPr>
@@ -8868,7 +9093,7 @@
       </p:sp>
       <p:sp>
         <p:nvSpPr>
-          <p:cNvPr id="46" name="Text 44"/>
+          <p:cNvPr id="52" name="Text 50"/>
           <p:cNvSpPr txBox="1"/>
           <p:nvPr/>
         </p:nvSpPr>
@@ -8910,7 +9135,7 @@
       </p:sp>
       <p:sp>
         <p:nvSpPr>
-          <p:cNvPr id="47" name="Text 45"/>
+          <p:cNvPr id="53" name="Text 51"/>
           <p:cNvSpPr txBox="1"/>
           <p:nvPr/>
         </p:nvSpPr>
@@ -8944,7 +9169,7 @@
                 <a:ea typeface="Malgun Gothic" pitchFamily="34" charset="-122"/>
                 <a:cs typeface="Malgun Gothic" pitchFamily="34" charset="-120"/>
               </a:rPr>
-              <a:t>위례에서 검증한 절차 그대로 — </a:t>
+              <a:t>배우는 부분은 그대로 옮겨집니다 — 사업소마다 바꿀 것은 </a:t>
             </a:r>
             <a:pPr algn="l" indent="0" marL="0">
               <a:lnSpc>
@@ -8961,7 +9186,7 @@
                 <a:ea typeface="Malgun Gothic" pitchFamily="34" charset="-122"/>
                 <a:cs typeface="Malgun Gothic" pitchFamily="34" charset="-120"/>
               </a:rPr>
-              <a:t>바꿀 것은 이론식 하나</a:t>
+              <a:t>이론식 하나</a:t>
             </a:r>
             <a:pPr algn="l" indent="0" marL="0">
               <a:lnSpc>
@@ -11018,7 +11243,7 @@
             <a:avLst/>
           </a:prstGeom>
           <a:noFill/>
-          <a:ln w="25400">
+          <a:ln w="17780">
             <a:solidFill>
               <a:srgbClr val="A8BCD1"/>
             </a:solidFill>
@@ -11041,7 +11266,7 @@
             <a:avLst/>
           </a:prstGeom>
           <a:noFill/>
-          <a:ln w="25400">
+          <a:ln w="17780">
             <a:solidFill>
               <a:srgbClr val="A8BCD1"/>
             </a:solidFill>
@@ -11064,7 +11289,7 @@
             <a:avLst/>
           </a:prstGeom>
           <a:noFill/>
-          <a:ln w="25400">
+          <a:ln w="17780">
             <a:solidFill>
               <a:srgbClr val="A8BCD1"/>
             </a:solidFill>
@@ -11087,7 +11312,7 @@
             <a:avLst/>
           </a:prstGeom>
           <a:noFill/>
-          <a:ln w="25400">
+          <a:ln w="17780">
             <a:solidFill>
               <a:srgbClr val="A8BCD1"/>
             </a:solidFill>
@@ -11110,7 +11335,7 @@
             <a:avLst/>
           </a:prstGeom>
           <a:noFill/>
-          <a:ln w="25400">
+          <a:ln w="17780">
             <a:solidFill>
               <a:srgbClr val="A8BCD1"/>
             </a:solidFill>
@@ -11133,7 +11358,7 @@
             <a:avLst/>
           </a:prstGeom>
           <a:noFill/>
-          <a:ln w="25400">
+          <a:ln w="17780">
             <a:solidFill>
               <a:srgbClr val="A8BCD1"/>
             </a:solidFill>
@@ -11156,7 +11381,7 @@
             <a:avLst/>
           </a:prstGeom>
           <a:noFill/>
-          <a:ln w="25400">
+          <a:ln w="17780">
             <a:solidFill>
               <a:srgbClr val="A8BCD1"/>
             </a:solidFill>
@@ -11179,7 +11404,7 @@
             <a:avLst/>
           </a:prstGeom>
           <a:noFill/>
-          <a:ln w="25400">
+          <a:ln w="17780">
             <a:solidFill>
               <a:srgbClr val="A8BCD1"/>
             </a:solidFill>
@@ -11202,7 +11427,7 @@
             <a:avLst/>
           </a:prstGeom>
           <a:noFill/>
-          <a:ln w="25400">
+          <a:ln w="17780">
             <a:solidFill>
               <a:srgbClr val="A8BCD1"/>
             </a:solidFill>
@@ -11225,7 +11450,7 @@
             <a:avLst/>
           </a:prstGeom>
           <a:noFill/>
-          <a:ln w="25400">
+          <a:ln w="17780">
             <a:solidFill>
               <a:srgbClr val="A8BCD1"/>
             </a:solidFill>
@@ -11248,7 +11473,7 @@
             <a:avLst/>
           </a:prstGeom>
           <a:noFill/>
-          <a:ln w="25400">
+          <a:ln w="17780">
             <a:solidFill>
               <a:srgbClr val="A8BCD1"/>
             </a:solidFill>
@@ -11271,7 +11496,7 @@
             <a:avLst/>
           </a:prstGeom>
           <a:noFill/>
-          <a:ln w="25400">
+          <a:ln w="17780">
             <a:solidFill>
               <a:srgbClr val="A8BCD1"/>
             </a:solidFill>
@@ -11294,7 +11519,7 @@
             <a:avLst/>
           </a:prstGeom>
           <a:noFill/>
-          <a:ln w="25400">
+          <a:ln w="17780">
             <a:solidFill>
               <a:srgbClr val="A8BCD1"/>
             </a:solidFill>
@@ -11317,7 +11542,7 @@
             <a:avLst/>
           </a:prstGeom>
           <a:noFill/>
-          <a:ln w="25400">
+          <a:ln w="17780">
             <a:solidFill>
               <a:srgbClr val="A8BCD1"/>
             </a:solidFill>
@@ -11340,7 +11565,7 @@
             <a:avLst/>
           </a:prstGeom>
           <a:noFill/>
-          <a:ln w="25400">
+          <a:ln w="17780">
             <a:solidFill>
               <a:srgbClr val="A8BCD1"/>
             </a:solidFill>
@@ -11363,7 +11588,7 @@
             <a:avLst/>
           </a:prstGeom>
           <a:noFill/>
-          <a:ln w="25400">
+          <a:ln w="17780">
             <a:solidFill>
               <a:srgbClr val="A8BCD1"/>
             </a:solidFill>
@@ -11386,7 +11611,7 @@
             <a:avLst/>
           </a:prstGeom>
           <a:noFill/>
-          <a:ln w="25400">
+          <a:ln w="17780">
             <a:solidFill>
               <a:srgbClr val="A8BCD1"/>
             </a:solidFill>
@@ -11409,7 +11634,7 @@
             <a:avLst/>
           </a:prstGeom>
           <a:noFill/>
-          <a:ln w="25400">
+          <a:ln w="17780">
             <a:solidFill>
               <a:srgbClr val="A8BCD1"/>
             </a:solidFill>
@@ -11432,7 +11657,7 @@
             <a:avLst/>
           </a:prstGeom>
           <a:noFill/>
-          <a:ln w="25400">
+          <a:ln w="17780">
             <a:solidFill>
               <a:srgbClr val="A8BCD1"/>
             </a:solidFill>
@@ -11455,7 +11680,7 @@
             <a:avLst/>
           </a:prstGeom>
           <a:noFill/>
-          <a:ln w="25400">
+          <a:ln w="17780">
             <a:solidFill>
               <a:srgbClr val="A8BCD1"/>
             </a:solidFill>
@@ -11478,7 +11703,7 @@
             <a:avLst/>
           </a:prstGeom>
           <a:noFill/>
-          <a:ln w="25400">
+          <a:ln w="17780">
             <a:solidFill>
               <a:srgbClr val="A8BCD1"/>
             </a:solidFill>
@@ -11501,7 +11726,7 @@
             <a:avLst/>
           </a:prstGeom>
           <a:noFill/>
-          <a:ln w="25400">
+          <a:ln w="17780">
             <a:solidFill>
               <a:srgbClr val="A8BCD1"/>
             </a:solidFill>
@@ -11524,7 +11749,7 @@
             <a:avLst/>
           </a:prstGeom>
           <a:noFill/>
-          <a:ln w="25400">
+          <a:ln w="17780">
             <a:solidFill>
               <a:srgbClr val="A8BCD1"/>
             </a:solidFill>
@@ -11547,7 +11772,7 @@
             <a:avLst/>
           </a:prstGeom>
           <a:noFill/>
-          <a:ln w="25400">
+          <a:ln w="17780">
             <a:solidFill>
               <a:srgbClr val="A8BCD1"/>
             </a:solidFill>
@@ -11570,7 +11795,7 @@
             <a:avLst/>
           </a:prstGeom>
           <a:noFill/>
-          <a:ln w="25400">
+          <a:ln w="17780">
             <a:solidFill>
               <a:srgbClr val="A8BCD1"/>
             </a:solidFill>
@@ -11593,7 +11818,7 @@
             <a:avLst/>
           </a:prstGeom>
           <a:noFill/>
-          <a:ln w="38100">
+          <a:ln w="22860">
             <a:solidFill>
               <a:srgbClr val="EFB13C"/>
             </a:solidFill>
@@ -11616,7 +11841,7 @@
             <a:avLst/>
           </a:prstGeom>
           <a:noFill/>
-          <a:ln w="38100">
+          <a:ln w="22860">
             <a:solidFill>
               <a:srgbClr val="EFB13C"/>
             </a:solidFill>
@@ -11639,7 +11864,7 @@
             <a:avLst/>
           </a:prstGeom>
           <a:noFill/>
-          <a:ln w="38100">
+          <a:ln w="22860">
             <a:solidFill>
               <a:srgbClr val="EFB13C"/>
             </a:solidFill>
@@ -11662,7 +11887,7 @@
             <a:avLst/>
           </a:prstGeom>
           <a:noFill/>
-          <a:ln w="38100">
+          <a:ln w="22860">
             <a:solidFill>
               <a:srgbClr val="EFB13C"/>
             </a:solidFill>
@@ -11685,7 +11910,7 @@
             <a:avLst/>
           </a:prstGeom>
           <a:noFill/>
-          <a:ln w="38100">
+          <a:ln w="22860">
             <a:solidFill>
               <a:srgbClr val="EFB13C"/>
             </a:solidFill>
@@ -11708,7 +11933,7 @@
             <a:avLst/>
           </a:prstGeom>
           <a:noFill/>
-          <a:ln w="38100">
+          <a:ln w="22860">
             <a:solidFill>
               <a:srgbClr val="EFB13C"/>
             </a:solidFill>
@@ -11731,7 +11956,7 @@
             <a:avLst/>
           </a:prstGeom>
           <a:noFill/>
-          <a:ln w="38100">
+          <a:ln w="22860">
             <a:solidFill>
               <a:srgbClr val="EFB13C"/>
             </a:solidFill>
@@ -11754,7 +11979,7 @@
             <a:avLst/>
           </a:prstGeom>
           <a:noFill/>
-          <a:ln w="38100">
+          <a:ln w="22860">
             <a:solidFill>
               <a:srgbClr val="EFB13C"/>
             </a:solidFill>
@@ -11777,7 +12002,7 @@
             <a:avLst/>
           </a:prstGeom>
           <a:noFill/>
-          <a:ln w="38100">
+          <a:ln w="22860">
             <a:solidFill>
               <a:srgbClr val="EFB13C"/>
             </a:solidFill>
@@ -11800,7 +12025,7 @@
             <a:avLst/>
           </a:prstGeom>
           <a:noFill/>
-          <a:ln w="38100">
+          <a:ln w="22860">
             <a:solidFill>
               <a:srgbClr val="EFB13C"/>
             </a:solidFill>
@@ -11823,7 +12048,7 @@
             <a:avLst/>
           </a:prstGeom>
           <a:noFill/>
-          <a:ln w="38100">
+          <a:ln w="22860">
             <a:solidFill>
               <a:srgbClr val="EFB13C"/>
             </a:solidFill>
@@ -11846,7 +12071,7 @@
             <a:avLst/>
           </a:prstGeom>
           <a:noFill/>
-          <a:ln w="38100">
+          <a:ln w="22860">
             <a:solidFill>
               <a:srgbClr val="EFB13C"/>
             </a:solidFill>
@@ -11869,7 +12094,7 @@
             <a:avLst/>
           </a:prstGeom>
           <a:noFill/>
-          <a:ln w="38100">
+          <a:ln w="22860">
             <a:solidFill>
               <a:srgbClr val="EFB13C"/>
             </a:solidFill>
@@ -11892,7 +12117,7 @@
             <a:avLst/>
           </a:prstGeom>
           <a:noFill/>
-          <a:ln w="38100">
+          <a:ln w="22860">
             <a:solidFill>
               <a:srgbClr val="EFB13C"/>
             </a:solidFill>
@@ -11915,7 +12140,7 @@
             <a:avLst/>
           </a:prstGeom>
           <a:noFill/>
-          <a:ln w="38100">
+          <a:ln w="22860">
             <a:solidFill>
               <a:srgbClr val="EFB13C"/>
             </a:solidFill>
@@ -11938,7 +12163,7 @@
             <a:avLst/>
           </a:prstGeom>
           <a:noFill/>
-          <a:ln w="38100">
+          <a:ln w="22860">
             <a:solidFill>
               <a:srgbClr val="EFB13C"/>
             </a:solidFill>
@@ -11961,7 +12186,7 @@
             <a:avLst/>
           </a:prstGeom>
           <a:noFill/>
-          <a:ln w="38100">
+          <a:ln w="22860">
             <a:solidFill>
               <a:srgbClr val="EFB13C"/>
             </a:solidFill>
@@ -11984,7 +12209,7 @@
             <a:avLst/>
           </a:prstGeom>
           <a:noFill/>
-          <a:ln w="38100">
+          <a:ln w="22860">
             <a:solidFill>
               <a:srgbClr val="EFB13C"/>
             </a:solidFill>
@@ -12007,7 +12232,7 @@
             <a:avLst/>
           </a:prstGeom>
           <a:noFill/>
-          <a:ln w="38100">
+          <a:ln w="22860">
             <a:solidFill>
               <a:srgbClr val="EFB13C"/>
             </a:solidFill>
@@ -12030,7 +12255,7 @@
             <a:avLst/>
           </a:prstGeom>
           <a:noFill/>
-          <a:ln w="38100">
+          <a:ln w="22860">
             <a:solidFill>
               <a:srgbClr val="EFB13C"/>
             </a:solidFill>
@@ -12053,7 +12278,7 @@
             <a:avLst/>
           </a:prstGeom>
           <a:noFill/>
-          <a:ln w="38100">
+          <a:ln w="22860">
             <a:solidFill>
               <a:srgbClr val="EFB13C"/>
             </a:solidFill>
@@ -12076,7 +12301,7 @@
             <a:avLst/>
           </a:prstGeom>
           <a:noFill/>
-          <a:ln w="38100">
+          <a:ln w="22860">
             <a:solidFill>
               <a:srgbClr val="EFB13C"/>
             </a:solidFill>
@@ -12099,7 +12324,7 @@
             <a:avLst/>
           </a:prstGeom>
           <a:noFill/>
-          <a:ln w="38100">
+          <a:ln w="22860">
             <a:solidFill>
               <a:srgbClr val="EFB13C"/>
             </a:solidFill>
@@ -12122,7 +12347,7 @@
             <a:avLst/>
           </a:prstGeom>
           <a:noFill/>
-          <a:ln w="38100">
+          <a:ln w="22860">
             <a:solidFill>
               <a:srgbClr val="EFB13C"/>
             </a:solidFill>
@@ -12145,7 +12370,7 @@
             <a:avLst/>
           </a:prstGeom>
           <a:noFill/>
-          <a:ln w="38100">
+          <a:ln w="22860">
             <a:solidFill>
               <a:srgbClr val="EFB13C"/>
             </a:solidFill>
@@ -12161,8 +12386,8 @@
         </p:nvSpPr>
         <p:spPr>
           <a:xfrm>
-            <a:off x="2939415" y="2890462"/>
-            <a:ext cx="64770" cy="64770"/>
+            <a:off x="2943225" y="2894272"/>
+            <a:ext cx="57150" cy="57150"/>
           </a:xfrm>
           <a:prstGeom prst="ellipse">
             <a:avLst/>
@@ -12181,8 +12406,8 @@
         </p:nvSpPr>
         <p:spPr>
           <a:xfrm>
-            <a:off x="3025140" y="2897130"/>
-            <a:ext cx="64770" cy="64770"/>
+            <a:off x="3028950" y="2900940"/>
+            <a:ext cx="57150" cy="57150"/>
           </a:xfrm>
           <a:prstGeom prst="ellipse">
             <a:avLst/>
@@ -12201,8 +12426,8 @@
         </p:nvSpPr>
         <p:spPr>
           <a:xfrm>
-            <a:off x="3663315" y="2938561"/>
-            <a:ext cx="64770" cy="64770"/>
+            <a:off x="3667125" y="2942371"/>
+            <a:ext cx="57150" cy="57150"/>
           </a:xfrm>
           <a:prstGeom prst="ellipse">
             <a:avLst/>
@@ -12221,8 +12446,8 @@
         </p:nvSpPr>
         <p:spPr>
           <a:xfrm>
-            <a:off x="4044315" y="3007636"/>
-            <a:ext cx="64770" cy="64770"/>
+            <a:off x="4048125" y="3011446"/>
+            <a:ext cx="57150" cy="57150"/>
           </a:xfrm>
           <a:prstGeom prst="ellipse">
             <a:avLst/>
@@ -12241,8 +12466,8 @@
         </p:nvSpPr>
         <p:spPr>
           <a:xfrm>
-            <a:off x="4444365" y="3040468"/>
-            <a:ext cx="64770" cy="64770"/>
+            <a:off x="4448175" y="3044278"/>
+            <a:ext cx="57150" cy="57150"/>
           </a:xfrm>
           <a:prstGeom prst="ellipse">
             <a:avLst/>
@@ -12261,8 +12486,8 @@
         </p:nvSpPr>
         <p:spPr>
           <a:xfrm>
-            <a:off x="4634865" y="3079757"/>
-            <a:ext cx="64770" cy="64770"/>
+            <a:off x="4638675" y="3083567"/>
+            <a:ext cx="57150" cy="57150"/>
           </a:xfrm>
           <a:prstGeom prst="ellipse">
             <a:avLst/>
@@ -12281,8 +12506,8 @@
         </p:nvSpPr>
         <p:spPr>
           <a:xfrm>
-            <a:off x="4825365" y="3085734"/>
-            <a:ext cx="64770" cy="64770"/>
+            <a:off x="4829175" y="3089544"/>
+            <a:ext cx="57150" cy="57150"/>
           </a:xfrm>
           <a:prstGeom prst="ellipse">
             <a:avLst/>
@@ -12301,8 +12526,8 @@
         </p:nvSpPr>
         <p:spPr>
           <a:xfrm>
-            <a:off x="4996815" y="3061966"/>
-            <a:ext cx="64770" cy="64770"/>
+            <a:off x="5000625" y="3065776"/>
+            <a:ext cx="57150" cy="57150"/>
           </a:xfrm>
           <a:prstGeom prst="ellipse">
             <a:avLst/>
@@ -12321,8 +12546,8 @@
         </p:nvSpPr>
         <p:spPr>
           <a:xfrm>
-            <a:off x="5111115" y="3134453"/>
-            <a:ext cx="64770" cy="64770"/>
+            <a:off x="5114925" y="3138263"/>
+            <a:ext cx="57150" cy="57150"/>
           </a:xfrm>
           <a:prstGeom prst="ellipse">
             <a:avLst/>
@@ -12341,8 +12566,8 @@
         </p:nvSpPr>
         <p:spPr>
           <a:xfrm>
-            <a:off x="5434965" y="3153385"/>
-            <a:ext cx="64770" cy="64770"/>
+            <a:off x="5438775" y="3157195"/>
+            <a:ext cx="57150" cy="57150"/>
           </a:xfrm>
           <a:prstGeom prst="ellipse">
             <a:avLst/>
@@ -12361,8 +12586,8 @@
         </p:nvSpPr>
         <p:spPr>
           <a:xfrm>
-            <a:off x="5720715" y="3157755"/>
-            <a:ext cx="64770" cy="64770"/>
+            <a:off x="5724525" y="3161565"/>
+            <a:ext cx="57150" cy="57150"/>
           </a:xfrm>
           <a:prstGeom prst="ellipse">
             <a:avLst/>
@@ -12381,8 +12606,8 @@
         </p:nvSpPr>
         <p:spPr>
           <a:xfrm>
-            <a:off x="5777865" y="3181861"/>
-            <a:ext cx="64770" cy="64770"/>
+            <a:off x="5781675" y="3185671"/>
+            <a:ext cx="57150" cy="57150"/>
           </a:xfrm>
           <a:prstGeom prst="ellipse">
             <a:avLst/>
@@ -12401,8 +12626,8 @@
         </p:nvSpPr>
         <p:spPr>
           <a:xfrm>
-            <a:off x="5835015" y="3188134"/>
-            <a:ext cx="64770" cy="64770"/>
+            <a:off x="5838825" y="3191944"/>
+            <a:ext cx="57150" cy="57150"/>
           </a:xfrm>
           <a:prstGeom prst="ellipse">
             <a:avLst/>
@@ -12421,8 +12646,8 @@
         </p:nvSpPr>
         <p:spPr>
           <a:xfrm>
-            <a:off x="6044565" y="3175842"/>
-            <a:ext cx="64770" cy="64770"/>
+            <a:off x="6048375" y="3179652"/>
+            <a:ext cx="57150" cy="57150"/>
           </a:xfrm>
           <a:prstGeom prst="ellipse">
             <a:avLst/>
@@ -12441,8 +12666,8 @@
         </p:nvSpPr>
         <p:spPr>
           <a:xfrm>
-            <a:off x="6063615" y="3194732"/>
-            <a:ext cx="64770" cy="64770"/>
+            <a:off x="6067425" y="3198542"/>
+            <a:ext cx="57150" cy="57150"/>
           </a:xfrm>
           <a:prstGeom prst="ellipse">
             <a:avLst/>
@@ -12461,8 +12686,8 @@
         </p:nvSpPr>
         <p:spPr>
           <a:xfrm>
-            <a:off x="6177915" y="3259197"/>
-            <a:ext cx="64770" cy="64770"/>
+            <a:off x="6181725" y="3263007"/>
+            <a:ext cx="57150" cy="57150"/>
           </a:xfrm>
           <a:prstGeom prst="ellipse">
             <a:avLst/>
@@ -12481,8 +12706,8 @@
         </p:nvSpPr>
         <p:spPr>
           <a:xfrm>
-            <a:off x="6463665" y="3262327"/>
-            <a:ext cx="64770" cy="64770"/>
+            <a:off x="6467475" y="3266137"/>
+            <a:ext cx="57150" cy="57150"/>
           </a:xfrm>
           <a:prstGeom prst="ellipse">
             <a:avLst/>
@@ -12501,8 +12726,8 @@
         </p:nvSpPr>
         <p:spPr>
           <a:xfrm>
-            <a:off x="6482715" y="3257576"/>
-            <a:ext cx="64770" cy="64770"/>
+            <a:off x="6486525" y="3261386"/>
+            <a:ext cx="57150" cy="57150"/>
           </a:xfrm>
           <a:prstGeom prst="ellipse">
             <a:avLst/>
@@ -12521,8 +12746,8 @@
         </p:nvSpPr>
         <p:spPr>
           <a:xfrm>
-            <a:off x="7359015" y="3502780"/>
-            <a:ext cx="64770" cy="64770"/>
+            <a:off x="7362825" y="3506590"/>
+            <a:ext cx="57150" cy="57150"/>
           </a:xfrm>
           <a:prstGeom prst="ellipse">
             <a:avLst/>
@@ -12541,8 +12766,8 @@
         </p:nvSpPr>
         <p:spPr>
           <a:xfrm>
-            <a:off x="8082915" y="3711810"/>
-            <a:ext cx="64770" cy="64770"/>
+            <a:off x="8086725" y="3715620"/>
+            <a:ext cx="57150" cy="57150"/>
           </a:xfrm>
           <a:prstGeom prst="ellipse">
             <a:avLst/>
@@ -12561,8 +12786,8 @@
         </p:nvSpPr>
         <p:spPr>
           <a:xfrm>
-            <a:off x="8121015" y="3728374"/>
-            <a:ext cx="64770" cy="64770"/>
+            <a:off x="8124825" y="3732184"/>
+            <a:ext cx="57150" cy="57150"/>
           </a:xfrm>
           <a:prstGeom prst="ellipse">
             <a:avLst/>
@@ -12581,8 +12806,8 @@
         </p:nvSpPr>
         <p:spPr>
           <a:xfrm>
-            <a:off x="8140065" y="3690241"/>
-            <a:ext cx="64770" cy="64770"/>
+            <a:off x="8143875" y="3694051"/>
+            <a:ext cx="57150" cy="57150"/>
           </a:xfrm>
           <a:prstGeom prst="ellipse">
             <a:avLst/>
@@ -12601,8 +12826,8 @@
         </p:nvSpPr>
         <p:spPr>
           <a:xfrm>
-            <a:off x="8197215" y="3691947"/>
-            <a:ext cx="64770" cy="64770"/>
+            <a:off x="8201025" y="3695757"/>
+            <a:ext cx="57150" cy="57150"/>
           </a:xfrm>
           <a:prstGeom prst="ellipse">
             <a:avLst/>
@@ -12621,8 +12846,8 @@
         </p:nvSpPr>
         <p:spPr>
           <a:xfrm>
-            <a:off x="8521065" y="3808417"/>
-            <a:ext cx="64770" cy="64770"/>
+            <a:off x="8524875" y="3812227"/>
+            <a:ext cx="57150" cy="57150"/>
           </a:xfrm>
           <a:prstGeom prst="ellipse">
             <a:avLst/>
@@ -12641,8 +12866,8 @@
         </p:nvSpPr>
         <p:spPr>
           <a:xfrm>
-            <a:off x="8768715" y="3839190"/>
-            <a:ext cx="64770" cy="64770"/>
+            <a:off x="8772525" y="3843000"/>
+            <a:ext cx="57150" cy="57150"/>
           </a:xfrm>
           <a:prstGeom prst="ellipse">
             <a:avLst/>
@@ -12661,8 +12886,8 @@
         </p:nvSpPr>
         <p:spPr>
           <a:xfrm>
-            <a:off x="9054465" y="3889235"/>
-            <a:ext cx="64770" cy="64770"/>
+            <a:off x="9058275" y="3893045"/>
+            <a:ext cx="57150" cy="57150"/>
           </a:xfrm>
           <a:prstGeom prst="ellipse">
             <a:avLst/>
@@ -12681,8 +12906,8 @@
         </p:nvSpPr>
         <p:spPr>
           <a:xfrm>
-            <a:off x="9054465" y="3873361"/>
-            <a:ext cx="64770" cy="64770"/>
+            <a:off x="9058275" y="3877171"/>
+            <a:ext cx="57150" cy="57150"/>
           </a:xfrm>
           <a:prstGeom prst="ellipse">
             <a:avLst/>
@@ -12701,8 +12926,8 @@
         </p:nvSpPr>
         <p:spPr>
           <a:xfrm>
-            <a:off x="9149715" y="3915230"/>
-            <a:ext cx="64770" cy="64770"/>
+            <a:off x="9153525" y="3919040"/>
+            <a:ext cx="57150" cy="57150"/>
           </a:xfrm>
           <a:prstGeom prst="ellipse">
             <a:avLst/>
@@ -12721,8 +12946,8 @@
         </p:nvSpPr>
         <p:spPr>
           <a:xfrm>
-            <a:off x="9187815" y="3914482"/>
-            <a:ext cx="64770" cy="64770"/>
+            <a:off x="9191625" y="3918292"/>
+            <a:ext cx="57150" cy="57150"/>
           </a:xfrm>
           <a:prstGeom prst="ellipse">
             <a:avLst/>
@@ -12741,8 +12966,8 @@
         </p:nvSpPr>
         <p:spPr>
           <a:xfrm>
-            <a:off x="9340215" y="3984784"/>
-            <a:ext cx="64770" cy="64770"/>
+            <a:off x="9344025" y="3988594"/>
+            <a:ext cx="57150" cy="57150"/>
           </a:xfrm>
           <a:prstGeom prst="ellipse">
             <a:avLst/>
@@ -12761,8 +12986,8 @@
         </p:nvSpPr>
         <p:spPr>
           <a:xfrm>
-            <a:off x="9473565" y="3981218"/>
-            <a:ext cx="64770" cy="64770"/>
+            <a:off x="9477375" y="3985028"/>
+            <a:ext cx="57150" cy="57150"/>
           </a:xfrm>
           <a:prstGeom prst="ellipse">
             <a:avLst/>
@@ -12781,8 +13006,8 @@
         </p:nvSpPr>
         <p:spPr>
           <a:xfrm>
-            <a:off x="9530715" y="4008298"/>
-            <a:ext cx="64770" cy="64770"/>
+            <a:off x="9534525" y="4012108"/>
+            <a:ext cx="57150" cy="57150"/>
           </a:xfrm>
           <a:prstGeom prst="ellipse">
             <a:avLst/>
@@ -12801,8 +13026,8 @@
         </p:nvSpPr>
         <p:spPr>
           <a:xfrm>
-            <a:off x="9549765" y="3942719"/>
-            <a:ext cx="64770" cy="64770"/>
+            <a:off x="9553575" y="3946529"/>
+            <a:ext cx="57150" cy="57150"/>
           </a:xfrm>
           <a:prstGeom prst="ellipse">
             <a:avLst/>
@@ -12821,8 +13046,8 @@
         </p:nvSpPr>
         <p:spPr>
           <a:xfrm>
-            <a:off x="9549765" y="3952869"/>
-            <a:ext cx="64770" cy="64770"/>
+            <a:off x="9553575" y="3956679"/>
+            <a:ext cx="57150" cy="57150"/>
           </a:xfrm>
           <a:prstGeom prst="ellipse">
             <a:avLst/>
@@ -12841,8 +13066,8 @@
         </p:nvSpPr>
         <p:spPr>
           <a:xfrm>
-            <a:off x="9549765" y="3994088"/>
-            <a:ext cx="64770" cy="64770"/>
+            <a:off x="9553575" y="3997898"/>
+            <a:ext cx="57150" cy="57150"/>
           </a:xfrm>
           <a:prstGeom prst="ellipse">
             <a:avLst/>
@@ -12861,8 +13086,8 @@
         </p:nvSpPr>
         <p:spPr>
           <a:xfrm>
-            <a:off x="9702165" y="4077246"/>
-            <a:ext cx="64770" cy="64770"/>
+            <a:off x="9705975" y="4081056"/>
+            <a:ext cx="57150" cy="57150"/>
           </a:xfrm>
           <a:prstGeom prst="ellipse">
             <a:avLst/>
@@ -12881,8 +13106,8 @@
         </p:nvSpPr>
         <p:spPr>
           <a:xfrm>
-            <a:off x="9740265" y="4119608"/>
-            <a:ext cx="64770" cy="64770"/>
+            <a:off x="9744075" y="4123418"/>
+            <a:ext cx="57150" cy="57150"/>
           </a:xfrm>
           <a:prstGeom prst="ellipse">
             <a:avLst/>
@@ -12901,8 +13126,8 @@
         </p:nvSpPr>
         <p:spPr>
           <a:xfrm>
-            <a:off x="9892665" y="4076386"/>
-            <a:ext cx="64770" cy="64770"/>
+            <a:off x="9896475" y="4080196"/>
+            <a:ext cx="57150" cy="57150"/>
           </a:xfrm>
           <a:prstGeom prst="ellipse">
             <a:avLst/>
@@ -12921,8 +13146,8 @@
         </p:nvSpPr>
         <p:spPr>
           <a:xfrm>
-            <a:off x="10178415" y="4176884"/>
-            <a:ext cx="64770" cy="64770"/>
+            <a:off x="10182225" y="4180694"/>
+            <a:ext cx="57150" cy="57150"/>
           </a:xfrm>
           <a:prstGeom prst="ellipse">
             <a:avLst/>
@@ -12941,8 +13166,8 @@
         </p:nvSpPr>
         <p:spPr>
           <a:xfrm>
-            <a:off x="10521315" y="4308212"/>
-            <a:ext cx="64770" cy="64770"/>
+            <a:off x="10525125" y="4312022"/>
+            <a:ext cx="57150" cy="57150"/>
           </a:xfrm>
           <a:prstGeom prst="ellipse">
             <a:avLst/>
@@ -12968,7 +13193,7 @@
             <a:avLst/>
           </a:prstGeom>
           <a:noFill/>
-          <a:ln w="25400">
+          <a:ln w="17780">
             <a:solidFill>
               <a:srgbClr val="A8BCD1"/>
             </a:solidFill>
@@ -13033,7 +13258,7 @@
             <a:avLst/>
           </a:prstGeom>
           <a:noFill/>
-          <a:ln w="38100">
+          <a:ln w="22860">
             <a:solidFill>
               <a:srgbClr val="EFB13C"/>
             </a:solidFill>
@@ -15234,7 +15459,7 @@
                 <a:ea typeface="Consolas" pitchFamily="34" charset="-122"/>
                 <a:cs typeface="Consolas" pitchFamily="34" charset="-120"/>
               </a:rPr>
-              <a:t>기준 미달 회차</a:t>
+              <a:t>신고값을 못 채운 횟수</a:t>
             </a:r>
             <a:endParaRPr lang="en-US" sz="788" dirty="0"/>
           </a:p>
@@ -15402,7 +15627,7 @@
                 <a:ea typeface="Malgun Gothic" pitchFamily="34" charset="-122"/>
                 <a:cs typeface="Malgun Gothic" pitchFamily="34" charset="-120"/>
               </a:rPr>
-              <a:t>실제 출력이 신고값에 못 미친 횟수입니다. 벌점이 붙는 회차입니다.</a:t>
+              <a:t>그 주에 신고한 값보다 실제 출력이 낮게 나온 횟수입니다. 이런 회차는 정산에서 불이익을 받습니다.</a:t>
             </a:r>
             <a:endParaRPr lang="en-US" sz="938" dirty="0"/>
           </a:p>
@@ -16610,7 +16835,7 @@
                 <a:ea typeface="Malgun Gothic" pitchFamily="34" charset="-122"/>
                 <a:cs typeface="Malgun Gothic" pitchFamily="34" charset="-120"/>
               </a:rPr>
-              <a:t>테스트는 하루 한 점,</a:t>
+              <a:t>테스트는 한 점,</a:t>
             </a:r>
             <a:endParaRPr lang="en-US" sz="2775" dirty="0"/>
           </a:p>
@@ -16647,66 +16872,49 @@
                 <a:ea typeface="Malgun Gothic" pitchFamily="34" charset="-122"/>
                 <a:cs typeface="Malgun Gothic" pitchFamily="34" charset="-120"/>
               </a:rPr>
-              <a:t>61개 온도</a:t>
-            </a:r>
-            <a:pPr algn="l" indent="0" marL="0">
-              <a:lnSpc>
-                <a:spcPts val="3496"/>
-              </a:lnSpc>
-              <a:buNone/>
-            </a:pPr>
-            <a:r>
-              <a:rPr lang="en-US" sz="2775" b="1" dirty="0">
-                <a:solidFill>
-                  <a:srgbClr val="EAE7E0"/>
+              <a:t>61개 온도 전부</a:t>
+            </a:r>
+            <a:endParaRPr lang="en-US" sz="2775" dirty="0"/>
+          </a:p>
+        </p:txBody>
+      </p:sp>
+      <p:sp>
+        <p:nvSpPr>
+          <p:cNvPr id="12" name="Text 10"/>
+          <p:cNvSpPr txBox="1"/>
+          <p:nvPr/>
+        </p:nvSpPr>
+        <p:spPr>
+          <a:xfrm>
+            <a:off x="685800" y="2000250"/>
+            <a:ext cx="10287000" cy="284607"/>
+          </a:xfrm>
+          <a:prstGeom prst="rect">
+            <a:avLst/>
+          </a:prstGeom>
+          <a:noFill/>
+          <a:ln/>
+        </p:spPr>
+        <p:txBody>
+          <a:bodyPr wrap="square" lIns="0" tIns="0" rIns="0" bIns="0" rtlCol="0" anchor="t"/>
+          <a:lstStyle/>
+          <a:p>
+            <a:pPr algn="l" indent="0" marL="0">
+              <a:lnSpc>
+                <a:spcPts val="2241"/>
+              </a:lnSpc>
+              <a:buNone/>
+            </a:pPr>
+            <a:r>
+              <a:rPr lang="en-US" sz="1350" dirty="0">
+                <a:solidFill>
+                  <a:srgbClr val="CFCBC2"/>
                 </a:solidFill>
                 <a:latin typeface="Malgun Gothic" pitchFamily="34" charset="0"/>
                 <a:ea typeface="Malgun Gothic" pitchFamily="34" charset="-122"/>
                 <a:cs typeface="Malgun Gothic" pitchFamily="34" charset="-120"/>
               </a:rPr>
-              <a:t> 전부입니다</a:t>
-            </a:r>
-            <a:endParaRPr lang="en-US" sz="2775" dirty="0"/>
-          </a:p>
-        </p:txBody>
-      </p:sp>
-      <p:sp>
-        <p:nvSpPr>
-          <p:cNvPr id="12" name="Text 10"/>
-          <p:cNvSpPr txBox="1"/>
-          <p:nvPr/>
-        </p:nvSpPr>
-        <p:spPr>
-          <a:xfrm>
-            <a:off x="685800" y="2000250"/>
-            <a:ext cx="10287000" cy="284607"/>
-          </a:xfrm>
-          <a:prstGeom prst="rect">
-            <a:avLst/>
-          </a:prstGeom>
-          <a:noFill/>
-          <a:ln/>
-        </p:spPr>
-        <p:txBody>
-          <a:bodyPr wrap="square" lIns="0" tIns="0" rIns="0" bIns="0" rtlCol="0" anchor="t"/>
-          <a:lstStyle/>
-          <a:p>
-            <a:pPr algn="l" indent="0" marL="0">
-              <a:lnSpc>
-                <a:spcPts val="2241"/>
-              </a:lnSpc>
-              <a:buNone/>
-            </a:pPr>
-            <a:r>
-              <a:rPr lang="en-US" sz="1350" dirty="0">
-                <a:solidFill>
-                  <a:srgbClr val="CFCBC2"/>
-                </a:solidFill>
-                <a:latin typeface="Malgun Gothic" pitchFamily="34" charset="0"/>
-                <a:ea typeface="Malgun Gothic" pitchFamily="34" charset="-122"/>
-                <a:cs typeface="Malgun Gothic" pitchFamily="34" charset="-120"/>
-              </a:rPr>
-              <a:t>그 사이를 메우려고 차이 하나를 61개에 똑같이 얹었습니다 — </a:t>
+              <a:t>그 빈 구간을 메우려고, 한 점에서 구한 보정값 하나를 61개 온도에 똑같이 적용한 것이 </a:t>
             </a:r>
             <a:pPr algn="l" indent="0" marL="0">
               <a:lnSpc>
@@ -19086,7 +19294,7 @@
             <a:avLst/>
           </a:prstGeom>
           <a:noFill/>
-          <a:ln w="25400">
+          <a:ln w="17780">
             <a:solidFill>
               <a:srgbClr val="A8BCD1"/>
             </a:solidFill>
@@ -19109,7 +19317,7 @@
             <a:avLst/>
           </a:prstGeom>
           <a:noFill/>
-          <a:ln w="25400">
+          <a:ln w="17780">
             <a:solidFill>
               <a:srgbClr val="A8BCD1"/>
             </a:solidFill>
@@ -19132,7 +19340,7 @@
             <a:avLst/>
           </a:prstGeom>
           <a:noFill/>
-          <a:ln w="25400">
+          <a:ln w="17780">
             <a:solidFill>
               <a:srgbClr val="A8BCD1"/>
             </a:solidFill>
@@ -19155,7 +19363,7 @@
             <a:avLst/>
           </a:prstGeom>
           <a:noFill/>
-          <a:ln w="25400">
+          <a:ln w="17780">
             <a:solidFill>
               <a:srgbClr val="A8BCD1"/>
             </a:solidFill>
@@ -19178,7 +19386,7 @@
             <a:avLst/>
           </a:prstGeom>
           <a:noFill/>
-          <a:ln w="25400">
+          <a:ln w="17780">
             <a:solidFill>
               <a:srgbClr val="A8BCD1"/>
             </a:solidFill>
@@ -19201,7 +19409,7 @@
             <a:avLst/>
           </a:prstGeom>
           <a:noFill/>
-          <a:ln w="25400">
+          <a:ln w="17780">
             <a:solidFill>
               <a:srgbClr val="A8BCD1"/>
             </a:solidFill>
@@ -19224,7 +19432,7 @@
             <a:avLst/>
           </a:prstGeom>
           <a:noFill/>
-          <a:ln w="25400">
+          <a:ln w="17780">
             <a:solidFill>
               <a:srgbClr val="A8BCD1"/>
             </a:solidFill>
@@ -19247,7 +19455,7 @@
             <a:avLst/>
           </a:prstGeom>
           <a:noFill/>
-          <a:ln w="25400">
+          <a:ln w="17780">
             <a:solidFill>
               <a:srgbClr val="A8BCD1"/>
             </a:solidFill>
@@ -19270,7 +19478,7 @@
             <a:avLst/>
           </a:prstGeom>
           <a:noFill/>
-          <a:ln w="25400">
+          <a:ln w="17780">
             <a:solidFill>
               <a:srgbClr val="A8BCD1"/>
             </a:solidFill>
@@ -19293,7 +19501,7 @@
             <a:avLst/>
           </a:prstGeom>
           <a:noFill/>
-          <a:ln w="25400">
+          <a:ln w="17780">
             <a:solidFill>
               <a:srgbClr val="A8BCD1"/>
             </a:solidFill>
@@ -19316,7 +19524,7 @@
             <a:avLst/>
           </a:prstGeom>
           <a:noFill/>
-          <a:ln w="25400">
+          <a:ln w="17780">
             <a:solidFill>
               <a:srgbClr val="A8BCD1"/>
             </a:solidFill>
@@ -19339,7 +19547,7 @@
             <a:avLst/>
           </a:prstGeom>
           <a:noFill/>
-          <a:ln w="25400">
+          <a:ln w="17780">
             <a:solidFill>
               <a:srgbClr val="A8BCD1"/>
             </a:solidFill>
@@ -19362,7 +19570,7 @@
             <a:avLst/>
           </a:prstGeom>
           <a:noFill/>
-          <a:ln w="25400">
+          <a:ln w="17780">
             <a:solidFill>
               <a:srgbClr val="A8BCD1"/>
             </a:solidFill>
@@ -19385,7 +19593,7 @@
             <a:avLst/>
           </a:prstGeom>
           <a:noFill/>
-          <a:ln w="25400">
+          <a:ln w="17780">
             <a:solidFill>
               <a:srgbClr val="A8BCD1"/>
             </a:solidFill>
@@ -19408,7 +19616,7 @@
             <a:avLst/>
           </a:prstGeom>
           <a:noFill/>
-          <a:ln w="25400">
+          <a:ln w="17780">
             <a:solidFill>
               <a:srgbClr val="A8BCD1"/>
             </a:solidFill>
@@ -19431,7 +19639,7 @@
             <a:avLst/>
           </a:prstGeom>
           <a:noFill/>
-          <a:ln w="25400">
+          <a:ln w="17780">
             <a:solidFill>
               <a:srgbClr val="A8BCD1"/>
             </a:solidFill>
@@ -19454,7 +19662,7 @@
             <a:avLst/>
           </a:prstGeom>
           <a:noFill/>
-          <a:ln w="25400">
+          <a:ln w="17780">
             <a:solidFill>
               <a:srgbClr val="A8BCD1"/>
             </a:solidFill>
@@ -19477,7 +19685,7 @@
             <a:avLst/>
           </a:prstGeom>
           <a:noFill/>
-          <a:ln w="25400">
+          <a:ln w="17780">
             <a:solidFill>
               <a:srgbClr val="A8BCD1"/>
             </a:solidFill>
@@ -19500,7 +19708,7 @@
             <a:avLst/>
           </a:prstGeom>
           <a:noFill/>
-          <a:ln w="25400">
+          <a:ln w="17780">
             <a:solidFill>
               <a:srgbClr val="A8BCD1"/>
             </a:solidFill>
@@ -19523,7 +19731,7 @@
             <a:avLst/>
           </a:prstGeom>
           <a:noFill/>
-          <a:ln w="25400">
+          <a:ln w="17780">
             <a:solidFill>
               <a:srgbClr val="A8BCD1"/>
             </a:solidFill>
@@ -19546,7 +19754,7 @@
             <a:avLst/>
           </a:prstGeom>
           <a:noFill/>
-          <a:ln w="25400">
+          <a:ln w="17780">
             <a:solidFill>
               <a:srgbClr val="A8BCD1"/>
             </a:solidFill>
@@ -19569,7 +19777,7 @@
             <a:avLst/>
           </a:prstGeom>
           <a:noFill/>
-          <a:ln w="25400">
+          <a:ln w="17780">
             <a:solidFill>
               <a:srgbClr val="A8BCD1"/>
             </a:solidFill>
@@ -19592,7 +19800,7 @@
             <a:avLst/>
           </a:prstGeom>
           <a:noFill/>
-          <a:ln w="25400">
+          <a:ln w="17780">
             <a:solidFill>
               <a:srgbClr val="A8BCD1"/>
             </a:solidFill>
@@ -19615,7 +19823,7 @@
             <a:avLst/>
           </a:prstGeom>
           <a:noFill/>
-          <a:ln w="25400">
+          <a:ln w="17780">
             <a:solidFill>
               <a:srgbClr val="A8BCD1"/>
             </a:solidFill>
@@ -19638,7 +19846,7 @@
             <a:avLst/>
           </a:prstGeom>
           <a:noFill/>
-          <a:ln w="25400">
+          <a:ln w="17780">
             <a:solidFill>
               <a:srgbClr val="A8BCD1"/>
             </a:solidFill>
@@ -19661,7 +19869,7 @@
             <a:avLst/>
           </a:prstGeom>
           <a:noFill/>
-          <a:ln w="30480">
+          <a:ln w="22860">
             <a:solidFill>
               <a:srgbClr val="EFB13C"/>
             </a:solidFill>
@@ -19684,7 +19892,7 @@
             <a:avLst/>
           </a:prstGeom>
           <a:noFill/>
-          <a:ln w="30480">
+          <a:ln w="22860">
             <a:solidFill>
               <a:srgbClr val="EFB13C"/>
             </a:solidFill>
@@ -19707,7 +19915,7 @@
             <a:avLst/>
           </a:prstGeom>
           <a:noFill/>
-          <a:ln w="30480">
+          <a:ln w="22860">
             <a:solidFill>
               <a:srgbClr val="EFB13C"/>
             </a:solidFill>
@@ -19730,7 +19938,7 @@
             <a:avLst/>
           </a:prstGeom>
           <a:noFill/>
-          <a:ln w="30480">
+          <a:ln w="22860">
             <a:solidFill>
               <a:srgbClr val="EFB13C"/>
             </a:solidFill>
@@ -19753,7 +19961,7 @@
             <a:avLst/>
           </a:prstGeom>
           <a:noFill/>
-          <a:ln w="30480">
+          <a:ln w="22860">
             <a:solidFill>
               <a:srgbClr val="EFB13C"/>
             </a:solidFill>
@@ -19776,7 +19984,7 @@
             <a:avLst/>
           </a:prstGeom>
           <a:noFill/>
-          <a:ln w="30480">
+          <a:ln w="22860">
             <a:solidFill>
               <a:srgbClr val="EFB13C"/>
             </a:solidFill>
@@ -19799,7 +20007,7 @@
             <a:avLst/>
           </a:prstGeom>
           <a:noFill/>
-          <a:ln w="30480">
+          <a:ln w="22860">
             <a:solidFill>
               <a:srgbClr val="EFB13C"/>
             </a:solidFill>
@@ -19822,7 +20030,7 @@
             <a:avLst/>
           </a:prstGeom>
           <a:noFill/>
-          <a:ln w="30480">
+          <a:ln w="22860">
             <a:solidFill>
               <a:srgbClr val="EFB13C"/>
             </a:solidFill>
@@ -19845,7 +20053,7 @@
             <a:avLst/>
           </a:prstGeom>
           <a:noFill/>
-          <a:ln w="30480">
+          <a:ln w="22860">
             <a:solidFill>
               <a:srgbClr val="EFB13C"/>
             </a:solidFill>
@@ -19868,7 +20076,7 @@
             <a:avLst/>
           </a:prstGeom>
           <a:noFill/>
-          <a:ln w="30480">
+          <a:ln w="22860">
             <a:solidFill>
               <a:srgbClr val="EFB13C"/>
             </a:solidFill>
@@ -19891,7 +20099,7 @@
             <a:avLst/>
           </a:prstGeom>
           <a:noFill/>
-          <a:ln w="30480">
+          <a:ln w="22860">
             <a:solidFill>
               <a:srgbClr val="EFB13C"/>
             </a:solidFill>
@@ -19914,7 +20122,7 @@
             <a:avLst/>
           </a:prstGeom>
           <a:noFill/>
-          <a:ln w="30480">
+          <a:ln w="22860">
             <a:solidFill>
               <a:srgbClr val="EFB13C"/>
             </a:solidFill>
@@ -19937,7 +20145,7 @@
             <a:avLst/>
           </a:prstGeom>
           <a:noFill/>
-          <a:ln w="30480">
+          <a:ln w="22860">
             <a:solidFill>
               <a:srgbClr val="EFB13C"/>
             </a:solidFill>
@@ -19960,7 +20168,7 @@
             <a:avLst/>
           </a:prstGeom>
           <a:noFill/>
-          <a:ln w="30480">
+          <a:ln w="22860">
             <a:solidFill>
               <a:srgbClr val="EFB13C"/>
             </a:solidFill>
@@ -19983,7 +20191,7 @@
             <a:avLst/>
           </a:prstGeom>
           <a:noFill/>
-          <a:ln w="30480">
+          <a:ln w="22860">
             <a:solidFill>
               <a:srgbClr val="EFB13C"/>
             </a:solidFill>
@@ -20006,7 +20214,7 @@
             <a:avLst/>
           </a:prstGeom>
           <a:noFill/>
-          <a:ln w="30480">
+          <a:ln w="22860">
             <a:solidFill>
               <a:srgbClr val="EFB13C"/>
             </a:solidFill>
@@ -20029,7 +20237,7 @@
             <a:avLst/>
           </a:prstGeom>
           <a:noFill/>
-          <a:ln w="30480">
+          <a:ln w="22860">
             <a:solidFill>
               <a:srgbClr val="EFB13C"/>
             </a:solidFill>
@@ -20052,7 +20260,7 @@
             <a:avLst/>
           </a:prstGeom>
           <a:noFill/>
-          <a:ln w="30480">
+          <a:ln w="22860">
             <a:solidFill>
               <a:srgbClr val="EFB13C"/>
             </a:solidFill>
@@ -20075,7 +20283,7 @@
             <a:avLst/>
           </a:prstGeom>
           <a:noFill/>
-          <a:ln w="30480">
+          <a:ln w="22860">
             <a:solidFill>
               <a:srgbClr val="EFB13C"/>
             </a:solidFill>
@@ -20098,7 +20306,7 @@
             <a:avLst/>
           </a:prstGeom>
           <a:noFill/>
-          <a:ln w="30480">
+          <a:ln w="22860">
             <a:solidFill>
               <a:srgbClr val="EFB13C"/>
             </a:solidFill>
@@ -20121,7 +20329,7 @@
             <a:avLst/>
           </a:prstGeom>
           <a:noFill/>
-          <a:ln w="30480">
+          <a:ln w="22860">
             <a:solidFill>
               <a:srgbClr val="EFB13C"/>
             </a:solidFill>
@@ -20144,7 +20352,7 @@
             <a:avLst/>
           </a:prstGeom>
           <a:noFill/>
-          <a:ln w="30480">
+          <a:ln w="22860">
             <a:solidFill>
               <a:srgbClr val="EFB13C"/>
             </a:solidFill>
@@ -20167,7 +20375,7 @@
             <a:avLst/>
           </a:prstGeom>
           <a:noFill/>
-          <a:ln w="30480">
+          <a:ln w="22860">
             <a:solidFill>
               <a:srgbClr val="EFB13C"/>
             </a:solidFill>
@@ -20190,7 +20398,7 @@
             <a:avLst/>
           </a:prstGeom>
           <a:noFill/>
-          <a:ln w="30480">
+          <a:ln w="22860">
             <a:solidFill>
               <a:srgbClr val="EFB13C"/>
             </a:solidFill>
@@ -20213,7 +20421,7 @@
             <a:avLst/>
           </a:prstGeom>
           <a:noFill/>
-          <a:ln w="30480">
+          <a:ln w="22860">
             <a:solidFill>
               <a:srgbClr val="EFB13C"/>
             </a:solidFill>
@@ -20385,7 +20593,7 @@
             <a:avLst/>
           </a:prstGeom>
           <a:noFill/>
-          <a:ln w="25400">
+          <a:ln w="17780">
             <a:solidFill>
               <a:srgbClr val="A8BCD1"/>
             </a:solidFill>
@@ -20450,7 +20658,7 @@
             <a:avLst/>
           </a:prstGeom>
           <a:noFill/>
-          <a:ln w="30480">
+          <a:ln w="22860">
             <a:solidFill>
               <a:srgbClr val="EFB13C"/>
             </a:solidFill>
@@ -20570,7 +20778,7 @@
                 <a:ea typeface="Malgun Gothic" pitchFamily="34" charset="-122"/>
                 <a:cs typeface="Malgun Gothic" pitchFamily="34" charset="-120"/>
               </a:rPr>
-              <a:t>   ·   기준 미달 </a:t>
+              <a:t>   ·   신고값을 못 채운 </a:t>
             </a:r>
             <a:pPr algn="ctr" indent="0" marL="0">
               <a:lnSpc>
@@ -21884,7 +22092,7 @@
             <a:avLst/>
           </a:prstGeom>
           <a:noFill/>
-          <a:ln w="33020">
+          <a:ln w="17780">
             <a:solidFill>
               <a:srgbClr val="A8BCD1"/>
             </a:solidFill>
@@ -21942,8 +22150,8 @@
         </p:nvSpPr>
         <p:spPr>
           <a:xfrm>
-            <a:off x="1205484" y="3176540"/>
-            <a:ext cx="114300" cy="114300"/>
+            <a:off x="1215009" y="3186065"/>
+            <a:ext cx="95250" cy="95250"/>
           </a:xfrm>
           <a:prstGeom prst="ellipse">
             <a:avLst/>
@@ -21962,8 +22170,8 @@
         </p:nvSpPr>
         <p:spPr>
           <a:xfrm>
-            <a:off x="1315212" y="3217088"/>
-            <a:ext cx="114300" cy="114300"/>
+            <a:off x="1324737" y="3226613"/>
+            <a:ext cx="95250" cy="95250"/>
           </a:xfrm>
           <a:prstGeom prst="ellipse">
             <a:avLst/>
@@ -21982,8 +22190,8 @@
         </p:nvSpPr>
         <p:spPr>
           <a:xfrm>
-            <a:off x="2132076" y="3533327"/>
-            <a:ext cx="114300" cy="114300"/>
+            <a:off x="2141601" y="3542852"/>
+            <a:ext cx="95250" cy="95250"/>
           </a:xfrm>
           <a:prstGeom prst="ellipse">
             <a:avLst/>
@@ -22002,8 +22210,8 @@
         </p:nvSpPr>
         <p:spPr>
           <a:xfrm>
-            <a:off x="2636901" y="3813648"/>
-            <a:ext cx="80010" cy="80010"/>
+            <a:off x="2640711" y="3817458"/>
+            <a:ext cx="72390" cy="72390"/>
           </a:xfrm>
           <a:prstGeom prst="ellipse">
             <a:avLst/>
@@ -22022,8 +22230,8 @@
         </p:nvSpPr>
         <p:spPr>
           <a:xfrm>
-            <a:off x="3148965" y="3837565"/>
-            <a:ext cx="80010" cy="80010"/>
+            <a:off x="3152775" y="3841375"/>
+            <a:ext cx="72390" cy="72390"/>
           </a:xfrm>
           <a:prstGeom prst="ellipse">
             <a:avLst/>
@@ -22042,8 +22250,8 @@
         </p:nvSpPr>
         <p:spPr>
           <a:xfrm>
-            <a:off x="3392805" y="3876742"/>
-            <a:ext cx="80010" cy="80010"/>
+            <a:off x="3396615" y="3880552"/>
+            <a:ext cx="72390" cy="72390"/>
           </a:xfrm>
           <a:prstGeom prst="ellipse">
             <a:avLst/>
@@ -22062,8 +22270,8 @@
         </p:nvSpPr>
         <p:spPr>
           <a:xfrm>
-            <a:off x="3636645" y="3913089"/>
-            <a:ext cx="80010" cy="80010"/>
+            <a:off x="3640455" y="3916899"/>
+            <a:ext cx="72390" cy="72390"/>
           </a:xfrm>
           <a:prstGeom prst="ellipse">
             <a:avLst/>
@@ -22082,8 +22290,8 @@
         </p:nvSpPr>
         <p:spPr>
           <a:xfrm>
-            <a:off x="3856101" y="3768557"/>
-            <a:ext cx="80010" cy="80010"/>
+            <a:off x="3859911" y="3772367"/>
+            <a:ext cx="72390" cy="72390"/>
           </a:xfrm>
           <a:prstGeom prst="ellipse">
             <a:avLst/>
@@ -22102,8 +22310,8 @@
         </p:nvSpPr>
         <p:spPr>
           <a:xfrm>
-            <a:off x="4002405" y="3989899"/>
-            <a:ext cx="80010" cy="80010"/>
+            <a:off x="4006215" y="3993709"/>
+            <a:ext cx="72390" cy="72390"/>
           </a:xfrm>
           <a:prstGeom prst="ellipse">
             <a:avLst/>
@@ -22122,8 +22330,8 @@
         </p:nvSpPr>
         <p:spPr>
           <a:xfrm>
-            <a:off x="4416933" y="3862426"/>
-            <a:ext cx="80010" cy="80010"/>
+            <a:off x="4420743" y="3866236"/>
+            <a:ext cx="72390" cy="72390"/>
           </a:xfrm>
           <a:prstGeom prst="ellipse">
             <a:avLst/>
@@ -22142,8 +22350,8 @@
         </p:nvSpPr>
         <p:spPr>
           <a:xfrm>
-            <a:off x="4782693" y="3889000"/>
-            <a:ext cx="80010" cy="80010"/>
+            <a:off x="4786503" y="3892810"/>
+            <a:ext cx="72390" cy="72390"/>
           </a:xfrm>
           <a:prstGeom prst="ellipse">
             <a:avLst/>
@@ -22162,8 +22370,8 @@
         </p:nvSpPr>
         <p:spPr>
           <a:xfrm>
-            <a:off x="4855845" y="3709835"/>
-            <a:ext cx="80010" cy="80010"/>
+            <a:off x="4859655" y="3713645"/>
+            <a:ext cx="72390" cy="72390"/>
           </a:xfrm>
           <a:prstGeom prst="ellipse">
             <a:avLst/>
@@ -22182,8 +22390,8 @@
         </p:nvSpPr>
         <p:spPr>
           <a:xfrm>
-            <a:off x="4928997" y="3747983"/>
-            <a:ext cx="80010" cy="80010"/>
+            <a:off x="4932807" y="3751793"/>
+            <a:ext cx="72390" cy="72390"/>
           </a:xfrm>
           <a:prstGeom prst="ellipse">
             <a:avLst/>
@@ -22202,8 +22410,8 @@
         </p:nvSpPr>
         <p:spPr>
           <a:xfrm>
-            <a:off x="5197221" y="3673231"/>
-            <a:ext cx="80010" cy="80010"/>
+            <a:off x="5201031" y="3677041"/>
+            <a:ext cx="72390" cy="72390"/>
           </a:xfrm>
           <a:prstGeom prst="ellipse">
             <a:avLst/>
@@ -22222,8 +22430,8 @@
         </p:nvSpPr>
         <p:spPr>
           <a:xfrm>
-            <a:off x="5221605" y="3788102"/>
-            <a:ext cx="80010" cy="80010"/>
+            <a:off x="5225415" y="3791912"/>
+            <a:ext cx="72390" cy="72390"/>
           </a:xfrm>
           <a:prstGeom prst="ellipse">
             <a:avLst/>
@@ -22242,8 +22450,8 @@
         </p:nvSpPr>
         <p:spPr>
           <a:xfrm>
-            <a:off x="5367909" y="3824364"/>
-            <a:ext cx="80010" cy="80010"/>
+            <a:off x="5371719" y="3828174"/>
+            <a:ext cx="72390" cy="72390"/>
           </a:xfrm>
           <a:prstGeom prst="ellipse">
             <a:avLst/>
@@ -22262,8 +22470,8 @@
         </p:nvSpPr>
         <p:spPr>
           <a:xfrm>
-            <a:off x="5733669" y="3843395"/>
-            <a:ext cx="80010" cy="80010"/>
+            <a:off x="5737479" y="3847205"/>
+            <a:ext cx="72390" cy="72390"/>
           </a:xfrm>
           <a:prstGeom prst="ellipse">
             <a:avLst/>
@@ -22282,8 +22490,8 @@
         </p:nvSpPr>
         <p:spPr>
           <a:xfrm>
-            <a:off x="5758053" y="3814505"/>
-            <a:ext cx="80010" cy="80010"/>
+            <a:off x="5761863" y="3818315"/>
+            <a:ext cx="72390" cy="72390"/>
           </a:xfrm>
           <a:prstGeom prst="ellipse">
             <a:avLst/>
@@ -22302,8 +22510,8 @@
         </p:nvSpPr>
         <p:spPr>
           <a:xfrm>
-            <a:off x="6879717" y="4078881"/>
-            <a:ext cx="80010" cy="80010"/>
+            <a:off x="6883527" y="4082691"/>
+            <a:ext cx="72390" cy="72390"/>
           </a:xfrm>
           <a:prstGeom prst="ellipse">
             <a:avLst/>
@@ -22322,8 +22530,8 @@
         </p:nvSpPr>
         <p:spPr>
           <a:xfrm>
-            <a:off x="7806309" y="4484189"/>
-            <a:ext cx="80010" cy="80010"/>
+            <a:off x="7810119" y="4487999"/>
+            <a:ext cx="72390" cy="72390"/>
           </a:xfrm>
           <a:prstGeom prst="ellipse">
             <a:avLst/>
@@ -22342,8 +22550,8 @@
         </p:nvSpPr>
         <p:spPr>
           <a:xfrm>
-            <a:off x="7855077" y="4584916"/>
-            <a:ext cx="80010" cy="80010"/>
+            <a:off x="7858887" y="4588726"/>
+            <a:ext cx="72390" cy="72390"/>
           </a:xfrm>
           <a:prstGeom prst="ellipse">
             <a:avLst/>
@@ -22362,8 +22570,8 @@
         </p:nvSpPr>
         <p:spPr>
           <a:xfrm>
-            <a:off x="7879461" y="4353030"/>
-            <a:ext cx="80010" cy="80010"/>
+            <a:off x="7883271" y="4356840"/>
+            <a:ext cx="72390" cy="72390"/>
           </a:xfrm>
           <a:prstGeom prst="ellipse">
             <a:avLst/>
@@ -22382,8 +22590,8 @@
         </p:nvSpPr>
         <p:spPr>
           <a:xfrm>
-            <a:off x="7952613" y="4363403"/>
-            <a:ext cx="80010" cy="80010"/>
+            <a:off x="7956423" y="4367212"/>
+            <a:ext cx="72390" cy="72390"/>
           </a:xfrm>
           <a:prstGeom prst="ellipse">
             <a:avLst/>
@@ -22402,8 +22610,8 @@
         </p:nvSpPr>
         <p:spPr>
           <a:xfrm>
-            <a:off x="8367141" y="4532452"/>
-            <a:ext cx="80010" cy="80010"/>
+            <a:off x="8370951" y="4536262"/>
+            <a:ext cx="72390" cy="72390"/>
           </a:xfrm>
           <a:prstGeom prst="ellipse">
             <a:avLst/>
@@ -22422,8 +22630,8 @@
         </p:nvSpPr>
         <p:spPr>
           <a:xfrm>
-            <a:off x="8666988" y="4702445"/>
-            <a:ext cx="114300" cy="114300"/>
+            <a:off x="8676513" y="4711970"/>
+            <a:ext cx="95250" cy="95250"/>
           </a:xfrm>
           <a:prstGeom prst="ellipse">
             <a:avLst/>
@@ -22442,8 +22650,8 @@
         </p:nvSpPr>
         <p:spPr>
           <a:xfrm>
-            <a:off x="9049893" y="4440984"/>
-            <a:ext cx="80010" cy="80010"/>
+            <a:off x="9053703" y="4444794"/>
+            <a:ext cx="72390" cy="72390"/>
           </a:xfrm>
           <a:prstGeom prst="ellipse">
             <a:avLst/>
@@ -22462,8 +22670,8 @@
         </p:nvSpPr>
         <p:spPr>
           <a:xfrm>
-            <a:off x="9049893" y="4344457"/>
-            <a:ext cx="80010" cy="80010"/>
+            <a:off x="9053703" y="4348267"/>
+            <a:ext cx="72390" cy="72390"/>
           </a:xfrm>
           <a:prstGeom prst="ellipse">
             <a:avLst/>
@@ -22482,8 +22690,8 @@
         </p:nvSpPr>
         <p:spPr>
           <a:xfrm>
-            <a:off x="9171813" y="4599061"/>
-            <a:ext cx="80010" cy="80010"/>
+            <a:off x="9175623" y="4602871"/>
+            <a:ext cx="72390" cy="72390"/>
           </a:xfrm>
           <a:prstGeom prst="ellipse">
             <a:avLst/>
@@ -22502,8 +22710,8 @@
         </p:nvSpPr>
         <p:spPr>
           <a:xfrm>
-            <a:off x="9220581" y="4594517"/>
-            <a:ext cx="80010" cy="80010"/>
+            <a:off x="9224391" y="4598327"/>
+            <a:ext cx="72390" cy="72390"/>
           </a:xfrm>
           <a:prstGeom prst="ellipse">
             <a:avLst/>
@@ -22522,8 +22730,8 @@
         </p:nvSpPr>
         <p:spPr>
           <a:xfrm>
-            <a:off x="9415653" y="4378233"/>
-            <a:ext cx="80010" cy="80010"/>
+            <a:off x="9419463" y="4382043"/>
+            <a:ext cx="72390" cy="72390"/>
           </a:xfrm>
           <a:prstGeom prst="ellipse">
             <a:avLst/>
@@ -22542,8 +22750,8 @@
         </p:nvSpPr>
         <p:spPr>
           <a:xfrm>
-            <a:off x="9586341" y="4356545"/>
-            <a:ext cx="80010" cy="80010"/>
+            <a:off x="9590151" y="4360355"/>
+            <a:ext cx="72390" cy="72390"/>
           </a:xfrm>
           <a:prstGeom prst="ellipse">
             <a:avLst/>
@@ -22562,8 +22770,8 @@
         </p:nvSpPr>
         <p:spPr>
           <a:xfrm>
-            <a:off x="9659493" y="4521222"/>
-            <a:ext cx="80010" cy="80010"/>
+            <a:off x="9663303" y="4525032"/>
+            <a:ext cx="72390" cy="72390"/>
           </a:xfrm>
           <a:prstGeom prst="ellipse">
             <a:avLst/>
@@ -22582,8 +22790,8 @@
         </p:nvSpPr>
         <p:spPr>
           <a:xfrm>
-            <a:off x="9683877" y="4122430"/>
-            <a:ext cx="80010" cy="80010"/>
+            <a:off x="9687687" y="4126240"/>
+            <a:ext cx="72390" cy="72390"/>
           </a:xfrm>
           <a:prstGeom prst="ellipse">
             <a:avLst/>
@@ -22602,8 +22810,8 @@
         </p:nvSpPr>
         <p:spPr>
           <a:xfrm>
-            <a:off x="9683877" y="4184152"/>
-            <a:ext cx="80010" cy="80010"/>
+            <a:off x="9687687" y="4187962"/>
+            <a:ext cx="72390" cy="72390"/>
           </a:xfrm>
           <a:prstGeom prst="ellipse">
             <a:avLst/>
@@ -22622,8 +22830,8 @@
         </p:nvSpPr>
         <p:spPr>
           <a:xfrm>
-            <a:off x="9683877" y="4434811"/>
-            <a:ext cx="80010" cy="80010"/>
+            <a:off x="9687687" y="4438621"/>
+            <a:ext cx="72390" cy="72390"/>
           </a:xfrm>
           <a:prstGeom prst="ellipse">
             <a:avLst/>
@@ -22642,8 +22850,8 @@
         </p:nvSpPr>
         <p:spPr>
           <a:xfrm>
-            <a:off x="9878949" y="4245273"/>
-            <a:ext cx="80010" cy="80010"/>
+            <a:off x="9882759" y="4249083"/>
+            <a:ext cx="72390" cy="72390"/>
           </a:xfrm>
           <a:prstGeom prst="ellipse">
             <a:avLst/>
@@ -22662,8 +22870,8 @@
         </p:nvSpPr>
         <p:spPr>
           <a:xfrm>
-            <a:off x="9927717" y="4502877"/>
-            <a:ext cx="80010" cy="80010"/>
+            <a:off x="9931527" y="4506687"/>
+            <a:ext cx="72390" cy="72390"/>
           </a:xfrm>
           <a:prstGeom prst="ellipse">
             <a:avLst/>
@@ -22682,8 +22890,8 @@
         </p:nvSpPr>
         <p:spPr>
           <a:xfrm>
-            <a:off x="10122789" y="4240044"/>
-            <a:ext cx="80010" cy="80010"/>
+            <a:off x="10126599" y="4243854"/>
+            <a:ext cx="72390" cy="72390"/>
           </a:xfrm>
           <a:prstGeom prst="ellipse">
             <a:avLst/>
@@ -22702,8 +22910,8 @@
         </p:nvSpPr>
         <p:spPr>
           <a:xfrm>
-            <a:off x="10488549" y="4123373"/>
-            <a:ext cx="80010" cy="80010"/>
+            <a:off x="10492359" y="4127183"/>
+            <a:ext cx="72390" cy="72390"/>
           </a:xfrm>
           <a:prstGeom prst="ellipse">
             <a:avLst/>
@@ -22722,8 +22930,8 @@
         </p:nvSpPr>
         <p:spPr>
           <a:xfrm>
-            <a:off x="10927461" y="4181323"/>
-            <a:ext cx="80010" cy="80010"/>
+            <a:off x="10931271" y="4185133"/>
+            <a:ext cx="72390" cy="72390"/>
           </a:xfrm>
           <a:prstGeom prst="ellipse">
             <a:avLst/>
@@ -30939,7 +31147,7 @@
             <a:avLst/>
           </a:prstGeom>
           <a:noFill/>
-          <a:ln w="19050">
+          <a:ln w="12700">
             <a:solidFill>
               <a:srgbClr val="55708A"/>
             </a:solidFill>
@@ -30962,7 +31170,7 @@
             <a:avLst/>
           </a:prstGeom>
           <a:noFill/>
-          <a:ln w="19050">
+          <a:ln w="12700">
             <a:solidFill>
               <a:srgbClr val="55708A"/>
             </a:solidFill>
@@ -30985,7 +31193,7 @@
             <a:avLst/>
           </a:prstGeom>
           <a:noFill/>
-          <a:ln w="19050">
+          <a:ln w="12700">
             <a:solidFill>
               <a:srgbClr val="55708A"/>
             </a:solidFill>
@@ -31008,7 +31216,7 @@
             <a:avLst/>
           </a:prstGeom>
           <a:noFill/>
-          <a:ln w="19050">
+          <a:ln w="12700">
             <a:solidFill>
               <a:srgbClr val="55708A"/>
             </a:solidFill>
@@ -31031,7 +31239,7 @@
             <a:avLst/>
           </a:prstGeom>
           <a:noFill/>
-          <a:ln w="19050">
+          <a:ln w="12700">
             <a:solidFill>
               <a:srgbClr val="55708A"/>
             </a:solidFill>
@@ -31054,7 +31262,7 @@
             <a:avLst/>
           </a:prstGeom>
           <a:noFill/>
-          <a:ln w="19050">
+          <a:ln w="12700">
             <a:solidFill>
               <a:srgbClr val="55708A"/>
             </a:solidFill>
@@ -31077,7 +31285,7 @@
             <a:avLst/>
           </a:prstGeom>
           <a:noFill/>
-          <a:ln w="19050">
+          <a:ln w="12700">
             <a:solidFill>
               <a:srgbClr val="55708A"/>
             </a:solidFill>
@@ -31100,7 +31308,7 @@
             <a:avLst/>
           </a:prstGeom>
           <a:noFill/>
-          <a:ln w="19050">
+          <a:ln w="12700">
             <a:solidFill>
               <a:srgbClr val="55708A"/>
             </a:solidFill>
@@ -31123,7 +31331,7 @@
             <a:avLst/>
           </a:prstGeom>
           <a:noFill/>
-          <a:ln w="19050">
+          <a:ln w="12700">
             <a:solidFill>
               <a:srgbClr val="55708A"/>
             </a:solidFill>
@@ -31146,7 +31354,7 @@
             <a:avLst/>
           </a:prstGeom>
           <a:noFill/>
-          <a:ln w="19050">
+          <a:ln w="12700">
             <a:solidFill>
               <a:srgbClr val="55708A"/>
             </a:solidFill>
@@ -31169,7 +31377,7 @@
             <a:avLst/>
           </a:prstGeom>
           <a:noFill/>
-          <a:ln w="19050">
+          <a:ln w="12700">
             <a:solidFill>
               <a:srgbClr val="55708A"/>
             </a:solidFill>
@@ -31192,7 +31400,7 @@
             <a:avLst/>
           </a:prstGeom>
           <a:noFill/>
-          <a:ln w="19050">
+          <a:ln w="12700">
             <a:solidFill>
               <a:srgbClr val="55708A"/>
             </a:solidFill>
@@ -31215,7 +31423,7 @@
             <a:avLst/>
           </a:prstGeom>
           <a:noFill/>
-          <a:ln w="33020">
+          <a:ln w="22860">
             <a:solidFill>
               <a:srgbClr val="EFB13C"/>
             </a:solidFill>
@@ -31238,7 +31446,7 @@
             <a:avLst/>
           </a:prstGeom>
           <a:noFill/>
-          <a:ln w="33020">
+          <a:ln w="22860">
             <a:solidFill>
               <a:srgbClr val="EFB13C"/>
             </a:solidFill>
@@ -31261,7 +31469,7 @@
             <a:avLst/>
           </a:prstGeom>
           <a:noFill/>
-          <a:ln w="33020">
+          <a:ln w="22860">
             <a:solidFill>
               <a:srgbClr val="EFB13C"/>
             </a:solidFill>
@@ -31284,7 +31492,7 @@
             <a:avLst/>
           </a:prstGeom>
           <a:noFill/>
-          <a:ln w="20320">
+          <a:ln w="15240">
             <a:solidFill>
               <a:srgbClr val="FF4D63"/>
             </a:solidFill>
@@ -32387,7 +32595,7 @@
             <a:avLst/>
           </a:prstGeom>
           <a:noFill/>
-          <a:ln w="27940">
+          <a:ln w="17780">
             <a:solidFill>
               <a:srgbClr val="A8BCD1"/>
             </a:solidFill>
@@ -32410,7 +32618,7 @@
             <a:avLst/>
           </a:prstGeom>
           <a:noFill/>
-          <a:ln w="27940">
+          <a:ln w="17780">
             <a:solidFill>
               <a:srgbClr val="A8BCD1"/>
             </a:solidFill>
@@ -32433,7 +32641,7 @@
             <a:avLst/>
           </a:prstGeom>
           <a:noFill/>
-          <a:ln w="27940">
+          <a:ln w="17780">
             <a:solidFill>
               <a:srgbClr val="A8BCD1"/>
             </a:solidFill>
@@ -32456,7 +32664,7 @@
             <a:avLst/>
           </a:prstGeom>
           <a:noFill/>
-          <a:ln w="27940">
+          <a:ln w="17780">
             <a:solidFill>
               <a:srgbClr val="A8BCD1"/>
             </a:solidFill>
@@ -32479,7 +32687,7 @@
             <a:avLst/>
           </a:prstGeom>
           <a:noFill/>
-          <a:ln w="27940">
+          <a:ln w="17780">
             <a:solidFill>
               <a:srgbClr val="A8BCD1"/>
             </a:solidFill>
@@ -32502,7 +32710,7 @@
             <a:avLst/>
           </a:prstGeom>
           <a:noFill/>
-          <a:ln w="27940">
+          <a:ln w="17780">
             <a:solidFill>
               <a:srgbClr val="A8BCD1"/>
             </a:solidFill>
@@ -32525,7 +32733,7 @@
             <a:avLst/>
           </a:prstGeom>
           <a:noFill/>
-          <a:ln w="27940">
+          <a:ln w="17780">
             <a:solidFill>
               <a:srgbClr val="A8BCD1"/>
             </a:solidFill>
@@ -32548,7 +32756,7 @@
             <a:avLst/>
           </a:prstGeom>
           <a:noFill/>
-          <a:ln w="27940">
+          <a:ln w="17780">
             <a:solidFill>
               <a:srgbClr val="A8BCD1"/>
             </a:solidFill>
@@ -32571,7 +32779,7 @@
             <a:avLst/>
           </a:prstGeom>
           <a:noFill/>
-          <a:ln w="27940">
+          <a:ln w="17780">
             <a:solidFill>
               <a:srgbClr val="A8BCD1"/>
             </a:solidFill>
@@ -32594,7 +32802,7 @@
             <a:avLst/>
           </a:prstGeom>
           <a:noFill/>
-          <a:ln w="27940">
+          <a:ln w="17780">
             <a:solidFill>
               <a:srgbClr val="A8BCD1"/>
             </a:solidFill>
@@ -32617,7 +32825,7 @@
             <a:avLst/>
           </a:prstGeom>
           <a:noFill/>
-          <a:ln w="27940">
+          <a:ln w="17780">
             <a:solidFill>
               <a:srgbClr val="A8BCD1"/>
             </a:solidFill>
@@ -32640,7 +32848,7 @@
             <a:avLst/>
           </a:prstGeom>
           <a:noFill/>
-          <a:ln w="27940">
+          <a:ln w="17780">
             <a:solidFill>
               <a:srgbClr val="A8BCD1"/>
             </a:solidFill>
@@ -32663,7 +32871,7 @@
             <a:avLst/>
           </a:prstGeom>
           <a:noFill/>
-          <a:ln w="27940">
+          <a:ln w="17780">
             <a:solidFill>
               <a:srgbClr val="A8BCD1"/>
             </a:solidFill>
@@ -32686,7 +32894,7 @@
             <a:avLst/>
           </a:prstGeom>
           <a:noFill/>
-          <a:ln w="27940">
+          <a:ln w="17780">
             <a:solidFill>
               <a:srgbClr val="A8BCD1"/>
             </a:solidFill>
@@ -32709,7 +32917,7 @@
             <a:avLst/>
           </a:prstGeom>
           <a:noFill/>
-          <a:ln w="27940">
+          <a:ln w="17780">
             <a:solidFill>
               <a:srgbClr val="A8BCD1"/>
             </a:solidFill>
@@ -32732,7 +32940,7 @@
             <a:avLst/>
           </a:prstGeom>
           <a:noFill/>
-          <a:ln w="27940">
+          <a:ln w="17780">
             <a:solidFill>
               <a:srgbClr val="A8BCD1"/>
             </a:solidFill>
@@ -32755,7 +32963,7 @@
             <a:avLst/>
           </a:prstGeom>
           <a:noFill/>
-          <a:ln w="27940">
+          <a:ln w="17780">
             <a:solidFill>
               <a:srgbClr val="A8BCD1"/>
             </a:solidFill>
@@ -32778,7 +32986,7 @@
             <a:avLst/>
           </a:prstGeom>
           <a:noFill/>
-          <a:ln w="27940">
+          <a:ln w="17780">
             <a:solidFill>
               <a:srgbClr val="A8BCD1"/>
             </a:solidFill>
@@ -32801,7 +33009,7 @@
             <a:avLst/>
           </a:prstGeom>
           <a:noFill/>
-          <a:ln w="27940">
+          <a:ln w="17780">
             <a:solidFill>
               <a:srgbClr val="A8BCD1"/>
             </a:solidFill>
@@ -32824,7 +33032,7 @@
             <a:avLst/>
           </a:prstGeom>
           <a:noFill/>
-          <a:ln w="27940">
+          <a:ln w="17780">
             <a:solidFill>
               <a:srgbClr val="A8BCD1"/>
             </a:solidFill>
@@ -32847,7 +33055,7 @@
             <a:avLst/>
           </a:prstGeom>
           <a:noFill/>
-          <a:ln w="27940">
+          <a:ln w="17780">
             <a:solidFill>
               <a:srgbClr val="A8BCD1"/>
             </a:solidFill>
@@ -32870,7 +33078,7 @@
             <a:avLst/>
           </a:prstGeom>
           <a:noFill/>
-          <a:ln w="27940">
+          <a:ln w="17780">
             <a:solidFill>
               <a:srgbClr val="A8BCD1"/>
             </a:solidFill>
@@ -32893,7 +33101,7 @@
             <a:avLst/>
           </a:prstGeom>
           <a:noFill/>
-          <a:ln w="27940">
+          <a:ln w="17780">
             <a:solidFill>
               <a:srgbClr val="A8BCD1"/>
             </a:solidFill>
@@ -32916,7 +33124,7 @@
             <a:avLst/>
           </a:prstGeom>
           <a:noFill/>
-          <a:ln w="27940">
+          <a:ln w="17780">
             <a:solidFill>
               <a:srgbClr val="A8BCD1"/>
             </a:solidFill>
@@ -32939,7 +33147,7 @@
             <a:avLst/>
           </a:prstGeom>
           <a:noFill/>
-          <a:ln w="27940">
+          <a:ln w="17780">
             <a:solidFill>
               <a:srgbClr val="A8BCD1"/>
             </a:solidFill>
@@ -32962,7 +33170,7 @@
             <a:avLst/>
           </a:prstGeom>
           <a:noFill/>
-          <a:ln w="33020">
+          <a:ln w="22860">
             <a:solidFill>
               <a:srgbClr val="EFB13C"/>
             </a:solidFill>
@@ -32985,7 +33193,7 @@
             <a:avLst/>
           </a:prstGeom>
           <a:noFill/>
-          <a:ln w="33020">
+          <a:ln w="22860">
             <a:solidFill>
               <a:srgbClr val="EFB13C"/>
             </a:solidFill>
@@ -33008,7 +33216,7 @@
             <a:avLst/>
           </a:prstGeom>
           <a:noFill/>
-          <a:ln w="33020">
+          <a:ln w="22860">
             <a:solidFill>
               <a:srgbClr val="EFB13C"/>
             </a:solidFill>
@@ -33031,7 +33239,7 @@
             <a:avLst/>
           </a:prstGeom>
           <a:noFill/>
-          <a:ln w="33020">
+          <a:ln w="22860">
             <a:solidFill>
               <a:srgbClr val="EFB13C"/>
             </a:solidFill>
@@ -33054,7 +33262,7 @@
             <a:avLst/>
           </a:prstGeom>
           <a:noFill/>
-          <a:ln w="33020">
+          <a:ln w="22860">
             <a:solidFill>
               <a:srgbClr val="EFB13C"/>
             </a:solidFill>
@@ -33077,7 +33285,7 @@
             <a:avLst/>
           </a:prstGeom>
           <a:noFill/>
-          <a:ln w="33020">
+          <a:ln w="22860">
             <a:solidFill>
               <a:srgbClr val="EFB13C"/>
             </a:solidFill>
@@ -33100,7 +33308,7 @@
             <a:avLst/>
           </a:prstGeom>
           <a:noFill/>
-          <a:ln w="33020">
+          <a:ln w="22860">
             <a:solidFill>
               <a:srgbClr val="EFB13C"/>
             </a:solidFill>
@@ -33123,7 +33331,7 @@
             <a:avLst/>
           </a:prstGeom>
           <a:noFill/>
-          <a:ln w="33020">
+          <a:ln w="22860">
             <a:solidFill>
               <a:srgbClr val="EFB13C"/>
             </a:solidFill>
@@ -33146,7 +33354,7 @@
             <a:avLst/>
           </a:prstGeom>
           <a:noFill/>
-          <a:ln w="33020">
+          <a:ln w="22860">
             <a:solidFill>
               <a:srgbClr val="EFB13C"/>
             </a:solidFill>
@@ -33169,7 +33377,7 @@
             <a:avLst/>
           </a:prstGeom>
           <a:noFill/>
-          <a:ln w="33020">
+          <a:ln w="22860">
             <a:solidFill>
               <a:srgbClr val="EFB13C"/>
             </a:solidFill>
@@ -33192,7 +33400,7 @@
             <a:avLst/>
           </a:prstGeom>
           <a:noFill/>
-          <a:ln w="33020">
+          <a:ln w="22860">
             <a:solidFill>
               <a:srgbClr val="EFB13C"/>
             </a:solidFill>
@@ -33215,7 +33423,7 @@
             <a:avLst/>
           </a:prstGeom>
           <a:noFill/>
-          <a:ln w="33020">
+          <a:ln w="22860">
             <a:solidFill>
               <a:srgbClr val="EFB13C"/>
             </a:solidFill>
@@ -33238,7 +33446,7 @@
             <a:avLst/>
           </a:prstGeom>
           <a:noFill/>
-          <a:ln w="33020">
+          <a:ln w="22860">
             <a:solidFill>
               <a:srgbClr val="EFB13C"/>
             </a:solidFill>
@@ -33261,7 +33469,7 @@
             <a:avLst/>
           </a:prstGeom>
           <a:noFill/>
-          <a:ln w="33020">
+          <a:ln w="22860">
             <a:solidFill>
               <a:srgbClr val="EFB13C"/>
             </a:solidFill>
@@ -33284,7 +33492,7 @@
             <a:avLst/>
           </a:prstGeom>
           <a:noFill/>
-          <a:ln w="33020">
+          <a:ln w="22860">
             <a:solidFill>
               <a:srgbClr val="EFB13C"/>
             </a:solidFill>
@@ -33307,7 +33515,7 @@
             <a:avLst/>
           </a:prstGeom>
           <a:noFill/>
-          <a:ln w="33020">
+          <a:ln w="22860">
             <a:solidFill>
               <a:srgbClr val="EFB13C"/>
             </a:solidFill>
@@ -33330,7 +33538,7 @@
             <a:avLst/>
           </a:prstGeom>
           <a:noFill/>
-          <a:ln w="33020">
+          <a:ln w="22860">
             <a:solidFill>
               <a:srgbClr val="EFB13C"/>
             </a:solidFill>
@@ -33353,7 +33561,7 @@
             <a:avLst/>
           </a:prstGeom>
           <a:noFill/>
-          <a:ln w="33020">
+          <a:ln w="22860">
             <a:solidFill>
               <a:srgbClr val="EFB13C"/>
             </a:solidFill>
@@ -33376,7 +33584,7 @@
             <a:avLst/>
           </a:prstGeom>
           <a:noFill/>
-          <a:ln w="33020">
+          <a:ln w="22860">
             <a:solidFill>
               <a:srgbClr val="EFB13C"/>
             </a:solidFill>
@@ -33399,7 +33607,7 @@
             <a:avLst/>
           </a:prstGeom>
           <a:noFill/>
-          <a:ln w="33020">
+          <a:ln w="22860">
             <a:solidFill>
               <a:srgbClr val="EFB13C"/>
             </a:solidFill>
@@ -33422,7 +33630,7 @@
             <a:avLst/>
           </a:prstGeom>
           <a:noFill/>
-          <a:ln w="33020">
+          <a:ln w="22860">
             <a:solidFill>
               <a:srgbClr val="EFB13C"/>
             </a:solidFill>
@@ -33445,7 +33653,7 @@
             <a:avLst/>
           </a:prstGeom>
           <a:noFill/>
-          <a:ln w="33020">
+          <a:ln w="22860">
             <a:solidFill>
               <a:srgbClr val="EFB13C"/>
             </a:solidFill>
@@ -33468,7 +33676,7 @@
             <a:avLst/>
           </a:prstGeom>
           <a:noFill/>
-          <a:ln w="33020">
+          <a:ln w="22860">
             <a:solidFill>
               <a:srgbClr val="EFB13C"/>
             </a:solidFill>
@@ -33491,7 +33699,7 @@
             <a:avLst/>
           </a:prstGeom>
           <a:noFill/>
-          <a:ln w="33020">
+          <a:ln w="22860">
             <a:solidFill>
               <a:srgbClr val="EFB13C"/>
             </a:solidFill>
@@ -33514,7 +33722,7 @@
             <a:avLst/>
           </a:prstGeom>
           <a:noFill/>
-          <a:ln w="33020">
+          <a:ln w="22860">
             <a:solidFill>
               <a:srgbClr val="EFB13C"/>
             </a:solidFill>
@@ -33537,7 +33745,7 @@
             <a:avLst/>
           </a:prstGeom>
           <a:noFill/>
-          <a:ln w="27940">
+          <a:ln w="17780">
             <a:solidFill>
               <a:srgbClr val="A8BCD1"/>
             </a:solidFill>
@@ -33602,7 +33810,7 @@
             <a:avLst/>
           </a:prstGeom>
           <a:noFill/>
-          <a:ln w="33020">
+          <a:ln w="22860">
             <a:solidFill>
               <a:srgbClr val="EFB13C"/>
             </a:solidFill>
@@ -34593,7 +34801,7 @@
             <a:avLst/>
           </a:prstGeom>
           <a:noFill/>
-          <a:ln w="27940">
+          <a:ln w="17780">
             <a:solidFill>
               <a:srgbClr val="A8BCD1"/>
             </a:solidFill>
@@ -34658,7 +34866,7 @@
             <a:avLst/>
           </a:prstGeom>
           <a:noFill/>
-          <a:ln w="27940">
+          <a:ln w="17780">
             <a:solidFill>
               <a:srgbClr val="A8BCD1"/>
             </a:solidFill>
@@ -35481,7 +35689,7 @@
             <a:avLst/>
           </a:prstGeom>
           <a:noFill/>
-          <a:ln w="35560">
+          <a:ln w="22860">
             <a:solidFill>
               <a:srgbClr val="EFB13C"/>
             </a:solidFill>
@@ -35504,7 +35712,7 @@
             <a:avLst/>
           </a:prstGeom>
           <a:noFill/>
-          <a:ln w="35560">
+          <a:ln w="22860">
             <a:solidFill>
               <a:srgbClr val="EFB13C"/>
             </a:solidFill>
@@ -35527,7 +35735,7 @@
             <a:avLst/>
           </a:prstGeom>
           <a:noFill/>
-          <a:ln w="35560">
+          <a:ln w="22860">
             <a:solidFill>
               <a:srgbClr val="EFB13C"/>
             </a:solidFill>
@@ -35550,7 +35758,7 @@
             <a:avLst/>
           </a:prstGeom>
           <a:noFill/>
-          <a:ln w="35560">
+          <a:ln w="22860">
             <a:solidFill>
               <a:srgbClr val="EFB13C"/>
             </a:solidFill>
@@ -35573,7 +35781,7 @@
             <a:avLst/>
           </a:prstGeom>
           <a:noFill/>
-          <a:ln w="35560">
+          <a:ln w="22860">
             <a:solidFill>
               <a:srgbClr val="EFB13C"/>
             </a:solidFill>
@@ -35596,7 +35804,7 @@
             <a:avLst/>
           </a:prstGeom>
           <a:noFill/>
-          <a:ln w="35560">
+          <a:ln w="22860">
             <a:solidFill>
               <a:srgbClr val="EFB13C"/>
             </a:solidFill>
@@ -35619,7 +35827,7 @@
             <a:avLst/>
           </a:prstGeom>
           <a:noFill/>
-          <a:ln w="35560">
+          <a:ln w="22860">
             <a:solidFill>
               <a:srgbClr val="EFB13C"/>
             </a:solidFill>
@@ -35642,7 +35850,7 @@
             <a:avLst/>
           </a:prstGeom>
           <a:noFill/>
-          <a:ln w="35560">
+          <a:ln w="22860">
             <a:solidFill>
               <a:srgbClr val="EFB13C"/>
             </a:solidFill>
@@ -35665,7 +35873,7 @@
             <a:avLst/>
           </a:prstGeom>
           <a:noFill/>
-          <a:ln w="35560">
+          <a:ln w="22860">
             <a:solidFill>
               <a:srgbClr val="EFB13C"/>
             </a:solidFill>
@@ -35688,7 +35896,7 @@
             <a:avLst/>
           </a:prstGeom>
           <a:noFill/>
-          <a:ln w="35560">
+          <a:ln w="22860">
             <a:solidFill>
               <a:srgbClr val="EFB13C"/>
             </a:solidFill>
@@ -35711,7 +35919,7 @@
             <a:avLst/>
           </a:prstGeom>
           <a:noFill/>
-          <a:ln w="35560">
+          <a:ln w="22860">
             <a:solidFill>
               <a:srgbClr val="EFB13C"/>
             </a:solidFill>
@@ -35734,7 +35942,7 @@
             <a:avLst/>
           </a:prstGeom>
           <a:noFill/>
-          <a:ln w="35560">
+          <a:ln w="22860">
             <a:solidFill>
               <a:srgbClr val="EFB13C"/>
             </a:solidFill>
@@ -35757,7 +35965,7 @@
             <a:avLst/>
           </a:prstGeom>
           <a:noFill/>
-          <a:ln w="35560">
+          <a:ln w="22860">
             <a:solidFill>
               <a:srgbClr val="EFB13C"/>
             </a:solidFill>
@@ -35780,7 +35988,7 @@
             <a:avLst/>
           </a:prstGeom>
           <a:noFill/>
-          <a:ln w="35560">
+          <a:ln w="22860">
             <a:solidFill>
               <a:srgbClr val="EFB13C"/>
             </a:solidFill>
@@ -35803,7 +36011,7 @@
             <a:avLst/>
           </a:prstGeom>
           <a:noFill/>
-          <a:ln w="35560">
+          <a:ln w="22860">
             <a:solidFill>
               <a:srgbClr val="EFB13C"/>
             </a:solidFill>
@@ -35826,7 +36034,7 @@
             <a:avLst/>
           </a:prstGeom>
           <a:noFill/>
-          <a:ln w="35560">
+          <a:ln w="22860">
             <a:solidFill>
               <a:srgbClr val="EFB13C"/>
             </a:solidFill>
@@ -35849,7 +36057,7 @@
             <a:avLst/>
           </a:prstGeom>
           <a:noFill/>
-          <a:ln w="35560">
+          <a:ln w="22860">
             <a:solidFill>
               <a:srgbClr val="EFB13C"/>
             </a:solidFill>
@@ -35872,7 +36080,7 @@
             <a:avLst/>
           </a:prstGeom>
           <a:noFill/>
-          <a:ln w="35560">
+          <a:ln w="22860">
             <a:solidFill>
               <a:srgbClr val="EFB13C"/>
             </a:solidFill>
@@ -35895,7 +36103,7 @@
             <a:avLst/>
           </a:prstGeom>
           <a:noFill/>
-          <a:ln w="35560">
+          <a:ln w="22860">
             <a:solidFill>
               <a:srgbClr val="EFB13C"/>
             </a:solidFill>
@@ -35918,7 +36126,7 @@
             <a:avLst/>
           </a:prstGeom>
           <a:noFill/>
-          <a:ln w="35560">
+          <a:ln w="22860">
             <a:solidFill>
               <a:srgbClr val="EFB13C"/>
             </a:solidFill>
@@ -35941,7 +36149,7 @@
             <a:avLst/>
           </a:prstGeom>
           <a:noFill/>
-          <a:ln w="35560">
+          <a:ln w="22860">
             <a:solidFill>
               <a:srgbClr val="EFB13C"/>
             </a:solidFill>
@@ -35964,7 +36172,7 @@
             <a:avLst/>
           </a:prstGeom>
           <a:noFill/>
-          <a:ln w="35560">
+          <a:ln w="22860">
             <a:solidFill>
               <a:srgbClr val="EFB13C"/>
             </a:solidFill>
@@ -35987,7 +36195,7 @@
             <a:avLst/>
           </a:prstGeom>
           <a:noFill/>
-          <a:ln w="35560">
+          <a:ln w="22860">
             <a:solidFill>
               <a:srgbClr val="EFB13C"/>
             </a:solidFill>
@@ -36010,7 +36218,7 @@
             <a:avLst/>
           </a:prstGeom>
           <a:noFill/>
-          <a:ln w="35560">
+          <a:ln w="22860">
             <a:solidFill>
               <a:srgbClr val="EFB13C"/>
             </a:solidFill>
@@ -36033,7 +36241,7 @@
             <a:avLst/>
           </a:prstGeom>
           <a:noFill/>
-          <a:ln w="35560">
+          <a:ln w="22860">
             <a:solidFill>
               <a:srgbClr val="EFB13C"/>
             </a:solidFill>

--- a/docs/ppt/위례_공급가능용량_최종발표_v2.pptx
+++ b/docs/ppt/위례_공급가능용량_최종발표_v2.pptx
@@ -5320,7 +5320,7 @@
         <p:spPr>
           <a:xfrm>
             <a:off x="685800" y="2705100"/>
-            <a:ext cx="10820400" cy="1447800"/>
+            <a:ext cx="10820400" cy="1524000"/>
           </a:xfrm>
           <a:prstGeom prst="rect">
             <a:avLst/>
@@ -5345,7 +5345,7 @@
         <p:spPr>
           <a:xfrm>
             <a:off x="6096000" y="2914650"/>
-            <a:ext cx="0" cy="1028700"/>
+            <a:ext cx="0" cy="1162050"/>
           </a:xfrm>
           <a:prstGeom prst="line">
             <a:avLst/>
@@ -5449,27 +5449,27 @@
         </p:nvSpPr>
         <p:spPr>
           <a:xfrm>
-            <a:off x="914400" y="3067050"/>
-            <a:ext cx="1494282" cy="440055"/>
-          </a:xfrm>
-          <a:prstGeom prst="rect">
-            <a:avLst/>
-          </a:prstGeom>
-          <a:noFill/>
-          <a:ln/>
-        </p:spPr>
-        <p:txBody>
-          <a:bodyPr wrap="square" lIns="0" tIns="0" rIns="0" bIns="0" rtlCol="0" anchor="t"/>
-          <a:lstStyle/>
-          <a:p>
-            <a:pPr algn="l" indent="0" marL="0">
-              <a:lnSpc>
-                <a:spcPts val="3465"/>
-              </a:lnSpc>
-              <a:buNone/>
-            </a:pPr>
-            <a:r>
-              <a:rPr lang="en-US" sz="3300" b="1" dirty="0">
+            <a:off x="914400" y="3028950"/>
+            <a:ext cx="1427226" cy="420053"/>
+          </a:xfrm>
+          <a:prstGeom prst="rect">
+            <a:avLst/>
+          </a:prstGeom>
+          <a:noFill/>
+          <a:ln/>
+        </p:spPr>
+        <p:txBody>
+          <a:bodyPr wrap="square" lIns="0" tIns="0" rIns="0" bIns="0" rtlCol="0" anchor="t"/>
+          <a:lstStyle/>
+          <a:p>
+            <a:pPr algn="l" indent="0" marL="0">
+              <a:lnSpc>
+                <a:spcPts val="3308"/>
+              </a:lnSpc>
+              <a:buNone/>
+            </a:pPr>
+            <a:r>
+              <a:rPr lang="en-US" sz="3150" b="1" dirty="0">
                 <a:solidFill>
                   <a:srgbClr val="EFB13C"/>
                 </a:solidFill>
@@ -5479,7 +5479,7 @@
               </a:rPr>
               <a:t>4 → 1</a:t>
             </a:r>
-            <a:endParaRPr lang="en-US" sz="3300" dirty="0"/>
+            <a:endParaRPr lang="en-US" sz="3150" dirty="0"/>
           </a:p>
         </p:txBody>
       </p:sp>
@@ -5491,7 +5491,7 @@
         </p:nvSpPr>
         <p:spPr>
           <a:xfrm>
-            <a:off x="2465832" y="3276600"/>
+            <a:off x="2398776" y="3228975"/>
             <a:ext cx="1656874" cy="171450"/>
           </a:xfrm>
           <a:prstGeom prst="rect">
@@ -5533,7 +5533,7 @@
         </p:nvSpPr>
         <p:spPr>
           <a:xfrm>
-            <a:off x="914400" y="3695700"/>
+            <a:off x="914400" y="3619500"/>
             <a:ext cx="4953000" cy="480060"/>
           </a:xfrm>
           <a:prstGeom prst="rect">
@@ -5685,27 +5685,27 @@
         </p:nvSpPr>
         <p:spPr>
           <a:xfrm>
-            <a:off x="6324600" y="3067050"/>
-            <a:ext cx="779717" cy="440055"/>
-          </a:xfrm>
-          <a:prstGeom prst="rect">
-            <a:avLst/>
-          </a:prstGeom>
-          <a:noFill/>
-          <a:ln/>
-        </p:spPr>
-        <p:txBody>
-          <a:bodyPr wrap="square" lIns="0" tIns="0" rIns="0" bIns="0" rtlCol="0" anchor="t"/>
-          <a:lstStyle/>
-          <a:p>
-            <a:pPr algn="l" indent="0" marL="0">
-              <a:lnSpc>
-                <a:spcPts val="3465"/>
-              </a:lnSpc>
-              <a:buNone/>
-            </a:pPr>
-            <a:r>
-              <a:rPr lang="en-US" sz="3300" b="1" dirty="0">
+            <a:off x="6324600" y="3028950"/>
+            <a:ext cx="745141" cy="420053"/>
+          </a:xfrm>
+          <a:prstGeom prst="rect">
+            <a:avLst/>
+          </a:prstGeom>
+          <a:noFill/>
+          <a:ln/>
+        </p:spPr>
+        <p:txBody>
+          <a:bodyPr wrap="square" lIns="0" tIns="0" rIns="0" bIns="0" rtlCol="0" anchor="t"/>
+          <a:lstStyle/>
+          <a:p>
+            <a:pPr algn="l" indent="0" marL="0">
+              <a:lnSpc>
+                <a:spcPts val="3308"/>
+              </a:lnSpc>
+              <a:buNone/>
+            </a:pPr>
+            <a:r>
+              <a:rPr lang="en-US" sz="3150" b="1" dirty="0">
                 <a:solidFill>
                   <a:srgbClr val="EFB13C"/>
                 </a:solidFill>
@@ -5715,7 +5715,7 @@
               </a:rPr>
               <a:t>67%</a:t>
             </a:r>
-            <a:endParaRPr lang="en-US" sz="3300" dirty="0"/>
+            <a:endParaRPr lang="en-US" sz="3150" dirty="0"/>
           </a:p>
         </p:txBody>
       </p:sp>
@@ -5727,7 +5727,7 @@
         </p:nvSpPr>
         <p:spPr>
           <a:xfrm>
-            <a:off x="7161467" y="3276600"/>
+            <a:off x="7126891" y="3228975"/>
             <a:ext cx="400050" cy="171450"/>
           </a:xfrm>
           <a:prstGeom prst="rect">
@@ -5769,7 +5769,7 @@
         </p:nvSpPr>
         <p:spPr>
           <a:xfrm>
-            <a:off x="8572500" y="3200400"/>
+            <a:off x="8572500" y="3143250"/>
             <a:ext cx="2705100" cy="185738"/>
           </a:xfrm>
           <a:prstGeom prst="rect">
@@ -5811,44 +5811,44 @@
         </p:nvSpPr>
         <p:spPr>
           <a:xfrm>
-            <a:off x="6324600" y="3695700"/>
-            <a:ext cx="4953000" cy="480060"/>
-          </a:xfrm>
-          <a:prstGeom prst="rect">
-            <a:avLst/>
-          </a:prstGeom>
-          <a:noFill/>
-          <a:ln/>
-        </p:spPr>
-        <p:txBody>
-          <a:bodyPr wrap="square" lIns="0" tIns="0" rIns="0" bIns="0" rtlCol="0" anchor="t"/>
-          <a:lstStyle/>
-          <a:p>
-            <a:pPr algn="l" indent="0" marL="0">
-              <a:lnSpc>
-                <a:spcPts val="1890"/>
-              </a:lnSpc>
-              <a:buNone/>
-            </a:pPr>
-            <a:r>
-              <a:rPr lang="en-US" sz="1125" dirty="0">
-                <a:solidFill>
-                  <a:srgbClr val="CFCBC2"/>
+            <a:off x="6324600" y="3448050"/>
+            <a:ext cx="4953000" cy="198120"/>
+          </a:xfrm>
+          <a:prstGeom prst="rect">
+            <a:avLst/>
+          </a:prstGeom>
+          <a:noFill/>
+          <a:ln/>
+        </p:spPr>
+        <p:txBody>
+          <a:bodyPr wrap="square" lIns="0" tIns="0" rIns="0" bIns="0" rtlCol="0" anchor="t"/>
+          <a:lstStyle/>
+          <a:p>
+            <a:pPr algn="l" indent="0" marL="0">
+              <a:lnSpc>
+                <a:spcPts val="1560"/>
+              </a:lnSpc>
+              <a:buNone/>
+            </a:pPr>
+            <a:r>
+              <a:rPr lang="en-US" sz="1200" b="1" dirty="0">
+                <a:solidFill>
+                  <a:srgbClr val="EFB13C"/>
                 </a:solidFill>
                 <a:latin typeface="Malgun Gothic" pitchFamily="34" charset="0"/>
                 <a:ea typeface="Malgun Gothic" pitchFamily="34" charset="-122"/>
                 <a:cs typeface="Malgun Gothic" pitchFamily="34" charset="-120"/>
               </a:rPr>
-              <a:t>신고값을 못 채운 횟수 </a:t>
-            </a:r>
-            <a:pPr algn="l" indent="0" marL="0">
-              <a:lnSpc>
-                <a:spcPts val="1890"/>
-              </a:lnSpc>
-              <a:buNone/>
-            </a:pPr>
-            <a:r>
-              <a:rPr lang="en-US" sz="1125" b="1" dirty="0">
+              <a:t>낮게 신고해 못 받던 </a:t>
+            </a:r>
+            <a:pPr algn="l" indent="0" marL="0">
+              <a:lnSpc>
+                <a:spcPts val="1560"/>
+              </a:lnSpc>
+              <a:buNone/>
+            </a:pPr>
+            <a:r>
+              <a:rPr lang="en-US" sz="1200" b="1" dirty="0">
                 <a:solidFill>
                   <a:srgbClr val="EFB13C"/>
                 </a:solidFill>
@@ -5856,25 +5856,75 @@
                 <a:ea typeface="Malgun Gothic" pitchFamily="34" charset="-122"/>
                 <a:cs typeface="Malgun Gothic" pitchFamily="34" charset="-120"/>
               </a:rPr>
-              <a:t>15 → 4회</a:t>
-            </a:r>
-            <a:pPr algn="l" indent="0" marL="0">
-              <a:lnSpc>
-                <a:spcPts val="1890"/>
-              </a:lnSpc>
-              <a:buNone/>
-            </a:pPr>
-            <a:r>
-              <a:rPr lang="en-US" sz="1125" dirty="0">
-                <a:solidFill>
-                  <a:srgbClr val="CFCBC2"/>
+              <a:t>용량요금 연 5,759만원 회수</a:t>
+            </a:r>
+            <a:endParaRPr lang="en-US" sz="1200" dirty="0"/>
+          </a:p>
+        </p:txBody>
+      </p:sp>
+      <p:sp>
+        <p:nvSpPr>
+          <p:cNvPr id="26" name="Text 24"/>
+          <p:cNvSpPr txBox="1"/>
+          <p:nvPr/>
+        </p:nvSpPr>
+        <p:spPr>
+          <a:xfrm>
+            <a:off x="6324600" y="3676650"/>
+            <a:ext cx="4953000" cy="120015"/>
+          </a:xfrm>
+          <a:prstGeom prst="rect">
+            <a:avLst/>
+          </a:prstGeom>
+          <a:noFill/>
+          <a:ln/>
+        </p:spPr>
+        <p:txBody>
+          <a:bodyPr wrap="square" lIns="0" tIns="0" rIns="0" bIns="0" rtlCol="0" anchor="t"/>
+          <a:lstStyle/>
+          <a:p>
+            <a:pPr algn="l" indent="0" marL="0">
+              <a:lnSpc>
+                <a:spcPts val="945"/>
+              </a:lnSpc>
+              <a:buNone/>
+            </a:pPr>
+            <a:r>
+              <a:rPr lang="en-US" sz="788" dirty="0">
+                <a:solidFill>
+                  <a:srgbClr val="8A8880"/>
                 </a:solidFill>
                 <a:latin typeface="Malgun Gothic" pitchFamily="34" charset="0"/>
                 <a:ea typeface="Malgun Gothic" pitchFamily="34" charset="-122"/>
                 <a:cs typeface="Malgun Gothic" pitchFamily="34" charset="-120"/>
               </a:rPr>
-              <a:t>   ·   높게 신고한 양 </a:t>
-            </a:r>
+              <a:t>용량요금 기준 · 150원/kW·일 × 입찰일 335일(정비 30일 제외)</a:t>
+            </a:r>
+            <a:endParaRPr lang="en-US" sz="788" dirty="0"/>
+          </a:p>
+        </p:txBody>
+      </p:sp>
+      <p:sp>
+        <p:nvSpPr>
+          <p:cNvPr id="27" name="Text 25"/>
+          <p:cNvSpPr txBox="1"/>
+          <p:nvPr/>
+        </p:nvSpPr>
+        <p:spPr>
+          <a:xfrm>
+            <a:off x="6324600" y="3848100"/>
+            <a:ext cx="4953000" cy="480060"/>
+          </a:xfrm>
+          <a:prstGeom prst="rect">
+            <a:avLst/>
+          </a:prstGeom>
+          <a:noFill/>
+          <a:ln/>
+        </p:spPr>
+        <p:txBody>
+          <a:bodyPr wrap="square" lIns="0" tIns="0" rIns="0" bIns="0" rtlCol="0" anchor="t"/>
+          <a:lstStyle/>
+          <a:p>
             <a:pPr algn="l" indent="0" marL="0">
               <a:lnSpc>
                 <a:spcPts val="1890"/>
@@ -5882,14 +5932,65 @@
               <a:buNone/>
             </a:pPr>
             <a:r>
-              <a:rPr lang="en-US" sz="1125" b="1" dirty="0">
-                <a:solidFill>
-                  <a:srgbClr val="EFB13C"/>
+              <a:rPr lang="en-US" sz="1125" dirty="0">
+                <a:solidFill>
+                  <a:srgbClr val="CFCBC2"/>
                 </a:solidFill>
                 <a:latin typeface="Malgun Gothic" pitchFamily="34" charset="0"/>
                 <a:ea typeface="Malgun Gothic" pitchFamily="34" charset="-122"/>
                 <a:cs typeface="Malgun Gothic" pitchFamily="34" charset="-120"/>
               </a:rPr>
+              <a:t>신고값을 못 채운 횟수 </a:t>
+            </a:r>
+            <a:pPr algn="l" indent="0" marL="0">
+              <a:lnSpc>
+                <a:spcPts val="1890"/>
+              </a:lnSpc>
+              <a:buNone/>
+            </a:pPr>
+            <a:r>
+              <a:rPr lang="en-US" sz="1125" b="1" dirty="0">
+                <a:solidFill>
+                  <a:srgbClr val="EFB13C"/>
+                </a:solidFill>
+                <a:latin typeface="Malgun Gothic" pitchFamily="34" charset="0"/>
+                <a:ea typeface="Malgun Gothic" pitchFamily="34" charset="-122"/>
+                <a:cs typeface="Malgun Gothic" pitchFamily="34" charset="-120"/>
+              </a:rPr>
+              <a:t>15 → 4회</a:t>
+            </a:r>
+            <a:pPr algn="l" indent="0" marL="0">
+              <a:lnSpc>
+                <a:spcPts val="1890"/>
+              </a:lnSpc>
+              <a:buNone/>
+            </a:pPr>
+            <a:r>
+              <a:rPr lang="en-US" sz="1125" dirty="0">
+                <a:solidFill>
+                  <a:srgbClr val="CFCBC2"/>
+                </a:solidFill>
+                <a:latin typeface="Malgun Gothic" pitchFamily="34" charset="0"/>
+                <a:ea typeface="Malgun Gothic" pitchFamily="34" charset="-122"/>
+                <a:cs typeface="Malgun Gothic" pitchFamily="34" charset="-120"/>
+              </a:rPr>
+              <a:t>   ·   높게 신고한 양 </a:t>
+            </a:r>
+            <a:pPr algn="l" indent="0" marL="0">
+              <a:lnSpc>
+                <a:spcPts val="1890"/>
+              </a:lnSpc>
+              <a:buNone/>
+            </a:pPr>
+            <a:r>
+              <a:rPr lang="en-US" sz="1125" b="1" dirty="0">
+                <a:solidFill>
+                  <a:srgbClr val="EFB13C"/>
+                </a:solidFill>
+                <a:latin typeface="Malgun Gothic" pitchFamily="34" charset="0"/>
+                <a:ea typeface="Malgun Gothic" pitchFamily="34" charset="-122"/>
+                <a:cs typeface="Malgun Gothic" pitchFamily="34" charset="-120"/>
+              </a:rPr>
               <a:t>69.5 → 9.3 MW</a:t>
             </a:r>
             <a:endParaRPr lang="en-US" sz="1125" dirty="0"/>
@@ -5898,7 +5999,7 @@
       </p:sp>
       <p:sp>
         <p:nvSpPr>
-          <p:cNvPr id="26" name="Shape 24"/>
+          <p:cNvPr id="28" name="Shape 26"/>
           <p:cNvSpPr/>
           <p:nvPr/>
         </p:nvSpPr>
@@ -5923,7 +6024,7 @@
       </p:sp>
       <p:sp>
         <p:nvSpPr>
-          <p:cNvPr id="27" name="Text 25"/>
+          <p:cNvPr id="29" name="Text 27"/>
           <p:cNvSpPr txBox="1"/>
           <p:nvPr/>
         </p:nvSpPr>
@@ -5965,7 +6066,7 @@
       </p:sp>
       <p:sp>
         <p:nvSpPr>
-          <p:cNvPr id="28" name="Text 26"/>
+          <p:cNvPr id="30" name="Text 28"/>
           <p:cNvSpPr txBox="1"/>
           <p:nvPr/>
         </p:nvSpPr>
@@ -6007,7 +6108,7 @@
       </p:sp>
       <p:sp>
         <p:nvSpPr>
-          <p:cNvPr id="29" name="Shape 27"/>
+          <p:cNvPr id="31" name="Shape 29"/>
           <p:cNvSpPr/>
           <p:nvPr/>
         </p:nvSpPr>
@@ -6030,7 +6131,7 @@
       </p:sp>
       <p:sp>
         <p:nvSpPr>
-          <p:cNvPr id="30" name="Shape 28"/>
+          <p:cNvPr id="32" name="Shape 30"/>
           <p:cNvSpPr/>
           <p:nvPr/>
         </p:nvSpPr>
@@ -6053,7 +6154,7 @@
       </p:sp>
       <p:sp>
         <p:nvSpPr>
-          <p:cNvPr id="31" name="Shape 29"/>
+          <p:cNvPr id="33" name="Shape 31"/>
           <p:cNvSpPr/>
           <p:nvPr/>
         </p:nvSpPr>
@@ -6076,7 +6177,7 @@
       </p:sp>
       <p:sp>
         <p:nvSpPr>
-          <p:cNvPr id="32" name="Text 30"/>
+          <p:cNvPr id="34" name="Text 32"/>
           <p:cNvSpPr txBox="1"/>
           <p:nvPr/>
         </p:nvSpPr>
@@ -6118,7 +6219,7 @@
       </p:sp>
       <p:sp>
         <p:nvSpPr>
-          <p:cNvPr id="33" name="Text 31"/>
+          <p:cNvPr id="35" name="Text 33"/>
           <p:cNvSpPr txBox="1"/>
           <p:nvPr/>
         </p:nvSpPr>
@@ -6160,7 +6261,7 @@
       </p:sp>
       <p:sp>
         <p:nvSpPr>
-          <p:cNvPr id="34" name="Text 32"/>
+          <p:cNvPr id="36" name="Text 34"/>
           <p:cNvSpPr txBox="1"/>
           <p:nvPr/>
         </p:nvSpPr>
@@ -6202,7 +6303,7 @@
       </p:sp>
       <p:sp>
         <p:nvSpPr>
-          <p:cNvPr id="35" name="Shape 33"/>
+          <p:cNvPr id="37" name="Shape 35"/>
           <p:cNvSpPr/>
           <p:nvPr/>
         </p:nvSpPr>
@@ -6222,7 +6323,7 @@
       </p:sp>
       <p:sp>
         <p:nvSpPr>
-          <p:cNvPr id="36" name="Text 34"/>
+          <p:cNvPr id="38" name="Text 36"/>
           <p:cNvSpPr txBox="1"/>
           <p:nvPr/>
         </p:nvSpPr>
@@ -6264,7 +6365,7 @@
       </p:sp>
       <p:sp>
         <p:nvSpPr>
-          <p:cNvPr id="37" name="Text 35"/>
+          <p:cNvPr id="39" name="Text 37"/>
           <p:cNvSpPr txBox="1"/>
           <p:nvPr/>
         </p:nvSpPr>
@@ -6306,7 +6407,7 @@
       </p:sp>
       <p:sp>
         <p:nvSpPr>
-          <p:cNvPr id="38" name="Shape 36"/>
+          <p:cNvPr id="40" name="Shape 38"/>
           <p:cNvSpPr/>
           <p:nvPr/>
         </p:nvSpPr>
@@ -6326,7 +6427,7 @@
       </p:sp>
       <p:sp>
         <p:nvSpPr>
-          <p:cNvPr id="39" name="Text 37"/>
+          <p:cNvPr id="41" name="Text 39"/>
           <p:cNvSpPr txBox="1"/>
           <p:nvPr/>
         </p:nvSpPr>
@@ -6368,7 +6469,7 @@
       </p:sp>
       <p:sp>
         <p:nvSpPr>
-          <p:cNvPr id="40" name="Text 38"/>
+          <p:cNvPr id="42" name="Text 40"/>
           <p:cNvSpPr txBox="1"/>
           <p:nvPr/>
         </p:nvSpPr>
@@ -6410,7 +6511,7 @@
       </p:sp>
       <p:sp>
         <p:nvSpPr>
-          <p:cNvPr id="41" name="Shape 39"/>
+          <p:cNvPr id="43" name="Shape 41"/>
           <p:cNvSpPr/>
           <p:nvPr/>
         </p:nvSpPr>
@@ -6430,7 +6531,7 @@
       </p:sp>
       <p:sp>
         <p:nvSpPr>
-          <p:cNvPr id="42" name="Text 40"/>
+          <p:cNvPr id="44" name="Text 42"/>
           <p:cNvSpPr txBox="1"/>
           <p:nvPr/>
         </p:nvSpPr>
@@ -6472,7 +6573,7 @@
       </p:sp>
       <p:sp>
         <p:nvSpPr>
-          <p:cNvPr id="43" name="Text 41"/>
+          <p:cNvPr id="45" name="Text 43"/>
           <p:cNvSpPr txBox="1"/>
           <p:nvPr/>
         </p:nvSpPr>
@@ -6514,7 +6615,7 @@
       </p:sp>
       <p:sp>
         <p:nvSpPr>
-          <p:cNvPr id="44" name="Shape 42"/>
+          <p:cNvPr id="46" name="Shape 44"/>
           <p:cNvSpPr/>
           <p:nvPr/>
         </p:nvSpPr>
@@ -6534,7 +6635,7 @@
       </p:sp>
       <p:sp>
         <p:nvSpPr>
-          <p:cNvPr id="45" name="Text 43"/>
+          <p:cNvPr id="47" name="Text 45"/>
           <p:cNvSpPr txBox="1"/>
           <p:nvPr/>
         </p:nvSpPr>
@@ -6576,7 +6677,7 @@
       </p:sp>
       <p:sp>
         <p:nvSpPr>
-          <p:cNvPr id="46" name="Text 44"/>
+          <p:cNvPr id="48" name="Text 46"/>
           <p:cNvSpPr txBox="1"/>
           <p:nvPr/>
         </p:nvSpPr>
@@ -6618,7 +6719,7 @@
       </p:sp>
       <p:sp>
         <p:nvSpPr>
-          <p:cNvPr id="47" name="Shape 45"/>
+          <p:cNvPr id="49" name="Shape 47"/>
           <p:cNvSpPr/>
           <p:nvPr/>
         </p:nvSpPr>
@@ -6638,7 +6739,7 @@
       </p:sp>
       <p:sp>
         <p:nvSpPr>
-          <p:cNvPr id="48" name="Text 46"/>
+          <p:cNvPr id="50" name="Text 48"/>
           <p:cNvSpPr txBox="1"/>
           <p:nvPr/>
         </p:nvSpPr>
@@ -6680,7 +6781,7 @@
       </p:sp>
       <p:sp>
         <p:nvSpPr>
-          <p:cNvPr id="49" name="Text 47"/>
+          <p:cNvPr id="51" name="Text 49"/>
           <p:cNvSpPr txBox="1"/>
           <p:nvPr/>
         </p:nvSpPr>
@@ -6722,7 +6823,7 @@
       </p:sp>
       <p:sp>
         <p:nvSpPr>
-          <p:cNvPr id="50" name="Shape 48"/>
+          <p:cNvPr id="52" name="Shape 50"/>
           <p:cNvSpPr/>
           <p:nvPr/>
         </p:nvSpPr>
@@ -6742,7 +6843,7 @@
       </p:sp>
       <p:sp>
         <p:nvSpPr>
-          <p:cNvPr id="51" name="Text 49"/>
+          <p:cNvPr id="53" name="Text 51"/>
           <p:cNvSpPr txBox="1"/>
           <p:nvPr/>
         </p:nvSpPr>
@@ -6784,7 +6885,7 @@
       </p:sp>
       <p:sp>
         <p:nvSpPr>
-          <p:cNvPr id="52" name="Text 50"/>
+          <p:cNvPr id="54" name="Text 52"/>
           <p:cNvSpPr txBox="1"/>
           <p:nvPr/>
         </p:nvSpPr>
@@ -6826,7 +6927,7 @@
       </p:sp>
       <p:sp>
         <p:nvSpPr>
-          <p:cNvPr id="53" name="Shape 51"/>
+          <p:cNvPr id="55" name="Shape 53"/>
           <p:cNvSpPr/>
           <p:nvPr/>
         </p:nvSpPr>
@@ -6846,7 +6947,7 @@
       </p:sp>
       <p:sp>
         <p:nvSpPr>
-          <p:cNvPr id="54" name="Text 52"/>
+          <p:cNvPr id="56" name="Text 54"/>
           <p:cNvSpPr txBox="1"/>
           <p:nvPr/>
         </p:nvSpPr>
@@ -6888,7 +6989,7 @@
       </p:sp>
       <p:sp>
         <p:nvSpPr>
-          <p:cNvPr id="55" name="Text 53"/>
+          <p:cNvPr id="57" name="Text 55"/>
           <p:cNvSpPr txBox="1"/>
           <p:nvPr/>
         </p:nvSpPr>
@@ -6930,7 +7031,7 @@
       </p:sp>
       <p:sp>
         <p:nvSpPr>
-          <p:cNvPr id="56" name="Shape 54"/>
+          <p:cNvPr id="58" name="Shape 56"/>
           <p:cNvSpPr/>
           <p:nvPr/>
         </p:nvSpPr>
@@ -6950,7 +7051,7 @@
       </p:sp>
       <p:sp>
         <p:nvSpPr>
-          <p:cNvPr id="57" name="Text 55"/>
+          <p:cNvPr id="59" name="Text 57"/>
           <p:cNvSpPr txBox="1"/>
           <p:nvPr/>
         </p:nvSpPr>
@@ -6992,7 +7093,7 @@
       </p:sp>
       <p:sp>
         <p:nvSpPr>
-          <p:cNvPr id="58" name="Text 56"/>
+          <p:cNvPr id="60" name="Text 58"/>
           <p:cNvSpPr txBox="1"/>
           <p:nvPr/>
         </p:nvSpPr>
@@ -7034,7 +7135,7 @@
       </p:sp>
       <p:sp>
         <p:nvSpPr>
-          <p:cNvPr id="59" name="Shape 57"/>
+          <p:cNvPr id="61" name="Shape 59"/>
           <p:cNvSpPr/>
           <p:nvPr/>
         </p:nvSpPr>
@@ -7054,7 +7155,7 @@
       </p:sp>
       <p:sp>
         <p:nvSpPr>
-          <p:cNvPr id="60" name="Text 58"/>
+          <p:cNvPr id="62" name="Text 60"/>
           <p:cNvSpPr txBox="1"/>
           <p:nvPr/>
         </p:nvSpPr>
@@ -7096,7 +7197,7 @@
       </p:sp>
       <p:sp>
         <p:nvSpPr>
-          <p:cNvPr id="61" name="Text 59"/>
+          <p:cNvPr id="63" name="Text 61"/>
           <p:cNvSpPr txBox="1"/>
           <p:nvPr/>
         </p:nvSpPr>
@@ -7138,7 +7239,7 @@
       </p:sp>
       <p:sp>
         <p:nvSpPr>
-          <p:cNvPr id="62" name="Shape 60"/>
+          <p:cNvPr id="64" name="Shape 62"/>
           <p:cNvSpPr/>
           <p:nvPr/>
         </p:nvSpPr>
@@ -7161,7 +7262,7 @@
       </p:sp>
       <p:sp>
         <p:nvSpPr>
-          <p:cNvPr id="63" name="Text 61"/>
+          <p:cNvPr id="65" name="Text 63"/>
           <p:cNvSpPr txBox="1"/>
           <p:nvPr/>
         </p:nvSpPr>
@@ -7203,7 +7304,7 @@
       </p:sp>
       <p:sp>
         <p:nvSpPr>
-          <p:cNvPr id="64" name="Text 62"/>
+          <p:cNvPr id="66" name="Text 64"/>
           <p:cNvSpPr txBox="1"/>
           <p:nvPr/>
         </p:nvSpPr>
@@ -7237,7 +7338,7 @@
                 <a:ea typeface="Malgun Gothic" pitchFamily="34" charset="-122"/>
                 <a:cs typeface="Malgun Gothic" pitchFamily="34" charset="-120"/>
               </a:rPr>
-              <a:t>시간도 줄고 숫자도 맞았습니다 — 그리고 </a:t>
+              <a:t>시간도 줄고 숫자도 맞았습니다 — 회수한 </a:t>
             </a:r>
             <a:pPr algn="l" indent="0" marL="0">
               <a:lnSpc>
@@ -7254,7 +7355,7 @@
                 <a:ea typeface="Malgun Gothic" pitchFamily="34" charset="-122"/>
                 <a:cs typeface="Malgun Gothic" pitchFamily="34" charset="-120"/>
               </a:rPr>
-              <a:t>왜 그 숫자인지 설명</a:t>
+              <a:t>용량요금은 연 5,759만원</a:t>
             </a:r>
             <a:pPr algn="l" indent="0" marL="0">
               <a:lnSpc>
@@ -7271,7 +7372,7 @@
                 <a:ea typeface="Malgun Gothic" pitchFamily="34" charset="-122"/>
                 <a:cs typeface="Malgun Gothic" pitchFamily="34" charset="-120"/>
               </a:rPr>
-              <a:t>할 수 있게 됐습니다.</a:t>
+              <a:t> 입니다.</a:t>
             </a:r>
             <a:endParaRPr lang="en-US" sz="1238" dirty="0"/>
           </a:p>
@@ -16319,34 +16420,169 @@
         </p:nvSpPr>
         <p:spPr>
           <a:xfrm>
-            <a:off x="685800" y="5905500"/>
-            <a:ext cx="10820400" cy="136208"/>
-          </a:xfrm>
-          <a:prstGeom prst="rect">
-            <a:avLst/>
-          </a:prstGeom>
-          <a:noFill/>
-          <a:ln/>
-        </p:spPr>
-        <p:txBody>
-          <a:bodyPr wrap="square" lIns="0" tIns="0" rIns="0" bIns="0" rtlCol="0" anchor="t"/>
-          <a:lstStyle/>
-          <a:p>
-            <a:pPr algn="l" indent="0" marL="0">
-              <a:lnSpc>
-                <a:spcPts val="1073"/>
-              </a:lnSpc>
-              <a:buNone/>
-            </a:pPr>
-            <a:r>
-              <a:rPr lang="en-US" sz="825" dirty="0">
-                <a:solidFill>
-                  <a:srgbClr val="8A8880"/>
+            <a:off x="914400" y="5505450"/>
+            <a:ext cx="10363200" cy="179546"/>
+          </a:xfrm>
+          <a:prstGeom prst="rect">
+            <a:avLst/>
+          </a:prstGeom>
+          <a:noFill/>
+          <a:ln/>
+        </p:spPr>
+        <p:txBody>
+          <a:bodyPr wrap="square" lIns="0" tIns="0" rIns="0" bIns="0" rtlCol="0" anchor="t"/>
+          <a:lstStyle/>
+          <a:p>
+            <a:pPr algn="ctr" indent="0" marL="0">
+              <a:lnSpc>
+                <a:spcPts val="1414"/>
+              </a:lnSpc>
+              <a:buNone/>
+            </a:pPr>
+            <a:r>
+              <a:rPr lang="en-US" sz="1088" dirty="0">
+                <a:solidFill>
+                  <a:srgbClr val="CFCBC2"/>
                 </a:solidFill>
                 <a:latin typeface="Malgun Gothic" pitchFamily="34" charset="0"/>
                 <a:ea typeface="Malgun Gothic" pitchFamily="34" charset="-122"/>
                 <a:cs typeface="Malgun Gothic" pitchFamily="34" charset="-120"/>
               </a:rPr>
+              <a:t>낮게 신고해 못 받던 </a:t>
+            </a:r>
+            <a:pPr algn="ctr" indent="0" marL="0">
+              <a:lnSpc>
+                <a:spcPts val="1414"/>
+              </a:lnSpc>
+              <a:buNone/>
+            </a:pPr>
+            <a:r>
+              <a:rPr lang="en-US" sz="1088" b="1" dirty="0">
+                <a:solidFill>
+                  <a:srgbClr val="EFB13C"/>
+                </a:solidFill>
+                <a:latin typeface="Malgun Gothic" pitchFamily="34" charset="0"/>
+                <a:ea typeface="Malgun Gothic" pitchFamily="34" charset="-122"/>
+                <a:cs typeface="Malgun Gothic" pitchFamily="34" charset="-120"/>
+              </a:rPr>
+              <a:t>용량요금</a:t>
+            </a:r>
+            <a:pPr algn="ctr" indent="0" marL="0">
+              <a:lnSpc>
+                <a:spcPts val="1414"/>
+              </a:lnSpc>
+              <a:buNone/>
+            </a:pPr>
+            <a:r>
+              <a:rPr lang="en-US" sz="1088" dirty="0">
+                <a:solidFill>
+                  <a:srgbClr val="CFCBC2"/>
+                </a:solidFill>
+                <a:latin typeface="Malgun Gothic" pitchFamily="34" charset="0"/>
+                <a:ea typeface="Malgun Gothic" pitchFamily="34" charset="-122"/>
+                <a:cs typeface="Malgun Gothic" pitchFamily="34" charset="-120"/>
+              </a:rPr>
+              <a:t>  연 9,702만원  →  3,943만원   ·   회수 </a:t>
+            </a:r>
+            <a:pPr algn="ctr" indent="0" marL="0">
+              <a:lnSpc>
+                <a:spcPts val="1414"/>
+              </a:lnSpc>
+              <a:buNone/>
+            </a:pPr>
+            <a:r>
+              <a:rPr lang="en-US" sz="1088" b="1" dirty="0">
+                <a:solidFill>
+                  <a:srgbClr val="EFB13C"/>
+                </a:solidFill>
+                <a:latin typeface="Malgun Gothic" pitchFamily="34" charset="0"/>
+                <a:ea typeface="Malgun Gothic" pitchFamily="34" charset="-122"/>
+                <a:cs typeface="Malgun Gothic" pitchFamily="34" charset="-120"/>
+              </a:rPr>
+              <a:t>5,759만원/년</a:t>
+            </a:r>
+            <a:endParaRPr lang="en-US" sz="1088" dirty="0"/>
+          </a:p>
+        </p:txBody>
+      </p:sp>
+      <p:sp>
+        <p:nvSpPr>
+          <p:cNvPr id="37" name="Text 35"/>
+          <p:cNvSpPr txBox="1"/>
+          <p:nvPr/>
+        </p:nvSpPr>
+        <p:spPr>
+          <a:xfrm>
+            <a:off x="914400" y="5715000"/>
+            <a:ext cx="10363200" cy="120015"/>
+          </a:xfrm>
+          <a:prstGeom prst="rect">
+            <a:avLst/>
+          </a:prstGeom>
+          <a:noFill/>
+          <a:ln/>
+        </p:spPr>
+        <p:txBody>
+          <a:bodyPr wrap="square" lIns="0" tIns="0" rIns="0" bIns="0" rtlCol="0" anchor="t"/>
+          <a:lstStyle/>
+          <a:p>
+            <a:pPr algn="ctr" indent="0" marL="0">
+              <a:lnSpc>
+                <a:spcPts val="945"/>
+              </a:lnSpc>
+              <a:buNone/>
+            </a:pPr>
+            <a:r>
+              <a:rPr lang="en-US" sz="788" dirty="0">
+                <a:solidFill>
+                  <a:srgbClr val="8A8880"/>
+                </a:solidFill>
+                <a:latin typeface="Malgun Gothic" pitchFamily="34" charset="0"/>
+                <a:ea typeface="Malgun Gothic" pitchFamily="34" charset="-122"/>
+                <a:cs typeface="Malgun Gothic" pitchFamily="34" charset="-120"/>
+              </a:rPr>
+              <a:t>용량요금 기준 · 150원/kW·일 × 입찰일 335일(정비 30일 제외) · 에너지수익 미포함</a:t>
+            </a:r>
+            <a:endParaRPr lang="en-US" sz="788" dirty="0"/>
+          </a:p>
+        </p:txBody>
+      </p:sp>
+      <p:sp>
+        <p:nvSpPr>
+          <p:cNvPr id="38" name="Text 36"/>
+          <p:cNvSpPr txBox="1"/>
+          <p:nvPr/>
+        </p:nvSpPr>
+        <p:spPr>
+          <a:xfrm>
+            <a:off x="685800" y="5905500"/>
+            <a:ext cx="10820400" cy="136208"/>
+          </a:xfrm>
+          <a:prstGeom prst="rect">
+            <a:avLst/>
+          </a:prstGeom>
+          <a:noFill/>
+          <a:ln/>
+        </p:spPr>
+        <p:txBody>
+          <a:bodyPr wrap="square" lIns="0" tIns="0" rIns="0" bIns="0" rtlCol="0" anchor="t"/>
+          <a:lstStyle/>
+          <a:p>
+            <a:pPr algn="l" indent="0" marL="0">
+              <a:lnSpc>
+                <a:spcPts val="1073"/>
+              </a:lnSpc>
+              <a:buNone/>
+            </a:pPr>
+            <a:r>
+              <a:rPr lang="en-US" sz="825" dirty="0">
+                <a:solidFill>
+                  <a:srgbClr val="8A8880"/>
+                </a:solidFill>
+                <a:latin typeface="Malgun Gothic" pitchFamily="34" charset="0"/>
+                <a:ea typeface="Malgun Gothic" pitchFamily="34" charset="-122"/>
+                <a:cs typeface="Malgun Gothic" pitchFamily="34" charset="-120"/>
+              </a:rPr>
               <a:t>※ 누적 40회 실적에 종전 방식과 현재 도구를 각각 적용해 채점한 재현값입니다 (한 회를 가리고 나머지로 예측 · LOOCV 39회, 미달은 ±0.5% 밴드). 실제 신고 이력이 아닙니다.</a:t>
             </a:r>
             <a:endParaRPr lang="en-US" sz="825" dirty="0"/>
@@ -16355,7 +16591,7 @@
       </p:sp>
       <p:sp>
         <p:nvSpPr>
-          <p:cNvPr id="37" name="Shape 35"/>
+          <p:cNvPr id="39" name="Shape 37"/>
           <p:cNvSpPr/>
           <p:nvPr/>
         </p:nvSpPr>
@@ -16378,7 +16614,7 @@
       </p:sp>
       <p:sp>
         <p:nvSpPr>
-          <p:cNvPr id="38" name="Text 36"/>
+          <p:cNvPr id="40" name="Text 38"/>
           <p:cNvSpPr txBox="1"/>
           <p:nvPr/>
         </p:nvSpPr>
@@ -16420,7 +16656,7 @@
       </p:sp>
       <p:sp>
         <p:nvSpPr>
-          <p:cNvPr id="39" name="Text 37"/>
+          <p:cNvPr id="41" name="Text 39"/>
           <p:cNvSpPr txBox="1"/>
           <p:nvPr/>
         </p:nvSpPr>
@@ -20716,7 +20952,7 @@
         </p:nvSpPr>
         <p:spPr>
           <a:xfrm>
-            <a:off x="914400" y="5695950"/>
+            <a:off x="914400" y="5638800"/>
             <a:ext cx="10363200" cy="167164"/>
           </a:xfrm>
           <a:prstGeom prst="rect">
@@ -20778,7 +21014,7 @@
                 <a:ea typeface="Malgun Gothic" pitchFamily="34" charset="-122"/>
                 <a:cs typeface="Malgun Gothic" pitchFamily="34" charset="-120"/>
               </a:rPr>
-              <a:t>   ·   신고값을 못 채운 </a:t>
+              <a:t>  =  용량요금 </a:t>
             </a:r>
             <a:pPr algn="ctr" indent="0" marL="0">
               <a:lnSpc>
@@ -20795,7 +21031,7 @@
                 <a:ea typeface="Malgun Gothic" pitchFamily="34" charset="-122"/>
                 <a:cs typeface="Malgun Gothic" pitchFamily="34" charset="-120"/>
               </a:rPr>
-              <a:t>15회</a:t>
+              <a:t>연 9,702만원</a:t>
             </a:r>
             <a:pPr algn="ctr" indent="0" marL="0">
               <a:lnSpc>
@@ -20812,7 +21048,24 @@
                 <a:ea typeface="Malgun Gothic" pitchFamily="34" charset="-122"/>
                 <a:cs typeface="Malgun Gothic" pitchFamily="34" charset="-120"/>
               </a:rPr>
-              <a:t> (과대 신고 69.5 MW)</a:t>
+              <a:t>   ·   신고값을 못 채운 </a:t>
+            </a:r>
+            <a:pPr algn="ctr" indent="0" marL="0">
+              <a:lnSpc>
+                <a:spcPts val="1316"/>
+              </a:lnSpc>
+              <a:buNone/>
+            </a:pPr>
+            <a:r>
+              <a:rPr lang="en-US" sz="1013" b="1" dirty="0">
+                <a:solidFill>
+                  <a:srgbClr val="EFB13C"/>
+                </a:solidFill>
+                <a:latin typeface="Malgun Gothic" pitchFamily="34" charset="0"/>
+                <a:ea typeface="Malgun Gothic" pitchFamily="34" charset="-122"/>
+                <a:cs typeface="Malgun Gothic" pitchFamily="34" charset="-120"/>
+              </a:rPr>
+              <a:t>15회</a:t>
             </a:r>
             <a:endParaRPr lang="en-US" sz="1013" dirty="0"/>
           </a:p>
@@ -20820,7 +21073,49 @@
       </p:sp>
       <p:sp>
         <p:nvSpPr>
-          <p:cNvPr id="148" name="Shape 146"/>
+          <p:cNvPr id="148" name="Text 146"/>
+          <p:cNvSpPr txBox="1"/>
+          <p:nvPr/>
+        </p:nvSpPr>
+        <p:spPr>
+          <a:xfrm>
+            <a:off x="914400" y="5810250"/>
+            <a:ext cx="10363200" cy="120015"/>
+          </a:xfrm>
+          <a:prstGeom prst="rect">
+            <a:avLst/>
+          </a:prstGeom>
+          <a:noFill/>
+          <a:ln/>
+        </p:spPr>
+        <p:txBody>
+          <a:bodyPr wrap="square" lIns="0" tIns="0" rIns="0" bIns="0" rtlCol="0" anchor="t"/>
+          <a:lstStyle/>
+          <a:p>
+            <a:pPr algn="ctr" indent="0" marL="0">
+              <a:lnSpc>
+                <a:spcPts val="945"/>
+              </a:lnSpc>
+              <a:buNone/>
+            </a:pPr>
+            <a:r>
+              <a:rPr lang="en-US" sz="788" dirty="0">
+                <a:solidFill>
+                  <a:srgbClr val="8A8880"/>
+                </a:solidFill>
+                <a:latin typeface="Malgun Gothic" pitchFamily="34" charset="0"/>
+                <a:ea typeface="Malgun Gothic" pitchFamily="34" charset="-122"/>
+                <a:cs typeface="Malgun Gothic" pitchFamily="34" charset="-120"/>
+              </a:rPr>
+              <a:t>용량요금 기준 · 150원/kW·일 × 입찰일 335일(정비 30일 제외)  ·  높게 신고한 쪽은 정산식 Min() 상 용량요금이 늘지 않아 금액에 넣지 않았습니다</a:t>
+            </a:r>
+            <a:endParaRPr lang="en-US" sz="788" dirty="0"/>
+          </a:p>
+        </p:txBody>
+      </p:sp>
+      <p:sp>
+        <p:nvSpPr>
+          <p:cNvPr id="149" name="Shape 147"/>
           <p:cNvSpPr/>
           <p:nvPr/>
         </p:nvSpPr>
@@ -20843,7 +21138,7 @@
       </p:sp>
       <p:sp>
         <p:nvSpPr>
-          <p:cNvPr id="149" name="Text 147"/>
+          <p:cNvPr id="150" name="Text 148"/>
           <p:cNvSpPr txBox="1"/>
           <p:nvPr/>
         </p:nvSpPr>
@@ -20885,7 +21180,7 @@
       </p:sp>
       <p:sp>
         <p:nvSpPr>
-          <p:cNvPr id="150" name="Text 148"/>
+          <p:cNvPr id="151" name="Text 149"/>
           <p:cNvSpPr txBox="1"/>
           <p:nvPr/>
         </p:nvSpPr>

--- a/docs/ppt/위례_공급가능용량_최종발표_v2.pptx
+++ b/docs/ppt/위례_공급가능용량_최종발표_v2.pptx
@@ -515,7 +515,10 @@
           <a:p>
             <a:r>
               <a:rPr lang="en-US" dirty="0"/>
-              <a:t/>
+              <a:t>[20초]
+"위례사업소 정비기술팀 주현M, 정상우M 입니다.
+ 공급가능용량 산정 자동화와 온도별 보정 모델 개발 결과를 보고드리겠습니다."
+— 표지에서 오래 끌지 않는다. 바로 목차로 넘어간다.</a:t>
             </a:r>
             <a:endParaRPr lang="en-US" dirty="0"/>
           </a:p>
@@ -603,7 +606,18 @@
           <a:p>
             <a:r>
               <a:rPr lang="en-US" dirty="0"/>
-              <a:t/>
+              <a:t>[50초]
+"한 번 만들고 끝이 아닙니다. 회차가 들어올 때마다 다시 채점하고,
+ 1위가 바뀌면 방식까지 다시 고릅니다. 사람이 손으로 정하는 값은 없습니다."
+"의심하는 절차도 도구에 넣었습니다. 세 가지입니다."
+ · 한 회씩 빼 보며 다시 계산해서, 열 번 중 여덟 번 이상 같은 결론이 나와야 믿는다
+ · 우연히 그렇게 보일 확률이 20번에 1번보다 크면 관계가 없다고 본다
+ · 시운전 9회 — 각 회차를 그 앞의 데이터만으로 예측했다 (뒤를 보지 않는다)
+⚠ "실측 전에 예측을 적어 뒀다" 고 말하지 않는다. 사실이 아니다.
+  실제로 한 것은 뒤 회차를 보지 않고 예측한 것(walk-forward)이다.
+  앞으로 실측 전 예측을 남기는 기능은 도구에 이미 있다 — 그건 계획으로 말한다.
+"이 가드를 넣은 이유가 있습니다. 진공도 하나에 세 번 걸렸습니다.
+ 데이터를 골라 뽑으면 없는 관계도 보입니다."</a:t>
             </a:r>
             <a:endParaRPr lang="en-US" dirty="0"/>
           </a:p>
@@ -691,7 +705,22 @@
           <a:p>
             <a:r>
               <a:rPr lang="en-US" dirty="0"/>
-              <a:t/>
+              <a:t>[70초]  ★ 효과. 여기서 금액을 말한다.
+"효과는 두 갈래입니다."
+"첫째, 일 처리입니다. 엑셀 4개를 순서대로 돌리던 일이 날짜·시각 한 번으로
+ 끝납니다. 손으로 옮겨 적던 값 61개가 0개가 됐습니다."
+"둘째, 신고 정확도입니다. 실제와 어긋난 정도가 67% 줄었습니다.
+ 3.90 에서 1.30 MW 입니다.
+ 낮게 신고해 못 받던 용량요금 연 5,759만원 을 회수합니다."
+⚠ 금액을 말할 때 반드시 조건을 붙인다 — "150원/kW·일 × 입찰일 335일(정비 30일 제외) 기준이고,
+  에너지수익은 급전 지시로 정해지므로 넣지 않았습니다."
+"아래는 시운전 9회입니다. 각 회차를 그 앞의 데이터만으로 예측해
+ 실제와 대조했습니다. 평균 편차 −0.0, 평균 오차 1.23 MW,
+ 종전 방식 대비 91% 개선입니다."
+예상 질문 "그 금액 어떻게 나온 건가?"
+→ "낮게 신고한 양이 회당 평균 1.93 MW 에서 0.78 MW 로 줄었고,
+   여기에 150원/kW·일과 입찰일 335일을 곱했습니다.
+   높게 신고한 쪽은 Min 구조상 용량요금이 늘지 않아 넣지 않았습니다."</a:t>
             </a:r>
             <a:endParaRPr lang="en-US" dirty="0"/>
           </a:p>
@@ -779,7 +808,20 @@
           <a:p>
             <a:r>
               <a:rPr lang="en-US" dirty="0"/>
-              <a:t/>
+              <a:t>[50초]
+"앞으로입니다. 공급가능용량 테스트는 계속 합니다.
+ 회차가 들어올 때마다 다시 학습하므로, 데이터가 쌓이는 것 자체가 개선입니다."
+"실제로 그렇게 나왔습니다. 구간별 예측 오차가
+ 2.26 에서 1.19 MW 로 47% 줄었습니다."
+— 정직하게 덧붙인다: "구간마다 오르내림은 있습니다. 어려운 회차가 몰리면
+  올라갑니다. 마지막 구간이 그 경우입니다."
+"전개 순서는 네 단계입니다. 위례 정착 — 테스트 누적과 고도화 —
+ 같은 구조 사업소 한 곳 시범 — 수평 전개."
+"배우는 부분은 설비 종류와 상관이 없습니다. 사업소마다 바꿀 것은
+ 이론식 하나입니다."
+예상 질문 "어느 사업소에 적용할 건가?"
+→ 실명은 아직 확정하지 않았다. "같은 구조의 입찰 사업소" 로 답하고
+   구체적인 대상은 별도 협의로 넘긴다.</a:t>
             </a:r>
             <a:endParaRPr lang="en-US" dirty="0"/>
           </a:p>
@@ -867,7 +909,24 @@
           <a:p>
             <a:r>
               <a:rPr lang="en-US" dirty="0"/>
-              <a:t/>
+              <a:t>[본 발표 40초 + 시연 3~4분]  ★ 여기서 실물을 띄운다
+"도구 화면입니다. 탭 6개입니다.
+ 날짜와 시각을 넣고 실행하면 −20도부터 40도까지 61행 신고값 표가
+ 그대로 나옵니다."
+"왼쪽이 산정 화면이고, 오른쪽이 방금 보신 곡선 비교 화면입니다.
+ 목업이 아니라 실제 화면입니다."
+【시연 순서 — 3~4분】
+ ① 날짜·시각 입력 → 실행
+ ② 61행 신고값 표가 채워지는 것을 보인다
+ ③ [출력곡선 비교] 탭 — 이론값 곡선과 모델 곡선, 실측점 40회
+ ④ [모델 선정] 탭 — 후보 7가지가 도구 안에 있다는 것만 보인다
+ ⑤ [엑셀로 저장]
+【시연 중 강조할 것】
+ · 사람이 손으로 옮겨 적는 칸이 없다
+ · 숫자 옆에 몇 회로 배운 값인지 함께 나온다
+ · 회차를 넣으면 재채점·재선정이 그 자리에서 돌아간다
+⚠ 시연 전에 확인 — 노트북에 최신 버전이 설치돼 있는지, 누적 DB 건수가
+  맞는지(창 아래 '누적 N건'), 프로젝터 해상도에서 표 글자가 읽히는지.</a:t>
             </a:r>
             <a:endParaRPr lang="en-US" dirty="0"/>
           </a:p>
@@ -955,7 +1014,18 @@
           <a:p>
             <a:r>
               <a:rPr lang="en-US" dirty="0"/>
-              <a:t/>
+              <a:t>[20초]
+"감사합니다.
+ 매주 신고하는 숫자가, 이제 40회 실적 위에서 정해집니다."
+— 그림을 한 번 짚는다: "점선이 이론 출력, 실선이 모델이 만든 곡선,
+  점이 실제 테스트 40회입니다."
+— 질문은 자연스럽게 받는다. "질문 받겠습니다" 를 굳이 말하지 않아도 된다.
+【자주 나올 질문 정리】
+ · 금액 근거 → 150원/kW·일 × 입찰일 335일(정비 30일 제외), 낮게 신고한 쪽만, 에너지수익 제외
+ · 데이터 40건으로 되나 → 한 회씩 가려 채점(39회 공통 집합),
+   뒤를 보지 않는 시운전 9회, 그리고 쌓일수록 오차가 줄어드는 학습 곡선
+ · 실제 이력인가 → 아니다. 같은 실적에 두 방식을 적용한 재현값이다
+ · 다른 사업소 → 이론식만 갈아끼우면 된다 (7장 2단 구조)</a:t>
             </a:r>
             <a:endParaRPr lang="en-US" dirty="0"/>
           </a:p>
@@ -1043,7 +1113,10 @@
           <a:p>
             <a:r>
               <a:rPr lang="en-US" dirty="0"/>
-              <a:t/>
+              <a:t>[20초]
+"크게 두 가지입니다. 앞의 세 항목은 '왜 했는가', 뒤의 네 항목은
+ '무엇을 어떻게 바꿨는가' 입니다."
+— 목차를 한 줄씩 읽지 않는다. 흐름만 짚고 넘어간다.</a:t>
             </a:r>
             <a:endParaRPr lang="en-US" dirty="0"/>
           </a:p>
@@ -1131,7 +1204,20 @@
           <a:p>
             <a:r>
               <a:rPr lang="en-US" dirty="0"/>
-              <a:t/>
+              <a:t>[60초]  ★ 여기서 결론을 먼저 말한다
+"먼저 결과부터 말씀드리겠습니다. 두 가지가 바뀌었습니다.
+ 하나는 일 처리입니다. 엑셀 4개를 순서대로 돌리던 일이 날짜·시각 한 번
+ 입력으로 끝납니다.
+ 또 하나는 신고하는 숫자입니다. 세 지표가 같이 좋아졌습니다."
+ · 예측 오차 3.90 → 1.30 MW (67% 감소)
+ · 신고값을 못 채운 횟수 15 → 4회 (73% 감소)
+ · 과대 신고 누계 69.5 → 9.3 MW (87% 감소)
+ · 금액으로는 낮게 신고해 못 받던 용량요금 연 9,702만원 → 3,943만원
+⚠ 반드시 함께 말할 것 — "실제 신고 이력이 아니라, 같은 40회 실적에 두 방식을
+ 각각 적용해 나란히 채점한 재현값입니다." 이 말을 빼면 나중에 반드시 지적받는다.
+예상 질문 "종전 방식이 그렇게 나빴나?"
+→ "종전 방식에 가장 유리한 조건을 줬습니다. 담당자가 쓴 정수가 아니라
+   오차가 가장 작아지는 상수 +2.5 를 썼는데도 이 차이입니다."</a:t>
             </a:r>
             <a:endParaRPr lang="en-US" dirty="0"/>
           </a:p>
@@ -1219,7 +1305,24 @@
           <a:p>
             <a:r>
               <a:rPr lang="en-US" dirty="0"/>
-              <a:t/>
+              <a:t>[70초]  ★ 이 장의 핵심은 '왜 일괄 보정이었나'
+"먼저 종전에 어떻게 했는지 말씀드리겠습니다.
+ 엑셀 4개를 순서대로 돌렸습니다. 테스트 결과를 계산하고, 온도별 출력을
+ 계산하고, 둘의 차이를 구해서, 그 차이 하나를 −20도부터 40도까지
+ 61개 온도에 똑같이 얹었습니다. 그게 일괄 보정입니다."
+"왜 그렇게 했느냐 — 테스트는 그날의 온도 한 점에서만 합니다.
+ 나머지 60개 온도의 차이는 알 방법이 없었습니다. 같은 값을 얹는 것이
+ 그때로서는 가장 안전한 선택이었습니다."
+— 담당자를 탓하는 자리가 아니다. "그때는 최선이었다" 를 분명히 말한다.
+"그런데 실제 능력은 그렇게 평행하게 움직이지 않습니다. 그래서 겨울에는
+ 낮게 신고해 못 팔고(0℃ 에서 5.0 MW),
+ 여름에는 높게 신고해 미달이 납니다(28℃ 에서 5.1 MW).
+ 22도 부근에서 방향이 바뀝니다."
+"낮게 신고한 만큼은 용량요금으로 받지 못합니다. 종전 누계로 연 9,702만원 입니다."
+예상 질문 "높게 신고하면 더 받는 것 아닌가?"
+→ "아닙니다. 정산식이 Min 구조라서 높게 신고해도 용량요금은 실제만큼만
+   나옵니다. 늘어나는 건 미달 위험뿐입니다. 그래서 금액에는 낮게 신고한
+   쪽만 넣었습니다."</a:t>
             </a:r>
             <a:endParaRPr lang="en-US" dirty="0"/>
           </a:p>
@@ -1307,7 +1410,21 @@
           <a:p>
             <a:r>
               <a:rPr lang="en-US" dirty="0"/>
-              <a:t/>
+              <a:t>[60초]
+"실제 데이터입니다. 점 하나가 테스트 한 회이고, 세로축은 보정값 —
+ 실제에서 이론값과 IGV 몫을 뺀 값입니다."
+"흩어져 있는 게 아니라 온도를 따라 줄줄이 내려갑니다. 추울수록 더 더해야
+ 하고 더울수록 빼야 합니다. 회차마다 +13 에서
+ −5 MW 까지 갈립니다."
+— +13 는 평균이 아니라 가장 큰 한 회차 값이다. 화면에도 적어 뒀다.
+"이론값은 제작사 표준 성능 곡선입니다. 우리 설비의 실제 특성과 온도에 따라
+ 어긋나고, 그 차이가 저온에서 플러스, 고온에서 마이너스로 남습니다."
+"아래는 종전에 실제로 적용한 값 16회분입니다. 전부 정수 하나입니다.
+ 7.3도와 25.7도에 똑같이 +5 를 줬습니다. 온도를 안 본 것입니다."
+예상 질문 "왜 저온에서 더 나오나?"
+→ "이론식은 이미 온도·대기압·습도·복수기압을 보정하고 있습니다. 그래도 남는
+   차이라서, 제작사 표준 곡선과 우리 설비 실제 특성의 차이로 보고 있습니다.
+   기전을 단정하지 않았습니다."</a:t>
             </a:r>
             <a:endParaRPr lang="en-US" dirty="0"/>
           </a:p>
@@ -1395,7 +1512,22 @@
           <a:p>
             <a:r>
               <a:rPr lang="en-US" dirty="0"/>
-              <a:t/>
+              <a:t>[70초]  ★ 통계 이야기가 나오는 유일한 장. 천천히.
+"차이가 왜 생기는지 찾았습니다. 그럴듯한 설명 5개를 세워 하나씩 확인했고
+ 4개는 기각했습니다."
+"후보는 넷이었습니다 — 외기온도, 복수기 진공도, 대기압, 상대습도.
+ 그냥 보면 넷이 다 강하게 보입니다. 0.72에서 0.84까지 나옵니다."
+"그런데 이 넷은 서로 온도에 묶여 있습니다. 진공도와 온도의 관련성이
+ +1.0 입니다. 사실상 온도의 함수입니다."
+"그래서 온도로 설명되는 몫을 먼저 걷어내고 다시 쟀습니다. 진공도와 대기압은
+ 사라졌습니다. 습도만 −0.4 로 남았는데, 온도를 직선이 아니라
+ 곡선으로 걷어내니 그것도 임계 0.31 아래로 내려갔습니다."
+— 여기가 이 장의 요점이다. "직선으로 빼면 남고 곡선으로 빼면 사라진다"
+  = 온도와의 관계가 직선이 아니라는 증거이고, 다음 장의 근거가 된다.
+예상 질문 "10월에 복수기 세척하면 달라지지 않나?"
+→ "세척은 하는 게 맞습니다. 다만 '진공도로 우리 모델의 오차를 더 설명할 수
+   있느냐' 는 세 번 확인해 세 번 다 아니었습니다. 세척 후 데이터가 쌓이면
+   곡선이 그걸 반영해 다시 학습합니다."</a:t>
             </a:r>
             <a:endParaRPr lang="en-US" dirty="0"/>
           </a:p>
@@ -1483,7 +1615,17 @@
           <a:p>
             <a:r>
               <a:rPr lang="en-US" dirty="0"/>
-              <a:t/>
+              <a:t>[50초]
+"고치는 방법은 구조를 둘로 나누는 것이었습니다."
+"1층은 손대지 않습니다. 제작사 성능 곡선과 사내 검증을 거친 이론식입니다.
+ 데이터가 쌓여도 바뀌지 않습니다."
+"2층만 데이터가 배웁니다. 배우는 것은 이론값과 실제의 차이 하나입니다.
+ 최종 신고값은 이론값 더하기 온도별 보정값입니다."
+"이렇게 나눈 덕분에 세 가지가 됩니다 — 검증된 이론을 흔들지 않고,
+ 틀렸을 때 어디가 틀렸는지 갈리고, 다른 사업소로 옮길 수 있습니다."
+— 진공도가 1층에 들어가 있는 것을 짚어 준다. 6장과 모순처럼 들릴 수 있다.
+  "진공도는 이론식이 이미 반영합니다. 6장에서 기각한 것은 '그러고도 남는
+   차이' 를 진공도로 더 설명할 수 있느냐였습니다."</a:t>
             </a:r>
             <a:endParaRPr lang="en-US" dirty="0"/>
           </a:p>
@@ -1571,7 +1713,20 @@
           <a:p>
             <a:r>
               <a:rPr lang="en-US" dirty="0"/>
-              <a:t/>
+              <a:t>[60초]
+"그 곡선을 어떻게 그렸는지입니다. 눈대중으로 고르지 않았습니다."
+"한 회를 가리고 나머지로 그 회를 맞혀보는 방식으로 채점했습니다.
+ 방식 7가지를 같은 자리에서 겨뤘습니다."
+"1위는 GP · RBF (제곱지수) 입니다. 평균 오차 1.301, 큰 오차 1.678,
+ 설명력 0.854 — 세 지표 모두 1위입니다.
+ 종전 방식은 평균 오차 3.90 였습니다."
+— 용어는 화면 아래 한 줄에 풀어 뒀다. MAE 평균 오차, RMSE 크게 틀린 경우에
+  벌점을 더 준 오차, R² 설명력, 커널은 점 사이를 어떤 모양으로 이을지 정하는 규칙.
+"오른쪽은 커널을 바꿨을 때 곡선이 어떻게 갈리는지입니다. 눈으로는 고를 수
+ 없어서 위 표로 채점했습니다."
+예상 질문 "왜 하필 이 방식인가?"
+→ "저희가 고른 게 아니라 채점 결과입니다. 회차가 쌓여 1위가 바뀌면
+   도구가 알아서 교체합니다."</a:t>
             </a:r>
             <a:endParaRPr lang="en-US" dirty="0"/>
           </a:p>
@@ -1659,7 +1814,15 @@
           <a:p>
             <a:r>
               <a:rPr lang="en-US" dirty="0"/>
-              <a:t/>
+              <a:t>[55초]
+"그래서 나온 곡선입니다. 위는 출력 곡선, 아래는 그 차이만 확대한 것입니다."
+"위에서는 두 곡선이 거의 붙어 보입니다. 출력이 온도에 따라 100 MW 넘게
+ 움직이니까 몇 MW 차이는 묻힙니다."
+"아래가 그 차이만 확대한 것입니다. 이론 출력보다 0도는 7.5 MW 더,
+ 28도는 2.7 MW 덜 나왔습니다.
+ 종전에는 이 차이를 온도 구분 없이 +2.5 하나로 덮었습니다."
+"점은 실제 테스트 40회입니다. 곡선이 그 점들을 따라갑니다."
+— 이 그림이 Tool 화면에 그대로 있다는 것을 말해 둔다. 13장에서 다시 나온다.</a:t>
             </a:r>
             <a:endParaRPr lang="en-US" dirty="0"/>
           </a:p>

--- a/docs/ppt/위례_공급가능용량_최종발표_v2.pptx
+++ b/docs/ppt/위례_공급가능용량_최종발표_v2.pptx
@@ -1512,22 +1512,39 @@
           <a:p>
             <a:r>
               <a:rPr lang="en-US" dirty="0"/>
-              <a:t>[70초]  ★ 통계 이야기가 나오는 유일한 장. 천천히.
-"차이가 왜 생기는지 찾았습니다. 그럴듯한 설명 5개를 세워 하나씩 확인했고
- 4개는 기각했습니다."
-"후보는 넷이었습니다 — 외기온도, 복수기 진공도, 대기압, 상대습도.
- 그냥 보면 넷이 다 강하게 보입니다. 0.72에서 0.84까지 나옵니다."
-"그런데 이 넷은 서로 온도에 묶여 있습니다. 진공도와 온도의 관련성이
- +1.0 입니다. 사실상 온도의 함수입니다."
-"그래서 온도로 설명되는 몫을 먼저 걷어내고 다시 쟀습니다. 진공도와 대기압은
- 사라졌습니다. 습도만 −0.4 로 남았는데, 온도를 직선이 아니라
- 곡선으로 걷어내니 그것도 임계 0.31 아래로 내려갔습니다."
-— 여기가 이 장의 요점이다. "직선으로 빼면 남고 곡선으로 빼면 사라진다"
-  = 온도와의 관계가 직선이 아니라는 증거이고, 다음 장의 근거가 된다.
+              <a:t>[70초]  ★ 표 한 장으로 끝내는 장. 숫자를 다 읽지 말고 오른쪽 '판정' 열만 짚는다.
+"차이가 왜 생기는지, 그리고 무엇을 보고 예측할지를 정한 과정입니다."
+"먼저 보정값에 영향을 줄 수 있는 환경변수를 후보로 세웠습니다 —
+ 외기 온도, 복수기 진공도, 대기압, 상대습도 네 개입니다."
+"그다음 질문은 하나입니다. '외기 온도 외에 다른 변수를 더 넣으면
+ 예측이 실제로 좋아지는가.' 같은 모델, 같은 조건에서 변수 조합만
+ 바꿔 39회를 똑같이 채점했습니다."
+"결과는 표와 같습니다. 외기 온도 단독이 RMSE 1.68,
+ R² 0.854, AIC 155 — 세 지표에서 1위입니다.
+ 무엇을 더해도 나아지지 않았습니다."
+"그래서 외기 온도를 최종 입력 변수로 선정했습니다."
+— 표의 숫자를 한 줄씩 읽지 않는다. 테두리 친 맨 윗줄과 오른쪽 '개선 없음'
+  네 개만 손으로 짚으면 충분하다. 4~5초 멈춰서 보게 두는 편이 낫다.
+⚠ MAE 열만 「+상대습도」가 1.29 로
+  온도 단독 1.30 보다 낮다. 지적받기 전에 먼저 말한다:
+  "MAE 하나는 상대습도를 넣은 쪽이 0.01 낮습니다.
+   다만 회차별로 짝지어 재면 그 차이가 ±0.08 이라
+   우연과 갈리지 않습니다. 나머지 세 지표는 모두 온도 단독이 좋습니다."
+⚠ '유의하지 않다' 를 '차이가 0 이다' 로 말하지 않는다. 정확히는
+  "이 데이터로는 구분되지 않는다" 다.
+예상 질문 "변수를 억지로 섞어서 나빠진 것 아닌가?"
+→ "그 반론을 막으려고 변수마다 길이척도를 따로 뒀습니다. 필요 없으면 모델이
+   스스로 버릴 수 있는 구조인데, 추가 변수는 모두 '영향 없음' 쪽으로
+   붙었습니다. 즉 나빠진 게 아니라 쓸 정보가 없었습니다."
+예상 질문 "AIC 가 뭔가?"
+→ "적합도와 복잡도를 함께 보는 지표입니다. 변수를 늘리면 벌점을 받습니다.
+   낮을수록 좋고, 값 자체보다 행 사이의 차이를 봅니다."
 예상 질문 "10월에 복수기 세척하면 달라지지 않나?"
-→ "세척은 하는 게 맞습니다. 다만 '진공도로 우리 모델의 오차를 더 설명할 수
-   있느냐' 는 세 번 확인해 세 번 다 아니었습니다. 세척 후 데이터가 쌓이면
-   곡선이 그걸 반영해 다시 학습합니다."</a:t>
+→ "세척은 하는 게 맞습니다. 다만 '진공도를 넣으면 예측이 좋아지느냐' 는
+   세 번 다르게 확인해 세 번 다 아니었습니다. 온도를 걷어내고 재면
+   진공도의 관련성이 −0.14 로
+   임계 0.312 아래입니다.
+   세척 후 데이터가 쌓이면 곡선이 그걸 반영해 다시 학습합니다."</a:t>
             </a:r>
             <a:endParaRPr lang="en-US" dirty="0"/>
           </a:p>
@@ -25503,7 +25520,7 @@
                 <a:ea typeface="Malgun Gothic" pitchFamily="34" charset="-122"/>
                 <a:cs typeface="Malgun Gothic" pitchFamily="34" charset="-120"/>
               </a:rPr>
-              <a:t>원인처럼 보이는 것이 넷이었는데,</a:t>
+              <a:t>변수를 더 넣으면 좋아질까 —</a:t>
             </a:r>
             <a:endParaRPr lang="en-US" sz="2775" dirty="0"/>
           </a:p>
@@ -25517,13 +25534,13 @@
             <a:r>
               <a:rPr lang="en-US" sz="2775" b="1" dirty="0">
                 <a:solidFill>
-                  <a:srgbClr val="EAE7E0"/>
+                  <a:srgbClr val="EFB13C"/>
                 </a:solidFill>
                 <a:latin typeface="Malgun Gothic" pitchFamily="34" charset="0"/>
                 <a:ea typeface="Malgun Gothic" pitchFamily="34" charset="-122"/>
                 <a:cs typeface="Malgun Gothic" pitchFamily="34" charset="-120"/>
               </a:rPr>
-              <a:t>온도를 걷어내니 </a:t>
+              <a:t>같은 모델에 조합만 바꿔</a:t>
             </a:r>
             <a:pPr algn="l" indent="0" marL="0">
               <a:lnSpc>
@@ -25534,13 +25551,13 @@
             <a:r>
               <a:rPr lang="en-US" sz="2775" b="1" dirty="0">
                 <a:solidFill>
-                  <a:srgbClr val="EFB13C"/>
+                  <a:srgbClr val="EAE7E0"/>
                 </a:solidFill>
                 <a:latin typeface="Malgun Gothic" pitchFamily="34" charset="0"/>
                 <a:ea typeface="Malgun Gothic" pitchFamily="34" charset="-122"/>
                 <a:cs typeface="Malgun Gothic" pitchFamily="34" charset="-120"/>
               </a:rPr>
-              <a:t>하나만 남았습니다</a:t>
+              <a:t> 확인했습니다</a:t>
             </a:r>
             <a:endParaRPr lang="en-US" sz="2775" dirty="0"/>
           </a:p>
@@ -25555,7 +25572,7 @@
         <p:spPr>
           <a:xfrm>
             <a:off x="685800" y="2000250"/>
-            <a:ext cx="10287000" cy="284607"/>
+            <a:ext cx="10287000" cy="569214"/>
           </a:xfrm>
           <a:prstGeom prst="rect">
             <a:avLst/>
@@ -25582,7 +25599,7 @@
                 <a:ea typeface="Malgun Gothic" pitchFamily="34" charset="-122"/>
                 <a:cs typeface="Malgun Gothic" pitchFamily="34" charset="-120"/>
               </a:rPr>
-              <a:t>그럴듯한 설명 5개를 세워 하나씩 확인했고 </a:t>
+              <a:t>보정값에 영향을 줄 수 있는 환경변수로 </a:t>
             </a:r>
             <a:pPr algn="l" indent="0" marL="0">
               <a:lnSpc>
@@ -25599,7 +25616,7 @@
                 <a:ea typeface="Malgun Gothic" pitchFamily="34" charset="-122"/>
                 <a:cs typeface="Malgun Gothic" pitchFamily="34" charset="-120"/>
               </a:rPr>
-              <a:t>4개는 기각</a:t>
+              <a:t>외기 온도 · 복수기 진공도 · 대기압 · 상대습도</a:t>
             </a:r>
             <a:pPr algn="l" indent="0" marL="0">
               <a:lnSpc>
@@ -25616,7 +25633,7 @@
                 <a:ea typeface="Malgun Gothic" pitchFamily="34" charset="-122"/>
                 <a:cs typeface="Malgun Gothic" pitchFamily="34" charset="-120"/>
               </a:rPr>
-              <a:t>했습니다. 후보들이 서로 </a:t>
+              <a:t> 4개를 후보로 세우고, 온도 외의 변수를 더했을 때 예측이 </a:t>
             </a:r>
             <a:pPr algn="l" indent="0" marL="0">
               <a:lnSpc>
@@ -25633,7 +25650,7 @@
                 <a:ea typeface="Malgun Gothic" pitchFamily="34" charset="-122"/>
                 <a:cs typeface="Malgun Gothic" pitchFamily="34" charset="-120"/>
               </a:rPr>
-              <a:t>온도에 묶여</a:t>
+              <a:t>실제로</a:t>
             </a:r>
             <a:pPr algn="l" indent="0" marL="0">
               <a:lnSpc>
@@ -25650,7 +25667,7 @@
                 <a:ea typeface="Malgun Gothic" pitchFamily="34" charset="-122"/>
                 <a:cs typeface="Malgun Gothic" pitchFamily="34" charset="-120"/>
               </a:rPr>
-              <a:t> 있었기 때문입니다.</a:t>
+              <a:t> 좋아지는지 확인했습니다.</a:t>
             </a:r>
             <a:endParaRPr lang="en-US" sz="1350" dirty="0"/>
           </a:p>
@@ -25665,7 +25682,7 @@
         <p:spPr>
           <a:xfrm>
             <a:off x="685800" y="2705100"/>
-            <a:ext cx="10820400" cy="1943100"/>
+            <a:ext cx="10820400" cy="1962150"/>
           </a:xfrm>
           <a:prstGeom prst="rect">
             <a:avLst/>
@@ -25689,7 +25706,7 @@
         </p:nvSpPr>
         <p:spPr>
           <a:xfrm>
-            <a:off x="914400" y="2800350"/>
+            <a:off x="914400" y="2819400"/>
             <a:ext cx="5905500" cy="125016"/>
           </a:xfrm>
           <a:prstGeom prst="rect">
@@ -25717,7 +25734,41 @@
                 <a:ea typeface="Consolas" pitchFamily="34" charset="-122"/>
                 <a:cs typeface="Consolas" pitchFamily="34" charset="-120"/>
               </a:rPr>
-              <a:t>보정값과의 관련성  ·  상관계수 r  ·  0 에 가까우면 관계 없음</a:t>
+              <a:t>같은 모델(GP · RBF 커널) · 같은 조건에서 </a:t>
+            </a:r>
+            <a:pPr algn="l" indent="0" marL="0">
+              <a:lnSpc>
+                <a:spcPts val="984"/>
+              </a:lnSpc>
+              <a:buNone/>
+            </a:pPr>
+            <a:r>
+              <a:rPr lang="en-US" sz="788" b="1" spc="150" kern="0" dirty="0">
+                <a:solidFill>
+                  <a:srgbClr val="EFB13C"/>
+                </a:solidFill>
+                <a:latin typeface="Consolas" pitchFamily="34" charset="0"/>
+                <a:ea typeface="Consolas" pitchFamily="34" charset="-122"/>
+                <a:cs typeface="Consolas" pitchFamily="34" charset="-120"/>
+              </a:rPr>
+              <a:t>변수 조합만</a:t>
+            </a:r>
+            <a:pPr algn="l" indent="0" marL="0">
+              <a:lnSpc>
+                <a:spcPts val="984"/>
+              </a:lnSpc>
+              <a:buNone/>
+            </a:pPr>
+            <a:r>
+              <a:rPr lang="en-US" sz="788" b="1" spc="150" kern="0" dirty="0">
+                <a:solidFill>
+                  <a:srgbClr val="8A8880"/>
+                </a:solidFill>
+                <a:latin typeface="Consolas" pitchFamily="34" charset="0"/>
+                <a:ea typeface="Consolas" pitchFamily="34" charset="-122"/>
+                <a:cs typeface="Consolas" pitchFamily="34" charset="-120"/>
+              </a:rPr>
+              <a:t> 바꿔 채점  ·  공통 39회</a:t>
             </a:r>
             <a:endParaRPr lang="en-US" sz="788" dirty="0"/>
           </a:p>
@@ -25731,8 +25782,8 @@
         </p:nvSpPr>
         <p:spPr>
           <a:xfrm>
-            <a:off x="7239000" y="2781300"/>
-            <a:ext cx="4038600" cy="131445"/>
+            <a:off x="8477250" y="2800350"/>
+            <a:ext cx="2800350" cy="131445"/>
           </a:xfrm>
           <a:prstGeom prst="rect">
             <a:avLst/>
@@ -25753,13 +25804,13 @@
             <a:r>
               <a:rPr lang="en-US" sz="863" dirty="0">
                 <a:solidFill>
-                  <a:srgbClr val="FF4D63"/>
+                  <a:srgbClr val="A9A79F"/>
                 </a:solidFill>
                 <a:latin typeface="Malgun Gothic" pitchFamily="34" charset="0"/>
                 <a:ea typeface="Malgun Gothic" pitchFamily="34" charset="-122"/>
                 <a:cs typeface="Malgun Gothic" pitchFamily="34" charset="-120"/>
               </a:rPr>
-              <a:t>임계 ±0.31 — 이 선을 넘지 못하면 우연으로 봅니다 (n=40)</a:t>
+              <a:t>작을수록 좋음 · R² 만 1 에 가까울수록</a:t>
             </a:r>
             <a:endParaRPr lang="en-US" sz="863" dirty="0"/>
           </a:p>
@@ -25767,23 +25818,45 @@
       </p:sp>
       <p:sp>
         <p:nvSpPr>
-          <p:cNvPr id="16" name="Shape 14"/>
-          <p:cNvSpPr/>
+          <p:cNvPr id="16" name="Text 14"/>
+          <p:cNvSpPr txBox="1"/>
           <p:nvPr/>
         </p:nvSpPr>
         <p:spPr>
           <a:xfrm>
             <a:off x="914400" y="3048000"/>
-            <a:ext cx="171450" cy="76200"/>
-          </a:xfrm>
-          <a:prstGeom prst="rect">
-            <a:avLst/>
-          </a:prstGeom>
-          <a:solidFill>
-            <a:srgbClr val="718BA6"/>
-          </a:solidFill>
-          <a:ln/>
-        </p:spPr>
+            <a:ext cx="2514600" cy="125016"/>
+          </a:xfrm>
+          <a:prstGeom prst="rect">
+            <a:avLst/>
+          </a:prstGeom>
+          <a:noFill/>
+          <a:ln/>
+        </p:spPr>
+        <p:txBody>
+          <a:bodyPr wrap="square" lIns="0" tIns="0" rIns="0" bIns="0" rtlCol="0" anchor="t"/>
+          <a:lstStyle/>
+          <a:p>
+            <a:pPr algn="l" indent="0" marL="0">
+              <a:lnSpc>
+                <a:spcPts val="984"/>
+              </a:lnSpc>
+              <a:buNone/>
+            </a:pPr>
+            <a:r>
+              <a:rPr lang="en-US" sz="788" b="1" spc="150" kern="0" dirty="0">
+                <a:solidFill>
+                  <a:srgbClr val="8A8880"/>
+                </a:solidFill>
+                <a:latin typeface="Consolas" pitchFamily="34" charset="0"/>
+                <a:ea typeface="Consolas" pitchFamily="34" charset="-122"/>
+                <a:cs typeface="Consolas" pitchFamily="34" charset="-120"/>
+              </a:rPr>
+              <a:t>모델  ·  입력 변수 조합</a:t>
+            </a:r>
+            <a:endParaRPr lang="en-US" sz="788" dirty="0"/>
+          </a:p>
+        </p:txBody>
       </p:sp>
       <p:sp>
         <p:nvSpPr>
@@ -25793,59 +25866,81 @@
         </p:nvSpPr>
         <p:spPr>
           <a:xfrm>
-            <a:off x="1143000" y="2990850"/>
-            <a:ext cx="1428750" cy="137160"/>
-          </a:xfrm>
-          <a:prstGeom prst="rect">
-            <a:avLst/>
-          </a:prstGeom>
-          <a:noFill/>
-          <a:ln/>
-        </p:spPr>
-        <p:txBody>
-          <a:bodyPr wrap="square" lIns="0" tIns="0" rIns="0" bIns="0" rtlCol="0" anchor="t"/>
-          <a:lstStyle/>
-          <a:p>
-            <a:pPr algn="l" indent="0" marL="0">
-              <a:lnSpc>
-                <a:spcPts val="1080"/>
-              </a:lnSpc>
-              <a:buNone/>
-            </a:pPr>
-            <a:r>
-              <a:rPr lang="en-US" sz="900" dirty="0">
-                <a:solidFill>
-                  <a:srgbClr val="718BA6"/>
-                </a:solidFill>
-                <a:latin typeface="Malgun Gothic" pitchFamily="34" charset="0"/>
-                <a:ea typeface="Malgun Gothic" pitchFamily="34" charset="-122"/>
-                <a:cs typeface="Malgun Gothic" pitchFamily="34" charset="-120"/>
-              </a:rPr>
-              <a:t>① 그냥 봤을 때</a:t>
-            </a:r>
-            <a:endParaRPr lang="en-US" sz="900" dirty="0"/>
-          </a:p>
-        </p:txBody>
-      </p:sp>
-      <p:sp>
-        <p:nvSpPr>
-          <p:cNvPr id="18" name="Shape 16"/>
-          <p:cNvSpPr/>
-          <p:nvPr/>
-        </p:nvSpPr>
-        <p:spPr>
-          <a:xfrm>
-            <a:off x="2724150" y="3048000"/>
-            <a:ext cx="171450" cy="76200"/>
-          </a:xfrm>
-          <a:prstGeom prst="rect">
-            <a:avLst/>
-          </a:prstGeom>
-          <a:solidFill>
-            <a:srgbClr val="55708A"/>
-          </a:solidFill>
-          <a:ln/>
-        </p:spPr>
+            <a:off x="3714750" y="3048000"/>
+            <a:ext cx="762000" cy="125016"/>
+          </a:xfrm>
+          <a:prstGeom prst="rect">
+            <a:avLst/>
+          </a:prstGeom>
+          <a:noFill/>
+          <a:ln/>
+        </p:spPr>
+        <p:txBody>
+          <a:bodyPr wrap="square" lIns="0" tIns="0" rIns="0" bIns="0" rtlCol="0" anchor="t"/>
+          <a:lstStyle/>
+          <a:p>
+            <a:pPr algn="r" indent="0" marL="0">
+              <a:lnSpc>
+                <a:spcPts val="984"/>
+              </a:lnSpc>
+              <a:buNone/>
+            </a:pPr>
+            <a:r>
+              <a:rPr lang="en-US" sz="788" b="1" spc="150" kern="0" dirty="0">
+                <a:solidFill>
+                  <a:srgbClr val="8A8880"/>
+                </a:solidFill>
+                <a:latin typeface="Consolas" pitchFamily="34" charset="0"/>
+                <a:ea typeface="Consolas" pitchFamily="34" charset="-122"/>
+                <a:cs typeface="Consolas" pitchFamily="34" charset="-120"/>
+              </a:rPr>
+              <a:t>RMSE</a:t>
+            </a:r>
+            <a:endParaRPr lang="en-US" sz="788" dirty="0"/>
+          </a:p>
+        </p:txBody>
+      </p:sp>
+      <p:sp>
+        <p:nvSpPr>
+          <p:cNvPr id="18" name="Text 16"/>
+          <p:cNvSpPr txBox="1"/>
+          <p:nvPr/>
+        </p:nvSpPr>
+        <p:spPr>
+          <a:xfrm>
+            <a:off x="4857750" y="3048000"/>
+            <a:ext cx="762000" cy="125016"/>
+          </a:xfrm>
+          <a:prstGeom prst="rect">
+            <a:avLst/>
+          </a:prstGeom>
+          <a:noFill/>
+          <a:ln/>
+        </p:spPr>
+        <p:txBody>
+          <a:bodyPr wrap="square" lIns="0" tIns="0" rIns="0" bIns="0" rtlCol="0" anchor="t"/>
+          <a:lstStyle/>
+          <a:p>
+            <a:pPr algn="r" indent="0" marL="0">
+              <a:lnSpc>
+                <a:spcPts val="984"/>
+              </a:lnSpc>
+              <a:buNone/>
+            </a:pPr>
+            <a:r>
+              <a:rPr lang="en-US" sz="788" b="1" spc="150" kern="0" dirty="0">
+                <a:solidFill>
+                  <a:srgbClr val="8A8880"/>
+                </a:solidFill>
+                <a:latin typeface="Consolas" pitchFamily="34" charset="0"/>
+                <a:ea typeface="Consolas" pitchFamily="34" charset="-122"/>
+                <a:cs typeface="Consolas" pitchFamily="34" charset="-120"/>
+              </a:rPr>
+              <a:t>MAE</a:t>
+            </a:r>
+            <a:endParaRPr lang="en-US" sz="788" dirty="0"/>
+          </a:p>
+        </p:txBody>
       </p:sp>
       <p:sp>
         <p:nvSpPr>
@@ -25855,37 +25950,37 @@
         </p:nvSpPr>
         <p:spPr>
           <a:xfrm>
-            <a:off x="2952750" y="2990850"/>
-            <a:ext cx="2000250" cy="137160"/>
-          </a:xfrm>
-          <a:prstGeom prst="rect">
-            <a:avLst/>
-          </a:prstGeom>
-          <a:noFill/>
-          <a:ln/>
-        </p:spPr>
-        <p:txBody>
-          <a:bodyPr wrap="square" lIns="0" tIns="0" rIns="0" bIns="0" rtlCol="0" anchor="t"/>
-          <a:lstStyle/>
-          <a:p>
-            <a:pPr algn="l" indent="0" marL="0">
-              <a:lnSpc>
-                <a:spcPts val="1080"/>
-              </a:lnSpc>
-              <a:buNone/>
-            </a:pPr>
-            <a:r>
-              <a:rPr lang="en-US" sz="900" dirty="0">
-                <a:solidFill>
-                  <a:srgbClr val="55708A"/>
-                </a:solidFill>
-                <a:latin typeface="Malgun Gothic" pitchFamily="34" charset="0"/>
-                <a:ea typeface="Malgun Gothic" pitchFamily="34" charset="-122"/>
-                <a:cs typeface="Malgun Gothic" pitchFamily="34" charset="-120"/>
-              </a:rPr>
-              <a:t>② 온도를 직선으로 뺀 뒤</a:t>
-            </a:r>
-            <a:endParaRPr lang="en-US" sz="900" dirty="0"/>
+            <a:off x="6019800" y="3048000"/>
+            <a:ext cx="762000" cy="125016"/>
+          </a:xfrm>
+          <a:prstGeom prst="rect">
+            <a:avLst/>
+          </a:prstGeom>
+          <a:noFill/>
+          <a:ln/>
+        </p:spPr>
+        <p:txBody>
+          <a:bodyPr wrap="square" lIns="0" tIns="0" rIns="0" bIns="0" rtlCol="0" anchor="t"/>
+          <a:lstStyle/>
+          <a:p>
+            <a:pPr algn="r" indent="0" marL="0">
+              <a:lnSpc>
+                <a:spcPts val="984"/>
+              </a:lnSpc>
+              <a:buNone/>
+            </a:pPr>
+            <a:r>
+              <a:rPr lang="en-US" sz="788" b="1" spc="150" kern="0" dirty="0">
+                <a:solidFill>
+                  <a:srgbClr val="8A8880"/>
+                </a:solidFill>
+                <a:latin typeface="Consolas" pitchFamily="34" charset="0"/>
+                <a:ea typeface="Consolas" pitchFamily="34" charset="-122"/>
+                <a:cs typeface="Consolas" pitchFamily="34" charset="-120"/>
+              </a:rPr>
+              <a:t>R²</a:t>
+            </a:r>
+            <a:endParaRPr lang="en-US" sz="788" dirty="0"/>
           </a:p>
         </p:txBody>
       </p:sp>
@@ -25897,8 +25992,8 @@
         </p:nvSpPr>
         <p:spPr>
           <a:xfrm>
-            <a:off x="7239000" y="2990850"/>
-            <a:ext cx="4038600" cy="137160"/>
+            <a:off x="7181850" y="3048000"/>
+            <a:ext cx="762000" cy="125016"/>
           </a:xfrm>
           <a:prstGeom prst="rect">
             <a:avLst/>
@@ -25912,22 +26007,22 @@
           <a:p>
             <a:pPr algn="r" indent="0" marL="0">
               <a:lnSpc>
-                <a:spcPts val="1080"/>
-              </a:lnSpc>
-              <a:buNone/>
-            </a:pPr>
-            <a:r>
-              <a:rPr lang="en-US" sz="900" dirty="0">
-                <a:solidFill>
-                  <a:srgbClr val="EFB13C"/>
-                </a:solidFill>
-                <a:latin typeface="Malgun Gothic" pitchFamily="34" charset="0"/>
-                <a:ea typeface="Malgun Gothic" pitchFamily="34" charset="-122"/>
-                <a:cs typeface="Malgun Gothic" pitchFamily="34" charset="-120"/>
-              </a:rPr>
-              <a:t>③ 온도를 곡선(모델)으로 뺀 뒤  =  오른쪽 숫자</a:t>
-            </a:r>
-            <a:endParaRPr lang="en-US" sz="900" dirty="0"/>
+                <a:spcPts val="984"/>
+              </a:lnSpc>
+              <a:buNone/>
+            </a:pPr>
+            <a:r>
+              <a:rPr lang="en-US" sz="788" b="1" spc="150" kern="0" dirty="0">
+                <a:solidFill>
+                  <a:srgbClr val="8A8880"/>
+                </a:solidFill>
+                <a:latin typeface="Consolas" pitchFamily="34" charset="0"/>
+                <a:ea typeface="Consolas" pitchFamily="34" charset="-122"/>
+                <a:cs typeface="Consolas" pitchFamily="34" charset="-120"/>
+              </a:rPr>
+              <a:t>AIC</a:t>
+            </a:r>
+            <a:endParaRPr lang="en-US" sz="788" dirty="0"/>
           </a:p>
         </p:txBody>
       </p:sp>
@@ -25939,37 +26034,37 @@
         </p:nvSpPr>
         <p:spPr>
           <a:xfrm>
-            <a:off x="914400" y="4724400"/>
-            <a:ext cx="6667500" cy="125730"/>
-          </a:xfrm>
-          <a:prstGeom prst="rect">
-            <a:avLst/>
-          </a:prstGeom>
-          <a:noFill/>
-          <a:ln/>
-        </p:spPr>
-        <p:txBody>
-          <a:bodyPr wrap="square" lIns="0" tIns="0" rIns="0" bIns="0" rtlCol="0" anchor="t"/>
-          <a:lstStyle/>
-          <a:p>
-            <a:pPr algn="l" indent="0" marL="0">
-              <a:lnSpc>
-                <a:spcPts val="990"/>
-              </a:lnSpc>
-              <a:buNone/>
-            </a:pPr>
-            <a:r>
-              <a:rPr lang="en-US" sz="825" dirty="0">
+            <a:off x="10515600" y="3048000"/>
+            <a:ext cx="762000" cy="125016"/>
+          </a:xfrm>
+          <a:prstGeom prst="rect">
+            <a:avLst/>
+          </a:prstGeom>
+          <a:noFill/>
+          <a:ln/>
+        </p:spPr>
+        <p:txBody>
+          <a:bodyPr wrap="square" lIns="0" tIns="0" rIns="0" bIns="0" rtlCol="0" anchor="t"/>
+          <a:lstStyle/>
+          <a:p>
+            <a:pPr algn="r" indent="0" marL="0">
+              <a:lnSpc>
+                <a:spcPts val="984"/>
+              </a:lnSpc>
+              <a:buNone/>
+            </a:pPr>
+            <a:r>
+              <a:rPr lang="en-US" sz="788" b="1" spc="150" kern="0" dirty="0">
                 <a:solidFill>
                   <a:srgbClr val="8A8880"/>
                 </a:solidFill>
-                <a:latin typeface="Malgun Gothic" pitchFamily="34" charset="0"/>
-                <a:ea typeface="Malgun Gothic" pitchFamily="34" charset="-122"/>
-                <a:cs typeface="Malgun Gothic" pitchFamily="34" charset="-120"/>
-              </a:rPr>
-              <a:t>※ '뺀다' = 온도로 설명되는 몫을 먼저 걷어내고, 남은 것끼리 다시 재는 것</a:t>
-            </a:r>
-            <a:endParaRPr lang="en-US" sz="825" dirty="0"/>
+                <a:latin typeface="Consolas" pitchFamily="34" charset="0"/>
+                <a:ea typeface="Consolas" pitchFamily="34" charset="-122"/>
+                <a:cs typeface="Consolas" pitchFamily="34" charset="-120"/>
+              </a:rPr>
+              <a:t>판정</a:t>
+            </a:r>
+            <a:endParaRPr lang="en-US" sz="788" dirty="0"/>
           </a:p>
         </p:txBody>
       </p:sp>
@@ -25981,8 +26076,8 @@
         </p:nvSpPr>
         <p:spPr>
           <a:xfrm>
-            <a:off x="2857500" y="3276600"/>
-            <a:ext cx="0" cy="1314450"/>
+            <a:off x="914400" y="3200400"/>
+            <a:ext cx="10363200" cy="0"/>
           </a:xfrm>
           <a:prstGeom prst="line">
             <a:avLst/>
@@ -26004,18 +26099,17 @@
         </p:nvSpPr>
         <p:spPr>
           <a:xfrm>
-            <a:off x="4759452" y="3276600"/>
-            <a:ext cx="0" cy="1314450"/>
-          </a:xfrm>
-          <a:prstGeom prst="line">
-            <a:avLst/>
-          </a:prstGeom>
-          <a:noFill/>
-          <a:ln w="20320">
+            <a:off x="838200" y="3228975"/>
+            <a:ext cx="10515600" cy="238125"/>
+          </a:xfrm>
+          <a:prstGeom prst="rect">
+            <a:avLst/>
+          </a:prstGeom>
+          <a:ln w="17780">
             <a:solidFill>
-              <a:srgbClr val="FF4D63"/>
+              <a:srgbClr val="EFB13C"/>
             </a:solidFill>
-            <a:prstDash val="dash"/>
+            <a:prstDash val="solid"/>
           </a:ln>
         </p:spPr>
       </p:sp>
@@ -26027,27 +26121,27 @@
         </p:nvSpPr>
         <p:spPr>
           <a:xfrm>
-            <a:off x="914400" y="3305175"/>
-            <a:ext cx="1809750" cy="185738"/>
-          </a:xfrm>
-          <a:prstGeom prst="rect">
-            <a:avLst/>
-          </a:prstGeom>
-          <a:noFill/>
-          <a:ln/>
-        </p:spPr>
-        <p:txBody>
-          <a:bodyPr wrap="square" lIns="0" tIns="0" rIns="0" bIns="0" rtlCol="0" anchor="t"/>
-          <a:lstStyle/>
-          <a:p>
-            <a:pPr algn="l" indent="0" marL="0">
-              <a:lnSpc>
-                <a:spcPts val="1463"/>
-              </a:lnSpc>
-              <a:buNone/>
-            </a:pPr>
-            <a:r>
-              <a:rPr lang="en-US" sz="1125" b="1" dirty="0">
+            <a:off x="914400" y="3276600"/>
+            <a:ext cx="2514600" cy="154781"/>
+          </a:xfrm>
+          <a:prstGeom prst="rect">
+            <a:avLst/>
+          </a:prstGeom>
+          <a:noFill/>
+          <a:ln/>
+        </p:spPr>
+        <p:txBody>
+          <a:bodyPr wrap="square" lIns="0" tIns="0" rIns="0" bIns="0" rtlCol="0" anchor="t"/>
+          <a:lstStyle/>
+          <a:p>
+            <a:pPr algn="l" indent="0" marL="0">
+              <a:lnSpc>
+                <a:spcPts val="1219"/>
+              </a:lnSpc>
+              <a:buNone/>
+            </a:pPr>
+            <a:r>
+              <a:rPr lang="en-US" sz="975" b="1" dirty="0">
                 <a:solidFill>
                   <a:srgbClr val="EFB13C"/>
                 </a:solidFill>
@@ -26055,61 +26149,41 @@
                 <a:ea typeface="Malgun Gothic" pitchFamily="34" charset="-122"/>
                 <a:cs typeface="Malgun Gothic" pitchFamily="34" charset="-120"/>
               </a:rPr>
-              <a:t>외기온도</a:t>
-            </a:r>
-            <a:endParaRPr lang="en-US" sz="1125" dirty="0"/>
-          </a:p>
-        </p:txBody>
-      </p:sp>
-      <p:sp>
-        <p:nvSpPr>
-          <p:cNvPr id="25" name="Shape 23"/>
-          <p:cNvSpPr/>
-          <p:nvPr/>
-        </p:nvSpPr>
-        <p:spPr>
-          <a:xfrm>
-            <a:off x="2857500" y="3295650"/>
-            <a:ext cx="5120640" cy="142875"/>
-          </a:xfrm>
-          <a:prstGeom prst="rect">
-            <a:avLst/>
-          </a:prstGeom>
-          <a:solidFill>
-            <a:srgbClr val="EFB13C"/>
-          </a:solidFill>
-          <a:ln/>
-        </p:spPr>
-      </p:sp>
-      <p:sp>
-        <p:nvSpPr>
-          <p:cNvPr id="26" name="Text 24"/>
-          <p:cNvSpPr txBox="1"/>
-          <p:nvPr/>
-        </p:nvSpPr>
-        <p:spPr>
-          <a:xfrm>
-            <a:off x="8054340" y="3286125"/>
-            <a:ext cx="666750" cy="171450"/>
-          </a:xfrm>
-          <a:prstGeom prst="rect">
-            <a:avLst/>
-          </a:prstGeom>
-          <a:noFill/>
-          <a:ln/>
-        </p:spPr>
-        <p:txBody>
-          <a:bodyPr wrap="square" lIns="0" tIns="0" rIns="0" bIns="0" rtlCol="0" anchor="t"/>
-          <a:lstStyle/>
-          <a:p>
-            <a:pPr algn="l" indent="0" marL="0">
-              <a:lnSpc>
-                <a:spcPts val="1350"/>
-              </a:lnSpc>
-              <a:buNone/>
-            </a:pPr>
-            <a:r>
-              <a:rPr lang="en-US" sz="1125" b="1" dirty="0">
+              <a:t>외기 온도</a:t>
+            </a:r>
+            <a:endParaRPr lang="en-US" sz="975" dirty="0"/>
+          </a:p>
+        </p:txBody>
+      </p:sp>
+      <p:sp>
+        <p:nvSpPr>
+          <p:cNvPr id="25" name="Text 23"/>
+          <p:cNvSpPr txBox="1"/>
+          <p:nvPr/>
+        </p:nvSpPr>
+        <p:spPr>
+          <a:xfrm>
+            <a:off x="3714750" y="3276600"/>
+            <a:ext cx="762000" cy="154781"/>
+          </a:xfrm>
+          <a:prstGeom prst="rect">
+            <a:avLst/>
+          </a:prstGeom>
+          <a:noFill/>
+          <a:ln/>
+        </p:spPr>
+        <p:txBody>
+          <a:bodyPr wrap="square" lIns="0" tIns="0" rIns="0" bIns="0" rtlCol="0" anchor="t"/>
+          <a:lstStyle/>
+          <a:p>
+            <a:pPr algn="r" indent="0" marL="0">
+              <a:lnSpc>
+                <a:spcPts val="1219"/>
+              </a:lnSpc>
+              <a:buNone/>
+            </a:pPr>
+            <a:r>
+              <a:rPr lang="en-US" sz="975" b="1" dirty="0">
                 <a:solidFill>
                   <a:srgbClr val="EFB13C"/>
                 </a:solidFill>
@@ -26117,9 +26191,51 @@
                 <a:ea typeface="Consolas" pitchFamily="34" charset="-122"/>
                 <a:cs typeface="Consolas" pitchFamily="34" charset="-120"/>
               </a:rPr>
-              <a:t>-0.84</a:t>
-            </a:r>
-            <a:endParaRPr lang="en-US" sz="1125" dirty="0"/>
+              <a:t>1.678</a:t>
+            </a:r>
+            <a:endParaRPr lang="en-US" sz="975" dirty="0"/>
+          </a:p>
+        </p:txBody>
+      </p:sp>
+      <p:sp>
+        <p:nvSpPr>
+          <p:cNvPr id="26" name="Text 24"/>
+          <p:cNvSpPr txBox="1"/>
+          <p:nvPr/>
+        </p:nvSpPr>
+        <p:spPr>
+          <a:xfrm>
+            <a:off x="4857750" y="3276600"/>
+            <a:ext cx="762000" cy="154781"/>
+          </a:xfrm>
+          <a:prstGeom prst="rect">
+            <a:avLst/>
+          </a:prstGeom>
+          <a:noFill/>
+          <a:ln/>
+        </p:spPr>
+        <p:txBody>
+          <a:bodyPr wrap="square" lIns="0" tIns="0" rIns="0" bIns="0" rtlCol="0" anchor="t"/>
+          <a:lstStyle/>
+          <a:p>
+            <a:pPr algn="r" indent="0" marL="0">
+              <a:lnSpc>
+                <a:spcPts val="1219"/>
+              </a:lnSpc>
+              <a:buNone/>
+            </a:pPr>
+            <a:r>
+              <a:rPr lang="en-US" sz="975" b="1" dirty="0">
+                <a:solidFill>
+                  <a:srgbClr val="EFB13C"/>
+                </a:solidFill>
+                <a:latin typeface="Consolas" pitchFamily="34" charset="0"/>
+                <a:ea typeface="Consolas" pitchFamily="34" charset="-122"/>
+                <a:cs typeface="Consolas" pitchFamily="34" charset="-120"/>
+              </a:rPr>
+              <a:t>1.301</a:t>
+            </a:r>
+            <a:endParaRPr lang="en-US" sz="975" dirty="0"/>
           </a:p>
         </p:txBody>
       </p:sp>
@@ -26131,8 +26247,8 @@
         </p:nvSpPr>
         <p:spPr>
           <a:xfrm>
-            <a:off x="9334500" y="3305175"/>
-            <a:ext cx="1943100" cy="148590"/>
+            <a:off x="6019800" y="3276600"/>
+            <a:ext cx="762000" cy="154781"/>
           </a:xfrm>
           <a:prstGeom prst="rect">
             <a:avLst/>
@@ -26146,12 +26262,96 @@
           <a:p>
             <a:pPr algn="r" indent="0" marL="0">
               <a:lnSpc>
-                <a:spcPts val="1170"/>
+                <a:spcPts val="1219"/>
               </a:lnSpc>
               <a:buNone/>
             </a:pPr>
             <a:r>
               <a:rPr lang="en-US" sz="975" b="1" dirty="0">
+                <a:solidFill>
+                  <a:srgbClr val="EFB13C"/>
+                </a:solidFill>
+                <a:latin typeface="Consolas" pitchFamily="34" charset="0"/>
+                <a:ea typeface="Consolas" pitchFamily="34" charset="-122"/>
+                <a:cs typeface="Consolas" pitchFamily="34" charset="-120"/>
+              </a:rPr>
+              <a:t>0.854</a:t>
+            </a:r>
+            <a:endParaRPr lang="en-US" sz="975" dirty="0"/>
+          </a:p>
+        </p:txBody>
+      </p:sp>
+      <p:sp>
+        <p:nvSpPr>
+          <p:cNvPr id="28" name="Text 26"/>
+          <p:cNvSpPr txBox="1"/>
+          <p:nvPr/>
+        </p:nvSpPr>
+        <p:spPr>
+          <a:xfrm>
+            <a:off x="7181850" y="3276600"/>
+            <a:ext cx="762000" cy="154781"/>
+          </a:xfrm>
+          <a:prstGeom prst="rect">
+            <a:avLst/>
+          </a:prstGeom>
+          <a:noFill/>
+          <a:ln/>
+        </p:spPr>
+        <p:txBody>
+          <a:bodyPr wrap="square" lIns="0" tIns="0" rIns="0" bIns="0" rtlCol="0" anchor="t"/>
+          <a:lstStyle/>
+          <a:p>
+            <a:pPr algn="r" indent="0" marL="0">
+              <a:lnSpc>
+                <a:spcPts val="1219"/>
+              </a:lnSpc>
+              <a:buNone/>
+            </a:pPr>
+            <a:r>
+              <a:rPr lang="en-US" sz="975" b="1" dirty="0">
+                <a:solidFill>
+                  <a:srgbClr val="EFB13C"/>
+                </a:solidFill>
+                <a:latin typeface="Consolas" pitchFamily="34" charset="0"/>
+                <a:ea typeface="Consolas" pitchFamily="34" charset="-122"/>
+                <a:cs typeface="Consolas" pitchFamily="34" charset="-120"/>
+              </a:rPr>
+              <a:t>155.4</a:t>
+            </a:r>
+            <a:endParaRPr lang="en-US" sz="975" dirty="0"/>
+          </a:p>
+        </p:txBody>
+      </p:sp>
+      <p:sp>
+        <p:nvSpPr>
+          <p:cNvPr id="29" name="Text 27"/>
+          <p:cNvSpPr txBox="1"/>
+          <p:nvPr/>
+        </p:nvSpPr>
+        <p:spPr>
+          <a:xfrm>
+            <a:off x="8572500" y="3276600"/>
+            <a:ext cx="2705100" cy="148828"/>
+          </a:xfrm>
+          <a:prstGeom prst="rect">
+            <a:avLst/>
+          </a:prstGeom>
+          <a:noFill/>
+          <a:ln/>
+        </p:spPr>
+        <p:txBody>
+          <a:bodyPr wrap="square" lIns="0" tIns="0" rIns="0" bIns="0" rtlCol="0" anchor="t"/>
+          <a:lstStyle/>
+          <a:p>
+            <a:pPr algn="r" indent="0" marL="0">
+              <a:lnSpc>
+                <a:spcPts val="1172"/>
+              </a:lnSpc>
+              <a:buNone/>
+            </a:pPr>
+            <a:r>
+              <a:rPr lang="en-US" sz="938" b="1" dirty="0">
                 <a:solidFill>
                   <a:srgbClr val="EFB13C"/>
                 </a:solidFill>
@@ -26159,64 +26359,41 @@
                 <a:ea typeface="Malgun Gothic" pitchFamily="34" charset="-122"/>
                 <a:cs typeface="Malgun Gothic" pitchFamily="34" charset="-120"/>
               </a:rPr>
-              <a:t>★ 주된 원인</a:t>
-            </a:r>
-            <a:endParaRPr lang="en-US" sz="975" dirty="0"/>
-          </a:p>
-        </p:txBody>
-      </p:sp>
-      <p:sp>
-        <p:nvSpPr>
-          <p:cNvPr id="28" name="Shape 26"/>
-          <p:cNvSpPr/>
-          <p:nvPr/>
-        </p:nvSpPr>
-        <p:spPr>
-          <a:xfrm>
-            <a:off x="914400" y="3543300"/>
-            <a:ext cx="10363200" cy="0"/>
-          </a:xfrm>
-          <a:prstGeom prst="line">
-            <a:avLst/>
-          </a:prstGeom>
-          <a:noFill/>
-          <a:ln w="12700">
-            <a:solidFill>
-              <a:srgbClr val="22354A"/>
-            </a:solidFill>
-            <a:prstDash val="solid"/>
-          </a:ln>
-        </p:spPr>
-      </p:sp>
-      <p:sp>
-        <p:nvSpPr>
-          <p:cNvPr id="29" name="Text 27"/>
-          <p:cNvSpPr txBox="1"/>
-          <p:nvPr/>
-        </p:nvSpPr>
-        <p:spPr>
-          <a:xfrm>
-            <a:off x="914400" y="3619500"/>
-            <a:ext cx="1809750" cy="173355"/>
-          </a:xfrm>
-          <a:prstGeom prst="rect">
-            <a:avLst/>
-          </a:prstGeom>
-          <a:noFill/>
-          <a:ln/>
-        </p:spPr>
-        <p:txBody>
-          <a:bodyPr wrap="square" lIns="0" tIns="0" rIns="0" bIns="0" rtlCol="0" anchor="t"/>
-          <a:lstStyle/>
-          <a:p>
-            <a:pPr algn="l" indent="0" marL="0">
-              <a:lnSpc>
-                <a:spcPts val="1365"/>
-              </a:lnSpc>
-              <a:buNone/>
-            </a:pPr>
-            <a:r>
-              <a:rPr lang="en-US" sz="1050" dirty="0">
+              <a:t>★ 최종 선정</a:t>
+            </a:r>
+            <a:endParaRPr lang="en-US" sz="938" dirty="0"/>
+          </a:p>
+        </p:txBody>
+      </p:sp>
+      <p:sp>
+        <p:nvSpPr>
+          <p:cNvPr id="30" name="Text 28"/>
+          <p:cNvSpPr txBox="1"/>
+          <p:nvPr/>
+        </p:nvSpPr>
+        <p:spPr>
+          <a:xfrm>
+            <a:off x="914400" y="3486150"/>
+            <a:ext cx="2514600" cy="154781"/>
+          </a:xfrm>
+          <a:prstGeom prst="rect">
+            <a:avLst/>
+          </a:prstGeom>
+          <a:noFill/>
+          <a:ln/>
+        </p:spPr>
+        <p:txBody>
+          <a:bodyPr wrap="square" lIns="0" tIns="0" rIns="0" bIns="0" rtlCol="0" anchor="t"/>
+          <a:lstStyle/>
+          <a:p>
+            <a:pPr algn="l" indent="0" marL="0">
+              <a:lnSpc>
+                <a:spcPts val="1219"/>
+              </a:lnSpc>
+              <a:buNone/>
+            </a:pPr>
+            <a:r>
+              <a:rPr lang="en-US" sz="975" dirty="0">
                 <a:solidFill>
                   <a:srgbClr val="CFCBC2"/>
                 </a:solidFill>
@@ -26224,31 +26401,11 @@
                 <a:ea typeface="Malgun Gothic" pitchFamily="34" charset="-122"/>
                 <a:cs typeface="Malgun Gothic" pitchFamily="34" charset="-120"/>
               </a:rPr>
-              <a:t>복수기 진공도</a:t>
-            </a:r>
-            <a:endParaRPr lang="en-US" sz="1050" dirty="0"/>
-          </a:p>
-        </p:txBody>
-      </p:sp>
-      <p:sp>
-        <p:nvSpPr>
-          <p:cNvPr id="30" name="Shape 28"/>
-          <p:cNvSpPr/>
-          <p:nvPr/>
-        </p:nvSpPr>
-        <p:spPr>
-          <a:xfrm>
-            <a:off x="2857500" y="3581400"/>
-            <a:ext cx="5017008" cy="95250"/>
-          </a:xfrm>
-          <a:prstGeom prst="rect">
-            <a:avLst/>
-          </a:prstGeom>
-          <a:solidFill>
-            <a:srgbClr val="718BA6"/>
-          </a:solidFill>
-          <a:ln/>
-        </p:spPr>
+              <a:t>외기 온도 + 상대습도</a:t>
+            </a:r>
+            <a:endParaRPr lang="en-US" sz="975" dirty="0"/>
+          </a:p>
+        </p:txBody>
       </p:sp>
       <p:sp>
         <p:nvSpPr>
@@ -26258,99 +26415,121 @@
         </p:nvSpPr>
         <p:spPr>
           <a:xfrm>
-            <a:off x="7950708" y="3571875"/>
-            <a:ext cx="571500" cy="125730"/>
-          </a:xfrm>
-          <a:prstGeom prst="rect">
-            <a:avLst/>
-          </a:prstGeom>
-          <a:noFill/>
-          <a:ln/>
-        </p:spPr>
-        <p:txBody>
-          <a:bodyPr wrap="square" lIns="0" tIns="0" rIns="0" bIns="0" rtlCol="0" anchor="t"/>
-          <a:lstStyle/>
-          <a:p>
-            <a:pPr algn="l" indent="0" marL="0">
-              <a:lnSpc>
-                <a:spcPts val="990"/>
-              </a:lnSpc>
-              <a:buNone/>
-            </a:pPr>
-            <a:r>
-              <a:rPr lang="en-US" sz="825" dirty="0">
-                <a:solidFill>
-                  <a:srgbClr val="718BA6"/>
+            <a:off x="3714750" y="3486150"/>
+            <a:ext cx="762000" cy="154781"/>
+          </a:xfrm>
+          <a:prstGeom prst="rect">
+            <a:avLst/>
+          </a:prstGeom>
+          <a:noFill/>
+          <a:ln/>
+        </p:spPr>
+        <p:txBody>
+          <a:bodyPr wrap="square" lIns="0" tIns="0" rIns="0" bIns="0" rtlCol="0" anchor="t"/>
+          <a:lstStyle/>
+          <a:p>
+            <a:pPr algn="r" indent="0" marL="0">
+              <a:lnSpc>
+                <a:spcPts val="1219"/>
+              </a:lnSpc>
+              <a:buNone/>
+            </a:pPr>
+            <a:r>
+              <a:rPr lang="en-US" sz="975" dirty="0">
+                <a:solidFill>
+                  <a:srgbClr val="A9A79F"/>
                 </a:solidFill>
                 <a:latin typeface="Consolas" pitchFamily="34" charset="0"/>
                 <a:ea typeface="Consolas" pitchFamily="34" charset="-122"/>
                 <a:cs typeface="Consolas" pitchFamily="34" charset="-120"/>
               </a:rPr>
-              <a:t>−0.82</a:t>
-            </a:r>
-            <a:endParaRPr lang="en-US" sz="825" dirty="0"/>
-          </a:p>
-        </p:txBody>
-      </p:sp>
-      <p:sp>
-        <p:nvSpPr>
-          <p:cNvPr id="32" name="Shape 30"/>
-          <p:cNvSpPr/>
-          <p:nvPr/>
-        </p:nvSpPr>
-        <p:spPr>
-          <a:xfrm>
-            <a:off x="2857500" y="3714750"/>
-            <a:ext cx="883920" cy="95250"/>
-          </a:xfrm>
-          <a:prstGeom prst="rect">
-            <a:avLst/>
-          </a:prstGeom>
-          <a:solidFill>
-            <a:srgbClr val="55708A"/>
-          </a:solidFill>
-          <a:ln/>
-        </p:spPr>
-      </p:sp>
-      <p:sp>
-        <p:nvSpPr>
-          <p:cNvPr id="33" name="Text 31"/>
-          <p:cNvSpPr txBox="1"/>
-          <p:nvPr/>
-        </p:nvSpPr>
-        <p:spPr>
-          <a:xfrm>
-            <a:off x="3817620" y="3705225"/>
-            <a:ext cx="571500" cy="125730"/>
-          </a:xfrm>
-          <a:prstGeom prst="rect">
-            <a:avLst/>
-          </a:prstGeom>
-          <a:noFill/>
-          <a:ln/>
-        </p:spPr>
-        <p:txBody>
-          <a:bodyPr wrap="square" lIns="0" tIns="0" rIns="0" bIns="0" rtlCol="0" anchor="t"/>
-          <a:lstStyle/>
-          <a:p>
-            <a:pPr algn="l" indent="0" marL="0">
-              <a:lnSpc>
-                <a:spcPts val="990"/>
-              </a:lnSpc>
-              <a:buNone/>
-            </a:pPr>
-            <a:r>
-              <a:rPr lang="en-US" sz="825" dirty="0">
-                <a:solidFill>
-                  <a:srgbClr val="55708A"/>
+              <a:t>1.706</a:t>
+            </a:r>
+            <a:endParaRPr lang="en-US" sz="975" dirty="0"/>
+          </a:p>
+        </p:txBody>
+      </p:sp>
+      <p:sp>
+        <p:nvSpPr>
+          <p:cNvPr id="32" name="Text 30"/>
+          <p:cNvSpPr txBox="1"/>
+          <p:nvPr/>
+        </p:nvSpPr>
+        <p:spPr>
+          <a:xfrm>
+            <a:off x="4857750" y="3486150"/>
+            <a:ext cx="762000" cy="154781"/>
+          </a:xfrm>
+          <a:prstGeom prst="rect">
+            <a:avLst/>
+          </a:prstGeom>
+          <a:noFill/>
+          <a:ln/>
+        </p:spPr>
+        <p:txBody>
+          <a:bodyPr wrap="square" lIns="0" tIns="0" rIns="0" bIns="0" rtlCol="0" anchor="t"/>
+          <a:lstStyle/>
+          <a:p>
+            <a:pPr algn="r" indent="0" marL="0">
+              <a:lnSpc>
+                <a:spcPts val="1219"/>
+              </a:lnSpc>
+              <a:buNone/>
+            </a:pPr>
+            <a:r>
+              <a:rPr lang="en-US" sz="975" dirty="0">
+                <a:solidFill>
+                  <a:srgbClr val="A9A79F"/>
                 </a:solidFill>
                 <a:latin typeface="Consolas" pitchFamily="34" charset="0"/>
                 <a:ea typeface="Consolas" pitchFamily="34" charset="-122"/>
                 <a:cs typeface="Consolas" pitchFamily="34" charset="-120"/>
               </a:rPr>
-              <a:t>−0.14</a:t>
-            </a:r>
-            <a:endParaRPr lang="en-US" sz="825" dirty="0"/>
+              <a:t>1.293</a:t>
+            </a:r>
+            <a:endParaRPr lang="en-US" sz="975" dirty="0"/>
+          </a:p>
+        </p:txBody>
+      </p:sp>
+      <p:sp>
+        <p:nvSpPr>
+          <p:cNvPr id="33" name="Text 31"/>
+          <p:cNvSpPr txBox="1"/>
+          <p:nvPr/>
+        </p:nvSpPr>
+        <p:spPr>
+          <a:xfrm>
+            <a:off x="6019800" y="3486150"/>
+            <a:ext cx="762000" cy="154781"/>
+          </a:xfrm>
+          <a:prstGeom prst="rect">
+            <a:avLst/>
+          </a:prstGeom>
+          <a:noFill/>
+          <a:ln/>
+        </p:spPr>
+        <p:txBody>
+          <a:bodyPr wrap="square" lIns="0" tIns="0" rIns="0" bIns="0" rtlCol="0" anchor="t"/>
+          <a:lstStyle/>
+          <a:p>
+            <a:pPr algn="r" indent="0" marL="0">
+              <a:lnSpc>
+                <a:spcPts val="1219"/>
+              </a:lnSpc>
+              <a:buNone/>
+            </a:pPr>
+            <a:r>
+              <a:rPr lang="en-US" sz="975" dirty="0">
+                <a:solidFill>
+                  <a:srgbClr val="A9A79F"/>
+                </a:solidFill>
+                <a:latin typeface="Consolas" pitchFamily="34" charset="0"/>
+                <a:ea typeface="Consolas" pitchFamily="34" charset="-122"/>
+                <a:cs typeface="Consolas" pitchFamily="34" charset="-120"/>
+              </a:rPr>
+              <a:t>0.849</a:t>
+            </a:r>
+            <a:endParaRPr lang="en-US" sz="975" dirty="0"/>
           </a:p>
         </p:txBody>
       </p:sp>
@@ -26362,8 +26541,8 @@
         </p:nvSpPr>
         <p:spPr>
           <a:xfrm>
-            <a:off x="9334500" y="3619500"/>
-            <a:ext cx="1943100" cy="142875"/>
+            <a:off x="7181850" y="3486150"/>
+            <a:ext cx="762000" cy="154781"/>
           </a:xfrm>
           <a:prstGeom prst="rect">
             <a:avLst/>
@@ -26377,20 +26556,62 @@
           <a:p>
             <a:pPr algn="r" indent="0" marL="0">
               <a:lnSpc>
-                <a:spcPts val="1125"/>
-              </a:lnSpc>
-              <a:buNone/>
-            </a:pPr>
-            <a:r>
-              <a:rPr lang="en-US" sz="938" b="1" dirty="0">
+                <a:spcPts val="1219"/>
+              </a:lnSpc>
+              <a:buNone/>
+            </a:pPr>
+            <a:r>
+              <a:rPr lang="en-US" sz="975" dirty="0">
                 <a:solidFill>
                   <a:srgbClr val="A9A79F"/>
+                </a:solidFill>
+                <a:latin typeface="Consolas" pitchFamily="34" charset="0"/>
+                <a:ea typeface="Consolas" pitchFamily="34" charset="-122"/>
+                <a:cs typeface="Consolas" pitchFamily="34" charset="-120"/>
+              </a:rPr>
+              <a:t>165.2</a:t>
+            </a:r>
+            <a:endParaRPr lang="en-US" sz="975" dirty="0"/>
+          </a:p>
+        </p:txBody>
+      </p:sp>
+      <p:sp>
+        <p:nvSpPr>
+          <p:cNvPr id="35" name="Text 33"/>
+          <p:cNvSpPr txBox="1"/>
+          <p:nvPr/>
+        </p:nvSpPr>
+        <p:spPr>
+          <a:xfrm>
+            <a:off x="8572500" y="3486150"/>
+            <a:ext cx="2705100" cy="148828"/>
+          </a:xfrm>
+          <a:prstGeom prst="rect">
+            <a:avLst/>
+          </a:prstGeom>
+          <a:noFill/>
+          <a:ln/>
+        </p:spPr>
+        <p:txBody>
+          <a:bodyPr wrap="square" lIns="0" tIns="0" rIns="0" bIns="0" rtlCol="0" anchor="t"/>
+          <a:lstStyle/>
+          <a:p>
+            <a:pPr algn="r" indent="0" marL="0">
+              <a:lnSpc>
+                <a:spcPts val="1172"/>
+              </a:lnSpc>
+              <a:buNone/>
+            </a:pPr>
+            <a:r>
+              <a:rPr lang="en-US" sz="938" dirty="0">
+                <a:solidFill>
+                  <a:srgbClr val="8A8880"/>
                 </a:solidFill>
                 <a:latin typeface="Malgun Gothic" pitchFamily="34" charset="0"/>
                 <a:ea typeface="Malgun Gothic" pitchFamily="34" charset="-122"/>
                 <a:cs typeface="Malgun Gothic" pitchFamily="34" charset="-120"/>
               </a:rPr>
-              <a:t>③ +0.00 → 사라짐</a:t>
+              <a:t>개선 없음</a:t>
             </a:r>
             <a:endParaRPr lang="en-US" sz="938" dirty="0"/>
           </a:p>
@@ -26398,33 +26619,33 @@
       </p:sp>
       <p:sp>
         <p:nvSpPr>
-          <p:cNvPr id="35" name="Text 33"/>
-          <p:cNvSpPr txBox="1"/>
-          <p:nvPr/>
-        </p:nvSpPr>
-        <p:spPr>
-          <a:xfrm>
-            <a:off x="914400" y="3943350"/>
-            <a:ext cx="1809750" cy="173355"/>
-          </a:xfrm>
-          <a:prstGeom prst="rect">
-            <a:avLst/>
-          </a:prstGeom>
-          <a:noFill/>
-          <a:ln/>
-        </p:spPr>
-        <p:txBody>
-          <a:bodyPr wrap="square" lIns="0" tIns="0" rIns="0" bIns="0" rtlCol="0" anchor="t"/>
-          <a:lstStyle/>
-          <a:p>
-            <a:pPr algn="l" indent="0" marL="0">
-              <a:lnSpc>
-                <a:spcPts val="1365"/>
-              </a:lnSpc>
-              <a:buNone/>
-            </a:pPr>
-            <a:r>
-              <a:rPr lang="en-US" sz="1050" dirty="0">
+          <p:cNvPr id="36" name="Text 34"/>
+          <p:cNvSpPr txBox="1"/>
+          <p:nvPr/>
+        </p:nvSpPr>
+        <p:spPr>
+          <a:xfrm>
+            <a:off x="914400" y="3695700"/>
+            <a:ext cx="2514600" cy="154781"/>
+          </a:xfrm>
+          <a:prstGeom prst="rect">
+            <a:avLst/>
+          </a:prstGeom>
+          <a:noFill/>
+          <a:ln/>
+        </p:spPr>
+        <p:txBody>
+          <a:bodyPr wrap="square" lIns="0" tIns="0" rIns="0" bIns="0" rtlCol="0" anchor="t"/>
+          <a:lstStyle/>
+          <a:p>
+            <a:pPr algn="l" indent="0" marL="0">
+              <a:lnSpc>
+                <a:spcPts val="1219"/>
+              </a:lnSpc>
+              <a:buNone/>
+            </a:pPr>
+            <a:r>
+              <a:rPr lang="en-US" sz="975" dirty="0">
                 <a:solidFill>
                   <a:srgbClr val="CFCBC2"/>
                 </a:solidFill>
@@ -26432,31 +26653,11 @@
                 <a:ea typeface="Malgun Gothic" pitchFamily="34" charset="-122"/>
                 <a:cs typeface="Malgun Gothic" pitchFamily="34" charset="-120"/>
               </a:rPr>
-              <a:t>대기압</a:t>
-            </a:r>
-            <a:endParaRPr lang="en-US" sz="1050" dirty="0"/>
-          </a:p>
-        </p:txBody>
-      </p:sp>
-      <p:sp>
-        <p:nvSpPr>
-          <p:cNvPr id="36" name="Shape 34"/>
-          <p:cNvSpPr/>
-          <p:nvPr/>
-        </p:nvSpPr>
-        <p:spPr>
-          <a:xfrm>
-            <a:off x="2857500" y="3905250"/>
-            <a:ext cx="4474464" cy="95250"/>
-          </a:xfrm>
-          <a:prstGeom prst="rect">
-            <a:avLst/>
-          </a:prstGeom>
-          <a:solidFill>
-            <a:srgbClr val="718BA6"/>
-          </a:solidFill>
-          <a:ln/>
-        </p:spPr>
+              <a:t>외기 온도 + 대기압</a:t>
+            </a:r>
+            <a:endParaRPr lang="en-US" sz="975" dirty="0"/>
+          </a:p>
+        </p:txBody>
       </p:sp>
       <p:sp>
         <p:nvSpPr>
@@ -26466,99 +26667,121 @@
         </p:nvSpPr>
         <p:spPr>
           <a:xfrm>
-            <a:off x="7408164" y="3895725"/>
-            <a:ext cx="571500" cy="125730"/>
-          </a:xfrm>
-          <a:prstGeom prst="rect">
-            <a:avLst/>
-          </a:prstGeom>
-          <a:noFill/>
-          <a:ln/>
-        </p:spPr>
-        <p:txBody>
-          <a:bodyPr wrap="square" lIns="0" tIns="0" rIns="0" bIns="0" rtlCol="0" anchor="t"/>
-          <a:lstStyle/>
-          <a:p>
-            <a:pPr algn="l" indent="0" marL="0">
-              <a:lnSpc>
-                <a:spcPts val="990"/>
-              </a:lnSpc>
-              <a:buNone/>
-            </a:pPr>
-            <a:r>
-              <a:rPr lang="en-US" sz="825" dirty="0">
-                <a:solidFill>
-                  <a:srgbClr val="718BA6"/>
+            <a:off x="3714750" y="3695700"/>
+            <a:ext cx="762000" cy="154781"/>
+          </a:xfrm>
+          <a:prstGeom prst="rect">
+            <a:avLst/>
+          </a:prstGeom>
+          <a:noFill/>
+          <a:ln/>
+        </p:spPr>
+        <p:txBody>
+          <a:bodyPr wrap="square" lIns="0" tIns="0" rIns="0" bIns="0" rtlCol="0" anchor="t"/>
+          <a:lstStyle/>
+          <a:p>
+            <a:pPr algn="r" indent="0" marL="0">
+              <a:lnSpc>
+                <a:spcPts val="1219"/>
+              </a:lnSpc>
+              <a:buNone/>
+            </a:pPr>
+            <a:r>
+              <a:rPr lang="en-US" sz="975" dirty="0">
+                <a:solidFill>
+                  <a:srgbClr val="A9A79F"/>
                 </a:solidFill>
                 <a:latin typeface="Consolas" pitchFamily="34" charset="0"/>
                 <a:ea typeface="Consolas" pitchFamily="34" charset="-122"/>
                 <a:cs typeface="Consolas" pitchFamily="34" charset="-120"/>
               </a:rPr>
-              <a:t>+0.73</a:t>
-            </a:r>
-            <a:endParaRPr lang="en-US" sz="825" dirty="0"/>
-          </a:p>
-        </p:txBody>
-      </p:sp>
-      <p:sp>
-        <p:nvSpPr>
-          <p:cNvPr id="38" name="Shape 36"/>
-          <p:cNvSpPr/>
-          <p:nvPr/>
-        </p:nvSpPr>
-        <p:spPr>
-          <a:xfrm>
-            <a:off x="2857500" y="4038600"/>
-            <a:ext cx="749808" cy="95250"/>
-          </a:xfrm>
-          <a:prstGeom prst="rect">
-            <a:avLst/>
-          </a:prstGeom>
-          <a:solidFill>
-            <a:srgbClr val="55708A"/>
-          </a:solidFill>
-          <a:ln/>
-        </p:spPr>
-      </p:sp>
-      <p:sp>
-        <p:nvSpPr>
-          <p:cNvPr id="39" name="Text 37"/>
-          <p:cNvSpPr txBox="1"/>
-          <p:nvPr/>
-        </p:nvSpPr>
-        <p:spPr>
-          <a:xfrm>
-            <a:off x="3683508" y="4029075"/>
-            <a:ext cx="571500" cy="125730"/>
-          </a:xfrm>
-          <a:prstGeom prst="rect">
-            <a:avLst/>
-          </a:prstGeom>
-          <a:noFill/>
-          <a:ln/>
-        </p:spPr>
-        <p:txBody>
-          <a:bodyPr wrap="square" lIns="0" tIns="0" rIns="0" bIns="0" rtlCol="0" anchor="t"/>
-          <a:lstStyle/>
-          <a:p>
-            <a:pPr algn="l" indent="0" marL="0">
-              <a:lnSpc>
-                <a:spcPts val="990"/>
-              </a:lnSpc>
-              <a:buNone/>
-            </a:pPr>
-            <a:r>
-              <a:rPr lang="en-US" sz="825" dirty="0">
-                <a:solidFill>
-                  <a:srgbClr val="55708A"/>
+              <a:t>1.721</a:t>
+            </a:r>
+            <a:endParaRPr lang="en-US" sz="975" dirty="0"/>
+          </a:p>
+        </p:txBody>
+      </p:sp>
+      <p:sp>
+        <p:nvSpPr>
+          <p:cNvPr id="38" name="Text 36"/>
+          <p:cNvSpPr txBox="1"/>
+          <p:nvPr/>
+        </p:nvSpPr>
+        <p:spPr>
+          <a:xfrm>
+            <a:off x="4857750" y="3695700"/>
+            <a:ext cx="762000" cy="154781"/>
+          </a:xfrm>
+          <a:prstGeom prst="rect">
+            <a:avLst/>
+          </a:prstGeom>
+          <a:noFill/>
+          <a:ln/>
+        </p:spPr>
+        <p:txBody>
+          <a:bodyPr wrap="square" lIns="0" tIns="0" rIns="0" bIns="0" rtlCol="0" anchor="t"/>
+          <a:lstStyle/>
+          <a:p>
+            <a:pPr algn="r" indent="0" marL="0">
+              <a:lnSpc>
+                <a:spcPts val="1219"/>
+              </a:lnSpc>
+              <a:buNone/>
+            </a:pPr>
+            <a:r>
+              <a:rPr lang="en-US" sz="975" dirty="0">
+                <a:solidFill>
+                  <a:srgbClr val="A9A79F"/>
                 </a:solidFill>
                 <a:latin typeface="Consolas" pitchFamily="34" charset="0"/>
                 <a:ea typeface="Consolas" pitchFamily="34" charset="-122"/>
                 <a:cs typeface="Consolas" pitchFamily="34" charset="-120"/>
               </a:rPr>
-              <a:t>+0.12</a:t>
-            </a:r>
-            <a:endParaRPr lang="en-US" sz="825" dirty="0"/>
+              <a:t>1.330</a:t>
+            </a:r>
+            <a:endParaRPr lang="en-US" sz="975" dirty="0"/>
+          </a:p>
+        </p:txBody>
+      </p:sp>
+      <p:sp>
+        <p:nvSpPr>
+          <p:cNvPr id="39" name="Text 37"/>
+          <p:cNvSpPr txBox="1"/>
+          <p:nvPr/>
+        </p:nvSpPr>
+        <p:spPr>
+          <a:xfrm>
+            <a:off x="6019800" y="3695700"/>
+            <a:ext cx="762000" cy="154781"/>
+          </a:xfrm>
+          <a:prstGeom prst="rect">
+            <a:avLst/>
+          </a:prstGeom>
+          <a:noFill/>
+          <a:ln/>
+        </p:spPr>
+        <p:txBody>
+          <a:bodyPr wrap="square" lIns="0" tIns="0" rIns="0" bIns="0" rtlCol="0" anchor="t"/>
+          <a:lstStyle/>
+          <a:p>
+            <a:pPr algn="r" indent="0" marL="0">
+              <a:lnSpc>
+                <a:spcPts val="1219"/>
+              </a:lnSpc>
+              <a:buNone/>
+            </a:pPr>
+            <a:r>
+              <a:rPr lang="en-US" sz="975" dirty="0">
+                <a:solidFill>
+                  <a:srgbClr val="A9A79F"/>
+                </a:solidFill>
+                <a:latin typeface="Consolas" pitchFamily="34" charset="0"/>
+                <a:ea typeface="Consolas" pitchFamily="34" charset="-122"/>
+                <a:cs typeface="Consolas" pitchFamily="34" charset="-120"/>
+              </a:rPr>
+              <a:t>0.846</a:t>
+            </a:r>
+            <a:endParaRPr lang="en-US" sz="975" dirty="0"/>
           </a:p>
         </p:txBody>
       </p:sp>
@@ -26570,8 +26793,8 @@
         </p:nvSpPr>
         <p:spPr>
           <a:xfrm>
-            <a:off x="9334500" y="3943350"/>
-            <a:ext cx="1943100" cy="142875"/>
+            <a:off x="7181850" y="3695700"/>
+            <a:ext cx="762000" cy="154781"/>
           </a:xfrm>
           <a:prstGeom prst="rect">
             <a:avLst/>
@@ -26585,20 +26808,62 @@
           <a:p>
             <a:pPr algn="r" indent="0" marL="0">
               <a:lnSpc>
-                <a:spcPts val="1125"/>
-              </a:lnSpc>
-              <a:buNone/>
-            </a:pPr>
-            <a:r>
-              <a:rPr lang="en-US" sz="938" b="1" dirty="0">
+                <a:spcPts val="1219"/>
+              </a:lnSpc>
+              <a:buNone/>
+            </a:pPr>
+            <a:r>
+              <a:rPr lang="en-US" sz="975" dirty="0">
                 <a:solidFill>
                   <a:srgbClr val="A9A79F"/>
+                </a:solidFill>
+                <a:latin typeface="Consolas" pitchFamily="34" charset="0"/>
+                <a:ea typeface="Consolas" pitchFamily="34" charset="-122"/>
+                <a:cs typeface="Consolas" pitchFamily="34" charset="-120"/>
+              </a:rPr>
+              <a:t>161.0</a:t>
+            </a:r>
+            <a:endParaRPr lang="en-US" sz="975" dirty="0"/>
+          </a:p>
+        </p:txBody>
+      </p:sp>
+      <p:sp>
+        <p:nvSpPr>
+          <p:cNvPr id="41" name="Text 39"/>
+          <p:cNvSpPr txBox="1"/>
+          <p:nvPr/>
+        </p:nvSpPr>
+        <p:spPr>
+          <a:xfrm>
+            <a:off x="8572500" y="3695700"/>
+            <a:ext cx="2705100" cy="148828"/>
+          </a:xfrm>
+          <a:prstGeom prst="rect">
+            <a:avLst/>
+          </a:prstGeom>
+          <a:noFill/>
+          <a:ln/>
+        </p:spPr>
+        <p:txBody>
+          <a:bodyPr wrap="square" lIns="0" tIns="0" rIns="0" bIns="0" rtlCol="0" anchor="t"/>
+          <a:lstStyle/>
+          <a:p>
+            <a:pPr algn="r" indent="0" marL="0">
+              <a:lnSpc>
+                <a:spcPts val="1172"/>
+              </a:lnSpc>
+              <a:buNone/>
+            </a:pPr>
+            <a:r>
+              <a:rPr lang="en-US" sz="938" dirty="0">
+                <a:solidFill>
+                  <a:srgbClr val="8A8880"/>
                 </a:solidFill>
                 <a:latin typeface="Malgun Gothic" pitchFamily="34" charset="0"/>
                 <a:ea typeface="Malgun Gothic" pitchFamily="34" charset="-122"/>
                 <a:cs typeface="Malgun Gothic" pitchFamily="34" charset="-120"/>
               </a:rPr>
-              <a:t>③ −0.13 → 사라짐</a:t>
+              <a:t>개선 없음</a:t>
             </a:r>
             <a:endParaRPr lang="en-US" sz="938" dirty="0"/>
           </a:p>
@@ -26606,33 +26871,33 @@
       </p:sp>
       <p:sp>
         <p:nvSpPr>
-          <p:cNvPr id="41" name="Text 39"/>
-          <p:cNvSpPr txBox="1"/>
-          <p:nvPr/>
-        </p:nvSpPr>
-        <p:spPr>
-          <a:xfrm>
-            <a:off x="914400" y="4267200"/>
-            <a:ext cx="1809750" cy="173355"/>
-          </a:xfrm>
-          <a:prstGeom prst="rect">
-            <a:avLst/>
-          </a:prstGeom>
-          <a:noFill/>
-          <a:ln/>
-        </p:spPr>
-        <p:txBody>
-          <a:bodyPr wrap="square" lIns="0" tIns="0" rIns="0" bIns="0" rtlCol="0" anchor="t"/>
-          <a:lstStyle/>
-          <a:p>
-            <a:pPr algn="l" indent="0" marL="0">
-              <a:lnSpc>
-                <a:spcPts val="1365"/>
-              </a:lnSpc>
-              <a:buNone/>
-            </a:pPr>
-            <a:r>
-              <a:rPr lang="en-US" sz="1050" dirty="0">
+          <p:cNvPr id="42" name="Text 40"/>
+          <p:cNvSpPr txBox="1"/>
+          <p:nvPr/>
+        </p:nvSpPr>
+        <p:spPr>
+          <a:xfrm>
+            <a:off x="914400" y="3905250"/>
+            <a:ext cx="2514600" cy="154781"/>
+          </a:xfrm>
+          <a:prstGeom prst="rect">
+            <a:avLst/>
+          </a:prstGeom>
+          <a:noFill/>
+          <a:ln/>
+        </p:spPr>
+        <p:txBody>
+          <a:bodyPr wrap="square" lIns="0" tIns="0" rIns="0" bIns="0" rtlCol="0" anchor="t"/>
+          <a:lstStyle/>
+          <a:p>
+            <a:pPr algn="l" indent="0" marL="0">
+              <a:lnSpc>
+                <a:spcPts val="1219"/>
+              </a:lnSpc>
+              <a:buNone/>
+            </a:pPr>
+            <a:r>
+              <a:rPr lang="en-US" sz="975" dirty="0">
                 <a:solidFill>
                   <a:srgbClr val="CFCBC2"/>
                 </a:solidFill>
@@ -26640,31 +26905,11 @@
                 <a:ea typeface="Malgun Gothic" pitchFamily="34" charset="-122"/>
                 <a:cs typeface="Malgun Gothic" pitchFamily="34" charset="-120"/>
               </a:rPr>
-              <a:t>상대습도</a:t>
-            </a:r>
-            <a:endParaRPr lang="en-US" sz="1050" dirty="0"/>
-          </a:p>
-        </p:txBody>
-      </p:sp>
-      <p:sp>
-        <p:nvSpPr>
-          <p:cNvPr id="42" name="Shape 40"/>
-          <p:cNvSpPr/>
-          <p:nvPr/>
-        </p:nvSpPr>
-        <p:spPr>
-          <a:xfrm>
-            <a:off x="2857500" y="4229100"/>
-            <a:ext cx="4419600" cy="95250"/>
-          </a:xfrm>
-          <a:prstGeom prst="rect">
-            <a:avLst/>
-          </a:prstGeom>
-          <a:solidFill>
-            <a:srgbClr val="718BA6"/>
-          </a:solidFill>
-          <a:ln/>
-        </p:spPr>
+              <a:t>외기 온도 + 복수기 진공도</a:t>
+            </a:r>
+            <a:endParaRPr lang="en-US" sz="975" dirty="0"/>
+          </a:p>
+        </p:txBody>
       </p:sp>
       <p:sp>
         <p:nvSpPr>
@@ -26674,99 +26919,121 @@
         </p:nvSpPr>
         <p:spPr>
           <a:xfrm>
-            <a:off x="7353300" y="4219575"/>
-            <a:ext cx="571500" cy="125730"/>
-          </a:xfrm>
-          <a:prstGeom prst="rect">
-            <a:avLst/>
-          </a:prstGeom>
-          <a:noFill/>
-          <a:ln/>
-        </p:spPr>
-        <p:txBody>
-          <a:bodyPr wrap="square" lIns="0" tIns="0" rIns="0" bIns="0" rtlCol="0" anchor="t"/>
-          <a:lstStyle/>
-          <a:p>
-            <a:pPr algn="l" indent="0" marL="0">
-              <a:lnSpc>
-                <a:spcPts val="990"/>
-              </a:lnSpc>
-              <a:buNone/>
-            </a:pPr>
-            <a:r>
-              <a:rPr lang="en-US" sz="825" dirty="0">
-                <a:solidFill>
-                  <a:srgbClr val="718BA6"/>
+            <a:off x="3714750" y="3905250"/>
+            <a:ext cx="762000" cy="154781"/>
+          </a:xfrm>
+          <a:prstGeom prst="rect">
+            <a:avLst/>
+          </a:prstGeom>
+          <a:noFill/>
+          <a:ln/>
+        </p:spPr>
+        <p:txBody>
+          <a:bodyPr wrap="square" lIns="0" tIns="0" rIns="0" bIns="0" rtlCol="0" anchor="t"/>
+          <a:lstStyle/>
+          <a:p>
+            <a:pPr algn="r" indent="0" marL="0">
+              <a:lnSpc>
+                <a:spcPts val="1219"/>
+              </a:lnSpc>
+              <a:buNone/>
+            </a:pPr>
+            <a:r>
+              <a:rPr lang="en-US" sz="975" dirty="0">
+                <a:solidFill>
+                  <a:srgbClr val="A9A79F"/>
                 </a:solidFill>
                 <a:latin typeface="Consolas" pitchFamily="34" charset="0"/>
                 <a:ea typeface="Consolas" pitchFamily="34" charset="-122"/>
                 <a:cs typeface="Consolas" pitchFamily="34" charset="-120"/>
               </a:rPr>
-              <a:t>−0.72</a:t>
-            </a:r>
-            <a:endParaRPr lang="en-US" sz="825" dirty="0"/>
-          </a:p>
-        </p:txBody>
-      </p:sp>
-      <p:sp>
-        <p:nvSpPr>
-          <p:cNvPr id="44" name="Shape 42"/>
-          <p:cNvSpPr/>
-          <p:nvPr/>
-        </p:nvSpPr>
-        <p:spPr>
-          <a:xfrm>
-            <a:off x="2857500" y="4362450"/>
-            <a:ext cx="2481072" cy="95250"/>
-          </a:xfrm>
-          <a:prstGeom prst="rect">
-            <a:avLst/>
-          </a:prstGeom>
-          <a:solidFill>
-            <a:srgbClr val="55708A"/>
-          </a:solidFill>
-          <a:ln/>
-        </p:spPr>
-      </p:sp>
-      <p:sp>
-        <p:nvSpPr>
-          <p:cNvPr id="45" name="Text 43"/>
-          <p:cNvSpPr txBox="1"/>
-          <p:nvPr/>
-        </p:nvSpPr>
-        <p:spPr>
-          <a:xfrm>
-            <a:off x="5414772" y="4352925"/>
-            <a:ext cx="571500" cy="125730"/>
-          </a:xfrm>
-          <a:prstGeom prst="rect">
-            <a:avLst/>
-          </a:prstGeom>
-          <a:noFill/>
-          <a:ln/>
-        </p:spPr>
-        <p:txBody>
-          <a:bodyPr wrap="square" lIns="0" tIns="0" rIns="0" bIns="0" rtlCol="0" anchor="t"/>
-          <a:lstStyle/>
-          <a:p>
-            <a:pPr algn="l" indent="0" marL="0">
-              <a:lnSpc>
-                <a:spcPts val="990"/>
-              </a:lnSpc>
-              <a:buNone/>
-            </a:pPr>
-            <a:r>
-              <a:rPr lang="en-US" sz="825" dirty="0">
-                <a:solidFill>
-                  <a:srgbClr val="55708A"/>
+              <a:t>1.787</a:t>
+            </a:r>
+            <a:endParaRPr lang="en-US" sz="975" dirty="0"/>
+          </a:p>
+        </p:txBody>
+      </p:sp>
+      <p:sp>
+        <p:nvSpPr>
+          <p:cNvPr id="44" name="Text 42"/>
+          <p:cNvSpPr txBox="1"/>
+          <p:nvPr/>
+        </p:nvSpPr>
+        <p:spPr>
+          <a:xfrm>
+            <a:off x="4857750" y="3905250"/>
+            <a:ext cx="762000" cy="154781"/>
+          </a:xfrm>
+          <a:prstGeom prst="rect">
+            <a:avLst/>
+          </a:prstGeom>
+          <a:noFill/>
+          <a:ln/>
+        </p:spPr>
+        <p:txBody>
+          <a:bodyPr wrap="square" lIns="0" tIns="0" rIns="0" bIns="0" rtlCol="0" anchor="t"/>
+          <a:lstStyle/>
+          <a:p>
+            <a:pPr algn="r" indent="0" marL="0">
+              <a:lnSpc>
+                <a:spcPts val="1219"/>
+              </a:lnSpc>
+              <a:buNone/>
+            </a:pPr>
+            <a:r>
+              <a:rPr lang="en-US" sz="975" dirty="0">
+                <a:solidFill>
+                  <a:srgbClr val="A9A79F"/>
                 </a:solidFill>
                 <a:latin typeface="Consolas" pitchFamily="34" charset="0"/>
                 <a:ea typeface="Consolas" pitchFamily="34" charset="-122"/>
                 <a:cs typeface="Consolas" pitchFamily="34" charset="-120"/>
               </a:rPr>
-              <a:t>−0.41</a:t>
-            </a:r>
-            <a:endParaRPr lang="en-US" sz="825" dirty="0"/>
+              <a:t>1.404</a:t>
+            </a:r>
+            <a:endParaRPr lang="en-US" sz="975" dirty="0"/>
+          </a:p>
+        </p:txBody>
+      </p:sp>
+      <p:sp>
+        <p:nvSpPr>
+          <p:cNvPr id="45" name="Text 43"/>
+          <p:cNvSpPr txBox="1"/>
+          <p:nvPr/>
+        </p:nvSpPr>
+        <p:spPr>
+          <a:xfrm>
+            <a:off x="6019800" y="3905250"/>
+            <a:ext cx="762000" cy="154781"/>
+          </a:xfrm>
+          <a:prstGeom prst="rect">
+            <a:avLst/>
+          </a:prstGeom>
+          <a:noFill/>
+          <a:ln/>
+        </p:spPr>
+        <p:txBody>
+          <a:bodyPr wrap="square" lIns="0" tIns="0" rIns="0" bIns="0" rtlCol="0" anchor="t"/>
+          <a:lstStyle/>
+          <a:p>
+            <a:pPr algn="r" indent="0" marL="0">
+              <a:lnSpc>
+                <a:spcPts val="1219"/>
+              </a:lnSpc>
+              <a:buNone/>
+            </a:pPr>
+            <a:r>
+              <a:rPr lang="en-US" sz="975" dirty="0">
+                <a:solidFill>
+                  <a:srgbClr val="A9A79F"/>
+                </a:solidFill>
+                <a:latin typeface="Consolas" pitchFamily="34" charset="0"/>
+                <a:ea typeface="Consolas" pitchFamily="34" charset="-122"/>
+                <a:cs typeface="Consolas" pitchFamily="34" charset="-120"/>
+              </a:rPr>
+              <a:t>0.834</a:t>
+            </a:r>
+            <a:endParaRPr lang="en-US" sz="975" dirty="0"/>
           </a:p>
         </p:txBody>
       </p:sp>
@@ -26778,8 +27045,8 @@
         </p:nvSpPr>
         <p:spPr>
           <a:xfrm>
-            <a:off x="9334500" y="4267200"/>
-            <a:ext cx="1943100" cy="142875"/>
+            <a:off x="7181850" y="3905250"/>
+            <a:ext cx="762000" cy="154781"/>
           </a:xfrm>
           <a:prstGeom prst="rect">
             <a:avLst/>
@@ -26793,20 +27060,62 @@
           <a:p>
             <a:pPr algn="r" indent="0" marL="0">
               <a:lnSpc>
-                <a:spcPts val="1125"/>
-              </a:lnSpc>
-              <a:buNone/>
-            </a:pPr>
-            <a:r>
-              <a:rPr lang="en-US" sz="938" b="1" dirty="0">
+                <a:spcPts val="1219"/>
+              </a:lnSpc>
+              <a:buNone/>
+            </a:pPr>
+            <a:r>
+              <a:rPr lang="en-US" sz="975" dirty="0">
                 <a:solidFill>
                   <a:srgbClr val="A9A79F"/>
+                </a:solidFill>
+                <a:latin typeface="Consolas" pitchFamily="34" charset="0"/>
+                <a:ea typeface="Consolas" pitchFamily="34" charset="-122"/>
+                <a:cs typeface="Consolas" pitchFamily="34" charset="-120"/>
+              </a:rPr>
+              <a:t>162.5</a:t>
+            </a:r>
+            <a:endParaRPr lang="en-US" sz="975" dirty="0"/>
+          </a:p>
+        </p:txBody>
+      </p:sp>
+      <p:sp>
+        <p:nvSpPr>
+          <p:cNvPr id="47" name="Text 45"/>
+          <p:cNvSpPr txBox="1"/>
+          <p:nvPr/>
+        </p:nvSpPr>
+        <p:spPr>
+          <a:xfrm>
+            <a:off x="8572500" y="3905250"/>
+            <a:ext cx="2705100" cy="148828"/>
+          </a:xfrm>
+          <a:prstGeom prst="rect">
+            <a:avLst/>
+          </a:prstGeom>
+          <a:noFill/>
+          <a:ln/>
+        </p:spPr>
+        <p:txBody>
+          <a:bodyPr wrap="square" lIns="0" tIns="0" rIns="0" bIns="0" rtlCol="0" anchor="t"/>
+          <a:lstStyle/>
+          <a:p>
+            <a:pPr algn="r" indent="0" marL="0">
+              <a:lnSpc>
+                <a:spcPts val="1172"/>
+              </a:lnSpc>
+              <a:buNone/>
+            </a:pPr>
+            <a:r>
+              <a:rPr lang="en-US" sz="938" dirty="0">
+                <a:solidFill>
+                  <a:srgbClr val="8A8880"/>
                 </a:solidFill>
                 <a:latin typeface="Malgun Gothic" pitchFamily="34" charset="0"/>
                 <a:ea typeface="Malgun Gothic" pitchFamily="34" charset="-122"/>
                 <a:cs typeface="Malgun Gothic" pitchFamily="34" charset="-120"/>
               </a:rPr>
-              <a:t>③ −0.24 → 사라짐</a:t>
+              <a:t>개선 없음</a:t>
             </a:r>
             <a:endParaRPr lang="en-US" sz="938" dirty="0"/>
           </a:p>
@@ -26814,49 +27123,377 @@
       </p:sp>
       <p:sp>
         <p:nvSpPr>
-          <p:cNvPr id="47" name="Text 45"/>
-          <p:cNvSpPr txBox="1"/>
-          <p:nvPr/>
-        </p:nvSpPr>
-        <p:spPr>
-          <a:xfrm>
-            <a:off x="914400" y="4514850"/>
-            <a:ext cx="10363200" cy="131445"/>
-          </a:xfrm>
-          <a:prstGeom prst="rect">
-            <a:avLst/>
-          </a:prstGeom>
-          <a:noFill/>
-          <a:ln/>
-        </p:spPr>
-        <p:txBody>
-          <a:bodyPr wrap="square" lIns="0" tIns="0" rIns="0" bIns="0" rtlCol="0" anchor="t"/>
-          <a:lstStyle/>
-          <a:p>
-            <a:pPr algn="l" indent="0" marL="0">
-              <a:lnSpc>
-                <a:spcPts val="1035"/>
-              </a:lnSpc>
-              <a:buNone/>
-            </a:pPr>
-            <a:r>
-              <a:rPr lang="en-US" sz="863" dirty="0">
-                <a:solidFill>
-                  <a:srgbClr val="8A8880"/>
+          <p:cNvPr id="48" name="Text 46"/>
+          <p:cNvSpPr txBox="1"/>
+          <p:nvPr/>
+        </p:nvSpPr>
+        <p:spPr>
+          <a:xfrm>
+            <a:off x="914400" y="4114800"/>
+            <a:ext cx="2514600" cy="154781"/>
+          </a:xfrm>
+          <a:prstGeom prst="rect">
+            <a:avLst/>
+          </a:prstGeom>
+          <a:noFill/>
+          <a:ln/>
+        </p:spPr>
+        <p:txBody>
+          <a:bodyPr wrap="square" lIns="0" tIns="0" rIns="0" bIns="0" rtlCol="0" anchor="t"/>
+          <a:lstStyle/>
+          <a:p>
+            <a:pPr algn="l" indent="0" marL="0">
+              <a:lnSpc>
+                <a:spcPts val="1219"/>
+              </a:lnSpc>
+              <a:buNone/>
+            </a:pPr>
+            <a:r>
+              <a:rPr lang="en-US" sz="975" dirty="0">
+                <a:solidFill>
+                  <a:srgbClr val="CFCBC2"/>
+                </a:solidFill>
+                <a:latin typeface="Malgun Gothic" pitchFamily="34" charset="0"/>
+                <a:ea typeface="Malgun Gothic" pitchFamily="34" charset="-122"/>
+                <a:cs typeface="Malgun Gothic" pitchFamily="34" charset="-120"/>
+              </a:rPr>
+              <a:t>전체 변수</a:t>
+            </a:r>
+            <a:endParaRPr lang="en-US" sz="975" dirty="0"/>
+          </a:p>
+        </p:txBody>
+      </p:sp>
+      <p:sp>
+        <p:nvSpPr>
+          <p:cNvPr id="49" name="Text 47"/>
+          <p:cNvSpPr txBox="1"/>
+          <p:nvPr/>
+        </p:nvSpPr>
+        <p:spPr>
+          <a:xfrm>
+            <a:off x="3714750" y="4114800"/>
+            <a:ext cx="762000" cy="154781"/>
+          </a:xfrm>
+          <a:prstGeom prst="rect">
+            <a:avLst/>
+          </a:prstGeom>
+          <a:noFill/>
+          <a:ln/>
+        </p:spPr>
+        <p:txBody>
+          <a:bodyPr wrap="square" lIns="0" tIns="0" rIns="0" bIns="0" rtlCol="0" anchor="t"/>
+          <a:lstStyle/>
+          <a:p>
+            <a:pPr algn="r" indent="0" marL="0">
+              <a:lnSpc>
+                <a:spcPts val="1219"/>
+              </a:lnSpc>
+              <a:buNone/>
+            </a:pPr>
+            <a:r>
+              <a:rPr lang="en-US" sz="975" dirty="0">
+                <a:solidFill>
+                  <a:srgbClr val="A9A79F"/>
                 </a:solidFill>
                 <a:latin typeface="Consolas" pitchFamily="34" charset="0"/>
                 <a:ea typeface="Consolas" pitchFamily="34" charset="-122"/>
                 <a:cs typeface="Consolas" pitchFamily="34" charset="-120"/>
               </a:rPr>
-              <a:t>온도와의 r  진공도 +0.95   ·   대기압 −0.83   ·   습도 +0.67  — 후보들이 서로 온도에 묶여 있다</a:t>
-            </a:r>
-            <a:endParaRPr lang="en-US" sz="863" dirty="0"/>
-          </a:p>
-        </p:txBody>
-      </p:sp>
-      <p:sp>
-        <p:nvSpPr>
-          <p:cNvPr id="48" name="Shape 46"/>
+              <a:t>1.867</a:t>
+            </a:r>
+            <a:endParaRPr lang="en-US" sz="975" dirty="0"/>
+          </a:p>
+        </p:txBody>
+      </p:sp>
+      <p:sp>
+        <p:nvSpPr>
+          <p:cNvPr id="50" name="Text 48"/>
+          <p:cNvSpPr txBox="1"/>
+          <p:nvPr/>
+        </p:nvSpPr>
+        <p:spPr>
+          <a:xfrm>
+            <a:off x="4857750" y="4114800"/>
+            <a:ext cx="762000" cy="154781"/>
+          </a:xfrm>
+          <a:prstGeom prst="rect">
+            <a:avLst/>
+          </a:prstGeom>
+          <a:noFill/>
+          <a:ln/>
+        </p:spPr>
+        <p:txBody>
+          <a:bodyPr wrap="square" lIns="0" tIns="0" rIns="0" bIns="0" rtlCol="0" anchor="t"/>
+          <a:lstStyle/>
+          <a:p>
+            <a:pPr algn="r" indent="0" marL="0">
+              <a:lnSpc>
+                <a:spcPts val="1219"/>
+              </a:lnSpc>
+              <a:buNone/>
+            </a:pPr>
+            <a:r>
+              <a:rPr lang="en-US" sz="975" dirty="0">
+                <a:solidFill>
+                  <a:srgbClr val="A9A79F"/>
+                </a:solidFill>
+                <a:latin typeface="Consolas" pitchFamily="34" charset="0"/>
+                <a:ea typeface="Consolas" pitchFamily="34" charset="-122"/>
+                <a:cs typeface="Consolas" pitchFamily="34" charset="-120"/>
+              </a:rPr>
+              <a:t>1.440</a:t>
+            </a:r>
+            <a:endParaRPr lang="en-US" sz="975" dirty="0"/>
+          </a:p>
+        </p:txBody>
+      </p:sp>
+      <p:sp>
+        <p:nvSpPr>
+          <p:cNvPr id="51" name="Text 49"/>
+          <p:cNvSpPr txBox="1"/>
+          <p:nvPr/>
+        </p:nvSpPr>
+        <p:spPr>
+          <a:xfrm>
+            <a:off x="6019800" y="4114800"/>
+            <a:ext cx="762000" cy="154781"/>
+          </a:xfrm>
+          <a:prstGeom prst="rect">
+            <a:avLst/>
+          </a:prstGeom>
+          <a:noFill/>
+          <a:ln/>
+        </p:spPr>
+        <p:txBody>
+          <a:bodyPr wrap="square" lIns="0" tIns="0" rIns="0" bIns="0" rtlCol="0" anchor="t"/>
+          <a:lstStyle/>
+          <a:p>
+            <a:pPr algn="r" indent="0" marL="0">
+              <a:lnSpc>
+                <a:spcPts val="1219"/>
+              </a:lnSpc>
+              <a:buNone/>
+            </a:pPr>
+            <a:r>
+              <a:rPr lang="en-US" sz="975" dirty="0">
+                <a:solidFill>
+                  <a:srgbClr val="A9A79F"/>
+                </a:solidFill>
+                <a:latin typeface="Consolas" pitchFamily="34" charset="0"/>
+                <a:ea typeface="Consolas" pitchFamily="34" charset="-122"/>
+                <a:cs typeface="Consolas" pitchFamily="34" charset="-120"/>
+              </a:rPr>
+              <a:t>0.819</a:t>
+            </a:r>
+            <a:endParaRPr lang="en-US" sz="975" dirty="0"/>
+          </a:p>
+        </p:txBody>
+      </p:sp>
+      <p:sp>
+        <p:nvSpPr>
+          <p:cNvPr id="52" name="Text 50"/>
+          <p:cNvSpPr txBox="1"/>
+          <p:nvPr/>
+        </p:nvSpPr>
+        <p:spPr>
+          <a:xfrm>
+            <a:off x="7181850" y="4114800"/>
+            <a:ext cx="762000" cy="154781"/>
+          </a:xfrm>
+          <a:prstGeom prst="rect">
+            <a:avLst/>
+          </a:prstGeom>
+          <a:noFill/>
+          <a:ln/>
+        </p:spPr>
+        <p:txBody>
+          <a:bodyPr wrap="square" lIns="0" tIns="0" rIns="0" bIns="0" rtlCol="0" anchor="t"/>
+          <a:lstStyle/>
+          <a:p>
+            <a:pPr algn="r" indent="0" marL="0">
+              <a:lnSpc>
+                <a:spcPts val="1219"/>
+              </a:lnSpc>
+              <a:buNone/>
+            </a:pPr>
+            <a:r>
+              <a:rPr lang="en-US" sz="975" dirty="0">
+                <a:solidFill>
+                  <a:srgbClr val="A9A79F"/>
+                </a:solidFill>
+                <a:latin typeface="Consolas" pitchFamily="34" charset="0"/>
+                <a:ea typeface="Consolas" pitchFamily="34" charset="-122"/>
+                <a:cs typeface="Consolas" pitchFamily="34" charset="-120"/>
+              </a:rPr>
+              <a:t>173.0</a:t>
+            </a:r>
+            <a:endParaRPr lang="en-US" sz="975" dirty="0"/>
+          </a:p>
+        </p:txBody>
+      </p:sp>
+      <p:sp>
+        <p:nvSpPr>
+          <p:cNvPr id="53" name="Text 51"/>
+          <p:cNvSpPr txBox="1"/>
+          <p:nvPr/>
+        </p:nvSpPr>
+        <p:spPr>
+          <a:xfrm>
+            <a:off x="8572500" y="4114800"/>
+            <a:ext cx="2705100" cy="148828"/>
+          </a:xfrm>
+          <a:prstGeom prst="rect">
+            <a:avLst/>
+          </a:prstGeom>
+          <a:noFill/>
+          <a:ln/>
+        </p:spPr>
+        <p:txBody>
+          <a:bodyPr wrap="square" lIns="0" tIns="0" rIns="0" bIns="0" rtlCol="0" anchor="t"/>
+          <a:lstStyle/>
+          <a:p>
+            <a:pPr algn="r" indent="0" marL="0">
+              <a:lnSpc>
+                <a:spcPts val="1172"/>
+              </a:lnSpc>
+              <a:buNone/>
+            </a:pPr>
+            <a:r>
+              <a:rPr lang="en-US" sz="938" dirty="0">
+                <a:solidFill>
+                  <a:srgbClr val="8A8880"/>
+                </a:solidFill>
+                <a:latin typeface="Malgun Gothic" pitchFamily="34" charset="0"/>
+                <a:ea typeface="Malgun Gothic" pitchFamily="34" charset="-122"/>
+                <a:cs typeface="Malgun Gothic" pitchFamily="34" charset="-120"/>
+              </a:rPr>
+              <a:t>개선 없음</a:t>
+            </a:r>
+            <a:endParaRPr lang="en-US" sz="938" dirty="0"/>
+          </a:p>
+        </p:txBody>
+      </p:sp>
+      <p:sp>
+        <p:nvSpPr>
+          <p:cNvPr id="54" name="Text 52"/>
+          <p:cNvSpPr txBox="1"/>
+          <p:nvPr/>
+        </p:nvSpPr>
+        <p:spPr>
+          <a:xfrm>
+            <a:off x="914400" y="4343400"/>
+            <a:ext cx="10363200" cy="125730"/>
+          </a:xfrm>
+          <a:prstGeom prst="rect">
+            <a:avLst/>
+          </a:prstGeom>
+          <a:noFill/>
+          <a:ln/>
+        </p:spPr>
+        <p:txBody>
+          <a:bodyPr wrap="square" lIns="0" tIns="0" rIns="0" bIns="0" rtlCol="0" anchor="t"/>
+          <a:lstStyle/>
+          <a:p>
+            <a:pPr algn="l" indent="0" marL="0">
+              <a:lnSpc>
+                <a:spcPts val="990"/>
+              </a:lnSpc>
+              <a:buNone/>
+            </a:pPr>
+            <a:r>
+              <a:rPr lang="en-US" sz="825" dirty="0">
+                <a:solidFill>
+                  <a:srgbClr val="8A8880"/>
+                </a:solidFill>
+                <a:latin typeface="Malgun Gothic" pitchFamily="34" charset="0"/>
+                <a:ea typeface="Malgun Gothic" pitchFamily="34" charset="-122"/>
+                <a:cs typeface="Malgun Gothic" pitchFamily="34" charset="-120"/>
+              </a:rPr>
+              <a:t>RMSE 크게 틀린 경우에 벌점을 더 준 평균 오차  ·  MAE 평균 오차  ·  R² 설명력  ·  AIC 적합도와 복잡도를 함께 보는 지표(변수를 늘리면 벌점)</a:t>
+            </a:r>
+            <a:endParaRPr lang="en-US" sz="825" dirty="0"/>
+          </a:p>
+        </p:txBody>
+      </p:sp>
+      <p:sp>
+        <p:nvSpPr>
+          <p:cNvPr id="55" name="Text 53"/>
+          <p:cNvSpPr txBox="1"/>
+          <p:nvPr/>
+        </p:nvSpPr>
+        <p:spPr>
+          <a:xfrm>
+            <a:off x="914400" y="4495800"/>
+            <a:ext cx="10363200" cy="125730"/>
+          </a:xfrm>
+          <a:prstGeom prst="rect">
+            <a:avLst/>
+          </a:prstGeom>
+          <a:noFill/>
+          <a:ln/>
+        </p:spPr>
+        <p:txBody>
+          <a:bodyPr wrap="square" lIns="0" tIns="0" rIns="0" bIns="0" rtlCol="0" anchor="t"/>
+          <a:lstStyle/>
+          <a:p>
+            <a:pPr algn="l" indent="0" marL="0">
+              <a:lnSpc>
+                <a:spcPts val="990"/>
+              </a:lnSpc>
+              <a:buNone/>
+            </a:pPr>
+            <a:r>
+              <a:rPr lang="en-US" sz="825" dirty="0">
+                <a:solidFill>
+                  <a:srgbClr val="8A8880"/>
+                </a:solidFill>
+                <a:latin typeface="Malgun Gothic" pitchFamily="34" charset="0"/>
+                <a:ea typeface="Malgun Gothic" pitchFamily="34" charset="-122"/>
+                <a:cs typeface="Malgun Gothic" pitchFamily="34" charset="-120"/>
+              </a:rPr>
+              <a:t>커널 점과 점 사이를 어떤 모양으로 이을지 정하는 규칙  ·  LOOCV 한 회를 가리고 나머지로 맞혀보기 — 네 지표 모두 </a:t>
+            </a:r>
+            <a:pPr algn="l" indent="0" marL="0">
+              <a:lnSpc>
+                <a:spcPts val="990"/>
+              </a:lnSpc>
+              <a:buNone/>
+            </a:pPr>
+            <a:r>
+              <a:rPr lang="en-US" sz="825" b="1" dirty="0">
+                <a:solidFill>
+                  <a:srgbClr val="EFB13C"/>
+                </a:solidFill>
+                <a:latin typeface="Malgun Gothic" pitchFamily="34" charset="0"/>
+                <a:ea typeface="Malgun Gothic" pitchFamily="34" charset="-122"/>
+                <a:cs typeface="Malgun Gothic" pitchFamily="34" charset="-120"/>
+              </a:rPr>
+              <a:t>MW 단위 예측 오차</a:t>
+            </a:r>
+            <a:pPr algn="l" indent="0" marL="0">
+              <a:lnSpc>
+                <a:spcPts val="990"/>
+              </a:lnSpc>
+              <a:buNone/>
+            </a:pPr>
+            <a:r>
+              <a:rPr lang="en-US" sz="825" dirty="0">
+                <a:solidFill>
+                  <a:srgbClr val="8A8880"/>
+                </a:solidFill>
+                <a:latin typeface="Malgun Gothic" pitchFamily="34" charset="0"/>
+                <a:ea typeface="Malgun Gothic" pitchFamily="34" charset="-122"/>
+                <a:cs typeface="Malgun Gothic" pitchFamily="34" charset="-120"/>
+              </a:rPr>
+              <a:t>이고, 같은 39회를 같은 방식으로 쟀습니다.</a:t>
+            </a:r>
+            <a:endParaRPr lang="en-US" sz="825" dirty="0"/>
+          </a:p>
+        </p:txBody>
+      </p:sp>
+      <p:sp>
+        <p:nvSpPr>
+          <p:cNvPr id="56" name="Shape 54"/>
           <p:cNvSpPr/>
           <p:nvPr/>
         </p:nvSpPr>
@@ -26881,7 +27518,7 @@
       </p:sp>
       <p:sp>
         <p:nvSpPr>
-          <p:cNvPr id="49" name="Text 47"/>
+          <p:cNvPr id="57" name="Text 55"/>
           <p:cNvSpPr txBox="1"/>
           <p:nvPr/>
         </p:nvSpPr>
@@ -26923,7 +27560,7 @@
       </p:sp>
       <p:sp>
         <p:nvSpPr>
-          <p:cNvPr id="50" name="Shape 48"/>
+          <p:cNvPr id="58" name="Shape 56"/>
           <p:cNvSpPr/>
           <p:nvPr/>
         </p:nvSpPr>
@@ -26943,7 +27580,7 @@
       </p:sp>
       <p:sp>
         <p:nvSpPr>
-          <p:cNvPr id="51" name="Text 49"/>
+          <p:cNvPr id="59" name="Text 57"/>
           <p:cNvSpPr txBox="1"/>
           <p:nvPr/>
         </p:nvSpPr>
@@ -26977,7 +27614,7 @@
                 <a:ea typeface="Malgun Gothic" pitchFamily="34" charset="-122"/>
                 <a:cs typeface="Malgun Gothic" pitchFamily="34" charset="-120"/>
               </a:rPr>
-              <a:t>진공도·대기압은 온도의 그림자였습니다</a:t>
+              <a:t>외기 온도를 최종 입력 변수로 선정했습니다</a:t>
             </a:r>
             <a:endParaRPr lang="en-US" sz="1050" dirty="0"/>
           </a:p>
@@ -26985,7 +27622,7 @@
       </p:sp>
       <p:sp>
         <p:nvSpPr>
-          <p:cNvPr id="52" name="Text 50"/>
+          <p:cNvPr id="60" name="Text 58"/>
           <p:cNvSpPr txBox="1"/>
           <p:nvPr/>
         </p:nvSpPr>
@@ -27019,7 +27656,41 @@
                 <a:ea typeface="Malgun Gothic" pitchFamily="34" charset="-122"/>
                 <a:cs typeface="Malgun Gothic" pitchFamily="34" charset="-120"/>
               </a:rPr>
-              <a:t>① 에서 강해 보인 것은 이 둘이 온도를 따라가기 때문입니다. 온도를 빼면 사라집니다.</a:t>
+              <a:t>네 지표 중 </a:t>
+            </a:r>
+            <a:pPr algn="l" indent="0" marL="0">
+              <a:lnSpc>
+                <a:spcPts val="1406"/>
+              </a:lnSpc>
+              <a:buNone/>
+            </a:pPr>
+            <a:r>
+              <a:rPr lang="en-US" sz="938" b="1" dirty="0">
+                <a:solidFill>
+                  <a:srgbClr val="EFB13C"/>
+                </a:solidFill>
+                <a:latin typeface="Malgun Gothic" pitchFamily="34" charset="0"/>
+                <a:ea typeface="Malgun Gothic" pitchFamily="34" charset="-122"/>
+                <a:cs typeface="Malgun Gothic" pitchFamily="34" charset="-120"/>
+              </a:rPr>
+              <a:t>셋(RMSE · R² · AIC)에서 온도 단독이 1위</a:t>
+            </a:r>
+            <a:pPr algn="l" indent="0" marL="0">
+              <a:lnSpc>
+                <a:spcPts val="1406"/>
+              </a:lnSpc>
+              <a:buNone/>
+            </a:pPr>
+            <a:r>
+              <a:rPr lang="en-US" sz="938" dirty="0">
+                <a:solidFill>
+                  <a:srgbClr val="A9A79F"/>
+                </a:solidFill>
+                <a:latin typeface="Malgun Gothic" pitchFamily="34" charset="0"/>
+                <a:ea typeface="Malgun Gothic" pitchFamily="34" charset="-122"/>
+                <a:cs typeface="Malgun Gothic" pitchFamily="34" charset="-120"/>
+              </a:rPr>
+              <a:t>입니다. 온도 외의 변수를 더해도 예측이 좋아지지 않았습니다.</a:t>
             </a:r>
             <a:endParaRPr lang="en-US" sz="938" dirty="0"/>
           </a:p>
@@ -27027,7 +27698,7 @@
       </p:sp>
       <p:sp>
         <p:nvSpPr>
-          <p:cNvPr id="53" name="Shape 51"/>
+          <p:cNvPr id="61" name="Shape 59"/>
           <p:cNvSpPr/>
           <p:nvPr/>
         </p:nvSpPr>
@@ -27047,7 +27718,7 @@
       </p:sp>
       <p:sp>
         <p:nvSpPr>
-          <p:cNvPr id="54" name="Text 52"/>
+          <p:cNvPr id="62" name="Text 60"/>
           <p:cNvSpPr txBox="1"/>
           <p:nvPr/>
         </p:nvSpPr>
@@ -27081,50 +27752,50 @@
                 <a:ea typeface="Malgun Gothic" pitchFamily="34" charset="-122"/>
                 <a:cs typeface="Malgun Gothic" pitchFamily="34" charset="-120"/>
               </a:rPr>
-              <a:t>습도는 ② 에서 남고 ③ 에서 사라졌습니다</a:t>
-            </a:r>
-            <a:endParaRPr lang="en-US" sz="1050" dirty="0"/>
-          </a:p>
-        </p:txBody>
-      </p:sp>
-      <p:sp>
-        <p:nvSpPr>
-          <p:cNvPr id="55" name="Text 53"/>
-          <p:cNvSpPr txBox="1"/>
-          <p:nvPr/>
-        </p:nvSpPr>
-        <p:spPr>
-          <a:xfrm>
-            <a:off x="4419600" y="5429250"/>
-            <a:ext cx="3276600" cy="535781"/>
-          </a:xfrm>
-          <a:prstGeom prst="rect">
-            <a:avLst/>
-          </a:prstGeom>
-          <a:noFill/>
-          <a:ln/>
-        </p:spPr>
-        <p:txBody>
-          <a:bodyPr wrap="square" lIns="0" tIns="0" rIns="0" bIns="0" rtlCol="0" anchor="t"/>
-          <a:lstStyle/>
-          <a:p>
-            <a:pPr algn="l" indent="0" marL="0">
-              <a:lnSpc>
-                <a:spcPts val="1406"/>
-              </a:lnSpc>
-              <a:buNone/>
-            </a:pPr>
-            <a:r>
-              <a:rPr lang="en-US" sz="938" dirty="0">
-                <a:solidFill>
-                  <a:srgbClr val="A9A79F"/>
+              <a:t>가장 근접한 조합도 </a:t>
+            </a:r>
+            <a:pPr algn="l" indent="0" marL="0">
+              <a:lnSpc>
+                <a:spcPts val="1365"/>
+              </a:lnSpc>
+              <a:buNone/>
+            </a:pPr>
+            <a:r>
+              <a:rPr lang="en-US" sz="1050" b="1" dirty="0">
+                <a:solidFill>
+                  <a:srgbClr val="EFB13C"/>
                 </a:solidFill>
                 <a:latin typeface="Malgun Gothic" pitchFamily="34" charset="0"/>
                 <a:ea typeface="Malgun Gothic" pitchFamily="34" charset="-122"/>
                 <a:cs typeface="Malgun Gothic" pitchFamily="34" charset="-120"/>
               </a:rPr>
-              <a:t>온도를 </a:t>
-            </a:r>
+              <a:t>구분되지 않습니다</a:t>
+            </a:r>
+            <a:endParaRPr lang="en-US" sz="1050" dirty="0"/>
+          </a:p>
+        </p:txBody>
+      </p:sp>
+      <p:sp>
+        <p:nvSpPr>
+          <p:cNvPr id="63" name="Text 61"/>
+          <p:cNvSpPr txBox="1"/>
+          <p:nvPr/>
+        </p:nvSpPr>
+        <p:spPr>
+          <a:xfrm>
+            <a:off x="4419600" y="5429250"/>
+            <a:ext cx="3276600" cy="535781"/>
+          </a:xfrm>
+          <a:prstGeom prst="rect">
+            <a:avLst/>
+          </a:prstGeom>
+          <a:noFill/>
+          <a:ln/>
+        </p:spPr>
+        <p:txBody>
+          <a:bodyPr wrap="square" lIns="0" tIns="0" rIns="0" bIns="0" rtlCol="0" anchor="t"/>
+          <a:lstStyle/>
+          <a:p>
             <a:pPr algn="l" indent="0" marL="0">
               <a:lnSpc>
                 <a:spcPts val="1406"/>
@@ -27132,41 +27803,86 @@
               <a:buNone/>
             </a:pPr>
             <a:r>
-              <a:rPr lang="en-US" sz="938" b="1" dirty="0">
-                <a:solidFill>
-                  <a:srgbClr val="EFB13C"/>
+              <a:rPr lang="en-US" sz="938" dirty="0">
+                <a:solidFill>
+                  <a:srgbClr val="A9A79F"/>
                 </a:solidFill>
                 <a:latin typeface="Malgun Gothic" pitchFamily="34" charset="0"/>
                 <a:ea typeface="Malgun Gothic" pitchFamily="34" charset="-122"/>
                 <a:cs typeface="Malgun Gothic" pitchFamily="34" charset="-120"/>
               </a:rPr>
-              <a:t>직선</a:t>
-            </a:r>
-            <a:pPr algn="l" indent="0" marL="0">
-              <a:lnSpc>
-                <a:spcPts val="1406"/>
-              </a:lnSpc>
-              <a:buNone/>
-            </a:pPr>
-            <a:r>
-              <a:rPr lang="en-US" sz="938" dirty="0">
-                <a:solidFill>
-                  <a:srgbClr val="A9A79F"/>
+              <a:t>MAE 만 「+상대습도」가 0.01 MW 낮은데, 회차별로 짝지어 재면 그 차이가 ±0.08 MW — 우연과 갈리지 않습니다.</a:t>
+            </a:r>
+            <a:endParaRPr lang="en-US" sz="938" dirty="0"/>
+          </a:p>
+        </p:txBody>
+      </p:sp>
+      <p:sp>
+        <p:nvSpPr>
+          <p:cNvPr id="64" name="Shape 62"/>
+          <p:cNvSpPr/>
+          <p:nvPr/>
+        </p:nvSpPr>
+        <p:spPr>
+          <a:xfrm>
+            <a:off x="7924800" y="5086350"/>
+            <a:ext cx="323850" cy="19050"/>
+          </a:xfrm>
+          <a:prstGeom prst="rect">
+            <a:avLst/>
+          </a:prstGeom>
+          <a:solidFill>
+            <a:srgbClr val="EFB13C"/>
+          </a:solidFill>
+          <a:ln/>
+        </p:spPr>
+      </p:sp>
+      <p:sp>
+        <p:nvSpPr>
+          <p:cNvPr id="65" name="Text 63"/>
+          <p:cNvSpPr txBox="1"/>
+          <p:nvPr/>
+        </p:nvSpPr>
+        <p:spPr>
+          <a:xfrm>
+            <a:off x="7924800" y="5181600"/>
+            <a:ext cx="3276600" cy="173355"/>
+          </a:xfrm>
+          <a:prstGeom prst="rect">
+            <a:avLst/>
+          </a:prstGeom>
+          <a:noFill/>
+          <a:ln/>
+        </p:spPr>
+        <p:txBody>
+          <a:bodyPr wrap="square" lIns="0" tIns="0" rIns="0" bIns="0" rtlCol="0" anchor="t"/>
+          <a:lstStyle/>
+          <a:p>
+            <a:pPr algn="l" indent="0" marL="0">
+              <a:lnSpc>
+                <a:spcPts val="1365"/>
+              </a:lnSpc>
+              <a:buNone/>
+            </a:pPr>
+            <a:r>
+              <a:rPr lang="en-US" sz="1050" b="1" dirty="0">
+                <a:solidFill>
+                  <a:srgbClr val="EAE7E0"/>
                 </a:solidFill>
                 <a:latin typeface="Malgun Gothic" pitchFamily="34" charset="0"/>
                 <a:ea typeface="Malgun Gothic" pitchFamily="34" charset="-122"/>
                 <a:cs typeface="Malgun Gothic" pitchFamily="34" charset="-120"/>
               </a:rPr>
-              <a:t>으로 빼면 남고, </a:t>
-            </a:r>
-            <a:pPr algn="l" indent="0" marL="0">
-              <a:lnSpc>
-                <a:spcPts val="1406"/>
-              </a:lnSpc>
-              <a:buNone/>
-            </a:pPr>
-            <a:r>
-              <a:rPr lang="en-US" sz="938" b="1" dirty="0">
+              <a:t>모델이 </a:t>
+            </a:r>
+            <a:pPr algn="l" indent="0" marL="0">
+              <a:lnSpc>
+                <a:spcPts val="1365"/>
+              </a:lnSpc>
+              <a:buNone/>
+            </a:pPr>
+            <a:r>
+              <a:rPr lang="en-US" sz="1050" b="1" dirty="0">
                 <a:solidFill>
                   <a:srgbClr val="EFB13C"/>
                 </a:solidFill>
@@ -27174,128 +27890,66 @@
                 <a:ea typeface="Malgun Gothic" pitchFamily="34" charset="-122"/>
                 <a:cs typeface="Malgun Gothic" pitchFamily="34" charset="-120"/>
               </a:rPr>
-              <a:t>곡선</a:t>
-            </a:r>
-            <a:pPr algn="l" indent="0" marL="0">
-              <a:lnSpc>
-                <a:spcPts val="1406"/>
-              </a:lnSpc>
-              <a:buNone/>
-            </a:pPr>
-            <a:r>
-              <a:rPr lang="en-US" sz="938" dirty="0">
-                <a:solidFill>
-                  <a:srgbClr val="A9A79F"/>
+              <a:t>스스로 무시</a:t>
+            </a:r>
+            <a:pPr algn="l" indent="0" marL="0">
+              <a:lnSpc>
+                <a:spcPts val="1365"/>
+              </a:lnSpc>
+              <a:buNone/>
+            </a:pPr>
+            <a:r>
+              <a:rPr lang="en-US" sz="1050" b="1" dirty="0">
+                <a:solidFill>
+                  <a:srgbClr val="EAE7E0"/>
                 </a:solidFill>
                 <a:latin typeface="Malgun Gothic" pitchFamily="34" charset="0"/>
                 <a:ea typeface="Malgun Gothic" pitchFamily="34" charset="-122"/>
                 <a:cs typeface="Malgun Gothic" pitchFamily="34" charset="-120"/>
               </a:rPr>
-              <a:t>으로 빼면 사라집니다 — 관계가 직선이 아니라는 뜻입니다.</a:t>
-            </a:r>
-            <a:endParaRPr lang="en-US" sz="938" dirty="0"/>
-          </a:p>
-        </p:txBody>
-      </p:sp>
-      <p:sp>
-        <p:nvSpPr>
-          <p:cNvPr id="56" name="Shape 54"/>
-          <p:cNvSpPr/>
-          <p:nvPr/>
-        </p:nvSpPr>
-        <p:spPr>
-          <a:xfrm>
-            <a:off x="7924800" y="5086350"/>
-            <a:ext cx="323850" cy="19050"/>
-          </a:xfrm>
-          <a:prstGeom prst="rect">
-            <a:avLst/>
-          </a:prstGeom>
-          <a:solidFill>
-            <a:srgbClr val="EFB13C"/>
-          </a:solidFill>
-          <a:ln/>
-        </p:spPr>
-      </p:sp>
-      <p:sp>
-        <p:nvSpPr>
-          <p:cNvPr id="57" name="Text 55"/>
-          <p:cNvSpPr txBox="1"/>
-          <p:nvPr/>
-        </p:nvSpPr>
-        <p:spPr>
-          <a:xfrm>
-            <a:off x="7924800" y="5181600"/>
-            <a:ext cx="3276600" cy="173355"/>
-          </a:xfrm>
-          <a:prstGeom prst="rect">
-            <a:avLst/>
-          </a:prstGeom>
-          <a:noFill/>
-          <a:ln/>
-        </p:spPr>
-        <p:txBody>
-          <a:bodyPr wrap="square" lIns="0" tIns="0" rIns="0" bIns="0" rtlCol="0" anchor="t"/>
-          <a:lstStyle/>
-          <a:p>
-            <a:pPr algn="l" indent="0" marL="0">
-              <a:lnSpc>
-                <a:spcPts val="1365"/>
-              </a:lnSpc>
-              <a:buNone/>
-            </a:pPr>
-            <a:r>
-              <a:rPr lang="en-US" sz="1050" b="1" dirty="0">
-                <a:solidFill>
-                  <a:srgbClr val="EAE7E0"/>
+              <a:t>했습니다</a:t>
+            </a:r>
+            <a:endParaRPr lang="en-US" sz="1050" dirty="0"/>
+          </a:p>
+        </p:txBody>
+      </p:sp>
+      <p:sp>
+        <p:nvSpPr>
+          <p:cNvPr id="66" name="Text 64"/>
+          <p:cNvSpPr txBox="1"/>
+          <p:nvPr/>
+        </p:nvSpPr>
+        <p:spPr>
+          <a:xfrm>
+            <a:off x="7924800" y="5429250"/>
+            <a:ext cx="3276600" cy="535781"/>
+          </a:xfrm>
+          <a:prstGeom prst="rect">
+            <a:avLst/>
+          </a:prstGeom>
+          <a:noFill/>
+          <a:ln/>
+        </p:spPr>
+        <p:txBody>
+          <a:bodyPr wrap="square" lIns="0" tIns="0" rIns="0" bIns="0" rtlCol="0" anchor="t"/>
+          <a:lstStyle/>
+          <a:p>
+            <a:pPr algn="l" indent="0" marL="0">
+              <a:lnSpc>
+                <a:spcPts val="1406"/>
+              </a:lnSpc>
+              <a:buNone/>
+            </a:pPr>
+            <a:r>
+              <a:rPr lang="en-US" sz="938" dirty="0">
+                <a:solidFill>
+                  <a:srgbClr val="A9A79F"/>
                 </a:solidFill>
                 <a:latin typeface="Malgun Gothic" pitchFamily="34" charset="0"/>
                 <a:ea typeface="Malgun Gothic" pitchFamily="34" charset="-122"/>
                 <a:cs typeface="Malgun Gothic" pitchFamily="34" charset="-120"/>
               </a:rPr>
-              <a:t>모델이 남긴 오차는 설명되지 않습니다</a:t>
-            </a:r>
-            <a:endParaRPr lang="en-US" sz="1050" dirty="0"/>
-          </a:p>
-        </p:txBody>
-      </p:sp>
-      <p:sp>
-        <p:nvSpPr>
-          <p:cNvPr id="58" name="Text 56"/>
-          <p:cNvSpPr txBox="1"/>
-          <p:nvPr/>
-        </p:nvSpPr>
-        <p:spPr>
-          <a:xfrm>
-            <a:off x="7924800" y="5429250"/>
-            <a:ext cx="3276600" cy="535781"/>
-          </a:xfrm>
-          <a:prstGeom prst="rect">
-            <a:avLst/>
-          </a:prstGeom>
-          <a:noFill/>
-          <a:ln/>
-        </p:spPr>
-        <p:txBody>
-          <a:bodyPr wrap="square" lIns="0" tIns="0" rIns="0" bIns="0" rtlCol="0" anchor="t"/>
-          <a:lstStyle/>
-          <a:p>
-            <a:pPr algn="l" indent="0" marL="0">
-              <a:lnSpc>
-                <a:spcPts val="1406"/>
-              </a:lnSpc>
-              <a:buNone/>
-            </a:pPr>
-            <a:r>
-              <a:rPr lang="en-US" sz="938" dirty="0">
-                <a:solidFill>
-                  <a:srgbClr val="A9A79F"/>
-                </a:solidFill>
-                <a:latin typeface="Malgun Gothic" pitchFamily="34" charset="0"/>
-                <a:ea typeface="Malgun Gothic" pitchFamily="34" charset="-122"/>
-                <a:cs typeface="Malgun Gothic" pitchFamily="34" charset="-120"/>
-              </a:rPr>
-              <a:t>평균 1.29 MW 남은 오차를 넷 중 어느 것도 설명하지 못했습니다. 진공도는 세 번 의심해 세 번 다 기각했습니다.</a:t>
+              <a:t>변수마다 따로 길이척도를 줘서 필요 없으면 모델이 버릴 수 있게 뒀는데, 추가 변수는 모두 「영향 없음」 쪽 값이 붙었습니다.</a:t>
             </a:r>
             <a:endParaRPr lang="en-US" sz="938" dirty="0"/>
           </a:p>
@@ -27303,7 +27957,7 @@
       </p:sp>
       <p:sp>
         <p:nvSpPr>
-          <p:cNvPr id="59" name="Shape 57"/>
+          <p:cNvPr id="67" name="Shape 65"/>
           <p:cNvSpPr/>
           <p:nvPr/>
         </p:nvSpPr>
@@ -27326,7 +27980,7 @@
       </p:sp>
       <p:sp>
         <p:nvSpPr>
-          <p:cNvPr id="60" name="Text 58"/>
+          <p:cNvPr id="68" name="Text 66"/>
           <p:cNvSpPr txBox="1"/>
           <p:nvPr/>
         </p:nvSpPr>
@@ -27368,7 +28022,7 @@
       </p:sp>
       <p:sp>
         <p:nvSpPr>
-          <p:cNvPr id="61" name="Text 59"/>
+          <p:cNvPr id="69" name="Text 67"/>
           <p:cNvSpPr txBox="1"/>
           <p:nvPr/>
         </p:nvSpPr>
@@ -27402,7 +28056,7 @@
                 <a:ea typeface="Malgun Gothic" pitchFamily="34" charset="-122"/>
                 <a:cs typeface="Malgun Gothic" pitchFamily="34" charset="-120"/>
               </a:rPr>
-              <a:t>원인은 </a:t>
+              <a:t>보고 배울 것은 </a:t>
             </a:r>
             <a:pPr algn="l" indent="0" marL="0">
               <a:lnSpc>
@@ -27419,7 +28073,7 @@
                 <a:ea typeface="Malgun Gothic" pitchFamily="34" charset="-122"/>
                 <a:cs typeface="Malgun Gothic" pitchFamily="34" charset="-120"/>
               </a:rPr>
-              <a:t>온도</a:t>
+              <a:t>외기 온도 하나</a:t>
             </a:r>
             <a:pPr algn="l" indent="0" marL="0">
               <a:lnSpc>
@@ -27436,7 +28090,7 @@
                 <a:ea typeface="Malgun Gothic" pitchFamily="34" charset="-122"/>
                 <a:cs typeface="Malgun Gothic" pitchFamily="34" charset="-120"/>
               </a:rPr>
-              <a:t> 하나 — 그런데 그 관계가 </a:t>
+              <a:t> — 남은 것은 </a:t>
             </a:r>
             <a:pPr algn="l" indent="0" marL="0">
               <a:lnSpc>
@@ -27453,7 +28107,7 @@
                 <a:ea typeface="Malgun Gothic" pitchFamily="34" charset="-122"/>
                 <a:cs typeface="Malgun Gothic" pitchFamily="34" charset="-120"/>
               </a:rPr>
-              <a:t>직선이 아닙니다</a:t>
+              <a:t>어떻게 배울지</a:t>
             </a:r>
             <a:pPr algn="l" indent="0" marL="0">
               <a:lnSpc>
@@ -27470,7 +28124,7 @@
                 <a:ea typeface="Malgun Gothic" pitchFamily="34" charset="-122"/>
                 <a:cs typeface="Malgun Gothic" pitchFamily="34" charset="-120"/>
               </a:rPr>
-              <a:t>. 그래서 곡선을 학습합니다.</a:t>
+              <a:t>입니다.</a:t>
             </a:r>
             <a:endParaRPr lang="en-US" sz="1238" dirty="0"/>
           </a:p>
@@ -28135,7 +28789,7 @@
                 <a:ea typeface="Malgun Gothic" pitchFamily="34" charset="-122"/>
                 <a:cs typeface="Malgun Gothic" pitchFamily="34" charset="-120"/>
               </a:rPr>
-              <a:t>제작사 성능 곡선과 사내 검증을 거친 이론식입니다. 데이터가 쌓여도 바뀌지 않습니다.  — 진공도는 여기서 이미 반영합니다. 6장에서 기각한 것은 </a:t>
+              <a:t>제작사 성능 곡선과 사내 검증을 거친 이론식입니다. 데이터가 쌓여도 바뀌지 않습니다.  — 진공도는 여기서 이미 반영합니다. 6장에서 확인한 것은 </a:t>
             </a:r>
             <a:pPr algn="l" indent="0" marL="0">
               <a:lnSpc>
@@ -28169,7 +28823,7 @@
                 <a:ea typeface="Malgun Gothic" pitchFamily="34" charset="-122"/>
                 <a:cs typeface="Malgun Gothic" pitchFamily="34" charset="-120"/>
               </a:rPr>
-              <a:t> 를 진공도로 더 설명할 수 있느냐였습니다.</a:t>
+              <a:t> 를 진공도로 더 설명할 수 있느냐였고, 답은 아니오였습니다.</a:t>
             </a:r>
             <a:endParaRPr lang="en-US" sz="1125" dirty="0"/>
           </a:p>
